--- a/Palo_Alto_2581/000_PaloAlto_Shed.pptx
+++ b/Palo_Alto_2581/000_PaloAlto_Shed.pptx
@@ -7650,7 +7650,7 @@
         <p:spPr>
           <a:xfrm>
             <a:off x="3341511" y="4272847"/>
-            <a:ext cx="2889956" cy="0"/>
+            <a:ext cx="2968978" cy="0"/>
           </a:xfrm>
           <a:prstGeom prst="straightConnector1">
             <a:avLst/>
@@ -7731,7 +7731,7 @@
                   <a:schemeClr val="tx1"/>
                 </a:solidFill>
               </a:rPr>
-              <a:t>15’</a:t>
+              <a:t>17’</a:t>
             </a:r>
             <a:r>
               <a:rPr lang="en-US" dirty="0"/>
@@ -7796,7 +7796,7 @@
                   <a:schemeClr val="tx1"/>
                 </a:solidFill>
               </a:rPr>
-              <a:t>8’</a:t>
+              <a:t>6’</a:t>
             </a:r>
             <a:r>
               <a:rPr lang="en-US" dirty="0"/>
@@ -7821,8 +7821,8 @@
         </p:nvCxnSpPr>
         <p:spPr>
           <a:xfrm>
-            <a:off x="6287911" y="4278489"/>
-            <a:ext cx="1298222" cy="0"/>
+            <a:off x="6389511" y="4278489"/>
+            <a:ext cx="1196622" cy="0"/>
           </a:xfrm>
           <a:prstGeom prst="straightConnector1">
             <a:avLst/>
@@ -7847,52 +7847,6 @@
           </a:fontRef>
         </p:style>
       </p:cxnSp>
-      <p:sp>
-        <p:nvSpPr>
-          <p:cNvPr id="101" name="Rectangle 100">
-            <a:extLst>
-              <a:ext uri="{FF2B5EF4-FFF2-40B4-BE49-F238E27FC236}">
-                <a16:creationId xmlns:a16="http://schemas.microsoft.com/office/drawing/2014/main" id="{CE065B15-7E46-83CC-B33E-6742705BD935}"/>
-              </a:ext>
-            </a:extLst>
-          </p:cNvPr>
-          <p:cNvSpPr/>
-          <p:nvPr/>
-        </p:nvSpPr>
-        <p:spPr>
-          <a:xfrm>
-            <a:off x="6338711" y="2415823"/>
-            <a:ext cx="615244" cy="1388533"/>
-          </a:xfrm>
-          <a:prstGeom prst="rect">
-            <a:avLst/>
-          </a:prstGeom>
-        </p:spPr>
-        <p:style>
-          <a:lnRef idx="2">
-            <a:schemeClr val="accent1">
-              <a:shade val="15000"/>
-            </a:schemeClr>
-          </a:lnRef>
-          <a:fillRef idx="1">
-            <a:schemeClr val="accent1"/>
-          </a:fillRef>
-          <a:effectRef idx="0">
-            <a:schemeClr val="accent1"/>
-          </a:effectRef>
-          <a:fontRef idx="minor">
-            <a:schemeClr val="lt1"/>
-          </a:fontRef>
-        </p:style>
-        <p:txBody>
-          <a:bodyPr rtlCol="0" anchor="ctr"/>
-          <a:lstStyle/>
-          <a:p>
-            <a:pPr algn="ctr"/>
-            <a:endParaRPr lang="en-US" dirty="0"/>
-          </a:p>
-        </p:txBody>
-      </p:sp>
       <p:sp>
         <p:nvSpPr>
           <p:cNvPr id="106" name="Rectangle 105">
@@ -8310,52 +8264,12 @@
           </a:fontRef>
         </p:style>
       </p:cxnSp>
-      <p:cxnSp>
-        <p:nvCxnSpPr>
-          <p:cNvPr id="116" name="Straight Arrow Connector 115">
+      <p:sp>
+        <p:nvSpPr>
+          <p:cNvPr id="118" name="Rectangle 117">
             <a:extLst>
               <a:ext uri="{FF2B5EF4-FFF2-40B4-BE49-F238E27FC236}">
-                <a16:creationId xmlns:a16="http://schemas.microsoft.com/office/drawing/2014/main" id="{C1719DE5-9756-C137-4DA0-646D713B5ECE}"/>
-              </a:ext>
-            </a:extLst>
-          </p:cNvPr>
-          <p:cNvCxnSpPr/>
-          <p:nvPr/>
-        </p:nvCxnSpPr>
-        <p:spPr>
-          <a:xfrm>
-            <a:off x="6383867" y="3900310"/>
-            <a:ext cx="575733" cy="0"/>
-          </a:xfrm>
-          <a:prstGeom prst="straightConnector1">
-            <a:avLst/>
-          </a:prstGeom>
-          <a:ln>
-            <a:headEnd type="triangle"/>
-            <a:tailEnd type="triangle"/>
-          </a:ln>
-        </p:spPr>
-        <p:style>
-          <a:lnRef idx="1">
-            <a:schemeClr val="accent1"/>
-          </a:lnRef>
-          <a:fillRef idx="0">
-            <a:schemeClr val="accent1"/>
-          </a:fillRef>
-          <a:effectRef idx="0">
-            <a:schemeClr val="accent1"/>
-          </a:effectRef>
-          <a:fontRef idx="minor">
-            <a:schemeClr val="tx1"/>
-          </a:fontRef>
-        </p:style>
-      </p:cxnSp>
-      <p:sp>
-        <p:nvSpPr>
-          <p:cNvPr id="117" name="Rectangle 116">
-            <a:extLst>
-              <a:ext uri="{FF2B5EF4-FFF2-40B4-BE49-F238E27FC236}">
-                <a16:creationId xmlns:a16="http://schemas.microsoft.com/office/drawing/2014/main" id="{B4240F53-B59B-7D62-5907-9B6DBA380F82}"/>
+                <a16:creationId xmlns:a16="http://schemas.microsoft.com/office/drawing/2014/main" id="{76411BCA-C774-3587-A016-32042103CE8B}"/>
               </a:ext>
             </a:extLst>
           </p:cNvPr>
@@ -8364,16 +8278,12 @@
         </p:nvSpPr>
         <p:spPr>
           <a:xfrm>
-            <a:off x="6344359" y="3855155"/>
-            <a:ext cx="716842" cy="310444"/>
-          </a:xfrm>
-          <a:prstGeom prst="rect">
-            <a:avLst/>
-          </a:prstGeom>
-          <a:noFill/>
-          <a:ln>
-            <a:noFill/>
-          </a:ln>
+            <a:off x="6423379" y="2415822"/>
+            <a:ext cx="1241778" cy="711200"/>
+          </a:xfrm>
+          <a:prstGeom prst="rect">
+            <a:avLst/>
+          </a:prstGeom>
         </p:spPr>
         <p:style>
           <a:lnRef idx="2">
@@ -8396,31 +8306,16 @@
           <a:lstStyle/>
           <a:p>
             <a:pPr algn="ctr"/>
-            <a:r>
-              <a:rPr lang="en-US" dirty="0"/>
-              <a:t>2</a:t>
-            </a:r>
-            <a:r>
-              <a:rPr lang="en-US" dirty="0">
-                <a:solidFill>
-                  <a:schemeClr val="tx1"/>
-                </a:solidFill>
-              </a:rPr>
-              <a:t>4’</a:t>
-            </a:r>
-            <a:r>
-              <a:rPr lang="en-US" dirty="0"/>
-              <a:t>’</a:t>
-            </a:r>
-          </a:p>
-        </p:txBody>
-      </p:sp>
-      <p:sp>
-        <p:nvSpPr>
-          <p:cNvPr id="118" name="Rectangle 117">
+            <a:endParaRPr lang="en-US" dirty="0"/>
+          </a:p>
+        </p:txBody>
+      </p:sp>
+      <p:sp>
+        <p:nvSpPr>
+          <p:cNvPr id="119" name="Rectangle 118">
             <a:extLst>
               <a:ext uri="{FF2B5EF4-FFF2-40B4-BE49-F238E27FC236}">
-                <a16:creationId xmlns:a16="http://schemas.microsoft.com/office/drawing/2014/main" id="{76411BCA-C774-3587-A016-32042103CE8B}"/>
+                <a16:creationId xmlns:a16="http://schemas.microsoft.com/office/drawing/2014/main" id="{94184EB5-739B-6A4F-D6E4-DABD23E4B4C0}"/>
               </a:ext>
             </a:extLst>
           </p:cNvPr>
@@ -8429,8 +8324,8 @@
         </p:nvSpPr>
         <p:spPr>
           <a:xfrm>
-            <a:off x="6965243" y="2415822"/>
-            <a:ext cx="699913" cy="711200"/>
+            <a:off x="6423379" y="3143955"/>
+            <a:ext cx="1236134" cy="660401"/>
           </a:xfrm>
           <a:prstGeom prst="rect">
             <a:avLst/>
@@ -8463,10 +8358,10 @@
       </p:sp>
       <p:sp>
         <p:nvSpPr>
-          <p:cNvPr id="119" name="Rectangle 118">
+          <p:cNvPr id="120" name="Rectangle 119">
             <a:extLst>
               <a:ext uri="{FF2B5EF4-FFF2-40B4-BE49-F238E27FC236}">
-                <a16:creationId xmlns:a16="http://schemas.microsoft.com/office/drawing/2014/main" id="{94184EB5-739B-6A4F-D6E4-DABD23E4B4C0}"/>
+                <a16:creationId xmlns:a16="http://schemas.microsoft.com/office/drawing/2014/main" id="{9DAE32CC-4412-FDAE-82A7-1273F94FD0EA}"/>
               </a:ext>
             </a:extLst>
           </p:cNvPr>
@@ -8475,12 +8370,13 @@
         </p:nvSpPr>
         <p:spPr>
           <a:xfrm>
-            <a:off x="6959599" y="3143955"/>
-            <a:ext cx="699913" cy="660401"/>
-          </a:xfrm>
-          <a:prstGeom prst="rect">
-            <a:avLst/>
-          </a:prstGeom>
+            <a:off x="3352801" y="1964266"/>
+            <a:ext cx="4921956" cy="2167467"/>
+          </a:xfrm>
+          <a:prstGeom prst="rect">
+            <a:avLst/>
+          </a:prstGeom>
+          <a:noFill/>
         </p:spPr>
         <p:style>
           <a:lnRef idx="2">
@@ -8503,16 +8399,58 @@
           <a:lstStyle/>
           <a:p>
             <a:pPr algn="ctr"/>
-            <a:endParaRPr lang="en-US" dirty="0"/>
-          </a:p>
-        </p:txBody>
-      </p:sp>
-      <p:sp>
-        <p:nvSpPr>
-          <p:cNvPr id="120" name="Rectangle 119">
+            <a:endParaRPr lang="en-US"/>
+          </a:p>
+        </p:txBody>
+      </p:sp>
+      <p:cxnSp>
+        <p:nvCxnSpPr>
+          <p:cNvPr id="121" name="Straight Arrow Connector 120">
             <a:extLst>
               <a:ext uri="{FF2B5EF4-FFF2-40B4-BE49-F238E27FC236}">
-                <a16:creationId xmlns:a16="http://schemas.microsoft.com/office/drawing/2014/main" id="{9DAE32CC-4412-FDAE-82A7-1273F94FD0EA}"/>
+                <a16:creationId xmlns:a16="http://schemas.microsoft.com/office/drawing/2014/main" id="{F70C7334-7C96-5838-2965-04F683316456}"/>
+              </a:ext>
+            </a:extLst>
+          </p:cNvPr>
+          <p:cNvCxnSpPr>
+            <a:cxnSpLocks/>
+          </p:cNvCxnSpPr>
+          <p:nvPr/>
+        </p:nvCxnSpPr>
+        <p:spPr>
+          <a:xfrm>
+            <a:off x="7761114" y="2370667"/>
+            <a:ext cx="0" cy="711200"/>
+          </a:xfrm>
+          <a:prstGeom prst="straightConnector1">
+            <a:avLst/>
+          </a:prstGeom>
+          <a:ln>
+            <a:headEnd type="triangle"/>
+            <a:tailEnd type="triangle"/>
+          </a:ln>
+        </p:spPr>
+        <p:style>
+          <a:lnRef idx="1">
+            <a:schemeClr val="accent1"/>
+          </a:lnRef>
+          <a:fillRef idx="0">
+            <a:schemeClr val="accent1"/>
+          </a:fillRef>
+          <a:effectRef idx="0">
+            <a:schemeClr val="accent1"/>
+          </a:effectRef>
+          <a:fontRef idx="minor">
+            <a:schemeClr val="tx1"/>
+          </a:fontRef>
+        </p:style>
+      </p:cxnSp>
+      <p:sp>
+        <p:nvSpPr>
+          <p:cNvPr id="122" name="Rectangle 121">
+            <a:extLst>
+              <a:ext uri="{FF2B5EF4-FFF2-40B4-BE49-F238E27FC236}">
+                <a16:creationId xmlns:a16="http://schemas.microsoft.com/office/drawing/2014/main" id="{FEB644D4-1B7D-9594-5182-848C80D93C57}"/>
               </a:ext>
             </a:extLst>
           </p:cNvPr>
@@ -8521,13 +8459,16 @@
         </p:nvSpPr>
         <p:spPr>
           <a:xfrm>
-            <a:off x="3352801" y="1964266"/>
-            <a:ext cx="4921956" cy="2167467"/>
-          </a:xfrm>
-          <a:prstGeom prst="rect">
-            <a:avLst/>
-          </a:prstGeom>
-          <a:noFill/>
+            <a:off x="7603073" y="2607731"/>
+            <a:ext cx="716842" cy="310444"/>
+          </a:xfrm>
+          <a:prstGeom prst="rect">
+            <a:avLst/>
+          </a:prstGeom>
+          <a:noFill/>
+          <a:ln>
+            <a:noFill/>
+          </a:ln>
         </p:spPr>
         <p:style>
           <a:lnRef idx="2">
@@ -8550,16 +8491,27 @@
           <a:lstStyle/>
           <a:p>
             <a:pPr algn="ctr"/>
-            <a:endParaRPr lang="en-US"/>
+            <a:r>
+              <a:rPr lang="en-US" dirty="0">
+                <a:solidFill>
+                  <a:schemeClr val="tx1"/>
+                </a:solidFill>
+              </a:rPr>
+              <a:t>5’</a:t>
+            </a:r>
+            <a:r>
+              <a:rPr lang="en-US" dirty="0"/>
+              <a:t>’</a:t>
+            </a:r>
           </a:p>
         </p:txBody>
       </p:sp>
       <p:cxnSp>
         <p:nvCxnSpPr>
-          <p:cNvPr id="121" name="Straight Arrow Connector 120">
+          <p:cNvPr id="125" name="Straight Arrow Connector 124">
             <a:extLst>
               <a:ext uri="{FF2B5EF4-FFF2-40B4-BE49-F238E27FC236}">
-                <a16:creationId xmlns:a16="http://schemas.microsoft.com/office/drawing/2014/main" id="{F70C7334-7C96-5838-2965-04F683316456}"/>
+                <a16:creationId xmlns:a16="http://schemas.microsoft.com/office/drawing/2014/main" id="{A50EBD1F-6421-94B0-9A04-1C6E0CA337C8}"/>
               </a:ext>
             </a:extLst>
           </p:cNvPr>
@@ -8570,8 +8522,8 @@
         </p:nvCxnSpPr>
         <p:spPr>
           <a:xfrm>
-            <a:off x="7761114" y="2370667"/>
-            <a:ext cx="0" cy="711200"/>
+            <a:off x="7766757" y="3110088"/>
+            <a:ext cx="0" cy="716845"/>
           </a:xfrm>
           <a:prstGeom prst="straightConnector1">
             <a:avLst/>
@@ -8598,10 +8550,10 @@
       </p:cxnSp>
       <p:sp>
         <p:nvSpPr>
-          <p:cNvPr id="122" name="Rectangle 121">
+          <p:cNvPr id="126" name="Rectangle 125">
             <a:extLst>
               <a:ext uri="{FF2B5EF4-FFF2-40B4-BE49-F238E27FC236}">
-                <a16:creationId xmlns:a16="http://schemas.microsoft.com/office/drawing/2014/main" id="{FEB644D4-1B7D-9594-5182-848C80D93C57}"/>
+                <a16:creationId xmlns:a16="http://schemas.microsoft.com/office/drawing/2014/main" id="{84D37148-89FC-C602-4EA8-581A41BD46A7}"/>
               </a:ext>
             </a:extLst>
           </p:cNvPr>
@@ -8610,7 +8562,7 @@
         </p:nvSpPr>
         <p:spPr>
           <a:xfrm>
-            <a:off x="7433740" y="2596442"/>
+            <a:off x="7608716" y="3313286"/>
             <a:ext cx="716842" cy="310444"/>
           </a:xfrm>
           <a:prstGeom prst="rect">
@@ -8659,10 +8611,10 @@
       </p:sp>
       <p:cxnSp>
         <p:nvCxnSpPr>
-          <p:cNvPr id="125" name="Straight Arrow Connector 124">
+          <p:cNvPr id="131" name="Straight Arrow Connector 130">
             <a:extLst>
               <a:ext uri="{FF2B5EF4-FFF2-40B4-BE49-F238E27FC236}">
-                <a16:creationId xmlns:a16="http://schemas.microsoft.com/office/drawing/2014/main" id="{A50EBD1F-6421-94B0-9A04-1C6E0CA337C8}"/>
+                <a16:creationId xmlns:a16="http://schemas.microsoft.com/office/drawing/2014/main" id="{9BBDCC15-1516-53BB-2F35-26C34FD21618}"/>
               </a:ext>
             </a:extLst>
           </p:cNvPr>
@@ -8673,8 +8625,8 @@
         </p:nvCxnSpPr>
         <p:spPr>
           <a:xfrm>
-            <a:off x="7766757" y="3110088"/>
-            <a:ext cx="0" cy="716845"/>
+            <a:off x="6457244" y="3894663"/>
+            <a:ext cx="1241778" cy="0"/>
           </a:xfrm>
           <a:prstGeom prst="straightConnector1">
             <a:avLst/>
@@ -8701,10 +8653,10 @@
       </p:cxnSp>
       <p:sp>
         <p:nvSpPr>
-          <p:cNvPr id="126" name="Rectangle 125">
+          <p:cNvPr id="132" name="Rectangle 131">
             <a:extLst>
               <a:ext uri="{FF2B5EF4-FFF2-40B4-BE49-F238E27FC236}">
-                <a16:creationId xmlns:a16="http://schemas.microsoft.com/office/drawing/2014/main" id="{84D37148-89FC-C602-4EA8-581A41BD46A7}"/>
+                <a16:creationId xmlns:a16="http://schemas.microsoft.com/office/drawing/2014/main" id="{2011628A-1D2B-BB27-D499-226680F9598D}"/>
               </a:ext>
             </a:extLst>
           </p:cNvPr>
@@ -8713,7 +8665,7 @@
         </p:nvSpPr>
         <p:spPr>
           <a:xfrm>
-            <a:off x="7484539" y="3324574"/>
+            <a:off x="6937025" y="3860797"/>
             <a:ext cx="716842" cy="310444"/>
           </a:xfrm>
           <a:prstGeom prst="rect">
@@ -8746,109 +8698,6 @@
           <a:p>
             <a:pPr algn="ctr"/>
             <a:r>
-              <a:rPr lang="en-US" dirty="0">
-                <a:solidFill>
-                  <a:schemeClr val="tx1"/>
-                </a:solidFill>
-              </a:rPr>
-              <a:t>5’</a:t>
-            </a:r>
-            <a:r>
-              <a:rPr lang="en-US" dirty="0"/>
-              <a:t>’</a:t>
-            </a:r>
-          </a:p>
-        </p:txBody>
-      </p:sp>
-      <p:cxnSp>
-        <p:nvCxnSpPr>
-          <p:cNvPr id="131" name="Straight Arrow Connector 130">
-            <a:extLst>
-              <a:ext uri="{FF2B5EF4-FFF2-40B4-BE49-F238E27FC236}">
-                <a16:creationId xmlns:a16="http://schemas.microsoft.com/office/drawing/2014/main" id="{9BBDCC15-1516-53BB-2F35-26C34FD21618}"/>
-              </a:ext>
-            </a:extLst>
-          </p:cNvPr>
-          <p:cNvCxnSpPr>
-            <a:cxnSpLocks/>
-          </p:cNvCxnSpPr>
-          <p:nvPr/>
-        </p:nvCxnSpPr>
-        <p:spPr>
-          <a:xfrm>
-            <a:off x="6976533" y="3894663"/>
-            <a:ext cx="722489" cy="0"/>
-          </a:xfrm>
-          <a:prstGeom prst="straightConnector1">
-            <a:avLst/>
-          </a:prstGeom>
-          <a:ln>
-            <a:headEnd type="triangle"/>
-            <a:tailEnd type="triangle"/>
-          </a:ln>
-        </p:spPr>
-        <p:style>
-          <a:lnRef idx="1">
-            <a:schemeClr val="accent1"/>
-          </a:lnRef>
-          <a:fillRef idx="0">
-            <a:schemeClr val="accent1"/>
-          </a:fillRef>
-          <a:effectRef idx="0">
-            <a:schemeClr val="accent1"/>
-          </a:effectRef>
-          <a:fontRef idx="minor">
-            <a:schemeClr val="tx1"/>
-          </a:fontRef>
-        </p:style>
-      </p:cxnSp>
-      <p:sp>
-        <p:nvSpPr>
-          <p:cNvPr id="132" name="Rectangle 131">
-            <a:extLst>
-              <a:ext uri="{FF2B5EF4-FFF2-40B4-BE49-F238E27FC236}">
-                <a16:creationId xmlns:a16="http://schemas.microsoft.com/office/drawing/2014/main" id="{2011628A-1D2B-BB27-D499-226680F9598D}"/>
-              </a:ext>
-            </a:extLst>
-          </p:cNvPr>
-          <p:cNvSpPr/>
-          <p:nvPr/>
-        </p:nvSpPr>
-        <p:spPr>
-          <a:xfrm>
-            <a:off x="6937025" y="3860797"/>
-            <a:ext cx="716842" cy="310444"/>
-          </a:xfrm>
-          <a:prstGeom prst="rect">
-            <a:avLst/>
-          </a:prstGeom>
-          <a:noFill/>
-          <a:ln>
-            <a:noFill/>
-          </a:ln>
-        </p:spPr>
-        <p:style>
-          <a:lnRef idx="2">
-            <a:schemeClr val="accent1">
-              <a:shade val="15000"/>
-            </a:schemeClr>
-          </a:lnRef>
-          <a:fillRef idx="1">
-            <a:schemeClr val="accent1"/>
-          </a:fillRef>
-          <a:effectRef idx="0">
-            <a:schemeClr val="accent1"/>
-          </a:effectRef>
-          <a:fontRef idx="minor">
-            <a:schemeClr val="lt1"/>
-          </a:fontRef>
-        </p:style>
-        <p:txBody>
-          <a:bodyPr rtlCol="0" anchor="ctr"/>
-          <a:lstStyle/>
-          <a:p>
-            <a:pPr algn="ctr"/>
-            <a:r>
               <a:rPr lang="en-US" dirty="0"/>
               <a:t>2</a:t>
             </a:r>
@@ -8858,7 +8707,7 @@
                   <a:schemeClr val="tx1"/>
                 </a:solidFill>
               </a:rPr>
-              <a:t>4’</a:t>
+              <a:t>6’</a:t>
             </a:r>
             <a:r>
               <a:rPr lang="en-US" dirty="0"/>

--- a/Palo_Alto_2581/000_PaloAlto_Shed.pptx
+++ b/Palo_Alto_2581/000_PaloAlto_Shed.pptx
@@ -8278,8 +8278,8 @@
         </p:nvSpPr>
         <p:spPr>
           <a:xfrm>
-            <a:off x="6423379" y="2415822"/>
-            <a:ext cx="1241778" cy="711200"/>
+            <a:off x="6412090" y="2404534"/>
+            <a:ext cx="620888" cy="711200"/>
           </a:xfrm>
           <a:prstGeom prst="rect">
             <a:avLst/>
@@ -8324,8 +8324,8 @@
         </p:nvSpPr>
         <p:spPr>
           <a:xfrm>
-            <a:off x="6423379" y="3143955"/>
-            <a:ext cx="1236134" cy="660401"/>
+            <a:off x="6423378" y="3138311"/>
+            <a:ext cx="1264355" cy="666045"/>
           </a:xfrm>
           <a:prstGeom prst="rect">
             <a:avLst/>
@@ -8562,7 +8562,7 @@
         </p:nvSpPr>
         <p:spPr>
           <a:xfrm>
-            <a:off x="7608716" y="3313286"/>
+            <a:off x="7484539" y="3324574"/>
             <a:ext cx="716842" cy="310444"/>
           </a:xfrm>
           <a:prstGeom prst="rect">
@@ -8665,7 +8665,7 @@
         </p:nvSpPr>
         <p:spPr>
           <a:xfrm>
-            <a:off x="6937025" y="3860797"/>
+            <a:off x="6666092" y="3849508"/>
             <a:ext cx="716842" cy="310444"/>
           </a:xfrm>
           <a:prstGeom prst="rect">
@@ -8830,6 +8830,339 @@
           </a:p>
         </p:txBody>
       </p:sp>
+      <p:sp>
+        <p:nvSpPr>
+          <p:cNvPr id="142" name="Rectangle 141">
+            <a:extLst>
+              <a:ext uri="{FF2B5EF4-FFF2-40B4-BE49-F238E27FC236}">
+                <a16:creationId xmlns:a16="http://schemas.microsoft.com/office/drawing/2014/main" id="{63CF27F1-8EFB-BF63-C85C-C8A30DE9B3FB}"/>
+              </a:ext>
+            </a:extLst>
+          </p:cNvPr>
+          <p:cNvSpPr/>
+          <p:nvPr/>
+        </p:nvSpPr>
+        <p:spPr>
+          <a:xfrm>
+            <a:off x="6677381" y="3341503"/>
+            <a:ext cx="716842" cy="310444"/>
+          </a:xfrm>
+          <a:prstGeom prst="rect">
+            <a:avLst/>
+          </a:prstGeom>
+          <a:noFill/>
+          <a:ln>
+            <a:noFill/>
+          </a:ln>
+        </p:spPr>
+        <p:style>
+          <a:lnRef idx="2">
+            <a:schemeClr val="accent1">
+              <a:shade val="15000"/>
+            </a:schemeClr>
+          </a:lnRef>
+          <a:fillRef idx="1">
+            <a:schemeClr val="accent1"/>
+          </a:fillRef>
+          <a:effectRef idx="0">
+            <a:schemeClr val="accent1"/>
+          </a:effectRef>
+          <a:fontRef idx="minor">
+            <a:schemeClr val="lt1"/>
+          </a:fontRef>
+        </p:style>
+        <p:txBody>
+          <a:bodyPr rtlCol="0" anchor="ctr"/>
+          <a:lstStyle/>
+          <a:p>
+            <a:pPr algn="ctr"/>
+            <a:r>
+              <a:rPr lang="en-US" dirty="0">
+                <a:solidFill>
+                  <a:schemeClr val="tx1"/>
+                </a:solidFill>
+              </a:rPr>
+              <a:t>2581</a:t>
+            </a:r>
+            <a:endParaRPr lang="en-US" dirty="0"/>
+          </a:p>
+        </p:txBody>
+      </p:sp>
+      <p:sp>
+        <p:nvSpPr>
+          <p:cNvPr id="143" name="Rectangle 142">
+            <a:extLst>
+              <a:ext uri="{FF2B5EF4-FFF2-40B4-BE49-F238E27FC236}">
+                <a16:creationId xmlns:a16="http://schemas.microsoft.com/office/drawing/2014/main" id="{A6F06832-B5C7-2B8C-D9C1-2FF1BA64FC17}"/>
+              </a:ext>
+            </a:extLst>
+          </p:cNvPr>
+          <p:cNvSpPr/>
+          <p:nvPr/>
+        </p:nvSpPr>
+        <p:spPr>
+          <a:xfrm>
+            <a:off x="6310494" y="2658529"/>
+            <a:ext cx="716842" cy="310444"/>
+          </a:xfrm>
+          <a:prstGeom prst="rect">
+            <a:avLst/>
+          </a:prstGeom>
+          <a:noFill/>
+          <a:ln>
+            <a:noFill/>
+          </a:ln>
+        </p:spPr>
+        <p:style>
+          <a:lnRef idx="2">
+            <a:schemeClr val="accent1">
+              <a:shade val="15000"/>
+            </a:schemeClr>
+          </a:lnRef>
+          <a:fillRef idx="1">
+            <a:schemeClr val="accent1"/>
+          </a:fillRef>
+          <a:effectRef idx="0">
+            <a:schemeClr val="accent1"/>
+          </a:effectRef>
+          <a:fontRef idx="minor">
+            <a:schemeClr val="lt1"/>
+          </a:fontRef>
+        </p:style>
+        <p:txBody>
+          <a:bodyPr rtlCol="0" anchor="ctr"/>
+          <a:lstStyle/>
+          <a:p>
+            <a:pPr algn="ctr"/>
+            <a:r>
+              <a:rPr lang="en-US" dirty="0">
+                <a:solidFill>
+                  <a:schemeClr val="tx1"/>
+                </a:solidFill>
+              </a:rPr>
+              <a:t>2583</a:t>
+            </a:r>
+            <a:endParaRPr lang="en-US" dirty="0"/>
+          </a:p>
+        </p:txBody>
+      </p:sp>
+      <p:sp>
+        <p:nvSpPr>
+          <p:cNvPr id="144" name="Rectangle 143">
+            <a:extLst>
+              <a:ext uri="{FF2B5EF4-FFF2-40B4-BE49-F238E27FC236}">
+                <a16:creationId xmlns:a16="http://schemas.microsoft.com/office/drawing/2014/main" id="{00D75067-3D2D-3D98-AA6F-F78F902A12E1}"/>
+              </a:ext>
+            </a:extLst>
+          </p:cNvPr>
+          <p:cNvSpPr/>
+          <p:nvPr/>
+        </p:nvSpPr>
+        <p:spPr>
+          <a:xfrm>
+            <a:off x="7061201" y="2421466"/>
+            <a:ext cx="620888" cy="711200"/>
+          </a:xfrm>
+          <a:prstGeom prst="rect">
+            <a:avLst/>
+          </a:prstGeom>
+        </p:spPr>
+        <p:style>
+          <a:lnRef idx="2">
+            <a:schemeClr val="accent1">
+              <a:shade val="15000"/>
+            </a:schemeClr>
+          </a:lnRef>
+          <a:fillRef idx="1">
+            <a:schemeClr val="accent1"/>
+          </a:fillRef>
+          <a:effectRef idx="0">
+            <a:schemeClr val="accent1"/>
+          </a:effectRef>
+          <a:fontRef idx="minor">
+            <a:schemeClr val="lt1"/>
+          </a:fontRef>
+        </p:style>
+        <p:txBody>
+          <a:bodyPr rtlCol="0" anchor="ctr"/>
+          <a:lstStyle/>
+          <a:p>
+            <a:pPr algn="ctr"/>
+            <a:endParaRPr lang="en-US" dirty="0"/>
+          </a:p>
+        </p:txBody>
+      </p:sp>
+      <p:sp>
+        <p:nvSpPr>
+          <p:cNvPr id="145" name="Rectangle 144">
+            <a:extLst>
+              <a:ext uri="{FF2B5EF4-FFF2-40B4-BE49-F238E27FC236}">
+                <a16:creationId xmlns:a16="http://schemas.microsoft.com/office/drawing/2014/main" id="{9A957388-4A00-3C26-60A3-444061CAD976}"/>
+              </a:ext>
+            </a:extLst>
+          </p:cNvPr>
+          <p:cNvSpPr/>
+          <p:nvPr/>
+        </p:nvSpPr>
+        <p:spPr>
+          <a:xfrm>
+            <a:off x="7061205" y="2619018"/>
+            <a:ext cx="716842" cy="310444"/>
+          </a:xfrm>
+          <a:prstGeom prst="rect">
+            <a:avLst/>
+          </a:prstGeom>
+          <a:noFill/>
+          <a:ln>
+            <a:noFill/>
+          </a:ln>
+        </p:spPr>
+        <p:style>
+          <a:lnRef idx="2">
+            <a:schemeClr val="accent1">
+              <a:shade val="15000"/>
+            </a:schemeClr>
+          </a:lnRef>
+          <a:fillRef idx="1">
+            <a:schemeClr val="accent1"/>
+          </a:fillRef>
+          <a:effectRef idx="0">
+            <a:schemeClr val="accent1"/>
+          </a:effectRef>
+          <a:fontRef idx="minor">
+            <a:schemeClr val="lt1"/>
+          </a:fontRef>
+        </p:style>
+        <p:txBody>
+          <a:bodyPr rtlCol="0" anchor="ctr"/>
+          <a:lstStyle/>
+          <a:p>
+            <a:pPr algn="ctr"/>
+            <a:r>
+              <a:rPr lang="en-US" dirty="0">
+                <a:solidFill>
+                  <a:schemeClr val="tx1"/>
+                </a:solidFill>
+              </a:rPr>
+              <a:t>2585</a:t>
+            </a:r>
+            <a:endParaRPr lang="en-US" dirty="0"/>
+          </a:p>
+        </p:txBody>
+      </p:sp>
+      <p:cxnSp>
+        <p:nvCxnSpPr>
+          <p:cNvPr id="147" name="Straight Connector 146">
+            <a:extLst>
+              <a:ext uri="{FF2B5EF4-FFF2-40B4-BE49-F238E27FC236}">
+                <a16:creationId xmlns:a16="http://schemas.microsoft.com/office/drawing/2014/main" id="{3E310E01-C5FA-0CE2-4BE6-8155F3ED9AA6}"/>
+              </a:ext>
+            </a:extLst>
+          </p:cNvPr>
+          <p:cNvCxnSpPr>
+            <a:cxnSpLocks/>
+          </p:cNvCxnSpPr>
+          <p:nvPr/>
+        </p:nvCxnSpPr>
+        <p:spPr>
+          <a:xfrm flipV="1">
+            <a:off x="6570133" y="2178756"/>
+            <a:ext cx="395111" cy="237066"/>
+          </a:xfrm>
+          <a:prstGeom prst="line">
+            <a:avLst/>
+          </a:prstGeom>
+        </p:spPr>
+        <p:style>
+          <a:lnRef idx="1">
+            <a:schemeClr val="accent1"/>
+          </a:lnRef>
+          <a:fillRef idx="0">
+            <a:schemeClr val="accent1"/>
+          </a:fillRef>
+          <a:effectRef idx="0">
+            <a:schemeClr val="accent1"/>
+          </a:effectRef>
+          <a:fontRef idx="minor">
+            <a:schemeClr val="tx1"/>
+          </a:fontRef>
+        </p:style>
+      </p:cxnSp>
+      <p:cxnSp>
+        <p:nvCxnSpPr>
+          <p:cNvPr id="149" name="Straight Connector 148">
+            <a:extLst>
+              <a:ext uri="{FF2B5EF4-FFF2-40B4-BE49-F238E27FC236}">
+                <a16:creationId xmlns:a16="http://schemas.microsoft.com/office/drawing/2014/main" id="{33819469-2C83-1947-15A3-4AD80758B68D}"/>
+              </a:ext>
+            </a:extLst>
+          </p:cNvPr>
+          <p:cNvCxnSpPr/>
+          <p:nvPr/>
+        </p:nvCxnSpPr>
+        <p:spPr>
+          <a:xfrm flipH="1" flipV="1">
+            <a:off x="7202311" y="2212622"/>
+            <a:ext cx="395111" cy="180622"/>
+          </a:xfrm>
+          <a:prstGeom prst="line">
+            <a:avLst/>
+          </a:prstGeom>
+        </p:spPr>
+        <p:style>
+          <a:lnRef idx="1">
+            <a:schemeClr val="accent1"/>
+          </a:lnRef>
+          <a:fillRef idx="0">
+            <a:schemeClr val="accent1"/>
+          </a:fillRef>
+          <a:effectRef idx="0">
+            <a:schemeClr val="accent1"/>
+          </a:effectRef>
+          <a:fontRef idx="minor">
+            <a:schemeClr val="tx1"/>
+          </a:fontRef>
+        </p:style>
+      </p:cxnSp>
+      <p:cxnSp>
+        <p:nvCxnSpPr>
+          <p:cNvPr id="151" name="Straight Connector 150">
+            <a:extLst>
+              <a:ext uri="{FF2B5EF4-FFF2-40B4-BE49-F238E27FC236}">
+                <a16:creationId xmlns:a16="http://schemas.microsoft.com/office/drawing/2014/main" id="{BD757474-840D-AB5C-04C1-2EF95D689D3F}"/>
+              </a:ext>
+            </a:extLst>
+          </p:cNvPr>
+          <p:cNvCxnSpPr>
+            <a:cxnSpLocks/>
+            <a:endCxn id="132" idx="3"/>
+          </p:cNvCxnSpPr>
+          <p:nvPr/>
+        </p:nvCxnSpPr>
+        <p:spPr>
+          <a:xfrm>
+            <a:off x="6897511" y="3804356"/>
+            <a:ext cx="485423" cy="200374"/>
+          </a:xfrm>
+          <a:prstGeom prst="line">
+            <a:avLst/>
+          </a:prstGeom>
+        </p:spPr>
+        <p:style>
+          <a:lnRef idx="1">
+            <a:schemeClr val="accent1"/>
+          </a:lnRef>
+          <a:fillRef idx="0">
+            <a:schemeClr val="accent1"/>
+          </a:fillRef>
+          <a:effectRef idx="0">
+            <a:schemeClr val="accent1"/>
+          </a:effectRef>
+          <a:fontRef idx="minor">
+            <a:schemeClr val="tx1"/>
+          </a:fontRef>
+        </p:style>
+      </p:cxnSp>
     </p:spTree>
   </p:cSld>
   <p:clrMapOvr>

--- a/Palo_Alto_2581/000_PaloAlto_Shed.pptx
+++ b/Palo_Alto_2581/000_PaloAlto_Shed.pptx
@@ -8731,7 +8731,7 @@
         <p:spPr>
           <a:xfrm>
             <a:off x="3296357" y="4972756"/>
-            <a:ext cx="4944532" cy="1619955"/>
+            <a:ext cx="4380087" cy="1619955"/>
           </a:xfrm>
           <a:prstGeom prst="rect">
             <a:avLst/>

--- a/Palo_Alto_2581/000_PaloAlto_Shed.pptx
+++ b/Palo_Alto_2581/000_PaloAlto_Shed.pptx
@@ -7026,8 +7026,8 @@
         </p:nvSpPr>
         <p:spPr>
           <a:xfrm>
-            <a:off x="232200" y="1302120"/>
-            <a:ext cx="2739600" cy="297720"/>
+            <a:off x="232199" y="1302119"/>
+            <a:ext cx="2273933" cy="1587837"/>
           </a:xfrm>
           <a:prstGeom prst="rect">
             <a:avLst/>
@@ -7059,7 +7059,7 @@
               <a:buChar char=""/>
             </a:pPr>
             <a:r>
-              <a:rPr lang="en-US" sz="1300" b="1" strike="noStrike" spc="-1">
+              <a:rPr lang="en-US" sz="1300" b="1" strike="noStrike" spc="-1" dirty="0">
                 <a:solidFill>
                   <a:srgbClr val="000000"/>
                 </a:solidFill>
@@ -7068,7 +7068,7 @@
               </a:rPr>
               <a:t>Palo Alto 2581 to 2587</a:t>
             </a:r>
-            <a:endParaRPr lang="en-US" sz="1300" b="0" strike="noStrike" spc="-1">
+            <a:endParaRPr lang="en-US" sz="1300" b="0" strike="noStrike" spc="-1" dirty="0">
               <a:latin typeface="Arial"/>
             </a:endParaRPr>
           </a:p>
@@ -7087,16 +7087,40 @@
               <a:buChar char=""/>
             </a:pPr>
             <a:r>
-              <a:rPr lang="en-US" sz="1300" b="0" strike="noStrike" spc="-1">
+              <a:rPr lang="en-US" sz="1300" b="0" strike="noStrike" spc="-1" dirty="0">
                 <a:solidFill>
                   <a:srgbClr val="000000"/>
                 </a:solidFill>
                 <a:latin typeface="Calibri"/>
                 <a:ea typeface="DejaVu Sans"/>
               </a:rPr>
-              <a:t> </a:t>
+              <a:t>2585: Palo Alto city rule, 0-setback: 3 x 8 x 6 feet </a:t>
             </a:r>
-            <a:endParaRPr lang="en-US" sz="1300" b="0" strike="noStrike" spc="-1">
+          </a:p>
+          <a:p>
+            <a:pPr marL="465120" indent="-465120">
+              <a:lnSpc>
+                <a:spcPct val="100000"/>
+              </a:lnSpc>
+              <a:spcBef>
+                <a:spcPts val="360"/>
+              </a:spcBef>
+              <a:buClr>
+                <a:srgbClr val="0070C0"/>
+              </a:buClr>
+              <a:buFont typeface="Wingdings" charset="2"/>
+              <a:buChar char=""/>
+            </a:pPr>
+            <a:r>
+              <a:rPr lang="en-US" sz="1300" spc="-1" dirty="0">
+                <a:solidFill>
+                  <a:srgbClr val="000000"/>
+                </a:solidFill>
+                <a:latin typeface="Calibri"/>
+              </a:rPr>
+              <a:t>2581 (6 x 6 x 8), 2583 (6 x 4 x 8): Palo alto city rule,  shed with 3-feet setback to fence and building.</a:t>
+            </a:r>
+            <a:endParaRPr lang="en-US" sz="1300" b="0" strike="noStrike" spc="-1" dirty="0">
               <a:latin typeface="Arial"/>
             </a:endParaRPr>
           </a:p>
@@ -7110,7 +7134,7 @@
               </a:spcBef>
               <a:buNone/>
             </a:pPr>
-            <a:endParaRPr lang="en-US" sz="1300" b="0" strike="noStrike" spc="-1">
+            <a:endParaRPr lang="en-US" sz="1300" b="0" strike="noStrike" spc="-1" dirty="0">
               <a:latin typeface="Arial"/>
             </a:endParaRPr>
           </a:p>
@@ -7273,48 +7297,6 @@
           </a:p>
         </p:txBody>
       </p:sp>
-      <p:cxnSp>
-        <p:nvCxnSpPr>
-          <p:cNvPr id="16" name="Straight Arrow Connector 15">
-            <a:extLst>
-              <a:ext uri="{FF2B5EF4-FFF2-40B4-BE49-F238E27FC236}">
-                <a16:creationId xmlns:a16="http://schemas.microsoft.com/office/drawing/2014/main" id="{A8FFDE05-5BD7-0422-0427-9855D7B84AE9}"/>
-              </a:ext>
-            </a:extLst>
-          </p:cNvPr>
-          <p:cNvCxnSpPr>
-            <a:cxnSpLocks/>
-          </p:cNvCxnSpPr>
-          <p:nvPr/>
-        </p:nvCxnSpPr>
-        <p:spPr>
-          <a:xfrm>
-            <a:off x="3431822" y="4752622"/>
-            <a:ext cx="4820356" cy="0"/>
-          </a:xfrm>
-          <a:prstGeom prst="straightConnector1">
-            <a:avLst/>
-          </a:prstGeom>
-          <a:ln>
-            <a:headEnd type="triangle"/>
-            <a:tailEnd type="triangle"/>
-          </a:ln>
-        </p:spPr>
-        <p:style>
-          <a:lnRef idx="1">
-            <a:schemeClr val="accent1"/>
-          </a:lnRef>
-          <a:fillRef idx="0">
-            <a:schemeClr val="accent1"/>
-          </a:fillRef>
-          <a:effectRef idx="0">
-            <a:schemeClr val="accent1"/>
-          </a:effectRef>
-          <a:fontRef idx="minor">
-            <a:schemeClr val="tx1"/>
-          </a:fontRef>
-        </p:style>
-      </p:cxnSp>
       <p:sp>
         <p:nvSpPr>
           <p:cNvPr id="22" name="Rectangle 21">
@@ -7329,7 +7311,7 @@
         </p:nvSpPr>
         <p:spPr>
           <a:xfrm>
-            <a:off x="7557914" y="4301066"/>
+            <a:off x="8088492" y="5079999"/>
             <a:ext cx="716842" cy="310444"/>
           </a:xfrm>
           <a:prstGeom prst="rect">
@@ -7389,13 +7371,15 @@
               </a:ext>
             </a:extLst>
           </p:cNvPr>
-          <p:cNvCxnSpPr/>
+          <p:cNvCxnSpPr>
+            <a:cxnSpLocks/>
+          </p:cNvCxnSpPr>
           <p:nvPr/>
         </p:nvCxnSpPr>
         <p:spPr>
           <a:xfrm>
-            <a:off x="7631289" y="4278488"/>
-            <a:ext cx="575733" cy="0"/>
+            <a:off x="8477956" y="5384801"/>
+            <a:ext cx="440266" cy="0"/>
           </a:xfrm>
           <a:prstGeom prst="straightConnector1">
             <a:avLst/>
@@ -7434,8 +7418,8 @@
         </p:nvSpPr>
         <p:spPr>
           <a:xfrm>
-            <a:off x="4628446" y="248356"/>
-            <a:ext cx="3081866" cy="1727199"/>
+            <a:off x="4628444" y="1896533"/>
+            <a:ext cx="3612445" cy="1919111"/>
           </a:xfrm>
           <a:prstGeom prst="rect">
             <a:avLst/>
@@ -7484,8 +7468,8 @@
         </p:nvSpPr>
         <p:spPr>
           <a:xfrm>
-            <a:off x="3431822" y="2573866"/>
-            <a:ext cx="2630311" cy="1128889"/>
+            <a:off x="4775200" y="4368800"/>
+            <a:ext cx="2111022" cy="508000"/>
           </a:xfrm>
           <a:prstGeom prst="roundRect">
             <a:avLst/>
@@ -7518,7 +7502,7 @@
                   <a:schemeClr val="tx1"/>
                 </a:solidFill>
               </a:rPr>
-              <a:t>Car</a:t>
+              <a:t>2585 Car</a:t>
             </a:r>
           </a:p>
         </p:txBody>
@@ -7537,8 +7521,8 @@
         </p:nvSpPr>
         <p:spPr>
           <a:xfrm>
-            <a:off x="3313289" y="660398"/>
-            <a:ext cx="3234267" cy="1128889"/>
+            <a:off x="3996264" y="3239911"/>
+            <a:ext cx="2460979" cy="536220"/>
           </a:xfrm>
           <a:prstGeom prst="roundRect">
             <a:avLst/>
@@ -7571,7 +7555,7 @@
                   <a:schemeClr val="tx1"/>
                 </a:solidFill>
               </a:rPr>
-              <a:t>Car</a:t>
+              <a:t>2581 Car</a:t>
             </a:r>
           </a:p>
         </p:txBody>
@@ -7590,7 +7574,7 @@
         </p:nvSpPr>
         <p:spPr>
           <a:xfrm>
-            <a:off x="6434669" y="530577"/>
+            <a:off x="6920091" y="2201332"/>
             <a:ext cx="1151464" cy="316089"/>
           </a:xfrm>
           <a:prstGeom prst="rect">
@@ -7649,8 +7633,8 @@
         </p:nvCxnSpPr>
         <p:spPr>
           <a:xfrm>
-            <a:off x="3341511" y="4272847"/>
-            <a:ext cx="2968978" cy="0"/>
+            <a:off x="4673600" y="5379160"/>
+            <a:ext cx="2483556" cy="0"/>
           </a:xfrm>
           <a:prstGeom prst="straightConnector1">
             <a:avLst/>
@@ -7689,7 +7673,7 @@
         </p:nvSpPr>
         <p:spPr>
           <a:xfrm>
-            <a:off x="4380092" y="4329293"/>
+            <a:off x="5226759" y="5198537"/>
             <a:ext cx="716842" cy="310444"/>
           </a:xfrm>
           <a:prstGeom prst="rect">
@@ -7740,77 +7724,12 @@
           </a:p>
         </p:txBody>
       </p:sp>
-      <p:sp>
-        <p:nvSpPr>
-          <p:cNvPr id="98" name="Rectangle 97">
+      <p:cxnSp>
+        <p:nvCxnSpPr>
+          <p:cNvPr id="108" name="Straight Arrow Connector 107">
             <a:extLst>
               <a:ext uri="{FF2B5EF4-FFF2-40B4-BE49-F238E27FC236}">
-                <a16:creationId xmlns:a16="http://schemas.microsoft.com/office/drawing/2014/main" id="{1E1E024F-9062-C67D-A6AE-E68AD20B88C1}"/>
-              </a:ext>
-            </a:extLst>
-          </p:cNvPr>
-          <p:cNvSpPr/>
-          <p:nvPr/>
-        </p:nvSpPr>
-        <p:spPr>
-          <a:xfrm>
-            <a:off x="6570135" y="4306712"/>
-            <a:ext cx="716842" cy="310444"/>
-          </a:xfrm>
-          <a:prstGeom prst="rect">
-            <a:avLst/>
-          </a:prstGeom>
-          <a:noFill/>
-          <a:ln>
-            <a:noFill/>
-          </a:ln>
-        </p:spPr>
-        <p:style>
-          <a:lnRef idx="2">
-            <a:schemeClr val="accent1">
-              <a:shade val="15000"/>
-            </a:schemeClr>
-          </a:lnRef>
-          <a:fillRef idx="1">
-            <a:schemeClr val="accent1"/>
-          </a:fillRef>
-          <a:effectRef idx="0">
-            <a:schemeClr val="accent1"/>
-          </a:effectRef>
-          <a:fontRef idx="minor">
-            <a:schemeClr val="lt1"/>
-          </a:fontRef>
-        </p:style>
-        <p:txBody>
-          <a:bodyPr rtlCol="0" anchor="ctr"/>
-          <a:lstStyle/>
-          <a:p>
-            <a:pPr algn="ctr"/>
-            <a:r>
-              <a:rPr lang="en-US" dirty="0"/>
-              <a:t>2</a:t>
-            </a:r>
-            <a:r>
-              <a:rPr lang="en-US" dirty="0">
-                <a:solidFill>
-                  <a:schemeClr val="tx1"/>
-                </a:solidFill>
-              </a:rPr>
-              <a:t>6’</a:t>
-            </a:r>
-            <a:r>
-              <a:rPr lang="en-US" dirty="0"/>
-              <a:t>’</a:t>
-            </a:r>
-          </a:p>
-        </p:txBody>
-      </p:sp>
-      <p:cxnSp>
-        <p:nvCxnSpPr>
-          <p:cNvPr id="100" name="Straight Arrow Connector 99">
-            <a:extLst>
-              <a:ext uri="{FF2B5EF4-FFF2-40B4-BE49-F238E27FC236}">
-                <a16:creationId xmlns:a16="http://schemas.microsoft.com/office/drawing/2014/main" id="{C461582A-8FF8-3037-6755-D321BCDA1A8D}"/>
+                <a16:creationId xmlns:a16="http://schemas.microsoft.com/office/drawing/2014/main" id="{DD2E554E-3816-B2BB-11A1-515A054FDB3E}"/>
               </a:ext>
             </a:extLst>
           </p:cNvPr>
@@ -7821,8 +7740,8 @@
         </p:nvCxnSpPr>
         <p:spPr>
           <a:xfrm>
-            <a:off x="6389511" y="4278489"/>
-            <a:ext cx="1196622" cy="0"/>
+            <a:off x="8636000" y="3838229"/>
+            <a:ext cx="0" cy="304802"/>
           </a:xfrm>
           <a:prstGeom prst="straightConnector1">
             <a:avLst/>
@@ -7849,111 +7768,6 @@
       </p:cxnSp>
       <p:sp>
         <p:nvSpPr>
-          <p:cNvPr id="106" name="Rectangle 105">
-            <a:extLst>
-              <a:ext uri="{FF2B5EF4-FFF2-40B4-BE49-F238E27FC236}">
-                <a16:creationId xmlns:a16="http://schemas.microsoft.com/office/drawing/2014/main" id="{62AEC7DD-97E0-64A7-36AC-C401A98C8522}"/>
-              </a:ext>
-            </a:extLst>
-          </p:cNvPr>
-          <p:cNvSpPr/>
-          <p:nvPr/>
-        </p:nvSpPr>
-        <p:spPr>
-          <a:xfrm>
-            <a:off x="8427158" y="2940755"/>
-            <a:ext cx="716842" cy="310444"/>
-          </a:xfrm>
-          <a:prstGeom prst="rect">
-            <a:avLst/>
-          </a:prstGeom>
-          <a:noFill/>
-          <a:ln>
-            <a:noFill/>
-          </a:ln>
-        </p:spPr>
-        <p:style>
-          <a:lnRef idx="2">
-            <a:schemeClr val="accent1">
-              <a:shade val="15000"/>
-            </a:schemeClr>
-          </a:lnRef>
-          <a:fillRef idx="1">
-            <a:schemeClr val="accent1"/>
-          </a:fillRef>
-          <a:effectRef idx="0">
-            <a:schemeClr val="accent1"/>
-          </a:effectRef>
-          <a:fontRef idx="minor">
-            <a:schemeClr val="lt1"/>
-          </a:fontRef>
-        </p:style>
-        <p:txBody>
-          <a:bodyPr rtlCol="0" anchor="ctr"/>
-          <a:lstStyle/>
-          <a:p>
-            <a:pPr algn="ctr"/>
-            <a:r>
-              <a:rPr lang="en-US" dirty="0"/>
-              <a:t>2</a:t>
-            </a:r>
-            <a:r>
-              <a:rPr lang="en-US" dirty="0">
-                <a:solidFill>
-                  <a:schemeClr val="tx1"/>
-                </a:solidFill>
-              </a:rPr>
-              <a:t>16’</a:t>
-            </a:r>
-            <a:r>
-              <a:rPr lang="en-US" dirty="0"/>
-              <a:t>’</a:t>
-            </a:r>
-          </a:p>
-        </p:txBody>
-      </p:sp>
-      <p:cxnSp>
-        <p:nvCxnSpPr>
-          <p:cNvPr id="108" name="Straight Arrow Connector 107">
-            <a:extLst>
-              <a:ext uri="{FF2B5EF4-FFF2-40B4-BE49-F238E27FC236}">
-                <a16:creationId xmlns:a16="http://schemas.microsoft.com/office/drawing/2014/main" id="{DD2E554E-3816-B2BB-11A1-515A054FDB3E}"/>
-              </a:ext>
-            </a:extLst>
-          </p:cNvPr>
-          <p:cNvCxnSpPr/>
-          <p:nvPr/>
-        </p:nvCxnSpPr>
-        <p:spPr>
-          <a:xfrm>
-            <a:off x="8116713" y="1986844"/>
-            <a:ext cx="0" cy="462845"/>
-          </a:xfrm>
-          <a:prstGeom prst="straightConnector1">
-            <a:avLst/>
-          </a:prstGeom>
-          <a:ln>
-            <a:headEnd type="triangle"/>
-            <a:tailEnd type="triangle"/>
-          </a:ln>
-        </p:spPr>
-        <p:style>
-          <a:lnRef idx="1">
-            <a:schemeClr val="accent1"/>
-          </a:lnRef>
-          <a:fillRef idx="0">
-            <a:schemeClr val="accent1"/>
-          </a:fillRef>
-          <a:effectRef idx="0">
-            <a:schemeClr val="accent1"/>
-          </a:effectRef>
-          <a:fontRef idx="minor">
-            <a:schemeClr val="tx1"/>
-          </a:fontRef>
-        </p:style>
-      </p:cxnSp>
-      <p:sp>
-        <p:nvSpPr>
           <p:cNvPr id="109" name="Rectangle 108">
             <a:extLst>
               <a:ext uri="{FF2B5EF4-FFF2-40B4-BE49-F238E27FC236}">
@@ -7966,7 +7780,7 @@
         </p:nvSpPr>
         <p:spPr>
           <a:xfrm>
-            <a:off x="8003828" y="2105377"/>
+            <a:off x="8065914" y="3821296"/>
             <a:ext cx="716842" cy="310444"/>
           </a:xfrm>
           <a:prstGeom prst="rect">
@@ -8017,12 +7831,54 @@
           </a:p>
         </p:txBody>
       </p:sp>
-      <p:sp>
-        <p:nvSpPr>
-          <p:cNvPr id="110" name="Rectangle 109">
+      <p:cxnSp>
+        <p:nvCxnSpPr>
+          <p:cNvPr id="111" name="Straight Arrow Connector 110">
             <a:extLst>
               <a:ext uri="{FF2B5EF4-FFF2-40B4-BE49-F238E27FC236}">
-                <a16:creationId xmlns:a16="http://schemas.microsoft.com/office/drawing/2014/main" id="{F9A193FF-EC9A-2429-8A87-7FB63F9BFD99}"/>
+                <a16:creationId xmlns:a16="http://schemas.microsoft.com/office/drawing/2014/main" id="{0E56863B-2C94-1CBF-2E0E-536E7D543647}"/>
+              </a:ext>
+            </a:extLst>
+          </p:cNvPr>
+          <p:cNvCxnSpPr>
+            <a:cxnSpLocks/>
+          </p:cNvCxnSpPr>
+          <p:nvPr/>
+        </p:nvCxnSpPr>
+        <p:spPr>
+          <a:xfrm>
+            <a:off x="8619065" y="5012267"/>
+            <a:ext cx="0" cy="519289"/>
+          </a:xfrm>
+          <a:prstGeom prst="straightConnector1">
+            <a:avLst/>
+          </a:prstGeom>
+          <a:ln>
+            <a:headEnd type="triangle"/>
+            <a:tailEnd type="triangle"/>
+          </a:ln>
+        </p:spPr>
+        <p:style>
+          <a:lnRef idx="1">
+            <a:schemeClr val="accent1"/>
+          </a:lnRef>
+          <a:fillRef idx="0">
+            <a:schemeClr val="accent1"/>
+          </a:fillRef>
+          <a:effectRef idx="0">
+            <a:schemeClr val="accent1"/>
+          </a:effectRef>
+          <a:fontRef idx="minor">
+            <a:schemeClr val="tx1"/>
+          </a:fontRef>
+        </p:style>
+      </p:cxnSp>
+      <p:sp>
+        <p:nvSpPr>
+          <p:cNvPr id="118" name="Rectangle 117">
+            <a:extLst>
+              <a:ext uri="{FF2B5EF4-FFF2-40B4-BE49-F238E27FC236}">
+                <a16:creationId xmlns:a16="http://schemas.microsoft.com/office/drawing/2014/main" id="{76411BCA-C774-3587-A016-32042103CE8B}"/>
               </a:ext>
             </a:extLst>
           </p:cNvPr>
@@ -8031,16 +7887,12 @@
         </p:nvSpPr>
         <p:spPr>
           <a:xfrm>
-            <a:off x="7975602" y="3793066"/>
-            <a:ext cx="716842" cy="310444"/>
-          </a:xfrm>
-          <a:prstGeom prst="rect">
-            <a:avLst/>
-          </a:prstGeom>
-          <a:noFill/>
-          <a:ln>
-            <a:noFill/>
-          </a:ln>
+            <a:off x="7258757" y="4097870"/>
+            <a:ext cx="1004711" cy="451552"/>
+          </a:xfrm>
+          <a:prstGeom prst="rect">
+            <a:avLst/>
+          </a:prstGeom>
         </p:spPr>
         <p:style>
           <a:lnRef idx="2">
@@ -8063,28 +7915,752 @@
           <a:lstStyle/>
           <a:p>
             <a:pPr algn="ctr"/>
-            <a:r>
-              <a:rPr lang="en-US" dirty="0"/>
-              <a:t>2</a:t>
-            </a:r>
+            <a:endParaRPr lang="en-US" dirty="0"/>
+          </a:p>
+        </p:txBody>
+      </p:sp>
+      <p:sp>
+        <p:nvSpPr>
+          <p:cNvPr id="119" name="Rectangle 118">
+            <a:extLst>
+              <a:ext uri="{FF2B5EF4-FFF2-40B4-BE49-F238E27FC236}">
+                <a16:creationId xmlns:a16="http://schemas.microsoft.com/office/drawing/2014/main" id="{94184EB5-739B-6A4F-D6E4-DABD23E4B4C0}"/>
+              </a:ext>
+            </a:extLst>
+          </p:cNvPr>
+          <p:cNvSpPr/>
+          <p:nvPr/>
+        </p:nvSpPr>
+        <p:spPr>
+          <a:xfrm>
+            <a:off x="7270045" y="4526845"/>
+            <a:ext cx="982133" cy="722488"/>
+          </a:xfrm>
+          <a:prstGeom prst="rect">
+            <a:avLst/>
+          </a:prstGeom>
+        </p:spPr>
+        <p:style>
+          <a:lnRef idx="2">
+            <a:schemeClr val="accent1">
+              <a:shade val="15000"/>
+            </a:schemeClr>
+          </a:lnRef>
+          <a:fillRef idx="1">
+            <a:schemeClr val="accent1"/>
+          </a:fillRef>
+          <a:effectRef idx="0">
+            <a:schemeClr val="accent1"/>
+          </a:effectRef>
+          <a:fontRef idx="minor">
+            <a:schemeClr val="lt1"/>
+          </a:fontRef>
+        </p:style>
+        <p:txBody>
+          <a:bodyPr rtlCol="0" anchor="ctr"/>
+          <a:lstStyle/>
+          <a:p>
+            <a:pPr algn="ctr"/>
+            <a:endParaRPr lang="en-US" dirty="0"/>
+          </a:p>
+        </p:txBody>
+      </p:sp>
+      <p:sp>
+        <p:nvSpPr>
+          <p:cNvPr id="120" name="Rectangle 119">
+            <a:extLst>
+              <a:ext uri="{FF2B5EF4-FFF2-40B4-BE49-F238E27FC236}">
+                <a16:creationId xmlns:a16="http://schemas.microsoft.com/office/drawing/2014/main" id="{9DAE32CC-4412-FDAE-82A7-1273F94FD0EA}"/>
+              </a:ext>
+            </a:extLst>
+          </p:cNvPr>
+          <p:cNvSpPr/>
+          <p:nvPr/>
+        </p:nvSpPr>
+        <p:spPr>
+          <a:xfrm>
+            <a:off x="4628444" y="3838221"/>
+            <a:ext cx="4075289" cy="1670757"/>
+          </a:xfrm>
+          <a:prstGeom prst="rect">
+            <a:avLst/>
+          </a:prstGeom>
+          <a:noFill/>
+        </p:spPr>
+        <p:style>
+          <a:lnRef idx="2">
+            <a:schemeClr val="accent1">
+              <a:shade val="15000"/>
+            </a:schemeClr>
+          </a:lnRef>
+          <a:fillRef idx="1">
+            <a:schemeClr val="accent1"/>
+          </a:fillRef>
+          <a:effectRef idx="0">
+            <a:schemeClr val="accent1"/>
+          </a:effectRef>
+          <a:fontRef idx="minor">
+            <a:schemeClr val="lt1"/>
+          </a:fontRef>
+        </p:style>
+        <p:txBody>
+          <a:bodyPr rtlCol="0" anchor="ctr"/>
+          <a:lstStyle/>
+          <a:p>
+            <a:pPr algn="ctr"/>
+            <a:endParaRPr lang="en-US"/>
+          </a:p>
+        </p:txBody>
+      </p:sp>
+      <p:cxnSp>
+        <p:nvCxnSpPr>
+          <p:cNvPr id="121" name="Straight Arrow Connector 120">
+            <a:extLst>
+              <a:ext uri="{FF2B5EF4-FFF2-40B4-BE49-F238E27FC236}">
+                <a16:creationId xmlns:a16="http://schemas.microsoft.com/office/drawing/2014/main" id="{F70C7334-7C96-5838-2965-04F683316456}"/>
+              </a:ext>
+            </a:extLst>
+          </p:cNvPr>
+          <p:cNvCxnSpPr>
+            <a:cxnSpLocks/>
+          </p:cNvCxnSpPr>
+          <p:nvPr/>
+        </p:nvCxnSpPr>
+        <p:spPr>
+          <a:xfrm>
+            <a:off x="8607781" y="4018844"/>
+            <a:ext cx="0" cy="395117"/>
+          </a:xfrm>
+          <a:prstGeom prst="straightConnector1">
+            <a:avLst/>
+          </a:prstGeom>
+          <a:ln>
+            <a:headEnd type="triangle"/>
+            <a:tailEnd type="triangle"/>
+          </a:ln>
+        </p:spPr>
+        <p:style>
+          <a:lnRef idx="1">
+            <a:schemeClr val="accent1"/>
+          </a:lnRef>
+          <a:fillRef idx="0">
+            <a:schemeClr val="accent1"/>
+          </a:fillRef>
+          <a:effectRef idx="0">
+            <a:schemeClr val="accent1"/>
+          </a:effectRef>
+          <a:fontRef idx="minor">
+            <a:schemeClr val="tx1"/>
+          </a:fontRef>
+        </p:style>
+      </p:cxnSp>
+      <p:sp>
+        <p:nvSpPr>
+          <p:cNvPr id="122" name="Rectangle 121">
+            <a:extLst>
+              <a:ext uri="{FF2B5EF4-FFF2-40B4-BE49-F238E27FC236}">
+                <a16:creationId xmlns:a16="http://schemas.microsoft.com/office/drawing/2014/main" id="{FEB644D4-1B7D-9594-5182-848C80D93C57}"/>
+              </a:ext>
+            </a:extLst>
+          </p:cNvPr>
+          <p:cNvSpPr/>
+          <p:nvPr/>
+        </p:nvSpPr>
+        <p:spPr>
+          <a:xfrm>
+            <a:off x="8065917" y="4154313"/>
+            <a:ext cx="716842" cy="310444"/>
+          </a:xfrm>
+          <a:prstGeom prst="rect">
+            <a:avLst/>
+          </a:prstGeom>
+          <a:noFill/>
+          <a:ln>
+            <a:noFill/>
+          </a:ln>
+        </p:spPr>
+        <p:style>
+          <a:lnRef idx="2">
+            <a:schemeClr val="accent1">
+              <a:shade val="15000"/>
+            </a:schemeClr>
+          </a:lnRef>
+          <a:fillRef idx="1">
+            <a:schemeClr val="accent1"/>
+          </a:fillRef>
+          <a:effectRef idx="0">
+            <a:schemeClr val="accent1"/>
+          </a:effectRef>
+          <a:fontRef idx="minor">
+            <a:schemeClr val="lt1"/>
+          </a:fontRef>
+        </p:style>
+        <p:txBody>
+          <a:bodyPr rtlCol="0" anchor="ctr"/>
+          <a:lstStyle/>
+          <a:p>
+            <a:pPr algn="ctr"/>
             <a:r>
               <a:rPr lang="en-US" dirty="0">
                 <a:solidFill>
                   <a:schemeClr val="tx1"/>
                 </a:solidFill>
               </a:rPr>
-              <a:t>3’</a:t>
+              <a:t>4’</a:t>
+            </a:r>
+            <a:r>
+              <a:rPr lang="en-US" dirty="0"/>
+              <a:t>’</a:t>
+            </a:r>
+          </a:p>
+        </p:txBody>
+      </p:sp>
+      <p:cxnSp>
+        <p:nvCxnSpPr>
+          <p:cNvPr id="125" name="Straight Arrow Connector 124">
+            <a:extLst>
+              <a:ext uri="{FF2B5EF4-FFF2-40B4-BE49-F238E27FC236}">
+                <a16:creationId xmlns:a16="http://schemas.microsoft.com/office/drawing/2014/main" id="{A50EBD1F-6421-94B0-9A04-1C6E0CA337C8}"/>
+              </a:ext>
+            </a:extLst>
+          </p:cNvPr>
+          <p:cNvCxnSpPr>
+            <a:cxnSpLocks/>
+          </p:cNvCxnSpPr>
+          <p:nvPr/>
+        </p:nvCxnSpPr>
+        <p:spPr>
+          <a:xfrm>
+            <a:off x="8613424" y="4560711"/>
+            <a:ext cx="0" cy="508000"/>
+          </a:xfrm>
+          <a:prstGeom prst="straightConnector1">
+            <a:avLst/>
+          </a:prstGeom>
+          <a:ln>
+            <a:headEnd type="triangle"/>
+            <a:tailEnd type="triangle"/>
+          </a:ln>
+        </p:spPr>
+        <p:style>
+          <a:lnRef idx="1">
+            <a:schemeClr val="accent1"/>
+          </a:lnRef>
+          <a:fillRef idx="0">
+            <a:schemeClr val="accent1"/>
+          </a:fillRef>
+          <a:effectRef idx="0">
+            <a:schemeClr val="accent1"/>
+          </a:effectRef>
+          <a:fontRef idx="minor">
+            <a:schemeClr val="tx1"/>
+          </a:fontRef>
+        </p:style>
+      </p:cxnSp>
+      <p:sp>
+        <p:nvSpPr>
+          <p:cNvPr id="126" name="Rectangle 125">
+            <a:extLst>
+              <a:ext uri="{FF2B5EF4-FFF2-40B4-BE49-F238E27FC236}">
+                <a16:creationId xmlns:a16="http://schemas.microsoft.com/office/drawing/2014/main" id="{84D37148-89FC-C602-4EA8-581A41BD46A7}"/>
+              </a:ext>
+            </a:extLst>
+          </p:cNvPr>
+          <p:cNvSpPr/>
+          <p:nvPr/>
+        </p:nvSpPr>
+        <p:spPr>
+          <a:xfrm>
+            <a:off x="8161872" y="4724401"/>
+            <a:ext cx="716842" cy="310444"/>
+          </a:xfrm>
+          <a:prstGeom prst="rect">
+            <a:avLst/>
+          </a:prstGeom>
+          <a:noFill/>
+          <a:ln>
+            <a:noFill/>
+          </a:ln>
+        </p:spPr>
+        <p:style>
+          <a:lnRef idx="2">
+            <a:schemeClr val="accent1">
+              <a:shade val="15000"/>
+            </a:schemeClr>
+          </a:lnRef>
+          <a:fillRef idx="1">
+            <a:schemeClr val="accent1"/>
+          </a:fillRef>
+          <a:effectRef idx="0">
+            <a:schemeClr val="accent1"/>
+          </a:effectRef>
+          <a:fontRef idx="minor">
+            <a:schemeClr val="lt1"/>
+          </a:fontRef>
+        </p:style>
+        <p:txBody>
+          <a:bodyPr rtlCol="0" anchor="ctr"/>
+          <a:lstStyle/>
+          <a:p>
+            <a:pPr algn="ctr"/>
+            <a:r>
+              <a:rPr lang="en-US" dirty="0">
+                <a:solidFill>
+                  <a:schemeClr val="tx1"/>
+                </a:solidFill>
+              </a:rPr>
+              <a:t>6’</a:t>
+            </a:r>
+            <a:r>
+              <a:rPr lang="en-US" dirty="0"/>
+              <a:t>’</a:t>
+            </a:r>
+          </a:p>
+        </p:txBody>
+      </p:sp>
+      <p:cxnSp>
+        <p:nvCxnSpPr>
+          <p:cNvPr id="131" name="Straight Arrow Connector 130">
+            <a:extLst>
+              <a:ext uri="{FF2B5EF4-FFF2-40B4-BE49-F238E27FC236}">
+                <a16:creationId xmlns:a16="http://schemas.microsoft.com/office/drawing/2014/main" id="{9BBDCC15-1516-53BB-2F35-26C34FD21618}"/>
+              </a:ext>
+            </a:extLst>
+          </p:cNvPr>
+          <p:cNvCxnSpPr>
+            <a:cxnSpLocks/>
+          </p:cNvCxnSpPr>
+          <p:nvPr/>
+        </p:nvCxnSpPr>
+        <p:spPr>
+          <a:xfrm flipV="1">
+            <a:off x="7224889" y="5381976"/>
+            <a:ext cx="1027290" cy="2825"/>
+          </a:xfrm>
+          <a:prstGeom prst="straightConnector1">
+            <a:avLst/>
+          </a:prstGeom>
+          <a:ln>
+            <a:headEnd type="triangle"/>
+            <a:tailEnd type="triangle"/>
+          </a:ln>
+        </p:spPr>
+        <p:style>
+          <a:lnRef idx="1">
+            <a:schemeClr val="accent1"/>
+          </a:lnRef>
+          <a:fillRef idx="0">
+            <a:schemeClr val="accent1"/>
+          </a:fillRef>
+          <a:effectRef idx="0">
+            <a:schemeClr val="accent1"/>
+          </a:effectRef>
+          <a:fontRef idx="minor">
+            <a:schemeClr val="tx1"/>
+          </a:fontRef>
+        </p:style>
+      </p:cxnSp>
+      <p:sp>
+        <p:nvSpPr>
+          <p:cNvPr id="132" name="Rectangle 131">
+            <a:extLst>
+              <a:ext uri="{FF2B5EF4-FFF2-40B4-BE49-F238E27FC236}">
+                <a16:creationId xmlns:a16="http://schemas.microsoft.com/office/drawing/2014/main" id="{2011628A-1D2B-BB27-D499-226680F9598D}"/>
+              </a:ext>
+            </a:extLst>
+          </p:cNvPr>
+          <p:cNvSpPr/>
+          <p:nvPr/>
+        </p:nvSpPr>
+        <p:spPr>
+          <a:xfrm>
+            <a:off x="7445026" y="5260621"/>
+            <a:ext cx="716842" cy="310444"/>
+          </a:xfrm>
+          <a:prstGeom prst="rect">
+            <a:avLst/>
+          </a:prstGeom>
+          <a:noFill/>
+          <a:ln>
+            <a:noFill/>
+          </a:ln>
+        </p:spPr>
+        <p:style>
+          <a:lnRef idx="2">
+            <a:schemeClr val="accent1">
+              <a:shade val="15000"/>
+            </a:schemeClr>
+          </a:lnRef>
+          <a:fillRef idx="1">
+            <a:schemeClr val="accent1"/>
+          </a:fillRef>
+          <a:effectRef idx="0">
+            <a:schemeClr val="accent1"/>
+          </a:effectRef>
+          <a:fontRef idx="minor">
+            <a:schemeClr val="lt1"/>
+          </a:fontRef>
+        </p:style>
+        <p:txBody>
+          <a:bodyPr rtlCol="0" anchor="ctr"/>
+          <a:lstStyle/>
+          <a:p>
+            <a:pPr algn="ctr"/>
+            <a:r>
+              <a:rPr lang="en-US" dirty="0">
+                <a:solidFill>
+                  <a:schemeClr val="tx1"/>
+                </a:solidFill>
+              </a:rPr>
+              <a:t>6’</a:t>
+            </a:r>
+            <a:r>
+              <a:rPr lang="en-US" dirty="0"/>
+              <a:t>’</a:t>
+            </a:r>
+          </a:p>
+        </p:txBody>
+      </p:sp>
+      <p:sp>
+        <p:nvSpPr>
+          <p:cNvPr id="136" name="Rectangle 135">
+            <a:extLst>
+              <a:ext uri="{FF2B5EF4-FFF2-40B4-BE49-F238E27FC236}">
+                <a16:creationId xmlns:a16="http://schemas.microsoft.com/office/drawing/2014/main" id="{948D596E-FC5B-3182-14E0-14636B763523}"/>
+              </a:ext>
+            </a:extLst>
+          </p:cNvPr>
+          <p:cNvSpPr/>
+          <p:nvPr/>
+        </p:nvSpPr>
+        <p:spPr>
+          <a:xfrm>
+            <a:off x="4617156" y="5576711"/>
+            <a:ext cx="3601155" cy="1196622"/>
+          </a:xfrm>
+          <a:prstGeom prst="rect">
+            <a:avLst/>
+          </a:prstGeom>
+        </p:spPr>
+        <p:style>
+          <a:lnRef idx="2">
+            <a:schemeClr val="accent1">
+              <a:shade val="15000"/>
+            </a:schemeClr>
+          </a:lnRef>
+          <a:fillRef idx="1">
+            <a:schemeClr val="accent1"/>
+          </a:fillRef>
+          <a:effectRef idx="0">
+            <a:schemeClr val="accent1"/>
+          </a:effectRef>
+          <a:fontRef idx="minor">
+            <a:schemeClr val="lt1"/>
+          </a:fontRef>
+        </p:style>
+        <p:txBody>
+          <a:bodyPr rtlCol="0" anchor="ctr"/>
+          <a:lstStyle/>
+          <a:p>
+            <a:pPr algn="ctr"/>
+            <a:r>
+              <a:rPr lang="en-US" dirty="0">
+                <a:solidFill>
+                  <a:schemeClr val="tx1"/>
+                </a:solidFill>
+              </a:rPr>
+              <a:t>Main Building</a:t>
+            </a:r>
+          </a:p>
+        </p:txBody>
+      </p:sp>
+      <p:sp>
+        <p:nvSpPr>
+          <p:cNvPr id="137" name="Rectangle 136">
+            <a:extLst>
+              <a:ext uri="{FF2B5EF4-FFF2-40B4-BE49-F238E27FC236}">
+                <a16:creationId xmlns:a16="http://schemas.microsoft.com/office/drawing/2014/main" id="{15D8D79D-6512-7EF7-CB10-15DA58044447}"/>
+              </a:ext>
+            </a:extLst>
+          </p:cNvPr>
+          <p:cNvSpPr/>
+          <p:nvPr/>
+        </p:nvSpPr>
+        <p:spPr>
+          <a:xfrm>
+            <a:off x="6197603" y="5678314"/>
+            <a:ext cx="903111" cy="316089"/>
+          </a:xfrm>
+          <a:prstGeom prst="rect">
+            <a:avLst/>
+          </a:prstGeom>
+          <a:noFill/>
+          <a:ln>
+            <a:noFill/>
+          </a:ln>
+        </p:spPr>
+        <p:style>
+          <a:lnRef idx="2">
+            <a:schemeClr val="accent1">
+              <a:shade val="15000"/>
+            </a:schemeClr>
+          </a:lnRef>
+          <a:fillRef idx="1">
+            <a:schemeClr val="accent1"/>
+          </a:fillRef>
+          <a:effectRef idx="0">
+            <a:schemeClr val="accent1"/>
+          </a:effectRef>
+          <a:fontRef idx="minor">
+            <a:schemeClr val="lt1"/>
+          </a:fontRef>
+        </p:style>
+        <p:txBody>
+          <a:bodyPr rtlCol="0" anchor="ctr"/>
+          <a:lstStyle/>
+          <a:p>
+            <a:pPr algn="ctr"/>
+            <a:r>
+              <a:rPr lang="en-US" dirty="0">
+                <a:solidFill>
+                  <a:schemeClr val="tx1"/>
+                </a:solidFill>
+              </a:rPr>
+              <a:t>26’</a:t>
+            </a:r>
+            <a:r>
+              <a:rPr lang="en-US" dirty="0"/>
+              <a:t>’</a:t>
+            </a:r>
+          </a:p>
+        </p:txBody>
+      </p:sp>
+      <p:sp>
+        <p:nvSpPr>
+          <p:cNvPr id="142" name="Rectangle 141">
+            <a:extLst>
+              <a:ext uri="{FF2B5EF4-FFF2-40B4-BE49-F238E27FC236}">
+                <a16:creationId xmlns:a16="http://schemas.microsoft.com/office/drawing/2014/main" id="{63CF27F1-8EFB-BF63-C85C-C8A30DE9B3FB}"/>
+              </a:ext>
+            </a:extLst>
+          </p:cNvPr>
+          <p:cNvSpPr/>
+          <p:nvPr/>
+        </p:nvSpPr>
+        <p:spPr>
+          <a:xfrm>
+            <a:off x="7343426" y="4617153"/>
+            <a:ext cx="716842" cy="310444"/>
+          </a:xfrm>
+          <a:prstGeom prst="rect">
+            <a:avLst/>
+          </a:prstGeom>
+          <a:noFill/>
+          <a:ln>
+            <a:noFill/>
+          </a:ln>
+        </p:spPr>
+        <p:style>
+          <a:lnRef idx="2">
+            <a:schemeClr val="accent1">
+              <a:shade val="15000"/>
+            </a:schemeClr>
+          </a:lnRef>
+          <a:fillRef idx="1">
+            <a:schemeClr val="accent1"/>
+          </a:fillRef>
+          <a:effectRef idx="0">
+            <a:schemeClr val="accent1"/>
+          </a:effectRef>
+          <a:fontRef idx="minor">
+            <a:schemeClr val="lt1"/>
+          </a:fontRef>
+        </p:style>
+        <p:txBody>
+          <a:bodyPr rtlCol="0" anchor="ctr"/>
+          <a:lstStyle/>
+          <a:p>
+            <a:pPr algn="ctr"/>
+            <a:r>
+              <a:rPr lang="en-US" dirty="0">
+                <a:solidFill>
+                  <a:schemeClr val="tx1"/>
+                </a:solidFill>
+              </a:rPr>
+              <a:t>2581</a:t>
             </a:r>
             <a:endParaRPr lang="en-US" dirty="0"/>
           </a:p>
         </p:txBody>
       </p:sp>
+      <p:sp>
+        <p:nvSpPr>
+          <p:cNvPr id="143" name="Rectangle 142">
+            <a:extLst>
+              <a:ext uri="{FF2B5EF4-FFF2-40B4-BE49-F238E27FC236}">
+                <a16:creationId xmlns:a16="http://schemas.microsoft.com/office/drawing/2014/main" id="{A6F06832-B5C7-2B8C-D9C1-2FF1BA64FC17}"/>
+              </a:ext>
+            </a:extLst>
+          </p:cNvPr>
+          <p:cNvSpPr/>
+          <p:nvPr/>
+        </p:nvSpPr>
+        <p:spPr>
+          <a:xfrm>
+            <a:off x="7371650" y="4159956"/>
+            <a:ext cx="716842" cy="310444"/>
+          </a:xfrm>
+          <a:prstGeom prst="rect">
+            <a:avLst/>
+          </a:prstGeom>
+          <a:noFill/>
+          <a:ln>
+            <a:noFill/>
+          </a:ln>
+        </p:spPr>
+        <p:style>
+          <a:lnRef idx="2">
+            <a:schemeClr val="accent1">
+              <a:shade val="15000"/>
+            </a:schemeClr>
+          </a:lnRef>
+          <a:fillRef idx="1">
+            <a:schemeClr val="accent1"/>
+          </a:fillRef>
+          <a:effectRef idx="0">
+            <a:schemeClr val="accent1"/>
+          </a:effectRef>
+          <a:fontRef idx="minor">
+            <a:schemeClr val="lt1"/>
+          </a:fontRef>
+        </p:style>
+        <p:txBody>
+          <a:bodyPr rtlCol="0" anchor="ctr"/>
+          <a:lstStyle/>
+          <a:p>
+            <a:pPr algn="ctr"/>
+            <a:r>
+              <a:rPr lang="en-US" dirty="0">
+                <a:solidFill>
+                  <a:schemeClr val="tx1"/>
+                </a:solidFill>
+              </a:rPr>
+              <a:t>2583</a:t>
+            </a:r>
+            <a:endParaRPr lang="en-US" dirty="0"/>
+          </a:p>
+        </p:txBody>
+      </p:sp>
+      <p:sp>
+        <p:nvSpPr>
+          <p:cNvPr id="144" name="Rectangle 143">
+            <a:extLst>
+              <a:ext uri="{FF2B5EF4-FFF2-40B4-BE49-F238E27FC236}">
+                <a16:creationId xmlns:a16="http://schemas.microsoft.com/office/drawing/2014/main" id="{00D75067-3D2D-3D98-AA6F-F78F902A12E1}"/>
+              </a:ext>
+            </a:extLst>
+          </p:cNvPr>
+          <p:cNvSpPr/>
+          <p:nvPr/>
+        </p:nvSpPr>
+        <p:spPr>
+          <a:xfrm>
+            <a:off x="2709334" y="1111954"/>
+            <a:ext cx="1428045" cy="468489"/>
+          </a:xfrm>
+          <a:prstGeom prst="rect">
+            <a:avLst/>
+          </a:prstGeom>
+        </p:spPr>
+        <p:style>
+          <a:lnRef idx="2">
+            <a:schemeClr val="accent1">
+              <a:shade val="15000"/>
+            </a:schemeClr>
+          </a:lnRef>
+          <a:fillRef idx="1">
+            <a:schemeClr val="accent1"/>
+          </a:fillRef>
+          <a:effectRef idx="0">
+            <a:schemeClr val="accent1"/>
+          </a:effectRef>
+          <a:fontRef idx="minor">
+            <a:schemeClr val="lt1"/>
+          </a:fontRef>
+        </p:style>
+        <p:txBody>
+          <a:bodyPr rtlCol="0" anchor="ctr"/>
+          <a:lstStyle/>
+          <a:p>
+            <a:pPr algn="ctr"/>
+            <a:endParaRPr lang="en-US" dirty="0"/>
+          </a:p>
+        </p:txBody>
+      </p:sp>
+      <p:sp>
+        <p:nvSpPr>
+          <p:cNvPr id="145" name="Rectangle 144">
+            <a:extLst>
+              <a:ext uri="{FF2B5EF4-FFF2-40B4-BE49-F238E27FC236}">
+                <a16:creationId xmlns:a16="http://schemas.microsoft.com/office/drawing/2014/main" id="{9A957388-4A00-3C26-60A3-444061CAD976}"/>
+              </a:ext>
+            </a:extLst>
+          </p:cNvPr>
+          <p:cNvSpPr/>
+          <p:nvPr/>
+        </p:nvSpPr>
+        <p:spPr>
+          <a:xfrm>
+            <a:off x="3008494" y="1174039"/>
+            <a:ext cx="716842" cy="310444"/>
+          </a:xfrm>
+          <a:prstGeom prst="rect">
+            <a:avLst/>
+          </a:prstGeom>
+          <a:noFill/>
+          <a:ln>
+            <a:noFill/>
+          </a:ln>
+        </p:spPr>
+        <p:style>
+          <a:lnRef idx="2">
+            <a:schemeClr val="accent1">
+              <a:shade val="15000"/>
+            </a:schemeClr>
+          </a:lnRef>
+          <a:fillRef idx="1">
+            <a:schemeClr val="accent1"/>
+          </a:fillRef>
+          <a:effectRef idx="0">
+            <a:schemeClr val="accent1"/>
+          </a:effectRef>
+          <a:fontRef idx="minor">
+            <a:schemeClr val="lt1"/>
+          </a:fontRef>
+        </p:style>
+        <p:txBody>
+          <a:bodyPr rtlCol="0" anchor="ctr"/>
+          <a:lstStyle/>
+          <a:p>
+            <a:pPr algn="ctr"/>
+            <a:r>
+              <a:rPr lang="en-US" dirty="0">
+                <a:solidFill>
+                  <a:schemeClr val="tx1"/>
+                </a:solidFill>
+              </a:rPr>
+              <a:t>2585</a:t>
+            </a:r>
+            <a:endParaRPr lang="en-US" dirty="0"/>
+          </a:p>
+        </p:txBody>
+      </p:sp>
       <p:cxnSp>
         <p:nvCxnSpPr>
-          <p:cNvPr id="111" name="Straight Arrow Connector 110">
+          <p:cNvPr id="149" name="Straight Connector 148">
             <a:extLst>
               <a:ext uri="{FF2B5EF4-FFF2-40B4-BE49-F238E27FC236}">
-                <a16:creationId xmlns:a16="http://schemas.microsoft.com/office/drawing/2014/main" id="{0E56863B-2C94-1CBF-2E0E-536E7D543647}"/>
+                <a16:creationId xmlns:a16="http://schemas.microsoft.com/office/drawing/2014/main" id="{33819469-2C83-1947-15A3-4AD80758B68D}"/>
               </a:ext>
             </a:extLst>
           </p:cNvPr>
@@ -8092,17 +8668,13 @@
           <p:nvPr/>
         </p:nvCxnSpPr>
         <p:spPr>
-          <a:xfrm>
-            <a:off x="8111068" y="3708399"/>
-            <a:ext cx="0" cy="462845"/>
-          </a:xfrm>
-          <a:prstGeom prst="straightConnector1">
-            <a:avLst/>
-          </a:prstGeom>
-          <a:ln>
-            <a:headEnd type="triangle"/>
-            <a:tailEnd type="triangle"/>
-          </a:ln>
+          <a:xfrm flipH="1" flipV="1">
+            <a:off x="3194756" y="1591733"/>
+            <a:ext cx="395111" cy="180622"/>
+          </a:xfrm>
+          <a:prstGeom prst="line">
+            <a:avLst/>
+          </a:prstGeom>
         </p:spPr>
         <p:style>
           <a:lnRef idx="1">
@@ -8121,20 +8693,22 @@
       </p:cxnSp>
       <p:cxnSp>
         <p:nvCxnSpPr>
-          <p:cNvPr id="112" name="Straight Arrow Connector 111">
+          <p:cNvPr id="6" name="Straight Arrow Connector 5">
             <a:extLst>
               <a:ext uri="{FF2B5EF4-FFF2-40B4-BE49-F238E27FC236}">
-                <a16:creationId xmlns:a16="http://schemas.microsoft.com/office/drawing/2014/main" id="{1B4690FB-DAAF-86D2-5BA0-05029E007C61}"/>
+                <a16:creationId xmlns:a16="http://schemas.microsoft.com/office/drawing/2014/main" id="{F43EF7AF-3D5D-04B6-178A-DAD1441D084A}"/>
               </a:ext>
             </a:extLst>
           </p:cNvPr>
-          <p:cNvCxnSpPr/>
+          <p:cNvCxnSpPr>
+            <a:cxnSpLocks/>
+          </p:cNvCxnSpPr>
           <p:nvPr/>
         </p:nvCxnSpPr>
         <p:spPr>
           <a:xfrm>
-            <a:off x="8782758" y="1964267"/>
-            <a:ext cx="0" cy="2212622"/>
+            <a:off x="4346225" y="1061155"/>
+            <a:ext cx="0" cy="558800"/>
           </a:xfrm>
           <a:prstGeom prst="straightConnector1">
             <a:avLst/>
@@ -8161,10 +8735,10 @@
       </p:cxnSp>
       <p:sp>
         <p:nvSpPr>
-          <p:cNvPr id="113" name="Rectangle 112">
+          <p:cNvPr id="7" name="Rectangle 6">
             <a:extLst>
               <a:ext uri="{FF2B5EF4-FFF2-40B4-BE49-F238E27FC236}">
-                <a16:creationId xmlns:a16="http://schemas.microsoft.com/office/drawing/2014/main" id="{AEE0B48F-CD9E-D2AC-9970-C382AE8E3162}"/>
+                <a16:creationId xmlns:a16="http://schemas.microsoft.com/office/drawing/2014/main" id="{1F021B68-C4AB-285B-D497-12323F574D3A}"/>
               </a:ext>
             </a:extLst>
           </p:cNvPr>
@@ -8173,7 +8747,7 @@
         </p:nvSpPr>
         <p:spPr>
           <a:xfrm>
-            <a:off x="7992538" y="2923821"/>
+            <a:off x="4222050" y="1168397"/>
             <a:ext cx="716842" cy="310444"/>
           </a:xfrm>
           <a:prstGeom prst="rect">
@@ -8206,16 +8780,12 @@
           <a:p>
             <a:pPr algn="ctr"/>
             <a:r>
-              <a:rPr lang="en-US" dirty="0"/>
-              <a:t>2</a:t>
-            </a:r>
-            <a:r>
               <a:rPr lang="en-US" dirty="0">
                 <a:solidFill>
                   <a:schemeClr val="tx1"/>
                 </a:solidFill>
               </a:rPr>
-              <a:t>10’</a:t>
+              <a:t>3’</a:t>
             </a:r>
             <a:r>
               <a:rPr lang="en-US" dirty="0"/>
@@ -8226,20 +8796,22 @@
       </p:sp>
       <p:cxnSp>
         <p:nvCxnSpPr>
-          <p:cNvPr id="115" name="Straight Arrow Connector 114">
+          <p:cNvPr id="9" name="Straight Arrow Connector 8">
             <a:extLst>
               <a:ext uri="{FF2B5EF4-FFF2-40B4-BE49-F238E27FC236}">
-                <a16:creationId xmlns:a16="http://schemas.microsoft.com/office/drawing/2014/main" id="{73591E17-6173-7435-0CAD-44D59F606B97}"/>
+                <a16:creationId xmlns:a16="http://schemas.microsoft.com/office/drawing/2014/main" id="{21181159-4BD8-604D-5C5C-3A5BF2E2F49D}"/>
               </a:ext>
             </a:extLst>
           </p:cNvPr>
-          <p:cNvCxnSpPr/>
+          <p:cNvCxnSpPr>
+            <a:cxnSpLocks/>
+          </p:cNvCxnSpPr>
           <p:nvPr/>
         </p:nvCxnSpPr>
         <p:spPr>
           <a:xfrm>
-            <a:off x="8105424" y="2449689"/>
-            <a:ext cx="0" cy="1253067"/>
+            <a:off x="2827866" y="1710262"/>
+            <a:ext cx="1241778" cy="0"/>
           </a:xfrm>
           <a:prstGeom prst="straightConnector1">
             <a:avLst/>
@@ -8266,10 +8838,10 @@
       </p:cxnSp>
       <p:sp>
         <p:nvSpPr>
-          <p:cNvPr id="118" name="Rectangle 117">
+          <p:cNvPr id="10" name="Rectangle 9">
             <a:extLst>
               <a:ext uri="{FF2B5EF4-FFF2-40B4-BE49-F238E27FC236}">
-                <a16:creationId xmlns:a16="http://schemas.microsoft.com/office/drawing/2014/main" id="{76411BCA-C774-3587-A016-32042103CE8B}"/>
+                <a16:creationId xmlns:a16="http://schemas.microsoft.com/office/drawing/2014/main" id="{05FC570A-88E5-7559-3C80-4C1247A48E40}"/>
               </a:ext>
             </a:extLst>
           </p:cNvPr>
@@ -8278,12 +8850,16 @@
         </p:nvSpPr>
         <p:spPr>
           <a:xfrm>
-            <a:off x="6412090" y="2404534"/>
-            <a:ext cx="620888" cy="711200"/>
-          </a:xfrm>
-          <a:prstGeom prst="rect">
-            <a:avLst/>
-          </a:prstGeom>
+            <a:off x="3036714" y="1665107"/>
+            <a:ext cx="716842" cy="310444"/>
+          </a:xfrm>
+          <a:prstGeom prst="rect">
+            <a:avLst/>
+          </a:prstGeom>
+          <a:noFill/>
+          <a:ln>
+            <a:noFill/>
+          </a:ln>
         </p:spPr>
         <p:style>
           <a:lnRef idx="2">
@@ -8306,16 +8882,31 @@
           <a:lstStyle/>
           <a:p>
             <a:pPr algn="ctr"/>
-            <a:endParaRPr lang="en-US" dirty="0"/>
-          </a:p>
-        </p:txBody>
-      </p:sp>
-      <p:sp>
-        <p:nvSpPr>
-          <p:cNvPr id="119" name="Rectangle 118">
+            <a:r>
+              <a:rPr lang="en-US" dirty="0"/>
+              <a:t>2</a:t>
+            </a:r>
+            <a:r>
+              <a:rPr lang="en-US" dirty="0">
+                <a:solidFill>
+                  <a:schemeClr val="tx1"/>
+                </a:solidFill>
+              </a:rPr>
+              <a:t>8’</a:t>
+            </a:r>
+            <a:r>
+              <a:rPr lang="en-US" dirty="0"/>
+              <a:t>’</a:t>
+            </a:r>
+          </a:p>
+        </p:txBody>
+      </p:sp>
+      <p:sp>
+        <p:nvSpPr>
+          <p:cNvPr id="29" name="Rectangle: Rounded Corners 28">
             <a:extLst>
               <a:ext uri="{FF2B5EF4-FFF2-40B4-BE49-F238E27FC236}">
-                <a16:creationId xmlns:a16="http://schemas.microsoft.com/office/drawing/2014/main" id="{94184EB5-739B-6A4F-D6E4-DABD23E4B4C0}"/>
+                <a16:creationId xmlns:a16="http://schemas.microsoft.com/office/drawing/2014/main" id="{11F6EBD8-CF5B-3B12-3153-D18CF69F4202}"/>
               </a:ext>
             </a:extLst>
           </p:cNvPr>
@@ -8324,10 +8915,10 @@
         </p:nvSpPr>
         <p:spPr>
           <a:xfrm>
-            <a:off x="6423378" y="3138311"/>
-            <a:ext cx="1264355" cy="666045"/>
-          </a:xfrm>
-          <a:prstGeom prst="rect">
+            <a:off x="3990620" y="2624666"/>
+            <a:ext cx="2410179" cy="536220"/>
+          </a:xfrm>
+          <a:prstGeom prst="roundRect">
             <a:avLst/>
           </a:prstGeom>
         </p:spPr>
@@ -8352,16 +8943,23 @@
           <a:lstStyle/>
           <a:p>
             <a:pPr algn="ctr"/>
-            <a:endParaRPr lang="en-US" dirty="0"/>
-          </a:p>
-        </p:txBody>
-      </p:sp>
-      <p:sp>
-        <p:nvSpPr>
-          <p:cNvPr id="120" name="Rectangle 119">
+            <a:r>
+              <a:rPr lang="en-US" dirty="0">
+                <a:solidFill>
+                  <a:schemeClr val="tx1"/>
+                </a:solidFill>
+              </a:rPr>
+              <a:t>2583 Car</a:t>
+            </a:r>
+          </a:p>
+        </p:txBody>
+      </p:sp>
+      <p:sp>
+        <p:nvSpPr>
+          <p:cNvPr id="30" name="Rectangle: Rounded Corners 29">
             <a:extLst>
               <a:ext uri="{FF2B5EF4-FFF2-40B4-BE49-F238E27FC236}">
-                <a16:creationId xmlns:a16="http://schemas.microsoft.com/office/drawing/2014/main" id="{9DAE32CC-4412-FDAE-82A7-1273F94FD0EA}"/>
+                <a16:creationId xmlns:a16="http://schemas.microsoft.com/office/drawing/2014/main" id="{2B52CFD6-7CD9-3ABF-27A5-913B512FFBB5}"/>
               </a:ext>
             </a:extLst>
           </p:cNvPr>
@@ -8370,13 +8968,12 @@
         </p:nvSpPr>
         <p:spPr>
           <a:xfrm>
-            <a:off x="3352801" y="1964266"/>
-            <a:ext cx="4921956" cy="2167467"/>
-          </a:xfrm>
-          <a:prstGeom prst="rect">
-            <a:avLst/>
-          </a:prstGeom>
-          <a:noFill/>
+            <a:off x="3962398" y="2032000"/>
+            <a:ext cx="2415823" cy="536220"/>
+          </a:xfrm>
+          <a:prstGeom prst="roundRect">
+            <a:avLst/>
+          </a:prstGeom>
         </p:spPr>
         <p:style>
           <a:lnRef idx="2">
@@ -8399,58 +8996,23 @@
           <a:lstStyle/>
           <a:p>
             <a:pPr algn="ctr"/>
-            <a:endParaRPr lang="en-US"/>
-          </a:p>
-        </p:txBody>
-      </p:sp>
-      <p:cxnSp>
-        <p:nvCxnSpPr>
-          <p:cNvPr id="121" name="Straight Arrow Connector 120">
+            <a:r>
+              <a:rPr lang="en-US" dirty="0">
+                <a:solidFill>
+                  <a:schemeClr val="tx1"/>
+                </a:solidFill>
+              </a:rPr>
+              <a:t>2585 Car</a:t>
+            </a:r>
+          </a:p>
+        </p:txBody>
+      </p:sp>
+      <p:sp>
+        <p:nvSpPr>
+          <p:cNvPr id="31" name="Rectangle 30">
             <a:extLst>
               <a:ext uri="{FF2B5EF4-FFF2-40B4-BE49-F238E27FC236}">
-                <a16:creationId xmlns:a16="http://schemas.microsoft.com/office/drawing/2014/main" id="{F70C7334-7C96-5838-2965-04F683316456}"/>
-              </a:ext>
-            </a:extLst>
-          </p:cNvPr>
-          <p:cNvCxnSpPr>
-            <a:cxnSpLocks/>
-          </p:cNvCxnSpPr>
-          <p:nvPr/>
-        </p:nvCxnSpPr>
-        <p:spPr>
-          <a:xfrm>
-            <a:off x="7761114" y="2370667"/>
-            <a:ext cx="0" cy="711200"/>
-          </a:xfrm>
-          <a:prstGeom prst="straightConnector1">
-            <a:avLst/>
-          </a:prstGeom>
-          <a:ln>
-            <a:headEnd type="triangle"/>
-            <a:tailEnd type="triangle"/>
-          </a:ln>
-        </p:spPr>
-        <p:style>
-          <a:lnRef idx="1">
-            <a:schemeClr val="accent1"/>
-          </a:lnRef>
-          <a:fillRef idx="0">
-            <a:schemeClr val="accent1"/>
-          </a:fillRef>
-          <a:effectRef idx="0">
-            <a:schemeClr val="accent1"/>
-          </a:effectRef>
-          <a:fontRef idx="minor">
-            <a:schemeClr val="tx1"/>
-          </a:fontRef>
-        </p:style>
-      </p:cxnSp>
-      <p:sp>
-        <p:nvSpPr>
-          <p:cNvPr id="122" name="Rectangle 121">
-            <a:extLst>
-              <a:ext uri="{FF2B5EF4-FFF2-40B4-BE49-F238E27FC236}">
-                <a16:creationId xmlns:a16="http://schemas.microsoft.com/office/drawing/2014/main" id="{FEB644D4-1B7D-9594-5182-848C80D93C57}"/>
+                <a16:creationId xmlns:a16="http://schemas.microsoft.com/office/drawing/2014/main" id="{D04B32CF-C037-A31B-98CA-5F6B3BC5B605}"/>
               </a:ext>
             </a:extLst>
           </p:cNvPr>
@@ -8459,16 +9021,13 @@
         </p:nvSpPr>
         <p:spPr>
           <a:xfrm>
-            <a:off x="7603073" y="2607731"/>
-            <a:ext cx="716842" cy="310444"/>
-          </a:xfrm>
-          <a:prstGeom prst="rect">
-            <a:avLst/>
-          </a:prstGeom>
-          <a:noFill/>
-          <a:ln>
-            <a:noFill/>
-          </a:ln>
+            <a:off x="2562578" y="1027288"/>
+            <a:ext cx="6581422" cy="5830711"/>
+          </a:xfrm>
+          <a:prstGeom prst="rect">
+            <a:avLst/>
+          </a:prstGeom>
+          <a:noFill/>
         </p:spPr>
         <p:style>
           <a:lnRef idx="2">
@@ -8491,27 +9050,16 @@
           <a:lstStyle/>
           <a:p>
             <a:pPr algn="ctr"/>
-            <a:r>
-              <a:rPr lang="en-US" dirty="0">
-                <a:solidFill>
-                  <a:schemeClr val="tx1"/>
-                </a:solidFill>
-              </a:rPr>
-              <a:t>5’</a:t>
-            </a:r>
-            <a:r>
-              <a:rPr lang="en-US" dirty="0"/>
-              <a:t>’</a:t>
-            </a:r>
+            <a:endParaRPr lang="en-US"/>
           </a:p>
         </p:txBody>
       </p:sp>
       <p:cxnSp>
         <p:nvCxnSpPr>
-          <p:cNvPr id="125" name="Straight Arrow Connector 124">
+          <p:cNvPr id="65" name="Straight Arrow Connector 64">
             <a:extLst>
               <a:ext uri="{FF2B5EF4-FFF2-40B4-BE49-F238E27FC236}">
-                <a16:creationId xmlns:a16="http://schemas.microsoft.com/office/drawing/2014/main" id="{A50EBD1F-6421-94B0-9A04-1C6E0CA337C8}"/>
+                <a16:creationId xmlns:a16="http://schemas.microsoft.com/office/drawing/2014/main" id="{A8FFDE05-5BD7-0422-0427-9855D7B84AE9}"/>
               </a:ext>
             </a:extLst>
           </p:cNvPr>
@@ -8522,631 +9070,19 @@
         </p:nvCxnSpPr>
         <p:spPr>
           <a:xfrm>
-            <a:off x="7766757" y="3110088"/>
-            <a:ext cx="0" cy="716845"/>
+            <a:off x="4651023" y="5813778"/>
+            <a:ext cx="4255911" cy="0"/>
           </a:xfrm>
           <a:prstGeom prst="straightConnector1">
             <a:avLst/>
           </a:prstGeom>
           <a:ln>
+            <a:solidFill>
+              <a:srgbClr val="FF0000"/>
+            </a:solidFill>
             <a:headEnd type="triangle"/>
             <a:tailEnd type="triangle"/>
           </a:ln>
-        </p:spPr>
-        <p:style>
-          <a:lnRef idx="1">
-            <a:schemeClr val="accent1"/>
-          </a:lnRef>
-          <a:fillRef idx="0">
-            <a:schemeClr val="accent1"/>
-          </a:fillRef>
-          <a:effectRef idx="0">
-            <a:schemeClr val="accent1"/>
-          </a:effectRef>
-          <a:fontRef idx="minor">
-            <a:schemeClr val="tx1"/>
-          </a:fontRef>
-        </p:style>
-      </p:cxnSp>
-      <p:sp>
-        <p:nvSpPr>
-          <p:cNvPr id="126" name="Rectangle 125">
-            <a:extLst>
-              <a:ext uri="{FF2B5EF4-FFF2-40B4-BE49-F238E27FC236}">
-                <a16:creationId xmlns:a16="http://schemas.microsoft.com/office/drawing/2014/main" id="{84D37148-89FC-C602-4EA8-581A41BD46A7}"/>
-              </a:ext>
-            </a:extLst>
-          </p:cNvPr>
-          <p:cNvSpPr/>
-          <p:nvPr/>
-        </p:nvSpPr>
-        <p:spPr>
-          <a:xfrm>
-            <a:off x="7484539" y="3324574"/>
-            <a:ext cx="716842" cy="310444"/>
-          </a:xfrm>
-          <a:prstGeom prst="rect">
-            <a:avLst/>
-          </a:prstGeom>
-          <a:noFill/>
-          <a:ln>
-            <a:noFill/>
-          </a:ln>
-        </p:spPr>
-        <p:style>
-          <a:lnRef idx="2">
-            <a:schemeClr val="accent1">
-              <a:shade val="15000"/>
-            </a:schemeClr>
-          </a:lnRef>
-          <a:fillRef idx="1">
-            <a:schemeClr val="accent1"/>
-          </a:fillRef>
-          <a:effectRef idx="0">
-            <a:schemeClr val="accent1"/>
-          </a:effectRef>
-          <a:fontRef idx="minor">
-            <a:schemeClr val="lt1"/>
-          </a:fontRef>
-        </p:style>
-        <p:txBody>
-          <a:bodyPr rtlCol="0" anchor="ctr"/>
-          <a:lstStyle/>
-          <a:p>
-            <a:pPr algn="ctr"/>
-            <a:r>
-              <a:rPr lang="en-US" dirty="0">
-                <a:solidFill>
-                  <a:schemeClr val="tx1"/>
-                </a:solidFill>
-              </a:rPr>
-              <a:t>5’</a:t>
-            </a:r>
-            <a:r>
-              <a:rPr lang="en-US" dirty="0"/>
-              <a:t>’</a:t>
-            </a:r>
-          </a:p>
-        </p:txBody>
-      </p:sp>
-      <p:cxnSp>
-        <p:nvCxnSpPr>
-          <p:cNvPr id="131" name="Straight Arrow Connector 130">
-            <a:extLst>
-              <a:ext uri="{FF2B5EF4-FFF2-40B4-BE49-F238E27FC236}">
-                <a16:creationId xmlns:a16="http://schemas.microsoft.com/office/drawing/2014/main" id="{9BBDCC15-1516-53BB-2F35-26C34FD21618}"/>
-              </a:ext>
-            </a:extLst>
-          </p:cNvPr>
-          <p:cNvCxnSpPr>
-            <a:cxnSpLocks/>
-          </p:cNvCxnSpPr>
-          <p:nvPr/>
-        </p:nvCxnSpPr>
-        <p:spPr>
-          <a:xfrm>
-            <a:off x="6457244" y="3894663"/>
-            <a:ext cx="1241778" cy="0"/>
-          </a:xfrm>
-          <a:prstGeom prst="straightConnector1">
-            <a:avLst/>
-          </a:prstGeom>
-          <a:ln>
-            <a:headEnd type="triangle"/>
-            <a:tailEnd type="triangle"/>
-          </a:ln>
-        </p:spPr>
-        <p:style>
-          <a:lnRef idx="1">
-            <a:schemeClr val="accent1"/>
-          </a:lnRef>
-          <a:fillRef idx="0">
-            <a:schemeClr val="accent1"/>
-          </a:fillRef>
-          <a:effectRef idx="0">
-            <a:schemeClr val="accent1"/>
-          </a:effectRef>
-          <a:fontRef idx="minor">
-            <a:schemeClr val="tx1"/>
-          </a:fontRef>
-        </p:style>
-      </p:cxnSp>
-      <p:sp>
-        <p:nvSpPr>
-          <p:cNvPr id="132" name="Rectangle 131">
-            <a:extLst>
-              <a:ext uri="{FF2B5EF4-FFF2-40B4-BE49-F238E27FC236}">
-                <a16:creationId xmlns:a16="http://schemas.microsoft.com/office/drawing/2014/main" id="{2011628A-1D2B-BB27-D499-226680F9598D}"/>
-              </a:ext>
-            </a:extLst>
-          </p:cNvPr>
-          <p:cNvSpPr/>
-          <p:nvPr/>
-        </p:nvSpPr>
-        <p:spPr>
-          <a:xfrm>
-            <a:off x="6666092" y="3849508"/>
-            <a:ext cx="716842" cy="310444"/>
-          </a:xfrm>
-          <a:prstGeom prst="rect">
-            <a:avLst/>
-          </a:prstGeom>
-          <a:noFill/>
-          <a:ln>
-            <a:noFill/>
-          </a:ln>
-        </p:spPr>
-        <p:style>
-          <a:lnRef idx="2">
-            <a:schemeClr val="accent1">
-              <a:shade val="15000"/>
-            </a:schemeClr>
-          </a:lnRef>
-          <a:fillRef idx="1">
-            <a:schemeClr val="accent1"/>
-          </a:fillRef>
-          <a:effectRef idx="0">
-            <a:schemeClr val="accent1"/>
-          </a:effectRef>
-          <a:fontRef idx="minor">
-            <a:schemeClr val="lt1"/>
-          </a:fontRef>
-        </p:style>
-        <p:txBody>
-          <a:bodyPr rtlCol="0" anchor="ctr"/>
-          <a:lstStyle/>
-          <a:p>
-            <a:pPr algn="ctr"/>
-            <a:r>
-              <a:rPr lang="en-US" dirty="0"/>
-              <a:t>2</a:t>
-            </a:r>
-            <a:r>
-              <a:rPr lang="en-US" dirty="0">
-                <a:solidFill>
-                  <a:schemeClr val="tx1"/>
-                </a:solidFill>
-              </a:rPr>
-              <a:t>6’</a:t>
-            </a:r>
-            <a:r>
-              <a:rPr lang="en-US" dirty="0"/>
-              <a:t>’</a:t>
-            </a:r>
-          </a:p>
-        </p:txBody>
-      </p:sp>
-      <p:sp>
-        <p:nvSpPr>
-          <p:cNvPr id="136" name="Rectangle 135">
-            <a:extLst>
-              <a:ext uri="{FF2B5EF4-FFF2-40B4-BE49-F238E27FC236}">
-                <a16:creationId xmlns:a16="http://schemas.microsoft.com/office/drawing/2014/main" id="{948D596E-FC5B-3182-14E0-14636B763523}"/>
-              </a:ext>
-            </a:extLst>
-          </p:cNvPr>
-          <p:cNvSpPr/>
-          <p:nvPr/>
-        </p:nvSpPr>
-        <p:spPr>
-          <a:xfrm>
-            <a:off x="3296357" y="4972756"/>
-            <a:ext cx="4380087" cy="1619955"/>
-          </a:xfrm>
-          <a:prstGeom prst="rect">
-            <a:avLst/>
-          </a:prstGeom>
-        </p:spPr>
-        <p:style>
-          <a:lnRef idx="2">
-            <a:schemeClr val="accent1">
-              <a:shade val="15000"/>
-            </a:schemeClr>
-          </a:lnRef>
-          <a:fillRef idx="1">
-            <a:schemeClr val="accent1"/>
-          </a:fillRef>
-          <a:effectRef idx="0">
-            <a:schemeClr val="accent1"/>
-          </a:effectRef>
-          <a:fontRef idx="minor">
-            <a:schemeClr val="lt1"/>
-          </a:fontRef>
-        </p:style>
-        <p:txBody>
-          <a:bodyPr rtlCol="0" anchor="ctr"/>
-          <a:lstStyle/>
-          <a:p>
-            <a:pPr algn="ctr"/>
-            <a:r>
-              <a:rPr lang="en-US" dirty="0">
-                <a:solidFill>
-                  <a:schemeClr val="tx1"/>
-                </a:solidFill>
-              </a:rPr>
-              <a:t>Main Building</a:t>
-            </a:r>
-          </a:p>
-        </p:txBody>
-      </p:sp>
-      <p:sp>
-        <p:nvSpPr>
-          <p:cNvPr id="137" name="Rectangle 136">
-            <a:extLst>
-              <a:ext uri="{FF2B5EF4-FFF2-40B4-BE49-F238E27FC236}">
-                <a16:creationId xmlns:a16="http://schemas.microsoft.com/office/drawing/2014/main" id="{15D8D79D-6512-7EF7-CB10-15DA58044447}"/>
-              </a:ext>
-            </a:extLst>
-          </p:cNvPr>
-          <p:cNvSpPr/>
-          <p:nvPr/>
-        </p:nvSpPr>
-        <p:spPr>
-          <a:xfrm>
-            <a:off x="5328357" y="4763914"/>
-            <a:ext cx="903111" cy="316089"/>
-          </a:xfrm>
-          <a:prstGeom prst="rect">
-            <a:avLst/>
-          </a:prstGeom>
-          <a:noFill/>
-          <a:ln>
-            <a:noFill/>
-          </a:ln>
-        </p:spPr>
-        <p:style>
-          <a:lnRef idx="2">
-            <a:schemeClr val="accent1">
-              <a:shade val="15000"/>
-            </a:schemeClr>
-          </a:lnRef>
-          <a:fillRef idx="1">
-            <a:schemeClr val="accent1"/>
-          </a:fillRef>
-          <a:effectRef idx="0">
-            <a:schemeClr val="accent1"/>
-          </a:effectRef>
-          <a:fontRef idx="minor">
-            <a:schemeClr val="lt1"/>
-          </a:fontRef>
-        </p:style>
-        <p:txBody>
-          <a:bodyPr rtlCol="0" anchor="ctr"/>
-          <a:lstStyle/>
-          <a:p>
-            <a:pPr algn="ctr"/>
-            <a:r>
-              <a:rPr lang="en-US" dirty="0">
-                <a:solidFill>
-                  <a:schemeClr val="tx1"/>
-                </a:solidFill>
-              </a:rPr>
-              <a:t>26’</a:t>
-            </a:r>
-            <a:r>
-              <a:rPr lang="en-US" dirty="0"/>
-              <a:t>’</a:t>
-            </a:r>
-          </a:p>
-        </p:txBody>
-      </p:sp>
-      <p:sp>
-        <p:nvSpPr>
-          <p:cNvPr id="142" name="Rectangle 141">
-            <a:extLst>
-              <a:ext uri="{FF2B5EF4-FFF2-40B4-BE49-F238E27FC236}">
-                <a16:creationId xmlns:a16="http://schemas.microsoft.com/office/drawing/2014/main" id="{63CF27F1-8EFB-BF63-C85C-C8A30DE9B3FB}"/>
-              </a:ext>
-            </a:extLst>
-          </p:cNvPr>
-          <p:cNvSpPr/>
-          <p:nvPr/>
-        </p:nvSpPr>
-        <p:spPr>
-          <a:xfrm>
-            <a:off x="6677381" y="3341503"/>
-            <a:ext cx="716842" cy="310444"/>
-          </a:xfrm>
-          <a:prstGeom prst="rect">
-            <a:avLst/>
-          </a:prstGeom>
-          <a:noFill/>
-          <a:ln>
-            <a:noFill/>
-          </a:ln>
-        </p:spPr>
-        <p:style>
-          <a:lnRef idx="2">
-            <a:schemeClr val="accent1">
-              <a:shade val="15000"/>
-            </a:schemeClr>
-          </a:lnRef>
-          <a:fillRef idx="1">
-            <a:schemeClr val="accent1"/>
-          </a:fillRef>
-          <a:effectRef idx="0">
-            <a:schemeClr val="accent1"/>
-          </a:effectRef>
-          <a:fontRef idx="minor">
-            <a:schemeClr val="lt1"/>
-          </a:fontRef>
-        </p:style>
-        <p:txBody>
-          <a:bodyPr rtlCol="0" anchor="ctr"/>
-          <a:lstStyle/>
-          <a:p>
-            <a:pPr algn="ctr"/>
-            <a:r>
-              <a:rPr lang="en-US" dirty="0">
-                <a:solidFill>
-                  <a:schemeClr val="tx1"/>
-                </a:solidFill>
-              </a:rPr>
-              <a:t>2581</a:t>
-            </a:r>
-            <a:endParaRPr lang="en-US" dirty="0"/>
-          </a:p>
-        </p:txBody>
-      </p:sp>
-      <p:sp>
-        <p:nvSpPr>
-          <p:cNvPr id="143" name="Rectangle 142">
-            <a:extLst>
-              <a:ext uri="{FF2B5EF4-FFF2-40B4-BE49-F238E27FC236}">
-                <a16:creationId xmlns:a16="http://schemas.microsoft.com/office/drawing/2014/main" id="{A6F06832-B5C7-2B8C-D9C1-2FF1BA64FC17}"/>
-              </a:ext>
-            </a:extLst>
-          </p:cNvPr>
-          <p:cNvSpPr/>
-          <p:nvPr/>
-        </p:nvSpPr>
-        <p:spPr>
-          <a:xfrm>
-            <a:off x="6310494" y="2658529"/>
-            <a:ext cx="716842" cy="310444"/>
-          </a:xfrm>
-          <a:prstGeom prst="rect">
-            <a:avLst/>
-          </a:prstGeom>
-          <a:noFill/>
-          <a:ln>
-            <a:noFill/>
-          </a:ln>
-        </p:spPr>
-        <p:style>
-          <a:lnRef idx="2">
-            <a:schemeClr val="accent1">
-              <a:shade val="15000"/>
-            </a:schemeClr>
-          </a:lnRef>
-          <a:fillRef idx="1">
-            <a:schemeClr val="accent1"/>
-          </a:fillRef>
-          <a:effectRef idx="0">
-            <a:schemeClr val="accent1"/>
-          </a:effectRef>
-          <a:fontRef idx="minor">
-            <a:schemeClr val="lt1"/>
-          </a:fontRef>
-        </p:style>
-        <p:txBody>
-          <a:bodyPr rtlCol="0" anchor="ctr"/>
-          <a:lstStyle/>
-          <a:p>
-            <a:pPr algn="ctr"/>
-            <a:r>
-              <a:rPr lang="en-US" dirty="0">
-                <a:solidFill>
-                  <a:schemeClr val="tx1"/>
-                </a:solidFill>
-              </a:rPr>
-              <a:t>2583</a:t>
-            </a:r>
-            <a:endParaRPr lang="en-US" dirty="0"/>
-          </a:p>
-        </p:txBody>
-      </p:sp>
-      <p:sp>
-        <p:nvSpPr>
-          <p:cNvPr id="144" name="Rectangle 143">
-            <a:extLst>
-              <a:ext uri="{FF2B5EF4-FFF2-40B4-BE49-F238E27FC236}">
-                <a16:creationId xmlns:a16="http://schemas.microsoft.com/office/drawing/2014/main" id="{00D75067-3D2D-3D98-AA6F-F78F902A12E1}"/>
-              </a:ext>
-            </a:extLst>
-          </p:cNvPr>
-          <p:cNvSpPr/>
-          <p:nvPr/>
-        </p:nvSpPr>
-        <p:spPr>
-          <a:xfrm>
-            <a:off x="7061201" y="2421466"/>
-            <a:ext cx="620888" cy="711200"/>
-          </a:xfrm>
-          <a:prstGeom prst="rect">
-            <a:avLst/>
-          </a:prstGeom>
-        </p:spPr>
-        <p:style>
-          <a:lnRef idx="2">
-            <a:schemeClr val="accent1">
-              <a:shade val="15000"/>
-            </a:schemeClr>
-          </a:lnRef>
-          <a:fillRef idx="1">
-            <a:schemeClr val="accent1"/>
-          </a:fillRef>
-          <a:effectRef idx="0">
-            <a:schemeClr val="accent1"/>
-          </a:effectRef>
-          <a:fontRef idx="minor">
-            <a:schemeClr val="lt1"/>
-          </a:fontRef>
-        </p:style>
-        <p:txBody>
-          <a:bodyPr rtlCol="0" anchor="ctr"/>
-          <a:lstStyle/>
-          <a:p>
-            <a:pPr algn="ctr"/>
-            <a:endParaRPr lang="en-US" dirty="0"/>
-          </a:p>
-        </p:txBody>
-      </p:sp>
-      <p:sp>
-        <p:nvSpPr>
-          <p:cNvPr id="145" name="Rectangle 144">
-            <a:extLst>
-              <a:ext uri="{FF2B5EF4-FFF2-40B4-BE49-F238E27FC236}">
-                <a16:creationId xmlns:a16="http://schemas.microsoft.com/office/drawing/2014/main" id="{9A957388-4A00-3C26-60A3-444061CAD976}"/>
-              </a:ext>
-            </a:extLst>
-          </p:cNvPr>
-          <p:cNvSpPr/>
-          <p:nvPr/>
-        </p:nvSpPr>
-        <p:spPr>
-          <a:xfrm>
-            <a:off x="7061205" y="2619018"/>
-            <a:ext cx="716842" cy="310444"/>
-          </a:xfrm>
-          <a:prstGeom prst="rect">
-            <a:avLst/>
-          </a:prstGeom>
-          <a:noFill/>
-          <a:ln>
-            <a:noFill/>
-          </a:ln>
-        </p:spPr>
-        <p:style>
-          <a:lnRef idx="2">
-            <a:schemeClr val="accent1">
-              <a:shade val="15000"/>
-            </a:schemeClr>
-          </a:lnRef>
-          <a:fillRef idx="1">
-            <a:schemeClr val="accent1"/>
-          </a:fillRef>
-          <a:effectRef idx="0">
-            <a:schemeClr val="accent1"/>
-          </a:effectRef>
-          <a:fontRef idx="minor">
-            <a:schemeClr val="lt1"/>
-          </a:fontRef>
-        </p:style>
-        <p:txBody>
-          <a:bodyPr rtlCol="0" anchor="ctr"/>
-          <a:lstStyle/>
-          <a:p>
-            <a:pPr algn="ctr"/>
-            <a:r>
-              <a:rPr lang="en-US" dirty="0">
-                <a:solidFill>
-                  <a:schemeClr val="tx1"/>
-                </a:solidFill>
-              </a:rPr>
-              <a:t>2585</a:t>
-            </a:r>
-            <a:endParaRPr lang="en-US" dirty="0"/>
-          </a:p>
-        </p:txBody>
-      </p:sp>
-      <p:cxnSp>
-        <p:nvCxnSpPr>
-          <p:cNvPr id="147" name="Straight Connector 146">
-            <a:extLst>
-              <a:ext uri="{FF2B5EF4-FFF2-40B4-BE49-F238E27FC236}">
-                <a16:creationId xmlns:a16="http://schemas.microsoft.com/office/drawing/2014/main" id="{3E310E01-C5FA-0CE2-4BE6-8155F3ED9AA6}"/>
-              </a:ext>
-            </a:extLst>
-          </p:cNvPr>
-          <p:cNvCxnSpPr>
-            <a:cxnSpLocks/>
-          </p:cNvCxnSpPr>
-          <p:nvPr/>
-        </p:nvCxnSpPr>
-        <p:spPr>
-          <a:xfrm flipV="1">
-            <a:off x="6570133" y="2178756"/>
-            <a:ext cx="395111" cy="237066"/>
-          </a:xfrm>
-          <a:prstGeom prst="line">
-            <a:avLst/>
-          </a:prstGeom>
-        </p:spPr>
-        <p:style>
-          <a:lnRef idx="1">
-            <a:schemeClr val="accent1"/>
-          </a:lnRef>
-          <a:fillRef idx="0">
-            <a:schemeClr val="accent1"/>
-          </a:fillRef>
-          <a:effectRef idx="0">
-            <a:schemeClr val="accent1"/>
-          </a:effectRef>
-          <a:fontRef idx="minor">
-            <a:schemeClr val="tx1"/>
-          </a:fontRef>
-        </p:style>
-      </p:cxnSp>
-      <p:cxnSp>
-        <p:nvCxnSpPr>
-          <p:cNvPr id="149" name="Straight Connector 148">
-            <a:extLst>
-              <a:ext uri="{FF2B5EF4-FFF2-40B4-BE49-F238E27FC236}">
-                <a16:creationId xmlns:a16="http://schemas.microsoft.com/office/drawing/2014/main" id="{33819469-2C83-1947-15A3-4AD80758B68D}"/>
-              </a:ext>
-            </a:extLst>
-          </p:cNvPr>
-          <p:cNvCxnSpPr/>
-          <p:nvPr/>
-        </p:nvCxnSpPr>
-        <p:spPr>
-          <a:xfrm flipH="1" flipV="1">
-            <a:off x="7202311" y="2212622"/>
-            <a:ext cx="395111" cy="180622"/>
-          </a:xfrm>
-          <a:prstGeom prst="line">
-            <a:avLst/>
-          </a:prstGeom>
-        </p:spPr>
-        <p:style>
-          <a:lnRef idx="1">
-            <a:schemeClr val="accent1"/>
-          </a:lnRef>
-          <a:fillRef idx="0">
-            <a:schemeClr val="accent1"/>
-          </a:fillRef>
-          <a:effectRef idx="0">
-            <a:schemeClr val="accent1"/>
-          </a:effectRef>
-          <a:fontRef idx="minor">
-            <a:schemeClr val="tx1"/>
-          </a:fontRef>
-        </p:style>
-      </p:cxnSp>
-      <p:cxnSp>
-        <p:nvCxnSpPr>
-          <p:cNvPr id="151" name="Straight Connector 150">
-            <a:extLst>
-              <a:ext uri="{FF2B5EF4-FFF2-40B4-BE49-F238E27FC236}">
-                <a16:creationId xmlns:a16="http://schemas.microsoft.com/office/drawing/2014/main" id="{BD757474-840D-AB5C-04C1-2EF95D689D3F}"/>
-              </a:ext>
-            </a:extLst>
-          </p:cNvPr>
-          <p:cNvCxnSpPr>
-            <a:cxnSpLocks/>
-            <a:endCxn id="132" idx="3"/>
-          </p:cNvCxnSpPr>
-          <p:nvPr/>
-        </p:nvCxnSpPr>
-        <p:spPr>
-          <a:xfrm>
-            <a:off x="6897511" y="3804356"/>
-            <a:ext cx="485423" cy="200374"/>
-          </a:xfrm>
-          <a:prstGeom prst="line">
-            <a:avLst/>
-          </a:prstGeom>
         </p:spPr>
         <p:style>
           <a:lnRef idx="1">
@@ -9265,6 +9201,7 @@
           <a:lstStyle/>
           <a:p>
             <a:fld id="{C0046081-7BE4-4C10-815F-4EB01DC1A714}" type="slidenum">
+              <a:rPr/>
               <a:t>3</a:t>
             </a:fld>
             <a:endParaRPr/>

--- a/Palo_Alto_2581/000_PaloAlto_Shed.pptx
+++ b/Palo_Alto_2581/000_PaloAlto_Shed.pptx
@@ -63,19 +63,16 @@
             <a:noAutofit/>
           </a:bodyPr>
           <a:p>
-            <a:r>
-              <a:rPr b="0" lang="en-US" sz="1800" spc="-1" strike="noStrike">
-                <a:solidFill>
-                  <a:srgbClr val="000000"/>
-                </a:solidFill>
+            <a:pPr algn="ctr">
+              <a:buNone/>
+            </a:pPr>
+            <a:r>
+              <a:rPr b="0" lang="en-US" sz="4400" spc="-1" strike="noStrike">
                 <a:latin typeface="Arial"/>
               </a:rPr>
               <a:t>Click to move the slide</a:t>
             </a:r>
-            <a:endParaRPr b="0" lang="en-US" sz="1800" spc="-1" strike="noStrike">
-              <a:solidFill>
-                <a:srgbClr val="000000"/>
-              </a:solidFill>
+            <a:endParaRPr b="0" lang="en-US" sz="4400" spc="-1" strike="noStrike">
               <a:latin typeface="Arial"/>
             </a:endParaRPr>
           </a:p>
@@ -298,7 +295,7 @@
             <a:pPr algn="r">
               <a:buNone/>
             </a:pPr>
-            <a:fld id="{BC4AFCE5-132F-4DED-8DDC-3C190E5D00C6}" type="slidenum">
+            <a:fld id="{3693FDE7-6333-4D08-94D3-8260C2397143}" type="slidenum">
               <a:rPr b="0" lang="en-US" sz="1400" spc="-1" strike="noStrike">
                 <a:latin typeface="Times New Roman"/>
               </a:rPr>
@@ -346,7 +343,7 @@
         <p:spPr>
           <a:xfrm>
             <a:off x="1143000" y="685800"/>
-            <a:ext cx="4536720" cy="3393720"/>
+            <a:ext cx="4536360" cy="3393360"/>
           </a:xfrm>
           <a:prstGeom prst="rect">
             <a:avLst/>
@@ -369,7 +366,7 @@
         <p:spPr>
           <a:xfrm>
             <a:off x="685800" y="4343400"/>
-            <a:ext cx="5450760" cy="4079160"/>
+            <a:ext cx="5450400" cy="4078800"/>
           </a:xfrm>
           <a:prstGeom prst="rect">
             <a:avLst/>
@@ -403,7 +400,7 @@
         <p:spPr>
           <a:xfrm>
             <a:off x="3884760" y="8685360"/>
-            <a:ext cx="2936160" cy="421560"/>
+            <a:ext cx="2935800" cy="421200"/>
           </a:xfrm>
           <a:prstGeom prst="rect">
             <a:avLst/>
@@ -439,7 +436,7 @@
               </a:lnSpc>
               <a:buNone/>
             </a:pPr>
-            <a:fld id="{59E935E2-D901-4870-B6B4-7FAFDA577ADF}" type="slidenum">
+            <a:fld id="{4F8E03AF-F61A-431E-95F3-F6E7C6EF7FBC}" type="slidenum">
               <a:rPr b="0" lang="en-US" sz="1200" spc="-1" strike="noStrike">
                 <a:solidFill>
                   <a:srgbClr val="000000"/>
@@ -511,7 +508,7 @@
         <p:txBody>
           <a:bodyPr/>
           <a:p>
-            <a:fld id="{544301C7-5DB9-4E3A-91DB-6702CED82347}" type="slidenum">
+            <a:fld id="{566D5DE2-AA56-4EC8-BAE4-9DFAE19ECDF6}" type="slidenum">
               <a:t>&lt;#&gt;</a:t>
             </a:fld>
           </a:p>
@@ -588,10 +585,10 @@
             <a:noAutofit/>
           </a:bodyPr>
           <a:p>
-            <a:endParaRPr b="0" lang="en-US" sz="1800" spc="-1" strike="noStrike">
-              <a:solidFill>
-                <a:srgbClr val="000000"/>
-              </a:solidFill>
+            <a:pPr algn="ctr">
+              <a:buNone/>
+            </a:pPr>
+            <a:endParaRPr b="0" lang="en-US" sz="4400" spc="-1" strike="noStrike">
               <a:latin typeface="Arial"/>
             </a:endParaRPr>
           </a:p>
@@ -625,19 +622,7 @@
             <a:normAutofit/>
           </a:bodyPr>
           <a:p>
-            <a:pPr>
-              <a:lnSpc>
-                <a:spcPct val="90000"/>
-              </a:lnSpc>
-              <a:spcBef>
-                <a:spcPts val="1417"/>
-              </a:spcBef>
-              <a:buNone/>
-            </a:pPr>
-            <a:endParaRPr b="0" lang="en-US" sz="2800" spc="-1" strike="noStrike">
-              <a:solidFill>
-                <a:srgbClr val="000000"/>
-              </a:solidFill>
+            <a:endParaRPr b="0" lang="en-US" sz="3200" spc="-1" strike="noStrike">
               <a:latin typeface="Arial"/>
             </a:endParaRPr>
           </a:p>
@@ -671,19 +656,7 @@
             <a:normAutofit/>
           </a:bodyPr>
           <a:p>
-            <a:pPr>
-              <a:lnSpc>
-                <a:spcPct val="90000"/>
-              </a:lnSpc>
-              <a:spcBef>
-                <a:spcPts val="1417"/>
-              </a:spcBef>
-              <a:buNone/>
-            </a:pPr>
-            <a:endParaRPr b="0" lang="en-US" sz="2800" spc="-1" strike="noStrike">
-              <a:solidFill>
-                <a:srgbClr val="000000"/>
-              </a:solidFill>
+            <a:endParaRPr b="0" lang="en-US" sz="3200" spc="-1" strike="noStrike">
               <a:latin typeface="Arial"/>
             </a:endParaRPr>
           </a:p>
@@ -723,7 +696,7 @@
         <p:txBody>
           <a:bodyPr/>
           <a:p>
-            <a:fld id="{821647E6-5BCA-418E-8B20-4873B347350B}" type="slidenum">
+            <a:fld id="{E0A98730-629B-4E96-91B7-2B52CA7A26AC}" type="slidenum">
               <a:t>&lt;#&gt;</a:t>
             </a:fld>
           </a:p>
@@ -800,10 +773,10 @@
             <a:noAutofit/>
           </a:bodyPr>
           <a:p>
-            <a:endParaRPr b="0" lang="en-US" sz="1800" spc="-1" strike="noStrike">
-              <a:solidFill>
-                <a:srgbClr val="000000"/>
-              </a:solidFill>
+            <a:pPr algn="ctr">
+              <a:buNone/>
+            </a:pPr>
+            <a:endParaRPr b="0" lang="en-US" sz="4400" spc="-1" strike="noStrike">
               <a:latin typeface="Arial"/>
             </a:endParaRPr>
           </a:p>
@@ -837,19 +810,7 @@
             <a:normAutofit/>
           </a:bodyPr>
           <a:p>
-            <a:pPr>
-              <a:lnSpc>
-                <a:spcPct val="90000"/>
-              </a:lnSpc>
-              <a:spcBef>
-                <a:spcPts val="1417"/>
-              </a:spcBef>
-              <a:buNone/>
-            </a:pPr>
-            <a:endParaRPr b="0" lang="en-US" sz="2800" spc="-1" strike="noStrike">
-              <a:solidFill>
-                <a:srgbClr val="000000"/>
-              </a:solidFill>
+            <a:endParaRPr b="0" lang="en-US" sz="3200" spc="-1" strike="noStrike">
               <a:latin typeface="Arial"/>
             </a:endParaRPr>
           </a:p>
@@ -883,19 +844,7 @@
             <a:normAutofit/>
           </a:bodyPr>
           <a:p>
-            <a:pPr>
-              <a:lnSpc>
-                <a:spcPct val="90000"/>
-              </a:lnSpc>
-              <a:spcBef>
-                <a:spcPts val="1417"/>
-              </a:spcBef>
-              <a:buNone/>
-            </a:pPr>
-            <a:endParaRPr b="0" lang="en-US" sz="2800" spc="-1" strike="noStrike">
-              <a:solidFill>
-                <a:srgbClr val="000000"/>
-              </a:solidFill>
+            <a:endParaRPr b="0" lang="en-US" sz="3200" spc="-1" strike="noStrike">
               <a:latin typeface="Arial"/>
             </a:endParaRPr>
           </a:p>
@@ -929,19 +878,7 @@
             <a:normAutofit/>
           </a:bodyPr>
           <a:p>
-            <a:pPr>
-              <a:lnSpc>
-                <a:spcPct val="90000"/>
-              </a:lnSpc>
-              <a:spcBef>
-                <a:spcPts val="1417"/>
-              </a:spcBef>
-              <a:buNone/>
-            </a:pPr>
-            <a:endParaRPr b="0" lang="en-US" sz="2800" spc="-1" strike="noStrike">
-              <a:solidFill>
-                <a:srgbClr val="000000"/>
-              </a:solidFill>
+            <a:endParaRPr b="0" lang="en-US" sz="3200" spc="-1" strike="noStrike">
               <a:latin typeface="Arial"/>
             </a:endParaRPr>
           </a:p>
@@ -975,19 +912,7 @@
             <a:normAutofit/>
           </a:bodyPr>
           <a:p>
-            <a:pPr>
-              <a:lnSpc>
-                <a:spcPct val="90000"/>
-              </a:lnSpc>
-              <a:spcBef>
-                <a:spcPts val="1417"/>
-              </a:spcBef>
-              <a:buNone/>
-            </a:pPr>
-            <a:endParaRPr b="0" lang="en-US" sz="2800" spc="-1" strike="noStrike">
-              <a:solidFill>
-                <a:srgbClr val="000000"/>
-              </a:solidFill>
+            <a:endParaRPr b="0" lang="en-US" sz="3200" spc="-1" strike="noStrike">
               <a:latin typeface="Arial"/>
             </a:endParaRPr>
           </a:p>
@@ -1027,7 +952,7 @@
         <p:txBody>
           <a:bodyPr/>
           <a:p>
-            <a:fld id="{6F6F5DAD-0DB3-4BCB-8E8D-892450937A0B}" type="slidenum">
+            <a:fld id="{DBA5A127-80A4-4459-A648-F6F4C3AA0E06}" type="slidenum">
               <a:t>&lt;#&gt;</a:t>
             </a:fld>
           </a:p>
@@ -1104,10 +1029,10 @@
             <a:noAutofit/>
           </a:bodyPr>
           <a:p>
-            <a:endParaRPr b="0" lang="en-US" sz="1800" spc="-1" strike="noStrike">
-              <a:solidFill>
-                <a:srgbClr val="000000"/>
-              </a:solidFill>
+            <a:pPr algn="ctr">
+              <a:buNone/>
+            </a:pPr>
+            <a:endParaRPr b="0" lang="en-US" sz="4400" spc="-1" strike="noStrike">
               <a:latin typeface="Arial"/>
             </a:endParaRPr>
           </a:p>
@@ -1141,19 +1066,7 @@
             <a:normAutofit/>
           </a:bodyPr>
           <a:p>
-            <a:pPr>
-              <a:lnSpc>
-                <a:spcPct val="90000"/>
-              </a:lnSpc>
-              <a:spcBef>
-                <a:spcPts val="1417"/>
-              </a:spcBef>
-              <a:buNone/>
-            </a:pPr>
-            <a:endParaRPr b="0" lang="en-US" sz="2800" spc="-1" strike="noStrike">
-              <a:solidFill>
-                <a:srgbClr val="000000"/>
-              </a:solidFill>
+            <a:endParaRPr b="0" lang="en-US" sz="3200" spc="-1" strike="noStrike">
               <a:latin typeface="Arial"/>
             </a:endParaRPr>
           </a:p>
@@ -1187,19 +1100,7 @@
             <a:normAutofit/>
           </a:bodyPr>
           <a:p>
-            <a:pPr>
-              <a:lnSpc>
-                <a:spcPct val="90000"/>
-              </a:lnSpc>
-              <a:spcBef>
-                <a:spcPts val="1417"/>
-              </a:spcBef>
-              <a:buNone/>
-            </a:pPr>
-            <a:endParaRPr b="0" lang="en-US" sz="2800" spc="-1" strike="noStrike">
-              <a:solidFill>
-                <a:srgbClr val="000000"/>
-              </a:solidFill>
+            <a:endParaRPr b="0" lang="en-US" sz="3200" spc="-1" strike="noStrike">
               <a:latin typeface="Arial"/>
             </a:endParaRPr>
           </a:p>
@@ -1233,19 +1134,7 @@
             <a:normAutofit/>
           </a:bodyPr>
           <a:p>
-            <a:pPr>
-              <a:lnSpc>
-                <a:spcPct val="90000"/>
-              </a:lnSpc>
-              <a:spcBef>
-                <a:spcPts val="1417"/>
-              </a:spcBef>
-              <a:buNone/>
-            </a:pPr>
-            <a:endParaRPr b="0" lang="en-US" sz="2800" spc="-1" strike="noStrike">
-              <a:solidFill>
-                <a:srgbClr val="000000"/>
-              </a:solidFill>
+            <a:endParaRPr b="0" lang="en-US" sz="3200" spc="-1" strike="noStrike">
               <a:latin typeface="Arial"/>
             </a:endParaRPr>
           </a:p>
@@ -1279,19 +1168,7 @@
             <a:normAutofit/>
           </a:bodyPr>
           <a:p>
-            <a:pPr>
-              <a:lnSpc>
-                <a:spcPct val="90000"/>
-              </a:lnSpc>
-              <a:spcBef>
-                <a:spcPts val="1417"/>
-              </a:spcBef>
-              <a:buNone/>
-            </a:pPr>
-            <a:endParaRPr b="0" lang="en-US" sz="2800" spc="-1" strike="noStrike">
-              <a:solidFill>
-                <a:srgbClr val="000000"/>
-              </a:solidFill>
+            <a:endParaRPr b="0" lang="en-US" sz="3200" spc="-1" strike="noStrike">
               <a:latin typeface="Arial"/>
             </a:endParaRPr>
           </a:p>
@@ -1325,19 +1202,7 @@
             <a:normAutofit/>
           </a:bodyPr>
           <a:p>
-            <a:pPr>
-              <a:lnSpc>
-                <a:spcPct val="90000"/>
-              </a:lnSpc>
-              <a:spcBef>
-                <a:spcPts val="1417"/>
-              </a:spcBef>
-              <a:buNone/>
-            </a:pPr>
-            <a:endParaRPr b="0" lang="en-US" sz="2800" spc="-1" strike="noStrike">
-              <a:solidFill>
-                <a:srgbClr val="000000"/>
-              </a:solidFill>
+            <a:endParaRPr b="0" lang="en-US" sz="3200" spc="-1" strike="noStrike">
               <a:latin typeface="Arial"/>
             </a:endParaRPr>
           </a:p>
@@ -1371,19 +1236,7 @@
             <a:normAutofit/>
           </a:bodyPr>
           <a:p>
-            <a:pPr>
-              <a:lnSpc>
-                <a:spcPct val="90000"/>
-              </a:lnSpc>
-              <a:spcBef>
-                <a:spcPts val="1417"/>
-              </a:spcBef>
-              <a:buNone/>
-            </a:pPr>
-            <a:endParaRPr b="0" lang="en-US" sz="2800" spc="-1" strike="noStrike">
-              <a:solidFill>
-                <a:srgbClr val="000000"/>
-              </a:solidFill>
+            <a:endParaRPr b="0" lang="en-US" sz="3200" spc="-1" strike="noStrike">
               <a:latin typeface="Arial"/>
             </a:endParaRPr>
           </a:p>
@@ -1423,7 +1276,7 @@
         <p:txBody>
           <a:bodyPr/>
           <a:p>
-            <a:fld id="{81911B2E-5722-4214-B9BA-BCE7A100AA13}" type="slidenum">
+            <a:fld id="{EC7E5FD1-B819-4C4F-AF41-61F281346CBD}" type="slidenum">
               <a:t>&lt;#&gt;</a:t>
             </a:fld>
           </a:p>
@@ -1506,7 +1359,7 @@
         <p:txBody>
           <a:bodyPr/>
           <a:p>
-            <a:fld id="{73E0A9DF-19E0-4FF6-8D3D-09D6E7BAA5F7}" type="slidenum">
+            <a:fld id="{4A9D026C-42C5-439B-B7A5-9650386DC4F4}" type="slidenum">
               <a:t>&lt;#&gt;</a:t>
             </a:fld>
           </a:p>
@@ -1583,10 +1436,10 @@
             <a:noAutofit/>
           </a:bodyPr>
           <a:p>
-            <a:endParaRPr b="0" lang="en-US" sz="1800" spc="-1" strike="noStrike">
-              <a:solidFill>
-                <a:srgbClr val="000000"/>
-              </a:solidFill>
+            <a:pPr algn="ctr">
+              <a:buNone/>
+            </a:pPr>
+            <a:endParaRPr b="0" lang="en-US" sz="4400" spc="-1" strike="noStrike">
               <a:latin typeface="Arial"/>
             </a:endParaRPr>
           </a:p>
@@ -1663,7 +1516,7 @@
         <p:txBody>
           <a:bodyPr/>
           <a:p>
-            <a:fld id="{511B5350-298E-4008-AC2D-87CF6FF96667}" type="slidenum">
+            <a:fld id="{9CD434CA-6191-4BF0-9F09-C12DBB3FD0BE}" type="slidenum">
               <a:t>&lt;#&gt;</a:t>
             </a:fld>
           </a:p>
@@ -1740,10 +1593,10 @@
             <a:noAutofit/>
           </a:bodyPr>
           <a:p>
-            <a:endParaRPr b="0" lang="en-US" sz="1800" spc="-1" strike="noStrike">
-              <a:solidFill>
-                <a:srgbClr val="000000"/>
-              </a:solidFill>
+            <a:pPr algn="ctr">
+              <a:buNone/>
+            </a:pPr>
+            <a:endParaRPr b="0" lang="en-US" sz="4400" spc="-1" strike="noStrike">
               <a:latin typeface="Arial"/>
             </a:endParaRPr>
           </a:p>
@@ -1777,19 +1630,7 @@
             <a:normAutofit/>
           </a:bodyPr>
           <a:p>
-            <a:pPr>
-              <a:lnSpc>
-                <a:spcPct val="90000"/>
-              </a:lnSpc>
-              <a:spcBef>
-                <a:spcPts val="1417"/>
-              </a:spcBef>
-              <a:buNone/>
-            </a:pPr>
-            <a:endParaRPr b="0" lang="en-US" sz="2800" spc="-1" strike="noStrike">
-              <a:solidFill>
-                <a:srgbClr val="000000"/>
-              </a:solidFill>
+            <a:endParaRPr b="0" lang="en-US" sz="3200" spc="-1" strike="noStrike">
               <a:latin typeface="Arial"/>
             </a:endParaRPr>
           </a:p>
@@ -1829,7 +1670,7 @@
         <p:txBody>
           <a:bodyPr/>
           <a:p>
-            <a:fld id="{93FCC3E0-8260-49D8-889A-6BC7EA55C0FA}" type="slidenum">
+            <a:fld id="{6332D4F8-8322-4349-8A79-8183CC8F3E2C}" type="slidenum">
               <a:t>&lt;#&gt;</a:t>
             </a:fld>
           </a:p>
@@ -1906,10 +1747,10 @@
             <a:noAutofit/>
           </a:bodyPr>
           <a:p>
-            <a:endParaRPr b="0" lang="en-US" sz="1800" spc="-1" strike="noStrike">
-              <a:solidFill>
-                <a:srgbClr val="000000"/>
-              </a:solidFill>
+            <a:pPr algn="ctr">
+              <a:buNone/>
+            </a:pPr>
+            <a:endParaRPr b="0" lang="en-US" sz="4400" spc="-1" strike="noStrike">
               <a:latin typeface="Arial"/>
             </a:endParaRPr>
           </a:p>
@@ -1943,19 +1784,7 @@
             <a:normAutofit/>
           </a:bodyPr>
           <a:p>
-            <a:pPr>
-              <a:lnSpc>
-                <a:spcPct val="90000"/>
-              </a:lnSpc>
-              <a:spcBef>
-                <a:spcPts val="1417"/>
-              </a:spcBef>
-              <a:buNone/>
-            </a:pPr>
-            <a:endParaRPr b="0" lang="en-US" sz="2800" spc="-1" strike="noStrike">
-              <a:solidFill>
-                <a:srgbClr val="000000"/>
-              </a:solidFill>
+            <a:endParaRPr b="0" lang="en-US" sz="3200" spc="-1" strike="noStrike">
               <a:latin typeface="Arial"/>
             </a:endParaRPr>
           </a:p>
@@ -1989,19 +1818,7 @@
             <a:normAutofit/>
           </a:bodyPr>
           <a:p>
-            <a:pPr>
-              <a:lnSpc>
-                <a:spcPct val="90000"/>
-              </a:lnSpc>
-              <a:spcBef>
-                <a:spcPts val="1417"/>
-              </a:spcBef>
-              <a:buNone/>
-            </a:pPr>
-            <a:endParaRPr b="0" lang="en-US" sz="2800" spc="-1" strike="noStrike">
-              <a:solidFill>
-                <a:srgbClr val="000000"/>
-              </a:solidFill>
+            <a:endParaRPr b="0" lang="en-US" sz="3200" spc="-1" strike="noStrike">
               <a:latin typeface="Arial"/>
             </a:endParaRPr>
           </a:p>
@@ -2041,7 +1858,7 @@
         <p:txBody>
           <a:bodyPr/>
           <a:p>
-            <a:fld id="{4A234086-4064-481E-9950-350F6AD40F2C}" type="slidenum">
+            <a:fld id="{37D7807D-7D8F-4AEC-A2D7-967AD8484AEC}" type="slidenum">
               <a:t>&lt;#&gt;</a:t>
             </a:fld>
           </a:p>
@@ -2118,10 +1935,10 @@
             <a:noAutofit/>
           </a:bodyPr>
           <a:p>
-            <a:endParaRPr b="0" lang="en-US" sz="1800" spc="-1" strike="noStrike">
-              <a:solidFill>
-                <a:srgbClr val="000000"/>
-              </a:solidFill>
+            <a:pPr algn="ctr">
+              <a:buNone/>
+            </a:pPr>
+            <a:endParaRPr b="0" lang="en-US" sz="4400" spc="-1" strike="noStrike">
               <a:latin typeface="Arial"/>
             </a:endParaRPr>
           </a:p>
@@ -2161,7 +1978,7 @@
         <p:txBody>
           <a:bodyPr/>
           <a:p>
-            <a:fld id="{1D668FFD-204E-4D31-BD03-B017C636B661}" type="slidenum">
+            <a:fld id="{861B3F23-BB10-4EC5-B1B8-908110A090E0}" type="slidenum">
               <a:t>&lt;#&gt;</a:t>
             </a:fld>
           </a:p>
@@ -2281,7 +2098,7 @@
         <p:txBody>
           <a:bodyPr/>
           <a:p>
-            <a:fld id="{0B96C54B-C898-42C9-A5A7-7136C2243C9D}" type="slidenum">
+            <a:fld id="{2514F520-E731-4148-935C-FD2CBB4436FB}" type="slidenum">
               <a:t>&lt;#&gt;</a:t>
             </a:fld>
           </a:p>
@@ -2358,10 +2175,10 @@
             <a:noAutofit/>
           </a:bodyPr>
           <a:p>
-            <a:endParaRPr b="0" lang="en-US" sz="1800" spc="-1" strike="noStrike">
-              <a:solidFill>
-                <a:srgbClr val="000000"/>
-              </a:solidFill>
+            <a:pPr algn="ctr">
+              <a:buNone/>
+            </a:pPr>
+            <a:endParaRPr b="0" lang="en-US" sz="4400" spc="-1" strike="noStrike">
               <a:latin typeface="Arial"/>
             </a:endParaRPr>
           </a:p>
@@ -2395,19 +2212,7 @@
             <a:normAutofit/>
           </a:bodyPr>
           <a:p>
-            <a:pPr>
-              <a:lnSpc>
-                <a:spcPct val="90000"/>
-              </a:lnSpc>
-              <a:spcBef>
-                <a:spcPts val="1417"/>
-              </a:spcBef>
-              <a:buNone/>
-            </a:pPr>
-            <a:endParaRPr b="0" lang="en-US" sz="2800" spc="-1" strike="noStrike">
-              <a:solidFill>
-                <a:srgbClr val="000000"/>
-              </a:solidFill>
+            <a:endParaRPr b="0" lang="en-US" sz="3200" spc="-1" strike="noStrike">
               <a:latin typeface="Arial"/>
             </a:endParaRPr>
           </a:p>
@@ -2441,19 +2246,7 @@
             <a:normAutofit/>
           </a:bodyPr>
           <a:p>
-            <a:pPr>
-              <a:lnSpc>
-                <a:spcPct val="90000"/>
-              </a:lnSpc>
-              <a:spcBef>
-                <a:spcPts val="1417"/>
-              </a:spcBef>
-              <a:buNone/>
-            </a:pPr>
-            <a:endParaRPr b="0" lang="en-US" sz="2800" spc="-1" strike="noStrike">
-              <a:solidFill>
-                <a:srgbClr val="000000"/>
-              </a:solidFill>
+            <a:endParaRPr b="0" lang="en-US" sz="3200" spc="-1" strike="noStrike">
               <a:latin typeface="Arial"/>
             </a:endParaRPr>
           </a:p>
@@ -2487,19 +2280,7 @@
             <a:normAutofit/>
           </a:bodyPr>
           <a:p>
-            <a:pPr>
-              <a:lnSpc>
-                <a:spcPct val="90000"/>
-              </a:lnSpc>
-              <a:spcBef>
-                <a:spcPts val="1417"/>
-              </a:spcBef>
-              <a:buNone/>
-            </a:pPr>
-            <a:endParaRPr b="0" lang="en-US" sz="2800" spc="-1" strike="noStrike">
-              <a:solidFill>
-                <a:srgbClr val="000000"/>
-              </a:solidFill>
+            <a:endParaRPr b="0" lang="en-US" sz="3200" spc="-1" strike="noStrike">
               <a:latin typeface="Arial"/>
             </a:endParaRPr>
           </a:p>
@@ -2539,7 +2320,7 @@
         <p:txBody>
           <a:bodyPr/>
           <a:p>
-            <a:fld id="{C97CD31A-C8E1-479A-B115-36995D2B96C3}" type="slidenum">
+            <a:fld id="{F73DDB2C-A2D9-4E7F-955A-374895C5C63A}" type="slidenum">
               <a:t>&lt;#&gt;</a:t>
             </a:fld>
           </a:p>
@@ -2616,10 +2397,10 @@
             <a:noAutofit/>
           </a:bodyPr>
           <a:p>
-            <a:endParaRPr b="0" lang="en-US" sz="1800" spc="-1" strike="noStrike">
-              <a:solidFill>
-                <a:srgbClr val="000000"/>
-              </a:solidFill>
+            <a:pPr algn="ctr">
+              <a:buNone/>
+            </a:pPr>
+            <a:endParaRPr b="0" lang="en-US" sz="4400" spc="-1" strike="noStrike">
               <a:latin typeface="Arial"/>
             </a:endParaRPr>
           </a:p>
@@ -2696,7 +2477,7 @@
         <p:txBody>
           <a:bodyPr/>
           <a:p>
-            <a:fld id="{F78C743E-7F20-44B9-933A-7C8EAE2D967E}" type="slidenum">
+            <a:fld id="{2A99F762-C4A9-4EFB-98F9-0FC08D1D5164}" type="slidenum">
               <a:t>&lt;#&gt;</a:t>
             </a:fld>
           </a:p>
@@ -2773,10 +2554,10 @@
             <a:noAutofit/>
           </a:bodyPr>
           <a:p>
-            <a:endParaRPr b="0" lang="en-US" sz="1800" spc="-1" strike="noStrike">
-              <a:solidFill>
-                <a:srgbClr val="000000"/>
-              </a:solidFill>
+            <a:pPr algn="ctr">
+              <a:buNone/>
+            </a:pPr>
+            <a:endParaRPr b="0" lang="en-US" sz="4400" spc="-1" strike="noStrike">
               <a:latin typeface="Arial"/>
             </a:endParaRPr>
           </a:p>
@@ -2810,19 +2591,7 @@
             <a:normAutofit/>
           </a:bodyPr>
           <a:p>
-            <a:pPr>
-              <a:lnSpc>
-                <a:spcPct val="90000"/>
-              </a:lnSpc>
-              <a:spcBef>
-                <a:spcPts val="1417"/>
-              </a:spcBef>
-              <a:buNone/>
-            </a:pPr>
-            <a:endParaRPr b="0" lang="en-US" sz="2800" spc="-1" strike="noStrike">
-              <a:solidFill>
-                <a:srgbClr val="000000"/>
-              </a:solidFill>
+            <a:endParaRPr b="0" lang="en-US" sz="3200" spc="-1" strike="noStrike">
               <a:latin typeface="Arial"/>
             </a:endParaRPr>
           </a:p>
@@ -2856,19 +2625,7 @@
             <a:normAutofit/>
           </a:bodyPr>
           <a:p>
-            <a:pPr>
-              <a:lnSpc>
-                <a:spcPct val="90000"/>
-              </a:lnSpc>
-              <a:spcBef>
-                <a:spcPts val="1417"/>
-              </a:spcBef>
-              <a:buNone/>
-            </a:pPr>
-            <a:endParaRPr b="0" lang="en-US" sz="2800" spc="-1" strike="noStrike">
-              <a:solidFill>
-                <a:srgbClr val="000000"/>
-              </a:solidFill>
+            <a:endParaRPr b="0" lang="en-US" sz="3200" spc="-1" strike="noStrike">
               <a:latin typeface="Arial"/>
             </a:endParaRPr>
           </a:p>
@@ -2902,19 +2659,7 @@
             <a:normAutofit/>
           </a:bodyPr>
           <a:p>
-            <a:pPr>
-              <a:lnSpc>
-                <a:spcPct val="90000"/>
-              </a:lnSpc>
-              <a:spcBef>
-                <a:spcPts val="1417"/>
-              </a:spcBef>
-              <a:buNone/>
-            </a:pPr>
-            <a:endParaRPr b="0" lang="en-US" sz="2800" spc="-1" strike="noStrike">
-              <a:solidFill>
-                <a:srgbClr val="000000"/>
-              </a:solidFill>
+            <a:endParaRPr b="0" lang="en-US" sz="3200" spc="-1" strike="noStrike">
               <a:latin typeface="Arial"/>
             </a:endParaRPr>
           </a:p>
@@ -2954,7 +2699,7 @@
         <p:txBody>
           <a:bodyPr/>
           <a:p>
-            <a:fld id="{527F79CB-4AC0-487E-A7B7-C80FDAD8080C}" type="slidenum">
+            <a:fld id="{B67272A5-4D88-4202-9161-BB4262F00F8B}" type="slidenum">
               <a:t>&lt;#&gt;</a:t>
             </a:fld>
           </a:p>
@@ -3031,10 +2776,10 @@
             <a:noAutofit/>
           </a:bodyPr>
           <a:p>
-            <a:endParaRPr b="0" lang="en-US" sz="1800" spc="-1" strike="noStrike">
-              <a:solidFill>
-                <a:srgbClr val="000000"/>
-              </a:solidFill>
+            <a:pPr algn="ctr">
+              <a:buNone/>
+            </a:pPr>
+            <a:endParaRPr b="0" lang="en-US" sz="4400" spc="-1" strike="noStrike">
               <a:latin typeface="Arial"/>
             </a:endParaRPr>
           </a:p>
@@ -3068,19 +2813,7 @@
             <a:normAutofit/>
           </a:bodyPr>
           <a:p>
-            <a:pPr>
-              <a:lnSpc>
-                <a:spcPct val="90000"/>
-              </a:lnSpc>
-              <a:spcBef>
-                <a:spcPts val="1417"/>
-              </a:spcBef>
-              <a:buNone/>
-            </a:pPr>
-            <a:endParaRPr b="0" lang="en-US" sz="2800" spc="-1" strike="noStrike">
-              <a:solidFill>
-                <a:srgbClr val="000000"/>
-              </a:solidFill>
+            <a:endParaRPr b="0" lang="en-US" sz="3200" spc="-1" strike="noStrike">
               <a:latin typeface="Arial"/>
             </a:endParaRPr>
           </a:p>
@@ -3114,19 +2847,7 @@
             <a:normAutofit/>
           </a:bodyPr>
           <a:p>
-            <a:pPr>
-              <a:lnSpc>
-                <a:spcPct val="90000"/>
-              </a:lnSpc>
-              <a:spcBef>
-                <a:spcPts val="1417"/>
-              </a:spcBef>
-              <a:buNone/>
-            </a:pPr>
-            <a:endParaRPr b="0" lang="en-US" sz="2800" spc="-1" strike="noStrike">
-              <a:solidFill>
-                <a:srgbClr val="000000"/>
-              </a:solidFill>
+            <a:endParaRPr b="0" lang="en-US" sz="3200" spc="-1" strike="noStrike">
               <a:latin typeface="Arial"/>
             </a:endParaRPr>
           </a:p>
@@ -3160,19 +2881,7 @@
             <a:normAutofit/>
           </a:bodyPr>
           <a:p>
-            <a:pPr>
-              <a:lnSpc>
-                <a:spcPct val="90000"/>
-              </a:lnSpc>
-              <a:spcBef>
-                <a:spcPts val="1417"/>
-              </a:spcBef>
-              <a:buNone/>
-            </a:pPr>
-            <a:endParaRPr b="0" lang="en-US" sz="2800" spc="-1" strike="noStrike">
-              <a:solidFill>
-                <a:srgbClr val="000000"/>
-              </a:solidFill>
+            <a:endParaRPr b="0" lang="en-US" sz="3200" spc="-1" strike="noStrike">
               <a:latin typeface="Arial"/>
             </a:endParaRPr>
           </a:p>
@@ -3212,7 +2921,7 @@
         <p:txBody>
           <a:bodyPr/>
           <a:p>
-            <a:fld id="{1FBDD2B6-C838-4901-BD7B-072172BD9300}" type="slidenum">
+            <a:fld id="{C94FAD55-4688-4C43-B4A5-F9C99A71291F}" type="slidenum">
               <a:t>&lt;#&gt;</a:t>
             </a:fld>
           </a:p>
@@ -3289,10 +2998,10 @@
             <a:noAutofit/>
           </a:bodyPr>
           <a:p>
-            <a:endParaRPr b="0" lang="en-US" sz="1800" spc="-1" strike="noStrike">
-              <a:solidFill>
-                <a:srgbClr val="000000"/>
-              </a:solidFill>
+            <a:pPr algn="ctr">
+              <a:buNone/>
+            </a:pPr>
+            <a:endParaRPr b="0" lang="en-US" sz="4400" spc="-1" strike="noStrike">
               <a:latin typeface="Arial"/>
             </a:endParaRPr>
           </a:p>
@@ -3326,19 +3035,7 @@
             <a:normAutofit/>
           </a:bodyPr>
           <a:p>
-            <a:pPr>
-              <a:lnSpc>
-                <a:spcPct val="90000"/>
-              </a:lnSpc>
-              <a:spcBef>
-                <a:spcPts val="1417"/>
-              </a:spcBef>
-              <a:buNone/>
-            </a:pPr>
-            <a:endParaRPr b="0" lang="en-US" sz="2800" spc="-1" strike="noStrike">
-              <a:solidFill>
-                <a:srgbClr val="000000"/>
-              </a:solidFill>
+            <a:endParaRPr b="0" lang="en-US" sz="3200" spc="-1" strike="noStrike">
               <a:latin typeface="Arial"/>
             </a:endParaRPr>
           </a:p>
@@ -3372,19 +3069,7 @@
             <a:normAutofit/>
           </a:bodyPr>
           <a:p>
-            <a:pPr>
-              <a:lnSpc>
-                <a:spcPct val="90000"/>
-              </a:lnSpc>
-              <a:spcBef>
-                <a:spcPts val="1417"/>
-              </a:spcBef>
-              <a:buNone/>
-            </a:pPr>
-            <a:endParaRPr b="0" lang="en-US" sz="2800" spc="-1" strike="noStrike">
-              <a:solidFill>
-                <a:srgbClr val="000000"/>
-              </a:solidFill>
+            <a:endParaRPr b="0" lang="en-US" sz="3200" spc="-1" strike="noStrike">
               <a:latin typeface="Arial"/>
             </a:endParaRPr>
           </a:p>
@@ -3424,7 +3109,7 @@
         <p:txBody>
           <a:bodyPr/>
           <a:p>
-            <a:fld id="{82C5C471-91FD-4644-9363-A55BDD05B822}" type="slidenum">
+            <a:fld id="{72072D0B-23CB-4B23-B3D2-A7712472DA9C}" type="slidenum">
               <a:t>&lt;#&gt;</a:t>
             </a:fld>
           </a:p>
@@ -3501,10 +3186,10 @@
             <a:noAutofit/>
           </a:bodyPr>
           <a:p>
-            <a:endParaRPr b="0" lang="en-US" sz="1800" spc="-1" strike="noStrike">
-              <a:solidFill>
-                <a:srgbClr val="000000"/>
-              </a:solidFill>
+            <a:pPr algn="ctr">
+              <a:buNone/>
+            </a:pPr>
+            <a:endParaRPr b="0" lang="en-US" sz="4400" spc="-1" strike="noStrike">
               <a:latin typeface="Arial"/>
             </a:endParaRPr>
           </a:p>
@@ -3538,19 +3223,7 @@
             <a:normAutofit/>
           </a:bodyPr>
           <a:p>
-            <a:pPr>
-              <a:lnSpc>
-                <a:spcPct val="90000"/>
-              </a:lnSpc>
-              <a:spcBef>
-                <a:spcPts val="1417"/>
-              </a:spcBef>
-              <a:buNone/>
-            </a:pPr>
-            <a:endParaRPr b="0" lang="en-US" sz="2800" spc="-1" strike="noStrike">
-              <a:solidFill>
-                <a:srgbClr val="000000"/>
-              </a:solidFill>
+            <a:endParaRPr b="0" lang="en-US" sz="3200" spc="-1" strike="noStrike">
               <a:latin typeface="Arial"/>
             </a:endParaRPr>
           </a:p>
@@ -3584,19 +3257,7 @@
             <a:normAutofit/>
           </a:bodyPr>
           <a:p>
-            <a:pPr>
-              <a:lnSpc>
-                <a:spcPct val="90000"/>
-              </a:lnSpc>
-              <a:spcBef>
-                <a:spcPts val="1417"/>
-              </a:spcBef>
-              <a:buNone/>
-            </a:pPr>
-            <a:endParaRPr b="0" lang="en-US" sz="2800" spc="-1" strike="noStrike">
-              <a:solidFill>
-                <a:srgbClr val="000000"/>
-              </a:solidFill>
+            <a:endParaRPr b="0" lang="en-US" sz="3200" spc="-1" strike="noStrike">
               <a:latin typeface="Arial"/>
             </a:endParaRPr>
           </a:p>
@@ -3630,19 +3291,7 @@
             <a:normAutofit/>
           </a:bodyPr>
           <a:p>
-            <a:pPr>
-              <a:lnSpc>
-                <a:spcPct val="90000"/>
-              </a:lnSpc>
-              <a:spcBef>
-                <a:spcPts val="1417"/>
-              </a:spcBef>
-              <a:buNone/>
-            </a:pPr>
-            <a:endParaRPr b="0" lang="en-US" sz="2800" spc="-1" strike="noStrike">
-              <a:solidFill>
-                <a:srgbClr val="000000"/>
-              </a:solidFill>
+            <a:endParaRPr b="0" lang="en-US" sz="3200" spc="-1" strike="noStrike">
               <a:latin typeface="Arial"/>
             </a:endParaRPr>
           </a:p>
@@ -3676,19 +3325,7 @@
             <a:normAutofit/>
           </a:bodyPr>
           <a:p>
-            <a:pPr>
-              <a:lnSpc>
-                <a:spcPct val="90000"/>
-              </a:lnSpc>
-              <a:spcBef>
-                <a:spcPts val="1417"/>
-              </a:spcBef>
-              <a:buNone/>
-            </a:pPr>
-            <a:endParaRPr b="0" lang="en-US" sz="2800" spc="-1" strike="noStrike">
-              <a:solidFill>
-                <a:srgbClr val="000000"/>
-              </a:solidFill>
+            <a:endParaRPr b="0" lang="en-US" sz="3200" spc="-1" strike="noStrike">
               <a:latin typeface="Arial"/>
             </a:endParaRPr>
           </a:p>
@@ -3728,7 +3365,7 @@
         <p:txBody>
           <a:bodyPr/>
           <a:p>
-            <a:fld id="{3ABC0E4D-C92C-44C8-8EE8-F0559AD27CA0}" type="slidenum">
+            <a:fld id="{B7D33062-7228-4DEF-AF2B-A478CC531977}" type="slidenum">
               <a:t>&lt;#&gt;</a:t>
             </a:fld>
           </a:p>
@@ -3805,10 +3442,10 @@
             <a:noAutofit/>
           </a:bodyPr>
           <a:p>
-            <a:endParaRPr b="0" lang="en-US" sz="1800" spc="-1" strike="noStrike">
-              <a:solidFill>
-                <a:srgbClr val="000000"/>
-              </a:solidFill>
+            <a:pPr algn="ctr">
+              <a:buNone/>
+            </a:pPr>
+            <a:endParaRPr b="0" lang="en-US" sz="4400" spc="-1" strike="noStrike">
               <a:latin typeface="Arial"/>
             </a:endParaRPr>
           </a:p>
@@ -3842,19 +3479,7 @@
             <a:normAutofit/>
           </a:bodyPr>
           <a:p>
-            <a:pPr>
-              <a:lnSpc>
-                <a:spcPct val="90000"/>
-              </a:lnSpc>
-              <a:spcBef>
-                <a:spcPts val="1417"/>
-              </a:spcBef>
-              <a:buNone/>
-            </a:pPr>
-            <a:endParaRPr b="0" lang="en-US" sz="2800" spc="-1" strike="noStrike">
-              <a:solidFill>
-                <a:srgbClr val="000000"/>
-              </a:solidFill>
+            <a:endParaRPr b="0" lang="en-US" sz="3200" spc="-1" strike="noStrike">
               <a:latin typeface="Arial"/>
             </a:endParaRPr>
           </a:p>
@@ -3888,19 +3513,7 @@
             <a:normAutofit/>
           </a:bodyPr>
           <a:p>
-            <a:pPr>
-              <a:lnSpc>
-                <a:spcPct val="90000"/>
-              </a:lnSpc>
-              <a:spcBef>
-                <a:spcPts val="1417"/>
-              </a:spcBef>
-              <a:buNone/>
-            </a:pPr>
-            <a:endParaRPr b="0" lang="en-US" sz="2800" spc="-1" strike="noStrike">
-              <a:solidFill>
-                <a:srgbClr val="000000"/>
-              </a:solidFill>
+            <a:endParaRPr b="0" lang="en-US" sz="3200" spc="-1" strike="noStrike">
               <a:latin typeface="Arial"/>
             </a:endParaRPr>
           </a:p>
@@ -3934,19 +3547,7 @@
             <a:normAutofit/>
           </a:bodyPr>
           <a:p>
-            <a:pPr>
-              <a:lnSpc>
-                <a:spcPct val="90000"/>
-              </a:lnSpc>
-              <a:spcBef>
-                <a:spcPts val="1417"/>
-              </a:spcBef>
-              <a:buNone/>
-            </a:pPr>
-            <a:endParaRPr b="0" lang="en-US" sz="2800" spc="-1" strike="noStrike">
-              <a:solidFill>
-                <a:srgbClr val="000000"/>
-              </a:solidFill>
+            <a:endParaRPr b="0" lang="en-US" sz="3200" spc="-1" strike="noStrike">
               <a:latin typeface="Arial"/>
             </a:endParaRPr>
           </a:p>
@@ -3980,19 +3581,7 @@
             <a:normAutofit/>
           </a:bodyPr>
           <a:p>
-            <a:pPr>
-              <a:lnSpc>
-                <a:spcPct val="90000"/>
-              </a:lnSpc>
-              <a:spcBef>
-                <a:spcPts val="1417"/>
-              </a:spcBef>
-              <a:buNone/>
-            </a:pPr>
-            <a:endParaRPr b="0" lang="en-US" sz="2800" spc="-1" strike="noStrike">
-              <a:solidFill>
-                <a:srgbClr val="000000"/>
-              </a:solidFill>
+            <a:endParaRPr b="0" lang="en-US" sz="3200" spc="-1" strike="noStrike">
               <a:latin typeface="Arial"/>
             </a:endParaRPr>
           </a:p>
@@ -4026,19 +3615,7 @@
             <a:normAutofit/>
           </a:bodyPr>
           <a:p>
-            <a:pPr>
-              <a:lnSpc>
-                <a:spcPct val="90000"/>
-              </a:lnSpc>
-              <a:spcBef>
-                <a:spcPts val="1417"/>
-              </a:spcBef>
-              <a:buNone/>
-            </a:pPr>
-            <a:endParaRPr b="0" lang="en-US" sz="2800" spc="-1" strike="noStrike">
-              <a:solidFill>
-                <a:srgbClr val="000000"/>
-              </a:solidFill>
+            <a:endParaRPr b="0" lang="en-US" sz="3200" spc="-1" strike="noStrike">
               <a:latin typeface="Arial"/>
             </a:endParaRPr>
           </a:p>
@@ -4072,19 +3649,7 @@
             <a:normAutofit/>
           </a:bodyPr>
           <a:p>
-            <a:pPr>
-              <a:lnSpc>
-                <a:spcPct val="90000"/>
-              </a:lnSpc>
-              <a:spcBef>
-                <a:spcPts val="1417"/>
-              </a:spcBef>
-              <a:buNone/>
-            </a:pPr>
-            <a:endParaRPr b="0" lang="en-US" sz="2800" spc="-1" strike="noStrike">
-              <a:solidFill>
-                <a:srgbClr val="000000"/>
-              </a:solidFill>
+            <a:endParaRPr b="0" lang="en-US" sz="3200" spc="-1" strike="noStrike">
               <a:latin typeface="Arial"/>
             </a:endParaRPr>
           </a:p>
@@ -4124,7 +3689,7 @@
         <p:txBody>
           <a:bodyPr/>
           <a:p>
-            <a:fld id="{602AB324-A4AE-4ECB-93A5-2C2E4F84592F}" type="slidenum">
+            <a:fld id="{E739115D-365F-4B5E-A064-114C755EAB59}" type="slidenum">
               <a:t>&lt;#&gt;</a:t>
             </a:fld>
           </a:p>
@@ -4201,10 +3766,10 @@
             <a:noAutofit/>
           </a:bodyPr>
           <a:p>
-            <a:endParaRPr b="0" lang="en-US" sz="1800" spc="-1" strike="noStrike">
-              <a:solidFill>
-                <a:srgbClr val="000000"/>
-              </a:solidFill>
+            <a:pPr algn="ctr">
+              <a:buNone/>
+            </a:pPr>
+            <a:endParaRPr b="0" lang="en-US" sz="4400" spc="-1" strike="noStrike">
               <a:latin typeface="Arial"/>
             </a:endParaRPr>
           </a:p>
@@ -4238,19 +3803,7 @@
             <a:normAutofit/>
           </a:bodyPr>
           <a:p>
-            <a:pPr>
-              <a:lnSpc>
-                <a:spcPct val="90000"/>
-              </a:lnSpc>
-              <a:spcBef>
-                <a:spcPts val="1417"/>
-              </a:spcBef>
-              <a:buNone/>
-            </a:pPr>
-            <a:endParaRPr b="0" lang="en-US" sz="2800" spc="-1" strike="noStrike">
-              <a:solidFill>
-                <a:srgbClr val="000000"/>
-              </a:solidFill>
+            <a:endParaRPr b="0" lang="en-US" sz="3200" spc="-1" strike="noStrike">
               <a:latin typeface="Arial"/>
             </a:endParaRPr>
           </a:p>
@@ -4290,7 +3843,7 @@
         <p:txBody>
           <a:bodyPr/>
           <a:p>
-            <a:fld id="{366978E1-46A4-4188-98E5-6E50BE457A15}" type="slidenum">
+            <a:fld id="{364CA358-0954-4726-AD01-8C0B4628EBA3}" type="slidenum">
               <a:t>&lt;#&gt;</a:t>
             </a:fld>
           </a:p>
@@ -4367,10 +3920,10 @@
             <a:noAutofit/>
           </a:bodyPr>
           <a:p>
-            <a:endParaRPr b="0" lang="en-US" sz="1800" spc="-1" strike="noStrike">
-              <a:solidFill>
-                <a:srgbClr val="000000"/>
-              </a:solidFill>
+            <a:pPr algn="ctr">
+              <a:buNone/>
+            </a:pPr>
+            <a:endParaRPr b="0" lang="en-US" sz="4400" spc="-1" strike="noStrike">
               <a:latin typeface="Arial"/>
             </a:endParaRPr>
           </a:p>
@@ -4404,19 +3957,7 @@
             <a:normAutofit/>
           </a:bodyPr>
           <a:p>
-            <a:pPr>
-              <a:lnSpc>
-                <a:spcPct val="90000"/>
-              </a:lnSpc>
-              <a:spcBef>
-                <a:spcPts val="1417"/>
-              </a:spcBef>
-              <a:buNone/>
-            </a:pPr>
-            <a:endParaRPr b="0" lang="en-US" sz="2800" spc="-1" strike="noStrike">
-              <a:solidFill>
-                <a:srgbClr val="000000"/>
-              </a:solidFill>
+            <a:endParaRPr b="0" lang="en-US" sz="3200" spc="-1" strike="noStrike">
               <a:latin typeface="Arial"/>
             </a:endParaRPr>
           </a:p>
@@ -4450,19 +3991,7 @@
             <a:normAutofit/>
           </a:bodyPr>
           <a:p>
-            <a:pPr>
-              <a:lnSpc>
-                <a:spcPct val="90000"/>
-              </a:lnSpc>
-              <a:spcBef>
-                <a:spcPts val="1417"/>
-              </a:spcBef>
-              <a:buNone/>
-            </a:pPr>
-            <a:endParaRPr b="0" lang="en-US" sz="2800" spc="-1" strike="noStrike">
-              <a:solidFill>
-                <a:srgbClr val="000000"/>
-              </a:solidFill>
+            <a:endParaRPr b="0" lang="en-US" sz="3200" spc="-1" strike="noStrike">
               <a:latin typeface="Arial"/>
             </a:endParaRPr>
           </a:p>
@@ -4502,7 +4031,7 @@
         <p:txBody>
           <a:bodyPr/>
           <a:p>
-            <a:fld id="{893F5C81-31DF-4AFC-B10F-138E19EE30EF}" type="slidenum">
+            <a:fld id="{65C7F60E-9F18-4E67-9213-63A00F29292A}" type="slidenum">
               <a:t>&lt;#&gt;</a:t>
             </a:fld>
           </a:p>
@@ -4579,10 +4108,10 @@
             <a:noAutofit/>
           </a:bodyPr>
           <a:p>
-            <a:endParaRPr b="0" lang="en-US" sz="1800" spc="-1" strike="noStrike">
-              <a:solidFill>
-                <a:srgbClr val="000000"/>
-              </a:solidFill>
+            <a:pPr algn="ctr">
+              <a:buNone/>
+            </a:pPr>
+            <a:endParaRPr b="0" lang="en-US" sz="4400" spc="-1" strike="noStrike">
               <a:latin typeface="Arial"/>
             </a:endParaRPr>
           </a:p>
@@ -4622,7 +4151,7 @@
         <p:txBody>
           <a:bodyPr/>
           <a:p>
-            <a:fld id="{B4C6189C-D56A-44A4-BD90-C6870112FB55}" type="slidenum">
+            <a:fld id="{321D75A1-431C-4295-953D-E684AEF0BECA}" type="slidenum">
               <a:t>&lt;#&gt;</a:t>
             </a:fld>
           </a:p>
@@ -4742,7 +4271,7 @@
         <p:txBody>
           <a:bodyPr/>
           <a:p>
-            <a:fld id="{34A9DE04-E0B7-4416-A315-057D0F85BE77}" type="slidenum">
+            <a:fld id="{62B26388-CE32-4134-A179-AFB4871F6FC4}" type="slidenum">
               <a:t>&lt;#&gt;</a:t>
             </a:fld>
           </a:p>
@@ -4819,10 +4348,10 @@
             <a:noAutofit/>
           </a:bodyPr>
           <a:p>
-            <a:endParaRPr b="0" lang="en-US" sz="1800" spc="-1" strike="noStrike">
-              <a:solidFill>
-                <a:srgbClr val="000000"/>
-              </a:solidFill>
+            <a:pPr algn="ctr">
+              <a:buNone/>
+            </a:pPr>
+            <a:endParaRPr b="0" lang="en-US" sz="4400" spc="-1" strike="noStrike">
               <a:latin typeface="Arial"/>
             </a:endParaRPr>
           </a:p>
@@ -4856,19 +4385,7 @@
             <a:normAutofit/>
           </a:bodyPr>
           <a:p>
-            <a:pPr>
-              <a:lnSpc>
-                <a:spcPct val="90000"/>
-              </a:lnSpc>
-              <a:spcBef>
-                <a:spcPts val="1417"/>
-              </a:spcBef>
-              <a:buNone/>
-            </a:pPr>
-            <a:endParaRPr b="0" lang="en-US" sz="2800" spc="-1" strike="noStrike">
-              <a:solidFill>
-                <a:srgbClr val="000000"/>
-              </a:solidFill>
+            <a:endParaRPr b="0" lang="en-US" sz="3200" spc="-1" strike="noStrike">
               <a:latin typeface="Arial"/>
             </a:endParaRPr>
           </a:p>
@@ -4902,19 +4419,7 @@
             <a:normAutofit/>
           </a:bodyPr>
           <a:p>
-            <a:pPr>
-              <a:lnSpc>
-                <a:spcPct val="90000"/>
-              </a:lnSpc>
-              <a:spcBef>
-                <a:spcPts val="1417"/>
-              </a:spcBef>
-              <a:buNone/>
-            </a:pPr>
-            <a:endParaRPr b="0" lang="en-US" sz="2800" spc="-1" strike="noStrike">
-              <a:solidFill>
-                <a:srgbClr val="000000"/>
-              </a:solidFill>
+            <a:endParaRPr b="0" lang="en-US" sz="3200" spc="-1" strike="noStrike">
               <a:latin typeface="Arial"/>
             </a:endParaRPr>
           </a:p>
@@ -4948,19 +4453,7 @@
             <a:normAutofit/>
           </a:bodyPr>
           <a:p>
-            <a:pPr>
-              <a:lnSpc>
-                <a:spcPct val="90000"/>
-              </a:lnSpc>
-              <a:spcBef>
-                <a:spcPts val="1417"/>
-              </a:spcBef>
-              <a:buNone/>
-            </a:pPr>
-            <a:endParaRPr b="0" lang="en-US" sz="2800" spc="-1" strike="noStrike">
-              <a:solidFill>
-                <a:srgbClr val="000000"/>
-              </a:solidFill>
+            <a:endParaRPr b="0" lang="en-US" sz="3200" spc="-1" strike="noStrike">
               <a:latin typeface="Arial"/>
             </a:endParaRPr>
           </a:p>
@@ -5000,7 +4493,7 @@
         <p:txBody>
           <a:bodyPr/>
           <a:p>
-            <a:fld id="{3992E417-7605-4F4A-AE33-2E8D477002AF}" type="slidenum">
+            <a:fld id="{68FAA447-E153-4AF8-9DCB-8B5000C34745}" type="slidenum">
               <a:t>&lt;#&gt;</a:t>
             </a:fld>
           </a:p>
@@ -5077,10 +4570,10 @@
             <a:noAutofit/>
           </a:bodyPr>
           <a:p>
-            <a:endParaRPr b="0" lang="en-US" sz="1800" spc="-1" strike="noStrike">
-              <a:solidFill>
-                <a:srgbClr val="000000"/>
-              </a:solidFill>
+            <a:pPr algn="ctr">
+              <a:buNone/>
+            </a:pPr>
+            <a:endParaRPr b="0" lang="en-US" sz="4400" spc="-1" strike="noStrike">
               <a:latin typeface="Arial"/>
             </a:endParaRPr>
           </a:p>
@@ -5114,19 +4607,7 @@
             <a:normAutofit/>
           </a:bodyPr>
           <a:p>
-            <a:pPr>
-              <a:lnSpc>
-                <a:spcPct val="90000"/>
-              </a:lnSpc>
-              <a:spcBef>
-                <a:spcPts val="1417"/>
-              </a:spcBef>
-              <a:buNone/>
-            </a:pPr>
-            <a:endParaRPr b="0" lang="en-US" sz="2800" spc="-1" strike="noStrike">
-              <a:solidFill>
-                <a:srgbClr val="000000"/>
-              </a:solidFill>
+            <a:endParaRPr b="0" lang="en-US" sz="3200" spc="-1" strike="noStrike">
               <a:latin typeface="Arial"/>
             </a:endParaRPr>
           </a:p>
@@ -5160,19 +4641,7 @@
             <a:normAutofit/>
           </a:bodyPr>
           <a:p>
-            <a:pPr>
-              <a:lnSpc>
-                <a:spcPct val="90000"/>
-              </a:lnSpc>
-              <a:spcBef>
-                <a:spcPts val="1417"/>
-              </a:spcBef>
-              <a:buNone/>
-            </a:pPr>
-            <a:endParaRPr b="0" lang="en-US" sz="2800" spc="-1" strike="noStrike">
-              <a:solidFill>
-                <a:srgbClr val="000000"/>
-              </a:solidFill>
+            <a:endParaRPr b="0" lang="en-US" sz="3200" spc="-1" strike="noStrike">
               <a:latin typeface="Arial"/>
             </a:endParaRPr>
           </a:p>
@@ -5206,19 +4675,7 @@
             <a:normAutofit/>
           </a:bodyPr>
           <a:p>
-            <a:pPr>
-              <a:lnSpc>
-                <a:spcPct val="90000"/>
-              </a:lnSpc>
-              <a:spcBef>
-                <a:spcPts val="1417"/>
-              </a:spcBef>
-              <a:buNone/>
-            </a:pPr>
-            <a:endParaRPr b="0" lang="en-US" sz="2800" spc="-1" strike="noStrike">
-              <a:solidFill>
-                <a:srgbClr val="000000"/>
-              </a:solidFill>
+            <a:endParaRPr b="0" lang="en-US" sz="3200" spc="-1" strike="noStrike">
               <a:latin typeface="Arial"/>
             </a:endParaRPr>
           </a:p>
@@ -5258,7 +4715,7 @@
         <p:txBody>
           <a:bodyPr/>
           <a:p>
-            <a:fld id="{CD73B9FB-9AE9-4E13-B950-AF78310DFE46}" type="slidenum">
+            <a:fld id="{EE365871-C9B4-45BF-A4A6-5688A686DFFB}" type="slidenum">
               <a:t>&lt;#&gt;</a:t>
             </a:fld>
           </a:p>
@@ -5335,10 +4792,10 @@
             <a:noAutofit/>
           </a:bodyPr>
           <a:p>
-            <a:endParaRPr b="0" lang="en-US" sz="1800" spc="-1" strike="noStrike">
-              <a:solidFill>
-                <a:srgbClr val="000000"/>
-              </a:solidFill>
+            <a:pPr algn="ctr">
+              <a:buNone/>
+            </a:pPr>
+            <a:endParaRPr b="0" lang="en-US" sz="4400" spc="-1" strike="noStrike">
               <a:latin typeface="Arial"/>
             </a:endParaRPr>
           </a:p>
@@ -5372,19 +4829,7 @@
             <a:normAutofit/>
           </a:bodyPr>
           <a:p>
-            <a:pPr>
-              <a:lnSpc>
-                <a:spcPct val="90000"/>
-              </a:lnSpc>
-              <a:spcBef>
-                <a:spcPts val="1417"/>
-              </a:spcBef>
-              <a:buNone/>
-            </a:pPr>
-            <a:endParaRPr b="0" lang="en-US" sz="2800" spc="-1" strike="noStrike">
-              <a:solidFill>
-                <a:srgbClr val="000000"/>
-              </a:solidFill>
+            <a:endParaRPr b="0" lang="en-US" sz="3200" spc="-1" strike="noStrike">
               <a:latin typeface="Arial"/>
             </a:endParaRPr>
           </a:p>
@@ -5418,19 +4863,7 @@
             <a:normAutofit/>
           </a:bodyPr>
           <a:p>
-            <a:pPr>
-              <a:lnSpc>
-                <a:spcPct val="90000"/>
-              </a:lnSpc>
-              <a:spcBef>
-                <a:spcPts val="1417"/>
-              </a:spcBef>
-              <a:buNone/>
-            </a:pPr>
-            <a:endParaRPr b="0" lang="en-US" sz="2800" spc="-1" strike="noStrike">
-              <a:solidFill>
-                <a:srgbClr val="000000"/>
-              </a:solidFill>
+            <a:endParaRPr b="0" lang="en-US" sz="3200" spc="-1" strike="noStrike">
               <a:latin typeface="Arial"/>
             </a:endParaRPr>
           </a:p>
@@ -5464,19 +4897,7 @@
             <a:normAutofit/>
           </a:bodyPr>
           <a:p>
-            <a:pPr>
-              <a:lnSpc>
-                <a:spcPct val="90000"/>
-              </a:lnSpc>
-              <a:spcBef>
-                <a:spcPts val="1417"/>
-              </a:spcBef>
-              <a:buNone/>
-            </a:pPr>
-            <a:endParaRPr b="0" lang="en-US" sz="2800" spc="-1" strike="noStrike">
-              <a:solidFill>
-                <a:srgbClr val="000000"/>
-              </a:solidFill>
+            <a:endParaRPr b="0" lang="en-US" sz="3200" spc="-1" strike="noStrike">
               <a:latin typeface="Arial"/>
             </a:endParaRPr>
           </a:p>
@@ -5516,7 +4937,7 @@
         <p:txBody>
           <a:bodyPr/>
           <a:p>
-            <a:fld id="{3A8779E8-EE31-4688-9952-EBCEDCBE4167}" type="slidenum">
+            <a:fld id="{79C57318-63F9-4D1E-91EF-36D7B9B5EE49}" type="slidenum">
               <a:t>&lt;#&gt;</a:t>
             </a:fld>
           </a:p>
@@ -5585,7 +5006,7 @@
         <p:spPr>
           <a:xfrm>
             <a:off x="3124080" y="6356520"/>
-            <a:ext cx="2859840" cy="329400"/>
+            <a:ext cx="2859480" cy="329040"/>
           </a:xfrm>
           <a:prstGeom prst="rect">
             <a:avLst/>
@@ -5650,7 +5071,7 @@
         <p:spPr>
           <a:xfrm>
             <a:off x="6553080" y="6356520"/>
-            <a:ext cx="2098080" cy="329400"/>
+            <a:ext cx="2097720" cy="329040"/>
           </a:xfrm>
           <a:prstGeom prst="rect">
             <a:avLst/>
@@ -5686,7 +5107,7 @@
               </a:lnSpc>
               <a:buNone/>
             </a:pPr>
-            <a:fld id="{11FD8CCA-AB51-450A-9431-F0A26C6C9F2C}" type="slidenum">
+            <a:fld id="{7D42E4CF-279D-4944-9D1E-3BB39A0652C8}" type="slidenum">
               <a:rPr b="0" lang="en-US" sz="1200" spc="-1" strike="noStrike">
                 <a:solidFill>
                   <a:srgbClr val="8b8b8b"/>
@@ -5715,7 +5136,7 @@
         <p:spPr>
           <a:xfrm>
             <a:off x="457200" y="6356520"/>
-            <a:ext cx="2098080" cy="329400"/>
+            <a:ext cx="2097720" cy="329040"/>
           </a:xfrm>
           <a:prstGeom prst="rect">
             <a:avLst/>
@@ -5777,19 +5198,208 @@
             <a:noAutofit/>
           </a:bodyPr>
           <a:p>
-            <a:r>
-              <a:rPr b="0" lang="en-US" sz="1800" spc="-1" strike="noStrike">
-                <a:solidFill>
-                  <a:srgbClr val="000000"/>
-                </a:solidFill>
+            <a:pPr algn="ctr">
+              <a:buNone/>
+            </a:pPr>
+            <a:r>
+              <a:rPr b="0" lang="en-US" sz="4400" spc="-1" strike="noStrike">
                 <a:latin typeface="Arial"/>
               </a:rPr>
-              <a:t>Click to edit the title text format</a:t>
-            </a:r>
-            <a:endParaRPr b="0" lang="en-US" sz="1800" spc="-1" strike="noStrike">
-              <a:solidFill>
-                <a:srgbClr val="000000"/>
-              </a:solidFill>
+              <a:t>C</a:t>
+            </a:r>
+            <a:r>
+              <a:rPr b="0" lang="en-US" sz="4400" spc="-1" strike="noStrike">
+                <a:latin typeface="Arial"/>
+              </a:rPr>
+              <a:t>l</a:t>
+            </a:r>
+            <a:r>
+              <a:rPr b="0" lang="en-US" sz="4400" spc="-1" strike="noStrike">
+                <a:latin typeface="Arial"/>
+              </a:rPr>
+              <a:t>i</a:t>
+            </a:r>
+            <a:r>
+              <a:rPr b="0" lang="en-US" sz="4400" spc="-1" strike="noStrike">
+                <a:latin typeface="Arial"/>
+              </a:rPr>
+              <a:t>c</a:t>
+            </a:r>
+            <a:r>
+              <a:rPr b="0" lang="en-US" sz="4400" spc="-1" strike="noStrike">
+                <a:latin typeface="Arial"/>
+              </a:rPr>
+              <a:t>k</a:t>
+            </a:r>
+            <a:r>
+              <a:rPr b="0" lang="en-US" sz="4400" spc="-1" strike="noStrike">
+                <a:latin typeface="Arial"/>
+              </a:rPr>
+              <a:t> </a:t>
+            </a:r>
+            <a:r>
+              <a:rPr b="0" lang="en-US" sz="4400" spc="-1" strike="noStrike">
+                <a:latin typeface="Arial"/>
+              </a:rPr>
+              <a:t>t</a:t>
+            </a:r>
+            <a:r>
+              <a:rPr b="0" lang="en-US" sz="4400" spc="-1" strike="noStrike">
+                <a:latin typeface="Arial"/>
+              </a:rPr>
+              <a:t>o</a:t>
+            </a:r>
+            <a:r>
+              <a:rPr b="0" lang="en-US" sz="4400" spc="-1" strike="noStrike">
+                <a:latin typeface="Arial"/>
+              </a:rPr>
+              <a:t> </a:t>
+            </a:r>
+            <a:r>
+              <a:rPr b="0" lang="en-US" sz="4400" spc="-1" strike="noStrike">
+                <a:latin typeface="Arial"/>
+              </a:rPr>
+              <a:t>e</a:t>
+            </a:r>
+            <a:r>
+              <a:rPr b="0" lang="en-US" sz="4400" spc="-1" strike="noStrike">
+                <a:latin typeface="Arial"/>
+              </a:rPr>
+              <a:t>d</a:t>
+            </a:r>
+            <a:r>
+              <a:rPr b="0" lang="en-US" sz="4400" spc="-1" strike="noStrike">
+                <a:latin typeface="Arial"/>
+              </a:rPr>
+              <a:t>i</a:t>
+            </a:r>
+            <a:r>
+              <a:rPr b="0" lang="en-US" sz="4400" spc="-1" strike="noStrike">
+                <a:latin typeface="Arial"/>
+              </a:rPr>
+              <a:t>t </a:t>
+            </a:r>
+            <a:r>
+              <a:rPr b="0" lang="en-US" sz="4400" spc="-1" strike="noStrike">
+                <a:latin typeface="Arial"/>
+              </a:rPr>
+              <a:t>t</a:t>
+            </a:r>
+            <a:r>
+              <a:rPr b="0" lang="en-US" sz="4400" spc="-1" strike="noStrike">
+                <a:latin typeface="Arial"/>
+              </a:rPr>
+              <a:t>h</a:t>
+            </a:r>
+            <a:r>
+              <a:rPr b="0" lang="en-US" sz="4400" spc="-1" strike="noStrike">
+                <a:latin typeface="Arial"/>
+              </a:rPr>
+              <a:t>e</a:t>
+            </a:r>
+            <a:r>
+              <a:rPr b="0" lang="en-US" sz="4400" spc="-1" strike="noStrike">
+                <a:latin typeface="Arial"/>
+              </a:rPr>
+              <a:t> </a:t>
+            </a:r>
+            <a:r>
+              <a:rPr b="0" lang="en-US" sz="4400" spc="-1" strike="noStrike">
+                <a:latin typeface="Arial"/>
+              </a:rPr>
+              <a:t>t</a:t>
+            </a:r>
+            <a:r>
+              <a:rPr b="0" lang="en-US" sz="4400" spc="-1" strike="noStrike">
+                <a:latin typeface="Arial"/>
+              </a:rPr>
+              <a:t>i</a:t>
+            </a:r>
+            <a:r>
+              <a:rPr b="0" lang="en-US" sz="4400" spc="-1" strike="noStrike">
+                <a:latin typeface="Arial"/>
+              </a:rPr>
+              <a:t>t</a:t>
+            </a:r>
+            <a:r>
+              <a:rPr b="0" lang="en-US" sz="4400" spc="-1" strike="noStrike">
+                <a:latin typeface="Arial"/>
+              </a:rPr>
+              <a:t>l</a:t>
+            </a:r>
+            <a:r>
+              <a:rPr b="0" lang="en-US" sz="4400" spc="-1" strike="noStrike">
+                <a:latin typeface="Arial"/>
+              </a:rPr>
+              <a:t>e</a:t>
+            </a:r>
+            <a:r>
+              <a:rPr b="0" lang="en-US" sz="4400" spc="-1" strike="noStrike">
+                <a:latin typeface="Arial"/>
+              </a:rPr>
+              <a:t> </a:t>
+            </a:r>
+            <a:r>
+              <a:rPr b="0" lang="en-US" sz="4400" spc="-1" strike="noStrike">
+                <a:latin typeface="Arial"/>
+              </a:rPr>
+              <a:t>t</a:t>
+            </a:r>
+            <a:r>
+              <a:rPr b="0" lang="en-US" sz="4400" spc="-1" strike="noStrike">
+                <a:latin typeface="Arial"/>
+              </a:rPr>
+              <a:t>e</a:t>
+            </a:r>
+            <a:r>
+              <a:rPr b="0" lang="en-US" sz="4400" spc="-1" strike="noStrike">
+                <a:latin typeface="Arial"/>
+              </a:rPr>
+              <a:t>x</a:t>
+            </a:r>
+            <a:r>
+              <a:rPr b="0" lang="en-US" sz="4400" spc="-1" strike="noStrike">
+                <a:latin typeface="Arial"/>
+              </a:rPr>
+              <a:t>t </a:t>
+            </a:r>
+            <a:r>
+              <a:rPr b="0" lang="en-US" sz="4400" spc="-1" strike="noStrike">
+                <a:latin typeface="Arial"/>
+              </a:rPr>
+              <a:t>f</a:t>
+            </a:r>
+            <a:r>
+              <a:rPr b="0" lang="en-US" sz="4400" spc="-1" strike="noStrike">
+                <a:latin typeface="Arial"/>
+              </a:rPr>
+              <a:t>o</a:t>
+            </a:r>
+            <a:r>
+              <a:rPr b="0" lang="en-US" sz="4400" spc="-1" strike="noStrike">
+                <a:latin typeface="Arial"/>
+              </a:rPr>
+              <a:t>r</a:t>
+            </a:r>
+            <a:r>
+              <a:rPr b="0" lang="en-US" sz="4400" spc="-1" strike="noStrike">
+                <a:latin typeface="Arial"/>
+              </a:rPr>
+              <a:t>m</a:t>
+            </a:r>
+            <a:r>
+              <a:rPr b="0" lang="en-US" sz="4400" spc="-1" strike="noStrike">
+                <a:latin typeface="Arial"/>
+              </a:rPr>
+              <a:t>a</a:t>
+            </a:r>
+            <a:r>
+              <a:rPr b="0" lang="en-US" sz="4400" spc="-1" strike="noStrike">
+                <a:latin typeface="Arial"/>
+              </a:rPr>
+              <a:t>t</a:t>
+            </a:r>
+            <a:endParaRPr b="0" lang="en-US" sz="4400" spc="-1" strike="noStrike">
               <a:latin typeface="Arial"/>
             </a:endParaRPr>
           </a:p>
@@ -5824,9 +5434,6 @@
           </a:bodyPr>
           <a:p>
             <a:pPr marL="432000" indent="-324000">
-              <a:lnSpc>
-                <a:spcPct val="90000"/>
-              </a:lnSpc>
               <a:spcBef>
                 <a:spcPts val="1417"/>
               </a:spcBef>
@@ -5838,26 +5445,17 @@
               <a:buChar char=""/>
             </a:pPr>
             <a:r>
-              <a:rPr b="0" lang="en-US" sz="2800" spc="-1" strike="noStrike">
-                <a:solidFill>
-                  <a:srgbClr val="000000"/>
-                </a:solidFill>
+              <a:rPr b="0" lang="en-US" sz="3200" spc="-1" strike="noStrike">
                 <a:latin typeface="Arial"/>
               </a:rPr>
               <a:t>Click to edit the outline text format</a:t>
             </a:r>
-            <a:endParaRPr b="0" lang="en-US" sz="2800" spc="-1" strike="noStrike">
-              <a:solidFill>
-                <a:srgbClr val="000000"/>
-              </a:solidFill>
+            <a:endParaRPr b="0" lang="en-US" sz="3200" spc="-1" strike="noStrike">
               <a:latin typeface="Arial"/>
             </a:endParaRPr>
           </a:p>
           <a:p>
             <a:pPr lvl="1" marL="864000" indent="-324000">
-              <a:lnSpc>
-                <a:spcPct val="90000"/>
-              </a:lnSpc>
               <a:spcBef>
                 <a:spcPts val="1134"/>
               </a:spcBef>
@@ -5869,26 +5467,17 @@
               <a:buChar char=""/>
             </a:pPr>
             <a:r>
-              <a:rPr b="0" lang="en-US" sz="2000" spc="-1" strike="noStrike">
-                <a:solidFill>
-                  <a:srgbClr val="000000"/>
-                </a:solidFill>
+              <a:rPr b="0" lang="en-US" sz="2800" spc="-1" strike="noStrike">
                 <a:latin typeface="Arial"/>
               </a:rPr>
               <a:t>Second Outline Level</a:t>
             </a:r>
-            <a:endParaRPr b="0" lang="en-US" sz="2000" spc="-1" strike="noStrike">
-              <a:solidFill>
-                <a:srgbClr val="000000"/>
-              </a:solidFill>
+            <a:endParaRPr b="0" lang="en-US" sz="2800" spc="-1" strike="noStrike">
               <a:latin typeface="Arial"/>
             </a:endParaRPr>
           </a:p>
           <a:p>
             <a:pPr lvl="2" marL="1296000" indent="-288000">
-              <a:lnSpc>
-                <a:spcPct val="90000"/>
-              </a:lnSpc>
               <a:spcBef>
                 <a:spcPts val="850"/>
               </a:spcBef>
@@ -5900,26 +5489,17 @@
               <a:buChar char=""/>
             </a:pPr>
             <a:r>
-              <a:rPr b="0" lang="en-US" sz="1800" spc="-1" strike="noStrike">
-                <a:solidFill>
-                  <a:srgbClr val="000000"/>
-                </a:solidFill>
+              <a:rPr b="0" lang="en-US" sz="2400" spc="-1" strike="noStrike">
                 <a:latin typeface="Arial"/>
               </a:rPr>
               <a:t>Third Outline Level</a:t>
             </a:r>
-            <a:endParaRPr b="0" lang="en-US" sz="1800" spc="-1" strike="noStrike">
-              <a:solidFill>
-                <a:srgbClr val="000000"/>
-              </a:solidFill>
+            <a:endParaRPr b="0" lang="en-US" sz="2400" spc="-1" strike="noStrike">
               <a:latin typeface="Arial"/>
             </a:endParaRPr>
           </a:p>
           <a:p>
             <a:pPr lvl="3" marL="1728000" indent="-216000">
-              <a:lnSpc>
-                <a:spcPct val="90000"/>
-              </a:lnSpc>
               <a:spcBef>
                 <a:spcPts val="567"/>
               </a:spcBef>
@@ -5931,26 +5511,17 @@
               <a:buChar char=""/>
             </a:pPr>
             <a:r>
-              <a:rPr b="0" lang="en-US" sz="1800" spc="-1" strike="noStrike">
-                <a:solidFill>
-                  <a:srgbClr val="000000"/>
-                </a:solidFill>
+              <a:rPr b="0" lang="en-US" sz="2000" spc="-1" strike="noStrike">
                 <a:latin typeface="Arial"/>
               </a:rPr>
               <a:t>Fourth Outline Level</a:t>
             </a:r>
-            <a:endParaRPr b="0" lang="en-US" sz="1800" spc="-1" strike="noStrike">
-              <a:solidFill>
-                <a:srgbClr val="000000"/>
-              </a:solidFill>
+            <a:endParaRPr b="0" lang="en-US" sz="2000" spc="-1" strike="noStrike">
               <a:latin typeface="Arial"/>
             </a:endParaRPr>
           </a:p>
           <a:p>
             <a:pPr lvl="4" marL="2160000" indent="-216000">
-              <a:lnSpc>
-                <a:spcPct val="90000"/>
-              </a:lnSpc>
               <a:spcBef>
                 <a:spcPts val="283"/>
               </a:spcBef>
@@ -5963,25 +5534,16 @@
             </a:pPr>
             <a:r>
               <a:rPr b="0" lang="en-US" sz="2000" spc="-1" strike="noStrike">
-                <a:solidFill>
-                  <a:srgbClr val="000000"/>
-                </a:solidFill>
                 <a:latin typeface="Arial"/>
               </a:rPr>
               <a:t>Fifth Outline Level</a:t>
             </a:r>
             <a:endParaRPr b="0" lang="en-US" sz="2000" spc="-1" strike="noStrike">
-              <a:solidFill>
-                <a:srgbClr val="000000"/>
-              </a:solidFill>
               <a:latin typeface="Arial"/>
             </a:endParaRPr>
           </a:p>
           <a:p>
             <a:pPr lvl="5" marL="2592000" indent="-216000">
-              <a:lnSpc>
-                <a:spcPct val="90000"/>
-              </a:lnSpc>
               <a:spcBef>
                 <a:spcPts val="283"/>
               </a:spcBef>
@@ -5994,25 +5556,16 @@
             </a:pPr>
             <a:r>
               <a:rPr b="0" lang="en-US" sz="2000" spc="-1" strike="noStrike">
-                <a:solidFill>
-                  <a:srgbClr val="000000"/>
-                </a:solidFill>
                 <a:latin typeface="Arial"/>
               </a:rPr>
               <a:t>Sixth Outline Level</a:t>
             </a:r>
             <a:endParaRPr b="0" lang="en-US" sz="2000" spc="-1" strike="noStrike">
-              <a:solidFill>
-                <a:srgbClr val="000000"/>
-              </a:solidFill>
               <a:latin typeface="Arial"/>
             </a:endParaRPr>
           </a:p>
           <a:p>
             <a:pPr lvl="6" marL="3024000" indent="-216000">
-              <a:lnSpc>
-                <a:spcPct val="90000"/>
-              </a:lnSpc>
               <a:spcBef>
                 <a:spcPts val="283"/>
               </a:spcBef>
@@ -6025,17 +5578,11 @@
             </a:pPr>
             <a:r>
               <a:rPr b="0" lang="en-US" sz="2000" spc="-1" strike="noStrike">
-                <a:solidFill>
-                  <a:srgbClr val="000000"/>
-                </a:solidFill>
                 <a:latin typeface="Arial"/>
               </a:rPr>
               <a:t>Seventh Outline Level</a:t>
             </a:r>
             <a:endParaRPr b="0" lang="en-US" sz="2000" spc="-1" strike="noStrike">
-              <a:solidFill>
-                <a:srgbClr val="000000"/>
-              </a:solidFill>
               <a:latin typeface="Arial"/>
             </a:endParaRPr>
           </a:p>
@@ -6098,7 +5645,7 @@
         <p:spPr>
           <a:xfrm>
             <a:off x="3124080" y="6356520"/>
-            <a:ext cx="2859840" cy="329400"/>
+            <a:ext cx="2859480" cy="329040"/>
           </a:xfrm>
           <a:prstGeom prst="rect">
             <a:avLst/>
@@ -6163,7 +5710,7 @@
         <p:spPr>
           <a:xfrm>
             <a:off x="6553080" y="6356520"/>
-            <a:ext cx="2098080" cy="329400"/>
+            <a:ext cx="2097720" cy="329040"/>
           </a:xfrm>
           <a:prstGeom prst="rect">
             <a:avLst/>
@@ -6199,7 +5746,7 @@
               </a:lnSpc>
               <a:buNone/>
             </a:pPr>
-            <a:fld id="{ADF268BA-853E-498B-A2F8-A456ABA0A8B0}" type="slidenum">
+            <a:fld id="{09153393-2AD8-4546-9E5E-3AE3FD57E198}" type="slidenum">
               <a:rPr b="0" lang="en-US" sz="1200" spc="-1" strike="noStrike">
                 <a:solidFill>
                   <a:srgbClr val="8b8b8b"/>
@@ -6228,7 +5775,7 @@
         <p:spPr>
           <a:xfrm>
             <a:off x="457200" y="6356520"/>
-            <a:ext cx="2098080" cy="329400"/>
+            <a:ext cx="2097720" cy="329040"/>
           </a:xfrm>
           <a:prstGeom prst="rect">
             <a:avLst/>
@@ -6290,19 +5837,16 @@
             <a:noAutofit/>
           </a:bodyPr>
           <a:p>
-            <a:r>
-              <a:rPr b="0" lang="en-US" sz="1800" spc="-1" strike="noStrike">
-                <a:solidFill>
-                  <a:srgbClr val="000000"/>
-                </a:solidFill>
+            <a:pPr algn="ctr">
+              <a:buNone/>
+            </a:pPr>
+            <a:r>
+              <a:rPr b="0" lang="en-US" sz="4400" spc="-1" strike="noStrike">
                 <a:latin typeface="Arial"/>
               </a:rPr>
               <a:t>Click to edit the title text format</a:t>
             </a:r>
-            <a:endParaRPr b="0" lang="en-US" sz="1800" spc="-1" strike="noStrike">
-              <a:solidFill>
-                <a:srgbClr val="000000"/>
-              </a:solidFill>
+            <a:endParaRPr b="0" lang="en-US" sz="4400" spc="-1" strike="noStrike">
               <a:latin typeface="Arial"/>
             </a:endParaRPr>
           </a:p>
@@ -6337,9 +5881,6 @@
           </a:bodyPr>
           <a:p>
             <a:pPr marL="432000" indent="-324000">
-              <a:lnSpc>
-                <a:spcPct val="90000"/>
-              </a:lnSpc>
               <a:spcBef>
                 <a:spcPts val="1417"/>
               </a:spcBef>
@@ -6351,26 +5892,17 @@
               <a:buChar char=""/>
             </a:pPr>
             <a:r>
-              <a:rPr b="0" lang="en-US" sz="2800" spc="-1" strike="noStrike">
-                <a:solidFill>
-                  <a:srgbClr val="000000"/>
-                </a:solidFill>
+              <a:rPr b="0" lang="en-US" sz="3200" spc="-1" strike="noStrike">
                 <a:latin typeface="Arial"/>
               </a:rPr>
               <a:t>Click to edit the outline text format</a:t>
             </a:r>
-            <a:endParaRPr b="0" lang="en-US" sz="2800" spc="-1" strike="noStrike">
-              <a:solidFill>
-                <a:srgbClr val="000000"/>
-              </a:solidFill>
+            <a:endParaRPr b="0" lang="en-US" sz="3200" spc="-1" strike="noStrike">
               <a:latin typeface="Arial"/>
             </a:endParaRPr>
           </a:p>
           <a:p>
             <a:pPr lvl="1" marL="864000" indent="-324000">
-              <a:lnSpc>
-                <a:spcPct val="90000"/>
-              </a:lnSpc>
               <a:spcBef>
                 <a:spcPts val="1134"/>
               </a:spcBef>
@@ -6382,26 +5914,17 @@
               <a:buChar char=""/>
             </a:pPr>
             <a:r>
-              <a:rPr b="0" lang="en-US" sz="2000" spc="-1" strike="noStrike">
-                <a:solidFill>
-                  <a:srgbClr val="000000"/>
-                </a:solidFill>
+              <a:rPr b="0" lang="en-US" sz="2800" spc="-1" strike="noStrike">
                 <a:latin typeface="Arial"/>
               </a:rPr>
               <a:t>Second Outline Level</a:t>
             </a:r>
-            <a:endParaRPr b="0" lang="en-US" sz="2000" spc="-1" strike="noStrike">
-              <a:solidFill>
-                <a:srgbClr val="000000"/>
-              </a:solidFill>
+            <a:endParaRPr b="0" lang="en-US" sz="2800" spc="-1" strike="noStrike">
               <a:latin typeface="Arial"/>
             </a:endParaRPr>
           </a:p>
           <a:p>
             <a:pPr lvl="2" marL="1296000" indent="-288000">
-              <a:lnSpc>
-                <a:spcPct val="90000"/>
-              </a:lnSpc>
               <a:spcBef>
                 <a:spcPts val="850"/>
               </a:spcBef>
@@ -6413,26 +5936,17 @@
               <a:buChar char=""/>
             </a:pPr>
             <a:r>
-              <a:rPr b="0" lang="en-US" sz="1800" spc="-1" strike="noStrike">
-                <a:solidFill>
-                  <a:srgbClr val="000000"/>
-                </a:solidFill>
+              <a:rPr b="0" lang="en-US" sz="2400" spc="-1" strike="noStrike">
                 <a:latin typeface="Arial"/>
               </a:rPr>
               <a:t>Third Outline Level</a:t>
             </a:r>
-            <a:endParaRPr b="0" lang="en-US" sz="1800" spc="-1" strike="noStrike">
-              <a:solidFill>
-                <a:srgbClr val="000000"/>
-              </a:solidFill>
+            <a:endParaRPr b="0" lang="en-US" sz="2400" spc="-1" strike="noStrike">
               <a:latin typeface="Arial"/>
             </a:endParaRPr>
           </a:p>
           <a:p>
             <a:pPr lvl="3" marL="1728000" indent="-216000">
-              <a:lnSpc>
-                <a:spcPct val="90000"/>
-              </a:lnSpc>
               <a:spcBef>
                 <a:spcPts val="567"/>
               </a:spcBef>
@@ -6444,26 +5958,17 @@
               <a:buChar char=""/>
             </a:pPr>
             <a:r>
-              <a:rPr b="0" lang="en-US" sz="1800" spc="-1" strike="noStrike">
-                <a:solidFill>
-                  <a:srgbClr val="000000"/>
-                </a:solidFill>
+              <a:rPr b="0" lang="en-US" sz="2000" spc="-1" strike="noStrike">
                 <a:latin typeface="Arial"/>
               </a:rPr>
               <a:t>Fourth Outline Level</a:t>
             </a:r>
-            <a:endParaRPr b="0" lang="en-US" sz="1800" spc="-1" strike="noStrike">
-              <a:solidFill>
-                <a:srgbClr val="000000"/>
-              </a:solidFill>
+            <a:endParaRPr b="0" lang="en-US" sz="2000" spc="-1" strike="noStrike">
               <a:latin typeface="Arial"/>
             </a:endParaRPr>
           </a:p>
           <a:p>
             <a:pPr lvl="4" marL="2160000" indent="-216000">
-              <a:lnSpc>
-                <a:spcPct val="90000"/>
-              </a:lnSpc>
               <a:spcBef>
                 <a:spcPts val="283"/>
               </a:spcBef>
@@ -6476,25 +5981,16 @@
             </a:pPr>
             <a:r>
               <a:rPr b="0" lang="en-US" sz="2000" spc="-1" strike="noStrike">
-                <a:solidFill>
-                  <a:srgbClr val="000000"/>
-                </a:solidFill>
                 <a:latin typeface="Arial"/>
               </a:rPr>
               <a:t>Fifth Outline Level</a:t>
             </a:r>
             <a:endParaRPr b="0" lang="en-US" sz="2000" spc="-1" strike="noStrike">
-              <a:solidFill>
-                <a:srgbClr val="000000"/>
-              </a:solidFill>
               <a:latin typeface="Arial"/>
             </a:endParaRPr>
           </a:p>
           <a:p>
             <a:pPr lvl="5" marL="2592000" indent="-216000">
-              <a:lnSpc>
-                <a:spcPct val="90000"/>
-              </a:lnSpc>
               <a:spcBef>
                 <a:spcPts val="283"/>
               </a:spcBef>
@@ -6507,25 +6003,16 @@
             </a:pPr>
             <a:r>
               <a:rPr b="0" lang="en-US" sz="2000" spc="-1" strike="noStrike">
-                <a:solidFill>
-                  <a:srgbClr val="000000"/>
-                </a:solidFill>
                 <a:latin typeface="Arial"/>
               </a:rPr>
               <a:t>Sixth Outline Level</a:t>
             </a:r>
             <a:endParaRPr b="0" lang="en-US" sz="2000" spc="-1" strike="noStrike">
-              <a:solidFill>
-                <a:srgbClr val="000000"/>
-              </a:solidFill>
               <a:latin typeface="Arial"/>
             </a:endParaRPr>
           </a:p>
           <a:p>
             <a:pPr lvl="6" marL="3024000" indent="-216000">
-              <a:lnSpc>
-                <a:spcPct val="90000"/>
-              </a:lnSpc>
               <a:spcBef>
                 <a:spcPts val="283"/>
               </a:spcBef>
@@ -6538,17 +6025,11 @@
             </a:pPr>
             <a:r>
               <a:rPr b="0" lang="en-US" sz="2000" spc="-1" strike="noStrike">
-                <a:solidFill>
-                  <a:srgbClr val="000000"/>
-                </a:solidFill>
                 <a:latin typeface="Arial"/>
               </a:rPr>
               <a:t>Seventh Outline Level</a:t>
             </a:r>
             <a:endParaRPr b="0" lang="en-US" sz="2000" spc="-1" strike="noStrike">
-              <a:solidFill>
-                <a:srgbClr val="000000"/>
-              </a:solidFill>
               <a:latin typeface="Arial"/>
             </a:endParaRPr>
           </a:p>
@@ -6604,7 +6085,7 @@
         <p:spPr>
           <a:xfrm>
             <a:off x="0" y="2130480"/>
-            <a:ext cx="9128160" cy="1434240"/>
+            <a:ext cx="9127800" cy="1433880"/>
           </a:xfrm>
           <a:prstGeom prst="rect">
             <a:avLst/>
@@ -6638,9 +6119,6 @@
               <a:t>001 Palo Alto 2581 - 2587</a:t>
             </a:r>
             <a:endParaRPr b="0" lang="en-US" sz="4200" spc="-1" strike="noStrike">
-              <a:solidFill>
-                <a:srgbClr val="000000"/>
-              </a:solidFill>
               <a:latin typeface="Arial"/>
             </a:endParaRPr>
           </a:p>
@@ -6659,7 +6137,7 @@
         <p:spPr>
           <a:xfrm>
             <a:off x="1371600" y="4563360"/>
-            <a:ext cx="6365160" cy="659160"/>
+            <a:ext cx="6364800" cy="658800"/>
           </a:xfrm>
           <a:prstGeom prst="rect">
             <a:avLst/>
@@ -6715,7 +6193,7 @@
         <p:spPr>
           <a:xfrm>
             <a:off x="4212000" y="3645000"/>
-            <a:ext cx="906120" cy="877320"/>
+            <a:ext cx="905760" cy="876960"/>
           </a:xfrm>
           <a:prstGeom prst="rect">
             <a:avLst/>
@@ -6739,7 +6217,7 @@
         <p:txBody>
           <a:bodyPr/>
           <a:p>
-            <a:fld id="{81426B0E-B968-449A-A8D1-D899920A0427}" type="slidenum">
+            <a:fld id="{75870684-7C2C-4FD6-8A0C-D4D5F7766AFC}" type="slidenum">
               <a:t>1</a:t>
             </a:fld>
           </a:p>
@@ -6759,9 +6237,9 @@
         <p:txBody>
           <a:bodyPr/>
           <a:p>
-            <a:fld id="{4E06473D-BA9C-4048-A89B-4E6198CBF656}" type="datetime1">
+            <a:fld id="{C01B5C08-8747-429E-A366-0949ED54C71D}" type="datetime1">
               <a:rPr lang="en-US"/>
-              <a:t>05/29/2026</a:t>
+              <a:t>05/30/2026</a:t>
             </a:fld>
           </a:p>
         </p:txBody>
@@ -6809,7 +6287,7 @@
         <p:spPr>
           <a:xfrm>
             <a:off x="10080" y="0"/>
-            <a:ext cx="9127440" cy="729000"/>
+            <a:ext cx="9127080" cy="728640"/>
           </a:xfrm>
           <a:prstGeom prst="rect">
             <a:avLst/>
@@ -6848,112 +6326,9 @@
                 <a:latin typeface="Calibri"/>
                 <a:ea typeface="DejaVu Sans"/>
               </a:rPr>
-              <a:t>00</a:t>
-            </a:r>
-            <a:r>
-              <a:rPr b="1" lang="en-US" sz="4200" spc="-1" strike="noStrike">
-                <a:solidFill>
-                  <a:srgbClr val="ffff00"/>
-                </a:solidFill>
-                <a:latin typeface="Calibri"/>
-                <a:ea typeface="DejaVu Sans"/>
-              </a:rPr>
-              <a:t>1 </a:t>
-            </a:r>
-            <a:r>
-              <a:rPr b="1" lang="en-US" sz="4200" spc="-1" strike="noStrike">
-                <a:solidFill>
-                  <a:srgbClr val="ffff00"/>
-                </a:solidFill>
-                <a:latin typeface="Calibri"/>
-                <a:ea typeface="DejaVu Sans"/>
-              </a:rPr>
-              <a:t>Pal</a:t>
-            </a:r>
-            <a:r>
-              <a:rPr b="1" lang="en-US" sz="4200" spc="-1" strike="noStrike">
-                <a:solidFill>
-                  <a:srgbClr val="ffff00"/>
-                </a:solidFill>
-                <a:latin typeface="Calibri"/>
-                <a:ea typeface="DejaVu Sans"/>
-              </a:rPr>
-              <a:t>o </a:t>
-            </a:r>
-            <a:r>
-              <a:rPr b="1" lang="en-US" sz="4200" spc="-1" strike="noStrike">
-                <a:solidFill>
-                  <a:srgbClr val="ffff00"/>
-                </a:solidFill>
-                <a:latin typeface="Calibri"/>
-                <a:ea typeface="DejaVu Sans"/>
-              </a:rPr>
-              <a:t>Alt</a:t>
-            </a:r>
-            <a:r>
-              <a:rPr b="1" lang="en-US" sz="4200" spc="-1" strike="noStrike">
-                <a:solidFill>
-                  <a:srgbClr val="ffff00"/>
-                </a:solidFill>
-                <a:latin typeface="Calibri"/>
-                <a:ea typeface="DejaVu Sans"/>
-              </a:rPr>
-              <a:t>o </a:t>
-            </a:r>
-            <a:r>
-              <a:rPr b="1" lang="en-US" sz="4200" spc="-1" strike="noStrike">
-                <a:solidFill>
-                  <a:srgbClr val="ffff00"/>
-                </a:solidFill>
-                <a:latin typeface="Calibri"/>
-                <a:ea typeface="DejaVu Sans"/>
-              </a:rPr>
-              <a:t>25</a:t>
-            </a:r>
-            <a:r>
-              <a:rPr b="1" lang="en-US" sz="4200" spc="-1" strike="noStrike">
-                <a:solidFill>
-                  <a:srgbClr val="ffff00"/>
-                </a:solidFill>
-                <a:latin typeface="Calibri"/>
-                <a:ea typeface="DejaVu Sans"/>
-              </a:rPr>
-              <a:t>81 </a:t>
-            </a:r>
-            <a:r>
-              <a:rPr b="1" lang="en-US" sz="4200" spc="-1" strike="noStrike">
-                <a:solidFill>
-                  <a:srgbClr val="ffff00"/>
-                </a:solidFill>
-                <a:latin typeface="Calibri"/>
-                <a:ea typeface="DejaVu Sans"/>
-              </a:rPr>
-              <a:t>- </a:t>
-            </a:r>
-            <a:r>
-              <a:rPr b="1" lang="en-US" sz="4200" spc="-1" strike="noStrike">
-                <a:solidFill>
-                  <a:srgbClr val="ffff00"/>
-                </a:solidFill>
-                <a:latin typeface="Calibri"/>
-                <a:ea typeface="DejaVu Sans"/>
-              </a:rPr>
-              <a:t>25</a:t>
-            </a:r>
-            <a:r>
-              <a:rPr b="1" lang="en-US" sz="4200" spc="-1" strike="noStrike">
-                <a:solidFill>
-                  <a:srgbClr val="ffff00"/>
-                </a:solidFill>
-                <a:latin typeface="Calibri"/>
-                <a:ea typeface="DejaVu Sans"/>
-              </a:rPr>
-              <a:t>81</a:t>
+              <a:t>001 Palo Alto 2581 - 2581</a:t>
             </a:r>
             <a:endParaRPr b="0" lang="en-US" sz="4200" spc="-1" strike="noStrike">
-              <a:solidFill>
-                <a:srgbClr val="000000"/>
-              </a:solidFill>
               <a:latin typeface="Arial"/>
             </a:endParaRPr>
           </a:p>
@@ -6972,7 +6347,7 @@
         <p:spPr>
           <a:xfrm>
             <a:off x="232200" y="1302120"/>
-            <a:ext cx="2273400" cy="1898280"/>
+            <a:ext cx="2273040" cy="1897920"/>
           </a:xfrm>
           <a:prstGeom prst="rect">
             <a:avLst/>
@@ -7010,87 +6385,7 @@
                 <a:latin typeface="Calibri"/>
                 <a:ea typeface="DejaVu Sans"/>
               </a:rPr>
-              <a:t>Pal</a:t>
-            </a:r>
-            <a:r>
-              <a:rPr b="1" lang="en-US" sz="1300" spc="-1" strike="noStrike">
-                <a:solidFill>
-                  <a:srgbClr val="000000"/>
-                </a:solidFill>
-                <a:latin typeface="Calibri"/>
-                <a:ea typeface="DejaVu Sans"/>
-              </a:rPr>
-              <a:t>o </a:t>
-            </a:r>
-            <a:r>
-              <a:rPr b="1" lang="en-US" sz="1300" spc="-1" strike="noStrike">
-                <a:solidFill>
-                  <a:srgbClr val="000000"/>
-                </a:solidFill>
-                <a:latin typeface="Calibri"/>
-                <a:ea typeface="DejaVu Sans"/>
-              </a:rPr>
-              <a:t>Alt</a:t>
-            </a:r>
-            <a:r>
-              <a:rPr b="1" lang="en-US" sz="1300" spc="-1" strike="noStrike">
-                <a:solidFill>
-                  <a:srgbClr val="000000"/>
-                </a:solidFill>
-                <a:latin typeface="Calibri"/>
-                <a:ea typeface="DejaVu Sans"/>
-              </a:rPr>
-              <a:t>o </a:t>
-            </a:r>
-            <a:r>
-              <a:rPr b="1" lang="en-US" sz="1300" spc="-1" strike="noStrike">
-                <a:solidFill>
-                  <a:srgbClr val="000000"/>
-                </a:solidFill>
-                <a:latin typeface="Calibri"/>
-                <a:ea typeface="DejaVu Sans"/>
-              </a:rPr>
-              <a:t>258</a:t>
-            </a:r>
-            <a:r>
-              <a:rPr b="1" lang="en-US" sz="1300" spc="-1" strike="noStrike">
-                <a:solidFill>
-                  <a:srgbClr val="000000"/>
-                </a:solidFill>
-                <a:latin typeface="Calibri"/>
-                <a:ea typeface="DejaVu Sans"/>
-              </a:rPr>
-              <a:t>1 </a:t>
-            </a:r>
-            <a:r>
-              <a:rPr b="1" lang="en-US" sz="1300" spc="-1" strike="noStrike">
-                <a:solidFill>
-                  <a:srgbClr val="000000"/>
-                </a:solidFill>
-                <a:latin typeface="Calibri"/>
-                <a:ea typeface="DejaVu Sans"/>
-              </a:rPr>
-              <a:t>to </a:t>
-            </a:r>
-            <a:r>
-              <a:rPr b="1" lang="en-US" sz="1300" spc="-1" strike="noStrike">
-                <a:solidFill>
-                  <a:srgbClr val="000000"/>
-                </a:solidFill>
-                <a:latin typeface="Calibri"/>
-                <a:ea typeface="DejaVu Sans"/>
-              </a:rPr>
-              <a:t>258</a:t>
-            </a:r>
-            <a:r>
-              <a:rPr b="1" lang="en-US" sz="1300" spc="-1" strike="noStrike">
-                <a:solidFill>
-                  <a:srgbClr val="000000"/>
-                </a:solidFill>
-                <a:latin typeface="Calibri"/>
-                <a:ea typeface="DejaVu Sans"/>
-              </a:rPr>
-              <a:t>7</a:t>
+              <a:t>Palo Alto 2581 to 2587</a:t>
             </a:r>
             <a:endParaRPr b="0" lang="en-US" sz="1300" spc="-1" strike="noStrike">
               <a:latin typeface="Arial"/>
@@ -7118,97 +6413,7 @@
                 <a:latin typeface="Calibri"/>
                 <a:ea typeface="DejaVu Sans"/>
               </a:rPr>
-              <a:t>258</a:t>
-            </a:r>
-            <a:r>
-              <a:rPr b="0" lang="en-US" sz="1300" spc="-1" strike="noStrike">
-                <a:solidFill>
-                  <a:srgbClr val="000000"/>
-                </a:solidFill>
-                <a:latin typeface="Calibri"/>
-                <a:ea typeface="DejaVu Sans"/>
-              </a:rPr>
-              <a:t>1: </a:t>
-            </a:r>
-            <a:r>
-              <a:rPr b="0" lang="en-US" sz="1300" spc="-1" strike="noStrike">
-                <a:solidFill>
-                  <a:srgbClr val="000000"/>
-                </a:solidFill>
-                <a:latin typeface="Calibri"/>
-                <a:ea typeface="DejaVu Sans"/>
-              </a:rPr>
-              <a:t>stor</a:t>
-            </a:r>
-            <a:r>
-              <a:rPr b="0" lang="en-US" sz="1300" spc="-1" strike="noStrike">
-                <a:solidFill>
-                  <a:srgbClr val="000000"/>
-                </a:solidFill>
-                <a:latin typeface="Calibri"/>
-                <a:ea typeface="DejaVu Sans"/>
-              </a:rPr>
-              <a:t>age </a:t>
-            </a:r>
-            <a:r>
-              <a:rPr b="0" lang="en-US" sz="1300" spc="-1" strike="noStrike">
-                <a:solidFill>
-                  <a:srgbClr val="000000"/>
-                </a:solidFill>
-                <a:latin typeface="Calibri"/>
-                <a:ea typeface="DejaVu Sans"/>
-              </a:rPr>
-              <a:t>0-</a:t>
-            </a:r>
-            <a:r>
-              <a:rPr b="0" lang="en-US" sz="1300" spc="-1" strike="noStrike">
-                <a:solidFill>
-                  <a:srgbClr val="000000"/>
-                </a:solidFill>
-                <a:latin typeface="Calibri"/>
-                <a:ea typeface="DejaVu Sans"/>
-              </a:rPr>
-              <a:t>setb</a:t>
-            </a:r>
-            <a:r>
-              <a:rPr b="0" lang="en-US" sz="1300" spc="-1" strike="noStrike">
-                <a:solidFill>
-                  <a:srgbClr val="000000"/>
-                </a:solidFill>
-                <a:latin typeface="Calibri"/>
-                <a:ea typeface="DejaVu Sans"/>
-              </a:rPr>
-              <a:t>ack: </a:t>
-            </a:r>
-            <a:r>
-              <a:rPr b="0" lang="en-US" sz="1300" spc="-1" strike="noStrike">
-                <a:solidFill>
-                  <a:srgbClr val="000000"/>
-                </a:solidFill>
-                <a:latin typeface="Calibri"/>
-                <a:ea typeface="DejaVu Sans"/>
-              </a:rPr>
-              <a:t>3 x </a:t>
-            </a:r>
-            <a:r>
-              <a:rPr b="0" lang="en-US" sz="1300" spc="-1" strike="noStrike">
-                <a:solidFill>
-                  <a:srgbClr val="000000"/>
-                </a:solidFill>
-                <a:latin typeface="Calibri"/>
-                <a:ea typeface="DejaVu Sans"/>
-              </a:rPr>
-              <a:t>8 x </a:t>
-            </a:r>
-            <a:r>
-              <a:rPr b="0" lang="en-US" sz="1300" spc="-1" strike="noStrike">
-                <a:solidFill>
-                  <a:srgbClr val="000000"/>
-                </a:solidFill>
-                <a:latin typeface="Calibri"/>
-                <a:ea typeface="DejaVu Sans"/>
-              </a:rPr>
-              <a:t>6</a:t>
+              <a:t>2581: storage 0-setback: 3 x 8 x 6</a:t>
             </a:r>
             <a:endParaRPr b="0" lang="en-US" sz="1300" spc="-1" strike="noStrike">
               <a:latin typeface="Arial"/>
@@ -7236,117 +6441,7 @@
                 <a:latin typeface="Calibri"/>
                 <a:ea typeface="DejaVu Sans"/>
               </a:rPr>
-              <a:t>258</a:t>
-            </a:r>
-            <a:r>
-              <a:rPr b="0" lang="en-US" sz="1300" spc="-1" strike="noStrike">
-                <a:solidFill>
-                  <a:srgbClr val="000000"/>
-                </a:solidFill>
-                <a:latin typeface="Calibri"/>
-                <a:ea typeface="DejaVu Sans"/>
-              </a:rPr>
-              <a:t>3, </a:t>
-            </a:r>
-            <a:r>
-              <a:rPr b="0" lang="en-US" sz="1300" spc="-1" strike="noStrike">
-                <a:solidFill>
-                  <a:srgbClr val="000000"/>
-                </a:solidFill>
-                <a:latin typeface="Calibri"/>
-                <a:ea typeface="DejaVu Sans"/>
-              </a:rPr>
-              <a:t>298</a:t>
-            </a:r>
-            <a:r>
-              <a:rPr b="0" lang="en-US" sz="1300" spc="-1" strike="noStrike">
-                <a:solidFill>
-                  <a:srgbClr val="000000"/>
-                </a:solidFill>
-                <a:latin typeface="Calibri"/>
-                <a:ea typeface="DejaVu Sans"/>
-              </a:rPr>
-              <a:t>7: </a:t>
-            </a:r>
-            <a:r>
-              <a:rPr b="0" lang="en-US" sz="1300" spc="-1" strike="noStrike">
-                <a:solidFill>
-                  <a:srgbClr val="000000"/>
-                </a:solidFill>
-                <a:latin typeface="Calibri"/>
-                <a:ea typeface="DejaVu Sans"/>
-              </a:rPr>
-              <a:t>stor</a:t>
-            </a:r>
-            <a:r>
-              <a:rPr b="0" lang="en-US" sz="1300" spc="-1" strike="noStrike">
-                <a:solidFill>
-                  <a:srgbClr val="000000"/>
-                </a:solidFill>
-                <a:latin typeface="Calibri"/>
-                <a:ea typeface="DejaVu Sans"/>
-              </a:rPr>
-              <a:t>age </a:t>
-            </a:r>
-            <a:r>
-              <a:rPr b="0" lang="en-US" sz="1300" spc="-1" strike="noStrike">
-                <a:solidFill>
-                  <a:srgbClr val="000000"/>
-                </a:solidFill>
-                <a:latin typeface="Calibri"/>
-                <a:ea typeface="DejaVu Sans"/>
-              </a:rPr>
-              <a:t>0-</a:t>
-            </a:r>
-            <a:r>
-              <a:rPr b="0" lang="en-US" sz="1300" spc="-1" strike="noStrike">
-                <a:solidFill>
-                  <a:srgbClr val="000000"/>
-                </a:solidFill>
-                <a:latin typeface="Calibri"/>
-                <a:ea typeface="DejaVu Sans"/>
-              </a:rPr>
-              <a:t>setb</a:t>
-            </a:r>
-            <a:r>
-              <a:rPr b="0" lang="en-US" sz="1300" spc="-1" strike="noStrike">
-                <a:solidFill>
-                  <a:srgbClr val="000000"/>
-                </a:solidFill>
-                <a:latin typeface="Calibri"/>
-                <a:ea typeface="DejaVu Sans"/>
-              </a:rPr>
-              <a:t>ack </a:t>
-            </a:r>
-            <a:r>
-              <a:rPr b="0" lang="en-US" sz="1300" spc="-1" strike="noStrike">
-                <a:solidFill>
-                  <a:srgbClr val="000000"/>
-                </a:solidFill>
-                <a:latin typeface="Calibri"/>
-                <a:ea typeface="DejaVu Sans"/>
-              </a:rPr>
-              <a:t>(4 x </a:t>
-            </a:r>
-            <a:r>
-              <a:rPr b="0" lang="en-US" sz="1300" spc="-1" strike="noStrike">
-                <a:solidFill>
-                  <a:srgbClr val="000000"/>
-                </a:solidFill>
-                <a:latin typeface="Calibri"/>
-                <a:ea typeface="DejaVu Sans"/>
-              </a:rPr>
-              <a:t>8 x </a:t>
-            </a:r>
-            <a:r>
-              <a:rPr b="0" lang="en-US" sz="1300" spc="-1" strike="noStrike">
-                <a:solidFill>
-                  <a:srgbClr val="000000"/>
-                </a:solidFill>
-                <a:latin typeface="Calibri"/>
-                <a:ea typeface="DejaVu Sans"/>
-              </a:rPr>
-              <a:t>6)</a:t>
+              <a:t>2583, 2987: storage 0-setback (4 x 8 x 6)</a:t>
             </a:r>
             <a:endParaRPr b="0" lang="en-US" sz="1300" spc="-1" strike="noStrike">
               <a:latin typeface="Arial"/>
@@ -7374,97 +6469,7 @@
                 <a:latin typeface="Calibri"/>
                 <a:ea typeface="DejaVu Sans"/>
               </a:rPr>
-              <a:t>258</a:t>
-            </a:r>
-            <a:r>
-              <a:rPr b="0" lang="en-US" sz="1300" spc="-1" strike="noStrike">
-                <a:solidFill>
-                  <a:srgbClr val="000000"/>
-                </a:solidFill>
-                <a:latin typeface="Calibri"/>
-                <a:ea typeface="DejaVu Sans"/>
-              </a:rPr>
-              <a:t>5: </a:t>
-            </a:r>
-            <a:r>
-              <a:rPr b="0" lang="en-US" sz="1300" spc="-1" strike="noStrike">
-                <a:solidFill>
-                  <a:srgbClr val="000000"/>
-                </a:solidFill>
-                <a:latin typeface="Calibri"/>
-                <a:ea typeface="DejaVu Sans"/>
-              </a:rPr>
-              <a:t>She</a:t>
-            </a:r>
-            <a:r>
-              <a:rPr b="0" lang="en-US" sz="1300" spc="-1" strike="noStrike">
-                <a:solidFill>
-                  <a:srgbClr val="000000"/>
-                </a:solidFill>
-                <a:latin typeface="Calibri"/>
-                <a:ea typeface="DejaVu Sans"/>
-              </a:rPr>
-              <a:t>d 3-</a:t>
-            </a:r>
-            <a:r>
-              <a:rPr b="0" lang="en-US" sz="1300" spc="-1" strike="noStrike">
-                <a:solidFill>
-                  <a:srgbClr val="000000"/>
-                </a:solidFill>
-                <a:latin typeface="Calibri"/>
-                <a:ea typeface="DejaVu Sans"/>
-              </a:rPr>
-              <a:t>feet </a:t>
-            </a:r>
-            <a:r>
-              <a:rPr b="0" lang="en-US" sz="1300" spc="-1" strike="noStrike">
-                <a:solidFill>
-                  <a:srgbClr val="000000"/>
-                </a:solidFill>
-                <a:latin typeface="Calibri"/>
-                <a:ea typeface="DejaVu Sans"/>
-              </a:rPr>
-              <a:t>setb</a:t>
-            </a:r>
-            <a:r>
-              <a:rPr b="0" lang="en-US" sz="1300" spc="-1" strike="noStrike">
-                <a:solidFill>
-                  <a:srgbClr val="000000"/>
-                </a:solidFill>
-                <a:latin typeface="Calibri"/>
-                <a:ea typeface="DejaVu Sans"/>
-              </a:rPr>
-              <a:t>ack </a:t>
-            </a:r>
-            <a:r>
-              <a:rPr b="0" lang="en-US" sz="1300" spc="-1" strike="noStrike">
-                <a:solidFill>
-                  <a:srgbClr val="000000"/>
-                </a:solidFill>
-                <a:latin typeface="Calibri"/>
-                <a:ea typeface="DejaVu Sans"/>
-              </a:rPr>
-              <a:t>(6 x </a:t>
-            </a:r>
-            <a:r>
-              <a:rPr b="0" lang="en-US" sz="1300" spc="-1" strike="noStrike">
-                <a:solidFill>
-                  <a:srgbClr val="000000"/>
-                </a:solidFill>
-                <a:latin typeface="Calibri"/>
-                <a:ea typeface="DejaVu Sans"/>
-              </a:rPr>
-              <a:t>8 x </a:t>
-            </a:r>
-            <a:r>
-              <a:rPr b="0" lang="en-US" sz="1300" spc="-1" strike="noStrike">
-                <a:solidFill>
-                  <a:srgbClr val="000000"/>
-                </a:solidFill>
-                <a:latin typeface="Calibri"/>
-                <a:ea typeface="DejaVu Sans"/>
-              </a:rPr>
-              <a:t>8)</a:t>
+              <a:t>2585: Shed 3-feet setback (6 x 8 x 8)</a:t>
             </a:r>
             <a:endParaRPr b="0" lang="en-US" sz="1300" spc="-1" strike="noStrike">
               <a:latin typeface="Arial"/>
@@ -7498,7 +6503,7 @@
         <p:spPr>
           <a:xfrm>
             <a:off x="0" y="723600"/>
-            <a:ext cx="9124560" cy="324360"/>
+            <a:ext cx="9124200" cy="324000"/>
           </a:xfrm>
           <a:prstGeom prst="rect">
             <a:avLst/>
@@ -7564,7 +6569,7 @@
         <p:spPr>
           <a:xfrm>
             <a:off x="6553080" y="6356520"/>
-            <a:ext cx="2098080" cy="329400"/>
+            <a:ext cx="2097720" cy="329040"/>
           </a:xfrm>
           <a:prstGeom prst="rect">
             <a:avLst/>
@@ -7600,7 +6605,7 @@
               </a:lnSpc>
               <a:buNone/>
             </a:pPr>
-            <a:fld id="{A084D45F-59ED-4D88-8BE5-0220425D99EE}" type="slidenum">
+            <a:fld id="{9C90F01D-F864-40EC-BB93-20D56777E306}" type="slidenum">
               <a:rPr b="0" lang="en-US" sz="1200" spc="-1" strike="noStrike">
                 <a:solidFill>
                   <a:srgbClr val="8b8b8b"/>
@@ -7625,7 +6630,7 @@
         <p:spPr>
           <a:xfrm>
             <a:off x="8161560" y="5405040"/>
-            <a:ext cx="716400" cy="309960"/>
+            <a:ext cx="716040" cy="309600"/>
           </a:xfrm>
           <a:prstGeom prst="rect">
             <a:avLst/>
@@ -7671,9 +6676,6 @@
               <a:t>3’</a:t>
             </a:r>
             <a:endParaRPr b="0" lang="en-US" sz="1800" spc="-1" strike="noStrike">
-              <a:solidFill>
-                <a:srgbClr val="000000"/>
-              </a:solidFill>
               <a:latin typeface="Arial"/>
             </a:endParaRPr>
           </a:p>
@@ -7688,7 +6690,7 @@
         <p:spPr>
           <a:xfrm>
             <a:off x="8298000" y="5384880"/>
-            <a:ext cx="439920" cy="360"/>
+            <a:ext cx="439560" cy="360"/>
           </a:xfrm>
           <a:custGeom>
             <a:avLst/>
@@ -7737,7 +6739,7 @@
         <p:spPr>
           <a:xfrm>
             <a:off x="4628520" y="1896480"/>
-            <a:ext cx="3612240" cy="1918800"/>
+            <a:ext cx="3611880" cy="1918440"/>
           </a:xfrm>
           <a:prstGeom prst="rect">
             <a:avLst/>
@@ -7775,7 +6777,7 @@
         <p:spPr>
           <a:xfrm>
             <a:off x="4775040" y="4368960"/>
-            <a:ext cx="2110680" cy="507600"/>
+            <a:ext cx="1854360" cy="507240"/>
           </a:xfrm>
           <a:prstGeom prst="roundRect">
             <a:avLst>
@@ -7840,8 +6842,8 @@
         </p:nvSpPr>
         <p:spPr>
           <a:xfrm>
-            <a:off x="3996360" y="3240000"/>
-            <a:ext cx="2460600" cy="536040"/>
+            <a:off x="4114800" y="3240000"/>
+            <a:ext cx="2341800" cy="535680"/>
           </a:xfrm>
           <a:prstGeom prst="roundRect">
             <a:avLst>
@@ -7907,7 +6909,7 @@
         <p:spPr>
           <a:xfrm>
             <a:off x="6919920" y="2201400"/>
-            <a:ext cx="1151280" cy="315720"/>
+            <a:ext cx="1150920" cy="315360"/>
           </a:xfrm>
           <a:prstGeom prst="rect">
             <a:avLst/>
@@ -7960,14 +6962,94 @@
       </p:sp>
       <p:sp>
         <p:nvSpPr>
-          <p:cNvPr id="101" name="Straight Arrow Connector 89"/>
+          <p:cNvPr id="101" name="Rectangle 95"/>
           <p:cNvSpPr/>
           <p:nvPr/>
         </p:nvSpPr>
         <p:spPr>
           <a:xfrm>
-            <a:off x="4673520" y="5379120"/>
-            <a:ext cx="2483280" cy="360"/>
+            <a:off x="5226840" y="5198400"/>
+            <a:ext cx="716040" cy="309600"/>
+          </a:xfrm>
+          <a:prstGeom prst="rect">
+            <a:avLst/>
+          </a:prstGeom>
+          <a:noFill/>
+          <a:ln>
+            <a:noFill/>
+          </a:ln>
+        </p:spPr>
+        <p:style>
+          <a:lnRef idx="2">
+            <a:schemeClr val="accent1">
+              <a:shade val="15000"/>
+            </a:schemeClr>
+          </a:lnRef>
+          <a:fillRef idx="1">
+            <a:schemeClr val="accent1"/>
+          </a:fillRef>
+          <a:effectRef idx="0">
+            <a:schemeClr val="accent1"/>
+          </a:effectRef>
+          <a:fontRef idx="minor"/>
+        </p:style>
+        <p:txBody>
+          <a:bodyPr lIns="90000" rIns="90000" tIns="45000" bIns="45000" anchor="ctr">
+            <a:noAutofit/>
+          </a:bodyPr>
+          <a:p>
+            <a:pPr algn="ctr">
+              <a:lnSpc>
+                <a:spcPct val="100000"/>
+              </a:lnSpc>
+              <a:buNone/>
+            </a:pPr>
+            <a:r>
+              <a:rPr b="0" lang="en-US" sz="1800" spc="-1" strike="noStrike">
+                <a:solidFill>
+                  <a:srgbClr val="ffffff"/>
+                </a:solidFill>
+                <a:latin typeface="Arial"/>
+                <a:ea typeface="DejaVu Sans"/>
+              </a:rPr>
+              <a:t>2</a:t>
+            </a:r>
+            <a:r>
+              <a:rPr b="0" lang="en-US" sz="1800" spc="-1" strike="noStrike">
+                <a:solidFill>
+                  <a:srgbClr val="000000"/>
+                </a:solidFill>
+                <a:latin typeface="Arial"/>
+                <a:ea typeface="DejaVu Sans"/>
+              </a:rPr>
+              <a:t>15’</a:t>
+            </a:r>
+            <a:r>
+              <a:rPr b="0" lang="en-US" sz="1800" spc="-1" strike="noStrike">
+                <a:solidFill>
+                  <a:srgbClr val="ffffff"/>
+                </a:solidFill>
+                <a:latin typeface="Arial"/>
+                <a:ea typeface="DejaVu Sans"/>
+              </a:rPr>
+              <a:t>’</a:t>
+            </a:r>
+            <a:endParaRPr b="0" lang="en-US" sz="1800" spc="-1" strike="noStrike">
+              <a:latin typeface="Arial"/>
+            </a:endParaRPr>
+          </a:p>
+        </p:txBody>
+      </p:sp>
+      <p:sp>
+        <p:nvSpPr>
+          <p:cNvPr id="102" name="Straight Arrow Connector 107"/>
+          <p:cNvSpPr/>
+          <p:nvPr/>
+        </p:nvSpPr>
+        <p:spPr>
+          <a:xfrm flipH="1">
+            <a:off x="8612640" y="3804840"/>
+            <a:ext cx="360" cy="538560"/>
           </a:xfrm>
           <a:custGeom>
             <a:avLst/>
@@ -8009,14 +7091,14 @@
       </p:sp>
       <p:sp>
         <p:nvSpPr>
-          <p:cNvPr id="102" name="Rectangle 95"/>
+          <p:cNvPr id="103" name="Rectangle 108"/>
           <p:cNvSpPr/>
           <p:nvPr/>
         </p:nvSpPr>
         <p:spPr>
           <a:xfrm>
-            <a:off x="5226840" y="5198400"/>
-            <a:ext cx="716400" cy="309960"/>
+            <a:off x="8134200" y="3804840"/>
+            <a:ext cx="716040" cy="309600"/>
           </a:xfrm>
           <a:prstGeom prst="rect">
             <a:avLst/>
@@ -8054,32 +7136,12 @@
             <a:r>
               <a:rPr b="0" lang="en-US" sz="1800" spc="-1" strike="noStrike">
                 <a:solidFill>
-                  <a:srgbClr val="ffffff"/>
-                </a:solidFill>
-                <a:latin typeface="Arial"/>
-                <a:ea typeface="DejaVu Sans"/>
-              </a:rPr>
-              <a:t>2</a:t>
-            </a:r>
-            <a:r>
-              <a:rPr b="0" lang="en-US" sz="1800" spc="-1" strike="noStrike">
-                <a:solidFill>
                   <a:srgbClr val="000000"/>
                 </a:solidFill>
                 <a:latin typeface="Arial"/>
                 <a:ea typeface="DejaVu Sans"/>
               </a:rPr>
-              <a:t>17’</a:t>
-            </a:r>
-            <a:r>
-              <a:rPr b="0" lang="en-US" sz="1800" spc="-1" strike="noStrike">
-                <a:solidFill>
-                  <a:srgbClr val="ffffff"/>
-                </a:solidFill>
-                <a:latin typeface="Arial"/>
-                <a:ea typeface="DejaVu Sans"/>
-              </a:rPr>
-              <a:t>’</a:t>
+              <a:t>6’</a:t>
             </a:r>
             <a:endParaRPr b="0" lang="en-US" sz="1800" spc="-1" strike="noStrike">
               <a:latin typeface="Arial"/>
@@ -8089,14 +7151,14 @@
       </p:sp>
       <p:sp>
         <p:nvSpPr>
-          <p:cNvPr id="103" name="Straight Arrow Connector 107"/>
+          <p:cNvPr id="104" name="Straight Arrow Connector 110"/>
           <p:cNvSpPr/>
           <p:nvPr/>
         </p:nvSpPr>
         <p:spPr>
           <a:xfrm>
-            <a:off x="8636040" y="3838320"/>
-            <a:ext cx="360" cy="304560"/>
+            <a:off x="8619120" y="5012280"/>
+            <a:ext cx="360" cy="518400"/>
           </a:xfrm>
           <a:custGeom>
             <a:avLst/>
@@ -8138,21 +7200,25 @@
       </p:sp>
       <p:sp>
         <p:nvSpPr>
-          <p:cNvPr id="104" name="Rectangle 108"/>
+          <p:cNvPr id="105" name="Rectangle 118"/>
           <p:cNvSpPr/>
           <p:nvPr/>
         </p:nvSpPr>
         <p:spPr>
           <a:xfrm>
-            <a:off x="8062200" y="3804840"/>
-            <a:ext cx="716400" cy="309960"/>
-          </a:xfrm>
-          <a:prstGeom prst="rect">
-            <a:avLst/>
-          </a:prstGeom>
-          <a:noFill/>
+            <a:off x="7086600" y="4343400"/>
+            <a:ext cx="1164960" cy="685440"/>
+          </a:xfrm>
+          <a:prstGeom prst="rect">
+            <a:avLst/>
+          </a:prstGeom>
+          <a:solidFill>
+            <a:srgbClr val="4f81bd"/>
+          </a:solidFill>
           <a:ln>
-            <a:noFill/>
+            <a:solidFill>
+              <a:srgbClr val="223852"/>
+            </a:solidFill>
           </a:ln>
         </p:spPr>
         <p:style>
@@ -8169,53 +7235,53 @@
           </a:effectRef>
           <a:fontRef idx="minor"/>
         </p:style>
-        <p:txBody>
-          <a:bodyPr lIns="90000" rIns="90000" tIns="45000" bIns="45000" anchor="ctr">
-            <a:noAutofit/>
-          </a:bodyPr>
-          <a:p>
-            <a:pPr algn="ctr">
-              <a:lnSpc>
-                <a:spcPct val="100000"/>
-              </a:lnSpc>
-              <a:buNone/>
-            </a:pPr>
-            <a:r>
-              <a:rPr b="0" lang="en-US" sz="1800" spc="-1" strike="noStrike">
-                <a:solidFill>
-                  <a:srgbClr val="ffffff"/>
-                </a:solidFill>
-                <a:latin typeface="Arial"/>
-                <a:ea typeface="DejaVu Sans"/>
-              </a:rPr>
-              <a:t>2</a:t>
-            </a:r>
-            <a:r>
-              <a:rPr b="0" lang="en-US" sz="1800" spc="-1" strike="noStrike">
-                <a:solidFill>
-                  <a:srgbClr val="000000"/>
-                </a:solidFill>
-                <a:latin typeface="Arial"/>
-                <a:ea typeface="DejaVu Sans"/>
-              </a:rPr>
-              <a:t>4’</a:t>
-            </a:r>
-            <a:endParaRPr b="0" lang="en-US" sz="1800" spc="-1" strike="noStrike">
-              <a:latin typeface="Arial"/>
-            </a:endParaRPr>
-          </a:p>
-        </p:txBody>
-      </p:sp>
-      <p:sp>
-        <p:nvSpPr>
-          <p:cNvPr id="105" name="Straight Arrow Connector 110"/>
+      </p:sp>
+      <p:sp>
+        <p:nvSpPr>
+          <p:cNvPr id="106" name="Rectangle 119"/>
           <p:cNvSpPr/>
           <p:nvPr/>
         </p:nvSpPr>
         <p:spPr>
           <a:xfrm>
-            <a:off x="8619120" y="5012280"/>
-            <a:ext cx="360" cy="518760"/>
+            <a:off x="4628520" y="3838320"/>
+            <a:ext cx="4074480" cy="1670040"/>
+          </a:xfrm>
+          <a:prstGeom prst="rect">
+            <a:avLst/>
+          </a:prstGeom>
+          <a:noFill/>
+          <a:ln>
+            <a:solidFill>
+              <a:srgbClr val="223852"/>
+            </a:solidFill>
+          </a:ln>
+        </p:spPr>
+        <p:style>
+          <a:lnRef idx="2">
+            <a:schemeClr val="accent1">
+              <a:shade val="15000"/>
+            </a:schemeClr>
+          </a:lnRef>
+          <a:fillRef idx="1">
+            <a:schemeClr val="accent1"/>
+          </a:fillRef>
+          <a:effectRef idx="0">
+            <a:schemeClr val="accent1"/>
+          </a:effectRef>
+          <a:fontRef idx="minor"/>
+        </p:style>
+      </p:sp>
+      <p:sp>
+        <p:nvSpPr>
+          <p:cNvPr id="107" name="Straight Arrow Connector 124"/>
+          <p:cNvSpPr/>
+          <p:nvPr/>
+        </p:nvSpPr>
+        <p:spPr>
+          <a:xfrm>
+            <a:off x="8613360" y="4343400"/>
+            <a:ext cx="360" cy="724680"/>
           </a:xfrm>
           <a:custGeom>
             <a:avLst/>
@@ -8257,25 +7323,21 @@
       </p:sp>
       <p:sp>
         <p:nvSpPr>
-          <p:cNvPr id="106" name="Rectangle 118"/>
+          <p:cNvPr id="108" name="Rectangle 125"/>
           <p:cNvSpPr/>
           <p:nvPr/>
         </p:nvSpPr>
         <p:spPr>
           <a:xfrm>
-            <a:off x="7270200" y="4114800"/>
-            <a:ext cx="981720" cy="914400"/>
-          </a:xfrm>
-          <a:prstGeom prst="rect">
-            <a:avLst/>
-          </a:prstGeom>
-          <a:solidFill>
-            <a:srgbClr val="4f81bd"/>
-          </a:solidFill>
+            <a:off x="8199000" y="4464360"/>
+            <a:ext cx="716040" cy="309600"/>
+          </a:xfrm>
+          <a:prstGeom prst="rect">
+            <a:avLst/>
+          </a:prstGeom>
+          <a:noFill/>
           <a:ln>
-            <a:solidFill>
-              <a:srgbClr val="223852"/>
-            </a:solidFill>
+            <a:noFill/>
           </a:ln>
         </p:spPr>
         <p:style>
@@ -8292,53 +7354,53 @@
           </a:effectRef>
           <a:fontRef idx="minor"/>
         </p:style>
-      </p:sp>
-      <p:sp>
-        <p:nvSpPr>
-          <p:cNvPr id="107" name="Rectangle 119"/>
+        <p:txBody>
+          <a:bodyPr lIns="90000" rIns="90000" tIns="45000" bIns="45000" anchor="ctr">
+            <a:noAutofit/>
+          </a:bodyPr>
+          <a:p>
+            <a:pPr algn="ctr">
+              <a:lnSpc>
+                <a:spcPct val="100000"/>
+              </a:lnSpc>
+              <a:buNone/>
+            </a:pPr>
+            <a:r>
+              <a:rPr b="0" lang="en-US" sz="1800" spc="-1" strike="noStrike">
+                <a:solidFill>
+                  <a:srgbClr val="000000"/>
+                </a:solidFill>
+                <a:latin typeface="Arial"/>
+                <a:ea typeface="DejaVu Sans"/>
+              </a:rPr>
+              <a:t>6’</a:t>
+            </a:r>
+            <a:r>
+              <a:rPr b="0" lang="en-US" sz="1800" spc="-1" strike="noStrike">
+                <a:solidFill>
+                  <a:srgbClr val="ffffff"/>
+                </a:solidFill>
+                <a:latin typeface="Arial"/>
+                <a:ea typeface="DejaVu Sans"/>
+              </a:rPr>
+              <a:t>’</a:t>
+            </a:r>
+            <a:endParaRPr b="0" lang="en-US" sz="1800" spc="-1" strike="noStrike">
+              <a:latin typeface="Arial"/>
+            </a:endParaRPr>
+          </a:p>
+        </p:txBody>
+      </p:sp>
+      <p:sp>
+        <p:nvSpPr>
+          <p:cNvPr id="109" name="Straight Arrow Connector 130"/>
           <p:cNvSpPr/>
           <p:nvPr/>
         </p:nvSpPr>
         <p:spPr>
-          <a:xfrm>
-            <a:off x="4628520" y="3838320"/>
-            <a:ext cx="4074840" cy="1670400"/>
-          </a:xfrm>
-          <a:prstGeom prst="rect">
-            <a:avLst/>
-          </a:prstGeom>
-          <a:noFill/>
-          <a:ln>
-            <a:solidFill>
-              <a:srgbClr val="223852"/>
-            </a:solidFill>
-          </a:ln>
-        </p:spPr>
-        <p:style>
-          <a:lnRef idx="2">
-            <a:schemeClr val="accent1">
-              <a:shade val="15000"/>
-            </a:schemeClr>
-          </a:lnRef>
-          <a:fillRef idx="1">
-            <a:schemeClr val="accent1"/>
-          </a:fillRef>
-          <a:effectRef idx="0">
-            <a:schemeClr val="accent1"/>
-          </a:effectRef>
-          <a:fontRef idx="minor"/>
-        </p:style>
-      </p:sp>
-      <p:sp>
-        <p:nvSpPr>
-          <p:cNvPr id="108" name="Straight Arrow Connector 124"/>
-          <p:cNvSpPr/>
-          <p:nvPr/>
-        </p:nvSpPr>
-        <p:spPr>
-          <a:xfrm>
-            <a:off x="8613360" y="4142880"/>
-            <a:ext cx="22680" cy="925560"/>
+          <a:xfrm flipV="1">
+            <a:off x="7086600" y="5379120"/>
+            <a:ext cx="1164960" cy="4320"/>
           </a:xfrm>
           <a:custGeom>
             <a:avLst/>
@@ -8380,14 +7442,14 @@
       </p:sp>
       <p:sp>
         <p:nvSpPr>
-          <p:cNvPr id="109" name="Rectangle 125"/>
+          <p:cNvPr id="110" name="Rectangle 131"/>
           <p:cNvSpPr/>
           <p:nvPr/>
         </p:nvSpPr>
         <p:spPr>
           <a:xfrm>
-            <a:off x="8199000" y="4464360"/>
-            <a:ext cx="716400" cy="309960"/>
+            <a:off x="7445160" y="5249160"/>
+            <a:ext cx="716040" cy="309600"/>
           </a:xfrm>
           <a:prstGeom prst="rect">
             <a:avLst/>
@@ -8432,6 +7494,130 @@
               </a:rPr>
               <a:t>8’</a:t>
             </a:r>
+            <a:endParaRPr b="0" lang="en-US" sz="1800" spc="-1" strike="noStrike">
+              <a:latin typeface="Arial"/>
+            </a:endParaRPr>
+          </a:p>
+        </p:txBody>
+      </p:sp>
+      <p:sp>
+        <p:nvSpPr>
+          <p:cNvPr id="111" name="Rectangle 135"/>
+          <p:cNvSpPr/>
+          <p:nvPr/>
+        </p:nvSpPr>
+        <p:spPr>
+          <a:xfrm>
+            <a:off x="4628520" y="5576760"/>
+            <a:ext cx="3600360" cy="366480"/>
+          </a:xfrm>
+          <a:prstGeom prst="rect">
+            <a:avLst/>
+          </a:prstGeom>
+          <a:solidFill>
+            <a:srgbClr val="4f81bd"/>
+          </a:solidFill>
+          <a:ln>
+            <a:solidFill>
+              <a:srgbClr val="223852"/>
+            </a:solidFill>
+          </a:ln>
+        </p:spPr>
+        <p:style>
+          <a:lnRef idx="2">
+            <a:schemeClr val="accent1">
+              <a:shade val="15000"/>
+            </a:schemeClr>
+          </a:lnRef>
+          <a:fillRef idx="1">
+            <a:schemeClr val="accent1"/>
+          </a:fillRef>
+          <a:effectRef idx="0">
+            <a:schemeClr val="accent1"/>
+          </a:effectRef>
+          <a:fontRef idx="minor"/>
+        </p:style>
+        <p:txBody>
+          <a:bodyPr lIns="90000" rIns="90000" tIns="45000" bIns="45000" anchor="ctr">
+            <a:noAutofit/>
+          </a:bodyPr>
+          <a:p>
+            <a:pPr algn="ctr">
+              <a:lnSpc>
+                <a:spcPct val="100000"/>
+              </a:lnSpc>
+              <a:buNone/>
+            </a:pPr>
+            <a:r>
+              <a:rPr b="0" lang="en-US" sz="1800" spc="-1" strike="noStrike">
+                <a:solidFill>
+                  <a:srgbClr val="000000"/>
+                </a:solidFill>
+                <a:latin typeface="Arial"/>
+                <a:ea typeface="DejaVu Sans"/>
+              </a:rPr>
+              <a:t>Main Building (2585)</a:t>
+            </a:r>
+            <a:endParaRPr b="0" lang="en-US" sz="1800" spc="-1" strike="noStrike">
+              <a:latin typeface="Arial"/>
+            </a:endParaRPr>
+          </a:p>
+        </p:txBody>
+      </p:sp>
+      <p:sp>
+        <p:nvSpPr>
+          <p:cNvPr id="112" name="Rectangle 136"/>
+          <p:cNvSpPr/>
+          <p:nvPr/>
+        </p:nvSpPr>
+        <p:spPr>
+          <a:xfrm>
+            <a:off x="6183720" y="5997960"/>
+            <a:ext cx="902520" cy="315360"/>
+          </a:xfrm>
+          <a:prstGeom prst="rect">
+            <a:avLst/>
+          </a:prstGeom>
+          <a:noFill/>
+          <a:ln>
+            <a:noFill/>
+          </a:ln>
+        </p:spPr>
+        <p:style>
+          <a:lnRef idx="2">
+            <a:schemeClr val="accent1">
+              <a:shade val="15000"/>
+            </a:schemeClr>
+          </a:lnRef>
+          <a:fillRef idx="1">
+            <a:schemeClr val="accent1"/>
+          </a:fillRef>
+          <a:effectRef idx="0">
+            <a:schemeClr val="accent1"/>
+          </a:effectRef>
+          <a:fontRef idx="minor"/>
+        </p:style>
+        <p:txBody>
+          <a:bodyPr lIns="90000" rIns="90000" tIns="45000" bIns="45000" anchor="ctr">
+            <a:noAutofit/>
+          </a:bodyPr>
+          <a:p>
+            <a:pPr algn="ctr">
+              <a:lnSpc>
+                <a:spcPct val="100000"/>
+              </a:lnSpc>
+              <a:buNone/>
+            </a:pPr>
+            <a:r>
+              <a:rPr b="0" lang="en-US" sz="1800" spc="-1" strike="noStrike">
+                <a:solidFill>
+                  <a:srgbClr val="000000"/>
+                </a:solidFill>
+                <a:latin typeface="Arial"/>
+                <a:ea typeface="DejaVu Sans"/>
+              </a:rPr>
+              <a:t>26’</a:t>
+            </a:r>
             <a:r>
               <a:rPr b="0" lang="en-US" sz="1800" spc="-1" strike="noStrike">
                 <a:solidFill>
@@ -8450,14 +7636,205 @@
       </p:sp>
       <p:sp>
         <p:nvSpPr>
-          <p:cNvPr id="110" name="Straight Arrow Connector 130"/>
+          <p:cNvPr id="113" name="Rectangle 141"/>
           <p:cNvSpPr/>
           <p:nvPr/>
         </p:nvSpPr>
         <p:spPr>
-          <a:xfrm flipV="1">
-            <a:off x="7224840" y="5381280"/>
-            <a:ext cx="1027080" cy="2520"/>
+          <a:xfrm>
+            <a:off x="7373520" y="4522320"/>
+            <a:ext cx="806040" cy="309600"/>
+          </a:xfrm>
+          <a:prstGeom prst="rect">
+            <a:avLst/>
+          </a:prstGeom>
+          <a:noFill/>
+          <a:ln>
+            <a:noFill/>
+          </a:ln>
+        </p:spPr>
+        <p:style>
+          <a:lnRef idx="2">
+            <a:schemeClr val="accent1">
+              <a:shade val="15000"/>
+            </a:schemeClr>
+          </a:lnRef>
+          <a:fillRef idx="1">
+            <a:schemeClr val="accent1"/>
+          </a:fillRef>
+          <a:effectRef idx="0">
+            <a:schemeClr val="accent1"/>
+          </a:effectRef>
+          <a:fontRef idx="minor"/>
+        </p:style>
+        <p:txBody>
+          <a:bodyPr lIns="90000" rIns="90000" tIns="45000" bIns="45000" anchor="ctr">
+            <a:noAutofit/>
+          </a:bodyPr>
+          <a:p>
+            <a:pPr algn="ctr">
+              <a:lnSpc>
+                <a:spcPct val="100000"/>
+              </a:lnSpc>
+              <a:buNone/>
+            </a:pPr>
+            <a:r>
+              <a:rPr b="0" lang="en-US" sz="1800" spc="-1" strike="noStrike">
+                <a:solidFill>
+                  <a:srgbClr val="000000"/>
+                </a:solidFill>
+                <a:latin typeface="Arial"/>
+                <a:ea typeface="DejaVu Sans"/>
+              </a:rPr>
+              <a:t>2585</a:t>
+            </a:r>
+            <a:endParaRPr b="0" lang="en-US" sz="1800" spc="-1" strike="noStrike">
+              <a:latin typeface="Arial"/>
+            </a:endParaRPr>
+          </a:p>
+        </p:txBody>
+      </p:sp>
+      <p:sp>
+        <p:nvSpPr>
+          <p:cNvPr id="114" name="Rectangle 143"/>
+          <p:cNvSpPr/>
+          <p:nvPr/>
+        </p:nvSpPr>
+        <p:spPr>
+          <a:xfrm>
+            <a:off x="2562840" y="1159560"/>
+            <a:ext cx="590400" cy="695520"/>
+          </a:xfrm>
+          <a:prstGeom prst="rect">
+            <a:avLst/>
+          </a:prstGeom>
+          <a:solidFill>
+            <a:srgbClr val="4f81bd"/>
+          </a:solidFill>
+          <a:ln>
+            <a:solidFill>
+              <a:srgbClr val="223852"/>
+            </a:solidFill>
+          </a:ln>
+        </p:spPr>
+        <p:style>
+          <a:lnRef idx="2">
+            <a:schemeClr val="accent1">
+              <a:shade val="15000"/>
+            </a:schemeClr>
+          </a:lnRef>
+          <a:fillRef idx="1">
+            <a:schemeClr val="accent1"/>
+          </a:fillRef>
+          <a:effectRef idx="0">
+            <a:schemeClr val="accent1"/>
+          </a:effectRef>
+          <a:fontRef idx="minor"/>
+        </p:style>
+      </p:sp>
+      <p:sp>
+        <p:nvSpPr>
+          <p:cNvPr id="115" name="Rectangle 144"/>
+          <p:cNvSpPr/>
+          <p:nvPr/>
+        </p:nvSpPr>
+        <p:spPr>
+          <a:xfrm>
+            <a:off x="2540520" y="1209960"/>
+            <a:ext cx="716040" cy="309600"/>
+          </a:xfrm>
+          <a:prstGeom prst="rect">
+            <a:avLst/>
+          </a:prstGeom>
+          <a:noFill/>
+          <a:ln>
+            <a:noFill/>
+          </a:ln>
+        </p:spPr>
+        <p:style>
+          <a:lnRef idx="2">
+            <a:schemeClr val="accent1">
+              <a:shade val="15000"/>
+            </a:schemeClr>
+          </a:lnRef>
+          <a:fillRef idx="1">
+            <a:schemeClr val="accent1"/>
+          </a:fillRef>
+          <a:effectRef idx="0">
+            <a:schemeClr val="accent1"/>
+          </a:effectRef>
+          <a:fontRef idx="minor"/>
+        </p:style>
+        <p:txBody>
+          <a:bodyPr lIns="90000" rIns="90000" tIns="45000" bIns="45000" anchor="ctr">
+            <a:noAutofit/>
+          </a:bodyPr>
+          <a:p>
+            <a:pPr algn="ctr">
+              <a:lnSpc>
+                <a:spcPct val="100000"/>
+              </a:lnSpc>
+              <a:buNone/>
+            </a:pPr>
+            <a:r>
+              <a:rPr b="0" lang="en-US" sz="1800" spc="-1" strike="noStrike">
+                <a:solidFill>
+                  <a:srgbClr val="000000"/>
+                </a:solidFill>
+                <a:latin typeface="Arial"/>
+                <a:ea typeface="DejaVu Sans"/>
+              </a:rPr>
+              <a:t>2583</a:t>
+            </a:r>
+            <a:endParaRPr b="0" lang="en-US" sz="1800" spc="-1" strike="noStrike">
+              <a:latin typeface="Arial"/>
+            </a:endParaRPr>
+          </a:p>
+        </p:txBody>
+      </p:sp>
+      <p:sp>
+        <p:nvSpPr>
+          <p:cNvPr id="116" name="Straight Connector 148"/>
+          <p:cNvSpPr/>
+          <p:nvPr/>
+        </p:nvSpPr>
+        <p:spPr>
+          <a:xfrm flipH="1" flipV="1">
+            <a:off x="2726640" y="1843560"/>
+            <a:ext cx="394920" cy="180720"/>
+          </a:xfrm>
+          <a:prstGeom prst="line">
+            <a:avLst/>
+          </a:prstGeom>
+          <a:ln>
+            <a:solidFill>
+              <a:srgbClr val="4a7ebb"/>
+            </a:solidFill>
+          </a:ln>
+        </p:spPr>
+        <p:style>
+          <a:lnRef idx="1">
+            <a:schemeClr val="accent1"/>
+          </a:lnRef>
+          <a:fillRef idx="0">
+            <a:schemeClr val="accent1"/>
+          </a:fillRef>
+          <a:effectRef idx="0">
+            <a:schemeClr val="accent1"/>
+          </a:effectRef>
+          <a:fontRef idx="minor"/>
+        </p:style>
+      </p:sp>
+      <p:sp>
+        <p:nvSpPr>
+          <p:cNvPr id="117" name="Straight Arrow Connector 5"/>
+          <p:cNvSpPr/>
+          <p:nvPr/>
+        </p:nvSpPr>
+        <p:spPr>
+          <a:xfrm>
+            <a:off x="3297240" y="1179000"/>
+            <a:ext cx="360" cy="685800"/>
           </a:xfrm>
           <a:custGeom>
             <a:avLst/>
@@ -8499,14 +7876,14 @@
       </p:sp>
       <p:sp>
         <p:nvSpPr>
-          <p:cNvPr id="111" name="Rectangle 131"/>
+          <p:cNvPr id="118" name="Rectangle 6"/>
           <p:cNvSpPr/>
           <p:nvPr/>
         </p:nvSpPr>
         <p:spPr>
           <a:xfrm>
-            <a:off x="7445160" y="5249160"/>
-            <a:ext cx="716400" cy="309960"/>
+            <a:off x="3058200" y="1255320"/>
+            <a:ext cx="716040" cy="309600"/>
           </a:xfrm>
           <a:prstGeom prst="rect">
             <a:avLst/>
@@ -8549,131 +7926,7 @@
                 <a:latin typeface="Arial"/>
                 <a:ea typeface="DejaVu Sans"/>
               </a:rPr>
-              <a:t>6’</a:t>
-            </a:r>
-            <a:endParaRPr b="0" lang="en-US" sz="1800" spc="-1" strike="noStrike">
-              <a:latin typeface="Arial"/>
-            </a:endParaRPr>
-          </a:p>
-        </p:txBody>
-      </p:sp>
-      <p:sp>
-        <p:nvSpPr>
-          <p:cNvPr id="112" name="Rectangle 135"/>
-          <p:cNvSpPr/>
-          <p:nvPr/>
-        </p:nvSpPr>
-        <p:spPr>
-          <a:xfrm>
-            <a:off x="4628520" y="5576760"/>
-            <a:ext cx="3600720" cy="366840"/>
-          </a:xfrm>
-          <a:prstGeom prst="rect">
-            <a:avLst/>
-          </a:prstGeom>
-          <a:solidFill>
-            <a:srgbClr val="4f81bd"/>
-          </a:solidFill>
-          <a:ln>
-            <a:solidFill>
-              <a:srgbClr val="223852"/>
-            </a:solidFill>
-          </a:ln>
-        </p:spPr>
-        <p:style>
-          <a:lnRef idx="2">
-            <a:schemeClr val="accent1">
-              <a:shade val="15000"/>
-            </a:schemeClr>
-          </a:lnRef>
-          <a:fillRef idx="1">
-            <a:schemeClr val="accent1"/>
-          </a:fillRef>
-          <a:effectRef idx="0">
-            <a:schemeClr val="accent1"/>
-          </a:effectRef>
-          <a:fontRef idx="minor"/>
-        </p:style>
-        <p:txBody>
-          <a:bodyPr lIns="90000" rIns="90000" tIns="45000" bIns="45000" anchor="ctr">
-            <a:noAutofit/>
-          </a:bodyPr>
-          <a:p>
-            <a:pPr algn="ctr">
-              <a:lnSpc>
-                <a:spcPct val="100000"/>
-              </a:lnSpc>
-              <a:buNone/>
-            </a:pPr>
-            <a:r>
-              <a:rPr b="0" lang="en-US" sz="1800" spc="-1" strike="noStrike">
-                <a:solidFill>
-                  <a:srgbClr val="000000"/>
-                </a:solidFill>
-                <a:latin typeface="Arial"/>
-                <a:ea typeface="DejaVu Sans"/>
-              </a:rPr>
-              <a:t>Main Building (2585)</a:t>
-            </a:r>
-            <a:endParaRPr b="0" lang="en-US" sz="1800" spc="-1" strike="noStrike">
-              <a:latin typeface="Arial"/>
-            </a:endParaRPr>
-          </a:p>
-        </p:txBody>
-      </p:sp>
-      <p:sp>
-        <p:nvSpPr>
-          <p:cNvPr id="113" name="Rectangle 136"/>
-          <p:cNvSpPr/>
-          <p:nvPr/>
-        </p:nvSpPr>
-        <p:spPr>
-          <a:xfrm>
-            <a:off x="6183720" y="5997960"/>
-            <a:ext cx="902880" cy="315720"/>
-          </a:xfrm>
-          <a:prstGeom prst="rect">
-            <a:avLst/>
-          </a:prstGeom>
-          <a:noFill/>
-          <a:ln>
-            <a:noFill/>
-          </a:ln>
-        </p:spPr>
-        <p:style>
-          <a:lnRef idx="2">
-            <a:schemeClr val="accent1">
-              <a:shade val="15000"/>
-            </a:schemeClr>
-          </a:lnRef>
-          <a:fillRef idx="1">
-            <a:schemeClr val="accent1"/>
-          </a:fillRef>
-          <a:effectRef idx="0">
-            <a:schemeClr val="accent1"/>
-          </a:effectRef>
-          <a:fontRef idx="minor"/>
-        </p:style>
-        <p:txBody>
-          <a:bodyPr lIns="90000" rIns="90000" tIns="45000" bIns="45000" anchor="ctr">
-            <a:noAutofit/>
-          </a:bodyPr>
-          <a:p>
-            <a:pPr algn="ctr">
-              <a:lnSpc>
-                <a:spcPct val="100000"/>
-              </a:lnSpc>
-              <a:buNone/>
-            </a:pPr>
-            <a:r>
-              <a:rPr b="0" lang="en-US" sz="1800" spc="-1" strike="noStrike">
-                <a:solidFill>
-                  <a:srgbClr val="000000"/>
-                </a:solidFill>
-                <a:latin typeface="Arial"/>
-                <a:ea typeface="DejaVu Sans"/>
-              </a:rPr>
-              <a:t>26’</a:t>
+              <a:t>5’</a:t>
             </a:r>
             <a:r>
               <a:rPr b="0" lang="en-US" sz="1800" spc="-1" strike="noStrike">
@@ -8693,205 +7946,14 @@
       </p:sp>
       <p:sp>
         <p:nvSpPr>
-          <p:cNvPr id="114" name="Rectangle 141"/>
+          <p:cNvPr id="119" name="Straight Arrow Connector 8"/>
           <p:cNvSpPr/>
           <p:nvPr/>
         </p:nvSpPr>
         <p:spPr>
           <a:xfrm>
-            <a:off x="7445520" y="4414320"/>
-            <a:ext cx="806400" cy="309960"/>
-          </a:xfrm>
-          <a:prstGeom prst="rect">
-            <a:avLst/>
-          </a:prstGeom>
-          <a:noFill/>
-          <a:ln>
-            <a:noFill/>
-          </a:ln>
-        </p:spPr>
-        <p:style>
-          <a:lnRef idx="2">
-            <a:schemeClr val="accent1">
-              <a:shade val="15000"/>
-            </a:schemeClr>
-          </a:lnRef>
-          <a:fillRef idx="1">
-            <a:schemeClr val="accent1"/>
-          </a:fillRef>
-          <a:effectRef idx="0">
-            <a:schemeClr val="accent1"/>
-          </a:effectRef>
-          <a:fontRef idx="minor"/>
-        </p:style>
-        <p:txBody>
-          <a:bodyPr lIns="90000" rIns="90000" tIns="45000" bIns="45000" anchor="ctr">
-            <a:noAutofit/>
-          </a:bodyPr>
-          <a:p>
-            <a:pPr algn="ctr">
-              <a:lnSpc>
-                <a:spcPct val="100000"/>
-              </a:lnSpc>
-              <a:buNone/>
-            </a:pPr>
-            <a:r>
-              <a:rPr b="0" lang="en-US" sz="1800" spc="-1" strike="noStrike">
-                <a:solidFill>
-                  <a:srgbClr val="000000"/>
-                </a:solidFill>
-                <a:latin typeface="Arial"/>
-                <a:ea typeface="DejaVu Sans"/>
-              </a:rPr>
-              <a:t>2585</a:t>
-            </a:r>
-            <a:endParaRPr b="0" lang="en-US" sz="1800" spc="-1" strike="noStrike">
-              <a:latin typeface="Arial"/>
-            </a:endParaRPr>
-          </a:p>
-        </p:txBody>
-      </p:sp>
-      <p:sp>
-        <p:nvSpPr>
-          <p:cNvPr id="115" name="Rectangle 143"/>
-          <p:cNvSpPr/>
-          <p:nvPr/>
-        </p:nvSpPr>
-        <p:spPr>
-          <a:xfrm>
-            <a:off x="2709360" y="1112040"/>
-            <a:ext cx="1176840" cy="468000"/>
-          </a:xfrm>
-          <a:prstGeom prst="rect">
-            <a:avLst/>
-          </a:prstGeom>
-          <a:solidFill>
-            <a:srgbClr val="4f81bd"/>
-          </a:solidFill>
-          <a:ln>
-            <a:solidFill>
-              <a:srgbClr val="223852"/>
-            </a:solidFill>
-          </a:ln>
-        </p:spPr>
-        <p:style>
-          <a:lnRef idx="2">
-            <a:schemeClr val="accent1">
-              <a:shade val="15000"/>
-            </a:schemeClr>
-          </a:lnRef>
-          <a:fillRef idx="1">
-            <a:schemeClr val="accent1"/>
-          </a:fillRef>
-          <a:effectRef idx="0">
-            <a:schemeClr val="accent1"/>
-          </a:effectRef>
-          <a:fontRef idx="minor"/>
-        </p:style>
-      </p:sp>
-      <p:sp>
-        <p:nvSpPr>
-          <p:cNvPr id="116" name="Rectangle 144"/>
-          <p:cNvSpPr/>
-          <p:nvPr/>
-        </p:nvSpPr>
-        <p:spPr>
-          <a:xfrm>
-            <a:off x="3008520" y="1173960"/>
-            <a:ext cx="716400" cy="309960"/>
-          </a:xfrm>
-          <a:prstGeom prst="rect">
-            <a:avLst/>
-          </a:prstGeom>
-          <a:noFill/>
-          <a:ln>
-            <a:noFill/>
-          </a:ln>
-        </p:spPr>
-        <p:style>
-          <a:lnRef idx="2">
-            <a:schemeClr val="accent1">
-              <a:shade val="15000"/>
-            </a:schemeClr>
-          </a:lnRef>
-          <a:fillRef idx="1">
-            <a:schemeClr val="accent1"/>
-          </a:fillRef>
-          <a:effectRef idx="0">
-            <a:schemeClr val="accent1"/>
-          </a:effectRef>
-          <a:fontRef idx="minor"/>
-        </p:style>
-        <p:txBody>
-          <a:bodyPr lIns="90000" rIns="90000" tIns="45000" bIns="45000" anchor="ctr">
-            <a:noAutofit/>
-          </a:bodyPr>
-          <a:p>
-            <a:pPr algn="ctr">
-              <a:lnSpc>
-                <a:spcPct val="100000"/>
-              </a:lnSpc>
-              <a:buNone/>
-            </a:pPr>
-            <a:r>
-              <a:rPr b="0" lang="en-US" sz="1800" spc="-1" strike="noStrike">
-                <a:solidFill>
-                  <a:srgbClr val="000000"/>
-                </a:solidFill>
-                <a:latin typeface="Arial"/>
-                <a:ea typeface="DejaVu Sans"/>
-              </a:rPr>
-              <a:t>2583</a:t>
-            </a:r>
-            <a:endParaRPr b="0" lang="en-US" sz="1800" spc="-1" strike="noStrike">
-              <a:latin typeface="Arial"/>
-            </a:endParaRPr>
-          </a:p>
-        </p:txBody>
-      </p:sp>
-      <p:sp>
-        <p:nvSpPr>
-          <p:cNvPr id="117" name="Straight Connector 148"/>
-          <p:cNvSpPr/>
-          <p:nvPr/>
-        </p:nvSpPr>
-        <p:spPr>
-          <a:xfrm flipH="1" flipV="1">
-            <a:off x="3194640" y="1591560"/>
-            <a:ext cx="394920" cy="180720"/>
-          </a:xfrm>
-          <a:prstGeom prst="line">
-            <a:avLst/>
-          </a:prstGeom>
-          <a:ln>
-            <a:solidFill>
-              <a:srgbClr val="4a7ebb"/>
-            </a:solidFill>
-          </a:ln>
-        </p:spPr>
-        <p:style>
-          <a:lnRef idx="1">
-            <a:schemeClr val="accent1"/>
-          </a:lnRef>
-          <a:fillRef idx="0">
-            <a:schemeClr val="accent1"/>
-          </a:fillRef>
-          <a:effectRef idx="0">
-            <a:schemeClr val="accent1"/>
-          </a:effectRef>
-          <a:fontRef idx="minor"/>
-        </p:style>
-      </p:sp>
-      <p:sp>
-        <p:nvSpPr>
-          <p:cNvPr id="118" name="Straight Arrow Connector 5"/>
-          <p:cNvSpPr/>
-          <p:nvPr/>
-        </p:nvSpPr>
-        <p:spPr>
-          <a:xfrm>
-            <a:off x="4010400" y="1112040"/>
-            <a:ext cx="360" cy="558360"/>
+            <a:off x="2575800" y="1962360"/>
+            <a:ext cx="601200" cy="360"/>
           </a:xfrm>
           <a:custGeom>
             <a:avLst/>
@@ -8933,14 +7995,14 @@
       </p:sp>
       <p:sp>
         <p:nvSpPr>
-          <p:cNvPr id="119" name="Rectangle 6"/>
+          <p:cNvPr id="120" name="Rectangle 9"/>
           <p:cNvSpPr/>
           <p:nvPr/>
         </p:nvSpPr>
         <p:spPr>
           <a:xfrm>
-            <a:off x="3886200" y="1219320"/>
-            <a:ext cx="716400" cy="309960"/>
+            <a:off x="2568600" y="1917000"/>
+            <a:ext cx="716040" cy="309600"/>
           </a:xfrm>
           <a:prstGeom prst="rect">
             <a:avLst/>
@@ -8985,15 +8047,71 @@
               </a:rPr>
               <a:t>4’</a:t>
             </a:r>
+            <a:endParaRPr b="0" lang="en-US" sz="1800" spc="-1" strike="noStrike">
+              <a:latin typeface="Arial"/>
+            </a:endParaRPr>
+          </a:p>
+        </p:txBody>
+      </p:sp>
+      <p:sp>
+        <p:nvSpPr>
+          <p:cNvPr id="121" name="Rectangle: Rounded Corners 28"/>
+          <p:cNvSpPr/>
+          <p:nvPr/>
+        </p:nvSpPr>
+        <p:spPr>
+          <a:xfrm>
+            <a:off x="4114800" y="2624760"/>
+            <a:ext cx="2285280" cy="535680"/>
+          </a:xfrm>
+          <a:prstGeom prst="roundRect">
+            <a:avLst>
+              <a:gd name="adj" fmla="val 16667"/>
+            </a:avLst>
+          </a:prstGeom>
+          <a:solidFill>
+            <a:srgbClr val="4f81bd"/>
+          </a:solidFill>
+          <a:ln>
+            <a:solidFill>
+              <a:srgbClr val="223852"/>
+            </a:solidFill>
+          </a:ln>
+        </p:spPr>
+        <p:style>
+          <a:lnRef idx="2">
+            <a:schemeClr val="accent1">
+              <a:shade val="15000"/>
+            </a:schemeClr>
+          </a:lnRef>
+          <a:fillRef idx="1">
+            <a:schemeClr val="accent1"/>
+          </a:fillRef>
+          <a:effectRef idx="0">
+            <a:schemeClr val="accent1"/>
+          </a:effectRef>
+          <a:fontRef idx="minor"/>
+        </p:style>
+        <p:txBody>
+          <a:bodyPr lIns="90000" rIns="90000" tIns="45000" bIns="45000" anchor="ctr">
+            <a:noAutofit/>
+          </a:bodyPr>
+          <a:p>
+            <a:pPr algn="ctr">
+              <a:lnSpc>
+                <a:spcPct val="100000"/>
+              </a:lnSpc>
+              <a:buNone/>
+            </a:pPr>
             <a:r>
               <a:rPr b="0" lang="en-US" sz="1800" spc="-1" strike="noStrike">
                 <a:solidFill>
-                  <a:srgbClr val="ffffff"/>
+                  <a:srgbClr val="000000"/>
                 </a:solidFill>
                 <a:latin typeface="Arial"/>
                 <a:ea typeface="DejaVu Sans"/>
               </a:rPr>
-              <a:t>’</a:t>
+              <a:t>2583 Car</a:t>
             </a:r>
             <a:endParaRPr b="0" lang="en-US" sz="1800" spc="-1" strike="noStrike">
               <a:latin typeface="Arial"/>
@@ -9003,14 +8121,116 @@
       </p:sp>
       <p:sp>
         <p:nvSpPr>
-          <p:cNvPr id="120" name="Straight Arrow Connector 8"/>
+          <p:cNvPr id="122" name="Rectangle: Rounded Corners 29"/>
           <p:cNvSpPr/>
           <p:nvPr/>
         </p:nvSpPr>
         <p:spPr>
           <a:xfrm>
-            <a:off x="2827800" y="1710360"/>
-            <a:ext cx="1241280" cy="360"/>
+            <a:off x="4114800" y="2031840"/>
+            <a:ext cx="2262960" cy="535680"/>
+          </a:xfrm>
+          <a:prstGeom prst="roundRect">
+            <a:avLst>
+              <a:gd name="adj" fmla="val 16667"/>
+            </a:avLst>
+          </a:prstGeom>
+          <a:solidFill>
+            <a:srgbClr val="4f81bd"/>
+          </a:solidFill>
+          <a:ln>
+            <a:solidFill>
+              <a:srgbClr val="223852"/>
+            </a:solidFill>
+          </a:ln>
+        </p:spPr>
+        <p:style>
+          <a:lnRef idx="2">
+            <a:schemeClr val="accent1">
+              <a:shade val="15000"/>
+            </a:schemeClr>
+          </a:lnRef>
+          <a:fillRef idx="1">
+            <a:schemeClr val="accent1"/>
+          </a:fillRef>
+          <a:effectRef idx="0">
+            <a:schemeClr val="accent1"/>
+          </a:effectRef>
+          <a:fontRef idx="minor"/>
+        </p:style>
+        <p:txBody>
+          <a:bodyPr lIns="90000" rIns="90000" tIns="45000" bIns="45000" anchor="ctr">
+            <a:noAutofit/>
+          </a:bodyPr>
+          <a:p>
+            <a:pPr algn="ctr">
+              <a:lnSpc>
+                <a:spcPct val="100000"/>
+              </a:lnSpc>
+              <a:buNone/>
+            </a:pPr>
+            <a:r>
+              <a:rPr b="0" lang="en-US" sz="1800" spc="-1" strike="noStrike">
+                <a:solidFill>
+                  <a:srgbClr val="000000"/>
+                </a:solidFill>
+                <a:latin typeface="Arial"/>
+                <a:ea typeface="DejaVu Sans"/>
+              </a:rPr>
+              <a:t>2585 Car</a:t>
+            </a:r>
+            <a:endParaRPr b="0" lang="en-US" sz="1800" spc="-1" strike="noStrike">
+              <a:latin typeface="Arial"/>
+            </a:endParaRPr>
+          </a:p>
+        </p:txBody>
+      </p:sp>
+      <p:sp>
+        <p:nvSpPr>
+          <p:cNvPr id="123" name="Rectangle 30"/>
+          <p:cNvSpPr/>
+          <p:nvPr/>
+        </p:nvSpPr>
+        <p:spPr>
+          <a:xfrm>
+            <a:off x="2562840" y="1143000"/>
+            <a:ext cx="6580800" cy="5714280"/>
+          </a:xfrm>
+          <a:prstGeom prst="rect">
+            <a:avLst/>
+          </a:prstGeom>
+          <a:noFill/>
+          <a:ln>
+            <a:solidFill>
+              <a:srgbClr val="223852"/>
+            </a:solidFill>
+          </a:ln>
+        </p:spPr>
+        <p:style>
+          <a:lnRef idx="2">
+            <a:schemeClr val="accent1">
+              <a:shade val="15000"/>
+            </a:schemeClr>
+          </a:lnRef>
+          <a:fillRef idx="1">
+            <a:schemeClr val="accent1"/>
+          </a:fillRef>
+          <a:effectRef idx="0">
+            <a:schemeClr val="accent1"/>
+          </a:effectRef>
+          <a:fontRef idx="minor"/>
+        </p:style>
+      </p:sp>
+      <p:sp>
+        <p:nvSpPr>
+          <p:cNvPr id="124" name="Straight Arrow Connector 64"/>
+          <p:cNvSpPr/>
+          <p:nvPr/>
+        </p:nvSpPr>
+        <p:spPr>
+          <a:xfrm>
+            <a:off x="4572000" y="6171840"/>
+            <a:ext cx="4255200" cy="360"/>
           </a:xfrm>
           <a:custGeom>
             <a:avLst/>
@@ -9031,7 +8251,7 @@
           <a:noFill/>
           <a:ln>
             <a:solidFill>
-              <a:srgbClr val="4a7ebb"/>
+              <a:srgbClr val="000000"/>
             </a:solidFill>
             <a:headEnd len="med" type="triangle" w="med"/>
             <a:tailEnd len="med" type="triangle" w="med"/>
@@ -9052,14 +8272,14 @@
       </p:sp>
       <p:sp>
         <p:nvSpPr>
-          <p:cNvPr id="121" name="Rectangle 9"/>
+          <p:cNvPr id="125" name="Rectangle 1"/>
           <p:cNvSpPr/>
           <p:nvPr/>
         </p:nvSpPr>
         <p:spPr>
           <a:xfrm>
-            <a:off x="3036600" y="1665000"/>
-            <a:ext cx="716400" cy="309960"/>
+            <a:off x="8703360" y="4464360"/>
+            <a:ext cx="716040" cy="309600"/>
           </a:xfrm>
           <a:prstGeom prst="rect">
             <a:avLst/>
@@ -9097,69 +8317,13 @@
             <a:r>
               <a:rPr b="0" lang="en-US" sz="1800" spc="-1" strike="noStrike">
                 <a:solidFill>
-                  <a:srgbClr val="000000"/>
+                  <a:srgbClr val="ffffff"/>
                 </a:solidFill>
                 <a:latin typeface="Arial"/>
                 <a:ea typeface="DejaVu Sans"/>
               </a:rPr>
-              <a:t>6’</a:t>
-            </a:r>
-            <a:endParaRPr b="0" lang="en-US" sz="1800" spc="-1" strike="noStrike">
-              <a:latin typeface="Arial"/>
-            </a:endParaRPr>
-          </a:p>
-        </p:txBody>
-      </p:sp>
-      <p:sp>
-        <p:nvSpPr>
-          <p:cNvPr id="122" name="Rectangle: Rounded Corners 28"/>
-          <p:cNvSpPr/>
-          <p:nvPr/>
-        </p:nvSpPr>
-        <p:spPr>
-          <a:xfrm>
-            <a:off x="3990600" y="2624760"/>
-            <a:ext cx="2409840" cy="536040"/>
-          </a:xfrm>
-          <a:prstGeom prst="roundRect">
-            <a:avLst>
-              <a:gd name="adj" fmla="val 16667"/>
-            </a:avLst>
-          </a:prstGeom>
-          <a:solidFill>
-            <a:srgbClr val="4f81bd"/>
-          </a:solidFill>
-          <a:ln>
-            <a:solidFill>
-              <a:srgbClr val="223852"/>
-            </a:solidFill>
-          </a:ln>
-        </p:spPr>
-        <p:style>
-          <a:lnRef idx="2">
-            <a:schemeClr val="accent1">
-              <a:shade val="15000"/>
-            </a:schemeClr>
-          </a:lnRef>
-          <a:fillRef idx="1">
-            <a:schemeClr val="accent1"/>
-          </a:fillRef>
-          <a:effectRef idx="0">
-            <a:schemeClr val="accent1"/>
-          </a:effectRef>
-          <a:fontRef idx="minor"/>
-        </p:style>
-        <p:txBody>
-          <a:bodyPr lIns="90000" rIns="90000" tIns="45000" bIns="45000" anchor="ctr">
-            <a:noAutofit/>
-          </a:bodyPr>
-          <a:p>
-            <a:pPr algn="ctr">
-              <a:lnSpc>
-                <a:spcPct val="100000"/>
-              </a:lnSpc>
-              <a:buNone/>
-            </a:pPr>
+              <a:t>2</a:t>
+            </a:r>
             <a:r>
               <a:rPr b="0" lang="en-US" sz="1800" spc="-1" strike="noStrike">
                 <a:solidFill>
@@ -9168,73 +8332,17 @@
                 <a:latin typeface="Arial"/>
                 <a:ea typeface="DejaVu Sans"/>
               </a:rPr>
-              <a:t>2583 Car</a:t>
-            </a:r>
-            <a:endParaRPr b="0" lang="en-US" sz="1800" spc="-1" strike="noStrike">
-              <a:latin typeface="Arial"/>
-            </a:endParaRPr>
-          </a:p>
-        </p:txBody>
-      </p:sp>
-      <p:sp>
-        <p:nvSpPr>
-          <p:cNvPr id="123" name="Rectangle: Rounded Corners 29"/>
-          <p:cNvSpPr/>
-          <p:nvPr/>
-        </p:nvSpPr>
-        <p:spPr>
-          <a:xfrm>
-            <a:off x="3962520" y="2031840"/>
-            <a:ext cx="2415600" cy="536040"/>
-          </a:xfrm>
-          <a:prstGeom prst="roundRect">
-            <a:avLst>
-              <a:gd name="adj" fmla="val 16667"/>
-            </a:avLst>
-          </a:prstGeom>
-          <a:solidFill>
-            <a:srgbClr val="4f81bd"/>
-          </a:solidFill>
-          <a:ln>
-            <a:solidFill>
-              <a:srgbClr val="223852"/>
-            </a:solidFill>
-          </a:ln>
-        </p:spPr>
-        <p:style>
-          <a:lnRef idx="2">
-            <a:schemeClr val="accent1">
-              <a:shade val="15000"/>
-            </a:schemeClr>
-          </a:lnRef>
-          <a:fillRef idx="1">
-            <a:schemeClr val="accent1"/>
-          </a:fillRef>
-          <a:effectRef idx="0">
-            <a:schemeClr val="accent1"/>
-          </a:effectRef>
-          <a:fontRef idx="minor"/>
-        </p:style>
-        <p:txBody>
-          <a:bodyPr lIns="90000" rIns="90000" tIns="45000" bIns="45000" anchor="ctr">
-            <a:noAutofit/>
-          </a:bodyPr>
-          <a:p>
-            <a:pPr algn="ctr">
-              <a:lnSpc>
-                <a:spcPct val="100000"/>
-              </a:lnSpc>
-              <a:buNone/>
-            </a:pPr>
+              <a:t>16’</a:t>
+            </a:r>
             <a:r>
               <a:rPr b="0" lang="en-US" sz="1800" spc="-1" strike="noStrike">
                 <a:solidFill>
-                  <a:srgbClr val="000000"/>
+                  <a:srgbClr val="ffffff"/>
                 </a:solidFill>
                 <a:latin typeface="Arial"/>
                 <a:ea typeface="DejaVu Sans"/>
               </a:rPr>
-              <a:t>2585 Car</a:t>
+              <a:t>’</a:t>
             </a:r>
             <a:endParaRPr b="0" lang="en-US" sz="1800" spc="-1" strike="noStrike">
               <a:latin typeface="Arial"/>
@@ -9244,50 +8352,14 @@
       </p:sp>
       <p:sp>
         <p:nvSpPr>
-          <p:cNvPr id="124" name="Rectangle 30"/>
+          <p:cNvPr id="126" name="Straight Arrow Connector 1"/>
           <p:cNvSpPr/>
           <p:nvPr/>
         </p:nvSpPr>
         <p:spPr>
           <a:xfrm>
-            <a:off x="2562840" y="1027440"/>
-            <a:ext cx="6581160" cy="5830200"/>
-          </a:xfrm>
-          <a:prstGeom prst="rect">
-            <a:avLst/>
-          </a:prstGeom>
-          <a:noFill/>
-          <a:ln>
-            <a:solidFill>
-              <a:srgbClr val="223852"/>
-            </a:solidFill>
-          </a:ln>
-        </p:spPr>
-        <p:style>
-          <a:lnRef idx="2">
-            <a:schemeClr val="accent1">
-              <a:shade val="15000"/>
-            </a:schemeClr>
-          </a:lnRef>
-          <a:fillRef idx="1">
-            <a:schemeClr val="accent1"/>
-          </a:fillRef>
-          <a:effectRef idx="0">
-            <a:schemeClr val="accent1"/>
-          </a:effectRef>
-          <a:fontRef idx="minor"/>
-        </p:style>
-      </p:sp>
-      <p:sp>
-        <p:nvSpPr>
-          <p:cNvPr id="125" name="Straight Arrow Connector 64"/>
-          <p:cNvSpPr/>
-          <p:nvPr/>
-        </p:nvSpPr>
-        <p:spPr>
-          <a:xfrm>
-            <a:off x="4572000" y="6171840"/>
-            <a:ext cx="4255560" cy="360"/>
+            <a:off x="8804880" y="3886200"/>
+            <a:ext cx="360" cy="1503360"/>
           </a:xfrm>
           <a:custGeom>
             <a:avLst/>
@@ -9308,7 +8380,7 @@
           <a:noFill/>
           <a:ln>
             <a:solidFill>
-              <a:srgbClr val="000000"/>
+              <a:srgbClr val="4a7ebb"/>
             </a:solidFill>
             <a:headEnd len="med" type="triangle" w="med"/>
             <a:tailEnd len="med" type="triangle" w="med"/>
@@ -9329,14 +8401,14 @@
       </p:sp>
       <p:sp>
         <p:nvSpPr>
-          <p:cNvPr id="126" name="Rectangle 1"/>
+          <p:cNvPr id="127" name="Rectangle 2"/>
           <p:cNvSpPr/>
           <p:nvPr/>
         </p:nvSpPr>
         <p:spPr>
           <a:xfrm>
-            <a:off x="8703360" y="4464360"/>
-            <a:ext cx="716400" cy="309960"/>
+            <a:off x="8134200" y="5029200"/>
+            <a:ext cx="716040" cy="309600"/>
           </a:xfrm>
           <a:prstGeom prst="rect">
             <a:avLst/>
@@ -9374,13 +8446,97 @@
             <a:r>
               <a:rPr b="0" lang="en-US" sz="1800" spc="-1" strike="noStrike">
                 <a:solidFill>
-                  <a:srgbClr val="ffffff"/>
+                  <a:srgbClr val="000000"/>
                 </a:solidFill>
                 <a:latin typeface="Arial"/>
                 <a:ea typeface="DejaVu Sans"/>
               </a:rPr>
-              <a:t>2</a:t>
-            </a:r>
+              <a:t>4’</a:t>
+            </a:r>
+            <a:endParaRPr b="0" lang="en-US" sz="1800" spc="-1" strike="noStrike">
+              <a:latin typeface="Arial"/>
+            </a:endParaRPr>
+          </a:p>
+        </p:txBody>
+      </p:sp>
+      <p:sp>
+        <p:nvSpPr>
+          <p:cNvPr id="128" name=""/>
+          <p:cNvSpPr/>
+          <p:nvPr/>
+        </p:nvSpPr>
+        <p:spPr>
+          <a:xfrm>
+            <a:off x="-1143000" y="3299760"/>
+            <a:ext cx="4571640" cy="2872080"/>
+          </a:xfrm>
+          <a:prstGeom prst="rect">
+            <a:avLst/>
+          </a:prstGeom>
+          <a:solidFill>
+            <a:srgbClr val="ffffff"/>
+          </a:solidFill>
+          <a:ln w="0">
+            <a:solidFill>
+              <a:srgbClr val="3465a4"/>
+            </a:solidFill>
+          </a:ln>
+        </p:spPr>
+        <p:style>
+          <a:lnRef idx="0"/>
+          <a:fillRef idx="0"/>
+          <a:effectRef idx="0"/>
+          <a:fontRef idx="minor"/>
+        </p:style>
+      </p:sp>
+      <p:sp>
+        <p:nvSpPr>
+          <p:cNvPr id="129" name="Rectangle 10"/>
+          <p:cNvSpPr/>
+          <p:nvPr/>
+        </p:nvSpPr>
+        <p:spPr>
+          <a:xfrm>
+            <a:off x="-1086120" y="3528360"/>
+            <a:ext cx="3600360" cy="510120"/>
+          </a:xfrm>
+          <a:prstGeom prst="rect">
+            <a:avLst/>
+          </a:prstGeom>
+          <a:solidFill>
+            <a:srgbClr val="4f81bd"/>
+          </a:solidFill>
+          <a:ln>
+            <a:solidFill>
+              <a:srgbClr val="223852"/>
+            </a:solidFill>
+          </a:ln>
+        </p:spPr>
+        <p:style>
+          <a:lnRef idx="2">
+            <a:schemeClr val="accent1">
+              <a:shade val="15000"/>
+            </a:schemeClr>
+          </a:lnRef>
+          <a:fillRef idx="1">
+            <a:schemeClr val="accent1"/>
+          </a:fillRef>
+          <a:effectRef idx="0">
+            <a:schemeClr val="accent1"/>
+          </a:effectRef>
+          <a:fontRef idx="minor"/>
+        </p:style>
+        <p:txBody>
+          <a:bodyPr lIns="90000" rIns="90000" tIns="45000" bIns="45000" anchor="ctr">
+            <a:noAutofit/>
+          </a:bodyPr>
+          <a:p>
+            <a:pPr algn="ctr">
+              <a:lnSpc>
+                <a:spcPct val="100000"/>
+              </a:lnSpc>
+              <a:buNone/>
+            </a:pPr>
             <a:r>
               <a:rPr b="0" lang="en-US" sz="1800" spc="-1" strike="noStrike">
                 <a:solidFill>
@@ -9389,7 +8545,105 @@
                 <a:latin typeface="Arial"/>
                 <a:ea typeface="DejaVu Sans"/>
               </a:rPr>
-              <a:t>16’</a:t>
+              <a:t>Main Building (2581 Alma)</a:t>
+            </a:r>
+            <a:endParaRPr b="0" lang="en-US" sz="1800" spc="-1" strike="noStrike">
+              <a:latin typeface="Arial"/>
+            </a:endParaRPr>
+          </a:p>
+        </p:txBody>
+      </p:sp>
+      <p:sp>
+        <p:nvSpPr>
+          <p:cNvPr id="130" name="Rectangle 7"/>
+          <p:cNvSpPr/>
+          <p:nvPr/>
+        </p:nvSpPr>
+        <p:spPr>
+          <a:xfrm>
+            <a:off x="2971800" y="4220640"/>
+            <a:ext cx="463320" cy="924840"/>
+          </a:xfrm>
+          <a:prstGeom prst="rect">
+            <a:avLst/>
+          </a:prstGeom>
+          <a:solidFill>
+            <a:srgbClr val="4f81bd"/>
+          </a:solidFill>
+          <a:ln>
+            <a:solidFill>
+              <a:srgbClr val="223852"/>
+            </a:solidFill>
+          </a:ln>
+        </p:spPr>
+        <p:style>
+          <a:lnRef idx="2">
+            <a:schemeClr val="accent1">
+              <a:shade val="15000"/>
+            </a:schemeClr>
+          </a:lnRef>
+          <a:fillRef idx="1">
+            <a:schemeClr val="accent1"/>
+          </a:fillRef>
+          <a:effectRef idx="0">
+            <a:schemeClr val="accent1"/>
+          </a:effectRef>
+          <a:fontRef idx="minor"/>
+        </p:style>
+      </p:sp>
+      <p:sp>
+        <p:nvSpPr>
+          <p:cNvPr id="131" name="Rectangle 8"/>
+          <p:cNvSpPr/>
+          <p:nvPr/>
+        </p:nvSpPr>
+        <p:spPr>
+          <a:xfrm>
+            <a:off x="2063880" y="4825080"/>
+            <a:ext cx="1173240" cy="309600"/>
+          </a:xfrm>
+          <a:prstGeom prst="rect">
+            <a:avLst/>
+          </a:prstGeom>
+          <a:noFill/>
+          <a:ln>
+            <a:noFill/>
+          </a:ln>
+        </p:spPr>
+        <p:style>
+          <a:lnRef idx="2">
+            <a:schemeClr val="accent1">
+              <a:shade val="15000"/>
+            </a:schemeClr>
+          </a:lnRef>
+          <a:fillRef idx="1">
+            <a:schemeClr val="accent1"/>
+          </a:fillRef>
+          <a:effectRef idx="0">
+            <a:schemeClr val="accent1"/>
+          </a:effectRef>
+          <a:fontRef idx="minor"/>
+        </p:style>
+        <p:txBody>
+          <a:bodyPr lIns="90000" rIns="90000" tIns="45000" bIns="45000" anchor="ctr">
+            <a:noAutofit/>
+          </a:bodyPr>
+          <a:p>
+            <a:pPr algn="ctr">
+              <a:lnSpc>
+                <a:spcPct val="100000"/>
+              </a:lnSpc>
+              <a:buNone/>
+            </a:pPr>
+            <a:r>
+              <a:rPr b="0" lang="en-US" sz="1800" spc="-1" strike="noStrike">
+                <a:solidFill>
+                  <a:srgbClr val="000000"/>
+                </a:solidFill>
+                <a:latin typeface="Arial"/>
+                <a:ea typeface="DejaVu Sans"/>
+              </a:rPr>
+              <a:t>2581</a:t>
             </a:r>
             <a:r>
               <a:rPr b="0" lang="en-US" sz="1800" spc="-1" strike="noStrike">
@@ -9409,14 +8663,128 @@
       </p:sp>
       <p:sp>
         <p:nvSpPr>
-          <p:cNvPr id="127" name="Straight Arrow Connector 1"/>
+          <p:cNvPr id="132" name=""/>
           <p:cNvSpPr/>
           <p:nvPr/>
         </p:nvSpPr>
         <p:spPr>
-          <a:xfrm>
-            <a:off x="8804880" y="3886200"/>
-            <a:ext cx="360" cy="1503720"/>
+          <a:xfrm flipH="1">
+            <a:off x="2521080" y="3992040"/>
+            <a:ext cx="457200" cy="228600"/>
+          </a:xfrm>
+          <a:prstGeom prst="line">
+            <a:avLst/>
+          </a:prstGeom>
+          <a:ln w="0">
+            <a:solidFill>
+              <a:srgbClr val="3465a4"/>
+            </a:solidFill>
+          </a:ln>
+        </p:spPr>
+        <p:style>
+          <a:lnRef idx="0"/>
+          <a:fillRef idx="0"/>
+          <a:effectRef idx="0"/>
+          <a:fontRef idx="minor"/>
+        </p:style>
+      </p:sp>
+      <p:sp>
+        <p:nvSpPr>
+          <p:cNvPr id="133" name=""/>
+          <p:cNvSpPr/>
+          <p:nvPr/>
+        </p:nvSpPr>
+        <p:spPr>
+          <a:xfrm flipH="1">
+            <a:off x="2929680" y="3992040"/>
+            <a:ext cx="457200" cy="360"/>
+          </a:xfrm>
+          <a:prstGeom prst="line">
+            <a:avLst/>
+          </a:prstGeom>
+          <a:ln w="0">
+            <a:solidFill>
+              <a:srgbClr val="3465a4"/>
+            </a:solidFill>
+          </a:ln>
+        </p:spPr>
+        <p:style>
+          <a:lnRef idx="0"/>
+          <a:fillRef idx="0"/>
+          <a:effectRef idx="0"/>
+          <a:fontRef idx="minor"/>
+        </p:style>
+      </p:sp>
+      <p:sp>
+        <p:nvSpPr>
+          <p:cNvPr id="134" name="Rectangle 11"/>
+          <p:cNvSpPr/>
+          <p:nvPr/>
+        </p:nvSpPr>
+        <p:spPr>
+          <a:xfrm>
+            <a:off x="3547440" y="4343400"/>
+            <a:ext cx="716040" cy="309600"/>
+          </a:xfrm>
+          <a:prstGeom prst="rect">
+            <a:avLst/>
+          </a:prstGeom>
+          <a:noFill/>
+          <a:ln>
+            <a:noFill/>
+          </a:ln>
+        </p:spPr>
+        <p:style>
+          <a:lnRef idx="2">
+            <a:schemeClr val="accent1">
+              <a:shade val="15000"/>
+            </a:schemeClr>
+          </a:lnRef>
+          <a:fillRef idx="1">
+            <a:schemeClr val="accent1"/>
+          </a:fillRef>
+          <a:effectRef idx="0">
+            <a:schemeClr val="accent1"/>
+          </a:effectRef>
+          <a:fontRef idx="minor"/>
+        </p:style>
+        <p:txBody>
+          <a:bodyPr lIns="90000" rIns="90000" tIns="45000" bIns="45000" anchor="ctr">
+            <a:noAutofit/>
+          </a:bodyPr>
+          <a:p>
+            <a:pPr algn="ctr">
+              <a:lnSpc>
+                <a:spcPct val="100000"/>
+              </a:lnSpc>
+              <a:buNone/>
+            </a:pPr>
+            <a:r>
+              <a:rPr b="0" lang="en-US" sz="1800" spc="-1" strike="noStrike">
+                <a:solidFill>
+                  <a:srgbClr val="000000"/>
+                </a:solidFill>
+                <a:latin typeface="Arial"/>
+                <a:ea typeface="DejaVu Sans"/>
+              </a:rPr>
+              <a:t>8’</a:t>
+            </a:r>
+            <a:endParaRPr b="0" lang="en-US" sz="1800" spc="-1" strike="noStrike">
+              <a:latin typeface="Arial"/>
+            </a:endParaRPr>
+          </a:p>
+        </p:txBody>
+      </p:sp>
+      <p:sp>
+        <p:nvSpPr>
+          <p:cNvPr id="135" name="Straight Arrow Connector 2"/>
+          <p:cNvSpPr/>
+          <p:nvPr/>
+        </p:nvSpPr>
+        <p:spPr>
+          <a:xfrm>
+            <a:off x="3524760" y="4240440"/>
+            <a:ext cx="22320" cy="925200"/>
           </a:xfrm>
           <a:custGeom>
             <a:avLst/>
@@ -9458,208 +8826,14 @@
       </p:sp>
       <p:sp>
         <p:nvSpPr>
-          <p:cNvPr id="128" name="Rectangle 2"/>
+          <p:cNvPr id="136" name="Straight Arrow Connector 4"/>
           <p:cNvSpPr/>
           <p:nvPr/>
         </p:nvSpPr>
         <p:spPr>
           <a:xfrm>
-            <a:off x="8134200" y="5029200"/>
-            <a:ext cx="716400" cy="309960"/>
-          </a:xfrm>
-          <a:prstGeom prst="rect">
-            <a:avLst/>
-          </a:prstGeom>
-          <a:noFill/>
-          <a:ln>
-            <a:noFill/>
-          </a:ln>
-        </p:spPr>
-        <p:style>
-          <a:lnRef idx="2">
-            <a:schemeClr val="accent1">
-              <a:shade val="15000"/>
-            </a:schemeClr>
-          </a:lnRef>
-          <a:fillRef idx="1">
-            <a:schemeClr val="accent1"/>
-          </a:fillRef>
-          <a:effectRef idx="0">
-            <a:schemeClr val="accent1"/>
-          </a:effectRef>
-          <a:fontRef idx="minor"/>
-        </p:style>
-        <p:txBody>
-          <a:bodyPr lIns="90000" rIns="90000" tIns="45000" bIns="45000" anchor="ctr">
-            <a:noAutofit/>
-          </a:bodyPr>
-          <a:p>
-            <a:pPr algn="ctr">
-              <a:lnSpc>
-                <a:spcPct val="100000"/>
-              </a:lnSpc>
-              <a:buNone/>
-            </a:pPr>
-            <a:r>
-              <a:rPr b="0" lang="en-US" sz="1800" spc="-1" strike="noStrike">
-                <a:solidFill>
-                  <a:srgbClr val="000000"/>
-                </a:solidFill>
-                <a:latin typeface="Arial"/>
-                <a:ea typeface="DejaVu Sans"/>
-              </a:rPr>
-              <a:t>4’</a:t>
-            </a:r>
-            <a:endParaRPr b="0" lang="en-US" sz="1800" spc="-1" strike="noStrike">
-              <a:solidFill>
-                <a:srgbClr val="000000"/>
-              </a:solidFill>
-              <a:latin typeface="Arial"/>
-            </a:endParaRPr>
-          </a:p>
-        </p:txBody>
-      </p:sp>
-      <p:sp>
-        <p:nvSpPr>
-          <p:cNvPr id="129" name="Rectangle 3"/>
-          <p:cNvSpPr/>
-          <p:nvPr/>
-        </p:nvSpPr>
-        <p:spPr>
-          <a:xfrm>
-            <a:off x="4355280" y="1075320"/>
-            <a:ext cx="1176840" cy="468000"/>
-          </a:xfrm>
-          <a:prstGeom prst="rect">
-            <a:avLst/>
-          </a:prstGeom>
-          <a:solidFill>
-            <a:srgbClr val="4f81bd"/>
-          </a:solidFill>
-          <a:ln>
-            <a:solidFill>
-              <a:srgbClr val="223852"/>
-            </a:solidFill>
-          </a:ln>
-        </p:spPr>
-        <p:style>
-          <a:lnRef idx="2">
-            <a:schemeClr val="accent1">
-              <a:shade val="15000"/>
-            </a:schemeClr>
-          </a:lnRef>
-          <a:fillRef idx="1">
-            <a:schemeClr val="accent1"/>
-          </a:fillRef>
-          <a:effectRef idx="0">
-            <a:schemeClr val="accent1"/>
-          </a:effectRef>
-          <a:fontRef idx="minor"/>
-        </p:style>
-      </p:sp>
-      <p:sp>
-        <p:nvSpPr>
-          <p:cNvPr id="130" name="Rectangle 4"/>
-          <p:cNvSpPr/>
-          <p:nvPr/>
-        </p:nvSpPr>
-        <p:spPr>
-          <a:xfrm>
-            <a:off x="4654440" y="1137240"/>
-            <a:ext cx="716400" cy="309960"/>
-          </a:xfrm>
-          <a:prstGeom prst="rect">
-            <a:avLst/>
-          </a:prstGeom>
-          <a:noFill/>
-          <a:ln>
-            <a:noFill/>
-          </a:ln>
-        </p:spPr>
-        <p:style>
-          <a:lnRef idx="2">
-            <a:schemeClr val="accent1">
-              <a:shade val="15000"/>
-            </a:schemeClr>
-          </a:lnRef>
-          <a:fillRef idx="1">
-            <a:schemeClr val="accent1"/>
-          </a:fillRef>
-          <a:effectRef idx="0">
-            <a:schemeClr val="accent1"/>
-          </a:effectRef>
-          <a:fontRef idx="minor"/>
-        </p:style>
-        <p:txBody>
-          <a:bodyPr lIns="90000" rIns="90000" tIns="45000" bIns="45000" anchor="ctr">
-            <a:noAutofit/>
-          </a:bodyPr>
-          <a:p>
-            <a:pPr algn="ctr">
-              <a:lnSpc>
-                <a:spcPct val="100000"/>
-              </a:lnSpc>
-              <a:buNone/>
-            </a:pPr>
-            <a:r>
-              <a:rPr b="0" lang="en-US" sz="1800" spc="-1" strike="noStrike">
-                <a:solidFill>
-                  <a:srgbClr val="000000"/>
-                </a:solidFill>
-                <a:latin typeface="Arial"/>
-                <a:ea typeface="DejaVu Sans"/>
-              </a:rPr>
-              <a:t>2587</a:t>
-            </a:r>
-            <a:endParaRPr b="0" lang="en-US" sz="1800" spc="-1" strike="noStrike">
-              <a:latin typeface="Arial"/>
-            </a:endParaRPr>
-          </a:p>
-        </p:txBody>
-      </p:sp>
-      <p:sp>
-        <p:nvSpPr>
-          <p:cNvPr id="131" name="Straight Connector 1"/>
-          <p:cNvSpPr/>
-          <p:nvPr/>
-        </p:nvSpPr>
-        <p:spPr>
-          <a:xfrm flipH="1" flipV="1">
-            <a:off x="4840560" y="1554840"/>
-            <a:ext cx="394920" cy="180720"/>
-          </a:xfrm>
-          <a:prstGeom prst="line">
-            <a:avLst/>
-          </a:prstGeom>
-          <a:ln>
-            <a:solidFill>
-              <a:srgbClr val="4a7ebb"/>
-            </a:solidFill>
-          </a:ln>
-        </p:spPr>
-        <p:style>
-          <a:lnRef idx="1">
-            <a:schemeClr val="accent1"/>
-          </a:lnRef>
-          <a:fillRef idx="0">
-            <a:schemeClr val="accent1"/>
-          </a:fillRef>
-          <a:effectRef idx="0">
-            <a:schemeClr val="accent1"/>
-          </a:effectRef>
-          <a:fontRef idx="minor"/>
-        </p:style>
-      </p:sp>
-      <p:sp>
-        <p:nvSpPr>
-          <p:cNvPr id="132" name="Straight Arrow Connector 3"/>
-          <p:cNvSpPr/>
-          <p:nvPr/>
-        </p:nvSpPr>
-        <p:spPr>
-          <a:xfrm>
-            <a:off x="4401720" y="1673640"/>
-            <a:ext cx="1241280" cy="360"/>
+            <a:off x="2923560" y="5299920"/>
+            <a:ext cx="505080" cy="360"/>
           </a:xfrm>
           <a:custGeom>
             <a:avLst/>
@@ -9701,14 +8875,14 @@
       </p:sp>
       <p:sp>
         <p:nvSpPr>
-          <p:cNvPr id="133" name="Rectangle 5"/>
+          <p:cNvPr id="137" name="Rectangle 12"/>
           <p:cNvSpPr/>
           <p:nvPr/>
         </p:nvSpPr>
         <p:spPr>
           <a:xfrm>
-            <a:off x="4682520" y="1628280"/>
-            <a:ext cx="716400" cy="309960"/>
+            <a:off x="2808000" y="5290560"/>
+            <a:ext cx="716040" cy="309600"/>
           </a:xfrm>
           <a:prstGeom prst="rect">
             <a:avLst/>
@@ -9751,7 +8925,7 @@
                 <a:latin typeface="Arial"/>
                 <a:ea typeface="DejaVu Sans"/>
               </a:rPr>
-              <a:t>6’</a:t>
+              <a:t>3’</a:t>
             </a:r>
             <a:endParaRPr b="0" lang="en-US" sz="1800" spc="-1" strike="noStrike">
               <a:latin typeface="Arial"/>
@@ -9761,330 +8935,14 @@
       </p:sp>
       <p:sp>
         <p:nvSpPr>
-          <p:cNvPr id="134" name=""/>
+          <p:cNvPr id="138" name="Straight Arrow Connector 6"/>
           <p:cNvSpPr/>
           <p:nvPr/>
         </p:nvSpPr>
         <p:spPr>
           <a:xfrm>
-            <a:off x="-1143000" y="3299760"/>
-            <a:ext cx="4572000" cy="2872440"/>
-          </a:xfrm>
-          <a:prstGeom prst="rect">
-            <a:avLst/>
-          </a:prstGeom>
-          <a:solidFill>
-            <a:srgbClr val="ffffff"/>
-          </a:solidFill>
-          <a:ln w="0">
-            <a:solidFill>
-              <a:srgbClr val="3465a4"/>
-            </a:solidFill>
-          </a:ln>
-        </p:spPr>
-        <p:style>
-          <a:lnRef idx="0"/>
-          <a:fillRef idx="0"/>
-          <a:effectRef idx="0"/>
-          <a:fontRef idx="minor"/>
-        </p:style>
-      </p:sp>
-      <p:sp>
-        <p:nvSpPr>
-          <p:cNvPr id="135" name="Rectangle 10"/>
-          <p:cNvSpPr/>
-          <p:nvPr/>
-        </p:nvSpPr>
-        <p:spPr>
-          <a:xfrm>
-            <a:off x="-1086120" y="3528360"/>
-            <a:ext cx="3600720" cy="510480"/>
-          </a:xfrm>
-          <a:prstGeom prst="rect">
-            <a:avLst/>
-          </a:prstGeom>
-          <a:solidFill>
-            <a:srgbClr val="4f81bd"/>
-          </a:solidFill>
-          <a:ln>
-            <a:solidFill>
-              <a:srgbClr val="223852"/>
-            </a:solidFill>
-          </a:ln>
-        </p:spPr>
-        <p:style>
-          <a:lnRef idx="2">
-            <a:schemeClr val="accent1">
-              <a:shade val="15000"/>
-            </a:schemeClr>
-          </a:lnRef>
-          <a:fillRef idx="1">
-            <a:schemeClr val="accent1"/>
-          </a:fillRef>
-          <a:effectRef idx="0">
-            <a:schemeClr val="accent1"/>
-          </a:effectRef>
-          <a:fontRef idx="minor"/>
-        </p:style>
-        <p:txBody>
-          <a:bodyPr lIns="90000" rIns="90000" tIns="45000" bIns="45000" anchor="ctr">
-            <a:noAutofit/>
-          </a:bodyPr>
-          <a:p>
-            <a:pPr algn="ctr">
-              <a:lnSpc>
-                <a:spcPct val="100000"/>
-              </a:lnSpc>
-              <a:buNone/>
-            </a:pPr>
-            <a:r>
-              <a:rPr b="0" lang="en-US" sz="1800" spc="-1" strike="noStrike">
-                <a:solidFill>
-                  <a:srgbClr val="000000"/>
-                </a:solidFill>
-                <a:latin typeface="Arial"/>
-                <a:ea typeface="DejaVu Sans"/>
-              </a:rPr>
-              <a:t>Main Building (2581 Alma)</a:t>
-            </a:r>
-            <a:endParaRPr b="0" lang="en-US" sz="1800" spc="-1" strike="noStrike">
-              <a:latin typeface="Arial"/>
-            </a:endParaRPr>
-          </a:p>
-        </p:txBody>
-      </p:sp>
-      <p:sp>
-        <p:nvSpPr>
-          <p:cNvPr id="136" name="Rectangle 7"/>
-          <p:cNvSpPr/>
-          <p:nvPr/>
-        </p:nvSpPr>
-        <p:spPr>
-          <a:xfrm>
-            <a:off x="2971800" y="4220640"/>
-            <a:ext cx="463680" cy="925200"/>
-          </a:xfrm>
-          <a:prstGeom prst="rect">
-            <a:avLst/>
-          </a:prstGeom>
-          <a:solidFill>
-            <a:srgbClr val="4f81bd"/>
-          </a:solidFill>
-          <a:ln>
-            <a:solidFill>
-              <a:srgbClr val="223852"/>
-            </a:solidFill>
-          </a:ln>
-        </p:spPr>
-        <p:style>
-          <a:lnRef idx="2">
-            <a:schemeClr val="accent1">
-              <a:shade val="15000"/>
-            </a:schemeClr>
-          </a:lnRef>
-          <a:fillRef idx="1">
-            <a:schemeClr val="accent1"/>
-          </a:fillRef>
-          <a:effectRef idx="0">
-            <a:schemeClr val="accent1"/>
-          </a:effectRef>
-          <a:fontRef idx="minor"/>
-        </p:style>
-      </p:sp>
-      <p:sp>
-        <p:nvSpPr>
-          <p:cNvPr id="137" name="Rectangle 8"/>
-          <p:cNvSpPr/>
-          <p:nvPr/>
-        </p:nvSpPr>
-        <p:spPr>
-          <a:xfrm>
-            <a:off x="2063880" y="4825080"/>
-            <a:ext cx="1173600" cy="309960"/>
-          </a:xfrm>
-          <a:prstGeom prst="rect">
-            <a:avLst/>
-          </a:prstGeom>
-          <a:noFill/>
-          <a:ln>
-            <a:noFill/>
-          </a:ln>
-        </p:spPr>
-        <p:style>
-          <a:lnRef idx="2">
-            <a:schemeClr val="accent1">
-              <a:shade val="15000"/>
-            </a:schemeClr>
-          </a:lnRef>
-          <a:fillRef idx="1">
-            <a:schemeClr val="accent1"/>
-          </a:fillRef>
-          <a:effectRef idx="0">
-            <a:schemeClr val="accent1"/>
-          </a:effectRef>
-          <a:fontRef idx="minor"/>
-        </p:style>
-        <p:txBody>
-          <a:bodyPr lIns="90000" rIns="90000" tIns="45000" bIns="45000" anchor="ctr">
-            <a:noAutofit/>
-          </a:bodyPr>
-          <a:p>
-            <a:pPr algn="ctr">
-              <a:lnSpc>
-                <a:spcPct val="100000"/>
-              </a:lnSpc>
-              <a:buNone/>
-            </a:pPr>
-            <a:r>
-              <a:rPr b="0" lang="en-US" sz="1800" spc="-1" strike="noStrike">
-                <a:solidFill>
-                  <a:srgbClr val="000000"/>
-                </a:solidFill>
-                <a:latin typeface="Arial"/>
-                <a:ea typeface="DejaVu Sans"/>
-              </a:rPr>
-              <a:t>2581</a:t>
-            </a:r>
-            <a:r>
-              <a:rPr b="0" lang="en-US" sz="1800" spc="-1" strike="noStrike">
-                <a:solidFill>
-                  <a:srgbClr val="ffffff"/>
-                </a:solidFill>
-                <a:latin typeface="Arial"/>
-                <a:ea typeface="DejaVu Sans"/>
-              </a:rPr>
-              <a:t>’</a:t>
-            </a:r>
-            <a:endParaRPr b="0" lang="en-US" sz="1800" spc="-1" strike="noStrike">
-              <a:latin typeface="Arial"/>
-            </a:endParaRPr>
-          </a:p>
-        </p:txBody>
-      </p:sp>
-      <p:sp>
-        <p:nvSpPr>
-          <p:cNvPr id="138" name=""/>
-          <p:cNvSpPr/>
-          <p:nvPr/>
-        </p:nvSpPr>
-        <p:spPr>
-          <a:xfrm flipH="1">
-            <a:off x="2521080" y="3992040"/>
-            <a:ext cx="457200" cy="228600"/>
-          </a:xfrm>
-          <a:prstGeom prst="line">
-            <a:avLst/>
-          </a:prstGeom>
-          <a:ln w="0">
-            <a:solidFill>
-              <a:srgbClr val="3465a4"/>
-            </a:solidFill>
-          </a:ln>
-        </p:spPr>
-        <p:style>
-          <a:lnRef idx="0"/>
-          <a:fillRef idx="0"/>
-          <a:effectRef idx="0"/>
-          <a:fontRef idx="minor"/>
-        </p:style>
-      </p:sp>
-      <p:sp>
-        <p:nvSpPr>
-          <p:cNvPr id="139" name=""/>
-          <p:cNvSpPr/>
-          <p:nvPr/>
-        </p:nvSpPr>
-        <p:spPr>
-          <a:xfrm flipH="1">
-            <a:off x="2929680" y="3992040"/>
-            <a:ext cx="457200" cy="0"/>
-          </a:xfrm>
-          <a:prstGeom prst="line">
-            <a:avLst/>
-          </a:prstGeom>
-          <a:ln w="0">
-            <a:solidFill>
-              <a:srgbClr val="3465a4"/>
-            </a:solidFill>
-          </a:ln>
-        </p:spPr>
-        <p:style>
-          <a:lnRef idx="0"/>
-          <a:fillRef idx="0"/>
-          <a:effectRef idx="0"/>
-          <a:fontRef idx="minor"/>
-        </p:style>
-      </p:sp>
-      <p:sp>
-        <p:nvSpPr>
-          <p:cNvPr id="140" name="Rectangle 11"/>
-          <p:cNvSpPr/>
-          <p:nvPr/>
-        </p:nvSpPr>
-        <p:spPr>
-          <a:xfrm>
-            <a:off x="3547440" y="4343400"/>
-            <a:ext cx="716400" cy="309960"/>
-          </a:xfrm>
-          <a:prstGeom prst="rect">
-            <a:avLst/>
-          </a:prstGeom>
-          <a:noFill/>
-          <a:ln>
-            <a:noFill/>
-          </a:ln>
-        </p:spPr>
-        <p:style>
-          <a:lnRef idx="2">
-            <a:schemeClr val="accent1">
-              <a:shade val="15000"/>
-            </a:schemeClr>
-          </a:lnRef>
-          <a:fillRef idx="1">
-            <a:schemeClr val="accent1"/>
-          </a:fillRef>
-          <a:effectRef idx="0">
-            <a:schemeClr val="accent1"/>
-          </a:effectRef>
-          <a:fontRef idx="minor"/>
-        </p:style>
-        <p:txBody>
-          <a:bodyPr lIns="90000" rIns="90000" tIns="45000" bIns="45000" anchor="ctr">
-            <a:noAutofit/>
-          </a:bodyPr>
-          <a:p>
-            <a:pPr algn="ctr">
-              <a:lnSpc>
-                <a:spcPct val="100000"/>
-              </a:lnSpc>
-              <a:buNone/>
-            </a:pPr>
-            <a:r>
-              <a:rPr b="0" lang="en-US" sz="1800" spc="-1" strike="noStrike">
-                <a:solidFill>
-                  <a:srgbClr val="000000"/>
-                </a:solidFill>
-                <a:latin typeface="Arial"/>
-                <a:ea typeface="DejaVu Sans"/>
-              </a:rPr>
-              <a:t>8’</a:t>
-            </a:r>
-            <a:endParaRPr b="0" lang="en-US" sz="1800" spc="-1" strike="noStrike">
-              <a:latin typeface="Arial"/>
-            </a:endParaRPr>
-          </a:p>
-        </p:txBody>
-      </p:sp>
-      <p:sp>
-        <p:nvSpPr>
-          <p:cNvPr id="141" name="Straight Arrow Connector 2"/>
-          <p:cNvSpPr/>
-          <p:nvPr/>
-        </p:nvSpPr>
-        <p:spPr>
-          <a:xfrm>
-            <a:off x="3524760" y="4240440"/>
-            <a:ext cx="22680" cy="925560"/>
+            <a:off x="3524760" y="5284440"/>
+            <a:ext cx="22320" cy="925200"/>
           </a:xfrm>
           <a:custGeom>
             <a:avLst/>
@@ -10126,14 +8984,74 @@
       </p:sp>
       <p:sp>
         <p:nvSpPr>
-          <p:cNvPr id="142" name="Straight Arrow Connector 4"/>
+          <p:cNvPr id="139" name="Rectangle 13"/>
           <p:cNvSpPr/>
           <p:nvPr/>
         </p:nvSpPr>
         <p:spPr>
           <a:xfrm>
-            <a:off x="2923560" y="5299920"/>
-            <a:ext cx="505440" cy="360"/>
+            <a:off x="3627000" y="5486400"/>
+            <a:ext cx="716040" cy="309600"/>
+          </a:xfrm>
+          <a:prstGeom prst="rect">
+            <a:avLst/>
+          </a:prstGeom>
+          <a:noFill/>
+          <a:ln>
+            <a:noFill/>
+          </a:ln>
+        </p:spPr>
+        <p:style>
+          <a:lnRef idx="2">
+            <a:schemeClr val="accent1">
+              <a:shade val="15000"/>
+            </a:schemeClr>
+          </a:lnRef>
+          <a:fillRef idx="1">
+            <a:schemeClr val="accent1"/>
+          </a:fillRef>
+          <a:effectRef idx="0">
+            <a:schemeClr val="accent1"/>
+          </a:effectRef>
+          <a:fontRef idx="minor"/>
+        </p:style>
+        <p:txBody>
+          <a:bodyPr lIns="90000" rIns="90000" tIns="45000" bIns="45000" anchor="ctr">
+            <a:noAutofit/>
+          </a:bodyPr>
+          <a:p>
+            <a:pPr algn="ctr">
+              <a:lnSpc>
+                <a:spcPct val="100000"/>
+              </a:lnSpc>
+              <a:buNone/>
+            </a:pPr>
+            <a:r>
+              <a:rPr b="0" lang="en-US" sz="1800" spc="-1" strike="noStrike">
+                <a:solidFill>
+                  <a:srgbClr val="000000"/>
+                </a:solidFill>
+                <a:latin typeface="Arial"/>
+                <a:ea typeface="DejaVu Sans"/>
+              </a:rPr>
+              <a:t>&gt; 16’</a:t>
+            </a:r>
+            <a:endParaRPr b="0" lang="en-US" sz="1800" spc="-1" strike="noStrike">
+              <a:latin typeface="Arial"/>
+            </a:endParaRPr>
+          </a:p>
+        </p:txBody>
+      </p:sp>
+      <p:sp>
+        <p:nvSpPr>
+          <p:cNvPr id="140" name="Straight Arrow Connector 89"/>
+          <p:cNvSpPr/>
+          <p:nvPr/>
+        </p:nvSpPr>
+        <p:spPr>
+          <a:xfrm>
+            <a:off x="4673520" y="5379120"/>
+            <a:ext cx="2413080" cy="360"/>
           </a:xfrm>
           <a:custGeom>
             <a:avLst/>
@@ -10175,21 +9093,25 @@
       </p:sp>
       <p:sp>
         <p:nvSpPr>
-          <p:cNvPr id="143" name="Rectangle 12"/>
+          <p:cNvPr id="141" name="Rectangle 3"/>
           <p:cNvSpPr/>
           <p:nvPr/>
         </p:nvSpPr>
         <p:spPr>
           <a:xfrm>
-            <a:off x="2808000" y="5290560"/>
-            <a:ext cx="716400" cy="309960"/>
-          </a:xfrm>
-          <a:prstGeom prst="rect">
-            <a:avLst/>
-          </a:prstGeom>
-          <a:noFill/>
+            <a:off x="3549600" y="1143000"/>
+            <a:ext cx="565200" cy="695520"/>
+          </a:xfrm>
+          <a:prstGeom prst="rect">
+            <a:avLst/>
+          </a:prstGeom>
+          <a:solidFill>
+            <a:srgbClr val="4f81bd"/>
+          </a:solidFill>
           <a:ln>
-            <a:noFill/>
+            <a:solidFill>
+              <a:srgbClr val="223852"/>
+            </a:solidFill>
           </a:ln>
         </p:spPr>
         <p:style>
@@ -10206,6 +9128,40 @@
           </a:effectRef>
           <a:fontRef idx="minor"/>
         </p:style>
+      </p:sp>
+      <p:sp>
+        <p:nvSpPr>
+          <p:cNvPr id="142" name="Rectangle 4"/>
+          <p:cNvSpPr/>
+          <p:nvPr/>
+        </p:nvSpPr>
+        <p:spPr>
+          <a:xfrm>
+            <a:off x="3488760" y="1204920"/>
+            <a:ext cx="716040" cy="309600"/>
+          </a:xfrm>
+          <a:prstGeom prst="rect">
+            <a:avLst/>
+          </a:prstGeom>
+          <a:noFill/>
+          <a:ln>
+            <a:noFill/>
+          </a:ln>
+        </p:spPr>
+        <p:style>
+          <a:lnRef idx="2">
+            <a:schemeClr val="accent1">
+              <a:shade val="15000"/>
+            </a:schemeClr>
+          </a:lnRef>
+          <a:fillRef idx="1">
+            <a:schemeClr val="accent1"/>
+          </a:fillRef>
+          <a:effectRef idx="0">
+            <a:schemeClr val="accent1"/>
+          </a:effectRef>
+          <a:fontRef idx="minor"/>
+        </p:style>
         <p:txBody>
           <a:bodyPr lIns="90000" rIns="90000" tIns="45000" bIns="45000" anchor="ctr">
             <a:noAutofit/>
@@ -10225,7 +9181,7 @@
                 <a:latin typeface="Arial"/>
                 <a:ea typeface="DejaVu Sans"/>
               </a:rPr>
-              <a:t>3’</a:t>
+              <a:t>2587</a:t>
             </a:r>
             <a:endParaRPr b="0" lang="en-US" sz="1800" spc="-1" strike="noStrike">
               <a:latin typeface="Arial"/>
@@ -10235,14 +9191,47 @@
       </p:sp>
       <p:sp>
         <p:nvSpPr>
-          <p:cNvPr id="144" name="Straight Arrow Connector 6"/>
+          <p:cNvPr id="143" name="Straight Connector 1"/>
           <p:cNvSpPr/>
           <p:nvPr/>
         </p:nvSpPr>
         <p:spPr>
-          <a:xfrm>
-            <a:off x="3524760" y="5284440"/>
-            <a:ext cx="22680" cy="925560"/>
+          <a:xfrm flipH="1" flipV="1">
+            <a:off x="3674880" y="1838520"/>
+            <a:ext cx="394920" cy="180720"/>
+          </a:xfrm>
+          <a:prstGeom prst="line">
+            <a:avLst/>
+          </a:prstGeom>
+          <a:ln>
+            <a:solidFill>
+              <a:srgbClr val="4a7ebb"/>
+            </a:solidFill>
+          </a:ln>
+        </p:spPr>
+        <p:style>
+          <a:lnRef idx="1">
+            <a:schemeClr val="accent1"/>
+          </a:lnRef>
+          <a:fillRef idx="0">
+            <a:schemeClr val="accent1"/>
+          </a:fillRef>
+          <a:effectRef idx="0">
+            <a:schemeClr val="accent1"/>
+          </a:effectRef>
+          <a:fontRef idx="minor"/>
+        </p:style>
+      </p:sp>
+      <p:sp>
+        <p:nvSpPr>
+          <p:cNvPr id="144" name="Straight Arrow Connector 7"/>
+          <p:cNvSpPr/>
+          <p:nvPr/>
+        </p:nvSpPr>
+        <p:spPr>
+          <a:xfrm>
+            <a:off x="3560040" y="1957320"/>
+            <a:ext cx="601200" cy="360"/>
           </a:xfrm>
           <a:custGeom>
             <a:avLst/>
@@ -10284,14 +9273,14 @@
       </p:sp>
       <p:sp>
         <p:nvSpPr>
-          <p:cNvPr id="145" name="Rectangle 13"/>
+          <p:cNvPr id="145" name="Rectangle 14"/>
           <p:cNvSpPr/>
           <p:nvPr/>
         </p:nvSpPr>
         <p:spPr>
           <a:xfrm>
-            <a:off x="3627000" y="5486400"/>
-            <a:ext cx="716400" cy="309960"/>
+            <a:off x="3516840" y="1911960"/>
+            <a:ext cx="716040" cy="309600"/>
           </a:xfrm>
           <a:prstGeom prst="rect">
             <a:avLst/>
@@ -10334,7 +9323,7 @@
                 <a:latin typeface="Arial"/>
                 <a:ea typeface="DejaVu Sans"/>
               </a:rPr>
-              <a:t>&gt; 16’</a:t>
+              <a:t>4’</a:t>
             </a:r>
             <a:endParaRPr b="0" lang="en-US" sz="1800" spc="-1" strike="noStrike">
               <a:latin typeface="Arial"/>
@@ -10356,9 +9345,9 @@
         <p:txBody>
           <a:bodyPr/>
           <a:p>
-            <a:fld id="{D9253A66-134D-47F3-864C-67C860E19ADF}" type="datetime1">
+            <a:fld id="{A3F44546-7EF4-4FC6-A4C4-86EB221C50FC}" type="datetime1">
               <a:rPr lang="en-US"/>
-              <a:t>05/29/2026</a:t>
+              <a:t>05/30/2026</a:t>
             </a:fld>
           </a:p>
         </p:txBody>
@@ -10406,7 +9395,7 @@
         <p:spPr>
           <a:xfrm>
             <a:off x="0" y="2130480"/>
-            <a:ext cx="9108360" cy="1434240"/>
+            <a:ext cx="9108000" cy="1433880"/>
           </a:xfrm>
           <a:prstGeom prst="rect">
             <a:avLst/>
@@ -10448,9 +9437,6 @@
               <a:t>End</a:t>
             </a:r>
             <a:endParaRPr b="0" lang="en-US" sz="6000" spc="-1" strike="noStrike">
-              <a:solidFill>
-                <a:srgbClr val="000000"/>
-              </a:solidFill>
               <a:latin typeface="Arial"/>
             </a:endParaRPr>
           </a:p>
@@ -10470,7 +9456,7 @@
         <p:txBody>
           <a:bodyPr/>
           <a:p>
-            <a:fld id="{CE2982E2-2B53-4567-8477-142B20D0330E}" type="slidenum">
+            <a:fld id="{D68E9388-836B-4D60-A0DC-1C0F006F9732}" type="slidenum">
               <a:t>3</a:t>
             </a:fld>
           </a:p>
@@ -10490,9 +9476,9 @@
         <p:txBody>
           <a:bodyPr/>
           <a:p>
-            <a:fld id="{BD320D0C-BE92-4AFC-861F-96A65683545A}" type="datetime1">
+            <a:fld id="{6490C093-6C38-4EB1-86A4-9529578C0C67}" type="datetime1">
               <a:rPr lang="en-US"/>
-              <a:t>05/29/2026</a:t>
+              <a:t>05/30/2026</a:t>
             </a:fld>
           </a:p>
         </p:txBody>

--- a/Palo_Alto_2581/000_PaloAlto_Shed.pptx
+++ b/Palo_Alto_2581/000_PaloAlto_Shed.pptx
@@ -295,7 +295,7 @@
             <a:pPr algn="r">
               <a:buNone/>
             </a:pPr>
-            <a:fld id="{3693FDE7-6333-4D08-94D3-8260C2397143}" type="slidenum">
+            <a:fld id="{83AAAD25-D007-4B95-8631-42321775B971}" type="slidenum">
               <a:rPr b="0" lang="en-US" sz="1400" spc="-1" strike="noStrike">
                 <a:latin typeface="Times New Roman"/>
               </a:rPr>
@@ -343,7 +343,7 @@
         <p:spPr>
           <a:xfrm>
             <a:off x="1143000" y="685800"/>
-            <a:ext cx="4536360" cy="3393360"/>
+            <a:ext cx="4536000" cy="3393000"/>
           </a:xfrm>
           <a:prstGeom prst="rect">
             <a:avLst/>
@@ -366,7 +366,7 @@
         <p:spPr>
           <a:xfrm>
             <a:off x="685800" y="4343400"/>
-            <a:ext cx="5450400" cy="4078800"/>
+            <a:ext cx="5450040" cy="4078440"/>
           </a:xfrm>
           <a:prstGeom prst="rect">
             <a:avLst/>
@@ -400,7 +400,7 @@
         <p:spPr>
           <a:xfrm>
             <a:off x="3884760" y="8685360"/>
-            <a:ext cx="2935800" cy="421200"/>
+            <a:ext cx="2935440" cy="420840"/>
           </a:xfrm>
           <a:prstGeom prst="rect">
             <a:avLst/>
@@ -436,7 +436,7 @@
               </a:lnSpc>
               <a:buNone/>
             </a:pPr>
-            <a:fld id="{4F8E03AF-F61A-431E-95F3-F6E7C6EF7FBC}" type="slidenum">
+            <a:fld id="{0CF1A799-B786-43B2-B984-1B5D6509E6A6}" type="slidenum">
               <a:rPr b="0" lang="en-US" sz="1200" spc="-1" strike="noStrike">
                 <a:solidFill>
                   <a:srgbClr val="000000"/>
@@ -508,7 +508,7 @@
         <p:txBody>
           <a:bodyPr/>
           <a:p>
-            <a:fld id="{566D5DE2-AA56-4EC8-BAE4-9DFAE19ECDF6}" type="slidenum">
+            <a:fld id="{F2D201CF-6EF7-42EE-A0A8-3093DA84730B}" type="slidenum">
               <a:t>&lt;#&gt;</a:t>
             </a:fld>
           </a:p>
@@ -696,7 +696,7 @@
         <p:txBody>
           <a:bodyPr/>
           <a:p>
-            <a:fld id="{E0A98730-629B-4E96-91B7-2B52CA7A26AC}" type="slidenum">
+            <a:fld id="{93703FB9-514A-46E4-8112-A3E7EAAF6D76}" type="slidenum">
               <a:t>&lt;#&gt;</a:t>
             </a:fld>
           </a:p>
@@ -952,7 +952,7 @@
         <p:txBody>
           <a:bodyPr/>
           <a:p>
-            <a:fld id="{DBA5A127-80A4-4459-A648-F6F4C3AA0E06}" type="slidenum">
+            <a:fld id="{3292A141-4C3A-47A5-8509-74ED62772AA5}" type="slidenum">
               <a:t>&lt;#&gt;</a:t>
             </a:fld>
           </a:p>
@@ -1276,7 +1276,7 @@
         <p:txBody>
           <a:bodyPr/>
           <a:p>
-            <a:fld id="{EC7E5FD1-B819-4C4F-AF41-61F281346CBD}" type="slidenum">
+            <a:fld id="{241A2AF3-EE2A-4EB3-9F3D-42AB55BCD7EF}" type="slidenum">
               <a:t>&lt;#&gt;</a:t>
             </a:fld>
           </a:p>
@@ -1359,7 +1359,7 @@
         <p:txBody>
           <a:bodyPr/>
           <a:p>
-            <a:fld id="{4A9D026C-42C5-439B-B7A5-9650386DC4F4}" type="slidenum">
+            <a:fld id="{AE16EBAB-6E4B-4714-8472-C9AA0F123DB0}" type="slidenum">
               <a:t>&lt;#&gt;</a:t>
             </a:fld>
           </a:p>
@@ -1516,7 +1516,7 @@
         <p:txBody>
           <a:bodyPr/>
           <a:p>
-            <a:fld id="{9CD434CA-6191-4BF0-9F09-C12DBB3FD0BE}" type="slidenum">
+            <a:fld id="{1B61D644-EB09-4430-8348-98FDC04BF2D1}" type="slidenum">
               <a:t>&lt;#&gt;</a:t>
             </a:fld>
           </a:p>
@@ -1670,7 +1670,7 @@
         <p:txBody>
           <a:bodyPr/>
           <a:p>
-            <a:fld id="{6332D4F8-8322-4349-8A79-8183CC8F3E2C}" type="slidenum">
+            <a:fld id="{48DD314D-AE1B-44F1-8595-F8A5676E0188}" type="slidenum">
               <a:t>&lt;#&gt;</a:t>
             </a:fld>
           </a:p>
@@ -1858,7 +1858,7 @@
         <p:txBody>
           <a:bodyPr/>
           <a:p>
-            <a:fld id="{37D7807D-7D8F-4AEC-A2D7-967AD8484AEC}" type="slidenum">
+            <a:fld id="{4DC3B1B7-3DAD-49FD-AA35-469BF56F1F5E}" type="slidenum">
               <a:t>&lt;#&gt;</a:t>
             </a:fld>
           </a:p>
@@ -1978,7 +1978,7 @@
         <p:txBody>
           <a:bodyPr/>
           <a:p>
-            <a:fld id="{861B3F23-BB10-4EC5-B1B8-908110A090E0}" type="slidenum">
+            <a:fld id="{07876148-0068-4834-99EF-B309C3DA843E}" type="slidenum">
               <a:t>&lt;#&gt;</a:t>
             </a:fld>
           </a:p>
@@ -2098,7 +2098,7 @@
         <p:txBody>
           <a:bodyPr/>
           <a:p>
-            <a:fld id="{2514F520-E731-4148-935C-FD2CBB4436FB}" type="slidenum">
+            <a:fld id="{6FBA3CB1-71BC-4F2C-9198-7EB52DA73BF1}" type="slidenum">
               <a:t>&lt;#&gt;</a:t>
             </a:fld>
           </a:p>
@@ -2320,7 +2320,7 @@
         <p:txBody>
           <a:bodyPr/>
           <a:p>
-            <a:fld id="{F73DDB2C-A2D9-4E7F-955A-374895C5C63A}" type="slidenum">
+            <a:fld id="{4FE65B2B-7FD7-4D97-B857-5DBC45CCD048}" type="slidenum">
               <a:t>&lt;#&gt;</a:t>
             </a:fld>
           </a:p>
@@ -2477,7 +2477,7 @@
         <p:txBody>
           <a:bodyPr/>
           <a:p>
-            <a:fld id="{2A99F762-C4A9-4EFB-98F9-0FC08D1D5164}" type="slidenum">
+            <a:fld id="{373BA665-3D7B-4D88-9BAE-E829FD8BE908}" type="slidenum">
               <a:t>&lt;#&gt;</a:t>
             </a:fld>
           </a:p>
@@ -2699,7 +2699,7 @@
         <p:txBody>
           <a:bodyPr/>
           <a:p>
-            <a:fld id="{B67272A5-4D88-4202-9161-BB4262F00F8B}" type="slidenum">
+            <a:fld id="{E4008AF8-D30B-4035-8A8E-956A1C3CDC87}" type="slidenum">
               <a:t>&lt;#&gt;</a:t>
             </a:fld>
           </a:p>
@@ -2921,7 +2921,7 @@
         <p:txBody>
           <a:bodyPr/>
           <a:p>
-            <a:fld id="{C94FAD55-4688-4C43-B4A5-F9C99A71291F}" type="slidenum">
+            <a:fld id="{B9772DAC-BB2B-46DB-9832-83D078A672DF}" type="slidenum">
               <a:t>&lt;#&gt;</a:t>
             </a:fld>
           </a:p>
@@ -3109,7 +3109,7 @@
         <p:txBody>
           <a:bodyPr/>
           <a:p>
-            <a:fld id="{72072D0B-23CB-4B23-B3D2-A7712472DA9C}" type="slidenum">
+            <a:fld id="{48740A9E-4FF1-4513-B9EB-B2B6435E569B}" type="slidenum">
               <a:t>&lt;#&gt;</a:t>
             </a:fld>
           </a:p>
@@ -3365,7 +3365,7 @@
         <p:txBody>
           <a:bodyPr/>
           <a:p>
-            <a:fld id="{B7D33062-7228-4DEF-AF2B-A478CC531977}" type="slidenum">
+            <a:fld id="{68ACF28C-E5BE-4E4D-940C-0C89BCB5F59F}" type="slidenum">
               <a:t>&lt;#&gt;</a:t>
             </a:fld>
           </a:p>
@@ -3689,7 +3689,7 @@
         <p:txBody>
           <a:bodyPr/>
           <a:p>
-            <a:fld id="{E739115D-365F-4B5E-A064-114C755EAB59}" type="slidenum">
+            <a:fld id="{967D76C2-5C87-4443-9413-841C4218CA88}" type="slidenum">
               <a:t>&lt;#&gt;</a:t>
             </a:fld>
           </a:p>
@@ -3843,7 +3843,7 @@
         <p:txBody>
           <a:bodyPr/>
           <a:p>
-            <a:fld id="{364CA358-0954-4726-AD01-8C0B4628EBA3}" type="slidenum">
+            <a:fld id="{1F8AFAB7-3BD3-4E3B-B383-ABE3C9526CE3}" type="slidenum">
               <a:t>&lt;#&gt;</a:t>
             </a:fld>
           </a:p>
@@ -4031,7 +4031,7 @@
         <p:txBody>
           <a:bodyPr/>
           <a:p>
-            <a:fld id="{65C7F60E-9F18-4E67-9213-63A00F29292A}" type="slidenum">
+            <a:fld id="{1DCD7926-AB23-49C3-881F-383E2BB4D607}" type="slidenum">
               <a:t>&lt;#&gt;</a:t>
             </a:fld>
           </a:p>
@@ -4151,7 +4151,7 @@
         <p:txBody>
           <a:bodyPr/>
           <a:p>
-            <a:fld id="{321D75A1-431C-4295-953D-E684AEF0BECA}" type="slidenum">
+            <a:fld id="{D2106891-AD31-4B55-8EAD-8C9AF0BECD2B}" type="slidenum">
               <a:t>&lt;#&gt;</a:t>
             </a:fld>
           </a:p>
@@ -4271,7 +4271,7 @@
         <p:txBody>
           <a:bodyPr/>
           <a:p>
-            <a:fld id="{62B26388-CE32-4134-A179-AFB4871F6FC4}" type="slidenum">
+            <a:fld id="{0746BA0E-B265-436D-AC59-3CC510B9AD27}" type="slidenum">
               <a:t>&lt;#&gt;</a:t>
             </a:fld>
           </a:p>
@@ -4493,7 +4493,7 @@
         <p:txBody>
           <a:bodyPr/>
           <a:p>
-            <a:fld id="{68FAA447-E153-4AF8-9DCB-8B5000C34745}" type="slidenum">
+            <a:fld id="{3D9FA839-C258-4868-B97D-D994166681E1}" type="slidenum">
               <a:t>&lt;#&gt;</a:t>
             </a:fld>
           </a:p>
@@ -4715,7 +4715,7 @@
         <p:txBody>
           <a:bodyPr/>
           <a:p>
-            <a:fld id="{EE365871-C9B4-45BF-A4A6-5688A686DFFB}" type="slidenum">
+            <a:fld id="{9707533C-2F36-4B6B-A4C1-339ADF4D8646}" type="slidenum">
               <a:t>&lt;#&gt;</a:t>
             </a:fld>
           </a:p>
@@ -4937,7 +4937,7 @@
         <p:txBody>
           <a:bodyPr/>
           <a:p>
-            <a:fld id="{79C57318-63F9-4D1E-91EF-36D7B9B5EE49}" type="slidenum">
+            <a:fld id="{FD590703-9966-4134-AE2A-3B9F0FA01C08}" type="slidenum">
               <a:t>&lt;#&gt;</a:t>
             </a:fld>
           </a:p>
@@ -5006,7 +5006,7 @@
         <p:spPr>
           <a:xfrm>
             <a:off x="3124080" y="6356520"/>
-            <a:ext cx="2859480" cy="329040"/>
+            <a:ext cx="2859120" cy="328680"/>
           </a:xfrm>
           <a:prstGeom prst="rect">
             <a:avLst/>
@@ -5071,7 +5071,7 @@
         <p:spPr>
           <a:xfrm>
             <a:off x="6553080" y="6356520"/>
-            <a:ext cx="2097720" cy="329040"/>
+            <a:ext cx="2097360" cy="328680"/>
           </a:xfrm>
           <a:prstGeom prst="rect">
             <a:avLst/>
@@ -5107,7 +5107,7 @@
               </a:lnSpc>
               <a:buNone/>
             </a:pPr>
-            <a:fld id="{7D42E4CF-279D-4944-9D1E-3BB39A0652C8}" type="slidenum">
+            <a:fld id="{7E509075-E747-4E94-82B1-2437BFEA8686}" type="slidenum">
               <a:rPr b="0" lang="en-US" sz="1200" spc="-1" strike="noStrike">
                 <a:solidFill>
                   <a:srgbClr val="8b8b8b"/>
@@ -5136,7 +5136,7 @@
         <p:spPr>
           <a:xfrm>
             <a:off x="457200" y="6356520"/>
-            <a:ext cx="2097720" cy="329040"/>
+            <a:ext cx="2097360" cy="328680"/>
           </a:xfrm>
           <a:prstGeom prst="rect">
             <a:avLst/>
@@ -5205,199 +5205,7 @@
               <a:rPr b="0" lang="en-US" sz="4400" spc="-1" strike="noStrike">
                 <a:latin typeface="Arial"/>
               </a:rPr>
-              <a:t>C</a:t>
-            </a:r>
-            <a:r>
-              <a:rPr b="0" lang="en-US" sz="4400" spc="-1" strike="noStrike">
-                <a:latin typeface="Arial"/>
-              </a:rPr>
-              <a:t>l</a:t>
-            </a:r>
-            <a:r>
-              <a:rPr b="0" lang="en-US" sz="4400" spc="-1" strike="noStrike">
-                <a:latin typeface="Arial"/>
-              </a:rPr>
-              <a:t>i</a:t>
-            </a:r>
-            <a:r>
-              <a:rPr b="0" lang="en-US" sz="4400" spc="-1" strike="noStrike">
-                <a:latin typeface="Arial"/>
-              </a:rPr>
-              <a:t>c</a:t>
-            </a:r>
-            <a:r>
-              <a:rPr b="0" lang="en-US" sz="4400" spc="-1" strike="noStrike">
-                <a:latin typeface="Arial"/>
-              </a:rPr>
-              <a:t>k</a:t>
-            </a:r>
-            <a:r>
-              <a:rPr b="0" lang="en-US" sz="4400" spc="-1" strike="noStrike">
-                <a:latin typeface="Arial"/>
-              </a:rPr>
-              <a:t> </a:t>
-            </a:r>
-            <a:r>
-              <a:rPr b="0" lang="en-US" sz="4400" spc="-1" strike="noStrike">
-                <a:latin typeface="Arial"/>
-              </a:rPr>
-              <a:t>t</a:t>
-            </a:r>
-            <a:r>
-              <a:rPr b="0" lang="en-US" sz="4400" spc="-1" strike="noStrike">
-                <a:latin typeface="Arial"/>
-              </a:rPr>
-              <a:t>o</a:t>
-            </a:r>
-            <a:r>
-              <a:rPr b="0" lang="en-US" sz="4400" spc="-1" strike="noStrike">
-                <a:latin typeface="Arial"/>
-              </a:rPr>
-              <a:t> </a:t>
-            </a:r>
-            <a:r>
-              <a:rPr b="0" lang="en-US" sz="4400" spc="-1" strike="noStrike">
-                <a:latin typeface="Arial"/>
-              </a:rPr>
-              <a:t>e</a:t>
-            </a:r>
-            <a:r>
-              <a:rPr b="0" lang="en-US" sz="4400" spc="-1" strike="noStrike">
-                <a:latin typeface="Arial"/>
-              </a:rPr>
-              <a:t>d</a:t>
-            </a:r>
-            <a:r>
-              <a:rPr b="0" lang="en-US" sz="4400" spc="-1" strike="noStrike">
-                <a:latin typeface="Arial"/>
-              </a:rPr>
-              <a:t>i</a:t>
-            </a:r>
-            <a:r>
-              <a:rPr b="0" lang="en-US" sz="4400" spc="-1" strike="noStrike">
-                <a:latin typeface="Arial"/>
-              </a:rPr>
-              <a:t>t </a:t>
-            </a:r>
-            <a:r>
-              <a:rPr b="0" lang="en-US" sz="4400" spc="-1" strike="noStrike">
-                <a:latin typeface="Arial"/>
-              </a:rPr>
-              <a:t>t</a:t>
-            </a:r>
-            <a:r>
-              <a:rPr b="0" lang="en-US" sz="4400" spc="-1" strike="noStrike">
-                <a:latin typeface="Arial"/>
-              </a:rPr>
-              <a:t>h</a:t>
-            </a:r>
-            <a:r>
-              <a:rPr b="0" lang="en-US" sz="4400" spc="-1" strike="noStrike">
-                <a:latin typeface="Arial"/>
-              </a:rPr>
-              <a:t>e</a:t>
-            </a:r>
-            <a:r>
-              <a:rPr b="0" lang="en-US" sz="4400" spc="-1" strike="noStrike">
-                <a:latin typeface="Arial"/>
-              </a:rPr>
-              <a:t> </a:t>
-            </a:r>
-            <a:r>
-              <a:rPr b="0" lang="en-US" sz="4400" spc="-1" strike="noStrike">
-                <a:latin typeface="Arial"/>
-              </a:rPr>
-              <a:t>t</a:t>
-            </a:r>
-            <a:r>
-              <a:rPr b="0" lang="en-US" sz="4400" spc="-1" strike="noStrike">
-                <a:latin typeface="Arial"/>
-              </a:rPr>
-              <a:t>i</a:t>
-            </a:r>
-            <a:r>
-              <a:rPr b="0" lang="en-US" sz="4400" spc="-1" strike="noStrike">
-                <a:latin typeface="Arial"/>
-              </a:rPr>
-              <a:t>t</a:t>
-            </a:r>
-            <a:r>
-              <a:rPr b="0" lang="en-US" sz="4400" spc="-1" strike="noStrike">
-                <a:latin typeface="Arial"/>
-              </a:rPr>
-              <a:t>l</a:t>
-            </a:r>
-            <a:r>
-              <a:rPr b="0" lang="en-US" sz="4400" spc="-1" strike="noStrike">
-                <a:latin typeface="Arial"/>
-              </a:rPr>
-              <a:t>e</a:t>
-            </a:r>
-            <a:r>
-              <a:rPr b="0" lang="en-US" sz="4400" spc="-1" strike="noStrike">
-                <a:latin typeface="Arial"/>
-              </a:rPr>
-              <a:t> </a:t>
-            </a:r>
-            <a:r>
-              <a:rPr b="0" lang="en-US" sz="4400" spc="-1" strike="noStrike">
-                <a:latin typeface="Arial"/>
-              </a:rPr>
-              <a:t>t</a:t>
-            </a:r>
-            <a:r>
-              <a:rPr b="0" lang="en-US" sz="4400" spc="-1" strike="noStrike">
-                <a:latin typeface="Arial"/>
-              </a:rPr>
-              <a:t>e</a:t>
-            </a:r>
-            <a:r>
-              <a:rPr b="0" lang="en-US" sz="4400" spc="-1" strike="noStrike">
-                <a:latin typeface="Arial"/>
-              </a:rPr>
-              <a:t>x</a:t>
-            </a:r>
-            <a:r>
-              <a:rPr b="0" lang="en-US" sz="4400" spc="-1" strike="noStrike">
-                <a:latin typeface="Arial"/>
-              </a:rPr>
-              <a:t>t </a:t>
-            </a:r>
-            <a:r>
-              <a:rPr b="0" lang="en-US" sz="4400" spc="-1" strike="noStrike">
-                <a:latin typeface="Arial"/>
-              </a:rPr>
-              <a:t>f</a:t>
-            </a:r>
-            <a:r>
-              <a:rPr b="0" lang="en-US" sz="4400" spc="-1" strike="noStrike">
-                <a:latin typeface="Arial"/>
-              </a:rPr>
-              <a:t>o</a:t>
-            </a:r>
-            <a:r>
-              <a:rPr b="0" lang="en-US" sz="4400" spc="-1" strike="noStrike">
-                <a:latin typeface="Arial"/>
-              </a:rPr>
-              <a:t>r</a:t>
-            </a:r>
-            <a:r>
-              <a:rPr b="0" lang="en-US" sz="4400" spc="-1" strike="noStrike">
-                <a:latin typeface="Arial"/>
-              </a:rPr>
-              <a:t>m</a:t>
-            </a:r>
-            <a:r>
-              <a:rPr b="0" lang="en-US" sz="4400" spc="-1" strike="noStrike">
-                <a:latin typeface="Arial"/>
-              </a:rPr>
-              <a:t>a</a:t>
-            </a:r>
-            <a:r>
-              <a:rPr b="0" lang="en-US" sz="4400" spc="-1" strike="noStrike">
-                <a:latin typeface="Arial"/>
-              </a:rPr>
-              <a:t>t</a:t>
+              <a:t>Click to edit the title text format</a:t>
             </a:r>
             <a:endParaRPr b="0" lang="en-US" sz="4400" spc="-1" strike="noStrike">
               <a:latin typeface="Arial"/>
@@ -5645,7 +5453,7 @@
         <p:spPr>
           <a:xfrm>
             <a:off x="3124080" y="6356520"/>
-            <a:ext cx="2859480" cy="329040"/>
+            <a:ext cx="2859120" cy="328680"/>
           </a:xfrm>
           <a:prstGeom prst="rect">
             <a:avLst/>
@@ -5710,7 +5518,7 @@
         <p:spPr>
           <a:xfrm>
             <a:off x="6553080" y="6356520"/>
-            <a:ext cx="2097720" cy="329040"/>
+            <a:ext cx="2097360" cy="328680"/>
           </a:xfrm>
           <a:prstGeom prst="rect">
             <a:avLst/>
@@ -5746,7 +5554,7 @@
               </a:lnSpc>
               <a:buNone/>
             </a:pPr>
-            <a:fld id="{09153393-2AD8-4546-9E5E-3AE3FD57E198}" type="slidenum">
+            <a:fld id="{37ECF1D8-06DE-4846-971B-3351D26072FF}" type="slidenum">
               <a:rPr b="0" lang="en-US" sz="1200" spc="-1" strike="noStrike">
                 <a:solidFill>
                   <a:srgbClr val="8b8b8b"/>
@@ -5775,7 +5583,7 @@
         <p:spPr>
           <a:xfrm>
             <a:off x="457200" y="6356520"/>
-            <a:ext cx="2097720" cy="329040"/>
+            <a:ext cx="2097360" cy="328680"/>
           </a:xfrm>
           <a:prstGeom prst="rect">
             <a:avLst/>
@@ -6085,7 +5893,7 @@
         <p:spPr>
           <a:xfrm>
             <a:off x="0" y="2130480"/>
-            <a:ext cx="9127800" cy="1433880"/>
+            <a:ext cx="9127440" cy="1433520"/>
           </a:xfrm>
           <a:prstGeom prst="rect">
             <a:avLst/>
@@ -6137,7 +5945,7 @@
         <p:spPr>
           <a:xfrm>
             <a:off x="1371600" y="4563360"/>
-            <a:ext cx="6364800" cy="658800"/>
+            <a:ext cx="6364440" cy="658440"/>
           </a:xfrm>
           <a:prstGeom prst="rect">
             <a:avLst/>
@@ -6193,7 +6001,7 @@
         <p:spPr>
           <a:xfrm>
             <a:off x="4212000" y="3645000"/>
-            <a:ext cx="905760" cy="876960"/>
+            <a:ext cx="905400" cy="876600"/>
           </a:xfrm>
           <a:prstGeom prst="rect">
             <a:avLst/>
@@ -6217,7 +6025,7 @@
         <p:txBody>
           <a:bodyPr/>
           <a:p>
-            <a:fld id="{75870684-7C2C-4FD6-8A0C-D4D5F7766AFC}" type="slidenum">
+            <a:fld id="{2D82EFC3-8210-4406-AD30-E9C7611015AF}" type="slidenum">
               <a:t>1</a:t>
             </a:fld>
           </a:p>
@@ -6237,9 +6045,9 @@
         <p:txBody>
           <a:bodyPr/>
           <a:p>
-            <a:fld id="{C01B5C08-8747-429E-A366-0949ED54C71D}" type="datetime1">
+            <a:fld id="{E944F80C-F48C-4E22-835F-C16CD66904F6}" type="datetime1">
               <a:rPr lang="en-US"/>
-              <a:t>05/30/2026</a:t>
+              <a:t>06/02/2026</a:t>
             </a:fld>
           </a:p>
         </p:txBody>
@@ -6287,7 +6095,7 @@
         <p:spPr>
           <a:xfrm>
             <a:off x="10080" y="0"/>
-            <a:ext cx="9127080" cy="728640"/>
+            <a:ext cx="9126720" cy="728280"/>
           </a:xfrm>
           <a:prstGeom prst="rect">
             <a:avLst/>
@@ -6347,7 +6155,7 @@
         <p:spPr>
           <a:xfrm>
             <a:off x="232200" y="1302120"/>
-            <a:ext cx="2273040" cy="1897920"/>
+            <a:ext cx="2272680" cy="1897560"/>
           </a:xfrm>
           <a:prstGeom prst="rect">
             <a:avLst/>
@@ -6503,7 +6311,7 @@
         <p:spPr>
           <a:xfrm>
             <a:off x="0" y="723600"/>
-            <a:ext cx="9124200" cy="324000"/>
+            <a:ext cx="9123840" cy="323640"/>
           </a:xfrm>
           <a:prstGeom prst="rect">
             <a:avLst/>
@@ -6569,7 +6377,7 @@
         <p:spPr>
           <a:xfrm>
             <a:off x="6553080" y="6356520"/>
-            <a:ext cx="2097720" cy="329040"/>
+            <a:ext cx="2097360" cy="328680"/>
           </a:xfrm>
           <a:prstGeom prst="rect">
             <a:avLst/>
@@ -6605,7 +6413,7 @@
               </a:lnSpc>
               <a:buNone/>
             </a:pPr>
-            <a:fld id="{9C90F01D-F864-40EC-BB93-20D56777E306}" type="slidenum">
+            <a:fld id="{562F4C94-49E0-446C-8E41-E0D652F27799}" type="slidenum">
               <a:rPr b="0" lang="en-US" sz="1200" spc="-1" strike="noStrike">
                 <a:solidFill>
                   <a:srgbClr val="8b8b8b"/>
@@ -6630,7 +6438,7 @@
         <p:spPr>
           <a:xfrm>
             <a:off x="8161560" y="5405040"/>
-            <a:ext cx="716040" cy="309600"/>
+            <a:ext cx="715680" cy="309240"/>
           </a:xfrm>
           <a:prstGeom prst="rect">
             <a:avLst/>
@@ -6673,7 +6481,7 @@
                 <a:latin typeface="Arial"/>
                 <a:ea typeface="DejaVu Sans"/>
               </a:rPr>
-              <a:t>3’</a:t>
+              <a:t>6’</a:t>
             </a:r>
             <a:endParaRPr b="0" lang="en-US" sz="1800" spc="-1" strike="noStrike">
               <a:latin typeface="Arial"/>
@@ -6688,9 +6496,9 @@
           <p:nvPr/>
         </p:nvSpPr>
         <p:spPr>
-          <a:xfrm>
-            <a:off x="8298000" y="5384880"/>
-            <a:ext cx="439560" cy="360"/>
+          <a:xfrm flipV="1">
+            <a:off x="8035200" y="5382720"/>
+            <a:ext cx="702000" cy="2160"/>
           </a:xfrm>
           <a:custGeom>
             <a:avLst/>
@@ -6739,7 +6547,7 @@
         <p:spPr>
           <a:xfrm>
             <a:off x="4628520" y="1896480"/>
-            <a:ext cx="3611880" cy="1918440"/>
+            <a:ext cx="3611520" cy="1918080"/>
           </a:xfrm>
           <a:prstGeom prst="rect">
             <a:avLst/>
@@ -6777,7 +6585,7 @@
         <p:spPr>
           <a:xfrm>
             <a:off x="4775040" y="4368960"/>
-            <a:ext cx="1854360" cy="507240"/>
+            <a:ext cx="1854000" cy="506880"/>
           </a:xfrm>
           <a:prstGeom prst="roundRect">
             <a:avLst>
@@ -6843,7 +6651,7 @@
         <p:spPr>
           <a:xfrm>
             <a:off x="4114800" y="3240000"/>
-            <a:ext cx="2341800" cy="535680"/>
+            <a:ext cx="2341440" cy="535320"/>
           </a:xfrm>
           <a:prstGeom prst="roundRect">
             <a:avLst>
@@ -6909,7 +6717,7 @@
         <p:spPr>
           <a:xfrm>
             <a:off x="6919920" y="2201400"/>
-            <a:ext cx="1150920" cy="315360"/>
+            <a:ext cx="1150560" cy="315000"/>
           </a:xfrm>
           <a:prstGeom prst="rect">
             <a:avLst/>
@@ -6969,7 +6777,7 @@
         <p:spPr>
           <a:xfrm>
             <a:off x="5226840" y="5198400"/>
-            <a:ext cx="716040" cy="309600"/>
+            <a:ext cx="715680" cy="309240"/>
           </a:xfrm>
           <a:prstGeom prst="rect">
             <a:avLst/>
@@ -7007,22 +6815,12 @@
             <a:r>
               <a:rPr b="0" lang="en-US" sz="1800" spc="-1" strike="noStrike">
                 <a:solidFill>
-                  <a:srgbClr val="ffffff"/>
-                </a:solidFill>
-                <a:latin typeface="Arial"/>
-                <a:ea typeface="DejaVu Sans"/>
-              </a:rPr>
-              <a:t>2</a:t>
-            </a:r>
-            <a:r>
-              <a:rPr b="0" lang="en-US" sz="1800" spc="-1" strike="noStrike">
-                <a:solidFill>
                   <a:srgbClr val="000000"/>
                 </a:solidFill>
                 <a:latin typeface="Arial"/>
                 <a:ea typeface="DejaVu Sans"/>
               </a:rPr>
-              <a:t>15’</a:t>
+              <a:t>18’</a:t>
             </a:r>
             <a:r>
               <a:rPr b="0" lang="en-US" sz="1800" spc="-1" strike="noStrike">
@@ -7048,8 +6846,8 @@
         </p:nvSpPr>
         <p:spPr>
           <a:xfrm flipH="1">
-            <a:off x="8612640" y="3804840"/>
-            <a:ext cx="360" cy="538560"/>
+            <a:off x="8611920" y="3804840"/>
+            <a:ext cx="360" cy="538200"/>
           </a:xfrm>
           <a:custGeom>
             <a:avLst/>
@@ -7098,7 +6896,7 @@
         <p:spPr>
           <a:xfrm>
             <a:off x="8134200" y="3804840"/>
-            <a:ext cx="716040" cy="309600"/>
+            <a:ext cx="715680" cy="309240"/>
           </a:xfrm>
           <a:prstGeom prst="rect">
             <a:avLst/>
@@ -7158,7 +6956,7 @@
         <p:spPr>
           <a:xfrm>
             <a:off x="8619120" y="5012280"/>
-            <a:ext cx="360" cy="518400"/>
+            <a:ext cx="360" cy="518040"/>
           </a:xfrm>
           <a:custGeom>
             <a:avLst/>
@@ -7206,8 +7004,8 @@
         </p:nvSpPr>
         <p:spPr>
           <a:xfrm>
-            <a:off x="7086600" y="4343400"/>
-            <a:ext cx="1164960" cy="685440"/>
+            <a:off x="7099200" y="4343400"/>
+            <a:ext cx="936000" cy="685080"/>
           </a:xfrm>
           <a:prstGeom prst="rect">
             <a:avLst/>
@@ -7245,7 +7043,7 @@
         <p:spPr>
           <a:xfrm>
             <a:off x="4628520" y="3838320"/>
-            <a:ext cx="4074480" cy="1670040"/>
+            <a:ext cx="4074120" cy="1669680"/>
           </a:xfrm>
           <a:prstGeom prst="rect">
             <a:avLst/>
@@ -7281,7 +7079,7 @@
         <p:spPr>
           <a:xfrm>
             <a:off x="8613360" y="4343400"/>
-            <a:ext cx="360" cy="724680"/>
+            <a:ext cx="360" cy="724320"/>
           </a:xfrm>
           <a:custGeom>
             <a:avLst/>
@@ -7330,7 +7128,7 @@
         <p:spPr>
           <a:xfrm>
             <a:off x="8199000" y="4464360"/>
-            <a:ext cx="716040" cy="309600"/>
+            <a:ext cx="715680" cy="309240"/>
           </a:xfrm>
           <a:prstGeom prst="rect">
             <a:avLst/>
@@ -7373,7 +7171,7 @@
                 <a:latin typeface="Arial"/>
                 <a:ea typeface="DejaVu Sans"/>
               </a:rPr>
-              <a:t>6’</a:t>
+              <a:t>8’</a:t>
             </a:r>
             <a:r>
               <a:rPr b="0" lang="en-US" sz="1800" spc="-1" strike="noStrike">
@@ -7399,8 +7197,8 @@
         </p:nvSpPr>
         <p:spPr>
           <a:xfrm flipV="1">
-            <a:off x="7086600" y="5379120"/>
-            <a:ext cx="1164960" cy="4320"/>
+            <a:off x="7099200" y="5378400"/>
+            <a:ext cx="936000" cy="3960"/>
           </a:xfrm>
           <a:custGeom>
             <a:avLst/>
@@ -7449,7 +7247,7 @@
         <p:spPr>
           <a:xfrm>
             <a:off x="7445160" y="5249160"/>
-            <a:ext cx="716040" cy="309600"/>
+            <a:ext cx="715680" cy="309240"/>
           </a:xfrm>
           <a:prstGeom prst="rect">
             <a:avLst/>
@@ -7509,7 +7307,7 @@
         <p:spPr>
           <a:xfrm>
             <a:off x="4628520" y="5576760"/>
-            <a:ext cx="3600360" cy="366480"/>
+            <a:ext cx="3600000" cy="366120"/>
           </a:xfrm>
           <a:prstGeom prst="rect">
             <a:avLst/>
@@ -7573,7 +7371,7 @@
         <p:spPr>
           <a:xfrm>
             <a:off x="6183720" y="5997960"/>
-            <a:ext cx="902520" cy="315360"/>
+            <a:ext cx="902160" cy="315000"/>
           </a:xfrm>
           <a:prstGeom prst="rect">
             <a:avLst/>
@@ -7642,8 +7440,8 @@
         </p:nvSpPr>
         <p:spPr>
           <a:xfrm>
-            <a:off x="7373520" y="4522320"/>
-            <a:ext cx="806040" cy="309600"/>
+            <a:off x="7157520" y="4522320"/>
+            <a:ext cx="805680" cy="309240"/>
           </a:xfrm>
           <a:prstGeom prst="rect">
             <a:avLst/>
@@ -7703,7 +7501,7 @@
         <p:spPr>
           <a:xfrm>
             <a:off x="2562840" y="1159560"/>
-            <a:ext cx="590400" cy="695520"/>
+            <a:ext cx="590040" cy="695160"/>
           </a:xfrm>
           <a:prstGeom prst="rect">
             <a:avLst/>
@@ -7741,7 +7539,7 @@
         <p:spPr>
           <a:xfrm>
             <a:off x="2540520" y="1209960"/>
-            <a:ext cx="716040" cy="309600"/>
+            <a:ext cx="715680" cy="309240"/>
           </a:xfrm>
           <a:prstGeom prst="rect">
             <a:avLst/>
@@ -7834,7 +7632,7 @@
         <p:spPr>
           <a:xfrm>
             <a:off x="3297240" y="1179000"/>
-            <a:ext cx="360" cy="685800"/>
+            <a:ext cx="360" cy="685440"/>
           </a:xfrm>
           <a:custGeom>
             <a:avLst/>
@@ -7883,7 +7681,7 @@
         <p:spPr>
           <a:xfrm>
             <a:off x="3058200" y="1255320"/>
-            <a:ext cx="716040" cy="309600"/>
+            <a:ext cx="715680" cy="309240"/>
           </a:xfrm>
           <a:prstGeom prst="rect">
             <a:avLst/>
@@ -7953,7 +7751,7 @@
         <p:spPr>
           <a:xfrm>
             <a:off x="2575800" y="1962360"/>
-            <a:ext cx="601200" cy="360"/>
+            <a:ext cx="600840" cy="360"/>
           </a:xfrm>
           <a:custGeom>
             <a:avLst/>
@@ -8002,7 +7800,7 @@
         <p:spPr>
           <a:xfrm>
             <a:off x="2568600" y="1917000"/>
-            <a:ext cx="716040" cy="309600"/>
+            <a:ext cx="715680" cy="309240"/>
           </a:xfrm>
           <a:prstGeom prst="rect">
             <a:avLst/>
@@ -8062,7 +7860,7 @@
         <p:spPr>
           <a:xfrm>
             <a:off x="4114800" y="2624760"/>
-            <a:ext cx="2285280" cy="535680"/>
+            <a:ext cx="2284920" cy="535320"/>
           </a:xfrm>
           <a:prstGeom prst="roundRect">
             <a:avLst>
@@ -8128,7 +7926,7 @@
         <p:spPr>
           <a:xfrm>
             <a:off x="4114800" y="2031840"/>
-            <a:ext cx="2262960" cy="535680"/>
+            <a:ext cx="2262600" cy="535320"/>
           </a:xfrm>
           <a:prstGeom prst="roundRect">
             <a:avLst>
@@ -8194,7 +7992,7 @@
         <p:spPr>
           <a:xfrm>
             <a:off x="2562840" y="1143000"/>
-            <a:ext cx="6580800" cy="5714280"/>
+            <a:ext cx="6580440" cy="5713920"/>
           </a:xfrm>
           <a:prstGeom prst="rect">
             <a:avLst/>
@@ -8230,7 +8028,7 @@
         <p:spPr>
           <a:xfrm>
             <a:off x="4572000" y="6171840"/>
-            <a:ext cx="4255200" cy="360"/>
+            <a:ext cx="4254840" cy="360"/>
           </a:xfrm>
           <a:custGeom>
             <a:avLst/>
@@ -8279,7 +8077,7 @@
         <p:spPr>
           <a:xfrm>
             <a:off x="8703360" y="4464360"/>
-            <a:ext cx="716040" cy="309600"/>
+            <a:ext cx="715680" cy="309240"/>
           </a:xfrm>
           <a:prstGeom prst="rect">
             <a:avLst/>
@@ -8359,7 +8157,7 @@
         <p:spPr>
           <a:xfrm>
             <a:off x="8804880" y="3886200"/>
-            <a:ext cx="360" cy="1503360"/>
+            <a:ext cx="360" cy="1503000"/>
           </a:xfrm>
           <a:custGeom>
             <a:avLst/>
@@ -8408,7 +8206,7 @@
         <p:spPr>
           <a:xfrm>
             <a:off x="8134200" y="5029200"/>
-            <a:ext cx="716040" cy="309600"/>
+            <a:ext cx="715680" cy="309240"/>
           </a:xfrm>
           <a:prstGeom prst="rect">
             <a:avLst/>
@@ -8468,7 +8266,7 @@
         <p:spPr>
           <a:xfrm>
             <a:off x="-1143000" y="3299760"/>
-            <a:ext cx="4571640" cy="2872080"/>
+            <a:ext cx="4571280" cy="2871720"/>
           </a:xfrm>
           <a:prstGeom prst="rect">
             <a:avLst/>
@@ -8498,7 +8296,7 @@
         <p:spPr>
           <a:xfrm>
             <a:off x="-1086120" y="3528360"/>
-            <a:ext cx="3600360" cy="510120"/>
+            <a:ext cx="3600000" cy="509760"/>
           </a:xfrm>
           <a:prstGeom prst="rect">
             <a:avLst/>
@@ -8562,7 +8360,7 @@
         <p:spPr>
           <a:xfrm>
             <a:off x="2971800" y="4220640"/>
-            <a:ext cx="463320" cy="924840"/>
+            <a:ext cx="462960" cy="924480"/>
           </a:xfrm>
           <a:prstGeom prst="rect">
             <a:avLst/>
@@ -8600,7 +8398,7 @@
         <p:spPr>
           <a:xfrm>
             <a:off x="2063880" y="4825080"/>
-            <a:ext cx="1173240" cy="309600"/>
+            <a:ext cx="1172880" cy="309240"/>
           </a:xfrm>
           <a:prstGeom prst="rect">
             <a:avLst/>
@@ -8724,7 +8522,7 @@
         <p:spPr>
           <a:xfrm>
             <a:off x="3547440" y="4343400"/>
-            <a:ext cx="716040" cy="309600"/>
+            <a:ext cx="715680" cy="309240"/>
           </a:xfrm>
           <a:prstGeom prst="rect">
             <a:avLst/>
@@ -8784,7 +8582,7 @@
         <p:spPr>
           <a:xfrm>
             <a:off x="3524760" y="4240440"/>
-            <a:ext cx="22320" cy="925200"/>
+            <a:ext cx="21960" cy="924840"/>
           </a:xfrm>
           <a:custGeom>
             <a:avLst/>
@@ -8833,7 +8631,7 @@
         <p:spPr>
           <a:xfrm>
             <a:off x="2923560" y="5299920"/>
-            <a:ext cx="505080" cy="360"/>
+            <a:ext cx="504720" cy="360"/>
           </a:xfrm>
           <a:custGeom>
             <a:avLst/>
@@ -8882,7 +8680,7 @@
         <p:spPr>
           <a:xfrm>
             <a:off x="2808000" y="5290560"/>
-            <a:ext cx="716040" cy="309600"/>
+            <a:ext cx="715680" cy="309240"/>
           </a:xfrm>
           <a:prstGeom prst="rect">
             <a:avLst/>
@@ -8942,7 +8740,7 @@
         <p:spPr>
           <a:xfrm>
             <a:off x="3524760" y="5284440"/>
-            <a:ext cx="22320" cy="925200"/>
+            <a:ext cx="21960" cy="924840"/>
           </a:xfrm>
           <a:custGeom>
             <a:avLst/>
@@ -8991,7 +8789,7 @@
         <p:spPr>
           <a:xfrm>
             <a:off x="3627000" y="5486400"/>
-            <a:ext cx="716040" cy="309600"/>
+            <a:ext cx="715680" cy="309240"/>
           </a:xfrm>
           <a:prstGeom prst="rect">
             <a:avLst/>
@@ -9051,7 +8849,7 @@
         <p:spPr>
           <a:xfrm>
             <a:off x="4673520" y="5379120"/>
-            <a:ext cx="2413080" cy="360"/>
+            <a:ext cx="2412720" cy="360"/>
           </a:xfrm>
           <a:custGeom>
             <a:avLst/>
@@ -9100,7 +8898,7 @@
         <p:spPr>
           <a:xfrm>
             <a:off x="3549600" y="1143000"/>
-            <a:ext cx="565200" cy="695520"/>
+            <a:ext cx="564840" cy="695160"/>
           </a:xfrm>
           <a:prstGeom prst="rect">
             <a:avLst/>
@@ -9138,7 +8936,7 @@
         <p:spPr>
           <a:xfrm>
             <a:off x="3488760" y="1204920"/>
-            <a:ext cx="716040" cy="309600"/>
+            <a:ext cx="715680" cy="309240"/>
           </a:xfrm>
           <a:prstGeom prst="rect">
             <a:avLst/>
@@ -9231,7 +9029,7 @@
         <p:spPr>
           <a:xfrm>
             <a:off x="3560040" y="1957320"/>
-            <a:ext cx="601200" cy="360"/>
+            <a:ext cx="600840" cy="360"/>
           </a:xfrm>
           <a:custGeom>
             <a:avLst/>
@@ -9280,7 +9078,7 @@
         <p:spPr>
           <a:xfrm>
             <a:off x="3516840" y="1911960"/>
-            <a:ext cx="716040" cy="309600"/>
+            <a:ext cx="715680" cy="309240"/>
           </a:xfrm>
           <a:prstGeom prst="rect">
             <a:avLst/>
@@ -9345,9 +9143,9 @@
         <p:txBody>
           <a:bodyPr/>
           <a:p>
-            <a:fld id="{A3F44546-7EF4-4FC6-A4C4-86EB221C50FC}" type="datetime1">
+            <a:fld id="{884536B2-6EBB-4D27-A686-353913AC1F56}" type="datetime1">
               <a:rPr lang="en-US"/>
-              <a:t>05/30/2026</a:t>
+              <a:t>06/02/2026</a:t>
             </a:fld>
           </a:p>
         </p:txBody>
@@ -9395,7 +9193,7 @@
         <p:spPr>
           <a:xfrm>
             <a:off x="0" y="2130480"/>
-            <a:ext cx="9108000" cy="1433880"/>
+            <a:ext cx="9107640" cy="1433520"/>
           </a:xfrm>
           <a:prstGeom prst="rect">
             <a:avLst/>
@@ -9456,7 +9254,7 @@
         <p:txBody>
           <a:bodyPr/>
           <a:p>
-            <a:fld id="{D68E9388-836B-4D60-A0DC-1C0F006F9732}" type="slidenum">
+            <a:fld id="{C7618B61-305D-4D40-9C01-C3C3A5EF112C}" type="slidenum">
               <a:t>3</a:t>
             </a:fld>
           </a:p>
@@ -9476,9 +9274,9 @@
         <p:txBody>
           <a:bodyPr/>
           <a:p>
-            <a:fld id="{6490C093-6C38-4EB1-86A4-9529578C0C67}" type="datetime1">
+            <a:fld id="{20EBDBEF-496A-44B8-8020-20A73D453169}" type="datetime1">
               <a:rPr lang="en-US"/>
-              <a:t>05/30/2026</a:t>
+              <a:t>06/02/2026</a:t>
             </a:fld>
           </a:p>
         </p:txBody>

--- a/Palo_Alto_2581/000_PaloAlto_Shed.pptx
+++ b/Palo_Alto_2581/000_PaloAlto_Shed.pptx
@@ -295,7 +295,7 @@
             <a:pPr algn="r">
               <a:buNone/>
             </a:pPr>
-            <a:fld id="{83AAAD25-D007-4B95-8631-42321775B971}" type="slidenum">
+            <a:fld id="{4CC143C8-3E47-41BB-BD00-C293E228E357}" type="slidenum">
               <a:rPr b="0" lang="en-US" sz="1400" spc="-1" strike="noStrike">
                 <a:latin typeface="Times New Roman"/>
               </a:rPr>
@@ -332,7 +332,7 @@
       </p:grpSpPr>
       <p:sp>
         <p:nvSpPr>
-          <p:cNvPr id="147" name="PlaceHolder 1"/>
+          <p:cNvPr id="156" name="PlaceHolder 1"/>
           <p:cNvSpPr>
             <a:spLocks noGrp="1"/>
           </p:cNvSpPr>
@@ -343,7 +343,7 @@
         <p:spPr>
           <a:xfrm>
             <a:off x="1143000" y="685800"/>
-            <a:ext cx="4536000" cy="3393000"/>
+            <a:ext cx="4535640" cy="3392640"/>
           </a:xfrm>
           <a:prstGeom prst="rect">
             <a:avLst/>
@@ -355,7 +355,7 @@
       </p:sp>
       <p:sp>
         <p:nvSpPr>
-          <p:cNvPr id="148" name="PlaceHolder 2"/>
+          <p:cNvPr id="157" name="PlaceHolder 2"/>
           <p:cNvSpPr>
             <a:spLocks noGrp="1"/>
           </p:cNvSpPr>
@@ -366,7 +366,7 @@
         <p:spPr>
           <a:xfrm>
             <a:off x="685800" y="4343400"/>
-            <a:ext cx="5450040" cy="4078440"/>
+            <a:ext cx="5449680" cy="4078080"/>
           </a:xfrm>
           <a:prstGeom prst="rect">
             <a:avLst/>
@@ -389,7 +389,7 @@
       </p:sp>
       <p:sp>
         <p:nvSpPr>
-          <p:cNvPr id="149" name="PlaceHolder 3"/>
+          <p:cNvPr id="158" name="PlaceHolder 3"/>
           <p:cNvSpPr>
             <a:spLocks noGrp="1"/>
           </p:cNvSpPr>
@@ -400,7 +400,7 @@
         <p:spPr>
           <a:xfrm>
             <a:off x="3884760" y="8685360"/>
-            <a:ext cx="2935440" cy="420840"/>
+            <a:ext cx="2935080" cy="420480"/>
           </a:xfrm>
           <a:prstGeom prst="rect">
             <a:avLst/>
@@ -436,7 +436,7 @@
               </a:lnSpc>
               <a:buNone/>
             </a:pPr>
-            <a:fld id="{0CF1A799-B786-43B2-B984-1B5D6509E6A6}" type="slidenum">
+            <a:fld id="{FFBE8C50-E74E-4DC2-8FCE-E59EEACA5EC6}" type="slidenum">
               <a:rPr b="0" lang="en-US" sz="1200" spc="-1" strike="noStrike">
                 <a:solidFill>
                   <a:srgbClr val="000000"/>
@@ -508,7 +508,7 @@
         <p:txBody>
           <a:bodyPr/>
           <a:p>
-            <a:fld id="{F2D201CF-6EF7-42EE-A0A8-3093DA84730B}" type="slidenum">
+            <a:fld id="{1F99A7ED-DBD9-4737-A9FD-D463D8056166}" type="slidenum">
               <a:t>&lt;#&gt;</a:t>
             </a:fld>
           </a:p>
@@ -696,7 +696,7 @@
         <p:txBody>
           <a:bodyPr/>
           <a:p>
-            <a:fld id="{93703FB9-514A-46E4-8112-A3E7EAAF6D76}" type="slidenum">
+            <a:fld id="{37251CA0-40D9-4D2C-8A6D-CA0423437226}" type="slidenum">
               <a:t>&lt;#&gt;</a:t>
             </a:fld>
           </a:p>
@@ -952,7 +952,7 @@
         <p:txBody>
           <a:bodyPr/>
           <a:p>
-            <a:fld id="{3292A141-4C3A-47A5-8509-74ED62772AA5}" type="slidenum">
+            <a:fld id="{862C1B9E-2D0D-466B-B978-601905295F7D}" type="slidenum">
               <a:t>&lt;#&gt;</a:t>
             </a:fld>
           </a:p>
@@ -1276,7 +1276,7 @@
         <p:txBody>
           <a:bodyPr/>
           <a:p>
-            <a:fld id="{241A2AF3-EE2A-4EB3-9F3D-42AB55BCD7EF}" type="slidenum">
+            <a:fld id="{88BB36E9-BC84-4BE0-9CD0-204DADB475D1}" type="slidenum">
               <a:t>&lt;#&gt;</a:t>
             </a:fld>
           </a:p>
@@ -1359,7 +1359,7 @@
         <p:txBody>
           <a:bodyPr/>
           <a:p>
-            <a:fld id="{AE16EBAB-6E4B-4714-8472-C9AA0F123DB0}" type="slidenum">
+            <a:fld id="{8DA8AB85-40B2-4BEC-B16F-C6AEAFAC0328}" type="slidenum">
               <a:t>&lt;#&gt;</a:t>
             </a:fld>
           </a:p>
@@ -1516,7 +1516,7 @@
         <p:txBody>
           <a:bodyPr/>
           <a:p>
-            <a:fld id="{1B61D644-EB09-4430-8348-98FDC04BF2D1}" type="slidenum">
+            <a:fld id="{072E00BA-2500-4125-8363-1CE84CE1BA13}" type="slidenum">
               <a:t>&lt;#&gt;</a:t>
             </a:fld>
           </a:p>
@@ -1670,7 +1670,7 @@
         <p:txBody>
           <a:bodyPr/>
           <a:p>
-            <a:fld id="{48DD314D-AE1B-44F1-8595-F8A5676E0188}" type="slidenum">
+            <a:fld id="{5C170682-E3FC-4A28-99DD-8F2647776D6F}" type="slidenum">
               <a:t>&lt;#&gt;</a:t>
             </a:fld>
           </a:p>
@@ -1858,7 +1858,7 @@
         <p:txBody>
           <a:bodyPr/>
           <a:p>
-            <a:fld id="{4DC3B1B7-3DAD-49FD-AA35-469BF56F1F5E}" type="slidenum">
+            <a:fld id="{E2C7CB51-BDD8-4DC1-8D41-1E8626E43F1B}" type="slidenum">
               <a:t>&lt;#&gt;</a:t>
             </a:fld>
           </a:p>
@@ -1978,7 +1978,7 @@
         <p:txBody>
           <a:bodyPr/>
           <a:p>
-            <a:fld id="{07876148-0068-4834-99EF-B309C3DA843E}" type="slidenum">
+            <a:fld id="{B25D7CEA-8011-4601-A319-8D17172AC2E4}" type="slidenum">
               <a:t>&lt;#&gt;</a:t>
             </a:fld>
           </a:p>
@@ -2098,7 +2098,7 @@
         <p:txBody>
           <a:bodyPr/>
           <a:p>
-            <a:fld id="{6FBA3CB1-71BC-4F2C-9198-7EB52DA73BF1}" type="slidenum">
+            <a:fld id="{9FCE206E-65EB-426E-9696-C6DF7DDC4A3D}" type="slidenum">
               <a:t>&lt;#&gt;</a:t>
             </a:fld>
           </a:p>
@@ -2320,7 +2320,7 @@
         <p:txBody>
           <a:bodyPr/>
           <a:p>
-            <a:fld id="{4FE65B2B-7FD7-4D97-B857-5DBC45CCD048}" type="slidenum">
+            <a:fld id="{0F21A2A1-17C5-47A8-B018-197CE4729363}" type="slidenum">
               <a:t>&lt;#&gt;</a:t>
             </a:fld>
           </a:p>
@@ -2477,7 +2477,7 @@
         <p:txBody>
           <a:bodyPr/>
           <a:p>
-            <a:fld id="{373BA665-3D7B-4D88-9BAE-E829FD8BE908}" type="slidenum">
+            <a:fld id="{F8D1DC0B-CFA9-478B-8367-468B868C7598}" type="slidenum">
               <a:t>&lt;#&gt;</a:t>
             </a:fld>
           </a:p>
@@ -2699,7 +2699,7 @@
         <p:txBody>
           <a:bodyPr/>
           <a:p>
-            <a:fld id="{E4008AF8-D30B-4035-8A8E-956A1C3CDC87}" type="slidenum">
+            <a:fld id="{6C615ED9-4875-498E-A698-0F28D86B3AF3}" type="slidenum">
               <a:t>&lt;#&gt;</a:t>
             </a:fld>
           </a:p>
@@ -2921,7 +2921,7 @@
         <p:txBody>
           <a:bodyPr/>
           <a:p>
-            <a:fld id="{B9772DAC-BB2B-46DB-9832-83D078A672DF}" type="slidenum">
+            <a:fld id="{C9DB0513-30D0-41BE-BB4A-E93DDFFA405A}" type="slidenum">
               <a:t>&lt;#&gt;</a:t>
             </a:fld>
           </a:p>
@@ -3109,7 +3109,7 @@
         <p:txBody>
           <a:bodyPr/>
           <a:p>
-            <a:fld id="{48740A9E-4FF1-4513-B9EB-B2B6435E569B}" type="slidenum">
+            <a:fld id="{BA7151DE-02BC-44E7-82ED-97B2C38181FC}" type="slidenum">
               <a:t>&lt;#&gt;</a:t>
             </a:fld>
           </a:p>
@@ -3365,7 +3365,7 @@
         <p:txBody>
           <a:bodyPr/>
           <a:p>
-            <a:fld id="{68ACF28C-E5BE-4E4D-940C-0C89BCB5F59F}" type="slidenum">
+            <a:fld id="{EEA4D4D6-7037-4150-9C4D-0F7AB80FE469}" type="slidenum">
               <a:t>&lt;#&gt;</a:t>
             </a:fld>
           </a:p>
@@ -3689,7 +3689,7 @@
         <p:txBody>
           <a:bodyPr/>
           <a:p>
-            <a:fld id="{967D76C2-5C87-4443-9413-841C4218CA88}" type="slidenum">
+            <a:fld id="{4E54A41A-12E6-4A00-8179-8319E83242AA}" type="slidenum">
               <a:t>&lt;#&gt;</a:t>
             </a:fld>
           </a:p>
@@ -3843,7 +3843,7 @@
         <p:txBody>
           <a:bodyPr/>
           <a:p>
-            <a:fld id="{1F8AFAB7-3BD3-4E3B-B383-ABE3C9526CE3}" type="slidenum">
+            <a:fld id="{40B3E56E-72D8-4628-B599-9A3C2B7C76E7}" type="slidenum">
               <a:t>&lt;#&gt;</a:t>
             </a:fld>
           </a:p>
@@ -4031,7 +4031,7 @@
         <p:txBody>
           <a:bodyPr/>
           <a:p>
-            <a:fld id="{1DCD7926-AB23-49C3-881F-383E2BB4D607}" type="slidenum">
+            <a:fld id="{0352CEB8-4F85-4E23-86D3-80FEBA7EC03E}" type="slidenum">
               <a:t>&lt;#&gt;</a:t>
             </a:fld>
           </a:p>
@@ -4151,7 +4151,7 @@
         <p:txBody>
           <a:bodyPr/>
           <a:p>
-            <a:fld id="{D2106891-AD31-4B55-8EAD-8C9AF0BECD2B}" type="slidenum">
+            <a:fld id="{7FBF4826-6136-43F3-B046-E7BB2430BAE7}" type="slidenum">
               <a:t>&lt;#&gt;</a:t>
             </a:fld>
           </a:p>
@@ -4271,7 +4271,7 @@
         <p:txBody>
           <a:bodyPr/>
           <a:p>
-            <a:fld id="{0746BA0E-B265-436D-AC59-3CC510B9AD27}" type="slidenum">
+            <a:fld id="{65EC9E94-3F4A-4D2E-B181-68F574E3021B}" type="slidenum">
               <a:t>&lt;#&gt;</a:t>
             </a:fld>
           </a:p>
@@ -4493,7 +4493,7 @@
         <p:txBody>
           <a:bodyPr/>
           <a:p>
-            <a:fld id="{3D9FA839-C258-4868-B97D-D994166681E1}" type="slidenum">
+            <a:fld id="{8DE379D3-3237-4DB8-9CD1-92D1AF35792B}" type="slidenum">
               <a:t>&lt;#&gt;</a:t>
             </a:fld>
           </a:p>
@@ -4715,7 +4715,7 @@
         <p:txBody>
           <a:bodyPr/>
           <a:p>
-            <a:fld id="{9707533C-2F36-4B6B-A4C1-339ADF4D8646}" type="slidenum">
+            <a:fld id="{DA5A8CA7-7109-4A19-817C-ED9A58357FF6}" type="slidenum">
               <a:t>&lt;#&gt;</a:t>
             </a:fld>
           </a:p>
@@ -4937,7 +4937,7 @@
         <p:txBody>
           <a:bodyPr/>
           <a:p>
-            <a:fld id="{FD590703-9966-4134-AE2A-3B9F0FA01C08}" type="slidenum">
+            <a:fld id="{BA24FD76-EDC0-465E-B0E5-FE81ED5684AA}" type="slidenum">
               <a:t>&lt;#&gt;</a:t>
             </a:fld>
           </a:p>
@@ -5006,7 +5006,7 @@
         <p:spPr>
           <a:xfrm>
             <a:off x="3124080" y="6356520"/>
-            <a:ext cx="2859120" cy="328680"/>
+            <a:ext cx="2858760" cy="328320"/>
           </a:xfrm>
           <a:prstGeom prst="rect">
             <a:avLst/>
@@ -5071,7 +5071,7 @@
         <p:spPr>
           <a:xfrm>
             <a:off x="6553080" y="6356520"/>
-            <a:ext cx="2097360" cy="328680"/>
+            <a:ext cx="2097000" cy="328320"/>
           </a:xfrm>
           <a:prstGeom prst="rect">
             <a:avLst/>
@@ -5107,7 +5107,7 @@
               </a:lnSpc>
               <a:buNone/>
             </a:pPr>
-            <a:fld id="{7E509075-E747-4E94-82B1-2437BFEA8686}" type="slidenum">
+            <a:fld id="{411416EB-62B5-4904-9D76-B6AE93847B5E}" type="slidenum">
               <a:rPr b="0" lang="en-US" sz="1200" spc="-1" strike="noStrike">
                 <a:solidFill>
                   <a:srgbClr val="8b8b8b"/>
@@ -5136,7 +5136,7 @@
         <p:spPr>
           <a:xfrm>
             <a:off x="457200" y="6356520"/>
-            <a:ext cx="2097360" cy="328680"/>
+            <a:ext cx="2097000" cy="328320"/>
           </a:xfrm>
           <a:prstGeom prst="rect">
             <a:avLst/>
@@ -5453,7 +5453,7 @@
         <p:spPr>
           <a:xfrm>
             <a:off x="3124080" y="6356520"/>
-            <a:ext cx="2859120" cy="328680"/>
+            <a:ext cx="2858760" cy="328320"/>
           </a:xfrm>
           <a:prstGeom prst="rect">
             <a:avLst/>
@@ -5518,7 +5518,7 @@
         <p:spPr>
           <a:xfrm>
             <a:off x="6553080" y="6356520"/>
-            <a:ext cx="2097360" cy="328680"/>
+            <a:ext cx="2097000" cy="328320"/>
           </a:xfrm>
           <a:prstGeom prst="rect">
             <a:avLst/>
@@ -5554,7 +5554,7 @@
               </a:lnSpc>
               <a:buNone/>
             </a:pPr>
-            <a:fld id="{37ECF1D8-06DE-4846-971B-3351D26072FF}" type="slidenum">
+            <a:fld id="{1EDEC2B8-5819-4D35-97E0-FB0DAFA9A0A0}" type="slidenum">
               <a:rPr b="0" lang="en-US" sz="1200" spc="-1" strike="noStrike">
                 <a:solidFill>
                   <a:srgbClr val="8b8b8b"/>
@@ -5583,7 +5583,7 @@
         <p:spPr>
           <a:xfrm>
             <a:off x="457200" y="6356520"/>
-            <a:ext cx="2097360" cy="328680"/>
+            <a:ext cx="2097000" cy="328320"/>
           </a:xfrm>
           <a:prstGeom prst="rect">
             <a:avLst/>
@@ -5893,7 +5893,7 @@
         <p:spPr>
           <a:xfrm>
             <a:off x="0" y="2130480"/>
-            <a:ext cx="9127440" cy="1433520"/>
+            <a:ext cx="9127080" cy="1433160"/>
           </a:xfrm>
           <a:prstGeom prst="rect">
             <a:avLst/>
@@ -5945,7 +5945,7 @@
         <p:spPr>
           <a:xfrm>
             <a:off x="1371600" y="4563360"/>
-            <a:ext cx="6364440" cy="658440"/>
+            <a:ext cx="6364080" cy="658080"/>
           </a:xfrm>
           <a:prstGeom prst="rect">
             <a:avLst/>
@@ -6001,7 +6001,7 @@
         <p:spPr>
           <a:xfrm>
             <a:off x="4212000" y="3645000"/>
-            <a:ext cx="905400" cy="876600"/>
+            <a:ext cx="905040" cy="876240"/>
           </a:xfrm>
           <a:prstGeom prst="rect">
             <a:avLst/>
@@ -6025,7 +6025,7 @@
         <p:txBody>
           <a:bodyPr/>
           <a:p>
-            <a:fld id="{2D82EFC3-8210-4406-AD30-E9C7611015AF}" type="slidenum">
+            <a:fld id="{E24A0EBC-800E-41A8-BF92-C942C855C86E}" type="slidenum">
               <a:t>1</a:t>
             </a:fld>
           </a:p>
@@ -6045,9 +6045,9 @@
         <p:txBody>
           <a:bodyPr/>
           <a:p>
-            <a:fld id="{E944F80C-F48C-4E22-835F-C16CD66904F6}" type="datetime1">
+            <a:fld id="{13C731F1-8BA2-4311-A9FB-3E18ED557846}" type="datetime1">
               <a:rPr lang="en-US"/>
-              <a:t>06/02/2026</a:t>
+              <a:t>06/03/2026</a:t>
             </a:fld>
           </a:p>
         </p:txBody>
@@ -6095,7 +6095,7 @@
         <p:spPr>
           <a:xfrm>
             <a:off x="10080" y="0"/>
-            <a:ext cx="9126720" cy="728280"/>
+            <a:ext cx="9126360" cy="727920"/>
           </a:xfrm>
           <a:prstGeom prst="rect">
             <a:avLst/>
@@ -6155,7 +6155,7 @@
         <p:spPr>
           <a:xfrm>
             <a:off x="232200" y="1302120"/>
-            <a:ext cx="2272680" cy="1897560"/>
+            <a:ext cx="2272320" cy="1897200"/>
           </a:xfrm>
           <a:prstGeom prst="rect">
             <a:avLst/>
@@ -6311,7 +6311,7 @@
         <p:spPr>
           <a:xfrm>
             <a:off x="0" y="723600"/>
-            <a:ext cx="9123840" cy="323640"/>
+            <a:ext cx="9123480" cy="323280"/>
           </a:xfrm>
           <a:prstGeom prst="rect">
             <a:avLst/>
@@ -6377,7 +6377,7 @@
         <p:spPr>
           <a:xfrm>
             <a:off x="6553080" y="6356520"/>
-            <a:ext cx="2097360" cy="328680"/>
+            <a:ext cx="2097000" cy="328320"/>
           </a:xfrm>
           <a:prstGeom prst="rect">
             <a:avLst/>
@@ -6413,7 +6413,7 @@
               </a:lnSpc>
               <a:buNone/>
             </a:pPr>
-            <a:fld id="{562F4C94-49E0-446C-8E41-E0D652F27799}" type="slidenum">
+            <a:fld id="{2F392BB9-A9B2-47DE-97F5-56DC36E6751F}" type="slidenum">
               <a:rPr b="0" lang="en-US" sz="1200" spc="-1" strike="noStrike">
                 <a:solidFill>
                   <a:srgbClr val="8b8b8b"/>
@@ -6438,7 +6438,7 @@
         <p:spPr>
           <a:xfrm>
             <a:off x="8161560" y="5405040"/>
-            <a:ext cx="715680" cy="309240"/>
+            <a:ext cx="715320" cy="308880"/>
           </a:xfrm>
           <a:prstGeom prst="rect">
             <a:avLst/>
@@ -6497,8 +6497,8 @@
         </p:nvSpPr>
         <p:spPr>
           <a:xfrm flipV="1">
-            <a:off x="8035200" y="5382720"/>
-            <a:ext cx="702000" cy="2160"/>
+            <a:off x="8035200" y="5382000"/>
+            <a:ext cx="701640" cy="1800"/>
           </a:xfrm>
           <a:custGeom>
             <a:avLst/>
@@ -6547,7 +6547,7 @@
         <p:spPr>
           <a:xfrm>
             <a:off x="4628520" y="1896480"/>
-            <a:ext cx="3611520" cy="1918080"/>
+            <a:ext cx="3611160" cy="1917720"/>
           </a:xfrm>
           <a:prstGeom prst="rect">
             <a:avLst/>
@@ -6585,7 +6585,7 @@
         <p:spPr>
           <a:xfrm>
             <a:off x="4775040" y="4368960"/>
-            <a:ext cx="1854000" cy="506880"/>
+            <a:ext cx="1853640" cy="506520"/>
           </a:xfrm>
           <a:prstGeom prst="roundRect">
             <a:avLst>
@@ -6651,7 +6651,7 @@
         <p:spPr>
           <a:xfrm>
             <a:off x="4114800" y="3240000"/>
-            <a:ext cx="2341440" cy="535320"/>
+            <a:ext cx="2341080" cy="534960"/>
           </a:xfrm>
           <a:prstGeom prst="roundRect">
             <a:avLst>
@@ -6717,7 +6717,7 @@
         <p:spPr>
           <a:xfrm>
             <a:off x="6919920" y="2201400"/>
-            <a:ext cx="1150560" cy="315000"/>
+            <a:ext cx="1150200" cy="314640"/>
           </a:xfrm>
           <a:prstGeom prst="rect">
             <a:avLst/>
@@ -6777,7 +6777,7 @@
         <p:spPr>
           <a:xfrm>
             <a:off x="5226840" y="5198400"/>
-            <a:ext cx="715680" cy="309240"/>
+            <a:ext cx="715320" cy="308880"/>
           </a:xfrm>
           <a:prstGeom prst="rect">
             <a:avLst/>
@@ -6846,8 +6846,8 @@
         </p:nvSpPr>
         <p:spPr>
           <a:xfrm flipH="1">
-            <a:off x="8611920" y="3804840"/>
-            <a:ext cx="360" cy="538200"/>
+            <a:off x="8611200" y="3804840"/>
+            <a:ext cx="360" cy="537840"/>
           </a:xfrm>
           <a:custGeom>
             <a:avLst/>
@@ -6896,7 +6896,7 @@
         <p:spPr>
           <a:xfrm>
             <a:off x="8134200" y="3804840"/>
-            <a:ext cx="715680" cy="309240"/>
+            <a:ext cx="715320" cy="308880"/>
           </a:xfrm>
           <a:prstGeom prst="rect">
             <a:avLst/>
@@ -6956,7 +6956,7 @@
         <p:spPr>
           <a:xfrm>
             <a:off x="8619120" y="5012280"/>
-            <a:ext cx="360" cy="518040"/>
+            <a:ext cx="360" cy="517680"/>
           </a:xfrm>
           <a:custGeom>
             <a:avLst/>
@@ -7005,7 +7005,7 @@
         <p:spPr>
           <a:xfrm>
             <a:off x="7099200" y="4343400"/>
-            <a:ext cx="936000" cy="685080"/>
+            <a:ext cx="899640" cy="684720"/>
           </a:xfrm>
           <a:prstGeom prst="rect">
             <a:avLst/>
@@ -7043,7 +7043,7 @@
         <p:spPr>
           <a:xfrm>
             <a:off x="4628520" y="3838320"/>
-            <a:ext cx="4074120" cy="1669680"/>
+            <a:ext cx="4073760" cy="1669320"/>
           </a:xfrm>
           <a:prstGeom prst="rect">
             <a:avLst/>
@@ -7079,7 +7079,7 @@
         <p:spPr>
           <a:xfrm>
             <a:off x="8613360" y="4343400"/>
-            <a:ext cx="360" cy="724320"/>
+            <a:ext cx="360" cy="723960"/>
           </a:xfrm>
           <a:custGeom>
             <a:avLst/>
@@ -7128,7 +7128,7 @@
         <p:spPr>
           <a:xfrm>
             <a:off x="8199000" y="4464360"/>
-            <a:ext cx="715680" cy="309240"/>
+            <a:ext cx="715320" cy="308880"/>
           </a:xfrm>
           <a:prstGeom prst="rect">
             <a:avLst/>
@@ -7198,7 +7198,7 @@
         <p:spPr>
           <a:xfrm flipV="1">
             <a:off x="7099200" y="5378400"/>
-            <a:ext cx="936000" cy="3960"/>
+            <a:ext cx="935640" cy="3600"/>
           </a:xfrm>
           <a:custGeom>
             <a:avLst/>
@@ -7247,7 +7247,7 @@
         <p:spPr>
           <a:xfrm>
             <a:off x="7445160" y="5249160"/>
-            <a:ext cx="715680" cy="309240"/>
+            <a:ext cx="715320" cy="308880"/>
           </a:xfrm>
           <a:prstGeom prst="rect">
             <a:avLst/>
@@ -7307,7 +7307,7 @@
         <p:spPr>
           <a:xfrm>
             <a:off x="4628520" y="5576760"/>
-            <a:ext cx="3600000" cy="366120"/>
+            <a:ext cx="3599640" cy="365760"/>
           </a:xfrm>
           <a:prstGeom prst="rect">
             <a:avLst/>
@@ -7371,7 +7371,7 @@
         <p:spPr>
           <a:xfrm>
             <a:off x="6183720" y="5997960"/>
-            <a:ext cx="902160" cy="315000"/>
+            <a:ext cx="901800" cy="314640"/>
           </a:xfrm>
           <a:prstGeom prst="rect">
             <a:avLst/>
@@ -7440,8 +7440,8 @@
         </p:nvSpPr>
         <p:spPr>
           <a:xfrm>
-            <a:off x="7157520" y="4522320"/>
-            <a:ext cx="805680" cy="309240"/>
+            <a:off x="7157520" y="4018320"/>
+            <a:ext cx="805320" cy="308880"/>
           </a:xfrm>
           <a:prstGeom prst="rect">
             <a:avLst/>
@@ -7501,7 +7501,7 @@
         <p:spPr>
           <a:xfrm>
             <a:off x="2562840" y="1159560"/>
-            <a:ext cx="590040" cy="695160"/>
+            <a:ext cx="589680" cy="694800"/>
           </a:xfrm>
           <a:prstGeom prst="rect">
             <a:avLst/>
@@ -7539,7 +7539,7 @@
         <p:spPr>
           <a:xfrm>
             <a:off x="2540520" y="1209960"/>
-            <a:ext cx="715680" cy="309240"/>
+            <a:ext cx="715320" cy="308880"/>
           </a:xfrm>
           <a:prstGeom prst="rect">
             <a:avLst/>
@@ -7632,7 +7632,7 @@
         <p:spPr>
           <a:xfrm>
             <a:off x="3297240" y="1179000"/>
-            <a:ext cx="360" cy="685440"/>
+            <a:ext cx="360" cy="685080"/>
           </a:xfrm>
           <a:custGeom>
             <a:avLst/>
@@ -7681,7 +7681,7 @@
         <p:spPr>
           <a:xfrm>
             <a:off x="3058200" y="1255320"/>
-            <a:ext cx="715680" cy="309240"/>
+            <a:ext cx="715320" cy="308880"/>
           </a:xfrm>
           <a:prstGeom prst="rect">
             <a:avLst/>
@@ -7751,7 +7751,7 @@
         <p:spPr>
           <a:xfrm>
             <a:off x="2575800" y="1962360"/>
-            <a:ext cx="600840" cy="360"/>
+            <a:ext cx="600480" cy="360"/>
           </a:xfrm>
           <a:custGeom>
             <a:avLst/>
@@ -7800,7 +7800,7 @@
         <p:spPr>
           <a:xfrm>
             <a:off x="2568600" y="1917000"/>
-            <a:ext cx="715680" cy="309240"/>
+            <a:ext cx="715320" cy="308880"/>
           </a:xfrm>
           <a:prstGeom prst="rect">
             <a:avLst/>
@@ -7860,7 +7860,7 @@
         <p:spPr>
           <a:xfrm>
             <a:off x="4114800" y="2624760"/>
-            <a:ext cx="2284920" cy="535320"/>
+            <a:ext cx="2284560" cy="534960"/>
           </a:xfrm>
           <a:prstGeom prst="roundRect">
             <a:avLst>
@@ -7926,7 +7926,7 @@
         <p:spPr>
           <a:xfrm>
             <a:off x="4114800" y="2031840"/>
-            <a:ext cx="2262600" cy="535320"/>
+            <a:ext cx="2262240" cy="534960"/>
           </a:xfrm>
           <a:prstGeom prst="roundRect">
             <a:avLst>
@@ -7992,7 +7992,7 @@
         <p:spPr>
           <a:xfrm>
             <a:off x="2562840" y="1143000"/>
-            <a:ext cx="6580440" cy="5713920"/>
+            <a:ext cx="6580080" cy="5713560"/>
           </a:xfrm>
           <a:prstGeom prst="rect">
             <a:avLst/>
@@ -8028,7 +8028,7 @@
         <p:spPr>
           <a:xfrm>
             <a:off x="4572000" y="6171840"/>
-            <a:ext cx="4254840" cy="360"/>
+            <a:ext cx="4254480" cy="360"/>
           </a:xfrm>
           <a:custGeom>
             <a:avLst/>
@@ -8077,7 +8077,7 @@
         <p:spPr>
           <a:xfrm>
             <a:off x="8703360" y="4464360"/>
-            <a:ext cx="715680" cy="309240"/>
+            <a:ext cx="715320" cy="308880"/>
           </a:xfrm>
           <a:prstGeom prst="rect">
             <a:avLst/>
@@ -8157,7 +8157,7 @@
         <p:spPr>
           <a:xfrm>
             <a:off x="8804880" y="3886200"/>
-            <a:ext cx="360" cy="1503000"/>
+            <a:ext cx="360" cy="1502640"/>
           </a:xfrm>
           <a:custGeom>
             <a:avLst/>
@@ -8206,7 +8206,7 @@
         <p:spPr>
           <a:xfrm>
             <a:off x="8134200" y="5029200"/>
-            <a:ext cx="715680" cy="309240"/>
+            <a:ext cx="715320" cy="308880"/>
           </a:xfrm>
           <a:prstGeom prst="rect">
             <a:avLst/>
@@ -8266,7 +8266,7 @@
         <p:spPr>
           <a:xfrm>
             <a:off x="-1143000" y="3299760"/>
-            <a:ext cx="4571280" cy="2871720"/>
+            <a:ext cx="4570920" cy="2871360"/>
           </a:xfrm>
           <a:prstGeom prst="rect">
             <a:avLst/>
@@ -8296,7 +8296,7 @@
         <p:spPr>
           <a:xfrm>
             <a:off x="-1086120" y="3528360"/>
-            <a:ext cx="3600000" cy="509760"/>
+            <a:ext cx="3599640" cy="509400"/>
           </a:xfrm>
           <a:prstGeom prst="rect">
             <a:avLst/>
@@ -8360,7 +8360,7 @@
         <p:spPr>
           <a:xfrm>
             <a:off x="2971800" y="4220640"/>
-            <a:ext cx="462960" cy="924480"/>
+            <a:ext cx="462600" cy="924120"/>
           </a:xfrm>
           <a:prstGeom prst="rect">
             <a:avLst/>
@@ -8398,7 +8398,7 @@
         <p:spPr>
           <a:xfrm>
             <a:off x="2063880" y="4825080"/>
-            <a:ext cx="1172880" cy="309240"/>
+            <a:ext cx="1172520" cy="308880"/>
           </a:xfrm>
           <a:prstGeom prst="rect">
             <a:avLst/>
@@ -8522,7 +8522,7 @@
         <p:spPr>
           <a:xfrm>
             <a:off x="3547440" y="4343400"/>
-            <a:ext cx="715680" cy="309240"/>
+            <a:ext cx="715320" cy="308880"/>
           </a:xfrm>
           <a:prstGeom prst="rect">
             <a:avLst/>
@@ -8582,7 +8582,7 @@
         <p:spPr>
           <a:xfrm>
             <a:off x="3524760" y="4240440"/>
-            <a:ext cx="21960" cy="924840"/>
+            <a:ext cx="21600" cy="924480"/>
           </a:xfrm>
           <a:custGeom>
             <a:avLst/>
@@ -8631,7 +8631,7 @@
         <p:spPr>
           <a:xfrm>
             <a:off x="2923560" y="5299920"/>
-            <a:ext cx="504720" cy="360"/>
+            <a:ext cx="504360" cy="360"/>
           </a:xfrm>
           <a:custGeom>
             <a:avLst/>
@@ -8680,7 +8680,7 @@
         <p:spPr>
           <a:xfrm>
             <a:off x="2808000" y="5290560"/>
-            <a:ext cx="715680" cy="309240"/>
+            <a:ext cx="715320" cy="308880"/>
           </a:xfrm>
           <a:prstGeom prst="rect">
             <a:avLst/>
@@ -8740,7 +8740,7 @@
         <p:spPr>
           <a:xfrm>
             <a:off x="3524760" y="5284440"/>
-            <a:ext cx="21960" cy="924840"/>
+            <a:ext cx="21600" cy="924480"/>
           </a:xfrm>
           <a:custGeom>
             <a:avLst/>
@@ -8789,7 +8789,7 @@
         <p:spPr>
           <a:xfrm>
             <a:off x="3627000" y="5486400"/>
-            <a:ext cx="715680" cy="309240"/>
+            <a:ext cx="715320" cy="308880"/>
           </a:xfrm>
           <a:prstGeom prst="rect">
             <a:avLst/>
@@ -8849,7 +8849,7 @@
         <p:spPr>
           <a:xfrm>
             <a:off x="4673520" y="5379120"/>
-            <a:ext cx="2412720" cy="360"/>
+            <a:ext cx="2412360" cy="360"/>
           </a:xfrm>
           <a:custGeom>
             <a:avLst/>
@@ -8898,7 +8898,7 @@
         <p:spPr>
           <a:xfrm>
             <a:off x="3549600" y="1143000"/>
-            <a:ext cx="564840" cy="695160"/>
+            <a:ext cx="564480" cy="694800"/>
           </a:xfrm>
           <a:prstGeom prst="rect">
             <a:avLst/>
@@ -8936,7 +8936,7 @@
         <p:spPr>
           <a:xfrm>
             <a:off x="3488760" y="1204920"/>
-            <a:ext cx="715680" cy="309240"/>
+            <a:ext cx="715320" cy="308880"/>
           </a:xfrm>
           <a:prstGeom prst="rect">
             <a:avLst/>
@@ -9029,7 +9029,7 @@
         <p:spPr>
           <a:xfrm>
             <a:off x="3560040" y="1957320"/>
-            <a:ext cx="600840" cy="360"/>
+            <a:ext cx="600480" cy="360"/>
           </a:xfrm>
           <a:custGeom>
             <a:avLst/>
@@ -9078,7 +9078,7 @@
         <p:spPr>
           <a:xfrm>
             <a:off x="3516840" y="1911960"/>
-            <a:ext cx="715680" cy="309240"/>
+            <a:ext cx="715320" cy="308880"/>
           </a:xfrm>
           <a:prstGeom prst="rect">
             <a:avLst/>
@@ -9131,6 +9131,258 @@
       </p:sp>
       <p:sp>
         <p:nvSpPr>
+          <p:cNvPr id="146" name=""/>
+          <p:cNvSpPr/>
+          <p:nvPr/>
+        </p:nvSpPr>
+        <p:spPr>
+          <a:xfrm flipV="1">
+            <a:off x="7315200" y="4343400"/>
+            <a:ext cx="0" cy="684720"/>
+          </a:xfrm>
+          <a:prstGeom prst="line">
+            <a:avLst/>
+          </a:prstGeom>
+          <a:ln w="73080">
+            <a:solidFill>
+              <a:srgbClr val="bf0041"/>
+            </a:solidFill>
+            <a:round/>
+          </a:ln>
+        </p:spPr>
+        <p:style>
+          <a:lnRef idx="0"/>
+          <a:fillRef idx="0"/>
+          <a:effectRef idx="0"/>
+          <a:fontRef idx="minor"/>
+        </p:style>
+      </p:sp>
+      <p:sp>
+        <p:nvSpPr>
+          <p:cNvPr id="147" name=""/>
+          <p:cNvSpPr/>
+          <p:nvPr/>
+        </p:nvSpPr>
+        <p:spPr>
+          <a:xfrm flipV="1">
+            <a:off x="7086600" y="4343400"/>
+            <a:ext cx="0" cy="685800"/>
+          </a:xfrm>
+          <a:prstGeom prst="line">
+            <a:avLst/>
+          </a:prstGeom>
+          <a:ln w="73080">
+            <a:solidFill>
+              <a:srgbClr val="bf0041"/>
+            </a:solidFill>
+            <a:round/>
+          </a:ln>
+        </p:spPr>
+        <p:style>
+          <a:lnRef idx="0"/>
+          <a:fillRef idx="0"/>
+          <a:effectRef idx="0"/>
+          <a:fontRef idx="minor"/>
+        </p:style>
+      </p:sp>
+      <p:sp>
+        <p:nvSpPr>
+          <p:cNvPr id="148" name=""/>
+          <p:cNvSpPr/>
+          <p:nvPr/>
+        </p:nvSpPr>
+        <p:spPr>
+          <a:xfrm flipH="1" flipV="1">
+            <a:off x="7986240" y="4343400"/>
+            <a:ext cx="12600" cy="684720"/>
+          </a:xfrm>
+          <a:prstGeom prst="line">
+            <a:avLst/>
+          </a:prstGeom>
+          <a:ln w="73080">
+            <a:solidFill>
+              <a:srgbClr val="bf0041"/>
+            </a:solidFill>
+            <a:round/>
+          </a:ln>
+        </p:spPr>
+        <p:style>
+          <a:lnRef idx="0"/>
+          <a:fillRef idx="0"/>
+          <a:effectRef idx="0"/>
+          <a:fontRef idx="minor"/>
+        </p:style>
+      </p:sp>
+      <p:sp>
+        <p:nvSpPr>
+          <p:cNvPr id="149" name=""/>
+          <p:cNvSpPr/>
+          <p:nvPr/>
+        </p:nvSpPr>
+        <p:spPr>
+          <a:xfrm flipV="1">
+            <a:off x="7543800" y="4363200"/>
+            <a:ext cx="0" cy="684720"/>
+          </a:xfrm>
+          <a:prstGeom prst="line">
+            <a:avLst/>
+          </a:prstGeom>
+          <a:ln w="73080">
+            <a:solidFill>
+              <a:srgbClr val="bf0041"/>
+            </a:solidFill>
+            <a:round/>
+          </a:ln>
+        </p:spPr>
+        <p:style>
+          <a:lnRef idx="0"/>
+          <a:fillRef idx="0"/>
+          <a:effectRef idx="0"/>
+          <a:fontRef idx="minor"/>
+        </p:style>
+      </p:sp>
+      <p:sp>
+        <p:nvSpPr>
+          <p:cNvPr id="150" name=""/>
+          <p:cNvSpPr/>
+          <p:nvPr/>
+        </p:nvSpPr>
+        <p:spPr>
+          <a:xfrm flipV="1">
+            <a:off x="7772400" y="4343400"/>
+            <a:ext cx="0" cy="684720"/>
+          </a:xfrm>
+          <a:prstGeom prst="line">
+            <a:avLst/>
+          </a:prstGeom>
+          <a:ln w="73080">
+            <a:solidFill>
+              <a:srgbClr val="bf0041"/>
+            </a:solidFill>
+            <a:round/>
+          </a:ln>
+        </p:spPr>
+        <p:style>
+          <a:lnRef idx="0"/>
+          <a:fillRef idx="0"/>
+          <a:effectRef idx="0"/>
+          <a:fontRef idx="minor"/>
+        </p:style>
+      </p:sp>
+      <p:sp>
+        <p:nvSpPr>
+          <p:cNvPr id="151" name=""/>
+          <p:cNvSpPr/>
+          <p:nvPr/>
+        </p:nvSpPr>
+        <p:spPr>
+          <a:xfrm>
+            <a:off x="7171200" y="5029200"/>
+            <a:ext cx="756000" cy="0"/>
+          </a:xfrm>
+          <a:prstGeom prst="line">
+            <a:avLst/>
+          </a:prstGeom>
+          <a:ln w="73080">
+            <a:solidFill>
+              <a:srgbClr val="bf0041"/>
+            </a:solidFill>
+            <a:round/>
+          </a:ln>
+        </p:spPr>
+        <p:style>
+          <a:lnRef idx="0"/>
+          <a:fillRef idx="0"/>
+          <a:effectRef idx="0"/>
+          <a:fontRef idx="minor"/>
+        </p:style>
+      </p:sp>
+      <p:sp>
+        <p:nvSpPr>
+          <p:cNvPr id="152" name=""/>
+          <p:cNvSpPr/>
+          <p:nvPr/>
+        </p:nvSpPr>
+        <p:spPr>
+          <a:xfrm>
+            <a:off x="7171200" y="4343400"/>
+            <a:ext cx="756000" cy="0"/>
+          </a:xfrm>
+          <a:prstGeom prst="line">
+            <a:avLst/>
+          </a:prstGeom>
+          <a:ln w="73080">
+            <a:solidFill>
+              <a:srgbClr val="bf0041"/>
+            </a:solidFill>
+            <a:round/>
+          </a:ln>
+        </p:spPr>
+        <p:style>
+          <a:lnRef idx="0"/>
+          <a:fillRef idx="0"/>
+          <a:effectRef idx="0"/>
+          <a:fontRef idx="minor"/>
+        </p:style>
+      </p:sp>
+      <p:sp>
+        <p:nvSpPr>
+          <p:cNvPr id="153" name=""/>
+          <p:cNvSpPr/>
+          <p:nvPr/>
+        </p:nvSpPr>
+        <p:spPr>
+          <a:xfrm flipV="1">
+            <a:off x="7171200" y="4307400"/>
+            <a:ext cx="0" cy="684720"/>
+          </a:xfrm>
+          <a:prstGeom prst="line">
+            <a:avLst/>
+          </a:prstGeom>
+          <a:ln w="18360">
+            <a:solidFill>
+              <a:srgbClr val="ffff00"/>
+            </a:solidFill>
+            <a:round/>
+          </a:ln>
+        </p:spPr>
+        <p:style>
+          <a:lnRef idx="0"/>
+          <a:fillRef idx="0"/>
+          <a:effectRef idx="0"/>
+          <a:fontRef idx="minor"/>
+        </p:style>
+      </p:sp>
+      <p:sp>
+        <p:nvSpPr>
+          <p:cNvPr id="154" name=""/>
+          <p:cNvSpPr/>
+          <p:nvPr/>
+        </p:nvSpPr>
+        <p:spPr>
+          <a:xfrm flipV="1">
+            <a:off x="7927200" y="4307400"/>
+            <a:ext cx="0" cy="684720"/>
+          </a:xfrm>
+          <a:prstGeom prst="line">
+            <a:avLst/>
+          </a:prstGeom>
+          <a:ln w="18360">
+            <a:solidFill>
+              <a:srgbClr val="ffff00"/>
+            </a:solidFill>
+            <a:round/>
+          </a:ln>
+        </p:spPr>
+        <p:style>
+          <a:lnRef idx="0"/>
+          <a:fillRef idx="0"/>
+          <a:effectRef idx="0"/>
+          <a:fontRef idx="minor"/>
+        </p:style>
+      </p:sp>
+      <p:sp>
+        <p:nvSpPr>
           <p:cNvPr id="5" name="PlaceHolder 4"/>
           <p:cNvSpPr>
             <a:spLocks noGrp="1"/>
@@ -9143,9 +9395,9 @@
         <p:txBody>
           <a:bodyPr/>
           <a:p>
-            <a:fld id="{884536B2-6EBB-4D27-A686-353913AC1F56}" type="datetime1">
+            <a:fld id="{0686EFE6-47F4-4278-A4C8-37140798BDAF}" type="datetime1">
               <a:rPr lang="en-US"/>
-              <a:t>06/02/2026</a:t>
+              <a:t>06/03/2026</a:t>
             </a:fld>
           </a:p>
         </p:txBody>
@@ -9182,7 +9434,7 @@
       </p:grpSpPr>
       <p:sp>
         <p:nvSpPr>
-          <p:cNvPr id="146" name="PlaceHolder 1"/>
+          <p:cNvPr id="155" name="PlaceHolder 1"/>
           <p:cNvSpPr>
             <a:spLocks noGrp="1"/>
           </p:cNvSpPr>
@@ -9193,7 +9445,7 @@
         <p:spPr>
           <a:xfrm>
             <a:off x="0" y="2130480"/>
-            <a:ext cx="9107640" cy="1433520"/>
+            <a:ext cx="9107280" cy="1433160"/>
           </a:xfrm>
           <a:prstGeom prst="rect">
             <a:avLst/>
@@ -9254,7 +9506,7 @@
         <p:txBody>
           <a:bodyPr/>
           <a:p>
-            <a:fld id="{C7618B61-305D-4D40-9C01-C3C3A5EF112C}" type="slidenum">
+            <a:fld id="{9CFF835C-E1DE-4571-9305-B5F722805C9C}" type="slidenum">
               <a:t>3</a:t>
             </a:fld>
           </a:p>
@@ -9274,9 +9526,9 @@
         <p:txBody>
           <a:bodyPr/>
           <a:p>
-            <a:fld id="{20EBDBEF-496A-44B8-8020-20A73D453169}" type="datetime1">
+            <a:fld id="{5FBCAF85-EE87-4E95-9F0F-14611161F7AD}" type="datetime1">
               <a:rPr lang="en-US"/>
-              <a:t>06/02/2026</a:t>
+              <a:t>06/03/2026</a:t>
             </a:fld>
           </a:p>
         </p:txBody>

--- a/Palo_Alto_2581/000_PaloAlto_Shed.pptx
+++ b/Palo_Alto_2581/000_PaloAlto_Shed.pptx
@@ -295,7 +295,7 @@
             <a:pPr algn="r">
               <a:buNone/>
             </a:pPr>
-            <a:fld id="{4CC143C8-3E47-41BB-BD00-C293E228E357}" type="slidenum">
+            <a:fld id="{C6683D54-AF19-4FE0-AEA7-DD0CB9E40CAA}" type="slidenum">
               <a:rPr b="0" lang="en-US" sz="1400" spc="-1" strike="noStrike">
                 <a:latin typeface="Times New Roman"/>
               </a:rPr>
@@ -343,7 +343,7 @@
         <p:spPr>
           <a:xfrm>
             <a:off x="1143000" y="685800"/>
-            <a:ext cx="4535640" cy="3392640"/>
+            <a:ext cx="4535280" cy="3392280"/>
           </a:xfrm>
           <a:prstGeom prst="rect">
             <a:avLst/>
@@ -366,7 +366,7 @@
         <p:spPr>
           <a:xfrm>
             <a:off x="685800" y="4343400"/>
-            <a:ext cx="5449680" cy="4078080"/>
+            <a:ext cx="5449320" cy="4077720"/>
           </a:xfrm>
           <a:prstGeom prst="rect">
             <a:avLst/>
@@ -400,7 +400,7 @@
         <p:spPr>
           <a:xfrm>
             <a:off x="3884760" y="8685360"/>
-            <a:ext cx="2935080" cy="420480"/>
+            <a:ext cx="2934720" cy="420120"/>
           </a:xfrm>
           <a:prstGeom prst="rect">
             <a:avLst/>
@@ -436,7 +436,7 @@
               </a:lnSpc>
               <a:buNone/>
             </a:pPr>
-            <a:fld id="{FFBE8C50-E74E-4DC2-8FCE-E59EEACA5EC6}" type="slidenum">
+            <a:fld id="{03955D52-4603-4F09-A624-82AFC3C4559B}" type="slidenum">
               <a:rPr b="0" lang="en-US" sz="1200" spc="-1" strike="noStrike">
                 <a:solidFill>
                   <a:srgbClr val="000000"/>
@@ -508,7 +508,7 @@
         <p:txBody>
           <a:bodyPr/>
           <a:p>
-            <a:fld id="{1F99A7ED-DBD9-4737-A9FD-D463D8056166}" type="slidenum">
+            <a:fld id="{2F441034-0930-4168-BDCC-348BE4A7FB3C}" type="slidenum">
               <a:t>&lt;#&gt;</a:t>
             </a:fld>
           </a:p>
@@ -696,7 +696,7 @@
         <p:txBody>
           <a:bodyPr/>
           <a:p>
-            <a:fld id="{37251CA0-40D9-4D2C-8A6D-CA0423437226}" type="slidenum">
+            <a:fld id="{1D08F022-7C20-4381-8ECC-CFA9D297C6AE}" type="slidenum">
               <a:t>&lt;#&gt;</a:t>
             </a:fld>
           </a:p>
@@ -952,7 +952,7 @@
         <p:txBody>
           <a:bodyPr/>
           <a:p>
-            <a:fld id="{862C1B9E-2D0D-466B-B978-601905295F7D}" type="slidenum">
+            <a:fld id="{3A06CB80-866A-456A-B381-52F4BD70C383}" type="slidenum">
               <a:t>&lt;#&gt;</a:t>
             </a:fld>
           </a:p>
@@ -1276,7 +1276,7 @@
         <p:txBody>
           <a:bodyPr/>
           <a:p>
-            <a:fld id="{88BB36E9-BC84-4BE0-9CD0-204DADB475D1}" type="slidenum">
+            <a:fld id="{5EC6B2BA-79D6-4D75-A5D8-E0530D34D860}" type="slidenum">
               <a:t>&lt;#&gt;</a:t>
             </a:fld>
           </a:p>
@@ -1359,7 +1359,7 @@
         <p:txBody>
           <a:bodyPr/>
           <a:p>
-            <a:fld id="{8DA8AB85-40B2-4BEC-B16F-C6AEAFAC0328}" type="slidenum">
+            <a:fld id="{508F632B-D42E-4A07-8562-179FA293D49C}" type="slidenum">
               <a:t>&lt;#&gt;</a:t>
             </a:fld>
           </a:p>
@@ -1516,7 +1516,7 @@
         <p:txBody>
           <a:bodyPr/>
           <a:p>
-            <a:fld id="{072E00BA-2500-4125-8363-1CE84CE1BA13}" type="slidenum">
+            <a:fld id="{18DAE5A2-265E-4C5F-821A-10334304F5A1}" type="slidenum">
               <a:t>&lt;#&gt;</a:t>
             </a:fld>
           </a:p>
@@ -1670,7 +1670,7 @@
         <p:txBody>
           <a:bodyPr/>
           <a:p>
-            <a:fld id="{5C170682-E3FC-4A28-99DD-8F2647776D6F}" type="slidenum">
+            <a:fld id="{6173788D-FE19-4011-8E79-D709FC4202A0}" type="slidenum">
               <a:t>&lt;#&gt;</a:t>
             </a:fld>
           </a:p>
@@ -1858,7 +1858,7 @@
         <p:txBody>
           <a:bodyPr/>
           <a:p>
-            <a:fld id="{E2C7CB51-BDD8-4DC1-8D41-1E8626E43F1B}" type="slidenum">
+            <a:fld id="{7EA69BE5-3CF2-47AF-B664-B9E34595ED5F}" type="slidenum">
               <a:t>&lt;#&gt;</a:t>
             </a:fld>
           </a:p>
@@ -1978,7 +1978,7 @@
         <p:txBody>
           <a:bodyPr/>
           <a:p>
-            <a:fld id="{B25D7CEA-8011-4601-A319-8D17172AC2E4}" type="slidenum">
+            <a:fld id="{28976FF4-DB4E-45CC-9FF8-BB2B68916D34}" type="slidenum">
               <a:t>&lt;#&gt;</a:t>
             </a:fld>
           </a:p>
@@ -2098,7 +2098,7 @@
         <p:txBody>
           <a:bodyPr/>
           <a:p>
-            <a:fld id="{9FCE206E-65EB-426E-9696-C6DF7DDC4A3D}" type="slidenum">
+            <a:fld id="{EF260500-E8F0-4385-809B-E96662F8E47D}" type="slidenum">
               <a:t>&lt;#&gt;</a:t>
             </a:fld>
           </a:p>
@@ -2320,7 +2320,7 @@
         <p:txBody>
           <a:bodyPr/>
           <a:p>
-            <a:fld id="{0F21A2A1-17C5-47A8-B018-197CE4729363}" type="slidenum">
+            <a:fld id="{313195C4-D0A6-4DF5-9966-07B27EDBBFD6}" type="slidenum">
               <a:t>&lt;#&gt;</a:t>
             </a:fld>
           </a:p>
@@ -2477,7 +2477,7 @@
         <p:txBody>
           <a:bodyPr/>
           <a:p>
-            <a:fld id="{F8D1DC0B-CFA9-478B-8367-468B868C7598}" type="slidenum">
+            <a:fld id="{EEC4B584-E593-4B7B-B0BE-5DBB8CEF6574}" type="slidenum">
               <a:t>&lt;#&gt;</a:t>
             </a:fld>
           </a:p>
@@ -2699,7 +2699,7 @@
         <p:txBody>
           <a:bodyPr/>
           <a:p>
-            <a:fld id="{6C615ED9-4875-498E-A698-0F28D86B3AF3}" type="slidenum">
+            <a:fld id="{A0E34EC3-F30D-44AF-8045-52C0E71A74AA}" type="slidenum">
               <a:t>&lt;#&gt;</a:t>
             </a:fld>
           </a:p>
@@ -2921,7 +2921,7 @@
         <p:txBody>
           <a:bodyPr/>
           <a:p>
-            <a:fld id="{C9DB0513-30D0-41BE-BB4A-E93DDFFA405A}" type="slidenum">
+            <a:fld id="{D8CF49A0-AB32-4FDC-AEA4-55A9BA4CE698}" type="slidenum">
               <a:t>&lt;#&gt;</a:t>
             </a:fld>
           </a:p>
@@ -3109,7 +3109,7 @@
         <p:txBody>
           <a:bodyPr/>
           <a:p>
-            <a:fld id="{BA7151DE-02BC-44E7-82ED-97B2C38181FC}" type="slidenum">
+            <a:fld id="{1340931F-1EA6-4DD6-AE3D-C27FBFE04CAF}" type="slidenum">
               <a:t>&lt;#&gt;</a:t>
             </a:fld>
           </a:p>
@@ -3365,7 +3365,7 @@
         <p:txBody>
           <a:bodyPr/>
           <a:p>
-            <a:fld id="{EEA4D4D6-7037-4150-9C4D-0F7AB80FE469}" type="slidenum">
+            <a:fld id="{E6D78422-C79E-4A07-96BF-DEAB28DA9A52}" type="slidenum">
               <a:t>&lt;#&gt;</a:t>
             </a:fld>
           </a:p>
@@ -3689,7 +3689,7 @@
         <p:txBody>
           <a:bodyPr/>
           <a:p>
-            <a:fld id="{4E54A41A-12E6-4A00-8179-8319E83242AA}" type="slidenum">
+            <a:fld id="{722E2A00-E1A3-4E65-AF90-F72D80FD1872}" type="slidenum">
               <a:t>&lt;#&gt;</a:t>
             </a:fld>
           </a:p>
@@ -3843,7 +3843,7 @@
         <p:txBody>
           <a:bodyPr/>
           <a:p>
-            <a:fld id="{40B3E56E-72D8-4628-B599-9A3C2B7C76E7}" type="slidenum">
+            <a:fld id="{BC0852EB-5F20-4A44-9B2F-147AB8BB2AA4}" type="slidenum">
               <a:t>&lt;#&gt;</a:t>
             </a:fld>
           </a:p>
@@ -4031,7 +4031,7 @@
         <p:txBody>
           <a:bodyPr/>
           <a:p>
-            <a:fld id="{0352CEB8-4F85-4E23-86D3-80FEBA7EC03E}" type="slidenum">
+            <a:fld id="{2161E328-87CF-4835-A425-11D7A2002F43}" type="slidenum">
               <a:t>&lt;#&gt;</a:t>
             </a:fld>
           </a:p>
@@ -4151,7 +4151,7 @@
         <p:txBody>
           <a:bodyPr/>
           <a:p>
-            <a:fld id="{7FBF4826-6136-43F3-B046-E7BB2430BAE7}" type="slidenum">
+            <a:fld id="{267D886D-B939-481E-A013-F978F70A2C9B}" type="slidenum">
               <a:t>&lt;#&gt;</a:t>
             </a:fld>
           </a:p>
@@ -4271,7 +4271,7 @@
         <p:txBody>
           <a:bodyPr/>
           <a:p>
-            <a:fld id="{65EC9E94-3F4A-4D2E-B181-68F574E3021B}" type="slidenum">
+            <a:fld id="{CD1BC86F-2036-4428-A807-EE37ACAD5980}" type="slidenum">
               <a:t>&lt;#&gt;</a:t>
             </a:fld>
           </a:p>
@@ -4493,7 +4493,7 @@
         <p:txBody>
           <a:bodyPr/>
           <a:p>
-            <a:fld id="{8DE379D3-3237-4DB8-9CD1-92D1AF35792B}" type="slidenum">
+            <a:fld id="{7D2DE624-6C48-40E6-A0E0-0C1E1E5853CD}" type="slidenum">
               <a:t>&lt;#&gt;</a:t>
             </a:fld>
           </a:p>
@@ -4715,7 +4715,7 @@
         <p:txBody>
           <a:bodyPr/>
           <a:p>
-            <a:fld id="{DA5A8CA7-7109-4A19-817C-ED9A58357FF6}" type="slidenum">
+            <a:fld id="{8F34ABA5-950C-4226-9A77-6C4703AAA65A}" type="slidenum">
               <a:t>&lt;#&gt;</a:t>
             </a:fld>
           </a:p>
@@ -4937,7 +4937,7 @@
         <p:txBody>
           <a:bodyPr/>
           <a:p>
-            <a:fld id="{BA24FD76-EDC0-465E-B0E5-FE81ED5684AA}" type="slidenum">
+            <a:fld id="{4A7DDD80-AFA5-41E1-B6E3-E6BAE02C295D}" type="slidenum">
               <a:t>&lt;#&gt;</a:t>
             </a:fld>
           </a:p>
@@ -5006,7 +5006,7 @@
         <p:spPr>
           <a:xfrm>
             <a:off x="3124080" y="6356520"/>
-            <a:ext cx="2858760" cy="328320"/>
+            <a:ext cx="2858400" cy="327960"/>
           </a:xfrm>
           <a:prstGeom prst="rect">
             <a:avLst/>
@@ -5071,7 +5071,7 @@
         <p:spPr>
           <a:xfrm>
             <a:off x="6553080" y="6356520"/>
-            <a:ext cx="2097000" cy="328320"/>
+            <a:ext cx="2096640" cy="327960"/>
           </a:xfrm>
           <a:prstGeom prst="rect">
             <a:avLst/>
@@ -5107,7 +5107,7 @@
               </a:lnSpc>
               <a:buNone/>
             </a:pPr>
-            <a:fld id="{411416EB-62B5-4904-9D76-B6AE93847B5E}" type="slidenum">
+            <a:fld id="{A8130B80-24EA-479E-B162-543C2581C450}" type="slidenum">
               <a:rPr b="0" lang="en-US" sz="1200" spc="-1" strike="noStrike">
                 <a:solidFill>
                   <a:srgbClr val="8b8b8b"/>
@@ -5136,7 +5136,7 @@
         <p:spPr>
           <a:xfrm>
             <a:off x="457200" y="6356520"/>
-            <a:ext cx="2097000" cy="328320"/>
+            <a:ext cx="2096640" cy="327960"/>
           </a:xfrm>
           <a:prstGeom prst="rect">
             <a:avLst/>
@@ -5453,7 +5453,7 @@
         <p:spPr>
           <a:xfrm>
             <a:off x="3124080" y="6356520"/>
-            <a:ext cx="2858760" cy="328320"/>
+            <a:ext cx="2858400" cy="327960"/>
           </a:xfrm>
           <a:prstGeom prst="rect">
             <a:avLst/>
@@ -5518,7 +5518,7 @@
         <p:spPr>
           <a:xfrm>
             <a:off x="6553080" y="6356520"/>
-            <a:ext cx="2097000" cy="328320"/>
+            <a:ext cx="2096640" cy="327960"/>
           </a:xfrm>
           <a:prstGeom prst="rect">
             <a:avLst/>
@@ -5554,7 +5554,7 @@
               </a:lnSpc>
               <a:buNone/>
             </a:pPr>
-            <a:fld id="{1EDEC2B8-5819-4D35-97E0-FB0DAFA9A0A0}" type="slidenum">
+            <a:fld id="{24417EB1-4DF8-414D-BC09-C55FE125EFC3}" type="slidenum">
               <a:rPr b="0" lang="en-US" sz="1200" spc="-1" strike="noStrike">
                 <a:solidFill>
                   <a:srgbClr val="8b8b8b"/>
@@ -5583,7 +5583,7 @@
         <p:spPr>
           <a:xfrm>
             <a:off x="457200" y="6356520"/>
-            <a:ext cx="2097000" cy="328320"/>
+            <a:ext cx="2096640" cy="327960"/>
           </a:xfrm>
           <a:prstGeom prst="rect">
             <a:avLst/>
@@ -5893,7 +5893,7 @@
         <p:spPr>
           <a:xfrm>
             <a:off x="0" y="2130480"/>
-            <a:ext cx="9127080" cy="1433160"/>
+            <a:ext cx="9126720" cy="1432800"/>
           </a:xfrm>
           <a:prstGeom prst="rect">
             <a:avLst/>
@@ -5945,7 +5945,7 @@
         <p:spPr>
           <a:xfrm>
             <a:off x="1371600" y="4563360"/>
-            <a:ext cx="6364080" cy="658080"/>
+            <a:ext cx="6363720" cy="657720"/>
           </a:xfrm>
           <a:prstGeom prst="rect">
             <a:avLst/>
@@ -6001,7 +6001,7 @@
         <p:spPr>
           <a:xfrm>
             <a:off x="4212000" y="3645000"/>
-            <a:ext cx="905040" cy="876240"/>
+            <a:ext cx="904680" cy="875880"/>
           </a:xfrm>
           <a:prstGeom prst="rect">
             <a:avLst/>
@@ -6025,7 +6025,7 @@
         <p:txBody>
           <a:bodyPr/>
           <a:p>
-            <a:fld id="{E24A0EBC-800E-41A8-BF92-C942C855C86E}" type="slidenum">
+            <a:fld id="{E636E0E5-9925-4C9D-B7BF-6F46E30A4CA2}" type="slidenum">
               <a:t>1</a:t>
             </a:fld>
           </a:p>
@@ -6045,9 +6045,9 @@
         <p:txBody>
           <a:bodyPr/>
           <a:p>
-            <a:fld id="{13C731F1-8BA2-4311-A9FB-3E18ED557846}" type="datetime1">
+            <a:fld id="{05B9CCED-0726-4E58-B886-154822F0DD44}" type="datetime1">
               <a:rPr lang="en-US"/>
-              <a:t>06/03/2026</a:t>
+              <a:t>06/04/2026</a:t>
             </a:fld>
           </a:p>
         </p:txBody>
@@ -6095,7 +6095,7 @@
         <p:spPr>
           <a:xfrm>
             <a:off x="10080" y="0"/>
-            <a:ext cx="9126360" cy="727920"/>
+            <a:ext cx="9126000" cy="727560"/>
           </a:xfrm>
           <a:prstGeom prst="rect">
             <a:avLst/>
@@ -6155,7 +6155,7 @@
         <p:spPr>
           <a:xfrm>
             <a:off x="232200" y="1302120"/>
-            <a:ext cx="2272320" cy="1897200"/>
+            <a:ext cx="2271960" cy="1896840"/>
           </a:xfrm>
           <a:prstGeom prst="rect">
             <a:avLst/>
@@ -6311,7 +6311,7 @@
         <p:spPr>
           <a:xfrm>
             <a:off x="0" y="723600"/>
-            <a:ext cx="9123480" cy="323280"/>
+            <a:ext cx="9123120" cy="322920"/>
           </a:xfrm>
           <a:prstGeom prst="rect">
             <a:avLst/>
@@ -6377,7 +6377,7 @@
         <p:spPr>
           <a:xfrm>
             <a:off x="6553080" y="6356520"/>
-            <a:ext cx="2097000" cy="328320"/>
+            <a:ext cx="2096640" cy="327960"/>
           </a:xfrm>
           <a:prstGeom prst="rect">
             <a:avLst/>
@@ -6413,7 +6413,7 @@
               </a:lnSpc>
               <a:buNone/>
             </a:pPr>
-            <a:fld id="{2F392BB9-A9B2-47DE-97F5-56DC36E6751F}" type="slidenum">
+            <a:fld id="{5310709C-5AFC-4BCE-9472-2D3B067C0721}" type="slidenum">
               <a:rPr b="0" lang="en-US" sz="1200" spc="-1" strike="noStrike">
                 <a:solidFill>
                   <a:srgbClr val="8b8b8b"/>
@@ -6438,7 +6438,7 @@
         <p:spPr>
           <a:xfrm>
             <a:off x="8161560" y="5405040"/>
-            <a:ext cx="715320" cy="308880"/>
+            <a:ext cx="714960" cy="308520"/>
           </a:xfrm>
           <a:prstGeom prst="rect">
             <a:avLst/>
@@ -6498,7 +6498,7 @@
         <p:spPr>
           <a:xfrm flipV="1">
             <a:off x="8035200" y="5382000"/>
-            <a:ext cx="701640" cy="1800"/>
+            <a:ext cx="701280" cy="1440"/>
           </a:xfrm>
           <a:custGeom>
             <a:avLst/>
@@ -6547,7 +6547,7 @@
         <p:spPr>
           <a:xfrm>
             <a:off x="4628520" y="1896480"/>
-            <a:ext cx="3611160" cy="1917720"/>
+            <a:ext cx="3610800" cy="1917360"/>
           </a:xfrm>
           <a:prstGeom prst="rect">
             <a:avLst/>
@@ -6585,7 +6585,7 @@
         <p:spPr>
           <a:xfrm>
             <a:off x="4775040" y="4368960"/>
-            <a:ext cx="1853640" cy="506520"/>
+            <a:ext cx="1853280" cy="506160"/>
           </a:xfrm>
           <a:prstGeom prst="roundRect">
             <a:avLst>
@@ -6651,7 +6651,7 @@
         <p:spPr>
           <a:xfrm>
             <a:off x="4114800" y="3240000"/>
-            <a:ext cx="2341080" cy="534960"/>
+            <a:ext cx="2340720" cy="534600"/>
           </a:xfrm>
           <a:prstGeom prst="roundRect">
             <a:avLst>
@@ -6717,7 +6717,7 @@
         <p:spPr>
           <a:xfrm>
             <a:off x="6919920" y="2201400"/>
-            <a:ext cx="1150200" cy="314640"/>
+            <a:ext cx="1149840" cy="314280"/>
           </a:xfrm>
           <a:prstGeom prst="rect">
             <a:avLst/>
@@ -6777,7 +6777,7 @@
         <p:spPr>
           <a:xfrm>
             <a:off x="5226840" y="5198400"/>
-            <a:ext cx="715320" cy="308880"/>
+            <a:ext cx="714960" cy="308520"/>
           </a:xfrm>
           <a:prstGeom prst="rect">
             <a:avLst/>
@@ -6846,8 +6846,8 @@
         </p:nvSpPr>
         <p:spPr>
           <a:xfrm flipH="1">
-            <a:off x="8611200" y="3804840"/>
-            <a:ext cx="360" cy="537840"/>
+            <a:off x="8610480" y="3804840"/>
+            <a:ext cx="360" cy="537480"/>
           </a:xfrm>
           <a:custGeom>
             <a:avLst/>
@@ -6896,7 +6896,7 @@
         <p:spPr>
           <a:xfrm>
             <a:off x="8134200" y="3804840"/>
-            <a:ext cx="715320" cy="308880"/>
+            <a:ext cx="714960" cy="308520"/>
           </a:xfrm>
           <a:prstGeom prst="rect">
             <a:avLst/>
@@ -6956,7 +6956,7 @@
         <p:spPr>
           <a:xfrm>
             <a:off x="8619120" y="5012280"/>
-            <a:ext cx="360" cy="517680"/>
+            <a:ext cx="360" cy="517320"/>
           </a:xfrm>
           <a:custGeom>
             <a:avLst/>
@@ -7005,7 +7005,7 @@
         <p:spPr>
           <a:xfrm>
             <a:off x="7099200" y="4343400"/>
-            <a:ext cx="899640" cy="684720"/>
+            <a:ext cx="899280" cy="684360"/>
           </a:xfrm>
           <a:prstGeom prst="rect">
             <a:avLst/>
@@ -7043,7 +7043,7 @@
         <p:spPr>
           <a:xfrm>
             <a:off x="4628520" y="3838320"/>
-            <a:ext cx="4073760" cy="1669320"/>
+            <a:ext cx="4073400" cy="1668960"/>
           </a:xfrm>
           <a:prstGeom prst="rect">
             <a:avLst/>
@@ -7079,7 +7079,7 @@
         <p:spPr>
           <a:xfrm>
             <a:off x="8613360" y="4343400"/>
-            <a:ext cx="360" cy="723960"/>
+            <a:ext cx="360" cy="723600"/>
           </a:xfrm>
           <a:custGeom>
             <a:avLst/>
@@ -7128,7 +7128,7 @@
         <p:spPr>
           <a:xfrm>
             <a:off x="8199000" y="4464360"/>
-            <a:ext cx="715320" cy="308880"/>
+            <a:ext cx="714960" cy="308520"/>
           </a:xfrm>
           <a:prstGeom prst="rect">
             <a:avLst/>
@@ -7197,8 +7197,8 @@
         </p:nvSpPr>
         <p:spPr>
           <a:xfrm flipV="1">
-            <a:off x="7099200" y="5378400"/>
-            <a:ext cx="935640" cy="3600"/>
+            <a:off x="7099200" y="5377680"/>
+            <a:ext cx="935280" cy="3240"/>
           </a:xfrm>
           <a:custGeom>
             <a:avLst/>
@@ -7247,7 +7247,7 @@
         <p:spPr>
           <a:xfrm>
             <a:off x="7445160" y="5249160"/>
-            <a:ext cx="715320" cy="308880"/>
+            <a:ext cx="714960" cy="308520"/>
           </a:xfrm>
           <a:prstGeom prst="rect">
             <a:avLst/>
@@ -7307,7 +7307,7 @@
         <p:spPr>
           <a:xfrm>
             <a:off x="4628520" y="5576760"/>
-            <a:ext cx="3599640" cy="365760"/>
+            <a:ext cx="3599280" cy="365400"/>
           </a:xfrm>
           <a:prstGeom prst="rect">
             <a:avLst/>
@@ -7371,7 +7371,7 @@
         <p:spPr>
           <a:xfrm>
             <a:off x="6183720" y="5997960"/>
-            <a:ext cx="901800" cy="314640"/>
+            <a:ext cx="901440" cy="314280"/>
           </a:xfrm>
           <a:prstGeom prst="rect">
             <a:avLst/>
@@ -7440,8 +7440,8 @@
         </p:nvSpPr>
         <p:spPr>
           <a:xfrm>
-            <a:off x="7157520" y="4018320"/>
-            <a:ext cx="805320" cy="308880"/>
+            <a:off x="7085520" y="3946320"/>
+            <a:ext cx="804960" cy="308520"/>
           </a:xfrm>
           <a:prstGeom prst="rect">
             <a:avLst/>
@@ -7501,7 +7501,7 @@
         <p:spPr>
           <a:xfrm>
             <a:off x="2562840" y="1159560"/>
-            <a:ext cx="589680" cy="694800"/>
+            <a:ext cx="589320" cy="694440"/>
           </a:xfrm>
           <a:prstGeom prst="rect">
             <a:avLst/>
@@ -7539,7 +7539,7 @@
         <p:spPr>
           <a:xfrm>
             <a:off x="2540520" y="1209960"/>
-            <a:ext cx="715320" cy="308880"/>
+            <a:ext cx="714960" cy="308520"/>
           </a:xfrm>
           <a:prstGeom prst="rect">
             <a:avLst/>
@@ -7632,7 +7632,7 @@
         <p:spPr>
           <a:xfrm>
             <a:off x="3297240" y="1179000"/>
-            <a:ext cx="360" cy="685080"/>
+            <a:ext cx="360" cy="684720"/>
           </a:xfrm>
           <a:custGeom>
             <a:avLst/>
@@ -7681,7 +7681,7 @@
         <p:spPr>
           <a:xfrm>
             <a:off x="3058200" y="1255320"/>
-            <a:ext cx="715320" cy="308880"/>
+            <a:ext cx="714960" cy="308520"/>
           </a:xfrm>
           <a:prstGeom prst="rect">
             <a:avLst/>
@@ -7751,7 +7751,7 @@
         <p:spPr>
           <a:xfrm>
             <a:off x="2575800" y="1962360"/>
-            <a:ext cx="600480" cy="360"/>
+            <a:ext cx="600120" cy="360"/>
           </a:xfrm>
           <a:custGeom>
             <a:avLst/>
@@ -7800,7 +7800,7 @@
         <p:spPr>
           <a:xfrm>
             <a:off x="2568600" y="1917000"/>
-            <a:ext cx="715320" cy="308880"/>
+            <a:ext cx="714960" cy="308520"/>
           </a:xfrm>
           <a:prstGeom prst="rect">
             <a:avLst/>
@@ -7860,7 +7860,7 @@
         <p:spPr>
           <a:xfrm>
             <a:off x="4114800" y="2624760"/>
-            <a:ext cx="2284560" cy="534960"/>
+            <a:ext cx="2284200" cy="534600"/>
           </a:xfrm>
           <a:prstGeom prst="roundRect">
             <a:avLst>
@@ -7926,7 +7926,7 @@
         <p:spPr>
           <a:xfrm>
             <a:off x="4114800" y="2031840"/>
-            <a:ext cx="2262240" cy="534960"/>
+            <a:ext cx="2261880" cy="534600"/>
           </a:xfrm>
           <a:prstGeom prst="roundRect">
             <a:avLst>
@@ -7992,7 +7992,7 @@
         <p:spPr>
           <a:xfrm>
             <a:off x="2562840" y="1143000"/>
-            <a:ext cx="6580080" cy="5713560"/>
+            <a:ext cx="6579720" cy="5713200"/>
           </a:xfrm>
           <a:prstGeom prst="rect">
             <a:avLst/>
@@ -8028,7 +8028,7 @@
         <p:spPr>
           <a:xfrm>
             <a:off x="4572000" y="6171840"/>
-            <a:ext cx="4254480" cy="360"/>
+            <a:ext cx="4254120" cy="360"/>
           </a:xfrm>
           <a:custGeom>
             <a:avLst/>
@@ -8077,7 +8077,7 @@
         <p:spPr>
           <a:xfrm>
             <a:off x="8703360" y="4464360"/>
-            <a:ext cx="715320" cy="308880"/>
+            <a:ext cx="714960" cy="308520"/>
           </a:xfrm>
           <a:prstGeom prst="rect">
             <a:avLst/>
@@ -8157,7 +8157,7 @@
         <p:spPr>
           <a:xfrm>
             <a:off x="8804880" y="3886200"/>
-            <a:ext cx="360" cy="1502640"/>
+            <a:ext cx="360" cy="1502280"/>
           </a:xfrm>
           <a:custGeom>
             <a:avLst/>
@@ -8206,7 +8206,7 @@
         <p:spPr>
           <a:xfrm>
             <a:off x="8134200" y="5029200"/>
-            <a:ext cx="715320" cy="308880"/>
+            <a:ext cx="714960" cy="308520"/>
           </a:xfrm>
           <a:prstGeom prst="rect">
             <a:avLst/>
@@ -8266,7 +8266,7 @@
         <p:spPr>
           <a:xfrm>
             <a:off x="-1143000" y="3299760"/>
-            <a:ext cx="4570920" cy="2871360"/>
+            <a:ext cx="4570560" cy="2871000"/>
           </a:xfrm>
           <a:prstGeom prst="rect">
             <a:avLst/>
@@ -8296,7 +8296,7 @@
         <p:spPr>
           <a:xfrm>
             <a:off x="-1086120" y="3528360"/>
-            <a:ext cx="3599640" cy="509400"/>
+            <a:ext cx="3599280" cy="509040"/>
           </a:xfrm>
           <a:prstGeom prst="rect">
             <a:avLst/>
@@ -8360,7 +8360,7 @@
         <p:spPr>
           <a:xfrm>
             <a:off x="2971800" y="4220640"/>
-            <a:ext cx="462600" cy="924120"/>
+            <a:ext cx="462240" cy="923760"/>
           </a:xfrm>
           <a:prstGeom prst="rect">
             <a:avLst/>
@@ -8398,7 +8398,7 @@
         <p:spPr>
           <a:xfrm>
             <a:off x="2063880" y="4825080"/>
-            <a:ext cx="1172520" cy="308880"/>
+            <a:ext cx="1172160" cy="308520"/>
           </a:xfrm>
           <a:prstGeom prst="rect">
             <a:avLst/>
@@ -8522,7 +8522,7 @@
         <p:spPr>
           <a:xfrm>
             <a:off x="3547440" y="4343400"/>
-            <a:ext cx="715320" cy="308880"/>
+            <a:ext cx="714960" cy="308520"/>
           </a:xfrm>
           <a:prstGeom prst="rect">
             <a:avLst/>
@@ -8582,7 +8582,7 @@
         <p:spPr>
           <a:xfrm>
             <a:off x="3524760" y="4240440"/>
-            <a:ext cx="21600" cy="924480"/>
+            <a:ext cx="21240" cy="924120"/>
           </a:xfrm>
           <a:custGeom>
             <a:avLst/>
@@ -8631,7 +8631,7 @@
         <p:spPr>
           <a:xfrm>
             <a:off x="2923560" y="5299920"/>
-            <a:ext cx="504360" cy="360"/>
+            <a:ext cx="504000" cy="360"/>
           </a:xfrm>
           <a:custGeom>
             <a:avLst/>
@@ -8680,7 +8680,7 @@
         <p:spPr>
           <a:xfrm>
             <a:off x="2808000" y="5290560"/>
-            <a:ext cx="715320" cy="308880"/>
+            <a:ext cx="714960" cy="308520"/>
           </a:xfrm>
           <a:prstGeom prst="rect">
             <a:avLst/>
@@ -8740,7 +8740,7 @@
         <p:spPr>
           <a:xfrm>
             <a:off x="3524760" y="5284440"/>
-            <a:ext cx="21600" cy="924480"/>
+            <a:ext cx="21240" cy="924120"/>
           </a:xfrm>
           <a:custGeom>
             <a:avLst/>
@@ -8789,7 +8789,7 @@
         <p:spPr>
           <a:xfrm>
             <a:off x="3627000" y="5486400"/>
-            <a:ext cx="715320" cy="308880"/>
+            <a:ext cx="714960" cy="308520"/>
           </a:xfrm>
           <a:prstGeom prst="rect">
             <a:avLst/>
@@ -8849,7 +8849,7 @@
         <p:spPr>
           <a:xfrm>
             <a:off x="4673520" y="5379120"/>
-            <a:ext cx="2412360" cy="360"/>
+            <a:ext cx="2412000" cy="360"/>
           </a:xfrm>
           <a:custGeom>
             <a:avLst/>
@@ -8898,7 +8898,7 @@
         <p:spPr>
           <a:xfrm>
             <a:off x="3549600" y="1143000"/>
-            <a:ext cx="564480" cy="694800"/>
+            <a:ext cx="564120" cy="694440"/>
           </a:xfrm>
           <a:prstGeom prst="rect">
             <a:avLst/>
@@ -8936,7 +8936,7 @@
         <p:spPr>
           <a:xfrm>
             <a:off x="3488760" y="1204920"/>
-            <a:ext cx="715320" cy="308880"/>
+            <a:ext cx="714960" cy="308520"/>
           </a:xfrm>
           <a:prstGeom prst="rect">
             <a:avLst/>
@@ -9029,7 +9029,7 @@
         <p:spPr>
           <a:xfrm>
             <a:off x="3560040" y="1957320"/>
-            <a:ext cx="600480" cy="360"/>
+            <a:ext cx="600120" cy="360"/>
           </a:xfrm>
           <a:custGeom>
             <a:avLst/>
@@ -9078,7 +9078,7 @@
         <p:spPr>
           <a:xfrm>
             <a:off x="3516840" y="1911960"/>
-            <a:ext cx="715320" cy="308880"/>
+            <a:ext cx="714960" cy="308520"/>
           </a:xfrm>
           <a:prstGeom prst="rect">
             <a:avLst/>
@@ -9136,9 +9136,9 @@
           <p:nvPr/>
         </p:nvSpPr>
         <p:spPr>
-          <a:xfrm flipV="1">
-            <a:off x="7315200" y="4343400"/>
-            <a:ext cx="0" cy="684720"/>
+          <a:xfrm flipH="1">
+            <a:off x="7086600" y="4523400"/>
+            <a:ext cx="899640" cy="0"/>
           </a:xfrm>
           <a:prstGeom prst="line">
             <a:avLst/>
@@ -9165,8 +9165,8 @@
         </p:nvSpPr>
         <p:spPr>
           <a:xfrm flipV="1">
-            <a:off x="7086600" y="4343400"/>
-            <a:ext cx="0" cy="685800"/>
+            <a:off x="7998840" y="4222800"/>
+            <a:ext cx="0" cy="913320"/>
           </a:xfrm>
           <a:prstGeom prst="line">
             <a:avLst/>
@@ -9192,9 +9192,9 @@
           <p:nvPr/>
         </p:nvSpPr>
         <p:spPr>
-          <a:xfrm flipH="1" flipV="1">
-            <a:off x="7986240" y="4343400"/>
-            <a:ext cx="12600" cy="684720"/>
+          <a:xfrm flipH="1">
+            <a:off x="7099200" y="4680000"/>
+            <a:ext cx="901800" cy="0"/>
           </a:xfrm>
           <a:prstGeom prst="line">
             <a:avLst/>
@@ -9220,9 +9220,9 @@
           <p:nvPr/>
         </p:nvSpPr>
         <p:spPr>
-          <a:xfrm flipV="1">
-            <a:off x="7543800" y="4363200"/>
-            <a:ext cx="0" cy="684720"/>
+          <a:xfrm flipH="1">
+            <a:off x="7086600" y="4872600"/>
+            <a:ext cx="899640" cy="0"/>
           </a:xfrm>
           <a:prstGeom prst="line">
             <a:avLst/>
@@ -9248,9 +9248,9 @@
           <p:nvPr/>
         </p:nvSpPr>
         <p:spPr>
-          <a:xfrm flipV="1">
-            <a:off x="7772400" y="4343400"/>
-            <a:ext cx="0" cy="684720"/>
+          <a:xfrm>
+            <a:off x="7099200" y="5099760"/>
+            <a:ext cx="863280" cy="0"/>
           </a:xfrm>
           <a:prstGeom prst="line">
             <a:avLst/>
@@ -9276,9 +9276,9 @@
           <p:nvPr/>
         </p:nvSpPr>
         <p:spPr>
-          <a:xfrm>
-            <a:off x="7171200" y="5029200"/>
-            <a:ext cx="756000" cy="0"/>
+          <a:xfrm flipV="1">
+            <a:off x="7099200" y="4290840"/>
+            <a:ext cx="863280" cy="16920"/>
           </a:xfrm>
           <a:prstGeom prst="line">
             <a:avLst/>
@@ -9305,15 +9305,15 @@
         </p:nvSpPr>
         <p:spPr>
           <a:xfrm>
-            <a:off x="7171200" y="4343400"/>
-            <a:ext cx="756000" cy="0"/>
+            <a:off x="7099200" y="4343400"/>
+            <a:ext cx="828360" cy="0"/>
           </a:xfrm>
           <a:prstGeom prst="line">
             <a:avLst/>
           </a:prstGeom>
-          <a:ln w="73080">
+          <a:ln w="18360">
             <a:solidFill>
-              <a:srgbClr val="bf0041"/>
+              <a:srgbClr val="ffff00"/>
             </a:solidFill>
             <a:round/>
           </a:ln>
@@ -9332,9 +9332,9 @@
           <p:nvPr/>
         </p:nvSpPr>
         <p:spPr>
-          <a:xfrm flipV="1">
-            <a:off x="7171200" y="4307400"/>
-            <a:ext cx="0" cy="684720"/>
+          <a:xfrm>
+            <a:off x="7134120" y="5027400"/>
+            <a:ext cx="828360" cy="0"/>
           </a:xfrm>
           <a:prstGeom prst="line">
             <a:avLst/>
@@ -9361,15 +9361,15 @@
         </p:nvSpPr>
         <p:spPr>
           <a:xfrm flipV="1">
-            <a:off x="7927200" y="4307400"/>
-            <a:ext cx="0" cy="684720"/>
+            <a:off x="7085520" y="4254840"/>
+            <a:ext cx="0" cy="913320"/>
           </a:xfrm>
           <a:prstGeom prst="line">
             <a:avLst/>
           </a:prstGeom>
-          <a:ln w="18360">
+          <a:ln w="73080">
             <a:solidFill>
-              <a:srgbClr val="ffff00"/>
+              <a:srgbClr val="bf0041"/>
             </a:solidFill>
             <a:round/>
           </a:ln>
@@ -9395,9 +9395,9 @@
         <p:txBody>
           <a:bodyPr/>
           <a:p>
-            <a:fld id="{0686EFE6-47F4-4278-A4C8-37140798BDAF}" type="datetime1">
+            <a:fld id="{379B09C5-ED41-4383-A41F-F531EAADEE2F}" type="datetime1">
               <a:rPr lang="en-US"/>
-              <a:t>06/03/2026</a:t>
+              <a:t>06/04/2026</a:t>
             </a:fld>
           </a:p>
         </p:txBody>
@@ -9445,7 +9445,7 @@
         <p:spPr>
           <a:xfrm>
             <a:off x="0" y="2130480"/>
-            <a:ext cx="9107280" cy="1433160"/>
+            <a:ext cx="9106920" cy="1432800"/>
           </a:xfrm>
           <a:prstGeom prst="rect">
             <a:avLst/>
@@ -9506,7 +9506,7 @@
         <p:txBody>
           <a:bodyPr/>
           <a:p>
-            <a:fld id="{9CFF835C-E1DE-4571-9305-B5F722805C9C}" type="slidenum">
+            <a:fld id="{4B74D094-37CA-4956-895D-63CE4545CA05}" type="slidenum">
               <a:t>3</a:t>
             </a:fld>
           </a:p>
@@ -9526,9 +9526,9 @@
         <p:txBody>
           <a:bodyPr/>
           <a:p>
-            <a:fld id="{5FBCAF85-EE87-4E95-9F0F-14611161F7AD}" type="datetime1">
+            <a:fld id="{0D032ADA-6940-45E3-9DEE-2A55D33FB292}" type="datetime1">
               <a:rPr lang="en-US"/>
-              <a:t>06/03/2026</a:t>
+              <a:t>06/04/2026</a:t>
             </a:fld>
           </a:p>
         </p:txBody>

--- a/Palo_Alto_2581/000_PaloAlto_Shed.pptx
+++ b/Palo_Alto_2581/000_PaloAlto_Shed.pptx
@@ -70,7 +70,79 @@
               <a:rPr b="0" lang="en-US" sz="4400" spc="-1" strike="noStrike">
                 <a:latin typeface="Arial"/>
               </a:rPr>
-              <a:t>Click to move the slide</a:t>
+              <a:t>Cl</a:t>
+            </a:r>
+            <a:r>
+              <a:rPr b="0" lang="en-US" sz="4400" spc="-1" strike="noStrike">
+                <a:latin typeface="Arial"/>
+              </a:rPr>
+              <a:t>ic</a:t>
+            </a:r>
+            <a:r>
+              <a:rPr b="0" lang="en-US" sz="4400" spc="-1" strike="noStrike">
+                <a:latin typeface="Arial"/>
+              </a:rPr>
+              <a:t>k </a:t>
+            </a:r>
+            <a:r>
+              <a:rPr b="0" lang="en-US" sz="4400" spc="-1" strike="noStrike">
+                <a:latin typeface="Arial"/>
+              </a:rPr>
+              <a:t>to </a:t>
+            </a:r>
+            <a:r>
+              <a:rPr b="0" lang="en-US" sz="4400" spc="-1" strike="noStrike">
+                <a:latin typeface="Arial"/>
+              </a:rPr>
+              <a:t>m</a:t>
+            </a:r>
+            <a:r>
+              <a:rPr b="0" lang="en-US" sz="4400" spc="-1" strike="noStrike">
+                <a:latin typeface="Arial"/>
+              </a:rPr>
+              <a:t>o</a:t>
+            </a:r>
+            <a:r>
+              <a:rPr b="0" lang="en-US" sz="4400" spc="-1" strike="noStrike">
+                <a:latin typeface="Arial"/>
+              </a:rPr>
+              <a:t>v</a:t>
+            </a:r>
+            <a:r>
+              <a:rPr b="0" lang="en-US" sz="4400" spc="-1" strike="noStrike">
+                <a:latin typeface="Arial"/>
+              </a:rPr>
+              <a:t>e </a:t>
+            </a:r>
+            <a:r>
+              <a:rPr b="0" lang="en-US" sz="4400" spc="-1" strike="noStrike">
+                <a:latin typeface="Arial"/>
+              </a:rPr>
+              <a:t>th</a:t>
+            </a:r>
+            <a:r>
+              <a:rPr b="0" lang="en-US" sz="4400" spc="-1" strike="noStrike">
+                <a:latin typeface="Arial"/>
+              </a:rPr>
+              <a:t>e </a:t>
+            </a:r>
+            <a:r>
+              <a:rPr b="0" lang="en-US" sz="4400" spc="-1" strike="noStrike">
+                <a:latin typeface="Arial"/>
+              </a:rPr>
+              <a:t>sli</a:t>
+            </a:r>
+            <a:r>
+              <a:rPr b="0" lang="en-US" sz="4400" spc="-1" strike="noStrike">
+                <a:latin typeface="Arial"/>
+              </a:rPr>
+              <a:t>d</a:t>
+            </a:r>
+            <a:r>
+              <a:rPr b="0" lang="en-US" sz="4400" spc="-1" strike="noStrike">
+                <a:latin typeface="Arial"/>
+              </a:rPr>
+              <a:t>e</a:t>
             </a:r>
             <a:endParaRPr b="0" lang="en-US" sz="4400" spc="-1" strike="noStrike">
               <a:latin typeface="Arial"/>
@@ -110,7 +182,79 @@
               <a:rPr b="0" lang="en-US" sz="2000" spc="-1" strike="noStrike">
                 <a:latin typeface="Arial"/>
               </a:rPr>
-              <a:t>Click to edit the notes format</a:t>
+              <a:t>Clic</a:t>
+            </a:r>
+            <a:r>
+              <a:rPr b="0" lang="en-US" sz="2000" spc="-1" strike="noStrike">
+                <a:latin typeface="Arial"/>
+              </a:rPr>
+              <a:t>k </a:t>
+            </a:r>
+            <a:r>
+              <a:rPr b="0" lang="en-US" sz="2000" spc="-1" strike="noStrike">
+                <a:latin typeface="Arial"/>
+              </a:rPr>
+              <a:t>to </a:t>
+            </a:r>
+            <a:r>
+              <a:rPr b="0" lang="en-US" sz="2000" spc="-1" strike="noStrike">
+                <a:latin typeface="Arial"/>
+              </a:rPr>
+              <a:t>ed</a:t>
+            </a:r>
+            <a:r>
+              <a:rPr b="0" lang="en-US" sz="2000" spc="-1" strike="noStrike">
+                <a:latin typeface="Arial"/>
+              </a:rPr>
+              <a:t>it </a:t>
+            </a:r>
+            <a:r>
+              <a:rPr b="0" lang="en-US" sz="2000" spc="-1" strike="noStrike">
+                <a:latin typeface="Arial"/>
+              </a:rPr>
+              <a:t>th</a:t>
+            </a:r>
+            <a:r>
+              <a:rPr b="0" lang="en-US" sz="2000" spc="-1" strike="noStrike">
+                <a:latin typeface="Arial"/>
+              </a:rPr>
+              <a:t>e </a:t>
+            </a:r>
+            <a:r>
+              <a:rPr b="0" lang="en-US" sz="2000" spc="-1" strike="noStrike">
+                <a:latin typeface="Arial"/>
+              </a:rPr>
+              <a:t>no</a:t>
+            </a:r>
+            <a:r>
+              <a:rPr b="0" lang="en-US" sz="2000" spc="-1" strike="noStrike">
+                <a:latin typeface="Arial"/>
+              </a:rPr>
+              <a:t>te</a:t>
+            </a:r>
+            <a:r>
+              <a:rPr b="0" lang="en-US" sz="2000" spc="-1" strike="noStrike">
+                <a:latin typeface="Arial"/>
+              </a:rPr>
+              <a:t>s </a:t>
+            </a:r>
+            <a:r>
+              <a:rPr b="0" lang="en-US" sz="2000" spc="-1" strike="noStrike">
+                <a:latin typeface="Arial"/>
+              </a:rPr>
+              <a:t>for</a:t>
+            </a:r>
+            <a:r>
+              <a:rPr b="0" lang="en-US" sz="2000" spc="-1" strike="noStrike">
+                <a:latin typeface="Arial"/>
+              </a:rPr>
+              <a:t>m</a:t>
+            </a:r>
+            <a:r>
+              <a:rPr b="0" lang="en-US" sz="2000" spc="-1" strike="noStrike">
+                <a:latin typeface="Arial"/>
+              </a:rPr>
+              <a:t>at</a:t>
             </a:r>
             <a:endParaRPr b="0" lang="en-US" sz="2000" spc="-1" strike="noStrike">
               <a:latin typeface="Arial"/>
@@ -295,7 +439,7 @@
             <a:pPr algn="r">
               <a:buNone/>
             </a:pPr>
-            <a:fld id="{C6683D54-AF19-4FE0-AEA7-DD0CB9E40CAA}" type="slidenum">
+            <a:fld id="{B0E4F4F2-0297-4938-900E-916F2681D1C0}" type="slidenum">
               <a:rPr b="0" lang="en-US" sz="1400" spc="-1" strike="noStrike">
                 <a:latin typeface="Times New Roman"/>
               </a:rPr>
@@ -332,7 +476,7 @@
       </p:grpSpPr>
       <p:sp>
         <p:nvSpPr>
-          <p:cNvPr id="156" name="PlaceHolder 1"/>
+          <p:cNvPr id="159" name="PlaceHolder 1"/>
           <p:cNvSpPr>
             <a:spLocks noGrp="1"/>
           </p:cNvSpPr>
@@ -343,7 +487,7 @@
         <p:spPr>
           <a:xfrm>
             <a:off x="1143000" y="685800"/>
-            <a:ext cx="4535280" cy="3392280"/>
+            <a:ext cx="4534920" cy="3391920"/>
           </a:xfrm>
           <a:prstGeom prst="rect">
             <a:avLst/>
@@ -355,7 +499,7 @@
       </p:sp>
       <p:sp>
         <p:nvSpPr>
-          <p:cNvPr id="157" name="PlaceHolder 2"/>
+          <p:cNvPr id="160" name="PlaceHolder 2"/>
           <p:cNvSpPr>
             <a:spLocks noGrp="1"/>
           </p:cNvSpPr>
@@ -366,7 +510,7 @@
         <p:spPr>
           <a:xfrm>
             <a:off x="685800" y="4343400"/>
-            <a:ext cx="5449320" cy="4077720"/>
+            <a:ext cx="5448960" cy="4077360"/>
           </a:xfrm>
           <a:prstGeom prst="rect">
             <a:avLst/>
@@ -389,7 +533,7 @@
       </p:sp>
       <p:sp>
         <p:nvSpPr>
-          <p:cNvPr id="158" name="PlaceHolder 3"/>
+          <p:cNvPr id="161" name="PlaceHolder 3"/>
           <p:cNvSpPr>
             <a:spLocks noGrp="1"/>
           </p:cNvSpPr>
@@ -400,7 +544,7 @@
         <p:spPr>
           <a:xfrm>
             <a:off x="3884760" y="8685360"/>
-            <a:ext cx="2934720" cy="420120"/>
+            <a:ext cx="2934360" cy="419760"/>
           </a:xfrm>
           <a:prstGeom prst="rect">
             <a:avLst/>
@@ -436,7 +580,7 @@
               </a:lnSpc>
               <a:buNone/>
             </a:pPr>
-            <a:fld id="{03955D52-4603-4F09-A624-82AFC3C4559B}" type="slidenum">
+            <a:fld id="{356EF1CA-F8A9-48BD-ACC9-0E91F9617B31}" type="slidenum">
               <a:rPr b="0" lang="en-US" sz="1200" spc="-1" strike="noStrike">
                 <a:solidFill>
                   <a:srgbClr val="000000"/>
@@ -508,7 +652,7 @@
         <p:txBody>
           <a:bodyPr/>
           <a:p>
-            <a:fld id="{2F441034-0930-4168-BDCC-348BE4A7FB3C}" type="slidenum">
+            <a:fld id="{8801709A-5613-4EAD-89E7-817E44DEB89B}" type="slidenum">
               <a:t>&lt;#&gt;</a:t>
             </a:fld>
           </a:p>
@@ -696,7 +840,7 @@
         <p:txBody>
           <a:bodyPr/>
           <a:p>
-            <a:fld id="{1D08F022-7C20-4381-8ECC-CFA9D297C6AE}" type="slidenum">
+            <a:fld id="{3E730661-3DC7-4B74-AE07-2BB019A9D275}" type="slidenum">
               <a:t>&lt;#&gt;</a:t>
             </a:fld>
           </a:p>
@@ -952,7 +1096,7 @@
         <p:txBody>
           <a:bodyPr/>
           <a:p>
-            <a:fld id="{3A06CB80-866A-456A-B381-52F4BD70C383}" type="slidenum">
+            <a:fld id="{8FBED34F-AD11-41B0-AF80-1BDCA8C8160F}" type="slidenum">
               <a:t>&lt;#&gt;</a:t>
             </a:fld>
           </a:p>
@@ -1276,7 +1420,7 @@
         <p:txBody>
           <a:bodyPr/>
           <a:p>
-            <a:fld id="{5EC6B2BA-79D6-4D75-A5D8-E0530D34D860}" type="slidenum">
+            <a:fld id="{720ABCEC-1836-4790-94A3-9238388922E6}" type="slidenum">
               <a:t>&lt;#&gt;</a:t>
             </a:fld>
           </a:p>
@@ -1359,7 +1503,7 @@
         <p:txBody>
           <a:bodyPr/>
           <a:p>
-            <a:fld id="{508F632B-D42E-4A07-8562-179FA293D49C}" type="slidenum">
+            <a:fld id="{D5B84C77-8FA5-4AD5-A2DC-729E2E3E8B26}" type="slidenum">
               <a:t>&lt;#&gt;</a:t>
             </a:fld>
           </a:p>
@@ -1516,7 +1660,7 @@
         <p:txBody>
           <a:bodyPr/>
           <a:p>
-            <a:fld id="{18DAE5A2-265E-4C5F-821A-10334304F5A1}" type="slidenum">
+            <a:fld id="{107A0933-7CE5-4A13-88DC-EBFFDBD66158}" type="slidenum">
               <a:t>&lt;#&gt;</a:t>
             </a:fld>
           </a:p>
@@ -1670,7 +1814,7 @@
         <p:txBody>
           <a:bodyPr/>
           <a:p>
-            <a:fld id="{6173788D-FE19-4011-8E79-D709FC4202A0}" type="slidenum">
+            <a:fld id="{913C9752-AA34-4307-ACDF-A62304AF125B}" type="slidenum">
               <a:t>&lt;#&gt;</a:t>
             </a:fld>
           </a:p>
@@ -1858,7 +2002,7 @@
         <p:txBody>
           <a:bodyPr/>
           <a:p>
-            <a:fld id="{7EA69BE5-3CF2-47AF-B664-B9E34595ED5F}" type="slidenum">
+            <a:fld id="{41544742-CD14-4D80-81C7-34F70824508A}" type="slidenum">
               <a:t>&lt;#&gt;</a:t>
             </a:fld>
           </a:p>
@@ -1978,7 +2122,7 @@
         <p:txBody>
           <a:bodyPr/>
           <a:p>
-            <a:fld id="{28976FF4-DB4E-45CC-9FF8-BB2B68916D34}" type="slidenum">
+            <a:fld id="{CCC029D6-85EF-419D-AF3F-785088D1C8A8}" type="slidenum">
               <a:t>&lt;#&gt;</a:t>
             </a:fld>
           </a:p>
@@ -2098,7 +2242,7 @@
         <p:txBody>
           <a:bodyPr/>
           <a:p>
-            <a:fld id="{EF260500-E8F0-4385-809B-E96662F8E47D}" type="slidenum">
+            <a:fld id="{CAFC1188-CC23-4DA9-A5DE-F79AF5CFE62C}" type="slidenum">
               <a:t>&lt;#&gt;</a:t>
             </a:fld>
           </a:p>
@@ -2320,7 +2464,7 @@
         <p:txBody>
           <a:bodyPr/>
           <a:p>
-            <a:fld id="{313195C4-D0A6-4DF5-9966-07B27EDBBFD6}" type="slidenum">
+            <a:fld id="{536CE6AF-6521-48D6-83F1-9080998485BA}" type="slidenum">
               <a:t>&lt;#&gt;</a:t>
             </a:fld>
           </a:p>
@@ -2477,7 +2621,7 @@
         <p:txBody>
           <a:bodyPr/>
           <a:p>
-            <a:fld id="{EEC4B584-E593-4B7B-B0BE-5DBB8CEF6574}" type="slidenum">
+            <a:fld id="{0017D6C0-13AC-473D-ADD1-E84182DB8335}" type="slidenum">
               <a:t>&lt;#&gt;</a:t>
             </a:fld>
           </a:p>
@@ -2699,7 +2843,7 @@
         <p:txBody>
           <a:bodyPr/>
           <a:p>
-            <a:fld id="{A0E34EC3-F30D-44AF-8045-52C0E71A74AA}" type="slidenum">
+            <a:fld id="{FFEA2139-52D0-4699-B486-03A009A796A5}" type="slidenum">
               <a:t>&lt;#&gt;</a:t>
             </a:fld>
           </a:p>
@@ -2921,7 +3065,7 @@
         <p:txBody>
           <a:bodyPr/>
           <a:p>
-            <a:fld id="{D8CF49A0-AB32-4FDC-AEA4-55A9BA4CE698}" type="slidenum">
+            <a:fld id="{BF834D18-DD9F-442C-B962-02DAD2993304}" type="slidenum">
               <a:t>&lt;#&gt;</a:t>
             </a:fld>
           </a:p>
@@ -3109,7 +3253,7 @@
         <p:txBody>
           <a:bodyPr/>
           <a:p>
-            <a:fld id="{1340931F-1EA6-4DD6-AE3D-C27FBFE04CAF}" type="slidenum">
+            <a:fld id="{675FC4F5-B2E9-44B0-A85C-30E50FD2B870}" type="slidenum">
               <a:t>&lt;#&gt;</a:t>
             </a:fld>
           </a:p>
@@ -3365,7 +3509,7 @@
         <p:txBody>
           <a:bodyPr/>
           <a:p>
-            <a:fld id="{E6D78422-C79E-4A07-96BF-DEAB28DA9A52}" type="slidenum">
+            <a:fld id="{87A1BD3D-1B05-42E1-9197-8F2A96A98624}" type="slidenum">
               <a:t>&lt;#&gt;</a:t>
             </a:fld>
           </a:p>
@@ -3689,7 +3833,7 @@
         <p:txBody>
           <a:bodyPr/>
           <a:p>
-            <a:fld id="{722E2A00-E1A3-4E65-AF90-F72D80FD1872}" type="slidenum">
+            <a:fld id="{02CEECAF-93BA-4FEA-A858-0C38078CB1CF}" type="slidenum">
               <a:t>&lt;#&gt;</a:t>
             </a:fld>
           </a:p>
@@ -3843,7 +3987,7 @@
         <p:txBody>
           <a:bodyPr/>
           <a:p>
-            <a:fld id="{BC0852EB-5F20-4A44-9B2F-147AB8BB2AA4}" type="slidenum">
+            <a:fld id="{88A09874-8F9A-45DA-9538-982842B85F21}" type="slidenum">
               <a:t>&lt;#&gt;</a:t>
             </a:fld>
           </a:p>
@@ -4031,7 +4175,7 @@
         <p:txBody>
           <a:bodyPr/>
           <a:p>
-            <a:fld id="{2161E328-87CF-4835-A425-11D7A2002F43}" type="slidenum">
+            <a:fld id="{1F6A62A4-5C8D-46EF-8D85-8D94089DC0C1}" type="slidenum">
               <a:t>&lt;#&gt;</a:t>
             </a:fld>
           </a:p>
@@ -4151,7 +4295,7 @@
         <p:txBody>
           <a:bodyPr/>
           <a:p>
-            <a:fld id="{267D886D-B939-481E-A013-F978F70A2C9B}" type="slidenum">
+            <a:fld id="{09F519C8-2805-4818-9DD5-9E36ECFF198A}" type="slidenum">
               <a:t>&lt;#&gt;</a:t>
             </a:fld>
           </a:p>
@@ -4271,7 +4415,7 @@
         <p:txBody>
           <a:bodyPr/>
           <a:p>
-            <a:fld id="{CD1BC86F-2036-4428-A807-EE37ACAD5980}" type="slidenum">
+            <a:fld id="{7DC3887D-BFA1-4816-B4A3-52CD80CA5229}" type="slidenum">
               <a:t>&lt;#&gt;</a:t>
             </a:fld>
           </a:p>
@@ -4493,7 +4637,7 @@
         <p:txBody>
           <a:bodyPr/>
           <a:p>
-            <a:fld id="{7D2DE624-6C48-40E6-A0E0-0C1E1E5853CD}" type="slidenum">
+            <a:fld id="{1C644274-D3F5-4E4B-9190-FA15181F1B0A}" type="slidenum">
               <a:t>&lt;#&gt;</a:t>
             </a:fld>
           </a:p>
@@ -4715,7 +4859,7 @@
         <p:txBody>
           <a:bodyPr/>
           <a:p>
-            <a:fld id="{8F34ABA5-950C-4226-9A77-6C4703AAA65A}" type="slidenum">
+            <a:fld id="{34D279C0-6E84-4A7B-AE15-9E956386CDE6}" type="slidenum">
               <a:t>&lt;#&gt;</a:t>
             </a:fld>
           </a:p>
@@ -4937,7 +5081,7 @@
         <p:txBody>
           <a:bodyPr/>
           <a:p>
-            <a:fld id="{4A7DDD80-AFA5-41E1-B6E3-E6BAE02C295D}" type="slidenum">
+            <a:fld id="{177DD405-6DAD-44B0-A489-4F632973D4E5}" type="slidenum">
               <a:t>&lt;#&gt;</a:t>
             </a:fld>
           </a:p>
@@ -5006,7 +5150,7 @@
         <p:spPr>
           <a:xfrm>
             <a:off x="3124080" y="6356520"/>
-            <a:ext cx="2858400" cy="327960"/>
+            <a:ext cx="2858040" cy="327600"/>
           </a:xfrm>
           <a:prstGeom prst="rect">
             <a:avLst/>
@@ -5071,7 +5215,7 @@
         <p:spPr>
           <a:xfrm>
             <a:off x="6553080" y="6356520"/>
-            <a:ext cx="2096640" cy="327960"/>
+            <a:ext cx="2096280" cy="327600"/>
           </a:xfrm>
           <a:prstGeom prst="rect">
             <a:avLst/>
@@ -5107,7 +5251,7 @@
               </a:lnSpc>
               <a:buNone/>
             </a:pPr>
-            <a:fld id="{A8130B80-24EA-479E-B162-543C2581C450}" type="slidenum">
+            <a:fld id="{0CF566D8-A43F-4DD1-926D-4999D61A3C10}" type="slidenum">
               <a:rPr b="0" lang="en-US" sz="1200" spc="-1" strike="noStrike">
                 <a:solidFill>
                   <a:srgbClr val="8b8b8b"/>
@@ -5136,7 +5280,7 @@
         <p:spPr>
           <a:xfrm>
             <a:off x="457200" y="6356520"/>
-            <a:ext cx="2096640" cy="327960"/>
+            <a:ext cx="2096280" cy="327600"/>
           </a:xfrm>
           <a:prstGeom prst="rect">
             <a:avLst/>
@@ -5205,7 +5349,103 @@
               <a:rPr b="0" lang="en-US" sz="4400" spc="-1" strike="noStrike">
                 <a:latin typeface="Arial"/>
               </a:rPr>
-              <a:t>Click to edit the title text format</a:t>
+              <a:t>Cl</a:t>
+            </a:r>
+            <a:r>
+              <a:rPr b="0" lang="en-US" sz="4400" spc="-1" strike="noStrike">
+                <a:latin typeface="Arial"/>
+              </a:rPr>
+              <a:t>ic</a:t>
+            </a:r>
+            <a:r>
+              <a:rPr b="0" lang="en-US" sz="4400" spc="-1" strike="noStrike">
+                <a:latin typeface="Arial"/>
+              </a:rPr>
+              <a:t>k </a:t>
+            </a:r>
+            <a:r>
+              <a:rPr b="0" lang="en-US" sz="4400" spc="-1" strike="noStrike">
+                <a:latin typeface="Arial"/>
+              </a:rPr>
+              <a:t>to </a:t>
+            </a:r>
+            <a:r>
+              <a:rPr b="0" lang="en-US" sz="4400" spc="-1" strike="noStrike">
+                <a:latin typeface="Arial"/>
+              </a:rPr>
+              <a:t>e</a:t>
+            </a:r>
+            <a:r>
+              <a:rPr b="0" lang="en-US" sz="4400" spc="-1" strike="noStrike">
+                <a:latin typeface="Arial"/>
+              </a:rPr>
+              <a:t>di</a:t>
+            </a:r>
+            <a:r>
+              <a:rPr b="0" lang="en-US" sz="4400" spc="-1" strike="noStrike">
+                <a:latin typeface="Arial"/>
+              </a:rPr>
+              <a:t>t </a:t>
+            </a:r>
+            <a:r>
+              <a:rPr b="0" lang="en-US" sz="4400" spc="-1" strike="noStrike">
+                <a:latin typeface="Arial"/>
+              </a:rPr>
+              <a:t>th</a:t>
+            </a:r>
+            <a:r>
+              <a:rPr b="0" lang="en-US" sz="4400" spc="-1" strike="noStrike">
+                <a:latin typeface="Arial"/>
+              </a:rPr>
+              <a:t>e </a:t>
+            </a:r>
+            <a:r>
+              <a:rPr b="0" lang="en-US" sz="4400" spc="-1" strike="noStrike">
+                <a:latin typeface="Arial"/>
+              </a:rPr>
+              <a:t>tit</a:t>
+            </a:r>
+            <a:r>
+              <a:rPr b="0" lang="en-US" sz="4400" spc="-1" strike="noStrike">
+                <a:latin typeface="Arial"/>
+              </a:rPr>
+              <a:t>le </a:t>
+            </a:r>
+            <a:r>
+              <a:rPr b="0" lang="en-US" sz="4400" spc="-1" strike="noStrike">
+                <a:latin typeface="Arial"/>
+              </a:rPr>
+              <a:t>te</a:t>
+            </a:r>
+            <a:r>
+              <a:rPr b="0" lang="en-US" sz="4400" spc="-1" strike="noStrike">
+                <a:latin typeface="Arial"/>
+              </a:rPr>
+              <a:t>xt </a:t>
+            </a:r>
+            <a:r>
+              <a:rPr b="0" lang="en-US" sz="4400" spc="-1" strike="noStrike">
+                <a:latin typeface="Arial"/>
+              </a:rPr>
+              <a:t>fo</a:t>
+            </a:r>
+            <a:r>
+              <a:rPr b="0" lang="en-US" sz="4400" spc="-1" strike="noStrike">
+                <a:latin typeface="Arial"/>
+              </a:rPr>
+              <a:t>r</a:t>
+            </a:r>
+            <a:r>
+              <a:rPr b="0" lang="en-US" sz="4400" spc="-1" strike="noStrike">
+                <a:latin typeface="Arial"/>
+              </a:rPr>
+              <a:t>m</a:t>
+            </a:r>
+            <a:r>
+              <a:rPr b="0" lang="en-US" sz="4400" spc="-1" strike="noStrike">
+                <a:latin typeface="Arial"/>
+              </a:rPr>
+              <a:t>at</a:t>
             </a:r>
             <a:endParaRPr b="0" lang="en-US" sz="4400" spc="-1" strike="noStrike">
               <a:latin typeface="Arial"/>
@@ -5453,7 +5693,7 @@
         <p:spPr>
           <a:xfrm>
             <a:off x="3124080" y="6356520"/>
-            <a:ext cx="2858400" cy="327960"/>
+            <a:ext cx="2858040" cy="327600"/>
           </a:xfrm>
           <a:prstGeom prst="rect">
             <a:avLst/>
@@ -5518,7 +5758,7 @@
         <p:spPr>
           <a:xfrm>
             <a:off x="6553080" y="6356520"/>
-            <a:ext cx="2096640" cy="327960"/>
+            <a:ext cx="2096280" cy="327600"/>
           </a:xfrm>
           <a:prstGeom prst="rect">
             <a:avLst/>
@@ -5554,7 +5794,7 @@
               </a:lnSpc>
               <a:buNone/>
             </a:pPr>
-            <a:fld id="{24417EB1-4DF8-414D-BC09-C55FE125EFC3}" type="slidenum">
+            <a:fld id="{06328D1E-D17B-46F5-9EE1-D4321B086C3C}" type="slidenum">
               <a:rPr b="0" lang="en-US" sz="1200" spc="-1" strike="noStrike">
                 <a:solidFill>
                   <a:srgbClr val="8b8b8b"/>
@@ -5583,7 +5823,7 @@
         <p:spPr>
           <a:xfrm>
             <a:off x="457200" y="6356520"/>
-            <a:ext cx="2096640" cy="327960"/>
+            <a:ext cx="2096280" cy="327600"/>
           </a:xfrm>
           <a:prstGeom prst="rect">
             <a:avLst/>
@@ -5893,7 +6133,7 @@
         <p:spPr>
           <a:xfrm>
             <a:off x="0" y="2130480"/>
-            <a:ext cx="9126720" cy="1432800"/>
+            <a:ext cx="9126360" cy="1432440"/>
           </a:xfrm>
           <a:prstGeom prst="rect">
             <a:avLst/>
@@ -5924,7 +6164,187 @@
                 <a:latin typeface="Calibri"/>
                 <a:ea typeface="DejaVu Sans"/>
               </a:rPr>
-              <a:t>001 Palo Alto 2581 - 2587</a:t>
+              <a:t>0</a:t>
+            </a:r>
+            <a:r>
+              <a:rPr b="1" lang="en-US" sz="4200" spc="-1" strike="noStrike">
+                <a:solidFill>
+                  <a:srgbClr val="ffff00"/>
+                </a:solidFill>
+                <a:latin typeface="Calibri"/>
+                <a:ea typeface="DejaVu Sans"/>
+              </a:rPr>
+              <a:t>0</a:t>
+            </a:r>
+            <a:r>
+              <a:rPr b="1" lang="en-US" sz="4200" spc="-1" strike="noStrike">
+                <a:solidFill>
+                  <a:srgbClr val="ffff00"/>
+                </a:solidFill>
+                <a:latin typeface="Calibri"/>
+                <a:ea typeface="DejaVu Sans"/>
+              </a:rPr>
+              <a:t>1 </a:t>
+            </a:r>
+            <a:r>
+              <a:rPr b="1" lang="en-US" sz="4200" spc="-1" strike="noStrike">
+                <a:solidFill>
+                  <a:srgbClr val="ffff00"/>
+                </a:solidFill>
+                <a:latin typeface="Calibri"/>
+                <a:ea typeface="DejaVu Sans"/>
+              </a:rPr>
+              <a:t>P</a:t>
+            </a:r>
+            <a:r>
+              <a:rPr b="1" lang="en-US" sz="4200" spc="-1" strike="noStrike">
+                <a:solidFill>
+                  <a:srgbClr val="ffff00"/>
+                </a:solidFill>
+                <a:latin typeface="Calibri"/>
+                <a:ea typeface="DejaVu Sans"/>
+              </a:rPr>
+              <a:t>a</a:t>
+            </a:r>
+            <a:r>
+              <a:rPr b="1" lang="en-US" sz="4200" spc="-1" strike="noStrike">
+                <a:solidFill>
+                  <a:srgbClr val="ffff00"/>
+                </a:solidFill>
+                <a:latin typeface="Calibri"/>
+                <a:ea typeface="DejaVu Sans"/>
+              </a:rPr>
+              <a:t>l</a:t>
+            </a:r>
+            <a:r>
+              <a:rPr b="1" lang="en-US" sz="4200" spc="-1" strike="noStrike">
+                <a:solidFill>
+                  <a:srgbClr val="ffff00"/>
+                </a:solidFill>
+                <a:latin typeface="Calibri"/>
+                <a:ea typeface="DejaVu Sans"/>
+              </a:rPr>
+              <a:t>o </a:t>
+            </a:r>
+            <a:r>
+              <a:rPr b="1" lang="en-US" sz="4200" spc="-1" strike="noStrike">
+                <a:solidFill>
+                  <a:srgbClr val="ffff00"/>
+                </a:solidFill>
+                <a:latin typeface="Calibri"/>
+                <a:ea typeface="DejaVu Sans"/>
+              </a:rPr>
+              <a:t>A</a:t>
+            </a:r>
+            <a:r>
+              <a:rPr b="1" lang="en-US" sz="4200" spc="-1" strike="noStrike">
+                <a:solidFill>
+                  <a:srgbClr val="ffff00"/>
+                </a:solidFill>
+                <a:latin typeface="Calibri"/>
+                <a:ea typeface="DejaVu Sans"/>
+              </a:rPr>
+              <a:t>lt</a:t>
+            </a:r>
+            <a:r>
+              <a:rPr b="1" lang="en-US" sz="4200" spc="-1" strike="noStrike">
+                <a:solidFill>
+                  <a:srgbClr val="ffff00"/>
+                </a:solidFill>
+                <a:latin typeface="Calibri"/>
+                <a:ea typeface="DejaVu Sans"/>
+              </a:rPr>
+              <a:t>o </a:t>
+            </a:r>
+            <a:r>
+              <a:rPr b="1" lang="en-US" sz="4200" spc="-1" strike="noStrike">
+                <a:solidFill>
+                  <a:srgbClr val="ffff00"/>
+                </a:solidFill>
+                <a:latin typeface="Calibri"/>
+                <a:ea typeface="DejaVu Sans"/>
+              </a:rPr>
+              <a:t>2</a:t>
+            </a:r>
+            <a:r>
+              <a:rPr b="1" lang="en-US" sz="4200" spc="-1" strike="noStrike">
+                <a:solidFill>
+                  <a:srgbClr val="ffff00"/>
+                </a:solidFill>
+                <a:latin typeface="Calibri"/>
+                <a:ea typeface="DejaVu Sans"/>
+              </a:rPr>
+              <a:t>5</a:t>
+            </a:r>
+            <a:r>
+              <a:rPr b="1" lang="en-US" sz="4200" spc="-1" strike="noStrike">
+                <a:solidFill>
+                  <a:srgbClr val="ffff00"/>
+                </a:solidFill>
+                <a:latin typeface="Calibri"/>
+                <a:ea typeface="DejaVu Sans"/>
+              </a:rPr>
+              <a:t>8</a:t>
+            </a:r>
+            <a:r>
+              <a:rPr b="1" lang="en-US" sz="4200" spc="-1" strike="noStrike">
+                <a:solidFill>
+                  <a:srgbClr val="ffff00"/>
+                </a:solidFill>
+                <a:latin typeface="Calibri"/>
+                <a:ea typeface="DejaVu Sans"/>
+              </a:rPr>
+              <a:t>1 </a:t>
+            </a:r>
+            <a:r>
+              <a:rPr b="1" lang="en-US" sz="4200" spc="-1" strike="noStrike">
+                <a:solidFill>
+                  <a:srgbClr val="ffff00"/>
+                </a:solidFill>
+                <a:latin typeface="Calibri"/>
+                <a:ea typeface="DejaVu Sans"/>
+              </a:rPr>
+              <a:t>- </a:t>
+            </a:r>
+            <a:r>
+              <a:rPr b="1" lang="en-US" sz="4200" spc="-1" strike="noStrike">
+                <a:solidFill>
+                  <a:srgbClr val="ffff00"/>
+                </a:solidFill>
+                <a:latin typeface="Calibri"/>
+                <a:ea typeface="DejaVu Sans"/>
+              </a:rPr>
+              <a:t>2</a:t>
+            </a:r>
+            <a:r>
+              <a:rPr b="1" lang="en-US" sz="4200" spc="-1" strike="noStrike">
+                <a:solidFill>
+                  <a:srgbClr val="ffff00"/>
+                </a:solidFill>
+                <a:latin typeface="Calibri"/>
+                <a:ea typeface="DejaVu Sans"/>
+              </a:rPr>
+              <a:t>5</a:t>
+            </a:r>
+            <a:r>
+              <a:rPr b="1" lang="en-US" sz="4200" spc="-1" strike="noStrike">
+                <a:solidFill>
+                  <a:srgbClr val="ffff00"/>
+                </a:solidFill>
+                <a:latin typeface="Calibri"/>
+                <a:ea typeface="DejaVu Sans"/>
+              </a:rPr>
+              <a:t>8</a:t>
+            </a:r>
+            <a:r>
+              <a:rPr b="1" lang="en-US" sz="4200" spc="-1" strike="noStrike">
+                <a:solidFill>
+                  <a:srgbClr val="ffff00"/>
+                </a:solidFill>
+                <a:latin typeface="Calibri"/>
+                <a:ea typeface="DejaVu Sans"/>
+              </a:rPr>
+              <a:t>7</a:t>
             </a:r>
             <a:endParaRPr b="0" lang="en-US" sz="4200" spc="-1" strike="noStrike">
               <a:latin typeface="Arial"/>
@@ -5945,7 +6365,7 @@
         <p:spPr>
           <a:xfrm>
             <a:off x="1371600" y="4563360"/>
-            <a:ext cx="6363720" cy="657720"/>
+            <a:ext cx="6363360" cy="657360"/>
           </a:xfrm>
           <a:prstGeom prst="rect">
             <a:avLst/>
@@ -5980,7 +6400,47 @@
                 <a:latin typeface="Calibri"/>
                 <a:ea typeface="DejaVu Sans"/>
               </a:rPr>
-              <a:t>Peter H. Chen</a:t>
+              <a:t>Pete</a:t>
+            </a:r>
+            <a:r>
+              <a:rPr b="0" lang="en-US" sz="3200" spc="-1" strike="noStrike">
+                <a:solidFill>
+                  <a:srgbClr val="8b8b8b"/>
+                </a:solidFill>
+                <a:latin typeface="Calibri"/>
+                <a:ea typeface="DejaVu Sans"/>
+              </a:rPr>
+              <a:t>r </a:t>
+            </a:r>
+            <a:r>
+              <a:rPr b="0" lang="en-US" sz="3200" spc="-1" strike="noStrike">
+                <a:solidFill>
+                  <a:srgbClr val="8b8b8b"/>
+                </a:solidFill>
+                <a:latin typeface="Calibri"/>
+                <a:ea typeface="DejaVu Sans"/>
+              </a:rPr>
+              <a:t>H. </a:t>
+            </a:r>
+            <a:r>
+              <a:rPr b="0" lang="en-US" sz="3200" spc="-1" strike="noStrike">
+                <a:solidFill>
+                  <a:srgbClr val="8b8b8b"/>
+                </a:solidFill>
+                <a:latin typeface="Calibri"/>
+                <a:ea typeface="DejaVu Sans"/>
+              </a:rPr>
+              <a:t>Ch</a:t>
+            </a:r>
+            <a:r>
+              <a:rPr b="0" lang="en-US" sz="3200" spc="-1" strike="noStrike">
+                <a:solidFill>
+                  <a:srgbClr val="8b8b8b"/>
+                </a:solidFill>
+                <a:latin typeface="Calibri"/>
+                <a:ea typeface="DejaVu Sans"/>
+              </a:rPr>
+              <a:t>en</a:t>
             </a:r>
             <a:endParaRPr b="0" lang="en-US" sz="3200" spc="-1" strike="noStrike">
               <a:latin typeface="Arial"/>
@@ -6001,7 +6461,7 @@
         <p:spPr>
           <a:xfrm>
             <a:off x="4212000" y="3645000"/>
-            <a:ext cx="904680" cy="875880"/>
+            <a:ext cx="904320" cy="875520"/>
           </a:xfrm>
           <a:prstGeom prst="rect">
             <a:avLst/>
@@ -6025,7 +6485,7 @@
         <p:txBody>
           <a:bodyPr/>
           <a:p>
-            <a:fld id="{E636E0E5-9925-4C9D-B7BF-6F46E30A4CA2}" type="slidenum">
+            <a:fld id="{0C7B2584-0495-4091-91DC-E28B665FB9EE}" type="slidenum">
               <a:t>1</a:t>
             </a:fld>
           </a:p>
@@ -6045,9 +6505,9 @@
         <p:txBody>
           <a:bodyPr/>
           <a:p>
-            <a:fld id="{05B9CCED-0726-4E58-B886-154822F0DD44}" type="datetime1">
+            <a:fld id="{17F7B04B-0A27-41F8-85CA-C58C439C6203}" type="datetime1">
               <a:rPr lang="en-US"/>
-              <a:t>06/04/2026</a:t>
+              <a:t>07/04/2026</a:t>
             </a:fld>
           </a:p>
         </p:txBody>
@@ -6095,7 +6555,7 @@
         <p:spPr>
           <a:xfrm>
             <a:off x="10080" y="0"/>
-            <a:ext cx="9126000" cy="727560"/>
+            <a:ext cx="9125640" cy="727200"/>
           </a:xfrm>
           <a:prstGeom prst="rect">
             <a:avLst/>
@@ -6134,7 +6594,57 @@
                 <a:latin typeface="Calibri"/>
                 <a:ea typeface="DejaVu Sans"/>
               </a:rPr>
-              <a:t>001 Palo Alto 2581 - 2581</a:t>
+              <a:t>001 </a:t>
+            </a:r>
+            <a:r>
+              <a:rPr b="1" lang="en-US" sz="4200" spc="-1" strike="noStrike">
+                <a:solidFill>
+                  <a:srgbClr val="ffff00"/>
+                </a:solidFill>
+                <a:latin typeface="Calibri"/>
+                <a:ea typeface="DejaVu Sans"/>
+              </a:rPr>
+              <a:t>Palo </a:t>
+            </a:r>
+            <a:r>
+              <a:rPr b="1" lang="en-US" sz="4200" spc="-1" strike="noStrike">
+                <a:solidFill>
+                  <a:srgbClr val="ffff00"/>
+                </a:solidFill>
+                <a:latin typeface="Calibri"/>
+                <a:ea typeface="DejaVu Sans"/>
+              </a:rPr>
+              <a:t>Alto </a:t>
+            </a:r>
+            <a:r>
+              <a:rPr b="1" lang="en-US" sz="4200" spc="-1" strike="noStrike">
+                <a:solidFill>
+                  <a:srgbClr val="ffff00"/>
+                </a:solidFill>
+                <a:latin typeface="Calibri"/>
+                <a:ea typeface="DejaVu Sans"/>
+              </a:rPr>
+              <a:t>2581 </a:t>
+            </a:r>
+            <a:r>
+              <a:rPr b="1" lang="en-US" sz="4200" spc="-1" strike="noStrike">
+                <a:solidFill>
+                  <a:srgbClr val="ffff00"/>
+                </a:solidFill>
+                <a:latin typeface="Calibri"/>
+                <a:ea typeface="DejaVu Sans"/>
+              </a:rPr>
+              <a:t>- </a:t>
+            </a:r>
+            <a:r>
+              <a:rPr b="1" lang="en-US" sz="4200" spc="-1" strike="noStrike">
+                <a:solidFill>
+                  <a:srgbClr val="ffff00"/>
+                </a:solidFill>
+                <a:latin typeface="Calibri"/>
+                <a:ea typeface="DejaVu Sans"/>
+              </a:rPr>
+              <a:t>2581</a:t>
             </a:r>
             <a:endParaRPr b="0" lang="en-US" sz="4200" spc="-1" strike="noStrike">
               <a:latin typeface="Arial"/>
@@ -6155,7 +6665,7 @@
         <p:spPr>
           <a:xfrm>
             <a:off x="232200" y="1302120"/>
-            <a:ext cx="2271960" cy="1896840"/>
+            <a:ext cx="2271600" cy="1896480"/>
           </a:xfrm>
           <a:prstGeom prst="rect">
             <a:avLst/>
@@ -6193,7 +6703,217 @@
                 <a:latin typeface="Calibri"/>
                 <a:ea typeface="DejaVu Sans"/>
               </a:rPr>
-              <a:t>Palo Alto 2581 to 2587</a:t>
+              <a:t>P</a:t>
+            </a:r>
+            <a:r>
+              <a:rPr b="1" lang="en-US" sz="1300" spc="-1" strike="noStrike">
+                <a:solidFill>
+                  <a:srgbClr val="000000"/>
+                </a:solidFill>
+                <a:latin typeface="Calibri"/>
+                <a:ea typeface="DejaVu Sans"/>
+              </a:rPr>
+              <a:t>a</a:t>
+            </a:r>
+            <a:r>
+              <a:rPr b="1" lang="en-US" sz="1300" spc="-1" strike="noStrike">
+                <a:solidFill>
+                  <a:srgbClr val="000000"/>
+                </a:solidFill>
+                <a:latin typeface="Calibri"/>
+                <a:ea typeface="DejaVu Sans"/>
+              </a:rPr>
+              <a:t>l</a:t>
+            </a:r>
+            <a:r>
+              <a:rPr b="1" lang="en-US" sz="1300" spc="-1" strike="noStrike">
+                <a:solidFill>
+                  <a:srgbClr val="000000"/>
+                </a:solidFill>
+                <a:latin typeface="Calibri"/>
+                <a:ea typeface="DejaVu Sans"/>
+              </a:rPr>
+              <a:t>o</a:t>
+            </a:r>
+            <a:r>
+              <a:rPr b="1" lang="en-US" sz="1300" spc="-1" strike="noStrike">
+                <a:solidFill>
+                  <a:srgbClr val="000000"/>
+                </a:solidFill>
+                <a:latin typeface="Calibri"/>
+                <a:ea typeface="DejaVu Sans"/>
+              </a:rPr>
+              <a:t> </a:t>
+            </a:r>
+            <a:r>
+              <a:rPr b="1" lang="en-US" sz="1300" spc="-1" strike="noStrike">
+                <a:solidFill>
+                  <a:srgbClr val="000000"/>
+                </a:solidFill>
+                <a:latin typeface="Calibri"/>
+                <a:ea typeface="DejaVu Sans"/>
+              </a:rPr>
+              <a:t>A</a:t>
+            </a:r>
+            <a:r>
+              <a:rPr b="1" lang="en-US" sz="1300" spc="-1" strike="noStrike">
+                <a:solidFill>
+                  <a:srgbClr val="000000"/>
+                </a:solidFill>
+                <a:latin typeface="Calibri"/>
+                <a:ea typeface="DejaVu Sans"/>
+              </a:rPr>
+              <a:t>l</a:t>
+            </a:r>
+            <a:r>
+              <a:rPr b="1" lang="en-US" sz="1300" spc="-1" strike="noStrike">
+                <a:solidFill>
+                  <a:srgbClr val="000000"/>
+                </a:solidFill>
+                <a:latin typeface="Calibri"/>
+                <a:ea typeface="DejaVu Sans"/>
+              </a:rPr>
+              <a:t>t</a:t>
+            </a:r>
+            <a:r>
+              <a:rPr b="1" lang="en-US" sz="1300" spc="-1" strike="noStrike">
+                <a:solidFill>
+                  <a:srgbClr val="000000"/>
+                </a:solidFill>
+                <a:latin typeface="Calibri"/>
+                <a:ea typeface="DejaVu Sans"/>
+              </a:rPr>
+              <a:t>o</a:t>
+            </a:r>
+            <a:r>
+              <a:rPr b="1" lang="en-US" sz="1300" spc="-1" strike="noStrike">
+                <a:solidFill>
+                  <a:srgbClr val="000000"/>
+                </a:solidFill>
+                <a:latin typeface="Calibri"/>
+                <a:ea typeface="DejaVu Sans"/>
+              </a:rPr>
+              <a:t> </a:t>
+            </a:r>
+            <a:r>
+              <a:rPr b="1" lang="en-US" sz="1300" spc="-1" strike="noStrike">
+                <a:solidFill>
+                  <a:srgbClr val="000000"/>
+                </a:solidFill>
+                <a:latin typeface="Calibri"/>
+                <a:ea typeface="DejaVu Sans"/>
+              </a:rPr>
+              <a:t>2</a:t>
+            </a:r>
+            <a:r>
+              <a:rPr b="1" lang="en-US" sz="1300" spc="-1" strike="noStrike">
+                <a:solidFill>
+                  <a:srgbClr val="000000"/>
+                </a:solidFill>
+                <a:latin typeface="Calibri"/>
+                <a:ea typeface="DejaVu Sans"/>
+              </a:rPr>
+              <a:t>5</a:t>
+            </a:r>
+            <a:r>
+              <a:rPr b="1" lang="en-US" sz="1300" spc="-1" strike="noStrike">
+                <a:solidFill>
+                  <a:srgbClr val="000000"/>
+                </a:solidFill>
+                <a:latin typeface="Calibri"/>
+                <a:ea typeface="DejaVu Sans"/>
+              </a:rPr>
+              <a:t>8</a:t>
+            </a:r>
+            <a:r>
+              <a:rPr b="1" lang="en-US" sz="1300" spc="-1" strike="noStrike">
+                <a:solidFill>
+                  <a:srgbClr val="000000"/>
+                </a:solidFill>
+                <a:latin typeface="Calibri"/>
+                <a:ea typeface="DejaVu Sans"/>
+              </a:rPr>
+              <a:t>1</a:t>
+            </a:r>
+            <a:r>
+              <a:rPr b="1" lang="en-US" sz="1300" spc="-1" strike="noStrike">
+                <a:solidFill>
+                  <a:srgbClr val="000000"/>
+                </a:solidFill>
+                <a:latin typeface="Calibri"/>
+                <a:ea typeface="DejaVu Sans"/>
+              </a:rPr>
+              <a:t> </a:t>
+            </a:r>
+            <a:r>
+              <a:rPr b="1" lang="en-US" sz="1300" spc="-1" strike="noStrike">
+                <a:solidFill>
+                  <a:srgbClr val="000000"/>
+                </a:solidFill>
+                <a:latin typeface="Calibri"/>
+                <a:ea typeface="DejaVu Sans"/>
+              </a:rPr>
+              <a:t>t</a:t>
+            </a:r>
+            <a:r>
+              <a:rPr b="1" lang="en-US" sz="1300" spc="-1" strike="noStrike">
+                <a:solidFill>
+                  <a:srgbClr val="000000"/>
+                </a:solidFill>
+                <a:latin typeface="Calibri"/>
+                <a:ea typeface="DejaVu Sans"/>
+              </a:rPr>
+              <a:t>o</a:t>
+            </a:r>
+            <a:r>
+              <a:rPr b="1" lang="en-US" sz="1300" spc="-1" strike="noStrike">
+                <a:solidFill>
+                  <a:srgbClr val="000000"/>
+                </a:solidFill>
+                <a:latin typeface="Calibri"/>
+                <a:ea typeface="DejaVu Sans"/>
+              </a:rPr>
+              <a:t> </a:t>
+            </a:r>
+            <a:r>
+              <a:rPr b="1" lang="en-US" sz="1300" spc="-1" strike="noStrike">
+                <a:solidFill>
+                  <a:srgbClr val="000000"/>
+                </a:solidFill>
+                <a:latin typeface="Calibri"/>
+                <a:ea typeface="DejaVu Sans"/>
+              </a:rPr>
+              <a:t>2</a:t>
+            </a:r>
+            <a:r>
+              <a:rPr b="1" lang="en-US" sz="1300" spc="-1" strike="noStrike">
+                <a:solidFill>
+                  <a:srgbClr val="000000"/>
+                </a:solidFill>
+                <a:latin typeface="Calibri"/>
+                <a:ea typeface="DejaVu Sans"/>
+              </a:rPr>
+              <a:t>5</a:t>
+            </a:r>
+            <a:r>
+              <a:rPr b="1" lang="en-US" sz="1300" spc="-1" strike="noStrike">
+                <a:solidFill>
+                  <a:srgbClr val="000000"/>
+                </a:solidFill>
+                <a:latin typeface="Calibri"/>
+                <a:ea typeface="DejaVu Sans"/>
+              </a:rPr>
+              <a:t>8</a:t>
+            </a:r>
+            <a:r>
+              <a:rPr b="1" lang="en-US" sz="1300" spc="-1" strike="noStrike">
+                <a:solidFill>
+                  <a:srgbClr val="000000"/>
+                </a:solidFill>
+                <a:latin typeface="Calibri"/>
+                <a:ea typeface="DejaVu Sans"/>
+              </a:rPr>
+              <a:t>7</a:t>
             </a:r>
             <a:endParaRPr b="0" lang="en-US" sz="1300" spc="-1" strike="noStrike">
               <a:latin typeface="Arial"/>
@@ -6221,7 +6941,337 @@
                 <a:latin typeface="Calibri"/>
                 <a:ea typeface="DejaVu Sans"/>
               </a:rPr>
-              <a:t>2581: storage 0-setback: 3 x 8 x 6</a:t>
+              <a:t>2</a:t>
+            </a:r>
+            <a:r>
+              <a:rPr b="0" lang="en-US" sz="1300" spc="-1" strike="noStrike">
+                <a:solidFill>
+                  <a:srgbClr val="000000"/>
+                </a:solidFill>
+                <a:latin typeface="Calibri"/>
+                <a:ea typeface="DejaVu Sans"/>
+              </a:rPr>
+              <a:t>5</a:t>
+            </a:r>
+            <a:r>
+              <a:rPr b="0" lang="en-US" sz="1300" spc="-1" strike="noStrike">
+                <a:solidFill>
+                  <a:srgbClr val="000000"/>
+                </a:solidFill>
+                <a:latin typeface="Calibri"/>
+                <a:ea typeface="DejaVu Sans"/>
+              </a:rPr>
+              <a:t>8</a:t>
+            </a:r>
+            <a:r>
+              <a:rPr b="0" lang="en-US" sz="1300" spc="-1" strike="noStrike">
+                <a:solidFill>
+                  <a:srgbClr val="000000"/>
+                </a:solidFill>
+                <a:latin typeface="Calibri"/>
+                <a:ea typeface="DejaVu Sans"/>
+              </a:rPr>
+              <a:t>1</a:t>
+            </a:r>
+            <a:r>
+              <a:rPr b="0" lang="en-US" sz="1300" spc="-1" strike="noStrike">
+                <a:solidFill>
+                  <a:srgbClr val="000000"/>
+                </a:solidFill>
+                <a:latin typeface="Calibri"/>
+                <a:ea typeface="DejaVu Sans"/>
+              </a:rPr>
+              <a:t>:</a:t>
+            </a:r>
+            <a:r>
+              <a:rPr b="0" lang="en-US" sz="1300" spc="-1" strike="noStrike">
+                <a:solidFill>
+                  <a:srgbClr val="000000"/>
+                </a:solidFill>
+                <a:latin typeface="Calibri"/>
+                <a:ea typeface="DejaVu Sans"/>
+              </a:rPr>
+              <a:t> </a:t>
+            </a:r>
+            <a:r>
+              <a:rPr b="0" lang="en-US" sz="1300" spc="-1" strike="noStrike">
+                <a:solidFill>
+                  <a:srgbClr val="000000"/>
+                </a:solidFill>
+                <a:latin typeface="Calibri"/>
+                <a:ea typeface="DejaVu Sans"/>
+              </a:rPr>
+              <a:t>s</a:t>
+            </a:r>
+            <a:r>
+              <a:rPr b="0" lang="en-US" sz="1300" spc="-1" strike="noStrike">
+                <a:solidFill>
+                  <a:srgbClr val="000000"/>
+                </a:solidFill>
+                <a:latin typeface="Calibri"/>
+                <a:ea typeface="DejaVu Sans"/>
+              </a:rPr>
+              <a:t>t</a:t>
+            </a:r>
+            <a:r>
+              <a:rPr b="0" lang="en-US" sz="1300" spc="-1" strike="noStrike">
+                <a:solidFill>
+                  <a:srgbClr val="000000"/>
+                </a:solidFill>
+                <a:latin typeface="Calibri"/>
+                <a:ea typeface="DejaVu Sans"/>
+              </a:rPr>
+              <a:t>o</a:t>
+            </a:r>
+            <a:r>
+              <a:rPr b="0" lang="en-US" sz="1300" spc="-1" strike="noStrike">
+                <a:solidFill>
+                  <a:srgbClr val="000000"/>
+                </a:solidFill>
+                <a:latin typeface="Calibri"/>
+                <a:ea typeface="DejaVu Sans"/>
+              </a:rPr>
+              <a:t>r</a:t>
+            </a:r>
+            <a:r>
+              <a:rPr b="0" lang="en-US" sz="1300" spc="-1" strike="noStrike">
+                <a:solidFill>
+                  <a:srgbClr val="000000"/>
+                </a:solidFill>
+                <a:latin typeface="Calibri"/>
+                <a:ea typeface="DejaVu Sans"/>
+              </a:rPr>
+              <a:t>a</a:t>
+            </a:r>
+            <a:r>
+              <a:rPr b="0" lang="en-US" sz="1300" spc="-1" strike="noStrike">
+                <a:solidFill>
+                  <a:srgbClr val="000000"/>
+                </a:solidFill>
+                <a:latin typeface="Calibri"/>
+                <a:ea typeface="DejaVu Sans"/>
+              </a:rPr>
+              <a:t>g</a:t>
+            </a:r>
+            <a:r>
+              <a:rPr b="0" lang="en-US" sz="1300" spc="-1" strike="noStrike">
+                <a:solidFill>
+                  <a:srgbClr val="000000"/>
+                </a:solidFill>
+                <a:latin typeface="Calibri"/>
+                <a:ea typeface="DejaVu Sans"/>
+              </a:rPr>
+              <a:t>e</a:t>
+            </a:r>
+            <a:r>
+              <a:rPr b="0" lang="en-US" sz="1300" spc="-1" strike="noStrike">
+                <a:solidFill>
+                  <a:srgbClr val="000000"/>
+                </a:solidFill>
+                <a:latin typeface="Calibri"/>
+                <a:ea typeface="DejaVu Sans"/>
+              </a:rPr>
+              <a:t> </a:t>
+            </a:r>
+            <a:r>
+              <a:rPr b="0" lang="en-US" sz="1300" spc="-1" strike="noStrike">
+                <a:solidFill>
+                  <a:srgbClr val="000000"/>
+                </a:solidFill>
+                <a:latin typeface="Calibri"/>
+                <a:ea typeface="DejaVu Sans"/>
+              </a:rPr>
+              <a:t>0</a:t>
+            </a:r>
+            <a:r>
+              <a:rPr b="0" lang="en-US" sz="1300" spc="-1" strike="noStrike">
+                <a:solidFill>
+                  <a:srgbClr val="000000"/>
+                </a:solidFill>
+                <a:latin typeface="Calibri"/>
+                <a:ea typeface="DejaVu Sans"/>
+              </a:rPr>
+              <a:t>-</a:t>
+            </a:r>
+            <a:r>
+              <a:rPr b="0" lang="en-US" sz="1300" spc="-1" strike="noStrike">
+                <a:solidFill>
+                  <a:srgbClr val="000000"/>
+                </a:solidFill>
+                <a:latin typeface="Calibri"/>
+                <a:ea typeface="DejaVu Sans"/>
+              </a:rPr>
+              <a:t>s</a:t>
+            </a:r>
+            <a:r>
+              <a:rPr b="0" lang="en-US" sz="1300" spc="-1" strike="noStrike">
+                <a:solidFill>
+                  <a:srgbClr val="000000"/>
+                </a:solidFill>
+                <a:latin typeface="Calibri"/>
+                <a:ea typeface="DejaVu Sans"/>
+              </a:rPr>
+              <a:t>e</a:t>
+            </a:r>
+            <a:r>
+              <a:rPr b="0" lang="en-US" sz="1300" spc="-1" strike="noStrike">
+                <a:solidFill>
+                  <a:srgbClr val="000000"/>
+                </a:solidFill>
+                <a:latin typeface="Calibri"/>
+                <a:ea typeface="DejaVu Sans"/>
+              </a:rPr>
+              <a:t>t</a:t>
+            </a:r>
+            <a:r>
+              <a:rPr b="0" lang="en-US" sz="1300" spc="-1" strike="noStrike">
+                <a:solidFill>
+                  <a:srgbClr val="000000"/>
+                </a:solidFill>
+                <a:latin typeface="Calibri"/>
+                <a:ea typeface="DejaVu Sans"/>
+              </a:rPr>
+              <a:t>b</a:t>
+            </a:r>
+            <a:r>
+              <a:rPr b="0" lang="en-US" sz="1300" spc="-1" strike="noStrike">
+                <a:solidFill>
+                  <a:srgbClr val="000000"/>
+                </a:solidFill>
+                <a:latin typeface="Calibri"/>
+                <a:ea typeface="DejaVu Sans"/>
+              </a:rPr>
+              <a:t>a</a:t>
+            </a:r>
+            <a:r>
+              <a:rPr b="0" lang="en-US" sz="1300" spc="-1" strike="noStrike">
+                <a:solidFill>
+                  <a:srgbClr val="000000"/>
+                </a:solidFill>
+                <a:latin typeface="Calibri"/>
+                <a:ea typeface="DejaVu Sans"/>
+              </a:rPr>
+              <a:t>c</a:t>
+            </a:r>
+            <a:r>
+              <a:rPr b="0" lang="en-US" sz="1300" spc="-1" strike="noStrike">
+                <a:solidFill>
+                  <a:srgbClr val="000000"/>
+                </a:solidFill>
+                <a:latin typeface="Calibri"/>
+                <a:ea typeface="DejaVu Sans"/>
+              </a:rPr>
+              <a:t>k</a:t>
+            </a:r>
+            <a:r>
+              <a:rPr b="0" lang="en-US" sz="1300" spc="-1" strike="noStrike">
+                <a:solidFill>
+                  <a:srgbClr val="000000"/>
+                </a:solidFill>
+                <a:latin typeface="Calibri"/>
+                <a:ea typeface="DejaVu Sans"/>
+              </a:rPr>
+              <a:t>:</a:t>
+            </a:r>
+            <a:r>
+              <a:rPr b="0" lang="en-US" sz="1300" spc="-1" strike="noStrike">
+                <a:solidFill>
+                  <a:srgbClr val="000000"/>
+                </a:solidFill>
+                <a:latin typeface="Calibri"/>
+                <a:ea typeface="DejaVu Sans"/>
+              </a:rPr>
+              <a:t> </a:t>
+            </a:r>
+            <a:r>
+              <a:rPr b="0" lang="en-US" sz="1300" spc="-1" strike="noStrike">
+                <a:solidFill>
+                  <a:srgbClr val="000000"/>
+                </a:solidFill>
+                <a:latin typeface="Calibri"/>
+                <a:ea typeface="DejaVu Sans"/>
+              </a:rPr>
+              <a:t>3</a:t>
+            </a:r>
+            <a:r>
+              <a:rPr b="0" lang="en-US" sz="1300" spc="-1" strike="noStrike">
+                <a:solidFill>
+                  <a:srgbClr val="000000"/>
+                </a:solidFill>
+                <a:latin typeface="Calibri"/>
+                <a:ea typeface="DejaVu Sans"/>
+              </a:rPr>
+              <a:t> </a:t>
+            </a:r>
+            <a:r>
+              <a:rPr b="0" lang="en-US" sz="1300" spc="-1" strike="noStrike">
+                <a:solidFill>
+                  <a:srgbClr val="000000"/>
+                </a:solidFill>
+                <a:latin typeface="Calibri"/>
+                <a:ea typeface="DejaVu Sans"/>
+              </a:rPr>
+              <a:t>x</a:t>
+            </a:r>
+            <a:r>
+              <a:rPr b="0" lang="en-US" sz="1300" spc="-1" strike="noStrike">
+                <a:solidFill>
+                  <a:srgbClr val="000000"/>
+                </a:solidFill>
+                <a:latin typeface="Calibri"/>
+                <a:ea typeface="DejaVu Sans"/>
+              </a:rPr>
+              <a:t> </a:t>
+            </a:r>
+            <a:r>
+              <a:rPr b="0" lang="en-US" sz="1300" spc="-1" strike="noStrike">
+                <a:solidFill>
+                  <a:srgbClr val="000000"/>
+                </a:solidFill>
+                <a:latin typeface="Calibri"/>
+                <a:ea typeface="DejaVu Sans"/>
+              </a:rPr>
+              <a:t>8</a:t>
+            </a:r>
+            <a:r>
+              <a:rPr b="0" lang="en-US" sz="1300" spc="-1" strike="noStrike">
+                <a:solidFill>
+                  <a:srgbClr val="000000"/>
+                </a:solidFill>
+                <a:latin typeface="Calibri"/>
+                <a:ea typeface="DejaVu Sans"/>
+              </a:rPr>
+              <a:t> </a:t>
+            </a:r>
+            <a:r>
+              <a:rPr b="0" lang="en-US" sz="1300" spc="-1" strike="noStrike">
+                <a:solidFill>
+                  <a:srgbClr val="000000"/>
+                </a:solidFill>
+                <a:latin typeface="Calibri"/>
+                <a:ea typeface="DejaVu Sans"/>
+              </a:rPr>
+              <a:t>x</a:t>
+            </a:r>
+            <a:r>
+              <a:rPr b="0" lang="en-US" sz="1300" spc="-1" strike="noStrike">
+                <a:solidFill>
+                  <a:srgbClr val="000000"/>
+                </a:solidFill>
+                <a:latin typeface="Calibri"/>
+                <a:ea typeface="DejaVu Sans"/>
+              </a:rPr>
+              <a:t> </a:t>
+            </a:r>
+            <a:r>
+              <a:rPr b="0" lang="en-US" sz="1300" spc="-1" strike="noStrike">
+                <a:solidFill>
+                  <a:srgbClr val="000000"/>
+                </a:solidFill>
+                <a:latin typeface="Calibri"/>
+                <a:ea typeface="DejaVu Sans"/>
+              </a:rPr>
+              <a:t>6</a:t>
             </a:r>
             <a:endParaRPr b="0" lang="en-US" sz="1300" spc="-1" strike="noStrike">
               <a:latin typeface="Arial"/>
@@ -6249,7 +7299,407 @@
                 <a:latin typeface="Calibri"/>
                 <a:ea typeface="DejaVu Sans"/>
               </a:rPr>
-              <a:t>2583, 2987: storage 0-setback (4 x 8 x 6)</a:t>
+              <a:t>2</a:t>
+            </a:r>
+            <a:r>
+              <a:rPr b="0" lang="en-US" sz="1300" spc="-1" strike="noStrike">
+                <a:solidFill>
+                  <a:srgbClr val="000000"/>
+                </a:solidFill>
+                <a:latin typeface="Calibri"/>
+                <a:ea typeface="DejaVu Sans"/>
+              </a:rPr>
+              <a:t>5</a:t>
+            </a:r>
+            <a:r>
+              <a:rPr b="0" lang="en-US" sz="1300" spc="-1" strike="noStrike">
+                <a:solidFill>
+                  <a:srgbClr val="000000"/>
+                </a:solidFill>
+                <a:latin typeface="Calibri"/>
+                <a:ea typeface="DejaVu Sans"/>
+              </a:rPr>
+              <a:t>8</a:t>
+            </a:r>
+            <a:r>
+              <a:rPr b="0" lang="en-US" sz="1300" spc="-1" strike="noStrike">
+                <a:solidFill>
+                  <a:srgbClr val="000000"/>
+                </a:solidFill>
+                <a:latin typeface="Calibri"/>
+                <a:ea typeface="DejaVu Sans"/>
+              </a:rPr>
+              <a:t>3</a:t>
+            </a:r>
+            <a:r>
+              <a:rPr b="0" lang="en-US" sz="1300" spc="-1" strike="noStrike">
+                <a:solidFill>
+                  <a:srgbClr val="000000"/>
+                </a:solidFill>
+                <a:latin typeface="Calibri"/>
+                <a:ea typeface="DejaVu Sans"/>
+              </a:rPr>
+              <a:t>,</a:t>
+            </a:r>
+            <a:r>
+              <a:rPr b="0" lang="en-US" sz="1300" spc="-1" strike="noStrike">
+                <a:solidFill>
+                  <a:srgbClr val="000000"/>
+                </a:solidFill>
+                <a:latin typeface="Calibri"/>
+                <a:ea typeface="DejaVu Sans"/>
+              </a:rPr>
+              <a:t> </a:t>
+            </a:r>
+            <a:r>
+              <a:rPr b="0" lang="en-US" sz="1300" spc="-1" strike="noStrike">
+                <a:solidFill>
+                  <a:srgbClr val="000000"/>
+                </a:solidFill>
+                <a:latin typeface="Calibri"/>
+                <a:ea typeface="DejaVu Sans"/>
+              </a:rPr>
+              <a:t>2</a:t>
+            </a:r>
+            <a:r>
+              <a:rPr b="0" lang="en-US" sz="1300" spc="-1" strike="noStrike">
+                <a:solidFill>
+                  <a:srgbClr val="000000"/>
+                </a:solidFill>
+                <a:latin typeface="Calibri"/>
+                <a:ea typeface="DejaVu Sans"/>
+              </a:rPr>
+              <a:t>9</a:t>
+            </a:r>
+            <a:r>
+              <a:rPr b="0" lang="en-US" sz="1300" spc="-1" strike="noStrike">
+                <a:solidFill>
+                  <a:srgbClr val="000000"/>
+                </a:solidFill>
+                <a:latin typeface="Calibri"/>
+                <a:ea typeface="DejaVu Sans"/>
+              </a:rPr>
+              <a:t>8</a:t>
+            </a:r>
+            <a:r>
+              <a:rPr b="0" lang="en-US" sz="1300" spc="-1" strike="noStrike">
+                <a:solidFill>
+                  <a:srgbClr val="000000"/>
+                </a:solidFill>
+                <a:latin typeface="Calibri"/>
+                <a:ea typeface="DejaVu Sans"/>
+              </a:rPr>
+              <a:t>7</a:t>
+            </a:r>
+            <a:r>
+              <a:rPr b="0" lang="en-US" sz="1300" spc="-1" strike="noStrike">
+                <a:solidFill>
+                  <a:srgbClr val="000000"/>
+                </a:solidFill>
+                <a:latin typeface="Calibri"/>
+                <a:ea typeface="DejaVu Sans"/>
+              </a:rPr>
+              <a:t>:</a:t>
+            </a:r>
+            <a:r>
+              <a:rPr b="0" lang="en-US" sz="1300" spc="-1" strike="noStrike">
+                <a:solidFill>
+                  <a:srgbClr val="000000"/>
+                </a:solidFill>
+                <a:latin typeface="Calibri"/>
+                <a:ea typeface="DejaVu Sans"/>
+              </a:rPr>
+              <a:t> </a:t>
+            </a:r>
+            <a:r>
+              <a:rPr b="0" lang="en-US" sz="1300" spc="-1" strike="noStrike">
+                <a:solidFill>
+                  <a:srgbClr val="000000"/>
+                </a:solidFill>
+                <a:latin typeface="Calibri"/>
+                <a:ea typeface="DejaVu Sans"/>
+              </a:rPr>
+              <a:t>s</a:t>
+            </a:r>
+            <a:r>
+              <a:rPr b="0" lang="en-US" sz="1300" spc="-1" strike="noStrike">
+                <a:solidFill>
+                  <a:srgbClr val="000000"/>
+                </a:solidFill>
+                <a:latin typeface="Calibri"/>
+                <a:ea typeface="DejaVu Sans"/>
+              </a:rPr>
+              <a:t>t</a:t>
+            </a:r>
+            <a:r>
+              <a:rPr b="0" lang="en-US" sz="1300" spc="-1" strike="noStrike">
+                <a:solidFill>
+                  <a:srgbClr val="000000"/>
+                </a:solidFill>
+                <a:latin typeface="Calibri"/>
+                <a:ea typeface="DejaVu Sans"/>
+              </a:rPr>
+              <a:t>o</a:t>
+            </a:r>
+            <a:r>
+              <a:rPr b="0" lang="en-US" sz="1300" spc="-1" strike="noStrike">
+                <a:solidFill>
+                  <a:srgbClr val="000000"/>
+                </a:solidFill>
+                <a:latin typeface="Calibri"/>
+                <a:ea typeface="DejaVu Sans"/>
+              </a:rPr>
+              <a:t>r</a:t>
+            </a:r>
+            <a:r>
+              <a:rPr b="0" lang="en-US" sz="1300" spc="-1" strike="noStrike">
+                <a:solidFill>
+                  <a:srgbClr val="000000"/>
+                </a:solidFill>
+                <a:latin typeface="Calibri"/>
+                <a:ea typeface="DejaVu Sans"/>
+              </a:rPr>
+              <a:t>a</a:t>
+            </a:r>
+            <a:r>
+              <a:rPr b="0" lang="en-US" sz="1300" spc="-1" strike="noStrike">
+                <a:solidFill>
+                  <a:srgbClr val="000000"/>
+                </a:solidFill>
+                <a:latin typeface="Calibri"/>
+                <a:ea typeface="DejaVu Sans"/>
+              </a:rPr>
+              <a:t>g</a:t>
+            </a:r>
+            <a:r>
+              <a:rPr b="0" lang="en-US" sz="1300" spc="-1" strike="noStrike">
+                <a:solidFill>
+                  <a:srgbClr val="000000"/>
+                </a:solidFill>
+                <a:latin typeface="Calibri"/>
+                <a:ea typeface="DejaVu Sans"/>
+              </a:rPr>
+              <a:t>e</a:t>
+            </a:r>
+            <a:r>
+              <a:rPr b="0" lang="en-US" sz="1300" spc="-1" strike="noStrike">
+                <a:solidFill>
+                  <a:srgbClr val="000000"/>
+                </a:solidFill>
+                <a:latin typeface="Calibri"/>
+                <a:ea typeface="DejaVu Sans"/>
+              </a:rPr>
+              <a:t> </a:t>
+            </a:r>
+            <a:r>
+              <a:rPr b="0" lang="en-US" sz="1300" spc="-1" strike="noStrike">
+                <a:solidFill>
+                  <a:srgbClr val="000000"/>
+                </a:solidFill>
+                <a:latin typeface="Calibri"/>
+                <a:ea typeface="DejaVu Sans"/>
+              </a:rPr>
+              <a:t>0</a:t>
+            </a:r>
+            <a:r>
+              <a:rPr b="0" lang="en-US" sz="1300" spc="-1" strike="noStrike">
+                <a:solidFill>
+                  <a:srgbClr val="000000"/>
+                </a:solidFill>
+                <a:latin typeface="Calibri"/>
+                <a:ea typeface="DejaVu Sans"/>
+              </a:rPr>
+              <a:t>-</a:t>
+            </a:r>
+            <a:r>
+              <a:rPr b="0" lang="en-US" sz="1300" spc="-1" strike="noStrike">
+                <a:solidFill>
+                  <a:srgbClr val="000000"/>
+                </a:solidFill>
+                <a:latin typeface="Calibri"/>
+                <a:ea typeface="DejaVu Sans"/>
+              </a:rPr>
+              <a:t>s</a:t>
+            </a:r>
+            <a:r>
+              <a:rPr b="0" lang="en-US" sz="1300" spc="-1" strike="noStrike">
+                <a:solidFill>
+                  <a:srgbClr val="000000"/>
+                </a:solidFill>
+                <a:latin typeface="Calibri"/>
+                <a:ea typeface="DejaVu Sans"/>
+              </a:rPr>
+              <a:t>e</a:t>
+            </a:r>
+            <a:r>
+              <a:rPr b="0" lang="en-US" sz="1300" spc="-1" strike="noStrike">
+                <a:solidFill>
+                  <a:srgbClr val="000000"/>
+                </a:solidFill>
+                <a:latin typeface="Calibri"/>
+                <a:ea typeface="DejaVu Sans"/>
+              </a:rPr>
+              <a:t>t</a:t>
+            </a:r>
+            <a:r>
+              <a:rPr b="0" lang="en-US" sz="1300" spc="-1" strike="noStrike">
+                <a:solidFill>
+                  <a:srgbClr val="000000"/>
+                </a:solidFill>
+                <a:latin typeface="Calibri"/>
+                <a:ea typeface="DejaVu Sans"/>
+              </a:rPr>
+              <a:t>b</a:t>
+            </a:r>
+            <a:r>
+              <a:rPr b="0" lang="en-US" sz="1300" spc="-1" strike="noStrike">
+                <a:solidFill>
+                  <a:srgbClr val="000000"/>
+                </a:solidFill>
+                <a:latin typeface="Calibri"/>
+                <a:ea typeface="DejaVu Sans"/>
+              </a:rPr>
+              <a:t>a</a:t>
+            </a:r>
+            <a:r>
+              <a:rPr b="0" lang="en-US" sz="1300" spc="-1" strike="noStrike">
+                <a:solidFill>
+                  <a:srgbClr val="000000"/>
+                </a:solidFill>
+                <a:latin typeface="Calibri"/>
+                <a:ea typeface="DejaVu Sans"/>
+              </a:rPr>
+              <a:t>c</a:t>
+            </a:r>
+            <a:r>
+              <a:rPr b="0" lang="en-US" sz="1300" spc="-1" strike="noStrike">
+                <a:solidFill>
+                  <a:srgbClr val="000000"/>
+                </a:solidFill>
+                <a:latin typeface="Calibri"/>
+                <a:ea typeface="DejaVu Sans"/>
+              </a:rPr>
+              <a:t>k</a:t>
+            </a:r>
+            <a:r>
+              <a:rPr b="0" lang="en-US" sz="1300" spc="-1" strike="noStrike">
+                <a:solidFill>
+                  <a:srgbClr val="000000"/>
+                </a:solidFill>
+                <a:latin typeface="Calibri"/>
+                <a:ea typeface="DejaVu Sans"/>
+              </a:rPr>
+              <a:t> </a:t>
+            </a:r>
+            <a:r>
+              <a:rPr b="0" lang="en-US" sz="1300" spc="-1" strike="noStrike">
+                <a:solidFill>
+                  <a:srgbClr val="000000"/>
+                </a:solidFill>
+                <a:latin typeface="Calibri"/>
+                <a:ea typeface="DejaVu Sans"/>
+              </a:rPr>
+              <a:t>(</a:t>
+            </a:r>
+            <a:r>
+              <a:rPr b="0" lang="en-US" sz="1300" spc="-1" strike="noStrike">
+                <a:solidFill>
+                  <a:srgbClr val="000000"/>
+                </a:solidFill>
+                <a:latin typeface="Calibri"/>
+                <a:ea typeface="DejaVu Sans"/>
+              </a:rPr>
+              <a:t>4</a:t>
+            </a:r>
+            <a:r>
+              <a:rPr b="0" lang="en-US" sz="1300" spc="-1" strike="noStrike">
+                <a:solidFill>
+                  <a:srgbClr val="000000"/>
+                </a:solidFill>
+                <a:latin typeface="Calibri"/>
+                <a:ea typeface="DejaVu Sans"/>
+              </a:rPr>
+              <a:t> </a:t>
+            </a:r>
+            <a:r>
+              <a:rPr b="0" lang="en-US" sz="1300" spc="-1" strike="noStrike">
+                <a:solidFill>
+                  <a:srgbClr val="000000"/>
+                </a:solidFill>
+                <a:latin typeface="Calibri"/>
+                <a:ea typeface="DejaVu Sans"/>
+              </a:rPr>
+              <a:t>x</a:t>
+            </a:r>
+            <a:r>
+              <a:rPr b="0" lang="en-US" sz="1300" spc="-1" strike="noStrike">
+                <a:solidFill>
+                  <a:srgbClr val="000000"/>
+                </a:solidFill>
+                <a:latin typeface="Calibri"/>
+                <a:ea typeface="DejaVu Sans"/>
+              </a:rPr>
+              <a:t> </a:t>
+            </a:r>
+            <a:r>
+              <a:rPr b="0" lang="en-US" sz="1300" spc="-1" strike="noStrike">
+                <a:solidFill>
+                  <a:srgbClr val="000000"/>
+                </a:solidFill>
+                <a:latin typeface="Calibri"/>
+                <a:ea typeface="DejaVu Sans"/>
+              </a:rPr>
+              <a:t>8</a:t>
+            </a:r>
+            <a:r>
+              <a:rPr b="0" lang="en-US" sz="1300" spc="-1" strike="noStrike">
+                <a:solidFill>
+                  <a:srgbClr val="000000"/>
+                </a:solidFill>
+                <a:latin typeface="Calibri"/>
+                <a:ea typeface="DejaVu Sans"/>
+              </a:rPr>
+              <a:t> </a:t>
+            </a:r>
+            <a:r>
+              <a:rPr b="0" lang="en-US" sz="1300" spc="-1" strike="noStrike">
+                <a:solidFill>
+                  <a:srgbClr val="000000"/>
+                </a:solidFill>
+                <a:latin typeface="Calibri"/>
+                <a:ea typeface="DejaVu Sans"/>
+              </a:rPr>
+              <a:t>x</a:t>
+            </a:r>
+            <a:r>
+              <a:rPr b="0" lang="en-US" sz="1300" spc="-1" strike="noStrike">
+                <a:solidFill>
+                  <a:srgbClr val="000000"/>
+                </a:solidFill>
+                <a:latin typeface="Calibri"/>
+                <a:ea typeface="DejaVu Sans"/>
+              </a:rPr>
+              <a:t> </a:t>
+            </a:r>
+            <a:r>
+              <a:rPr b="0" lang="en-US" sz="1300" spc="-1" strike="noStrike">
+                <a:solidFill>
+                  <a:srgbClr val="000000"/>
+                </a:solidFill>
+                <a:latin typeface="Calibri"/>
+                <a:ea typeface="DejaVu Sans"/>
+              </a:rPr>
+              <a:t>6</a:t>
+            </a:r>
+            <a:r>
+              <a:rPr b="0" lang="en-US" sz="1300" spc="-1" strike="noStrike">
+                <a:solidFill>
+                  <a:srgbClr val="000000"/>
+                </a:solidFill>
+                <a:latin typeface="Calibri"/>
+                <a:ea typeface="DejaVu Sans"/>
+              </a:rPr>
+              <a:t>)</a:t>
             </a:r>
             <a:endParaRPr b="0" lang="en-US" sz="1300" spc="-1" strike="noStrike">
               <a:latin typeface="Arial"/>
@@ -6277,7 +7727,367 @@
                 <a:latin typeface="Calibri"/>
                 <a:ea typeface="DejaVu Sans"/>
               </a:rPr>
-              <a:t>2585: Shed 3-feet setback (6 x 8 x 8)</a:t>
+              <a:t>2</a:t>
+            </a:r>
+            <a:r>
+              <a:rPr b="0" lang="en-US" sz="1300" spc="-1" strike="noStrike">
+                <a:solidFill>
+                  <a:srgbClr val="000000"/>
+                </a:solidFill>
+                <a:latin typeface="Calibri"/>
+                <a:ea typeface="DejaVu Sans"/>
+              </a:rPr>
+              <a:t>5</a:t>
+            </a:r>
+            <a:r>
+              <a:rPr b="0" lang="en-US" sz="1300" spc="-1" strike="noStrike">
+                <a:solidFill>
+                  <a:srgbClr val="000000"/>
+                </a:solidFill>
+                <a:latin typeface="Calibri"/>
+                <a:ea typeface="DejaVu Sans"/>
+              </a:rPr>
+              <a:t>8</a:t>
+            </a:r>
+            <a:r>
+              <a:rPr b="0" lang="en-US" sz="1300" spc="-1" strike="noStrike">
+                <a:solidFill>
+                  <a:srgbClr val="000000"/>
+                </a:solidFill>
+                <a:latin typeface="Calibri"/>
+                <a:ea typeface="DejaVu Sans"/>
+              </a:rPr>
+              <a:t>5</a:t>
+            </a:r>
+            <a:r>
+              <a:rPr b="0" lang="en-US" sz="1300" spc="-1" strike="noStrike">
+                <a:solidFill>
+                  <a:srgbClr val="000000"/>
+                </a:solidFill>
+                <a:latin typeface="Calibri"/>
+                <a:ea typeface="DejaVu Sans"/>
+              </a:rPr>
+              <a:t>:</a:t>
+            </a:r>
+            <a:r>
+              <a:rPr b="0" lang="en-US" sz="1300" spc="-1" strike="noStrike">
+                <a:solidFill>
+                  <a:srgbClr val="000000"/>
+                </a:solidFill>
+                <a:latin typeface="Calibri"/>
+                <a:ea typeface="DejaVu Sans"/>
+              </a:rPr>
+              <a:t> </a:t>
+            </a:r>
+            <a:r>
+              <a:rPr b="0" lang="en-US" sz="1300" spc="-1" strike="noStrike">
+                <a:solidFill>
+                  <a:srgbClr val="000000"/>
+                </a:solidFill>
+                <a:latin typeface="Calibri"/>
+                <a:ea typeface="DejaVu Sans"/>
+              </a:rPr>
+              <a:t>S</a:t>
+            </a:r>
+            <a:r>
+              <a:rPr b="0" lang="en-US" sz="1300" spc="-1" strike="noStrike">
+                <a:solidFill>
+                  <a:srgbClr val="000000"/>
+                </a:solidFill>
+                <a:latin typeface="Calibri"/>
+                <a:ea typeface="DejaVu Sans"/>
+              </a:rPr>
+              <a:t>h</a:t>
+            </a:r>
+            <a:r>
+              <a:rPr b="0" lang="en-US" sz="1300" spc="-1" strike="noStrike">
+                <a:solidFill>
+                  <a:srgbClr val="000000"/>
+                </a:solidFill>
+                <a:latin typeface="Calibri"/>
+                <a:ea typeface="DejaVu Sans"/>
+              </a:rPr>
+              <a:t>e</a:t>
+            </a:r>
+            <a:r>
+              <a:rPr b="0" lang="en-US" sz="1300" spc="-1" strike="noStrike">
+                <a:solidFill>
+                  <a:srgbClr val="000000"/>
+                </a:solidFill>
+                <a:latin typeface="Calibri"/>
+                <a:ea typeface="DejaVu Sans"/>
+              </a:rPr>
+              <a:t>d</a:t>
+            </a:r>
+            <a:r>
+              <a:rPr b="0" lang="en-US" sz="1300" spc="-1" strike="noStrike">
+                <a:solidFill>
+                  <a:srgbClr val="000000"/>
+                </a:solidFill>
+                <a:latin typeface="Calibri"/>
+                <a:ea typeface="DejaVu Sans"/>
+              </a:rPr>
+              <a:t> </a:t>
+            </a:r>
+            <a:r>
+              <a:rPr b="0" lang="en-US" sz="1300" spc="-1" strike="noStrike">
+                <a:solidFill>
+                  <a:srgbClr val="000000"/>
+                </a:solidFill>
+                <a:latin typeface="Calibri"/>
+                <a:ea typeface="DejaVu Sans"/>
+              </a:rPr>
+              <a:t>3</a:t>
+            </a:r>
+            <a:r>
+              <a:rPr b="0" lang="en-US" sz="1300" spc="-1" strike="noStrike">
+                <a:solidFill>
+                  <a:srgbClr val="000000"/>
+                </a:solidFill>
+                <a:latin typeface="Calibri"/>
+                <a:ea typeface="DejaVu Sans"/>
+              </a:rPr>
+              <a:t>-</a:t>
+            </a:r>
+            <a:r>
+              <a:rPr b="0" lang="en-US" sz="1300" spc="-1" strike="noStrike">
+                <a:solidFill>
+                  <a:srgbClr val="000000"/>
+                </a:solidFill>
+                <a:latin typeface="Calibri"/>
+                <a:ea typeface="DejaVu Sans"/>
+              </a:rPr>
+              <a:t>f</a:t>
+            </a:r>
+            <a:r>
+              <a:rPr b="0" lang="en-US" sz="1300" spc="-1" strike="noStrike">
+                <a:solidFill>
+                  <a:srgbClr val="000000"/>
+                </a:solidFill>
+                <a:latin typeface="Calibri"/>
+                <a:ea typeface="DejaVu Sans"/>
+              </a:rPr>
+              <a:t>e</a:t>
+            </a:r>
+            <a:r>
+              <a:rPr b="0" lang="en-US" sz="1300" spc="-1" strike="noStrike">
+                <a:solidFill>
+                  <a:srgbClr val="000000"/>
+                </a:solidFill>
+                <a:latin typeface="Calibri"/>
+                <a:ea typeface="DejaVu Sans"/>
+              </a:rPr>
+              <a:t>e</a:t>
+            </a:r>
+            <a:r>
+              <a:rPr b="0" lang="en-US" sz="1300" spc="-1" strike="noStrike">
+                <a:solidFill>
+                  <a:srgbClr val="000000"/>
+                </a:solidFill>
+                <a:latin typeface="Calibri"/>
+                <a:ea typeface="DejaVu Sans"/>
+              </a:rPr>
+              <a:t>t</a:t>
+            </a:r>
+            <a:r>
+              <a:rPr b="0" lang="en-US" sz="1300" spc="-1" strike="noStrike">
+                <a:solidFill>
+                  <a:srgbClr val="000000"/>
+                </a:solidFill>
+                <a:latin typeface="Calibri"/>
+                <a:ea typeface="DejaVu Sans"/>
+              </a:rPr>
+              <a:t> </a:t>
+            </a:r>
+            <a:r>
+              <a:rPr b="0" lang="en-US" sz="1300" spc="-1" strike="noStrike">
+                <a:solidFill>
+                  <a:srgbClr val="000000"/>
+                </a:solidFill>
+                <a:latin typeface="Calibri"/>
+                <a:ea typeface="DejaVu Sans"/>
+              </a:rPr>
+              <a:t>s</a:t>
+            </a:r>
+            <a:r>
+              <a:rPr b="0" lang="en-US" sz="1300" spc="-1" strike="noStrike">
+                <a:solidFill>
+                  <a:srgbClr val="000000"/>
+                </a:solidFill>
+                <a:latin typeface="Calibri"/>
+                <a:ea typeface="DejaVu Sans"/>
+              </a:rPr>
+              <a:t>e</a:t>
+            </a:r>
+            <a:r>
+              <a:rPr b="0" lang="en-US" sz="1300" spc="-1" strike="noStrike">
+                <a:solidFill>
+                  <a:srgbClr val="000000"/>
+                </a:solidFill>
+                <a:latin typeface="Calibri"/>
+                <a:ea typeface="DejaVu Sans"/>
+              </a:rPr>
+              <a:t>t</a:t>
+            </a:r>
+            <a:r>
+              <a:rPr b="0" lang="en-US" sz="1300" spc="-1" strike="noStrike">
+                <a:solidFill>
+                  <a:srgbClr val="000000"/>
+                </a:solidFill>
+                <a:latin typeface="Calibri"/>
+                <a:ea typeface="DejaVu Sans"/>
+              </a:rPr>
+              <a:t>b</a:t>
+            </a:r>
+            <a:r>
+              <a:rPr b="0" lang="en-US" sz="1300" spc="-1" strike="noStrike">
+                <a:solidFill>
+                  <a:srgbClr val="000000"/>
+                </a:solidFill>
+                <a:latin typeface="Calibri"/>
+                <a:ea typeface="DejaVu Sans"/>
+              </a:rPr>
+              <a:t>a</a:t>
+            </a:r>
+            <a:r>
+              <a:rPr b="0" lang="en-US" sz="1300" spc="-1" strike="noStrike">
+                <a:solidFill>
+                  <a:srgbClr val="000000"/>
+                </a:solidFill>
+                <a:latin typeface="Calibri"/>
+                <a:ea typeface="DejaVu Sans"/>
+              </a:rPr>
+              <a:t>c</a:t>
+            </a:r>
+            <a:r>
+              <a:rPr b="0" lang="en-US" sz="1300" spc="-1" strike="noStrike">
+                <a:solidFill>
+                  <a:srgbClr val="000000"/>
+                </a:solidFill>
+                <a:latin typeface="Calibri"/>
+                <a:ea typeface="DejaVu Sans"/>
+              </a:rPr>
+              <a:t>k</a:t>
+            </a:r>
+            <a:r>
+              <a:rPr b="0" lang="en-US" sz="1300" spc="-1" strike="noStrike">
+                <a:solidFill>
+                  <a:srgbClr val="000000"/>
+                </a:solidFill>
+                <a:latin typeface="Calibri"/>
+                <a:ea typeface="DejaVu Sans"/>
+              </a:rPr>
+              <a:t> </a:t>
+            </a:r>
+            <a:r>
+              <a:rPr b="0" lang="en-US" sz="1300" spc="-1" strike="noStrike">
+                <a:solidFill>
+                  <a:srgbClr val="000000"/>
+                </a:solidFill>
+                <a:latin typeface="Calibri"/>
+                <a:ea typeface="DejaVu Sans"/>
+              </a:rPr>
+              <a:t>(</a:t>
+            </a:r>
+            <a:r>
+              <a:rPr b="0" lang="en-US" sz="1300" spc="-1" strike="noStrike">
+                <a:solidFill>
+                  <a:srgbClr val="000000"/>
+                </a:solidFill>
+                <a:latin typeface="Calibri"/>
+                <a:ea typeface="DejaVu Sans"/>
+              </a:rPr>
+              <a:t>6</a:t>
+            </a:r>
+            <a:r>
+              <a:rPr b="0" lang="en-US" sz="1300" spc="-1" strike="noStrike">
+                <a:solidFill>
+                  <a:srgbClr val="000000"/>
+                </a:solidFill>
+                <a:latin typeface="Calibri"/>
+                <a:ea typeface="DejaVu Sans"/>
+              </a:rPr>
+              <a:t> </a:t>
+            </a:r>
+            <a:r>
+              <a:rPr b="0" lang="en-US" sz="1300" spc="-1" strike="noStrike">
+                <a:solidFill>
+                  <a:srgbClr val="000000"/>
+                </a:solidFill>
+                <a:latin typeface="Calibri"/>
+                <a:ea typeface="DejaVu Sans"/>
+              </a:rPr>
+              <a:t>x</a:t>
+            </a:r>
+            <a:r>
+              <a:rPr b="0" lang="en-US" sz="1300" spc="-1" strike="noStrike">
+                <a:solidFill>
+                  <a:srgbClr val="000000"/>
+                </a:solidFill>
+                <a:latin typeface="Calibri"/>
+                <a:ea typeface="DejaVu Sans"/>
+              </a:rPr>
+              <a:t> </a:t>
+            </a:r>
+            <a:r>
+              <a:rPr b="0" lang="en-US" sz="1300" spc="-1" strike="noStrike">
+                <a:solidFill>
+                  <a:srgbClr val="000000"/>
+                </a:solidFill>
+                <a:latin typeface="Calibri"/>
+                <a:ea typeface="DejaVu Sans"/>
+              </a:rPr>
+              <a:t>8</a:t>
+            </a:r>
+            <a:r>
+              <a:rPr b="0" lang="en-US" sz="1300" spc="-1" strike="noStrike">
+                <a:solidFill>
+                  <a:srgbClr val="000000"/>
+                </a:solidFill>
+                <a:latin typeface="Calibri"/>
+                <a:ea typeface="DejaVu Sans"/>
+              </a:rPr>
+              <a:t> </a:t>
+            </a:r>
+            <a:r>
+              <a:rPr b="0" lang="en-US" sz="1300" spc="-1" strike="noStrike">
+                <a:solidFill>
+                  <a:srgbClr val="000000"/>
+                </a:solidFill>
+                <a:latin typeface="Calibri"/>
+                <a:ea typeface="DejaVu Sans"/>
+              </a:rPr>
+              <a:t>x</a:t>
+            </a:r>
+            <a:r>
+              <a:rPr b="0" lang="en-US" sz="1300" spc="-1" strike="noStrike">
+                <a:solidFill>
+                  <a:srgbClr val="000000"/>
+                </a:solidFill>
+                <a:latin typeface="Calibri"/>
+                <a:ea typeface="DejaVu Sans"/>
+              </a:rPr>
+              <a:t> </a:t>
+            </a:r>
+            <a:r>
+              <a:rPr b="0" lang="en-US" sz="1300" spc="-1" strike="noStrike">
+                <a:solidFill>
+                  <a:srgbClr val="000000"/>
+                </a:solidFill>
+                <a:latin typeface="Calibri"/>
+                <a:ea typeface="DejaVu Sans"/>
+              </a:rPr>
+              <a:t>8</a:t>
+            </a:r>
+            <a:r>
+              <a:rPr b="0" lang="en-US" sz="1300" spc="-1" strike="noStrike">
+                <a:solidFill>
+                  <a:srgbClr val="000000"/>
+                </a:solidFill>
+                <a:latin typeface="Calibri"/>
+                <a:ea typeface="DejaVu Sans"/>
+              </a:rPr>
+              <a:t>)</a:t>
             </a:r>
             <a:endParaRPr b="0" lang="en-US" sz="1300" spc="-1" strike="noStrike">
               <a:latin typeface="Arial"/>
@@ -6311,7 +8121,7 @@
         <p:spPr>
           <a:xfrm>
             <a:off x="0" y="723600"/>
-            <a:ext cx="9123120" cy="322920"/>
+            <a:ext cx="9122760" cy="322560"/>
           </a:xfrm>
           <a:prstGeom prst="rect">
             <a:avLst/>
@@ -6377,7 +8187,7 @@
         <p:spPr>
           <a:xfrm>
             <a:off x="6553080" y="6356520"/>
-            <a:ext cx="2096640" cy="327960"/>
+            <a:ext cx="2096280" cy="327600"/>
           </a:xfrm>
           <a:prstGeom prst="rect">
             <a:avLst/>
@@ -6413,7 +8223,7 @@
               </a:lnSpc>
               <a:buNone/>
             </a:pPr>
-            <a:fld id="{5310709C-5AFC-4BCE-9472-2D3B067C0721}" type="slidenum">
+            <a:fld id="{0B9E5613-E17C-4992-9613-A963B0B29B63}" type="slidenum">
               <a:rPr b="0" lang="en-US" sz="1200" spc="-1" strike="noStrike">
                 <a:solidFill>
                   <a:srgbClr val="8b8b8b"/>
@@ -6438,7 +8248,7 @@
         <p:spPr>
           <a:xfrm>
             <a:off x="8161560" y="5405040"/>
-            <a:ext cx="714960" cy="308520"/>
+            <a:ext cx="714600" cy="308160"/>
           </a:xfrm>
           <a:prstGeom prst="rect">
             <a:avLst/>
@@ -6481,7 +8291,7 @@
                 <a:latin typeface="Arial"/>
                 <a:ea typeface="DejaVu Sans"/>
               </a:rPr>
-              <a:t>6’</a:t>
+              <a:t>3’</a:t>
             </a:r>
             <a:endParaRPr b="0" lang="en-US" sz="1800" spc="-1" strike="noStrike">
               <a:latin typeface="Arial"/>
@@ -6497,8 +8307,8 @@
         </p:nvSpPr>
         <p:spPr>
           <a:xfrm flipV="1">
-            <a:off x="8035200" y="5382000"/>
-            <a:ext cx="701280" cy="1440"/>
+            <a:off x="8339760" y="5381280"/>
+            <a:ext cx="361800" cy="1080"/>
           </a:xfrm>
           <a:custGeom>
             <a:avLst/>
@@ -6546,8 +8356,8 @@
         </p:nvSpPr>
         <p:spPr>
           <a:xfrm>
-            <a:off x="4628520" y="1896480"/>
-            <a:ext cx="3610800" cy="1917360"/>
+            <a:off x="5715000" y="1896480"/>
+            <a:ext cx="2523960" cy="1917000"/>
           </a:xfrm>
           <a:prstGeom prst="rect">
             <a:avLst/>
@@ -6584,8 +8394,8 @@
         </p:nvSpPr>
         <p:spPr>
           <a:xfrm>
-            <a:off x="4775040" y="4368960"/>
-            <a:ext cx="1853280" cy="506160"/>
+            <a:off x="4497480" y="4066200"/>
+            <a:ext cx="508320" cy="963000"/>
           </a:xfrm>
           <a:prstGeom prst="roundRect">
             <a:avLst>
@@ -6620,23 +8430,23 @@
             <a:noAutofit/>
           </a:bodyPr>
           <a:p>
-            <a:pPr algn="ctr">
+            <a:pPr>
               <a:lnSpc>
                 <a:spcPct val="100000"/>
               </a:lnSpc>
               <a:buNone/>
             </a:pPr>
             <a:r>
-              <a:rPr b="0" lang="en-US" sz="1800" spc="-1" strike="noStrike">
+              <a:rPr b="0" lang="en-US" sz="1200" spc="-1" strike="noStrike">
                 <a:solidFill>
                   <a:srgbClr val="000000"/>
                 </a:solidFill>
                 <a:latin typeface="Arial"/>
                 <a:ea typeface="DejaVu Sans"/>
               </a:rPr>
-              <a:t>2585 Car</a:t>
-            </a:r>
-            <a:endParaRPr b="0" lang="en-US" sz="1800" spc="-1" strike="noStrike">
+              <a:t>Car</a:t>
+            </a:r>
+            <a:endParaRPr b="0" lang="en-US" sz="1200" spc="-1" strike="noStrike">
               <a:latin typeface="Arial"/>
             </a:endParaRPr>
           </a:p>
@@ -6650,8 +8460,8 @@
         </p:nvSpPr>
         <p:spPr>
           <a:xfrm>
-            <a:off x="4114800" y="3240000"/>
-            <a:ext cx="2340720" cy="534600"/>
+            <a:off x="5194800" y="3240000"/>
+            <a:ext cx="2340360" cy="534240"/>
           </a:xfrm>
           <a:prstGeom prst="roundRect">
             <a:avLst>
@@ -6716,8 +8526,8 @@
         </p:nvSpPr>
         <p:spPr>
           <a:xfrm>
-            <a:off x="6919920" y="2201400"/>
-            <a:ext cx="1149840" cy="314280"/>
+            <a:off x="7459920" y="2201400"/>
+            <a:ext cx="1149480" cy="313920"/>
           </a:xfrm>
           <a:prstGeom prst="rect">
             <a:avLst/>
@@ -6777,7 +8587,7 @@
         <p:spPr>
           <a:xfrm>
             <a:off x="5226840" y="5198400"/>
-            <a:ext cx="714960" cy="308520"/>
+            <a:ext cx="714600" cy="308160"/>
           </a:xfrm>
           <a:prstGeom prst="rect">
             <a:avLst/>
@@ -6820,7 +8630,7 @@
                 <a:latin typeface="Arial"/>
                 <a:ea typeface="DejaVu Sans"/>
               </a:rPr>
-              <a:t>18’</a:t>
+              <a:t>19’</a:t>
             </a:r>
             <a:r>
               <a:rPr b="0" lang="en-US" sz="1800" spc="-1" strike="noStrike">
@@ -6846,8 +8656,8 @@
         </p:nvSpPr>
         <p:spPr>
           <a:xfrm flipH="1">
-            <a:off x="8610480" y="3804840"/>
-            <a:ext cx="360" cy="537480"/>
+            <a:off x="8609760" y="3804840"/>
+            <a:ext cx="360" cy="537120"/>
           </a:xfrm>
           <a:custGeom>
             <a:avLst/>
@@ -6896,7 +8706,7 @@
         <p:spPr>
           <a:xfrm>
             <a:off x="8134200" y="3804840"/>
-            <a:ext cx="714960" cy="308520"/>
+            <a:ext cx="714600" cy="308160"/>
           </a:xfrm>
           <a:prstGeom prst="rect">
             <a:avLst/>
@@ -6939,7 +8749,7 @@
                 <a:latin typeface="Arial"/>
                 <a:ea typeface="DejaVu Sans"/>
               </a:rPr>
-              <a:t>6’</a:t>
+              <a:t>3’</a:t>
             </a:r>
             <a:endParaRPr b="0" lang="en-US" sz="1800" spc="-1" strike="noStrike">
               <a:latin typeface="Arial"/>
@@ -6956,7 +8766,7 @@
         <p:spPr>
           <a:xfrm>
             <a:off x="8619120" y="5012280"/>
-            <a:ext cx="360" cy="517320"/>
+            <a:ext cx="360" cy="516960"/>
           </a:xfrm>
           <a:custGeom>
             <a:avLst/>
@@ -6998,21 +8808,19 @@
       </p:sp>
       <p:sp>
         <p:nvSpPr>
-          <p:cNvPr id="105" name="Rectangle 118"/>
+          <p:cNvPr id="105" name="Rectangle 119"/>
           <p:cNvSpPr/>
           <p:nvPr/>
         </p:nvSpPr>
         <p:spPr>
           <a:xfrm>
-            <a:off x="7099200" y="4343400"/>
-            <a:ext cx="899280" cy="684360"/>
-          </a:xfrm>
-          <a:prstGeom prst="rect">
-            <a:avLst/>
-          </a:prstGeom>
-          <a:solidFill>
-            <a:srgbClr val="4f81bd"/>
-          </a:solidFill>
+            <a:off x="4628520" y="3838320"/>
+            <a:ext cx="4073040" cy="1668600"/>
+          </a:xfrm>
+          <a:prstGeom prst="rect">
+            <a:avLst/>
+          </a:prstGeom>
+          <a:noFill/>
           <a:ln>
             <a:solidFill>
               <a:srgbClr val="223852"/>
@@ -7036,23 +8844,70 @@
       </p:sp>
       <p:sp>
         <p:nvSpPr>
-          <p:cNvPr id="106" name="Rectangle 119"/>
+          <p:cNvPr id="106" name="Straight Arrow Connector 124"/>
           <p:cNvSpPr/>
           <p:nvPr/>
         </p:nvSpPr>
         <p:spPr>
           <a:xfrm>
-            <a:off x="4628520" y="3838320"/>
-            <a:ext cx="4073400" cy="1668960"/>
-          </a:xfrm>
-          <a:prstGeom prst="rect">
-            <a:avLst/>
-          </a:prstGeom>
+            <a:off x="8613360" y="4343400"/>
+            <a:ext cx="360" cy="723240"/>
+          </a:xfrm>
+          <a:custGeom>
+            <a:avLst/>
+            <a:gdLst/>
+            <a:ahLst/>
+            <a:rect l="l" t="t" r="r" b="b"/>
+            <a:pathLst>
+              <a:path w="21600" h="21600">
+                <a:moveTo>
+                  <a:pt x="0" y="0"/>
+                </a:moveTo>
+                <a:lnTo>
+                  <a:pt x="21600" y="21600"/>
+                </a:lnTo>
+              </a:path>
+            </a:pathLst>
+          </a:custGeom>
           <a:noFill/>
           <a:ln>
             <a:solidFill>
-              <a:srgbClr val="223852"/>
+              <a:srgbClr val="4a7ebb"/>
             </a:solidFill>
+            <a:headEnd len="med" type="triangle" w="med"/>
+            <a:tailEnd len="med" type="triangle" w="med"/>
+          </a:ln>
+        </p:spPr>
+        <p:style>
+          <a:lnRef idx="1">
+            <a:schemeClr val="accent1"/>
+          </a:lnRef>
+          <a:fillRef idx="0">
+            <a:schemeClr val="accent1"/>
+          </a:fillRef>
+          <a:effectRef idx="0">
+            <a:schemeClr val="accent1"/>
+          </a:effectRef>
+          <a:fontRef idx="minor"/>
+        </p:style>
+      </p:sp>
+      <p:sp>
+        <p:nvSpPr>
+          <p:cNvPr id="107" name="Rectangle 125"/>
+          <p:cNvSpPr/>
+          <p:nvPr/>
+        </p:nvSpPr>
+        <p:spPr>
+          <a:xfrm>
+            <a:off x="8199000" y="4464360"/>
+            <a:ext cx="714600" cy="308160"/>
+          </a:xfrm>
+          <a:prstGeom prst="rect">
+            <a:avLst/>
+          </a:prstGeom>
+          <a:noFill/>
+          <a:ln>
+            <a:noFill/>
           </a:ln>
         </p:spPr>
         <p:style>
@@ -7069,17 +8924,53 @@
           </a:effectRef>
           <a:fontRef idx="minor"/>
         </p:style>
-      </p:sp>
-      <p:sp>
-        <p:nvSpPr>
-          <p:cNvPr id="107" name="Straight Arrow Connector 124"/>
+        <p:txBody>
+          <a:bodyPr lIns="90000" rIns="90000" tIns="45000" bIns="45000" anchor="ctr">
+            <a:noAutofit/>
+          </a:bodyPr>
+          <a:p>
+            <a:pPr algn="ctr">
+              <a:lnSpc>
+                <a:spcPct val="100000"/>
+              </a:lnSpc>
+              <a:buNone/>
+            </a:pPr>
+            <a:r>
+              <a:rPr b="0" lang="en-US" sz="1800" spc="-1" strike="noStrike">
+                <a:solidFill>
+                  <a:srgbClr val="000000"/>
+                </a:solidFill>
+                <a:latin typeface="Arial"/>
+                <a:ea typeface="DejaVu Sans"/>
+              </a:rPr>
+              <a:t>8’</a:t>
+            </a:r>
+            <a:r>
+              <a:rPr b="0" lang="en-US" sz="1800" spc="-1" strike="noStrike">
+                <a:solidFill>
+                  <a:srgbClr val="ffffff"/>
+                </a:solidFill>
+                <a:latin typeface="Arial"/>
+                <a:ea typeface="DejaVu Sans"/>
+              </a:rPr>
+              <a:t>’</a:t>
+            </a:r>
+            <a:endParaRPr b="0" lang="en-US" sz="1800" spc="-1" strike="noStrike">
+              <a:latin typeface="Arial"/>
+            </a:endParaRPr>
+          </a:p>
+        </p:txBody>
+      </p:sp>
+      <p:sp>
+        <p:nvSpPr>
+          <p:cNvPr id="108" name="Straight Arrow Connector 130"/>
           <p:cNvSpPr/>
           <p:nvPr/>
         </p:nvSpPr>
         <p:spPr>
-          <a:xfrm>
-            <a:off x="8613360" y="4343400"/>
-            <a:ext cx="360" cy="723600"/>
+          <a:xfrm flipV="1">
+            <a:off x="7769160" y="5377680"/>
+            <a:ext cx="588960" cy="2880"/>
           </a:xfrm>
           <a:custGeom>
             <a:avLst/>
@@ -7121,14 +9012,14 @@
       </p:sp>
       <p:sp>
         <p:nvSpPr>
-          <p:cNvPr id="108" name="Rectangle 125"/>
+          <p:cNvPr id="109" name="Rectangle 131"/>
           <p:cNvSpPr/>
           <p:nvPr/>
         </p:nvSpPr>
         <p:spPr>
           <a:xfrm>
-            <a:off x="8199000" y="4464360"/>
-            <a:ext cx="714960" cy="308520"/>
+            <a:off x="7841160" y="5357160"/>
+            <a:ext cx="555840" cy="308160"/>
           </a:xfrm>
           <a:prstGeom prst="rect">
             <a:avLst/>
@@ -7171,17 +9062,7 @@
                 <a:latin typeface="Arial"/>
                 <a:ea typeface="DejaVu Sans"/>
               </a:rPr>
-              <a:t>8’</a:t>
-            </a:r>
-            <a:r>
-              <a:rPr b="0" lang="en-US" sz="1800" spc="-1" strike="noStrike">
-                <a:solidFill>
-                  <a:srgbClr val="ffffff"/>
-                </a:solidFill>
-                <a:latin typeface="Arial"/>
-                <a:ea typeface="DejaVu Sans"/>
-              </a:rPr>
-              <a:t>’</a:t>
+              <a:t>4’</a:t>
             </a:r>
             <a:endParaRPr b="0" lang="en-US" sz="1800" spc="-1" strike="noStrike">
               <a:latin typeface="Arial"/>
@@ -7191,14 +9072,339 @@
       </p:sp>
       <p:sp>
         <p:nvSpPr>
-          <p:cNvPr id="109" name="Straight Arrow Connector 130"/>
+          <p:cNvPr id="110" name="Rectangle 135"/>
           <p:cNvSpPr/>
           <p:nvPr/>
         </p:nvSpPr>
         <p:spPr>
-          <a:xfrm flipV="1">
-            <a:off x="7099200" y="5377680"/>
-            <a:ext cx="935280" cy="3240"/>
+          <a:xfrm>
+            <a:off x="4628520" y="5576760"/>
+            <a:ext cx="3598920" cy="365040"/>
+          </a:xfrm>
+          <a:prstGeom prst="rect">
+            <a:avLst/>
+          </a:prstGeom>
+          <a:solidFill>
+            <a:srgbClr val="4f81bd"/>
+          </a:solidFill>
+          <a:ln>
+            <a:solidFill>
+              <a:srgbClr val="223852"/>
+            </a:solidFill>
+          </a:ln>
+        </p:spPr>
+        <p:style>
+          <a:lnRef idx="2">
+            <a:schemeClr val="accent1">
+              <a:shade val="15000"/>
+            </a:schemeClr>
+          </a:lnRef>
+          <a:fillRef idx="1">
+            <a:schemeClr val="accent1"/>
+          </a:fillRef>
+          <a:effectRef idx="0">
+            <a:schemeClr val="accent1"/>
+          </a:effectRef>
+          <a:fontRef idx="minor"/>
+        </p:style>
+        <p:txBody>
+          <a:bodyPr lIns="90000" rIns="90000" tIns="45000" bIns="45000" anchor="ctr">
+            <a:noAutofit/>
+          </a:bodyPr>
+          <a:p>
+            <a:pPr algn="ctr">
+              <a:lnSpc>
+                <a:spcPct val="100000"/>
+              </a:lnSpc>
+              <a:buNone/>
+            </a:pPr>
+            <a:r>
+              <a:rPr b="0" lang="en-US" sz="1800" spc="-1" strike="noStrike">
+                <a:solidFill>
+                  <a:srgbClr val="000000"/>
+                </a:solidFill>
+                <a:latin typeface="Arial"/>
+                <a:ea typeface="DejaVu Sans"/>
+              </a:rPr>
+              <a:t>Main Building (2585)</a:t>
+            </a:r>
+            <a:endParaRPr b="0" lang="en-US" sz="1800" spc="-1" strike="noStrike">
+              <a:latin typeface="Arial"/>
+            </a:endParaRPr>
+          </a:p>
+        </p:txBody>
+      </p:sp>
+      <p:sp>
+        <p:nvSpPr>
+          <p:cNvPr id="111" name="Rectangle 136"/>
+          <p:cNvSpPr/>
+          <p:nvPr/>
+        </p:nvSpPr>
+        <p:spPr>
+          <a:xfrm>
+            <a:off x="6183720" y="5997960"/>
+            <a:ext cx="901080" cy="313920"/>
+          </a:xfrm>
+          <a:prstGeom prst="rect">
+            <a:avLst/>
+          </a:prstGeom>
+          <a:noFill/>
+          <a:ln>
+            <a:noFill/>
+          </a:ln>
+        </p:spPr>
+        <p:style>
+          <a:lnRef idx="2">
+            <a:schemeClr val="accent1">
+              <a:shade val="15000"/>
+            </a:schemeClr>
+          </a:lnRef>
+          <a:fillRef idx="1">
+            <a:schemeClr val="accent1"/>
+          </a:fillRef>
+          <a:effectRef idx="0">
+            <a:schemeClr val="accent1"/>
+          </a:effectRef>
+          <a:fontRef idx="minor"/>
+        </p:style>
+        <p:txBody>
+          <a:bodyPr lIns="90000" rIns="90000" tIns="45000" bIns="45000" anchor="ctr">
+            <a:noAutofit/>
+          </a:bodyPr>
+          <a:p>
+            <a:pPr algn="ctr">
+              <a:lnSpc>
+                <a:spcPct val="100000"/>
+              </a:lnSpc>
+              <a:buNone/>
+            </a:pPr>
+            <a:r>
+              <a:rPr b="0" lang="en-US" sz="1800" spc="-1" strike="noStrike">
+                <a:solidFill>
+                  <a:srgbClr val="000000"/>
+                </a:solidFill>
+                <a:latin typeface="Arial"/>
+                <a:ea typeface="DejaVu Sans"/>
+              </a:rPr>
+              <a:t>26’</a:t>
+            </a:r>
+            <a:r>
+              <a:rPr b="0" lang="en-US" sz="1800" spc="-1" strike="noStrike">
+                <a:solidFill>
+                  <a:srgbClr val="ffffff"/>
+                </a:solidFill>
+                <a:latin typeface="Arial"/>
+                <a:ea typeface="DejaVu Sans"/>
+              </a:rPr>
+              <a:t>’</a:t>
+            </a:r>
+            <a:endParaRPr b="0" lang="en-US" sz="1800" spc="-1" strike="noStrike">
+              <a:latin typeface="Arial"/>
+            </a:endParaRPr>
+          </a:p>
+        </p:txBody>
+      </p:sp>
+      <p:sp>
+        <p:nvSpPr>
+          <p:cNvPr id="112" name="Rectangle 141"/>
+          <p:cNvSpPr/>
+          <p:nvPr/>
+        </p:nvSpPr>
+        <p:spPr>
+          <a:xfrm>
+            <a:off x="7653600" y="3946320"/>
+            <a:ext cx="804600" cy="308160"/>
+          </a:xfrm>
+          <a:prstGeom prst="rect">
+            <a:avLst/>
+          </a:prstGeom>
+          <a:noFill/>
+          <a:ln>
+            <a:noFill/>
+          </a:ln>
+        </p:spPr>
+        <p:style>
+          <a:lnRef idx="2">
+            <a:schemeClr val="accent1">
+              <a:shade val="15000"/>
+            </a:schemeClr>
+          </a:lnRef>
+          <a:fillRef idx="1">
+            <a:schemeClr val="accent1"/>
+          </a:fillRef>
+          <a:effectRef idx="0">
+            <a:schemeClr val="accent1"/>
+          </a:effectRef>
+          <a:fontRef idx="minor"/>
+        </p:style>
+        <p:txBody>
+          <a:bodyPr lIns="90000" rIns="90000" tIns="45000" bIns="45000" anchor="ctr">
+            <a:noAutofit/>
+          </a:bodyPr>
+          <a:p>
+            <a:pPr algn="ctr">
+              <a:lnSpc>
+                <a:spcPct val="100000"/>
+              </a:lnSpc>
+              <a:buNone/>
+            </a:pPr>
+            <a:r>
+              <a:rPr b="0" lang="en-US" sz="1800" spc="-1" strike="noStrike">
+                <a:solidFill>
+                  <a:srgbClr val="000000"/>
+                </a:solidFill>
+                <a:latin typeface="Arial"/>
+                <a:ea typeface="DejaVu Sans"/>
+              </a:rPr>
+              <a:t>2585</a:t>
+            </a:r>
+            <a:endParaRPr b="0" lang="en-US" sz="1800" spc="-1" strike="noStrike">
+              <a:latin typeface="Arial"/>
+            </a:endParaRPr>
+          </a:p>
+        </p:txBody>
+      </p:sp>
+      <p:sp>
+        <p:nvSpPr>
+          <p:cNvPr id="113" name="Rectangle 143"/>
+          <p:cNvSpPr/>
+          <p:nvPr/>
+        </p:nvSpPr>
+        <p:spPr>
+          <a:xfrm>
+            <a:off x="2562840" y="1159560"/>
+            <a:ext cx="588960" cy="694080"/>
+          </a:xfrm>
+          <a:prstGeom prst="rect">
+            <a:avLst/>
+          </a:prstGeom>
+          <a:solidFill>
+            <a:srgbClr val="4f81bd"/>
+          </a:solidFill>
+          <a:ln>
+            <a:solidFill>
+              <a:srgbClr val="223852"/>
+            </a:solidFill>
+          </a:ln>
+        </p:spPr>
+        <p:style>
+          <a:lnRef idx="2">
+            <a:schemeClr val="accent1">
+              <a:shade val="15000"/>
+            </a:schemeClr>
+          </a:lnRef>
+          <a:fillRef idx="1">
+            <a:schemeClr val="accent1"/>
+          </a:fillRef>
+          <a:effectRef idx="0">
+            <a:schemeClr val="accent1"/>
+          </a:effectRef>
+          <a:fontRef idx="minor"/>
+        </p:style>
+      </p:sp>
+      <p:sp>
+        <p:nvSpPr>
+          <p:cNvPr id="114" name="Rectangle 144"/>
+          <p:cNvSpPr/>
+          <p:nvPr/>
+        </p:nvSpPr>
+        <p:spPr>
+          <a:xfrm>
+            <a:off x="2540520" y="1209960"/>
+            <a:ext cx="714600" cy="308160"/>
+          </a:xfrm>
+          <a:prstGeom prst="rect">
+            <a:avLst/>
+          </a:prstGeom>
+          <a:noFill/>
+          <a:ln>
+            <a:noFill/>
+          </a:ln>
+        </p:spPr>
+        <p:style>
+          <a:lnRef idx="2">
+            <a:schemeClr val="accent1">
+              <a:shade val="15000"/>
+            </a:schemeClr>
+          </a:lnRef>
+          <a:fillRef idx="1">
+            <a:schemeClr val="accent1"/>
+          </a:fillRef>
+          <a:effectRef idx="0">
+            <a:schemeClr val="accent1"/>
+          </a:effectRef>
+          <a:fontRef idx="minor"/>
+        </p:style>
+        <p:txBody>
+          <a:bodyPr lIns="90000" rIns="90000" tIns="45000" bIns="45000" anchor="ctr">
+            <a:noAutofit/>
+          </a:bodyPr>
+          <a:p>
+            <a:pPr algn="ctr">
+              <a:lnSpc>
+                <a:spcPct val="100000"/>
+              </a:lnSpc>
+              <a:buNone/>
+            </a:pPr>
+            <a:r>
+              <a:rPr b="0" lang="en-US" sz="1800" spc="-1" strike="noStrike">
+                <a:solidFill>
+                  <a:srgbClr val="000000"/>
+                </a:solidFill>
+                <a:latin typeface="Arial"/>
+                <a:ea typeface="DejaVu Sans"/>
+              </a:rPr>
+              <a:t>2583</a:t>
+            </a:r>
+            <a:endParaRPr b="0" lang="en-US" sz="1800" spc="-1" strike="noStrike">
+              <a:latin typeface="Arial"/>
+            </a:endParaRPr>
+          </a:p>
+        </p:txBody>
+      </p:sp>
+      <p:sp>
+        <p:nvSpPr>
+          <p:cNvPr id="115" name="Straight Connector 148"/>
+          <p:cNvSpPr/>
+          <p:nvPr/>
+        </p:nvSpPr>
+        <p:spPr>
+          <a:xfrm flipH="1" flipV="1">
+            <a:off x="2726640" y="1843560"/>
+            <a:ext cx="394920" cy="180720"/>
+          </a:xfrm>
+          <a:prstGeom prst="line">
+            <a:avLst/>
+          </a:prstGeom>
+          <a:ln>
+            <a:solidFill>
+              <a:srgbClr val="4a7ebb"/>
+            </a:solidFill>
+          </a:ln>
+        </p:spPr>
+        <p:style>
+          <a:lnRef idx="1">
+            <a:schemeClr val="accent1"/>
+          </a:lnRef>
+          <a:fillRef idx="0">
+            <a:schemeClr val="accent1"/>
+          </a:fillRef>
+          <a:effectRef idx="0">
+            <a:schemeClr val="accent1"/>
+          </a:effectRef>
+          <a:fontRef idx="minor"/>
+        </p:style>
+      </p:sp>
+      <p:sp>
+        <p:nvSpPr>
+          <p:cNvPr id="116" name="Straight Arrow Connector 5"/>
+          <p:cNvSpPr/>
+          <p:nvPr/>
+        </p:nvSpPr>
+        <p:spPr>
+          <a:xfrm>
+            <a:off x="3297240" y="1179000"/>
+            <a:ext cx="360" cy="684360"/>
           </a:xfrm>
           <a:custGeom>
             <a:avLst/>
@@ -7240,14 +9446,14 @@
       </p:sp>
       <p:sp>
         <p:nvSpPr>
-          <p:cNvPr id="110" name="Rectangle 131"/>
+          <p:cNvPr id="117" name="Rectangle 6"/>
           <p:cNvSpPr/>
           <p:nvPr/>
         </p:nvSpPr>
         <p:spPr>
           <a:xfrm>
-            <a:off x="7445160" y="5249160"/>
-            <a:ext cx="714960" cy="308520"/>
+            <a:off x="3058200" y="1255320"/>
+            <a:ext cx="714600" cy="308160"/>
           </a:xfrm>
           <a:prstGeom prst="rect">
             <a:avLst/>
@@ -7290,7 +9496,17 @@
                 <a:latin typeface="Arial"/>
                 <a:ea typeface="DejaVu Sans"/>
               </a:rPr>
-              <a:t>8’</a:t>
+              <a:t>5’</a:t>
+            </a:r>
+            <a:r>
+              <a:rPr b="0" lang="en-US" sz="1800" spc="-1" strike="noStrike">
+                <a:solidFill>
+                  <a:srgbClr val="ffffff"/>
+                </a:solidFill>
+                <a:latin typeface="Arial"/>
+                <a:ea typeface="DejaVu Sans"/>
+              </a:rPr>
+              <a:t>’</a:t>
             </a:r>
             <a:endParaRPr b="0" lang="en-US" sz="1800" spc="-1" strike="noStrike">
               <a:latin typeface="Arial"/>
@@ -7300,25 +9516,70 @@
       </p:sp>
       <p:sp>
         <p:nvSpPr>
-          <p:cNvPr id="111" name="Rectangle 135"/>
+          <p:cNvPr id="118" name="Straight Arrow Connector 8"/>
           <p:cNvSpPr/>
           <p:nvPr/>
         </p:nvSpPr>
         <p:spPr>
           <a:xfrm>
-            <a:off x="4628520" y="5576760"/>
-            <a:ext cx="3599280" cy="365400"/>
-          </a:xfrm>
-          <a:prstGeom prst="rect">
-            <a:avLst/>
-          </a:prstGeom>
-          <a:solidFill>
-            <a:srgbClr val="4f81bd"/>
-          </a:solidFill>
+            <a:off x="2575800" y="1962360"/>
+            <a:ext cx="599760" cy="360"/>
+          </a:xfrm>
+          <a:custGeom>
+            <a:avLst/>
+            <a:gdLst/>
+            <a:ahLst/>
+            <a:rect l="l" t="t" r="r" b="b"/>
+            <a:pathLst>
+              <a:path w="21600" h="21600">
+                <a:moveTo>
+                  <a:pt x="0" y="0"/>
+                </a:moveTo>
+                <a:lnTo>
+                  <a:pt x="21600" y="21600"/>
+                </a:lnTo>
+              </a:path>
+            </a:pathLst>
+          </a:custGeom>
+          <a:noFill/>
           <a:ln>
             <a:solidFill>
-              <a:srgbClr val="223852"/>
+              <a:srgbClr val="4a7ebb"/>
             </a:solidFill>
+            <a:headEnd len="med" type="triangle" w="med"/>
+            <a:tailEnd len="med" type="triangle" w="med"/>
+          </a:ln>
+        </p:spPr>
+        <p:style>
+          <a:lnRef idx="1">
+            <a:schemeClr val="accent1"/>
+          </a:lnRef>
+          <a:fillRef idx="0">
+            <a:schemeClr val="accent1"/>
+          </a:fillRef>
+          <a:effectRef idx="0">
+            <a:schemeClr val="accent1"/>
+          </a:effectRef>
+          <a:fontRef idx="minor"/>
+        </p:style>
+      </p:sp>
+      <p:sp>
+        <p:nvSpPr>
+          <p:cNvPr id="119" name="Rectangle 9"/>
+          <p:cNvSpPr/>
+          <p:nvPr/>
+        </p:nvSpPr>
+        <p:spPr>
+          <a:xfrm>
+            <a:off x="2568600" y="1917000"/>
+            <a:ext cx="714600" cy="308160"/>
+          </a:xfrm>
+          <a:prstGeom prst="rect">
+            <a:avLst/>
+          </a:prstGeom>
+          <a:noFill/>
+          <a:ln>
+            <a:noFill/>
           </a:ln>
         </p:spPr>
         <p:style>
@@ -7354,7 +9615,7 @@
                 <a:latin typeface="Arial"/>
                 <a:ea typeface="DejaVu Sans"/>
               </a:rPr>
-              <a:t>Main Building (2585)</a:t>
+              <a:t>4’</a:t>
             </a:r>
             <a:endParaRPr b="0" lang="en-US" sz="1800" spc="-1" strike="noStrike">
               <a:latin typeface="Arial"/>
@@ -7364,21 +9625,27 @@
       </p:sp>
       <p:sp>
         <p:nvSpPr>
-          <p:cNvPr id="112" name="Rectangle 136"/>
+          <p:cNvPr id="120" name="Rectangle: Rounded Corners 28"/>
           <p:cNvSpPr/>
           <p:nvPr/>
         </p:nvSpPr>
         <p:spPr>
           <a:xfrm>
-            <a:off x="6183720" y="5997960"/>
-            <a:ext cx="901440" cy="314280"/>
-          </a:xfrm>
-          <a:prstGeom prst="rect">
-            <a:avLst/>
-          </a:prstGeom>
-          <a:noFill/>
+            <a:off x="5194800" y="2624760"/>
+            <a:ext cx="2283840" cy="534240"/>
+          </a:xfrm>
+          <a:prstGeom prst="roundRect">
+            <a:avLst>
+              <a:gd name="adj" fmla="val 16667"/>
+            </a:avLst>
+          </a:prstGeom>
+          <a:solidFill>
+            <a:srgbClr val="4f81bd"/>
+          </a:solidFill>
           <a:ln>
-            <a:noFill/>
+            <a:solidFill>
+              <a:srgbClr val="223852"/>
+            </a:solidFill>
           </a:ln>
         </p:spPr>
         <p:style>
@@ -7414,17 +9681,7 @@
                 <a:latin typeface="Arial"/>
                 <a:ea typeface="DejaVu Sans"/>
               </a:rPr>
-              <a:t>26’</a:t>
-            </a:r>
-            <a:r>
-              <a:rPr b="0" lang="en-US" sz="1800" spc="-1" strike="noStrike">
-                <a:solidFill>
-                  <a:srgbClr val="ffffff"/>
-                </a:solidFill>
-                <a:latin typeface="Arial"/>
-                <a:ea typeface="DejaVu Sans"/>
-              </a:rPr>
-              <a:t>’</a:t>
+              <a:t>2583 Car</a:t>
             </a:r>
             <a:endParaRPr b="0" lang="en-US" sz="1800" spc="-1" strike="noStrike">
               <a:latin typeface="Arial"/>
@@ -7434,21 +9691,27 @@
       </p:sp>
       <p:sp>
         <p:nvSpPr>
-          <p:cNvPr id="113" name="Rectangle 141"/>
+          <p:cNvPr id="121" name="Rectangle: Rounded Corners 29"/>
           <p:cNvSpPr/>
           <p:nvPr/>
         </p:nvSpPr>
         <p:spPr>
           <a:xfrm>
-            <a:off x="7085520" y="3946320"/>
-            <a:ext cx="804960" cy="308520"/>
-          </a:xfrm>
-          <a:prstGeom prst="rect">
-            <a:avLst/>
-          </a:prstGeom>
-          <a:noFill/>
+            <a:off x="5194800" y="2031840"/>
+            <a:ext cx="2261520" cy="534240"/>
+          </a:xfrm>
+          <a:prstGeom prst="roundRect">
+            <a:avLst>
+              <a:gd name="adj" fmla="val 16667"/>
+            </a:avLst>
+          </a:prstGeom>
+          <a:solidFill>
+            <a:srgbClr val="4f81bd"/>
+          </a:solidFill>
           <a:ln>
-            <a:noFill/>
+            <a:solidFill>
+              <a:srgbClr val="223852"/>
+            </a:solidFill>
           </a:ln>
         </p:spPr>
         <p:style>
@@ -7484,7 +9747,7 @@
                 <a:latin typeface="Arial"/>
                 <a:ea typeface="DejaVu Sans"/>
               </a:rPr>
-              <a:t>2585</a:t>
+              <a:t>2585 Car</a:t>
             </a:r>
             <a:endParaRPr b="0" lang="en-US" sz="1800" spc="-1" strike="noStrike">
               <a:latin typeface="Arial"/>
@@ -7494,21 +9757,19 @@
       </p:sp>
       <p:sp>
         <p:nvSpPr>
-          <p:cNvPr id="114" name="Rectangle 143"/>
+          <p:cNvPr id="122" name="Rectangle 30"/>
           <p:cNvSpPr/>
           <p:nvPr/>
         </p:nvSpPr>
         <p:spPr>
           <a:xfrm>
-            <a:off x="2562840" y="1159560"/>
-            <a:ext cx="589320" cy="694440"/>
-          </a:xfrm>
-          <a:prstGeom prst="rect">
-            <a:avLst/>
-          </a:prstGeom>
-          <a:solidFill>
-            <a:srgbClr val="4f81bd"/>
-          </a:solidFill>
+            <a:off x="2562840" y="1143000"/>
+            <a:ext cx="6579360" cy="5712840"/>
+          </a:xfrm>
+          <a:prstGeom prst="rect">
+            <a:avLst/>
+          </a:prstGeom>
+          <a:noFill/>
           <a:ln>
             <a:solidFill>
               <a:srgbClr val="223852"/>
@@ -7532,14 +9793,63 @@
       </p:sp>
       <p:sp>
         <p:nvSpPr>
-          <p:cNvPr id="115" name="Rectangle 144"/>
+          <p:cNvPr id="123" name="Straight Arrow Connector 64"/>
           <p:cNvSpPr/>
           <p:nvPr/>
         </p:nvSpPr>
         <p:spPr>
           <a:xfrm>
-            <a:off x="2540520" y="1209960"/>
-            <a:ext cx="714960" cy="308520"/>
+            <a:off x="4572000" y="6171840"/>
+            <a:ext cx="4253760" cy="360"/>
+          </a:xfrm>
+          <a:custGeom>
+            <a:avLst/>
+            <a:gdLst/>
+            <a:ahLst/>
+            <a:rect l="l" t="t" r="r" b="b"/>
+            <a:pathLst>
+              <a:path w="21600" h="21600">
+                <a:moveTo>
+                  <a:pt x="0" y="0"/>
+                </a:moveTo>
+                <a:lnTo>
+                  <a:pt x="21600" y="21600"/>
+                </a:lnTo>
+              </a:path>
+            </a:pathLst>
+          </a:custGeom>
+          <a:noFill/>
+          <a:ln>
+            <a:solidFill>
+              <a:srgbClr val="000000"/>
+            </a:solidFill>
+            <a:headEnd len="med" type="triangle" w="med"/>
+            <a:tailEnd len="med" type="triangle" w="med"/>
+          </a:ln>
+        </p:spPr>
+        <p:style>
+          <a:lnRef idx="1">
+            <a:schemeClr val="accent1"/>
+          </a:lnRef>
+          <a:fillRef idx="0">
+            <a:schemeClr val="accent1"/>
+          </a:fillRef>
+          <a:effectRef idx="0">
+            <a:schemeClr val="accent1"/>
+          </a:effectRef>
+          <a:fontRef idx="minor"/>
+        </p:style>
+      </p:sp>
+      <p:sp>
+        <p:nvSpPr>
+          <p:cNvPr id="124" name="Rectangle 1"/>
+          <p:cNvSpPr/>
+          <p:nvPr/>
+        </p:nvSpPr>
+        <p:spPr>
+          <a:xfrm>
+            <a:off x="8703360" y="4464360"/>
+            <a:ext cx="714600" cy="308160"/>
           </a:xfrm>
           <a:prstGeom prst="rect">
             <a:avLst/>
@@ -7577,12 +9887,32 @@
             <a:r>
               <a:rPr b="0" lang="en-US" sz="1800" spc="-1" strike="noStrike">
                 <a:solidFill>
-                  <a:srgbClr val="000000"/>
+                  <a:srgbClr val="ffffff"/>
                 </a:solidFill>
                 <a:latin typeface="Arial"/>
                 <a:ea typeface="DejaVu Sans"/>
               </a:rPr>
-              <a:t>2583</a:t>
+              <a:t>2</a:t>
+            </a:r>
+            <a:r>
+              <a:rPr b="0" lang="en-US" sz="1800" spc="-1" strike="noStrike">
+                <a:solidFill>
+                  <a:srgbClr val="000000"/>
+                </a:solidFill>
+                <a:latin typeface="Arial"/>
+                <a:ea typeface="DejaVu Sans"/>
+              </a:rPr>
+              <a:t>16’</a:t>
+            </a:r>
+            <a:r>
+              <a:rPr b="0" lang="en-US" sz="1800" spc="-1" strike="noStrike">
+                <a:solidFill>
+                  <a:srgbClr val="ffffff"/>
+                </a:solidFill>
+                <a:latin typeface="Arial"/>
+                <a:ea typeface="DejaVu Sans"/>
+              </a:rPr>
+              <a:t>’</a:t>
             </a:r>
             <a:endParaRPr b="0" lang="en-US" sz="1800" spc="-1" strike="noStrike">
               <a:latin typeface="Arial"/>
@@ -7592,47 +9922,14 @@
       </p:sp>
       <p:sp>
         <p:nvSpPr>
-          <p:cNvPr id="116" name="Straight Connector 148"/>
+          <p:cNvPr id="125" name="Straight Arrow Connector 1"/>
           <p:cNvSpPr/>
           <p:nvPr/>
         </p:nvSpPr>
         <p:spPr>
-          <a:xfrm flipH="1" flipV="1">
-            <a:off x="2726640" y="1843560"/>
-            <a:ext cx="394920" cy="180720"/>
-          </a:xfrm>
-          <a:prstGeom prst="line">
-            <a:avLst/>
-          </a:prstGeom>
-          <a:ln>
-            <a:solidFill>
-              <a:srgbClr val="4a7ebb"/>
-            </a:solidFill>
-          </a:ln>
-        </p:spPr>
-        <p:style>
-          <a:lnRef idx="1">
-            <a:schemeClr val="accent1"/>
-          </a:lnRef>
-          <a:fillRef idx="0">
-            <a:schemeClr val="accent1"/>
-          </a:fillRef>
-          <a:effectRef idx="0">
-            <a:schemeClr val="accent1"/>
-          </a:effectRef>
-          <a:fontRef idx="minor"/>
-        </p:style>
-      </p:sp>
-      <p:sp>
-        <p:nvSpPr>
-          <p:cNvPr id="117" name="Straight Arrow Connector 5"/>
-          <p:cNvSpPr/>
-          <p:nvPr/>
-        </p:nvSpPr>
-        <p:spPr>
-          <a:xfrm>
-            <a:off x="3297240" y="1179000"/>
-            <a:ext cx="360" cy="684720"/>
+          <a:xfrm>
+            <a:off x="8804880" y="3886200"/>
+            <a:ext cx="360" cy="1501920"/>
           </a:xfrm>
           <a:custGeom>
             <a:avLst/>
@@ -7674,14 +9971,14 @@
       </p:sp>
       <p:sp>
         <p:nvSpPr>
-          <p:cNvPr id="118" name="Rectangle 6"/>
+          <p:cNvPr id="126" name="Rectangle 2"/>
           <p:cNvSpPr/>
           <p:nvPr/>
         </p:nvSpPr>
         <p:spPr>
           <a:xfrm>
-            <a:off x="3058200" y="1255320"/>
-            <a:ext cx="714960" cy="308520"/>
+            <a:off x="8134200" y="5029200"/>
+            <a:ext cx="714600" cy="308160"/>
           </a:xfrm>
           <a:prstGeom prst="rect">
             <a:avLst/>
@@ -7726,16 +10023,6 @@
               </a:rPr>
               <a:t>5’</a:t>
             </a:r>
-            <a:r>
-              <a:rPr b="0" lang="en-US" sz="1800" spc="-1" strike="noStrike">
-                <a:solidFill>
-                  <a:srgbClr val="ffffff"/>
-                </a:solidFill>
-                <a:latin typeface="Arial"/>
-                <a:ea typeface="DejaVu Sans"/>
-              </a:rPr>
-              <a:t>’</a:t>
-            </a:r>
             <a:endParaRPr b="0" lang="en-US" sz="1800" spc="-1" strike="noStrike">
               <a:latin typeface="Arial"/>
             </a:endParaRPr>
@@ -7744,14 +10031,330 @@
       </p:sp>
       <p:sp>
         <p:nvSpPr>
-          <p:cNvPr id="119" name="Straight Arrow Connector 8"/>
+          <p:cNvPr id="127" name=""/>
           <p:cNvSpPr/>
           <p:nvPr/>
         </p:nvSpPr>
         <p:spPr>
           <a:xfrm>
-            <a:off x="2575800" y="1962360"/>
-            <a:ext cx="600120" cy="360"/>
+            <a:off x="-1143000" y="3299760"/>
+            <a:ext cx="4570200" cy="2870640"/>
+          </a:xfrm>
+          <a:prstGeom prst="rect">
+            <a:avLst/>
+          </a:prstGeom>
+          <a:solidFill>
+            <a:srgbClr val="ffffff"/>
+          </a:solidFill>
+          <a:ln w="0">
+            <a:solidFill>
+              <a:srgbClr val="3465a4"/>
+            </a:solidFill>
+          </a:ln>
+        </p:spPr>
+        <p:style>
+          <a:lnRef idx="0"/>
+          <a:fillRef idx="0"/>
+          <a:effectRef idx="0"/>
+          <a:fontRef idx="minor"/>
+        </p:style>
+      </p:sp>
+      <p:sp>
+        <p:nvSpPr>
+          <p:cNvPr id="128" name="Rectangle 10"/>
+          <p:cNvSpPr/>
+          <p:nvPr/>
+        </p:nvSpPr>
+        <p:spPr>
+          <a:xfrm>
+            <a:off x="-1086120" y="3528360"/>
+            <a:ext cx="3598920" cy="508680"/>
+          </a:xfrm>
+          <a:prstGeom prst="rect">
+            <a:avLst/>
+          </a:prstGeom>
+          <a:solidFill>
+            <a:srgbClr val="4f81bd"/>
+          </a:solidFill>
+          <a:ln>
+            <a:solidFill>
+              <a:srgbClr val="223852"/>
+            </a:solidFill>
+          </a:ln>
+        </p:spPr>
+        <p:style>
+          <a:lnRef idx="2">
+            <a:schemeClr val="accent1">
+              <a:shade val="15000"/>
+            </a:schemeClr>
+          </a:lnRef>
+          <a:fillRef idx="1">
+            <a:schemeClr val="accent1"/>
+          </a:fillRef>
+          <a:effectRef idx="0">
+            <a:schemeClr val="accent1"/>
+          </a:effectRef>
+          <a:fontRef idx="minor"/>
+        </p:style>
+        <p:txBody>
+          <a:bodyPr lIns="90000" rIns="90000" tIns="45000" bIns="45000" anchor="ctr">
+            <a:noAutofit/>
+          </a:bodyPr>
+          <a:p>
+            <a:pPr algn="ctr">
+              <a:lnSpc>
+                <a:spcPct val="100000"/>
+              </a:lnSpc>
+              <a:buNone/>
+            </a:pPr>
+            <a:r>
+              <a:rPr b="0" lang="en-US" sz="1800" spc="-1" strike="noStrike">
+                <a:solidFill>
+                  <a:srgbClr val="000000"/>
+                </a:solidFill>
+                <a:latin typeface="Arial"/>
+                <a:ea typeface="DejaVu Sans"/>
+              </a:rPr>
+              <a:t>Main Building (2581 Alma)</a:t>
+            </a:r>
+            <a:endParaRPr b="0" lang="en-US" sz="1800" spc="-1" strike="noStrike">
+              <a:latin typeface="Arial"/>
+            </a:endParaRPr>
+          </a:p>
+        </p:txBody>
+      </p:sp>
+      <p:sp>
+        <p:nvSpPr>
+          <p:cNvPr id="129" name="Rectangle 7"/>
+          <p:cNvSpPr/>
+          <p:nvPr/>
+        </p:nvSpPr>
+        <p:spPr>
+          <a:xfrm>
+            <a:off x="2971800" y="4220640"/>
+            <a:ext cx="461880" cy="923400"/>
+          </a:xfrm>
+          <a:prstGeom prst="rect">
+            <a:avLst/>
+          </a:prstGeom>
+          <a:solidFill>
+            <a:srgbClr val="4f81bd"/>
+          </a:solidFill>
+          <a:ln>
+            <a:solidFill>
+              <a:srgbClr val="223852"/>
+            </a:solidFill>
+          </a:ln>
+        </p:spPr>
+        <p:style>
+          <a:lnRef idx="2">
+            <a:schemeClr val="accent1">
+              <a:shade val="15000"/>
+            </a:schemeClr>
+          </a:lnRef>
+          <a:fillRef idx="1">
+            <a:schemeClr val="accent1"/>
+          </a:fillRef>
+          <a:effectRef idx="0">
+            <a:schemeClr val="accent1"/>
+          </a:effectRef>
+          <a:fontRef idx="minor"/>
+        </p:style>
+      </p:sp>
+      <p:sp>
+        <p:nvSpPr>
+          <p:cNvPr id="130" name="Rectangle 8"/>
+          <p:cNvSpPr/>
+          <p:nvPr/>
+        </p:nvSpPr>
+        <p:spPr>
+          <a:xfrm>
+            <a:off x="2063880" y="4825080"/>
+            <a:ext cx="1171800" cy="308160"/>
+          </a:xfrm>
+          <a:prstGeom prst="rect">
+            <a:avLst/>
+          </a:prstGeom>
+          <a:noFill/>
+          <a:ln>
+            <a:noFill/>
+          </a:ln>
+        </p:spPr>
+        <p:style>
+          <a:lnRef idx="2">
+            <a:schemeClr val="accent1">
+              <a:shade val="15000"/>
+            </a:schemeClr>
+          </a:lnRef>
+          <a:fillRef idx="1">
+            <a:schemeClr val="accent1"/>
+          </a:fillRef>
+          <a:effectRef idx="0">
+            <a:schemeClr val="accent1"/>
+          </a:effectRef>
+          <a:fontRef idx="minor"/>
+        </p:style>
+        <p:txBody>
+          <a:bodyPr lIns="90000" rIns="90000" tIns="45000" bIns="45000" anchor="ctr">
+            <a:noAutofit/>
+          </a:bodyPr>
+          <a:p>
+            <a:pPr algn="ctr">
+              <a:lnSpc>
+                <a:spcPct val="100000"/>
+              </a:lnSpc>
+              <a:buNone/>
+            </a:pPr>
+            <a:r>
+              <a:rPr b="0" lang="en-US" sz="1800" spc="-1" strike="noStrike">
+                <a:solidFill>
+                  <a:srgbClr val="000000"/>
+                </a:solidFill>
+                <a:latin typeface="Arial"/>
+                <a:ea typeface="DejaVu Sans"/>
+              </a:rPr>
+              <a:t>2581</a:t>
+            </a:r>
+            <a:r>
+              <a:rPr b="0" lang="en-US" sz="1800" spc="-1" strike="noStrike">
+                <a:solidFill>
+                  <a:srgbClr val="ffffff"/>
+                </a:solidFill>
+                <a:latin typeface="Arial"/>
+                <a:ea typeface="DejaVu Sans"/>
+              </a:rPr>
+              <a:t>’</a:t>
+            </a:r>
+            <a:endParaRPr b="0" lang="en-US" sz="1800" spc="-1" strike="noStrike">
+              <a:latin typeface="Arial"/>
+            </a:endParaRPr>
+          </a:p>
+        </p:txBody>
+      </p:sp>
+      <p:sp>
+        <p:nvSpPr>
+          <p:cNvPr id="131" name=""/>
+          <p:cNvSpPr/>
+          <p:nvPr/>
+        </p:nvSpPr>
+        <p:spPr>
+          <a:xfrm flipH="1">
+            <a:off x="2521080" y="3992040"/>
+            <a:ext cx="457200" cy="228600"/>
+          </a:xfrm>
+          <a:prstGeom prst="line">
+            <a:avLst/>
+          </a:prstGeom>
+          <a:ln w="0">
+            <a:solidFill>
+              <a:srgbClr val="3465a4"/>
+            </a:solidFill>
+          </a:ln>
+        </p:spPr>
+        <p:style>
+          <a:lnRef idx="0"/>
+          <a:fillRef idx="0"/>
+          <a:effectRef idx="0"/>
+          <a:fontRef idx="minor"/>
+        </p:style>
+      </p:sp>
+      <p:sp>
+        <p:nvSpPr>
+          <p:cNvPr id="132" name=""/>
+          <p:cNvSpPr/>
+          <p:nvPr/>
+        </p:nvSpPr>
+        <p:spPr>
+          <a:xfrm flipH="1">
+            <a:off x="2929680" y="3992040"/>
+            <a:ext cx="457200" cy="360"/>
+          </a:xfrm>
+          <a:prstGeom prst="line">
+            <a:avLst/>
+          </a:prstGeom>
+          <a:ln w="0">
+            <a:solidFill>
+              <a:srgbClr val="3465a4"/>
+            </a:solidFill>
+          </a:ln>
+        </p:spPr>
+        <p:style>
+          <a:lnRef idx="0"/>
+          <a:fillRef idx="0"/>
+          <a:effectRef idx="0"/>
+          <a:fontRef idx="minor"/>
+        </p:style>
+      </p:sp>
+      <p:sp>
+        <p:nvSpPr>
+          <p:cNvPr id="133" name="Rectangle 11"/>
+          <p:cNvSpPr/>
+          <p:nvPr/>
+        </p:nvSpPr>
+        <p:spPr>
+          <a:xfrm>
+            <a:off x="3547440" y="4343400"/>
+            <a:ext cx="714600" cy="308160"/>
+          </a:xfrm>
+          <a:prstGeom prst="rect">
+            <a:avLst/>
+          </a:prstGeom>
+          <a:noFill/>
+          <a:ln>
+            <a:noFill/>
+          </a:ln>
+        </p:spPr>
+        <p:style>
+          <a:lnRef idx="2">
+            <a:schemeClr val="accent1">
+              <a:shade val="15000"/>
+            </a:schemeClr>
+          </a:lnRef>
+          <a:fillRef idx="1">
+            <a:schemeClr val="accent1"/>
+          </a:fillRef>
+          <a:effectRef idx="0">
+            <a:schemeClr val="accent1"/>
+          </a:effectRef>
+          <a:fontRef idx="minor"/>
+        </p:style>
+        <p:txBody>
+          <a:bodyPr lIns="90000" rIns="90000" tIns="45000" bIns="45000" anchor="ctr">
+            <a:noAutofit/>
+          </a:bodyPr>
+          <a:p>
+            <a:pPr algn="ctr">
+              <a:lnSpc>
+                <a:spcPct val="100000"/>
+              </a:lnSpc>
+              <a:buNone/>
+            </a:pPr>
+            <a:r>
+              <a:rPr b="0" lang="en-US" sz="1800" spc="-1" strike="noStrike">
+                <a:solidFill>
+                  <a:srgbClr val="000000"/>
+                </a:solidFill>
+                <a:latin typeface="Arial"/>
+                <a:ea typeface="DejaVu Sans"/>
+              </a:rPr>
+              <a:t>8’</a:t>
+            </a:r>
+            <a:endParaRPr b="0" lang="en-US" sz="1800" spc="-1" strike="noStrike">
+              <a:latin typeface="Arial"/>
+            </a:endParaRPr>
+          </a:p>
+        </p:txBody>
+      </p:sp>
+      <p:sp>
+        <p:nvSpPr>
+          <p:cNvPr id="134" name="Straight Arrow Connector 2"/>
+          <p:cNvSpPr/>
+          <p:nvPr/>
+        </p:nvSpPr>
+        <p:spPr>
+          <a:xfrm>
+            <a:off x="3524760" y="4240440"/>
+            <a:ext cx="20880" cy="923760"/>
           </a:xfrm>
           <a:custGeom>
             <a:avLst/>
@@ -7793,14 +10396,63 @@
       </p:sp>
       <p:sp>
         <p:nvSpPr>
-          <p:cNvPr id="120" name="Rectangle 9"/>
+          <p:cNvPr id="135" name="Straight Arrow Connector 4"/>
           <p:cNvSpPr/>
           <p:nvPr/>
         </p:nvSpPr>
         <p:spPr>
           <a:xfrm>
-            <a:off x="2568600" y="1917000"/>
-            <a:ext cx="714960" cy="308520"/>
+            <a:off x="2923560" y="5299920"/>
+            <a:ext cx="503640" cy="360"/>
+          </a:xfrm>
+          <a:custGeom>
+            <a:avLst/>
+            <a:gdLst/>
+            <a:ahLst/>
+            <a:rect l="l" t="t" r="r" b="b"/>
+            <a:pathLst>
+              <a:path w="21600" h="21600">
+                <a:moveTo>
+                  <a:pt x="0" y="0"/>
+                </a:moveTo>
+                <a:lnTo>
+                  <a:pt x="21600" y="21600"/>
+                </a:lnTo>
+              </a:path>
+            </a:pathLst>
+          </a:custGeom>
+          <a:noFill/>
+          <a:ln>
+            <a:solidFill>
+              <a:srgbClr val="4a7ebb"/>
+            </a:solidFill>
+            <a:headEnd len="med" type="triangle" w="med"/>
+            <a:tailEnd len="med" type="triangle" w="med"/>
+          </a:ln>
+        </p:spPr>
+        <p:style>
+          <a:lnRef idx="1">
+            <a:schemeClr val="accent1"/>
+          </a:lnRef>
+          <a:fillRef idx="0">
+            <a:schemeClr val="accent1"/>
+          </a:fillRef>
+          <a:effectRef idx="0">
+            <a:schemeClr val="accent1"/>
+          </a:effectRef>
+          <a:fontRef idx="minor"/>
+        </p:style>
+      </p:sp>
+      <p:sp>
+        <p:nvSpPr>
+          <p:cNvPr id="136" name="Rectangle 12"/>
+          <p:cNvSpPr/>
+          <p:nvPr/>
+        </p:nvSpPr>
+        <p:spPr>
+          <a:xfrm>
+            <a:off x="2808000" y="5290560"/>
+            <a:ext cx="714600" cy="308160"/>
           </a:xfrm>
           <a:prstGeom prst="rect">
             <a:avLst/>
@@ -7843,7 +10495,7 @@
                 <a:latin typeface="Arial"/>
                 <a:ea typeface="DejaVu Sans"/>
               </a:rPr>
-              <a:t>4’</a:t>
+              <a:t>3’</a:t>
             </a:r>
             <a:endParaRPr b="0" lang="en-US" sz="1800" spc="-1" strike="noStrike">
               <a:latin typeface="Arial"/>
@@ -7853,27 +10505,70 @@
       </p:sp>
       <p:sp>
         <p:nvSpPr>
-          <p:cNvPr id="121" name="Rectangle: Rounded Corners 28"/>
+          <p:cNvPr id="137" name="Straight Arrow Connector 6"/>
           <p:cNvSpPr/>
           <p:nvPr/>
         </p:nvSpPr>
         <p:spPr>
           <a:xfrm>
-            <a:off x="4114800" y="2624760"/>
-            <a:ext cx="2284200" cy="534600"/>
-          </a:xfrm>
-          <a:prstGeom prst="roundRect">
-            <a:avLst>
-              <a:gd name="adj" fmla="val 16667"/>
-            </a:avLst>
-          </a:prstGeom>
-          <a:solidFill>
-            <a:srgbClr val="4f81bd"/>
-          </a:solidFill>
+            <a:off x="3524760" y="5284440"/>
+            <a:ext cx="20880" cy="923760"/>
+          </a:xfrm>
+          <a:custGeom>
+            <a:avLst/>
+            <a:gdLst/>
+            <a:ahLst/>
+            <a:rect l="l" t="t" r="r" b="b"/>
+            <a:pathLst>
+              <a:path w="21600" h="21600">
+                <a:moveTo>
+                  <a:pt x="0" y="0"/>
+                </a:moveTo>
+                <a:lnTo>
+                  <a:pt x="21600" y="21600"/>
+                </a:lnTo>
+              </a:path>
+            </a:pathLst>
+          </a:custGeom>
+          <a:noFill/>
           <a:ln>
             <a:solidFill>
-              <a:srgbClr val="223852"/>
+              <a:srgbClr val="4a7ebb"/>
             </a:solidFill>
+            <a:headEnd len="med" type="triangle" w="med"/>
+            <a:tailEnd len="med" type="triangle" w="med"/>
+          </a:ln>
+        </p:spPr>
+        <p:style>
+          <a:lnRef idx="1">
+            <a:schemeClr val="accent1"/>
+          </a:lnRef>
+          <a:fillRef idx="0">
+            <a:schemeClr val="accent1"/>
+          </a:fillRef>
+          <a:effectRef idx="0">
+            <a:schemeClr val="accent1"/>
+          </a:effectRef>
+          <a:fontRef idx="minor"/>
+        </p:style>
+      </p:sp>
+      <p:sp>
+        <p:nvSpPr>
+          <p:cNvPr id="138" name="Rectangle 13"/>
+          <p:cNvSpPr/>
+          <p:nvPr/>
+        </p:nvSpPr>
+        <p:spPr>
+          <a:xfrm>
+            <a:off x="3627000" y="5486400"/>
+            <a:ext cx="714600" cy="308160"/>
+          </a:xfrm>
+          <a:prstGeom prst="rect">
+            <a:avLst/>
+          </a:prstGeom>
+          <a:noFill/>
+          <a:ln>
+            <a:noFill/>
           </a:ln>
         </p:spPr>
         <p:style>
@@ -7909,7 +10604,7 @@
                 <a:latin typeface="Arial"/>
                 <a:ea typeface="DejaVu Sans"/>
               </a:rPr>
-              <a:t>2583 Car</a:t>
+              <a:t>&gt; 16’</a:t>
             </a:r>
             <a:endParaRPr b="0" lang="en-US" sz="1800" spc="-1" strike="noStrike">
               <a:latin typeface="Arial"/>
@@ -7919,19 +10614,66 @@
       </p:sp>
       <p:sp>
         <p:nvSpPr>
-          <p:cNvPr id="122" name="Rectangle: Rounded Corners 29"/>
+          <p:cNvPr id="139" name="Straight Arrow Connector 89"/>
           <p:cNvSpPr/>
           <p:nvPr/>
         </p:nvSpPr>
         <p:spPr>
-          <a:xfrm>
-            <a:off x="4114800" y="2031840"/>
-            <a:ext cx="2261880" cy="534600"/>
-          </a:xfrm>
-          <a:prstGeom prst="roundRect">
-            <a:avLst>
-              <a:gd name="adj" fmla="val 16667"/>
-            </a:avLst>
+          <a:xfrm flipV="1">
+            <a:off x="4673520" y="5377680"/>
+            <a:ext cx="3095640" cy="1440"/>
+          </a:xfrm>
+          <a:custGeom>
+            <a:avLst/>
+            <a:gdLst/>
+            <a:ahLst/>
+            <a:rect l="l" t="t" r="r" b="b"/>
+            <a:pathLst>
+              <a:path w="21600" h="21600">
+                <a:moveTo>
+                  <a:pt x="0" y="0"/>
+                </a:moveTo>
+                <a:lnTo>
+                  <a:pt x="21600" y="21600"/>
+                </a:lnTo>
+              </a:path>
+            </a:pathLst>
+          </a:custGeom>
+          <a:noFill/>
+          <a:ln>
+            <a:solidFill>
+              <a:srgbClr val="4a7ebb"/>
+            </a:solidFill>
+            <a:headEnd len="med" type="triangle" w="med"/>
+            <a:tailEnd len="med" type="triangle" w="med"/>
+          </a:ln>
+        </p:spPr>
+        <p:style>
+          <a:lnRef idx="1">
+            <a:schemeClr val="accent1"/>
+          </a:lnRef>
+          <a:fillRef idx="0">
+            <a:schemeClr val="accent1"/>
+          </a:fillRef>
+          <a:effectRef idx="0">
+            <a:schemeClr val="accent1"/>
+          </a:effectRef>
+          <a:fontRef idx="minor"/>
+        </p:style>
+      </p:sp>
+      <p:sp>
+        <p:nvSpPr>
+          <p:cNvPr id="140" name="Rectangle 3"/>
+          <p:cNvSpPr/>
+          <p:nvPr/>
+        </p:nvSpPr>
+        <p:spPr>
+          <a:xfrm>
+            <a:off x="3549600" y="1143000"/>
+            <a:ext cx="563760" cy="694080"/>
+          </a:xfrm>
+          <a:prstGeom prst="rect">
+            <a:avLst/>
           </a:prstGeom>
           <a:solidFill>
             <a:srgbClr val="4f81bd"/>
@@ -7956,52 +10698,24 @@
           </a:effectRef>
           <a:fontRef idx="minor"/>
         </p:style>
-        <p:txBody>
-          <a:bodyPr lIns="90000" rIns="90000" tIns="45000" bIns="45000" anchor="ctr">
-            <a:noAutofit/>
-          </a:bodyPr>
-          <a:p>
-            <a:pPr algn="ctr">
-              <a:lnSpc>
-                <a:spcPct val="100000"/>
-              </a:lnSpc>
-              <a:buNone/>
-            </a:pPr>
-            <a:r>
-              <a:rPr b="0" lang="en-US" sz="1800" spc="-1" strike="noStrike">
-                <a:solidFill>
-                  <a:srgbClr val="000000"/>
-                </a:solidFill>
-                <a:latin typeface="Arial"/>
-                <a:ea typeface="DejaVu Sans"/>
-              </a:rPr>
-              <a:t>2585 Car</a:t>
-            </a:r>
-            <a:endParaRPr b="0" lang="en-US" sz="1800" spc="-1" strike="noStrike">
-              <a:latin typeface="Arial"/>
-            </a:endParaRPr>
-          </a:p>
-        </p:txBody>
-      </p:sp>
-      <p:sp>
-        <p:nvSpPr>
-          <p:cNvPr id="123" name="Rectangle 30"/>
+      </p:sp>
+      <p:sp>
+        <p:nvSpPr>
+          <p:cNvPr id="141" name="Rectangle 4"/>
           <p:cNvSpPr/>
           <p:nvPr/>
         </p:nvSpPr>
         <p:spPr>
           <a:xfrm>
-            <a:off x="2562840" y="1143000"/>
-            <a:ext cx="6579720" cy="5713200"/>
+            <a:off x="3488760" y="1204920"/>
+            <a:ext cx="714600" cy="308160"/>
           </a:xfrm>
           <a:prstGeom prst="rect">
             <a:avLst/>
           </a:prstGeom>
           <a:noFill/>
           <a:ln>
-            <a:solidFill>
-              <a:srgbClr val="223852"/>
-            </a:solidFill>
+            <a:noFill/>
           </a:ln>
         </p:spPr>
         <p:style>
@@ -8018,17 +10732,76 @@
           </a:effectRef>
           <a:fontRef idx="minor"/>
         </p:style>
-      </p:sp>
-      <p:sp>
-        <p:nvSpPr>
-          <p:cNvPr id="124" name="Straight Arrow Connector 64"/>
+        <p:txBody>
+          <a:bodyPr lIns="90000" rIns="90000" tIns="45000" bIns="45000" anchor="ctr">
+            <a:noAutofit/>
+          </a:bodyPr>
+          <a:p>
+            <a:pPr algn="ctr">
+              <a:lnSpc>
+                <a:spcPct val="100000"/>
+              </a:lnSpc>
+              <a:buNone/>
+            </a:pPr>
+            <a:r>
+              <a:rPr b="0" lang="en-US" sz="1800" spc="-1" strike="noStrike">
+                <a:solidFill>
+                  <a:srgbClr val="000000"/>
+                </a:solidFill>
+                <a:latin typeface="Arial"/>
+                <a:ea typeface="DejaVu Sans"/>
+              </a:rPr>
+              <a:t>2587</a:t>
+            </a:r>
+            <a:endParaRPr b="0" lang="en-US" sz="1800" spc="-1" strike="noStrike">
+              <a:latin typeface="Arial"/>
+            </a:endParaRPr>
+          </a:p>
+        </p:txBody>
+      </p:sp>
+      <p:sp>
+        <p:nvSpPr>
+          <p:cNvPr id="142" name="Straight Connector 1"/>
           <p:cNvSpPr/>
           <p:nvPr/>
         </p:nvSpPr>
         <p:spPr>
-          <a:xfrm>
-            <a:off x="4572000" y="6171840"/>
-            <a:ext cx="4254120" cy="360"/>
+          <a:xfrm flipH="1" flipV="1">
+            <a:off x="4754880" y="1838520"/>
+            <a:ext cx="394920" cy="180720"/>
+          </a:xfrm>
+          <a:prstGeom prst="line">
+            <a:avLst/>
+          </a:prstGeom>
+          <a:ln>
+            <a:solidFill>
+              <a:srgbClr val="4a7ebb"/>
+            </a:solidFill>
+          </a:ln>
+        </p:spPr>
+        <p:style>
+          <a:lnRef idx="1">
+            <a:schemeClr val="accent1"/>
+          </a:lnRef>
+          <a:fillRef idx="0">
+            <a:schemeClr val="accent1"/>
+          </a:fillRef>
+          <a:effectRef idx="0">
+            <a:schemeClr val="accent1"/>
+          </a:effectRef>
+          <a:fontRef idx="minor"/>
+        </p:style>
+      </p:sp>
+      <p:sp>
+        <p:nvSpPr>
+          <p:cNvPr id="143" name="Straight Arrow Connector 7"/>
+          <p:cNvSpPr/>
+          <p:nvPr/>
+        </p:nvSpPr>
+        <p:spPr>
+          <a:xfrm>
+            <a:off x="3560040" y="1957320"/>
+            <a:ext cx="599760" cy="360"/>
           </a:xfrm>
           <a:custGeom>
             <a:avLst/>
@@ -8049,7 +10822,7 @@
           <a:noFill/>
           <a:ln>
             <a:solidFill>
-              <a:srgbClr val="000000"/>
+              <a:srgbClr val="4a7ebb"/>
             </a:solidFill>
             <a:headEnd len="med" type="triangle" w="med"/>
             <a:tailEnd len="med" type="triangle" w="med"/>
@@ -8070,14 +10843,14 @@
       </p:sp>
       <p:sp>
         <p:nvSpPr>
-          <p:cNvPr id="125" name="Rectangle 1"/>
+          <p:cNvPr id="144" name="Rectangle 14"/>
           <p:cNvSpPr/>
           <p:nvPr/>
         </p:nvSpPr>
         <p:spPr>
           <a:xfrm>
-            <a:off x="8703360" y="4464360"/>
-            <a:ext cx="714960" cy="308520"/>
+            <a:off x="3516840" y="1911960"/>
+            <a:ext cx="714600" cy="308160"/>
           </a:xfrm>
           <a:prstGeom prst="rect">
             <a:avLst/>
@@ -8115,32 +10888,12 @@
             <a:r>
               <a:rPr b="0" lang="en-US" sz="1800" spc="-1" strike="noStrike">
                 <a:solidFill>
-                  <a:srgbClr val="ffffff"/>
+                  <a:srgbClr val="000000"/>
                 </a:solidFill>
                 <a:latin typeface="Arial"/>
                 <a:ea typeface="DejaVu Sans"/>
               </a:rPr>
-              <a:t>2</a:t>
-            </a:r>
-            <a:r>
-              <a:rPr b="0" lang="en-US" sz="1800" spc="-1" strike="noStrike">
-                <a:solidFill>
-                  <a:srgbClr val="000000"/>
-                </a:solidFill>
-                <a:latin typeface="Arial"/>
-                <a:ea typeface="DejaVu Sans"/>
-              </a:rPr>
-              <a:t>16’</a:t>
-            </a:r>
-            <a:r>
-              <a:rPr b="0" lang="en-US" sz="1800" spc="-1" strike="noStrike">
-                <a:solidFill>
-                  <a:srgbClr val="ffffff"/>
-                </a:solidFill>
-                <a:latin typeface="Arial"/>
-                <a:ea typeface="DejaVu Sans"/>
-              </a:rPr>
-              <a:t>’</a:t>
+              <a:t>4’</a:t>
             </a:r>
             <a:endParaRPr b="0" lang="en-US" sz="1800" spc="-1" strike="noStrike">
               <a:latin typeface="Arial"/>
@@ -8148,72 +10901,278 @@
           </a:p>
         </p:txBody>
       </p:sp>
-      <p:sp>
-        <p:nvSpPr>
-          <p:cNvPr id="126" name="Straight Arrow Connector 1"/>
+      <p:grpSp>
+        <p:nvGrpSpPr>
+          <p:cNvPr id="145" name=""/>
+          <p:cNvGrpSpPr/>
+          <p:nvPr/>
+        </p:nvGrpSpPr>
+        <p:grpSpPr>
+          <a:xfrm>
+            <a:off x="7795440" y="4258800"/>
+            <a:ext cx="457560" cy="877320"/>
+            <a:chOff x="7795440" y="4258800"/>
+            <a:chExt cx="457560" cy="877320"/>
+          </a:xfrm>
+        </p:grpSpPr>
+        <p:sp>
+          <p:nvSpPr>
+            <p:cNvPr id="146" name="Rectangle 118"/>
+            <p:cNvSpPr/>
+            <p:nvPr/>
+          </p:nvSpPr>
+          <p:spPr>
+            <a:xfrm>
+              <a:off x="7795440" y="4290840"/>
+              <a:ext cx="454680" cy="809280"/>
+            </a:xfrm>
+            <a:prstGeom prst="rect">
+              <a:avLst/>
+            </a:prstGeom>
+            <a:solidFill>
+              <a:srgbClr val="4f81bd"/>
+            </a:solidFill>
+            <a:ln>
+              <a:solidFill>
+                <a:srgbClr val="223852"/>
+              </a:solidFill>
+            </a:ln>
+          </p:spPr>
+          <p:style>
+            <a:lnRef idx="2">
+              <a:schemeClr val="accent1">
+                <a:shade val="15000"/>
+              </a:schemeClr>
+            </a:lnRef>
+            <a:fillRef idx="1">
+              <a:schemeClr val="accent1"/>
+            </a:fillRef>
+            <a:effectRef idx="0">
+              <a:schemeClr val="accent1"/>
+            </a:effectRef>
+            <a:fontRef idx="minor"/>
+          </p:style>
+        </p:sp>
+        <p:sp>
+          <p:nvSpPr>
+            <p:cNvPr id="147" name=""/>
+            <p:cNvSpPr/>
+            <p:nvPr/>
+          </p:nvSpPr>
+          <p:spPr>
+            <a:xfrm flipH="1">
+              <a:off x="7795800" y="4523400"/>
+              <a:ext cx="442440" cy="360"/>
+            </a:xfrm>
+            <a:prstGeom prst="line">
+              <a:avLst/>
+            </a:prstGeom>
+            <a:ln w="73080">
+              <a:solidFill>
+                <a:srgbClr val="bf0041"/>
+              </a:solidFill>
+              <a:round/>
+            </a:ln>
+          </p:spPr>
+          <p:style>
+            <a:lnRef idx="0"/>
+            <a:fillRef idx="0"/>
+            <a:effectRef idx="0"/>
+            <a:fontRef idx="minor"/>
+          </p:style>
+        </p:sp>
+        <p:sp>
+          <p:nvSpPr>
+            <p:cNvPr id="148" name=""/>
+            <p:cNvSpPr/>
+            <p:nvPr/>
+          </p:nvSpPr>
+          <p:spPr>
+            <a:xfrm flipV="1">
+              <a:off x="8250120" y="4258800"/>
+              <a:ext cx="2880" cy="877320"/>
+            </a:xfrm>
+            <a:prstGeom prst="line">
+              <a:avLst/>
+            </a:prstGeom>
+            <a:ln w="73080">
+              <a:solidFill>
+                <a:srgbClr val="bf0041"/>
+              </a:solidFill>
+              <a:round/>
+            </a:ln>
+          </p:spPr>
+          <p:style>
+            <a:lnRef idx="0"/>
+            <a:fillRef idx="0"/>
+            <a:effectRef idx="0"/>
+            <a:fontRef idx="minor"/>
+          </p:style>
+        </p:sp>
+        <p:sp>
+          <p:nvSpPr>
+            <p:cNvPr id="149" name=""/>
+            <p:cNvSpPr/>
+            <p:nvPr/>
+          </p:nvSpPr>
+          <p:spPr>
+            <a:xfrm flipH="1">
+              <a:off x="7795800" y="4680000"/>
+              <a:ext cx="457200" cy="0"/>
+            </a:xfrm>
+            <a:prstGeom prst="line">
+              <a:avLst/>
+            </a:prstGeom>
+            <a:ln w="73080">
+              <a:solidFill>
+                <a:srgbClr val="bf0041"/>
+              </a:solidFill>
+              <a:round/>
+            </a:ln>
+          </p:spPr>
+          <p:style>
+            <a:lnRef idx="0"/>
+            <a:fillRef idx="0"/>
+            <a:effectRef idx="0"/>
+            <a:fontRef idx="minor"/>
+          </p:style>
+        </p:sp>
+        <p:sp>
+          <p:nvSpPr>
+            <p:cNvPr id="150" name=""/>
+            <p:cNvSpPr/>
+            <p:nvPr/>
+          </p:nvSpPr>
+          <p:spPr>
+            <a:xfrm flipH="1">
+              <a:off x="7795800" y="4872600"/>
+              <a:ext cx="442440" cy="360"/>
+            </a:xfrm>
+            <a:prstGeom prst="line">
+              <a:avLst/>
+            </a:prstGeom>
+            <a:ln w="73080">
+              <a:solidFill>
+                <a:srgbClr val="bf0041"/>
+              </a:solidFill>
+              <a:round/>
+            </a:ln>
+          </p:spPr>
+          <p:style>
+            <a:lnRef idx="0"/>
+            <a:fillRef idx="0"/>
+            <a:effectRef idx="0"/>
+            <a:fontRef idx="minor"/>
+          </p:style>
+        </p:sp>
+        <p:sp>
+          <p:nvSpPr>
+            <p:cNvPr id="151" name=""/>
+            <p:cNvSpPr/>
+            <p:nvPr/>
+          </p:nvSpPr>
+          <p:spPr>
+            <a:xfrm>
+              <a:off x="7795440" y="5100120"/>
+              <a:ext cx="419040" cy="0"/>
+            </a:xfrm>
+            <a:prstGeom prst="line">
+              <a:avLst/>
+            </a:prstGeom>
+            <a:ln w="73080">
+              <a:solidFill>
+                <a:srgbClr val="bf0041"/>
+              </a:solidFill>
+              <a:round/>
+            </a:ln>
+          </p:spPr>
+          <p:style>
+            <a:lnRef idx="0"/>
+            <a:fillRef idx="0"/>
+            <a:effectRef idx="0"/>
+            <a:fontRef idx="minor"/>
+          </p:style>
+        </p:sp>
+        <p:sp>
+          <p:nvSpPr>
+            <p:cNvPr id="152" name=""/>
+            <p:cNvSpPr/>
+            <p:nvPr/>
+          </p:nvSpPr>
+          <p:spPr>
+            <a:xfrm flipV="1">
+              <a:off x="7795800" y="4290840"/>
+              <a:ext cx="418680" cy="16920"/>
+            </a:xfrm>
+            <a:prstGeom prst="line">
+              <a:avLst/>
+            </a:prstGeom>
+            <a:ln w="73080">
+              <a:solidFill>
+                <a:srgbClr val="bf0041"/>
+              </a:solidFill>
+              <a:round/>
+            </a:ln>
+          </p:spPr>
+          <p:style>
+            <a:lnRef idx="0"/>
+            <a:fillRef idx="0"/>
+            <a:effectRef idx="0"/>
+            <a:fontRef idx="minor"/>
+          </p:style>
+        </p:sp>
+        <p:sp>
+          <p:nvSpPr>
+            <p:cNvPr id="153" name=""/>
+            <p:cNvSpPr/>
+            <p:nvPr/>
+          </p:nvSpPr>
+          <p:spPr>
+            <a:xfrm flipV="1">
+              <a:off x="7795440" y="4290480"/>
+              <a:ext cx="360" cy="845640"/>
+            </a:xfrm>
+            <a:prstGeom prst="line">
+              <a:avLst/>
+            </a:prstGeom>
+            <a:ln w="73080">
+              <a:solidFill>
+                <a:srgbClr val="bf0041"/>
+              </a:solidFill>
+              <a:round/>
+            </a:ln>
+          </p:spPr>
+          <p:style>
+            <a:lnRef idx="0"/>
+            <a:fillRef idx="0"/>
+            <a:effectRef idx="0"/>
+            <a:fontRef idx="minor"/>
+          </p:style>
+        </p:sp>
+      </p:grpSp>
+      <p:sp>
+        <p:nvSpPr>
+          <p:cNvPr id="154" name="Rectangle: Rounded Corners 1"/>
           <p:cNvSpPr/>
           <p:nvPr/>
         </p:nvSpPr>
         <p:spPr>
           <a:xfrm>
-            <a:off x="8804880" y="3886200"/>
-            <a:ext cx="360" cy="1502280"/>
-          </a:xfrm>
-          <a:custGeom>
-            <a:avLst/>
-            <a:gdLst/>
-            <a:ahLst/>
-            <a:rect l="l" t="t" r="r" b="b"/>
-            <a:pathLst>
-              <a:path w="21600" h="21600">
-                <a:moveTo>
-                  <a:pt x="0" y="0"/>
-                </a:moveTo>
-                <a:lnTo>
-                  <a:pt x="21600" y="21600"/>
-                </a:lnTo>
-              </a:path>
-            </a:pathLst>
-          </a:custGeom>
-          <a:noFill/>
+            <a:off x="5257800" y="4631400"/>
+            <a:ext cx="2082960" cy="505800"/>
+          </a:xfrm>
+          <a:prstGeom prst="roundRect">
+            <a:avLst>
+              <a:gd name="adj" fmla="val 16667"/>
+            </a:avLst>
+          </a:prstGeom>
+          <a:solidFill>
+            <a:srgbClr val="4f81bd"/>
+          </a:solidFill>
           <a:ln>
             <a:solidFill>
-              <a:srgbClr val="4a7ebb"/>
+              <a:srgbClr val="223852"/>
             </a:solidFill>
-            <a:headEnd len="med" type="triangle" w="med"/>
-            <a:tailEnd len="med" type="triangle" w="med"/>
-          </a:ln>
-        </p:spPr>
-        <p:style>
-          <a:lnRef idx="1">
-            <a:schemeClr val="accent1"/>
-          </a:lnRef>
-          <a:fillRef idx="0">
-            <a:schemeClr val="accent1"/>
-          </a:fillRef>
-          <a:effectRef idx="0">
-            <a:schemeClr val="accent1"/>
-          </a:effectRef>
-          <a:fontRef idx="minor"/>
-        </p:style>
-      </p:sp>
-      <p:sp>
-        <p:nvSpPr>
-          <p:cNvPr id="127" name="Rectangle 2"/>
-          <p:cNvSpPr/>
-          <p:nvPr/>
-        </p:nvSpPr>
-        <p:spPr>
-          <a:xfrm>
-            <a:off x="8134200" y="5029200"/>
-            <a:ext cx="714960" cy="308520"/>
-          </a:xfrm>
-          <a:prstGeom prst="rect">
-            <a:avLst/>
-          </a:prstGeom>
-          <a:noFill/>
-          <a:ln>
-            <a:noFill/>
           </a:ln>
         </p:spPr>
         <p:style>
@@ -8242,72 +11201,38 @@
               <a:buNone/>
             </a:pPr>
             <a:r>
-              <a:rPr b="0" lang="en-US" sz="1800" spc="-1" strike="noStrike">
+              <a:rPr b="0" lang="en-US" sz="1200" spc="-1" strike="noStrike">
                 <a:solidFill>
                   <a:srgbClr val="000000"/>
                 </a:solidFill>
                 <a:latin typeface="Arial"/>
                 <a:ea typeface="DejaVu Sans"/>
               </a:rPr>
-              <a:t>4’</a:t>
-            </a:r>
-            <a:endParaRPr b="0" lang="en-US" sz="1800" spc="-1" strike="noStrike">
-              <a:latin typeface="Arial"/>
-            </a:endParaRPr>
-          </a:p>
-        </p:txBody>
-      </p:sp>
-      <p:sp>
-        <p:nvSpPr>
-          <p:cNvPr id="128" name=""/>
+              <a:t>2585 Car</a:t>
+            </a:r>
+            <a:endParaRPr b="0" lang="en-US" sz="1200" spc="-1" strike="noStrike">
+              <a:latin typeface="Arial"/>
+            </a:endParaRPr>
+          </a:p>
+        </p:txBody>
+      </p:sp>
+      <p:sp>
+        <p:nvSpPr>
+          <p:cNvPr id="155" name="Rectangle 5"/>
           <p:cNvSpPr/>
           <p:nvPr/>
         </p:nvSpPr>
         <p:spPr>
           <a:xfrm>
-            <a:off x="-1143000" y="3299760"/>
-            <a:ext cx="4570560" cy="2871000"/>
-          </a:xfrm>
-          <a:prstGeom prst="rect">
-            <a:avLst/>
-          </a:prstGeom>
-          <a:solidFill>
-            <a:srgbClr val="ffffff"/>
-          </a:solidFill>
-          <a:ln w="0">
-            <a:solidFill>
-              <a:srgbClr val="3465a4"/>
-            </a:solidFill>
-          </a:ln>
-        </p:spPr>
-        <p:style>
-          <a:lnRef idx="0"/>
-          <a:fillRef idx="0"/>
-          <a:effectRef idx="0"/>
-          <a:fontRef idx="minor"/>
-        </p:style>
-      </p:sp>
-      <p:sp>
-        <p:nvSpPr>
-          <p:cNvPr id="129" name="Rectangle 10"/>
-          <p:cNvSpPr/>
-          <p:nvPr/>
-        </p:nvSpPr>
-        <p:spPr>
-          <a:xfrm>
-            <a:off x="-1086120" y="3528360"/>
-            <a:ext cx="3599280" cy="509040"/>
-          </a:xfrm>
-          <a:prstGeom prst="rect">
-            <a:avLst/>
-          </a:prstGeom>
-          <a:solidFill>
-            <a:srgbClr val="4f81bd"/>
-          </a:solidFill>
+            <a:off x="6600600" y="5057640"/>
+            <a:ext cx="714600" cy="308160"/>
+          </a:xfrm>
+          <a:prstGeom prst="rect">
+            <a:avLst/>
+          </a:prstGeom>
+          <a:noFill/>
           <a:ln>
-            <a:solidFill>
-              <a:srgbClr val="223852"/>
-            </a:solidFill>
+            <a:noFill/>
           </a:ln>
         </p:spPr>
         <p:style>
@@ -8336,42 +11261,58 @@
               <a:buNone/>
             </a:pPr>
             <a:r>
-              <a:rPr b="0" lang="en-US" sz="1800" spc="-1" strike="noStrike">
-                <a:solidFill>
-                  <a:srgbClr val="000000"/>
+              <a:rPr b="0" lang="en-US" sz="1200" spc="-1" strike="noStrike">
+                <a:solidFill>
+                  <a:srgbClr val="ffffff"/>
                 </a:solidFill>
                 <a:latin typeface="Arial"/>
                 <a:ea typeface="DejaVu Sans"/>
               </a:rPr>
-              <a:t>Main Building (2581 Alma)</a:t>
-            </a:r>
-            <a:endParaRPr b="0" lang="en-US" sz="1800" spc="-1" strike="noStrike">
-              <a:latin typeface="Arial"/>
-            </a:endParaRPr>
-          </a:p>
-        </p:txBody>
-      </p:sp>
-      <p:sp>
-        <p:nvSpPr>
-          <p:cNvPr id="130" name="Rectangle 7"/>
+              <a:t>2</a:t>
+            </a:r>
+            <a:r>
+              <a:rPr b="0" lang="en-US" sz="1200" spc="-1" strike="noStrike">
+                <a:solidFill>
+                  <a:srgbClr val="000000"/>
+                </a:solidFill>
+                <a:latin typeface="Arial"/>
+                <a:ea typeface="DejaVu Sans"/>
+              </a:rPr>
+              <a:t>15’</a:t>
+            </a:r>
+            <a:r>
+              <a:rPr b="0" lang="en-US" sz="1200" spc="-1" strike="noStrike">
+                <a:solidFill>
+                  <a:srgbClr val="ffffff"/>
+                </a:solidFill>
+                <a:latin typeface="Arial"/>
+                <a:ea typeface="DejaVu Sans"/>
+              </a:rPr>
+              <a:t>’</a:t>
+            </a:r>
+            <a:endParaRPr b="0" lang="en-US" sz="1200" spc="-1" strike="noStrike">
+              <a:latin typeface="Arial"/>
+            </a:endParaRPr>
+          </a:p>
+        </p:txBody>
+      </p:sp>
+      <p:sp>
+        <p:nvSpPr>
+          <p:cNvPr id="156" name="Rectangle 15"/>
           <p:cNvSpPr/>
           <p:nvPr/>
         </p:nvSpPr>
         <p:spPr>
           <a:xfrm>
-            <a:off x="2971800" y="4220640"/>
-            <a:ext cx="462240" cy="923760"/>
-          </a:xfrm>
-          <a:prstGeom prst="rect">
-            <a:avLst/>
-          </a:prstGeom>
-          <a:solidFill>
-            <a:srgbClr val="4f81bd"/>
-          </a:solidFill>
+            <a:off x="4800600" y="5029200"/>
+            <a:ext cx="426240" cy="308160"/>
+          </a:xfrm>
+          <a:prstGeom prst="rect">
+            <a:avLst/>
+          </a:prstGeom>
+          <a:noFill/>
           <a:ln>
-            <a:solidFill>
-              <a:srgbClr val="223852"/>
-            </a:solidFill>
+            <a:noFill/>
           </a:ln>
         </p:spPr>
         <p:style>
@@ -8388,24 +11329,65 @@
           </a:effectRef>
           <a:fontRef idx="minor"/>
         </p:style>
-      </p:sp>
-      <p:sp>
-        <p:nvSpPr>
-          <p:cNvPr id="131" name="Rectangle 8"/>
+        <p:txBody>
+          <a:bodyPr lIns="90000" rIns="90000" tIns="45000" bIns="45000" anchor="ctr">
+            <a:noAutofit/>
+          </a:bodyPr>
+          <a:p>
+            <a:pPr algn="ctr">
+              <a:lnSpc>
+                <a:spcPct val="100000"/>
+              </a:lnSpc>
+              <a:buNone/>
+            </a:pPr>
+            <a:r>
+              <a:rPr b="0" lang="en-US" sz="1300" spc="-1" strike="noStrike">
+                <a:solidFill>
+                  <a:srgbClr val="000000"/>
+                </a:solidFill>
+                <a:highlight>
+                  <a:srgbClr val="ffffff"/>
+                </a:highlight>
+                <a:latin typeface="Arial"/>
+                <a:ea typeface="DejaVu Sans"/>
+              </a:rPr>
+              <a:t>6’</a:t>
+            </a:r>
+            <a:endParaRPr b="0" lang="en-US" sz="1300" spc="-1" strike="noStrike">
+              <a:solidFill>
+                <a:srgbClr val="000000"/>
+              </a:solidFill>
+              <a:highlight>
+                <a:srgbClr val="ffffff"/>
+              </a:highlight>
+              <a:latin typeface="Arial"/>
+            </a:endParaRPr>
+          </a:p>
+        </p:txBody>
+      </p:sp>
+      <p:sp>
+        <p:nvSpPr>
+          <p:cNvPr id="157" name="Rectangle: Rounded Corners 2"/>
           <p:cNvSpPr/>
           <p:nvPr/>
         </p:nvSpPr>
         <p:spPr>
           <a:xfrm>
-            <a:off x="2063880" y="4825080"/>
-            <a:ext cx="1172160" cy="308520"/>
-          </a:xfrm>
-          <a:prstGeom prst="rect">
-            <a:avLst/>
-          </a:prstGeom>
-          <a:noFill/>
+            <a:off x="5257800" y="3994200"/>
+            <a:ext cx="2082960" cy="505800"/>
+          </a:xfrm>
+          <a:prstGeom prst="roundRect">
+            <a:avLst>
+              <a:gd name="adj" fmla="val 16667"/>
+            </a:avLst>
+          </a:prstGeom>
+          <a:solidFill>
+            <a:srgbClr val="4f81bd"/>
+          </a:solidFill>
           <a:ln>
-            <a:noFill/>
+            <a:solidFill>
+              <a:srgbClr val="223852"/>
+            </a:solidFill>
           </a:ln>
         </p:spPr>
         <p:style>
@@ -8434,952 +11416,20 @@
               <a:buNone/>
             </a:pPr>
             <a:r>
-              <a:rPr b="0" lang="en-US" sz="1800" spc="-1" strike="noStrike">
+              <a:rPr b="0" lang="en-US" sz="1200" spc="-1" strike="noStrike">
                 <a:solidFill>
                   <a:srgbClr val="000000"/>
                 </a:solidFill>
                 <a:latin typeface="Arial"/>
                 <a:ea typeface="DejaVu Sans"/>
               </a:rPr>
-              <a:t>2581</a:t>
-            </a:r>
-            <a:r>
-              <a:rPr b="0" lang="en-US" sz="1800" spc="-1" strike="noStrike">
-                <a:solidFill>
-                  <a:srgbClr val="ffffff"/>
-                </a:solidFill>
-                <a:latin typeface="Arial"/>
-                <a:ea typeface="DejaVu Sans"/>
-              </a:rPr>
-              <a:t>’</a:t>
-            </a:r>
-            <a:endParaRPr b="0" lang="en-US" sz="1800" spc="-1" strike="noStrike">
-              <a:latin typeface="Arial"/>
-            </a:endParaRPr>
-          </a:p>
-        </p:txBody>
-      </p:sp>
-      <p:sp>
-        <p:nvSpPr>
-          <p:cNvPr id="132" name=""/>
-          <p:cNvSpPr/>
-          <p:nvPr/>
-        </p:nvSpPr>
-        <p:spPr>
-          <a:xfrm flipH="1">
-            <a:off x="2521080" y="3992040"/>
-            <a:ext cx="457200" cy="228600"/>
-          </a:xfrm>
-          <a:prstGeom prst="line">
-            <a:avLst/>
-          </a:prstGeom>
-          <a:ln w="0">
-            <a:solidFill>
-              <a:srgbClr val="3465a4"/>
-            </a:solidFill>
-          </a:ln>
-        </p:spPr>
-        <p:style>
-          <a:lnRef idx="0"/>
-          <a:fillRef idx="0"/>
-          <a:effectRef idx="0"/>
-          <a:fontRef idx="minor"/>
-        </p:style>
-      </p:sp>
-      <p:sp>
-        <p:nvSpPr>
-          <p:cNvPr id="133" name=""/>
-          <p:cNvSpPr/>
-          <p:nvPr/>
-        </p:nvSpPr>
-        <p:spPr>
-          <a:xfrm flipH="1">
-            <a:off x="2929680" y="3992040"/>
-            <a:ext cx="457200" cy="360"/>
-          </a:xfrm>
-          <a:prstGeom prst="line">
-            <a:avLst/>
-          </a:prstGeom>
-          <a:ln w="0">
-            <a:solidFill>
-              <a:srgbClr val="3465a4"/>
-            </a:solidFill>
-          </a:ln>
-        </p:spPr>
-        <p:style>
-          <a:lnRef idx="0"/>
-          <a:fillRef idx="0"/>
-          <a:effectRef idx="0"/>
-          <a:fontRef idx="minor"/>
-        </p:style>
-      </p:sp>
-      <p:sp>
-        <p:nvSpPr>
-          <p:cNvPr id="134" name="Rectangle 11"/>
-          <p:cNvSpPr/>
-          <p:nvPr/>
-        </p:nvSpPr>
-        <p:spPr>
-          <a:xfrm>
-            <a:off x="3547440" y="4343400"/>
-            <a:ext cx="714960" cy="308520"/>
-          </a:xfrm>
-          <a:prstGeom prst="rect">
-            <a:avLst/>
-          </a:prstGeom>
-          <a:noFill/>
-          <a:ln>
-            <a:noFill/>
-          </a:ln>
-        </p:spPr>
-        <p:style>
-          <a:lnRef idx="2">
-            <a:schemeClr val="accent1">
-              <a:shade val="15000"/>
-            </a:schemeClr>
-          </a:lnRef>
-          <a:fillRef idx="1">
-            <a:schemeClr val="accent1"/>
-          </a:fillRef>
-          <a:effectRef idx="0">
-            <a:schemeClr val="accent1"/>
-          </a:effectRef>
-          <a:fontRef idx="minor"/>
-        </p:style>
-        <p:txBody>
-          <a:bodyPr lIns="90000" rIns="90000" tIns="45000" bIns="45000" anchor="ctr">
-            <a:noAutofit/>
-          </a:bodyPr>
-          <a:p>
-            <a:pPr algn="ctr">
-              <a:lnSpc>
-                <a:spcPct val="100000"/>
-              </a:lnSpc>
-              <a:buNone/>
-            </a:pPr>
-            <a:r>
-              <a:rPr b="0" lang="en-US" sz="1800" spc="-1" strike="noStrike">
-                <a:solidFill>
-                  <a:srgbClr val="000000"/>
-                </a:solidFill>
-                <a:latin typeface="Arial"/>
-                <a:ea typeface="DejaVu Sans"/>
-              </a:rPr>
-              <a:t>8’</a:t>
-            </a:r>
-            <a:endParaRPr b="0" lang="en-US" sz="1800" spc="-1" strike="noStrike">
-              <a:latin typeface="Arial"/>
-            </a:endParaRPr>
-          </a:p>
-        </p:txBody>
-      </p:sp>
-      <p:sp>
-        <p:nvSpPr>
-          <p:cNvPr id="135" name="Straight Arrow Connector 2"/>
-          <p:cNvSpPr/>
-          <p:nvPr/>
-        </p:nvSpPr>
-        <p:spPr>
-          <a:xfrm>
-            <a:off x="3524760" y="4240440"/>
-            <a:ext cx="21240" cy="924120"/>
-          </a:xfrm>
-          <a:custGeom>
-            <a:avLst/>
-            <a:gdLst/>
-            <a:ahLst/>
-            <a:rect l="l" t="t" r="r" b="b"/>
-            <a:pathLst>
-              <a:path w="21600" h="21600">
-                <a:moveTo>
-                  <a:pt x="0" y="0"/>
-                </a:moveTo>
-                <a:lnTo>
-                  <a:pt x="21600" y="21600"/>
-                </a:lnTo>
-              </a:path>
-            </a:pathLst>
-          </a:custGeom>
-          <a:noFill/>
-          <a:ln>
-            <a:solidFill>
-              <a:srgbClr val="4a7ebb"/>
-            </a:solidFill>
-            <a:headEnd len="med" type="triangle" w="med"/>
-            <a:tailEnd len="med" type="triangle" w="med"/>
-          </a:ln>
-        </p:spPr>
-        <p:style>
-          <a:lnRef idx="1">
-            <a:schemeClr val="accent1"/>
-          </a:lnRef>
-          <a:fillRef idx="0">
-            <a:schemeClr val="accent1"/>
-          </a:fillRef>
-          <a:effectRef idx="0">
-            <a:schemeClr val="accent1"/>
-          </a:effectRef>
-          <a:fontRef idx="minor"/>
-        </p:style>
-      </p:sp>
-      <p:sp>
-        <p:nvSpPr>
-          <p:cNvPr id="136" name="Straight Arrow Connector 4"/>
-          <p:cNvSpPr/>
-          <p:nvPr/>
-        </p:nvSpPr>
-        <p:spPr>
-          <a:xfrm>
-            <a:off x="2923560" y="5299920"/>
-            <a:ext cx="504000" cy="360"/>
-          </a:xfrm>
-          <a:custGeom>
-            <a:avLst/>
-            <a:gdLst/>
-            <a:ahLst/>
-            <a:rect l="l" t="t" r="r" b="b"/>
-            <a:pathLst>
-              <a:path w="21600" h="21600">
-                <a:moveTo>
-                  <a:pt x="0" y="0"/>
-                </a:moveTo>
-                <a:lnTo>
-                  <a:pt x="21600" y="21600"/>
-                </a:lnTo>
-              </a:path>
-            </a:pathLst>
-          </a:custGeom>
-          <a:noFill/>
-          <a:ln>
-            <a:solidFill>
-              <a:srgbClr val="4a7ebb"/>
-            </a:solidFill>
-            <a:headEnd len="med" type="triangle" w="med"/>
-            <a:tailEnd len="med" type="triangle" w="med"/>
-          </a:ln>
-        </p:spPr>
-        <p:style>
-          <a:lnRef idx="1">
-            <a:schemeClr val="accent1"/>
-          </a:lnRef>
-          <a:fillRef idx="0">
-            <a:schemeClr val="accent1"/>
-          </a:fillRef>
-          <a:effectRef idx="0">
-            <a:schemeClr val="accent1"/>
-          </a:effectRef>
-          <a:fontRef idx="minor"/>
-        </p:style>
-      </p:sp>
-      <p:sp>
-        <p:nvSpPr>
-          <p:cNvPr id="137" name="Rectangle 12"/>
-          <p:cNvSpPr/>
-          <p:nvPr/>
-        </p:nvSpPr>
-        <p:spPr>
-          <a:xfrm>
-            <a:off x="2808000" y="5290560"/>
-            <a:ext cx="714960" cy="308520"/>
-          </a:xfrm>
-          <a:prstGeom prst="rect">
-            <a:avLst/>
-          </a:prstGeom>
-          <a:noFill/>
-          <a:ln>
-            <a:noFill/>
-          </a:ln>
-        </p:spPr>
-        <p:style>
-          <a:lnRef idx="2">
-            <a:schemeClr val="accent1">
-              <a:shade val="15000"/>
-            </a:schemeClr>
-          </a:lnRef>
-          <a:fillRef idx="1">
-            <a:schemeClr val="accent1"/>
-          </a:fillRef>
-          <a:effectRef idx="0">
-            <a:schemeClr val="accent1"/>
-          </a:effectRef>
-          <a:fontRef idx="minor"/>
-        </p:style>
-        <p:txBody>
-          <a:bodyPr lIns="90000" rIns="90000" tIns="45000" bIns="45000" anchor="ctr">
-            <a:noAutofit/>
-          </a:bodyPr>
-          <a:p>
-            <a:pPr algn="ctr">
-              <a:lnSpc>
-                <a:spcPct val="100000"/>
-              </a:lnSpc>
-              <a:buNone/>
-            </a:pPr>
-            <a:r>
-              <a:rPr b="0" lang="en-US" sz="1800" spc="-1" strike="noStrike">
-                <a:solidFill>
-                  <a:srgbClr val="000000"/>
-                </a:solidFill>
-                <a:latin typeface="Arial"/>
-                <a:ea typeface="DejaVu Sans"/>
-              </a:rPr>
-              <a:t>3’</a:t>
-            </a:r>
-            <a:endParaRPr b="0" lang="en-US" sz="1800" spc="-1" strike="noStrike">
-              <a:latin typeface="Arial"/>
-            </a:endParaRPr>
-          </a:p>
-        </p:txBody>
-      </p:sp>
-      <p:sp>
-        <p:nvSpPr>
-          <p:cNvPr id="138" name="Straight Arrow Connector 6"/>
-          <p:cNvSpPr/>
-          <p:nvPr/>
-        </p:nvSpPr>
-        <p:spPr>
-          <a:xfrm>
-            <a:off x="3524760" y="5284440"/>
-            <a:ext cx="21240" cy="924120"/>
-          </a:xfrm>
-          <a:custGeom>
-            <a:avLst/>
-            <a:gdLst/>
-            <a:ahLst/>
-            <a:rect l="l" t="t" r="r" b="b"/>
-            <a:pathLst>
-              <a:path w="21600" h="21600">
-                <a:moveTo>
-                  <a:pt x="0" y="0"/>
-                </a:moveTo>
-                <a:lnTo>
-                  <a:pt x="21600" y="21600"/>
-                </a:lnTo>
-              </a:path>
-            </a:pathLst>
-          </a:custGeom>
-          <a:noFill/>
-          <a:ln>
-            <a:solidFill>
-              <a:srgbClr val="4a7ebb"/>
-            </a:solidFill>
-            <a:headEnd len="med" type="triangle" w="med"/>
-            <a:tailEnd len="med" type="triangle" w="med"/>
-          </a:ln>
-        </p:spPr>
-        <p:style>
-          <a:lnRef idx="1">
-            <a:schemeClr val="accent1"/>
-          </a:lnRef>
-          <a:fillRef idx="0">
-            <a:schemeClr val="accent1"/>
-          </a:fillRef>
-          <a:effectRef idx="0">
-            <a:schemeClr val="accent1"/>
-          </a:effectRef>
-          <a:fontRef idx="minor"/>
-        </p:style>
-      </p:sp>
-      <p:sp>
-        <p:nvSpPr>
-          <p:cNvPr id="139" name="Rectangle 13"/>
-          <p:cNvSpPr/>
-          <p:nvPr/>
-        </p:nvSpPr>
-        <p:spPr>
-          <a:xfrm>
-            <a:off x="3627000" y="5486400"/>
-            <a:ext cx="714960" cy="308520"/>
-          </a:xfrm>
-          <a:prstGeom prst="rect">
-            <a:avLst/>
-          </a:prstGeom>
-          <a:noFill/>
-          <a:ln>
-            <a:noFill/>
-          </a:ln>
-        </p:spPr>
-        <p:style>
-          <a:lnRef idx="2">
-            <a:schemeClr val="accent1">
-              <a:shade val="15000"/>
-            </a:schemeClr>
-          </a:lnRef>
-          <a:fillRef idx="1">
-            <a:schemeClr val="accent1"/>
-          </a:fillRef>
-          <a:effectRef idx="0">
-            <a:schemeClr val="accent1"/>
-          </a:effectRef>
-          <a:fontRef idx="minor"/>
-        </p:style>
-        <p:txBody>
-          <a:bodyPr lIns="90000" rIns="90000" tIns="45000" bIns="45000" anchor="ctr">
-            <a:noAutofit/>
-          </a:bodyPr>
-          <a:p>
-            <a:pPr algn="ctr">
-              <a:lnSpc>
-                <a:spcPct val="100000"/>
-              </a:lnSpc>
-              <a:buNone/>
-            </a:pPr>
-            <a:r>
-              <a:rPr b="0" lang="en-US" sz="1800" spc="-1" strike="noStrike">
-                <a:solidFill>
-                  <a:srgbClr val="000000"/>
-                </a:solidFill>
-                <a:latin typeface="Arial"/>
-                <a:ea typeface="DejaVu Sans"/>
-              </a:rPr>
-              <a:t>&gt; 16’</a:t>
-            </a:r>
-            <a:endParaRPr b="0" lang="en-US" sz="1800" spc="-1" strike="noStrike">
-              <a:latin typeface="Arial"/>
-            </a:endParaRPr>
-          </a:p>
-        </p:txBody>
-      </p:sp>
-      <p:sp>
-        <p:nvSpPr>
-          <p:cNvPr id="140" name="Straight Arrow Connector 89"/>
-          <p:cNvSpPr/>
-          <p:nvPr/>
-        </p:nvSpPr>
-        <p:spPr>
-          <a:xfrm>
-            <a:off x="4673520" y="5379120"/>
-            <a:ext cx="2412000" cy="360"/>
-          </a:xfrm>
-          <a:custGeom>
-            <a:avLst/>
-            <a:gdLst/>
-            <a:ahLst/>
-            <a:rect l="l" t="t" r="r" b="b"/>
-            <a:pathLst>
-              <a:path w="21600" h="21600">
-                <a:moveTo>
-                  <a:pt x="0" y="0"/>
-                </a:moveTo>
-                <a:lnTo>
-                  <a:pt x="21600" y="21600"/>
-                </a:lnTo>
-              </a:path>
-            </a:pathLst>
-          </a:custGeom>
-          <a:noFill/>
-          <a:ln>
-            <a:solidFill>
-              <a:srgbClr val="4a7ebb"/>
-            </a:solidFill>
-            <a:headEnd len="med" type="triangle" w="med"/>
-            <a:tailEnd len="med" type="triangle" w="med"/>
-          </a:ln>
-        </p:spPr>
-        <p:style>
-          <a:lnRef idx="1">
-            <a:schemeClr val="accent1"/>
-          </a:lnRef>
-          <a:fillRef idx="0">
-            <a:schemeClr val="accent1"/>
-          </a:fillRef>
-          <a:effectRef idx="0">
-            <a:schemeClr val="accent1"/>
-          </a:effectRef>
-          <a:fontRef idx="minor"/>
-        </p:style>
-      </p:sp>
-      <p:sp>
-        <p:nvSpPr>
-          <p:cNvPr id="141" name="Rectangle 3"/>
-          <p:cNvSpPr/>
-          <p:nvPr/>
-        </p:nvSpPr>
-        <p:spPr>
-          <a:xfrm>
-            <a:off x="3549600" y="1143000"/>
-            <a:ext cx="564120" cy="694440"/>
-          </a:xfrm>
-          <a:prstGeom prst="rect">
-            <a:avLst/>
-          </a:prstGeom>
-          <a:solidFill>
-            <a:srgbClr val="4f81bd"/>
-          </a:solidFill>
-          <a:ln>
-            <a:solidFill>
-              <a:srgbClr val="223852"/>
-            </a:solidFill>
-          </a:ln>
-        </p:spPr>
-        <p:style>
-          <a:lnRef idx="2">
-            <a:schemeClr val="accent1">
-              <a:shade val="15000"/>
-            </a:schemeClr>
-          </a:lnRef>
-          <a:fillRef idx="1">
-            <a:schemeClr val="accent1"/>
-          </a:fillRef>
-          <a:effectRef idx="0">
-            <a:schemeClr val="accent1"/>
-          </a:effectRef>
-          <a:fontRef idx="minor"/>
-        </p:style>
-      </p:sp>
-      <p:sp>
-        <p:nvSpPr>
-          <p:cNvPr id="142" name="Rectangle 4"/>
-          <p:cNvSpPr/>
-          <p:nvPr/>
-        </p:nvSpPr>
-        <p:spPr>
-          <a:xfrm>
-            <a:off x="3488760" y="1204920"/>
-            <a:ext cx="714960" cy="308520"/>
-          </a:xfrm>
-          <a:prstGeom prst="rect">
-            <a:avLst/>
-          </a:prstGeom>
-          <a:noFill/>
-          <a:ln>
-            <a:noFill/>
-          </a:ln>
-        </p:spPr>
-        <p:style>
-          <a:lnRef idx="2">
-            <a:schemeClr val="accent1">
-              <a:shade val="15000"/>
-            </a:schemeClr>
-          </a:lnRef>
-          <a:fillRef idx="1">
-            <a:schemeClr val="accent1"/>
-          </a:fillRef>
-          <a:effectRef idx="0">
-            <a:schemeClr val="accent1"/>
-          </a:effectRef>
-          <a:fontRef idx="minor"/>
-        </p:style>
-        <p:txBody>
-          <a:bodyPr lIns="90000" rIns="90000" tIns="45000" bIns="45000" anchor="ctr">
-            <a:noAutofit/>
-          </a:bodyPr>
-          <a:p>
-            <a:pPr algn="ctr">
-              <a:lnSpc>
-                <a:spcPct val="100000"/>
-              </a:lnSpc>
-              <a:buNone/>
-            </a:pPr>
-            <a:r>
-              <a:rPr b="0" lang="en-US" sz="1800" spc="-1" strike="noStrike">
-                <a:solidFill>
-                  <a:srgbClr val="000000"/>
-                </a:solidFill>
-                <a:latin typeface="Arial"/>
-                <a:ea typeface="DejaVu Sans"/>
-              </a:rPr>
-              <a:t>2587</a:t>
-            </a:r>
-            <a:endParaRPr b="0" lang="en-US" sz="1800" spc="-1" strike="noStrike">
-              <a:latin typeface="Arial"/>
-            </a:endParaRPr>
-          </a:p>
-        </p:txBody>
-      </p:sp>
-      <p:sp>
-        <p:nvSpPr>
-          <p:cNvPr id="143" name="Straight Connector 1"/>
-          <p:cNvSpPr/>
-          <p:nvPr/>
-        </p:nvSpPr>
-        <p:spPr>
-          <a:xfrm flipH="1" flipV="1">
-            <a:off x="3674880" y="1838520"/>
-            <a:ext cx="394920" cy="180720"/>
-          </a:xfrm>
-          <a:prstGeom prst="line">
-            <a:avLst/>
-          </a:prstGeom>
-          <a:ln>
-            <a:solidFill>
-              <a:srgbClr val="4a7ebb"/>
-            </a:solidFill>
-          </a:ln>
-        </p:spPr>
-        <p:style>
-          <a:lnRef idx="1">
-            <a:schemeClr val="accent1"/>
-          </a:lnRef>
-          <a:fillRef idx="0">
-            <a:schemeClr val="accent1"/>
-          </a:fillRef>
-          <a:effectRef idx="0">
-            <a:schemeClr val="accent1"/>
-          </a:effectRef>
-          <a:fontRef idx="minor"/>
-        </p:style>
-      </p:sp>
-      <p:sp>
-        <p:nvSpPr>
-          <p:cNvPr id="144" name="Straight Arrow Connector 7"/>
-          <p:cNvSpPr/>
-          <p:nvPr/>
-        </p:nvSpPr>
-        <p:spPr>
-          <a:xfrm>
-            <a:off x="3560040" y="1957320"/>
-            <a:ext cx="600120" cy="360"/>
-          </a:xfrm>
-          <a:custGeom>
-            <a:avLst/>
-            <a:gdLst/>
-            <a:ahLst/>
-            <a:rect l="l" t="t" r="r" b="b"/>
-            <a:pathLst>
-              <a:path w="21600" h="21600">
-                <a:moveTo>
-                  <a:pt x="0" y="0"/>
-                </a:moveTo>
-                <a:lnTo>
-                  <a:pt x="21600" y="21600"/>
-                </a:lnTo>
-              </a:path>
-            </a:pathLst>
-          </a:custGeom>
-          <a:noFill/>
-          <a:ln>
-            <a:solidFill>
-              <a:srgbClr val="4a7ebb"/>
-            </a:solidFill>
-            <a:headEnd len="med" type="triangle" w="med"/>
-            <a:tailEnd len="med" type="triangle" w="med"/>
-          </a:ln>
-        </p:spPr>
-        <p:style>
-          <a:lnRef idx="1">
-            <a:schemeClr val="accent1"/>
-          </a:lnRef>
-          <a:fillRef idx="0">
-            <a:schemeClr val="accent1"/>
-          </a:fillRef>
-          <a:effectRef idx="0">
-            <a:schemeClr val="accent1"/>
-          </a:effectRef>
-          <a:fontRef idx="minor"/>
-        </p:style>
-      </p:sp>
-      <p:sp>
-        <p:nvSpPr>
-          <p:cNvPr id="145" name="Rectangle 14"/>
-          <p:cNvSpPr/>
-          <p:nvPr/>
-        </p:nvSpPr>
-        <p:spPr>
-          <a:xfrm>
-            <a:off x="3516840" y="1911960"/>
-            <a:ext cx="714960" cy="308520"/>
-          </a:xfrm>
-          <a:prstGeom prst="rect">
-            <a:avLst/>
-          </a:prstGeom>
-          <a:noFill/>
-          <a:ln>
-            <a:noFill/>
-          </a:ln>
-        </p:spPr>
-        <p:style>
-          <a:lnRef idx="2">
-            <a:schemeClr val="accent1">
-              <a:shade val="15000"/>
-            </a:schemeClr>
-          </a:lnRef>
-          <a:fillRef idx="1">
-            <a:schemeClr val="accent1"/>
-          </a:fillRef>
-          <a:effectRef idx="0">
-            <a:schemeClr val="accent1"/>
-          </a:effectRef>
-          <a:fontRef idx="minor"/>
-        </p:style>
-        <p:txBody>
-          <a:bodyPr lIns="90000" rIns="90000" tIns="45000" bIns="45000" anchor="ctr">
-            <a:noAutofit/>
-          </a:bodyPr>
-          <a:p>
-            <a:pPr algn="ctr">
-              <a:lnSpc>
-                <a:spcPct val="100000"/>
-              </a:lnSpc>
-              <a:buNone/>
-            </a:pPr>
-            <a:r>
-              <a:rPr b="0" lang="en-US" sz="1800" spc="-1" strike="noStrike">
-                <a:solidFill>
-                  <a:srgbClr val="000000"/>
-                </a:solidFill>
-                <a:latin typeface="Arial"/>
-                <a:ea typeface="DejaVu Sans"/>
-              </a:rPr>
-              <a:t>4’</a:t>
-            </a:r>
-            <a:endParaRPr b="0" lang="en-US" sz="1800" spc="-1" strike="noStrike">
-              <a:latin typeface="Arial"/>
-            </a:endParaRPr>
-          </a:p>
-        </p:txBody>
-      </p:sp>
-      <p:sp>
-        <p:nvSpPr>
-          <p:cNvPr id="146" name=""/>
-          <p:cNvSpPr/>
-          <p:nvPr/>
-        </p:nvSpPr>
-        <p:spPr>
-          <a:xfrm flipH="1">
-            <a:off x="7086600" y="4523400"/>
-            <a:ext cx="899640" cy="0"/>
-          </a:xfrm>
-          <a:prstGeom prst="line">
-            <a:avLst/>
-          </a:prstGeom>
-          <a:ln w="73080">
-            <a:solidFill>
-              <a:srgbClr val="bf0041"/>
-            </a:solidFill>
-            <a:round/>
-          </a:ln>
-        </p:spPr>
-        <p:style>
-          <a:lnRef idx="0"/>
-          <a:fillRef idx="0"/>
-          <a:effectRef idx="0"/>
-          <a:fontRef idx="minor"/>
-        </p:style>
-      </p:sp>
-      <p:sp>
-        <p:nvSpPr>
-          <p:cNvPr id="147" name=""/>
-          <p:cNvSpPr/>
-          <p:nvPr/>
-        </p:nvSpPr>
-        <p:spPr>
-          <a:xfrm flipV="1">
-            <a:off x="7998840" y="4222800"/>
-            <a:ext cx="0" cy="913320"/>
-          </a:xfrm>
-          <a:prstGeom prst="line">
-            <a:avLst/>
-          </a:prstGeom>
-          <a:ln w="73080">
-            <a:solidFill>
-              <a:srgbClr val="bf0041"/>
-            </a:solidFill>
-            <a:round/>
-          </a:ln>
-        </p:spPr>
-        <p:style>
-          <a:lnRef idx="0"/>
-          <a:fillRef idx="0"/>
-          <a:effectRef idx="0"/>
-          <a:fontRef idx="minor"/>
-        </p:style>
-      </p:sp>
-      <p:sp>
-        <p:nvSpPr>
-          <p:cNvPr id="148" name=""/>
-          <p:cNvSpPr/>
-          <p:nvPr/>
-        </p:nvSpPr>
-        <p:spPr>
-          <a:xfrm flipH="1">
-            <a:off x="7099200" y="4680000"/>
-            <a:ext cx="901800" cy="0"/>
-          </a:xfrm>
-          <a:prstGeom prst="line">
-            <a:avLst/>
-          </a:prstGeom>
-          <a:ln w="73080">
-            <a:solidFill>
-              <a:srgbClr val="bf0041"/>
-            </a:solidFill>
-            <a:round/>
-          </a:ln>
-        </p:spPr>
-        <p:style>
-          <a:lnRef idx="0"/>
-          <a:fillRef idx="0"/>
-          <a:effectRef idx="0"/>
-          <a:fontRef idx="minor"/>
-        </p:style>
-      </p:sp>
-      <p:sp>
-        <p:nvSpPr>
-          <p:cNvPr id="149" name=""/>
-          <p:cNvSpPr/>
-          <p:nvPr/>
-        </p:nvSpPr>
-        <p:spPr>
-          <a:xfrm flipH="1">
-            <a:off x="7086600" y="4872600"/>
-            <a:ext cx="899640" cy="0"/>
-          </a:xfrm>
-          <a:prstGeom prst="line">
-            <a:avLst/>
-          </a:prstGeom>
-          <a:ln w="73080">
-            <a:solidFill>
-              <a:srgbClr val="bf0041"/>
-            </a:solidFill>
-            <a:round/>
-          </a:ln>
-        </p:spPr>
-        <p:style>
-          <a:lnRef idx="0"/>
-          <a:fillRef idx="0"/>
-          <a:effectRef idx="0"/>
-          <a:fontRef idx="minor"/>
-        </p:style>
-      </p:sp>
-      <p:sp>
-        <p:nvSpPr>
-          <p:cNvPr id="150" name=""/>
-          <p:cNvSpPr/>
-          <p:nvPr/>
-        </p:nvSpPr>
-        <p:spPr>
-          <a:xfrm>
-            <a:off x="7099200" y="5099760"/>
-            <a:ext cx="863280" cy="0"/>
-          </a:xfrm>
-          <a:prstGeom prst="line">
-            <a:avLst/>
-          </a:prstGeom>
-          <a:ln w="73080">
-            <a:solidFill>
-              <a:srgbClr val="bf0041"/>
-            </a:solidFill>
-            <a:round/>
-          </a:ln>
-        </p:spPr>
-        <p:style>
-          <a:lnRef idx="0"/>
-          <a:fillRef idx="0"/>
-          <a:effectRef idx="0"/>
-          <a:fontRef idx="minor"/>
-        </p:style>
-      </p:sp>
-      <p:sp>
-        <p:nvSpPr>
-          <p:cNvPr id="151" name=""/>
-          <p:cNvSpPr/>
-          <p:nvPr/>
-        </p:nvSpPr>
-        <p:spPr>
-          <a:xfrm flipV="1">
-            <a:off x="7099200" y="4290840"/>
-            <a:ext cx="863280" cy="16920"/>
-          </a:xfrm>
-          <a:prstGeom prst="line">
-            <a:avLst/>
-          </a:prstGeom>
-          <a:ln w="73080">
-            <a:solidFill>
-              <a:srgbClr val="bf0041"/>
-            </a:solidFill>
-            <a:round/>
-          </a:ln>
-        </p:spPr>
-        <p:style>
-          <a:lnRef idx="0"/>
-          <a:fillRef idx="0"/>
-          <a:effectRef idx="0"/>
-          <a:fontRef idx="minor"/>
-        </p:style>
-      </p:sp>
-      <p:sp>
-        <p:nvSpPr>
-          <p:cNvPr id="152" name=""/>
-          <p:cNvSpPr/>
-          <p:nvPr/>
-        </p:nvSpPr>
-        <p:spPr>
-          <a:xfrm>
-            <a:off x="7099200" y="4343400"/>
-            <a:ext cx="828360" cy="0"/>
-          </a:xfrm>
-          <a:prstGeom prst="line">
-            <a:avLst/>
-          </a:prstGeom>
-          <a:ln w="18360">
-            <a:solidFill>
-              <a:srgbClr val="ffff00"/>
-            </a:solidFill>
-            <a:round/>
-          </a:ln>
-        </p:spPr>
-        <p:style>
-          <a:lnRef idx="0"/>
-          <a:fillRef idx="0"/>
-          <a:effectRef idx="0"/>
-          <a:fontRef idx="minor"/>
-        </p:style>
-      </p:sp>
-      <p:sp>
-        <p:nvSpPr>
-          <p:cNvPr id="153" name=""/>
-          <p:cNvSpPr/>
-          <p:nvPr/>
-        </p:nvSpPr>
-        <p:spPr>
-          <a:xfrm>
-            <a:off x="7134120" y="5027400"/>
-            <a:ext cx="828360" cy="0"/>
-          </a:xfrm>
-          <a:prstGeom prst="line">
-            <a:avLst/>
-          </a:prstGeom>
-          <a:ln w="18360">
-            <a:solidFill>
-              <a:srgbClr val="ffff00"/>
-            </a:solidFill>
-            <a:round/>
-          </a:ln>
-        </p:spPr>
-        <p:style>
-          <a:lnRef idx="0"/>
-          <a:fillRef idx="0"/>
-          <a:effectRef idx="0"/>
-          <a:fontRef idx="minor"/>
-        </p:style>
-      </p:sp>
-      <p:sp>
-        <p:nvSpPr>
-          <p:cNvPr id="154" name=""/>
-          <p:cNvSpPr/>
-          <p:nvPr/>
-        </p:nvSpPr>
-        <p:spPr>
-          <a:xfrm flipV="1">
-            <a:off x="7085520" y="4254840"/>
-            <a:ext cx="0" cy="913320"/>
-          </a:xfrm>
-          <a:prstGeom prst="line">
-            <a:avLst/>
-          </a:prstGeom>
-          <a:ln w="73080">
-            <a:solidFill>
-              <a:srgbClr val="bf0041"/>
-            </a:solidFill>
-            <a:round/>
-          </a:ln>
-        </p:spPr>
-        <p:style>
-          <a:lnRef idx="0"/>
-          <a:fillRef idx="0"/>
-          <a:effectRef idx="0"/>
-          <a:fontRef idx="minor"/>
-        </p:style>
+              <a:t>Car</a:t>
+            </a:r>
+            <a:endParaRPr b="0" lang="en-US" sz="1200" spc="-1" strike="noStrike">
+              <a:latin typeface="Arial"/>
+            </a:endParaRPr>
+          </a:p>
+        </p:txBody>
       </p:sp>
       <p:sp>
         <p:nvSpPr>
@@ -9395,9 +11445,9 @@
         <p:txBody>
           <a:bodyPr/>
           <a:p>
-            <a:fld id="{379B09C5-ED41-4383-A41F-F531EAADEE2F}" type="datetime1">
+            <a:fld id="{DA0439B5-165F-45C9-9320-871AAC305D1C}" type="datetime1">
               <a:rPr lang="en-US"/>
-              <a:t>06/04/2026</a:t>
+              <a:t>07/04/2026</a:t>
             </a:fld>
           </a:p>
         </p:txBody>
@@ -9434,7 +11484,7 @@
       </p:grpSpPr>
       <p:sp>
         <p:nvSpPr>
-          <p:cNvPr id="155" name="PlaceHolder 1"/>
+          <p:cNvPr id="158" name="PlaceHolder 1"/>
           <p:cNvSpPr>
             <a:spLocks noGrp="1"/>
           </p:cNvSpPr>
@@ -9445,7 +11495,7 @@
         <p:spPr>
           <a:xfrm>
             <a:off x="0" y="2130480"/>
-            <a:ext cx="9106920" cy="1432800"/>
+            <a:ext cx="9106560" cy="1432440"/>
           </a:xfrm>
           <a:prstGeom prst="rect">
             <a:avLst/>
@@ -9506,7 +11556,7 @@
         <p:txBody>
           <a:bodyPr/>
           <a:p>
-            <a:fld id="{4B74D094-37CA-4956-895D-63CE4545CA05}" type="slidenum">
+            <a:fld id="{64807F0A-8CCF-4323-837B-EF13F64C343D}" type="slidenum">
               <a:t>3</a:t>
             </a:fld>
           </a:p>
@@ -9526,9 +11576,9 @@
         <p:txBody>
           <a:bodyPr/>
           <a:p>
-            <a:fld id="{0D032ADA-6940-45E3-9DEE-2A55D33FB292}" type="datetime1">
+            <a:fld id="{1A931DE9-B7F5-4584-98E6-A5513E753BA4}" type="datetime1">
               <a:rPr lang="en-US"/>
-              <a:t>06/04/2026</a:t>
+              <a:t>07/04/2026</a:t>
             </a:fld>
           </a:p>
         </p:txBody>

--- a/Palo_Alto_2581/000_PaloAlto_Shed.pptx
+++ b/Palo_Alto_2581/000_PaloAlto_Shed.pptx
@@ -70,79 +70,7 @@
               <a:rPr b="0" lang="en-US" sz="4400" spc="-1" strike="noStrike">
                 <a:latin typeface="Arial"/>
               </a:rPr>
-              <a:t>Cl</a:t>
-            </a:r>
-            <a:r>
-              <a:rPr b="0" lang="en-US" sz="4400" spc="-1" strike="noStrike">
-                <a:latin typeface="Arial"/>
-              </a:rPr>
-              <a:t>ic</a:t>
-            </a:r>
-            <a:r>
-              <a:rPr b="0" lang="en-US" sz="4400" spc="-1" strike="noStrike">
-                <a:latin typeface="Arial"/>
-              </a:rPr>
-              <a:t>k </a:t>
-            </a:r>
-            <a:r>
-              <a:rPr b="0" lang="en-US" sz="4400" spc="-1" strike="noStrike">
-                <a:latin typeface="Arial"/>
-              </a:rPr>
-              <a:t>to </a:t>
-            </a:r>
-            <a:r>
-              <a:rPr b="0" lang="en-US" sz="4400" spc="-1" strike="noStrike">
-                <a:latin typeface="Arial"/>
-              </a:rPr>
-              <a:t>m</a:t>
-            </a:r>
-            <a:r>
-              <a:rPr b="0" lang="en-US" sz="4400" spc="-1" strike="noStrike">
-                <a:latin typeface="Arial"/>
-              </a:rPr>
-              <a:t>o</a:t>
-            </a:r>
-            <a:r>
-              <a:rPr b="0" lang="en-US" sz="4400" spc="-1" strike="noStrike">
-                <a:latin typeface="Arial"/>
-              </a:rPr>
-              <a:t>v</a:t>
-            </a:r>
-            <a:r>
-              <a:rPr b="0" lang="en-US" sz="4400" spc="-1" strike="noStrike">
-                <a:latin typeface="Arial"/>
-              </a:rPr>
-              <a:t>e </a:t>
-            </a:r>
-            <a:r>
-              <a:rPr b="0" lang="en-US" sz="4400" spc="-1" strike="noStrike">
-                <a:latin typeface="Arial"/>
-              </a:rPr>
-              <a:t>th</a:t>
-            </a:r>
-            <a:r>
-              <a:rPr b="0" lang="en-US" sz="4400" spc="-1" strike="noStrike">
-                <a:latin typeface="Arial"/>
-              </a:rPr>
-              <a:t>e </a:t>
-            </a:r>
-            <a:r>
-              <a:rPr b="0" lang="en-US" sz="4400" spc="-1" strike="noStrike">
-                <a:latin typeface="Arial"/>
-              </a:rPr>
-              <a:t>sli</a:t>
-            </a:r>
-            <a:r>
-              <a:rPr b="0" lang="en-US" sz="4400" spc="-1" strike="noStrike">
-                <a:latin typeface="Arial"/>
-              </a:rPr>
-              <a:t>d</a:t>
-            </a:r>
-            <a:r>
-              <a:rPr b="0" lang="en-US" sz="4400" spc="-1" strike="noStrike">
-                <a:latin typeface="Arial"/>
-              </a:rPr>
-              <a:t>e</a:t>
+              <a:t>Click to move the slide</a:t>
             </a:r>
             <a:endParaRPr b="0" lang="en-US" sz="4400" spc="-1" strike="noStrike">
               <a:latin typeface="Arial"/>
@@ -182,79 +110,7 @@
               <a:rPr b="0" lang="en-US" sz="2000" spc="-1" strike="noStrike">
                 <a:latin typeface="Arial"/>
               </a:rPr>
-              <a:t>Clic</a:t>
-            </a:r>
-            <a:r>
-              <a:rPr b="0" lang="en-US" sz="2000" spc="-1" strike="noStrike">
-                <a:latin typeface="Arial"/>
-              </a:rPr>
-              <a:t>k </a:t>
-            </a:r>
-            <a:r>
-              <a:rPr b="0" lang="en-US" sz="2000" spc="-1" strike="noStrike">
-                <a:latin typeface="Arial"/>
-              </a:rPr>
-              <a:t>to </a:t>
-            </a:r>
-            <a:r>
-              <a:rPr b="0" lang="en-US" sz="2000" spc="-1" strike="noStrike">
-                <a:latin typeface="Arial"/>
-              </a:rPr>
-              <a:t>ed</a:t>
-            </a:r>
-            <a:r>
-              <a:rPr b="0" lang="en-US" sz="2000" spc="-1" strike="noStrike">
-                <a:latin typeface="Arial"/>
-              </a:rPr>
-              <a:t>it </a:t>
-            </a:r>
-            <a:r>
-              <a:rPr b="0" lang="en-US" sz="2000" spc="-1" strike="noStrike">
-                <a:latin typeface="Arial"/>
-              </a:rPr>
-              <a:t>th</a:t>
-            </a:r>
-            <a:r>
-              <a:rPr b="0" lang="en-US" sz="2000" spc="-1" strike="noStrike">
-                <a:latin typeface="Arial"/>
-              </a:rPr>
-              <a:t>e </a:t>
-            </a:r>
-            <a:r>
-              <a:rPr b="0" lang="en-US" sz="2000" spc="-1" strike="noStrike">
-                <a:latin typeface="Arial"/>
-              </a:rPr>
-              <a:t>no</a:t>
-            </a:r>
-            <a:r>
-              <a:rPr b="0" lang="en-US" sz="2000" spc="-1" strike="noStrike">
-                <a:latin typeface="Arial"/>
-              </a:rPr>
-              <a:t>te</a:t>
-            </a:r>
-            <a:r>
-              <a:rPr b="0" lang="en-US" sz="2000" spc="-1" strike="noStrike">
-                <a:latin typeface="Arial"/>
-              </a:rPr>
-              <a:t>s </a:t>
-            </a:r>
-            <a:r>
-              <a:rPr b="0" lang="en-US" sz="2000" spc="-1" strike="noStrike">
-                <a:latin typeface="Arial"/>
-              </a:rPr>
-              <a:t>for</a:t>
-            </a:r>
-            <a:r>
-              <a:rPr b="0" lang="en-US" sz="2000" spc="-1" strike="noStrike">
-                <a:latin typeface="Arial"/>
-              </a:rPr>
-              <a:t>m</a:t>
-            </a:r>
-            <a:r>
-              <a:rPr b="0" lang="en-US" sz="2000" spc="-1" strike="noStrike">
-                <a:latin typeface="Arial"/>
-              </a:rPr>
-              <a:t>at</a:t>
+              <a:t>Click to edit the notes format</a:t>
             </a:r>
             <a:endParaRPr b="0" lang="en-US" sz="2000" spc="-1" strike="noStrike">
               <a:latin typeface="Arial"/>
@@ -439,7 +295,7 @@
             <a:pPr algn="r">
               <a:buNone/>
             </a:pPr>
-            <a:fld id="{B0E4F4F2-0297-4938-900E-916F2681D1C0}" type="slidenum">
+            <a:fld id="{858E3D8B-F501-46EF-AF4B-C3E0235A1265}" type="slidenum">
               <a:rPr b="0" lang="en-US" sz="1400" spc="-1" strike="noStrike">
                 <a:latin typeface="Times New Roman"/>
               </a:rPr>
@@ -476,7 +332,7 @@
       </p:grpSpPr>
       <p:sp>
         <p:nvSpPr>
-          <p:cNvPr id="159" name="PlaceHolder 1"/>
+          <p:cNvPr id="158" name="PlaceHolder 1"/>
           <p:cNvSpPr>
             <a:spLocks noGrp="1"/>
           </p:cNvSpPr>
@@ -499,7 +355,7 @@
       </p:sp>
       <p:sp>
         <p:nvSpPr>
-          <p:cNvPr id="160" name="PlaceHolder 2"/>
+          <p:cNvPr id="159" name="PlaceHolder 2"/>
           <p:cNvSpPr>
             <a:spLocks noGrp="1"/>
           </p:cNvSpPr>
@@ -533,7 +389,7 @@
       </p:sp>
       <p:sp>
         <p:nvSpPr>
-          <p:cNvPr id="161" name="PlaceHolder 3"/>
+          <p:cNvPr id="160" name="PlaceHolder 3"/>
           <p:cNvSpPr>
             <a:spLocks noGrp="1"/>
           </p:cNvSpPr>
@@ -580,7 +436,7 @@
               </a:lnSpc>
               <a:buNone/>
             </a:pPr>
-            <a:fld id="{356EF1CA-F8A9-48BD-ACC9-0E91F9617B31}" type="slidenum">
+            <a:fld id="{B004A739-7BB9-47E1-B5F6-947D9AAB51C3}" type="slidenum">
               <a:rPr b="0" lang="en-US" sz="1200" spc="-1" strike="noStrike">
                 <a:solidFill>
                   <a:srgbClr val="000000"/>
@@ -588,7 +444,7 @@
                 <a:latin typeface="Times New Roman"/>
                 <a:ea typeface="+mn-ea"/>
               </a:rPr>
-              <a:t>&lt;number&gt;</a:t>
+              <a:t>3</a:t>
             </a:fld>
             <a:endParaRPr b="0" lang="en-US" sz="1200" spc="-1" strike="noStrike">
               <a:latin typeface="Times New Roman"/>
@@ -652,7 +508,7 @@
         <p:txBody>
           <a:bodyPr/>
           <a:p>
-            <a:fld id="{8801709A-5613-4EAD-89E7-817E44DEB89B}" type="slidenum">
+            <a:fld id="{552F79DA-DA70-448D-82B5-ED13A0F897C6}" type="slidenum">
               <a:t>&lt;#&gt;</a:t>
             </a:fld>
           </a:p>
@@ -840,7 +696,7 @@
         <p:txBody>
           <a:bodyPr/>
           <a:p>
-            <a:fld id="{3E730661-3DC7-4B74-AE07-2BB019A9D275}" type="slidenum">
+            <a:fld id="{2A0ABFC0-8924-46CF-AF9C-5C61D55BBD2F}" type="slidenum">
               <a:t>&lt;#&gt;</a:t>
             </a:fld>
           </a:p>
@@ -1096,7 +952,7 @@
         <p:txBody>
           <a:bodyPr/>
           <a:p>
-            <a:fld id="{8FBED34F-AD11-41B0-AF80-1BDCA8C8160F}" type="slidenum">
+            <a:fld id="{994B0858-19ED-44E1-A81A-29F99AE34AD9}" type="slidenum">
               <a:t>&lt;#&gt;</a:t>
             </a:fld>
           </a:p>
@@ -1420,7 +1276,7 @@
         <p:txBody>
           <a:bodyPr/>
           <a:p>
-            <a:fld id="{720ABCEC-1836-4790-94A3-9238388922E6}" type="slidenum">
+            <a:fld id="{8854C7F9-9E6B-4944-96E8-2D6265EDD3D7}" type="slidenum">
               <a:t>&lt;#&gt;</a:t>
             </a:fld>
           </a:p>
@@ -1503,7 +1359,7 @@
         <p:txBody>
           <a:bodyPr/>
           <a:p>
-            <a:fld id="{D5B84C77-8FA5-4AD5-A2DC-729E2E3E8B26}" type="slidenum">
+            <a:fld id="{B0921ADB-24AE-4ED8-99DA-B8A3EB28D3B8}" type="slidenum">
               <a:t>&lt;#&gt;</a:t>
             </a:fld>
           </a:p>
@@ -1660,7 +1516,7 @@
         <p:txBody>
           <a:bodyPr/>
           <a:p>
-            <a:fld id="{107A0933-7CE5-4A13-88DC-EBFFDBD66158}" type="slidenum">
+            <a:fld id="{A455DE1D-B453-4773-A812-DEE67820C99A}" type="slidenum">
               <a:t>&lt;#&gt;</a:t>
             </a:fld>
           </a:p>
@@ -1814,7 +1670,7 @@
         <p:txBody>
           <a:bodyPr/>
           <a:p>
-            <a:fld id="{913C9752-AA34-4307-ACDF-A62304AF125B}" type="slidenum">
+            <a:fld id="{525EE603-AF52-4B38-BB4E-19AD7FD292F6}" type="slidenum">
               <a:t>&lt;#&gt;</a:t>
             </a:fld>
           </a:p>
@@ -2002,7 +1858,7 @@
         <p:txBody>
           <a:bodyPr/>
           <a:p>
-            <a:fld id="{41544742-CD14-4D80-81C7-34F70824508A}" type="slidenum">
+            <a:fld id="{BA4E757E-0A43-426F-89AB-99CDAF260EF9}" type="slidenum">
               <a:t>&lt;#&gt;</a:t>
             </a:fld>
           </a:p>
@@ -2122,7 +1978,7 @@
         <p:txBody>
           <a:bodyPr/>
           <a:p>
-            <a:fld id="{CCC029D6-85EF-419D-AF3F-785088D1C8A8}" type="slidenum">
+            <a:fld id="{2286AC2B-7767-4F1B-B995-D63CEF7CBA83}" type="slidenum">
               <a:t>&lt;#&gt;</a:t>
             </a:fld>
           </a:p>
@@ -2242,7 +2098,7 @@
         <p:txBody>
           <a:bodyPr/>
           <a:p>
-            <a:fld id="{CAFC1188-CC23-4DA9-A5DE-F79AF5CFE62C}" type="slidenum">
+            <a:fld id="{EEA2FA04-0DAC-4398-98A8-55E3CEE91E23}" type="slidenum">
               <a:t>&lt;#&gt;</a:t>
             </a:fld>
           </a:p>
@@ -2464,7 +2320,7 @@
         <p:txBody>
           <a:bodyPr/>
           <a:p>
-            <a:fld id="{536CE6AF-6521-48D6-83F1-9080998485BA}" type="slidenum">
+            <a:fld id="{880031CA-ADBB-4088-BCBA-445918838351}" type="slidenum">
               <a:t>&lt;#&gt;</a:t>
             </a:fld>
           </a:p>
@@ -2621,7 +2477,7 @@
         <p:txBody>
           <a:bodyPr/>
           <a:p>
-            <a:fld id="{0017D6C0-13AC-473D-ADD1-E84182DB8335}" type="slidenum">
+            <a:fld id="{206DA6B3-39C6-4D18-8C63-9C7E057C54B6}" type="slidenum">
               <a:t>&lt;#&gt;</a:t>
             </a:fld>
           </a:p>
@@ -2843,7 +2699,7 @@
         <p:txBody>
           <a:bodyPr/>
           <a:p>
-            <a:fld id="{FFEA2139-52D0-4699-B486-03A009A796A5}" type="slidenum">
+            <a:fld id="{4F977904-0151-4461-9BA5-69327EF6AAA8}" type="slidenum">
               <a:t>&lt;#&gt;</a:t>
             </a:fld>
           </a:p>
@@ -3065,7 +2921,7 @@
         <p:txBody>
           <a:bodyPr/>
           <a:p>
-            <a:fld id="{BF834D18-DD9F-442C-B962-02DAD2993304}" type="slidenum">
+            <a:fld id="{68AA198B-BEFE-4E91-87B8-C9125B1F046A}" type="slidenum">
               <a:t>&lt;#&gt;</a:t>
             </a:fld>
           </a:p>
@@ -3253,7 +3109,7 @@
         <p:txBody>
           <a:bodyPr/>
           <a:p>
-            <a:fld id="{675FC4F5-B2E9-44B0-A85C-30E50FD2B870}" type="slidenum">
+            <a:fld id="{6EEE1387-C878-4EE0-8BF6-73042D9DEAB9}" type="slidenum">
               <a:t>&lt;#&gt;</a:t>
             </a:fld>
           </a:p>
@@ -3509,7 +3365,7 @@
         <p:txBody>
           <a:bodyPr/>
           <a:p>
-            <a:fld id="{87A1BD3D-1B05-42E1-9197-8F2A96A98624}" type="slidenum">
+            <a:fld id="{454D67EF-04AD-4E9F-AA0E-C8CA134F6282}" type="slidenum">
               <a:t>&lt;#&gt;</a:t>
             </a:fld>
           </a:p>
@@ -3833,7 +3689,7 @@
         <p:txBody>
           <a:bodyPr/>
           <a:p>
-            <a:fld id="{02CEECAF-93BA-4FEA-A858-0C38078CB1CF}" type="slidenum">
+            <a:fld id="{317032CE-3816-42DC-966C-1B61C30D2014}" type="slidenum">
               <a:t>&lt;#&gt;</a:t>
             </a:fld>
           </a:p>
@@ -3987,7 +3843,7 @@
         <p:txBody>
           <a:bodyPr/>
           <a:p>
-            <a:fld id="{88A09874-8F9A-45DA-9538-982842B85F21}" type="slidenum">
+            <a:fld id="{A67AC274-A480-4A06-9DC2-974769CDCD52}" type="slidenum">
               <a:t>&lt;#&gt;</a:t>
             </a:fld>
           </a:p>
@@ -4175,7 +4031,7 @@
         <p:txBody>
           <a:bodyPr/>
           <a:p>
-            <a:fld id="{1F6A62A4-5C8D-46EF-8D85-8D94089DC0C1}" type="slidenum">
+            <a:fld id="{92DEF76E-004E-47DA-A223-656F67A01C32}" type="slidenum">
               <a:t>&lt;#&gt;</a:t>
             </a:fld>
           </a:p>
@@ -4295,7 +4151,7 @@
         <p:txBody>
           <a:bodyPr/>
           <a:p>
-            <a:fld id="{09F519C8-2805-4818-9DD5-9E36ECFF198A}" type="slidenum">
+            <a:fld id="{B3E05686-9449-4F66-B067-4267787A02BC}" type="slidenum">
               <a:t>&lt;#&gt;</a:t>
             </a:fld>
           </a:p>
@@ -4415,7 +4271,7 @@
         <p:txBody>
           <a:bodyPr/>
           <a:p>
-            <a:fld id="{7DC3887D-BFA1-4816-B4A3-52CD80CA5229}" type="slidenum">
+            <a:fld id="{5AE4B2B4-4F5A-4EBE-8524-0243E0237035}" type="slidenum">
               <a:t>&lt;#&gt;</a:t>
             </a:fld>
           </a:p>
@@ -4637,7 +4493,7 @@
         <p:txBody>
           <a:bodyPr/>
           <a:p>
-            <a:fld id="{1C644274-D3F5-4E4B-9190-FA15181F1B0A}" type="slidenum">
+            <a:fld id="{5386E704-DA27-43EC-BEC2-516C7D03A761}" type="slidenum">
               <a:t>&lt;#&gt;</a:t>
             </a:fld>
           </a:p>
@@ -4859,7 +4715,7 @@
         <p:txBody>
           <a:bodyPr/>
           <a:p>
-            <a:fld id="{34D279C0-6E84-4A7B-AE15-9E956386CDE6}" type="slidenum">
+            <a:fld id="{9FFC7342-2427-4961-8778-5482BDE95F1C}" type="slidenum">
               <a:t>&lt;#&gt;</a:t>
             </a:fld>
           </a:p>
@@ -5081,7 +4937,7 @@
         <p:txBody>
           <a:bodyPr/>
           <a:p>
-            <a:fld id="{177DD405-6DAD-44B0-A489-4F632973D4E5}" type="slidenum">
+            <a:fld id="{D3798AF9-9701-49B5-A27A-072E30E7E294}" type="slidenum">
               <a:t>&lt;#&gt;</a:t>
             </a:fld>
           </a:p>
@@ -5251,7 +5107,7 @@
               </a:lnSpc>
               <a:buNone/>
             </a:pPr>
-            <a:fld id="{0CF566D8-A43F-4DD1-926D-4999D61A3C10}" type="slidenum">
+            <a:fld id="{FA37E9D5-795E-440B-BB67-B086AA93E233}" type="slidenum">
               <a:rPr b="0" lang="en-US" sz="1200" spc="-1" strike="noStrike">
                 <a:solidFill>
                   <a:srgbClr val="8b8b8b"/>
@@ -5349,103 +5205,7 @@
               <a:rPr b="0" lang="en-US" sz="4400" spc="-1" strike="noStrike">
                 <a:latin typeface="Arial"/>
               </a:rPr>
-              <a:t>Cl</a:t>
-            </a:r>
-            <a:r>
-              <a:rPr b="0" lang="en-US" sz="4400" spc="-1" strike="noStrike">
-                <a:latin typeface="Arial"/>
-              </a:rPr>
-              <a:t>ic</a:t>
-            </a:r>
-            <a:r>
-              <a:rPr b="0" lang="en-US" sz="4400" spc="-1" strike="noStrike">
-                <a:latin typeface="Arial"/>
-              </a:rPr>
-              <a:t>k </a:t>
-            </a:r>
-            <a:r>
-              <a:rPr b="0" lang="en-US" sz="4400" spc="-1" strike="noStrike">
-                <a:latin typeface="Arial"/>
-              </a:rPr>
-              <a:t>to </a:t>
-            </a:r>
-            <a:r>
-              <a:rPr b="0" lang="en-US" sz="4400" spc="-1" strike="noStrike">
-                <a:latin typeface="Arial"/>
-              </a:rPr>
-              <a:t>e</a:t>
-            </a:r>
-            <a:r>
-              <a:rPr b="0" lang="en-US" sz="4400" spc="-1" strike="noStrike">
-                <a:latin typeface="Arial"/>
-              </a:rPr>
-              <a:t>di</a:t>
-            </a:r>
-            <a:r>
-              <a:rPr b="0" lang="en-US" sz="4400" spc="-1" strike="noStrike">
-                <a:latin typeface="Arial"/>
-              </a:rPr>
-              <a:t>t </a:t>
-            </a:r>
-            <a:r>
-              <a:rPr b="0" lang="en-US" sz="4400" spc="-1" strike="noStrike">
-                <a:latin typeface="Arial"/>
-              </a:rPr>
-              <a:t>th</a:t>
-            </a:r>
-            <a:r>
-              <a:rPr b="0" lang="en-US" sz="4400" spc="-1" strike="noStrike">
-                <a:latin typeface="Arial"/>
-              </a:rPr>
-              <a:t>e </a:t>
-            </a:r>
-            <a:r>
-              <a:rPr b="0" lang="en-US" sz="4400" spc="-1" strike="noStrike">
-                <a:latin typeface="Arial"/>
-              </a:rPr>
-              <a:t>tit</a:t>
-            </a:r>
-            <a:r>
-              <a:rPr b="0" lang="en-US" sz="4400" spc="-1" strike="noStrike">
-                <a:latin typeface="Arial"/>
-              </a:rPr>
-              <a:t>le </a:t>
-            </a:r>
-            <a:r>
-              <a:rPr b="0" lang="en-US" sz="4400" spc="-1" strike="noStrike">
-                <a:latin typeface="Arial"/>
-              </a:rPr>
-              <a:t>te</a:t>
-            </a:r>
-            <a:r>
-              <a:rPr b="0" lang="en-US" sz="4400" spc="-1" strike="noStrike">
-                <a:latin typeface="Arial"/>
-              </a:rPr>
-              <a:t>xt </a:t>
-            </a:r>
-            <a:r>
-              <a:rPr b="0" lang="en-US" sz="4400" spc="-1" strike="noStrike">
-                <a:latin typeface="Arial"/>
-              </a:rPr>
-              <a:t>fo</a:t>
-            </a:r>
-            <a:r>
-              <a:rPr b="0" lang="en-US" sz="4400" spc="-1" strike="noStrike">
-                <a:latin typeface="Arial"/>
-              </a:rPr>
-              <a:t>r</a:t>
-            </a:r>
-            <a:r>
-              <a:rPr b="0" lang="en-US" sz="4400" spc="-1" strike="noStrike">
-                <a:latin typeface="Arial"/>
-              </a:rPr>
-              <a:t>m</a:t>
-            </a:r>
-            <a:r>
-              <a:rPr b="0" lang="en-US" sz="4400" spc="-1" strike="noStrike">
-                <a:latin typeface="Arial"/>
-              </a:rPr>
-              <a:t>at</a:t>
+              <a:t>Click to edit the title text format</a:t>
             </a:r>
             <a:endParaRPr b="0" lang="en-US" sz="4400" spc="-1" strike="noStrike">
               <a:latin typeface="Arial"/>
@@ -5794,7 +5554,7 @@
               </a:lnSpc>
               <a:buNone/>
             </a:pPr>
-            <a:fld id="{06328D1E-D17B-46F5-9EE1-D4321B086C3C}" type="slidenum">
+            <a:fld id="{2A314F12-58AE-4DA6-B634-AF35D98D663C}" type="slidenum">
               <a:rPr b="0" lang="en-US" sz="1200" spc="-1" strike="noStrike">
                 <a:solidFill>
                   <a:srgbClr val="8b8b8b"/>
@@ -6164,187 +5924,7 @@
                 <a:latin typeface="Calibri"/>
                 <a:ea typeface="DejaVu Sans"/>
               </a:rPr>
-              <a:t>0</a:t>
-            </a:r>
-            <a:r>
-              <a:rPr b="1" lang="en-US" sz="4200" spc="-1" strike="noStrike">
-                <a:solidFill>
-                  <a:srgbClr val="ffff00"/>
-                </a:solidFill>
-                <a:latin typeface="Calibri"/>
-                <a:ea typeface="DejaVu Sans"/>
-              </a:rPr>
-              <a:t>0</a:t>
-            </a:r>
-            <a:r>
-              <a:rPr b="1" lang="en-US" sz="4200" spc="-1" strike="noStrike">
-                <a:solidFill>
-                  <a:srgbClr val="ffff00"/>
-                </a:solidFill>
-                <a:latin typeface="Calibri"/>
-                <a:ea typeface="DejaVu Sans"/>
-              </a:rPr>
-              <a:t>1 </a:t>
-            </a:r>
-            <a:r>
-              <a:rPr b="1" lang="en-US" sz="4200" spc="-1" strike="noStrike">
-                <a:solidFill>
-                  <a:srgbClr val="ffff00"/>
-                </a:solidFill>
-                <a:latin typeface="Calibri"/>
-                <a:ea typeface="DejaVu Sans"/>
-              </a:rPr>
-              <a:t>P</a:t>
-            </a:r>
-            <a:r>
-              <a:rPr b="1" lang="en-US" sz="4200" spc="-1" strike="noStrike">
-                <a:solidFill>
-                  <a:srgbClr val="ffff00"/>
-                </a:solidFill>
-                <a:latin typeface="Calibri"/>
-                <a:ea typeface="DejaVu Sans"/>
-              </a:rPr>
-              <a:t>a</a:t>
-            </a:r>
-            <a:r>
-              <a:rPr b="1" lang="en-US" sz="4200" spc="-1" strike="noStrike">
-                <a:solidFill>
-                  <a:srgbClr val="ffff00"/>
-                </a:solidFill>
-                <a:latin typeface="Calibri"/>
-                <a:ea typeface="DejaVu Sans"/>
-              </a:rPr>
-              <a:t>l</a:t>
-            </a:r>
-            <a:r>
-              <a:rPr b="1" lang="en-US" sz="4200" spc="-1" strike="noStrike">
-                <a:solidFill>
-                  <a:srgbClr val="ffff00"/>
-                </a:solidFill>
-                <a:latin typeface="Calibri"/>
-                <a:ea typeface="DejaVu Sans"/>
-              </a:rPr>
-              <a:t>o </a:t>
-            </a:r>
-            <a:r>
-              <a:rPr b="1" lang="en-US" sz="4200" spc="-1" strike="noStrike">
-                <a:solidFill>
-                  <a:srgbClr val="ffff00"/>
-                </a:solidFill>
-                <a:latin typeface="Calibri"/>
-                <a:ea typeface="DejaVu Sans"/>
-              </a:rPr>
-              <a:t>A</a:t>
-            </a:r>
-            <a:r>
-              <a:rPr b="1" lang="en-US" sz="4200" spc="-1" strike="noStrike">
-                <a:solidFill>
-                  <a:srgbClr val="ffff00"/>
-                </a:solidFill>
-                <a:latin typeface="Calibri"/>
-                <a:ea typeface="DejaVu Sans"/>
-              </a:rPr>
-              <a:t>lt</a:t>
-            </a:r>
-            <a:r>
-              <a:rPr b="1" lang="en-US" sz="4200" spc="-1" strike="noStrike">
-                <a:solidFill>
-                  <a:srgbClr val="ffff00"/>
-                </a:solidFill>
-                <a:latin typeface="Calibri"/>
-                <a:ea typeface="DejaVu Sans"/>
-              </a:rPr>
-              <a:t>o </a:t>
-            </a:r>
-            <a:r>
-              <a:rPr b="1" lang="en-US" sz="4200" spc="-1" strike="noStrike">
-                <a:solidFill>
-                  <a:srgbClr val="ffff00"/>
-                </a:solidFill>
-                <a:latin typeface="Calibri"/>
-                <a:ea typeface="DejaVu Sans"/>
-              </a:rPr>
-              <a:t>2</a:t>
-            </a:r>
-            <a:r>
-              <a:rPr b="1" lang="en-US" sz="4200" spc="-1" strike="noStrike">
-                <a:solidFill>
-                  <a:srgbClr val="ffff00"/>
-                </a:solidFill>
-                <a:latin typeface="Calibri"/>
-                <a:ea typeface="DejaVu Sans"/>
-              </a:rPr>
-              <a:t>5</a:t>
-            </a:r>
-            <a:r>
-              <a:rPr b="1" lang="en-US" sz="4200" spc="-1" strike="noStrike">
-                <a:solidFill>
-                  <a:srgbClr val="ffff00"/>
-                </a:solidFill>
-                <a:latin typeface="Calibri"/>
-                <a:ea typeface="DejaVu Sans"/>
-              </a:rPr>
-              <a:t>8</a:t>
-            </a:r>
-            <a:r>
-              <a:rPr b="1" lang="en-US" sz="4200" spc="-1" strike="noStrike">
-                <a:solidFill>
-                  <a:srgbClr val="ffff00"/>
-                </a:solidFill>
-                <a:latin typeface="Calibri"/>
-                <a:ea typeface="DejaVu Sans"/>
-              </a:rPr>
-              <a:t>1 </a:t>
-            </a:r>
-            <a:r>
-              <a:rPr b="1" lang="en-US" sz="4200" spc="-1" strike="noStrike">
-                <a:solidFill>
-                  <a:srgbClr val="ffff00"/>
-                </a:solidFill>
-                <a:latin typeface="Calibri"/>
-                <a:ea typeface="DejaVu Sans"/>
-              </a:rPr>
-              <a:t>- </a:t>
-            </a:r>
-            <a:r>
-              <a:rPr b="1" lang="en-US" sz="4200" spc="-1" strike="noStrike">
-                <a:solidFill>
-                  <a:srgbClr val="ffff00"/>
-                </a:solidFill>
-                <a:latin typeface="Calibri"/>
-                <a:ea typeface="DejaVu Sans"/>
-              </a:rPr>
-              <a:t>2</a:t>
-            </a:r>
-            <a:r>
-              <a:rPr b="1" lang="en-US" sz="4200" spc="-1" strike="noStrike">
-                <a:solidFill>
-                  <a:srgbClr val="ffff00"/>
-                </a:solidFill>
-                <a:latin typeface="Calibri"/>
-                <a:ea typeface="DejaVu Sans"/>
-              </a:rPr>
-              <a:t>5</a:t>
-            </a:r>
-            <a:r>
-              <a:rPr b="1" lang="en-US" sz="4200" spc="-1" strike="noStrike">
-                <a:solidFill>
-                  <a:srgbClr val="ffff00"/>
-                </a:solidFill>
-                <a:latin typeface="Calibri"/>
-                <a:ea typeface="DejaVu Sans"/>
-              </a:rPr>
-              <a:t>8</a:t>
-            </a:r>
-            <a:r>
-              <a:rPr b="1" lang="en-US" sz="4200" spc="-1" strike="noStrike">
-                <a:solidFill>
-                  <a:srgbClr val="ffff00"/>
-                </a:solidFill>
-                <a:latin typeface="Calibri"/>
-                <a:ea typeface="DejaVu Sans"/>
-              </a:rPr>
-              <a:t>7</a:t>
+              <a:t>001 Palo Alto 2581 - 2587</a:t>
             </a:r>
             <a:endParaRPr b="0" lang="en-US" sz="4200" spc="-1" strike="noStrike">
               <a:latin typeface="Arial"/>
@@ -6400,7 +5980,7 @@
                 <a:latin typeface="Calibri"/>
                 <a:ea typeface="DejaVu Sans"/>
               </a:rPr>
-              <a:t>Pete</a:t>
+              <a:t>Pe</a:t>
             </a:r>
             <a:r>
               <a:rPr b="0" lang="en-US" sz="3200" spc="-1" strike="noStrike">
@@ -6410,6 +5990,26 @@
                 <a:latin typeface="Calibri"/>
                 <a:ea typeface="DejaVu Sans"/>
               </a:rPr>
+              <a:t>t</a:t>
+            </a:r>
+            <a:r>
+              <a:rPr b="0" lang="en-US" sz="3200" spc="-1" strike="noStrike">
+                <a:solidFill>
+                  <a:srgbClr val="8b8b8b"/>
+                </a:solidFill>
+                <a:latin typeface="Calibri"/>
+                <a:ea typeface="DejaVu Sans"/>
+              </a:rPr>
+              <a:t>e</a:t>
+            </a:r>
+            <a:r>
+              <a:rPr b="0" lang="en-US" sz="3200" spc="-1" strike="noStrike">
+                <a:solidFill>
+                  <a:srgbClr val="8b8b8b"/>
+                </a:solidFill>
+                <a:latin typeface="Calibri"/>
+                <a:ea typeface="DejaVu Sans"/>
+              </a:rPr>
               <a:t>r </a:t>
             </a:r>
             <a:r>
@@ -6420,7 +6020,7 @@
                 <a:latin typeface="Calibri"/>
                 <a:ea typeface="DejaVu Sans"/>
               </a:rPr>
-              <a:t>H. </a:t>
+              <a:t>H</a:t>
             </a:r>
             <a:r>
               <a:rPr b="0" lang="en-US" sz="3200" spc="-1" strike="noStrike">
@@ -6430,7 +6030,7 @@
                 <a:latin typeface="Calibri"/>
                 <a:ea typeface="DejaVu Sans"/>
               </a:rPr>
-              <a:t>Ch</a:t>
+              <a:t>. </a:t>
             </a:r>
             <a:r>
               <a:rPr b="0" lang="en-US" sz="3200" spc="-1" strike="noStrike">
@@ -6440,7 +6040,37 @@
                 <a:latin typeface="Calibri"/>
                 <a:ea typeface="DejaVu Sans"/>
               </a:rPr>
-              <a:t>en</a:t>
+              <a:t>C</a:t>
+            </a:r>
+            <a:r>
+              <a:rPr b="0" lang="en-US" sz="3200" spc="-1" strike="noStrike">
+                <a:solidFill>
+                  <a:srgbClr val="8b8b8b"/>
+                </a:solidFill>
+                <a:latin typeface="Calibri"/>
+                <a:ea typeface="DejaVu Sans"/>
+              </a:rPr>
+              <a:t>h</a:t>
+            </a:r>
+            <a:r>
+              <a:rPr b="0" lang="en-US" sz="3200" spc="-1" strike="noStrike">
+                <a:solidFill>
+                  <a:srgbClr val="8b8b8b"/>
+                </a:solidFill>
+                <a:latin typeface="Calibri"/>
+                <a:ea typeface="DejaVu Sans"/>
+              </a:rPr>
+              <a:t>e</a:t>
+            </a:r>
+            <a:r>
+              <a:rPr b="0" lang="en-US" sz="3200" spc="-1" strike="noStrike">
+                <a:solidFill>
+                  <a:srgbClr val="8b8b8b"/>
+                </a:solidFill>
+                <a:latin typeface="Calibri"/>
+                <a:ea typeface="DejaVu Sans"/>
+              </a:rPr>
+              <a:t>n</a:t>
             </a:r>
             <a:endParaRPr b="0" lang="en-US" sz="3200" spc="-1" strike="noStrike">
               <a:latin typeface="Arial"/>
@@ -6485,7 +6115,7 @@
         <p:txBody>
           <a:bodyPr/>
           <a:p>
-            <a:fld id="{0C7B2584-0495-4091-91DC-E28B665FB9EE}" type="slidenum">
+            <a:fld id="{7C0B4696-38D8-4992-B5C7-6887AA0C091B}" type="slidenum">
               <a:t>1</a:t>
             </a:fld>
           </a:p>
@@ -6505,7 +6135,7 @@
         <p:txBody>
           <a:bodyPr/>
           <a:p>
-            <a:fld id="{17F7B04B-0A27-41F8-85CA-C58C439C6203}" type="datetime1">
+            <a:fld id="{0524DCBA-8827-4AF2-A708-752428B9F52D}" type="datetime1">
               <a:rPr lang="en-US"/>
               <a:t>07/04/2026</a:t>
             </a:fld>
@@ -8223,7 +7853,7 @@
               </a:lnSpc>
               <a:buNone/>
             </a:pPr>
-            <a:fld id="{0B9E5613-E17C-4992-9613-A963B0B29B63}" type="slidenum">
+            <a:fld id="{253B9DBB-7159-4AA6-A657-B6B4D5D86E91}" type="slidenum">
               <a:rPr b="0" lang="en-US" sz="1200" spc="-1" strike="noStrike">
                 <a:solidFill>
                   <a:srgbClr val="8b8b8b"/>
@@ -10761,40 +10391,7 @@
       </p:sp>
       <p:sp>
         <p:nvSpPr>
-          <p:cNvPr id="142" name="Straight Connector 1"/>
-          <p:cNvSpPr/>
-          <p:nvPr/>
-        </p:nvSpPr>
-        <p:spPr>
-          <a:xfrm flipH="1" flipV="1">
-            <a:off x="4754880" y="1838520"/>
-            <a:ext cx="394920" cy="180720"/>
-          </a:xfrm>
-          <a:prstGeom prst="line">
-            <a:avLst/>
-          </a:prstGeom>
-          <a:ln>
-            <a:solidFill>
-              <a:srgbClr val="4a7ebb"/>
-            </a:solidFill>
-          </a:ln>
-        </p:spPr>
-        <p:style>
-          <a:lnRef idx="1">
-            <a:schemeClr val="accent1"/>
-          </a:lnRef>
-          <a:fillRef idx="0">
-            <a:schemeClr val="accent1"/>
-          </a:fillRef>
-          <a:effectRef idx="0">
-            <a:schemeClr val="accent1"/>
-          </a:effectRef>
-          <a:fontRef idx="minor"/>
-        </p:style>
-      </p:sp>
-      <p:sp>
-        <p:nvSpPr>
-          <p:cNvPr id="143" name="Straight Arrow Connector 7"/>
+          <p:cNvPr id="142" name="Straight Arrow Connector 7"/>
           <p:cNvSpPr/>
           <p:nvPr/>
         </p:nvSpPr>
@@ -10843,7 +10440,7 @@
       </p:sp>
       <p:sp>
         <p:nvSpPr>
-          <p:cNvPr id="144" name="Rectangle 14"/>
+          <p:cNvPr id="143" name="Rectangle 14"/>
           <p:cNvSpPr/>
           <p:nvPr/>
         </p:nvSpPr>
@@ -10903,7 +10500,7 @@
       </p:sp>
       <p:grpSp>
         <p:nvGrpSpPr>
-          <p:cNvPr id="145" name=""/>
+          <p:cNvPr id="144" name=""/>
           <p:cNvGrpSpPr/>
           <p:nvPr/>
         </p:nvGrpSpPr>
@@ -10917,7 +10514,7 @@
         </p:grpSpPr>
         <p:sp>
           <p:nvSpPr>
-            <p:cNvPr id="146" name="Rectangle 118"/>
+            <p:cNvPr id="145" name="Rectangle 118"/>
             <p:cNvSpPr/>
             <p:nvPr/>
           </p:nvSpPr>
@@ -10955,7 +10552,7 @@
         </p:sp>
         <p:sp>
           <p:nvSpPr>
-            <p:cNvPr id="147" name=""/>
+            <p:cNvPr id="146" name=""/>
             <p:cNvSpPr/>
             <p:nvPr/>
           </p:nvSpPr>
@@ -10983,7 +10580,7 @@
         </p:sp>
         <p:sp>
           <p:nvSpPr>
-            <p:cNvPr id="148" name=""/>
+            <p:cNvPr id="147" name=""/>
             <p:cNvSpPr/>
             <p:nvPr/>
           </p:nvSpPr>
@@ -11011,7 +10608,7 @@
         </p:sp>
         <p:sp>
           <p:nvSpPr>
-            <p:cNvPr id="149" name=""/>
+            <p:cNvPr id="148" name=""/>
             <p:cNvSpPr/>
             <p:nvPr/>
           </p:nvSpPr>
@@ -11039,7 +10636,7 @@
         </p:sp>
         <p:sp>
           <p:nvSpPr>
-            <p:cNvPr id="150" name=""/>
+            <p:cNvPr id="149" name=""/>
             <p:cNvSpPr/>
             <p:nvPr/>
           </p:nvSpPr>
@@ -11067,7 +10664,7 @@
         </p:sp>
         <p:sp>
           <p:nvSpPr>
-            <p:cNvPr id="151" name=""/>
+            <p:cNvPr id="150" name=""/>
             <p:cNvSpPr/>
             <p:nvPr/>
           </p:nvSpPr>
@@ -11095,7 +10692,7 @@
         </p:sp>
         <p:sp>
           <p:nvSpPr>
-            <p:cNvPr id="152" name=""/>
+            <p:cNvPr id="151" name=""/>
             <p:cNvSpPr/>
             <p:nvPr/>
           </p:nvSpPr>
@@ -11123,7 +10720,7 @@
         </p:sp>
         <p:sp>
           <p:nvSpPr>
-            <p:cNvPr id="153" name=""/>
+            <p:cNvPr id="152" name=""/>
             <p:cNvSpPr/>
             <p:nvPr/>
           </p:nvSpPr>
@@ -11152,7 +10749,7 @@
       </p:grpSp>
       <p:sp>
         <p:nvSpPr>
-          <p:cNvPr id="154" name="Rectangle: Rounded Corners 1"/>
+          <p:cNvPr id="153" name="Rectangle: Rounded Corners 1"/>
           <p:cNvSpPr/>
           <p:nvPr/>
         </p:nvSpPr>
@@ -11218,7 +10815,7 @@
       </p:sp>
       <p:sp>
         <p:nvSpPr>
-          <p:cNvPr id="155" name="Rectangle 5"/>
+          <p:cNvPr id="154" name="Rectangle 5"/>
           <p:cNvSpPr/>
           <p:nvPr/>
         </p:nvSpPr>
@@ -11298,7 +10895,7 @@
       </p:sp>
       <p:sp>
         <p:nvSpPr>
-          <p:cNvPr id="156" name="Rectangle 15"/>
+          <p:cNvPr id="155" name="Rectangle 15"/>
           <p:cNvSpPr/>
           <p:nvPr/>
         </p:nvSpPr>
@@ -11367,7 +10964,7 @@
       </p:sp>
       <p:sp>
         <p:nvSpPr>
-          <p:cNvPr id="157" name="Rectangle: Rounded Corners 2"/>
+          <p:cNvPr id="156" name="Rectangle: Rounded Corners 2"/>
           <p:cNvSpPr/>
           <p:nvPr/>
         </p:nvSpPr>
@@ -11445,7 +11042,7 @@
         <p:txBody>
           <a:bodyPr/>
           <a:p>
-            <a:fld id="{DA0439B5-165F-45C9-9320-871AAC305D1C}" type="datetime1">
+            <a:fld id="{DD79248C-CF69-49FF-8DBE-5067376580BB}" type="datetime1">
               <a:rPr lang="en-US"/>
               <a:t>07/04/2026</a:t>
             </a:fld>
@@ -11484,7 +11081,7 @@
       </p:grpSpPr>
       <p:sp>
         <p:nvSpPr>
-          <p:cNvPr id="158" name="PlaceHolder 1"/>
+          <p:cNvPr id="157" name="PlaceHolder 1"/>
           <p:cNvSpPr>
             <a:spLocks noGrp="1"/>
           </p:cNvSpPr>
@@ -11556,7 +11153,7 @@
         <p:txBody>
           <a:bodyPr/>
           <a:p>
-            <a:fld id="{64807F0A-8CCF-4323-837B-EF13F64C343D}" type="slidenum">
+            <a:fld id="{741B98DF-AAEC-4C71-8325-09C408FBB20A}" type="slidenum">
               <a:t>3</a:t>
             </a:fld>
           </a:p>
@@ -11576,7 +11173,7 @@
         <p:txBody>
           <a:bodyPr/>
           <a:p>
-            <a:fld id="{1A931DE9-B7F5-4584-98E6-A5513E753BA4}" type="datetime1">
+            <a:fld id="{BD19E276-53ED-430F-AC4D-0C990E895988}" type="datetime1">
               <a:rPr lang="en-US"/>
               <a:t>07/04/2026</a:t>
             </a:fld>

--- a/Palo_Alto_2581/000_PaloAlto_Shed.pptx
+++ b/Palo_Alto_2581/000_PaloAlto_Shed.pptx
@@ -70,7 +70,79 @@
               <a:rPr b="0" lang="en-US" sz="4400" spc="-1" strike="noStrike">
                 <a:latin typeface="Arial"/>
               </a:rPr>
-              <a:t>Click to move the slide</a:t>
+              <a:t>Cl</a:t>
+            </a:r>
+            <a:r>
+              <a:rPr b="0" lang="en-US" sz="4400" spc="-1" strike="noStrike">
+                <a:latin typeface="Arial"/>
+              </a:rPr>
+              <a:t>ic</a:t>
+            </a:r>
+            <a:r>
+              <a:rPr b="0" lang="en-US" sz="4400" spc="-1" strike="noStrike">
+                <a:latin typeface="Arial"/>
+              </a:rPr>
+              <a:t>k </a:t>
+            </a:r>
+            <a:r>
+              <a:rPr b="0" lang="en-US" sz="4400" spc="-1" strike="noStrike">
+                <a:latin typeface="Arial"/>
+              </a:rPr>
+              <a:t>to </a:t>
+            </a:r>
+            <a:r>
+              <a:rPr b="0" lang="en-US" sz="4400" spc="-1" strike="noStrike">
+                <a:latin typeface="Arial"/>
+              </a:rPr>
+              <a:t>m</a:t>
+            </a:r>
+            <a:r>
+              <a:rPr b="0" lang="en-US" sz="4400" spc="-1" strike="noStrike">
+                <a:latin typeface="Arial"/>
+              </a:rPr>
+              <a:t>o</a:t>
+            </a:r>
+            <a:r>
+              <a:rPr b="0" lang="en-US" sz="4400" spc="-1" strike="noStrike">
+                <a:latin typeface="Arial"/>
+              </a:rPr>
+              <a:t>v</a:t>
+            </a:r>
+            <a:r>
+              <a:rPr b="0" lang="en-US" sz="4400" spc="-1" strike="noStrike">
+                <a:latin typeface="Arial"/>
+              </a:rPr>
+              <a:t>e </a:t>
+            </a:r>
+            <a:r>
+              <a:rPr b="0" lang="en-US" sz="4400" spc="-1" strike="noStrike">
+                <a:latin typeface="Arial"/>
+              </a:rPr>
+              <a:t>th</a:t>
+            </a:r>
+            <a:r>
+              <a:rPr b="0" lang="en-US" sz="4400" spc="-1" strike="noStrike">
+                <a:latin typeface="Arial"/>
+              </a:rPr>
+              <a:t>e </a:t>
+            </a:r>
+            <a:r>
+              <a:rPr b="0" lang="en-US" sz="4400" spc="-1" strike="noStrike">
+                <a:latin typeface="Arial"/>
+              </a:rPr>
+              <a:t>sli</a:t>
+            </a:r>
+            <a:r>
+              <a:rPr b="0" lang="en-US" sz="4400" spc="-1" strike="noStrike">
+                <a:latin typeface="Arial"/>
+              </a:rPr>
+              <a:t>d</a:t>
+            </a:r>
+            <a:r>
+              <a:rPr b="0" lang="en-US" sz="4400" spc="-1" strike="noStrike">
+                <a:latin typeface="Arial"/>
+              </a:rPr>
+              <a:t>e</a:t>
             </a:r>
             <a:endParaRPr b="0" lang="en-US" sz="4400" spc="-1" strike="noStrike">
               <a:latin typeface="Arial"/>
@@ -110,7 +182,79 @@
               <a:rPr b="0" lang="en-US" sz="2000" spc="-1" strike="noStrike">
                 <a:latin typeface="Arial"/>
               </a:rPr>
-              <a:t>Click to edit the notes format</a:t>
+              <a:t>Clic</a:t>
+            </a:r>
+            <a:r>
+              <a:rPr b="0" lang="en-US" sz="2000" spc="-1" strike="noStrike">
+                <a:latin typeface="Arial"/>
+              </a:rPr>
+              <a:t>k </a:t>
+            </a:r>
+            <a:r>
+              <a:rPr b="0" lang="en-US" sz="2000" spc="-1" strike="noStrike">
+                <a:latin typeface="Arial"/>
+              </a:rPr>
+              <a:t>to </a:t>
+            </a:r>
+            <a:r>
+              <a:rPr b="0" lang="en-US" sz="2000" spc="-1" strike="noStrike">
+                <a:latin typeface="Arial"/>
+              </a:rPr>
+              <a:t>ed</a:t>
+            </a:r>
+            <a:r>
+              <a:rPr b="0" lang="en-US" sz="2000" spc="-1" strike="noStrike">
+                <a:latin typeface="Arial"/>
+              </a:rPr>
+              <a:t>it </a:t>
+            </a:r>
+            <a:r>
+              <a:rPr b="0" lang="en-US" sz="2000" spc="-1" strike="noStrike">
+                <a:latin typeface="Arial"/>
+              </a:rPr>
+              <a:t>th</a:t>
+            </a:r>
+            <a:r>
+              <a:rPr b="0" lang="en-US" sz="2000" spc="-1" strike="noStrike">
+                <a:latin typeface="Arial"/>
+              </a:rPr>
+              <a:t>e </a:t>
+            </a:r>
+            <a:r>
+              <a:rPr b="0" lang="en-US" sz="2000" spc="-1" strike="noStrike">
+                <a:latin typeface="Arial"/>
+              </a:rPr>
+              <a:t>no</a:t>
+            </a:r>
+            <a:r>
+              <a:rPr b="0" lang="en-US" sz="2000" spc="-1" strike="noStrike">
+                <a:latin typeface="Arial"/>
+              </a:rPr>
+              <a:t>te</a:t>
+            </a:r>
+            <a:r>
+              <a:rPr b="0" lang="en-US" sz="2000" spc="-1" strike="noStrike">
+                <a:latin typeface="Arial"/>
+              </a:rPr>
+              <a:t>s </a:t>
+            </a:r>
+            <a:r>
+              <a:rPr b="0" lang="en-US" sz="2000" spc="-1" strike="noStrike">
+                <a:latin typeface="Arial"/>
+              </a:rPr>
+              <a:t>for</a:t>
+            </a:r>
+            <a:r>
+              <a:rPr b="0" lang="en-US" sz="2000" spc="-1" strike="noStrike">
+                <a:latin typeface="Arial"/>
+              </a:rPr>
+              <a:t>m</a:t>
+            </a:r>
+            <a:r>
+              <a:rPr b="0" lang="en-US" sz="2000" spc="-1" strike="noStrike">
+                <a:latin typeface="Arial"/>
+              </a:rPr>
+              <a:t>at</a:t>
             </a:r>
             <a:endParaRPr b="0" lang="en-US" sz="2000" spc="-1" strike="noStrike">
               <a:latin typeface="Arial"/>
@@ -295,7 +439,7 @@
             <a:pPr algn="r">
               <a:buNone/>
             </a:pPr>
-            <a:fld id="{858E3D8B-F501-46EF-AF4B-C3E0235A1265}" type="slidenum">
+            <a:fld id="{BB721B22-5384-45CF-88A3-F7E227EF8863}" type="slidenum">
               <a:rPr b="0" lang="en-US" sz="1400" spc="-1" strike="noStrike">
                 <a:latin typeface="Times New Roman"/>
               </a:rPr>
@@ -332,7 +476,7 @@
       </p:grpSpPr>
       <p:sp>
         <p:nvSpPr>
-          <p:cNvPr id="158" name="PlaceHolder 1"/>
+          <p:cNvPr id="140" name="PlaceHolder 1"/>
           <p:cNvSpPr>
             <a:spLocks noGrp="1"/>
           </p:cNvSpPr>
@@ -343,19 +487,19 @@
         <p:spPr>
           <a:xfrm>
             <a:off x="1143000" y="685800"/>
-            <a:ext cx="4534920" cy="3391920"/>
-          </a:xfrm>
-          <a:prstGeom prst="rect">
-            <a:avLst/>
-          </a:prstGeom>
-          <a:ln w="0">
-            <a:noFill/>
-          </a:ln>
-        </p:spPr>
-      </p:sp>
-      <p:sp>
-        <p:nvSpPr>
-          <p:cNvPr id="159" name="PlaceHolder 2"/>
+            <a:ext cx="4534560" cy="3391560"/>
+          </a:xfrm>
+          <a:prstGeom prst="rect">
+            <a:avLst/>
+          </a:prstGeom>
+          <a:ln w="0">
+            <a:noFill/>
+          </a:ln>
+        </p:spPr>
+      </p:sp>
+      <p:sp>
+        <p:nvSpPr>
+          <p:cNvPr id="141" name="PlaceHolder 2"/>
           <p:cNvSpPr>
             <a:spLocks noGrp="1"/>
           </p:cNvSpPr>
@@ -366,7 +510,7 @@
         <p:spPr>
           <a:xfrm>
             <a:off x="685800" y="4343400"/>
-            <a:ext cx="5448960" cy="4077360"/>
+            <a:ext cx="5448600" cy="4077000"/>
           </a:xfrm>
           <a:prstGeom prst="rect">
             <a:avLst/>
@@ -389,7 +533,7 @@
       </p:sp>
       <p:sp>
         <p:nvSpPr>
-          <p:cNvPr id="160" name="PlaceHolder 3"/>
+          <p:cNvPr id="142" name="PlaceHolder 3"/>
           <p:cNvSpPr>
             <a:spLocks noGrp="1"/>
           </p:cNvSpPr>
@@ -400,7 +544,7 @@
         <p:spPr>
           <a:xfrm>
             <a:off x="3884760" y="8685360"/>
-            <a:ext cx="2934360" cy="419760"/>
+            <a:ext cx="2934000" cy="419400"/>
           </a:xfrm>
           <a:prstGeom prst="rect">
             <a:avLst/>
@@ -436,7 +580,7 @@
               </a:lnSpc>
               <a:buNone/>
             </a:pPr>
-            <a:fld id="{B004A739-7BB9-47E1-B5F6-947D9AAB51C3}" type="slidenum">
+            <a:fld id="{350CA86F-25F5-4375-96AE-4F3A19BF26C9}" type="slidenum">
               <a:rPr b="0" lang="en-US" sz="1200" spc="-1" strike="noStrike">
                 <a:solidFill>
                   <a:srgbClr val="000000"/>
@@ -508,7 +652,7 @@
         <p:txBody>
           <a:bodyPr/>
           <a:p>
-            <a:fld id="{552F79DA-DA70-448D-82B5-ED13A0F897C6}" type="slidenum">
+            <a:fld id="{F1D8DD4C-2E1D-42CB-AAF6-90DE07C4EE58}" type="slidenum">
               <a:t>&lt;#&gt;</a:t>
             </a:fld>
           </a:p>
@@ -696,7 +840,7 @@
         <p:txBody>
           <a:bodyPr/>
           <a:p>
-            <a:fld id="{2A0ABFC0-8924-46CF-AF9C-5C61D55BBD2F}" type="slidenum">
+            <a:fld id="{0FEB7A8A-BB4D-4E13-9BD4-AB5BFC7EA373}" type="slidenum">
               <a:t>&lt;#&gt;</a:t>
             </a:fld>
           </a:p>
@@ -952,7 +1096,7 @@
         <p:txBody>
           <a:bodyPr/>
           <a:p>
-            <a:fld id="{994B0858-19ED-44E1-A81A-29F99AE34AD9}" type="slidenum">
+            <a:fld id="{5F41C09A-6975-4342-A462-E0DABF504666}" type="slidenum">
               <a:t>&lt;#&gt;</a:t>
             </a:fld>
           </a:p>
@@ -1276,7 +1420,7 @@
         <p:txBody>
           <a:bodyPr/>
           <a:p>
-            <a:fld id="{8854C7F9-9E6B-4944-96E8-2D6265EDD3D7}" type="slidenum">
+            <a:fld id="{026B5627-FBE8-41C9-BD49-A6C28CCED581}" type="slidenum">
               <a:t>&lt;#&gt;</a:t>
             </a:fld>
           </a:p>
@@ -1359,7 +1503,7 @@
         <p:txBody>
           <a:bodyPr/>
           <a:p>
-            <a:fld id="{B0921ADB-24AE-4ED8-99DA-B8A3EB28D3B8}" type="slidenum">
+            <a:fld id="{AFF80218-D5B7-47ED-8A00-E7D6F9FDD2A2}" type="slidenum">
               <a:t>&lt;#&gt;</a:t>
             </a:fld>
           </a:p>
@@ -1516,7 +1660,7 @@
         <p:txBody>
           <a:bodyPr/>
           <a:p>
-            <a:fld id="{A455DE1D-B453-4773-A812-DEE67820C99A}" type="slidenum">
+            <a:fld id="{66A37E99-A83F-444E-81BE-2A3B5FFA7A11}" type="slidenum">
               <a:t>&lt;#&gt;</a:t>
             </a:fld>
           </a:p>
@@ -1670,7 +1814,7 @@
         <p:txBody>
           <a:bodyPr/>
           <a:p>
-            <a:fld id="{525EE603-AF52-4B38-BB4E-19AD7FD292F6}" type="slidenum">
+            <a:fld id="{0C87C842-0A92-4A40-8636-A89A62E597E5}" type="slidenum">
               <a:t>&lt;#&gt;</a:t>
             </a:fld>
           </a:p>
@@ -1858,7 +2002,7 @@
         <p:txBody>
           <a:bodyPr/>
           <a:p>
-            <a:fld id="{BA4E757E-0A43-426F-89AB-99CDAF260EF9}" type="slidenum">
+            <a:fld id="{0D630A25-1B73-48D0-94E0-B524281E02E1}" type="slidenum">
               <a:t>&lt;#&gt;</a:t>
             </a:fld>
           </a:p>
@@ -1978,7 +2122,7 @@
         <p:txBody>
           <a:bodyPr/>
           <a:p>
-            <a:fld id="{2286AC2B-7767-4F1B-B995-D63CEF7CBA83}" type="slidenum">
+            <a:fld id="{AA55A547-E485-4443-9994-352BB4E0A109}" type="slidenum">
               <a:t>&lt;#&gt;</a:t>
             </a:fld>
           </a:p>
@@ -2098,7 +2242,7 @@
         <p:txBody>
           <a:bodyPr/>
           <a:p>
-            <a:fld id="{EEA2FA04-0DAC-4398-98A8-55E3CEE91E23}" type="slidenum">
+            <a:fld id="{2572F555-253E-46AC-AC83-4984484E592E}" type="slidenum">
               <a:t>&lt;#&gt;</a:t>
             </a:fld>
           </a:p>
@@ -2320,7 +2464,7 @@
         <p:txBody>
           <a:bodyPr/>
           <a:p>
-            <a:fld id="{880031CA-ADBB-4088-BCBA-445918838351}" type="slidenum">
+            <a:fld id="{A3B4B267-6DB9-4C9A-ABE7-E101360A0673}" type="slidenum">
               <a:t>&lt;#&gt;</a:t>
             </a:fld>
           </a:p>
@@ -2477,7 +2621,7 @@
         <p:txBody>
           <a:bodyPr/>
           <a:p>
-            <a:fld id="{206DA6B3-39C6-4D18-8C63-9C7E057C54B6}" type="slidenum">
+            <a:fld id="{3434B1D3-8D2F-4970-BA24-3A506B3B5A1A}" type="slidenum">
               <a:t>&lt;#&gt;</a:t>
             </a:fld>
           </a:p>
@@ -2699,7 +2843,7 @@
         <p:txBody>
           <a:bodyPr/>
           <a:p>
-            <a:fld id="{4F977904-0151-4461-9BA5-69327EF6AAA8}" type="slidenum">
+            <a:fld id="{1245F826-CBBA-4F60-BAF4-929E10F1AE0B}" type="slidenum">
               <a:t>&lt;#&gt;</a:t>
             </a:fld>
           </a:p>
@@ -2921,7 +3065,7 @@
         <p:txBody>
           <a:bodyPr/>
           <a:p>
-            <a:fld id="{68AA198B-BEFE-4E91-87B8-C9125B1F046A}" type="slidenum">
+            <a:fld id="{EE85422A-C0CB-4493-8E7F-D31CD18CDE09}" type="slidenum">
               <a:t>&lt;#&gt;</a:t>
             </a:fld>
           </a:p>
@@ -3109,7 +3253,7 @@
         <p:txBody>
           <a:bodyPr/>
           <a:p>
-            <a:fld id="{6EEE1387-C878-4EE0-8BF6-73042D9DEAB9}" type="slidenum">
+            <a:fld id="{A3AA3348-36F4-4454-A1E4-DA16E1DE60B1}" type="slidenum">
               <a:t>&lt;#&gt;</a:t>
             </a:fld>
           </a:p>
@@ -3365,7 +3509,7 @@
         <p:txBody>
           <a:bodyPr/>
           <a:p>
-            <a:fld id="{454D67EF-04AD-4E9F-AA0E-C8CA134F6282}" type="slidenum">
+            <a:fld id="{6600D10A-4ECD-4D71-A907-2815565ED2D1}" type="slidenum">
               <a:t>&lt;#&gt;</a:t>
             </a:fld>
           </a:p>
@@ -3689,7 +3833,7 @@
         <p:txBody>
           <a:bodyPr/>
           <a:p>
-            <a:fld id="{317032CE-3816-42DC-966C-1B61C30D2014}" type="slidenum">
+            <a:fld id="{D3B5D67C-5584-4655-9704-DD4E28491704}" type="slidenum">
               <a:t>&lt;#&gt;</a:t>
             </a:fld>
           </a:p>
@@ -3843,7 +3987,7 @@
         <p:txBody>
           <a:bodyPr/>
           <a:p>
-            <a:fld id="{A67AC274-A480-4A06-9DC2-974769CDCD52}" type="slidenum">
+            <a:fld id="{D56A0796-862E-496D-B15C-934F8FD3DCE4}" type="slidenum">
               <a:t>&lt;#&gt;</a:t>
             </a:fld>
           </a:p>
@@ -4031,7 +4175,7 @@
         <p:txBody>
           <a:bodyPr/>
           <a:p>
-            <a:fld id="{92DEF76E-004E-47DA-A223-656F67A01C32}" type="slidenum">
+            <a:fld id="{76E6BE0C-CD98-4578-BC55-A41629712E13}" type="slidenum">
               <a:t>&lt;#&gt;</a:t>
             </a:fld>
           </a:p>
@@ -4151,7 +4295,7 @@
         <p:txBody>
           <a:bodyPr/>
           <a:p>
-            <a:fld id="{B3E05686-9449-4F66-B067-4267787A02BC}" type="slidenum">
+            <a:fld id="{CCB96057-E178-4CF3-9DCA-746CC8FDC870}" type="slidenum">
               <a:t>&lt;#&gt;</a:t>
             </a:fld>
           </a:p>
@@ -4271,7 +4415,7 @@
         <p:txBody>
           <a:bodyPr/>
           <a:p>
-            <a:fld id="{5AE4B2B4-4F5A-4EBE-8524-0243E0237035}" type="slidenum">
+            <a:fld id="{8A3C1584-A97F-41CE-99D8-E695EE29000C}" type="slidenum">
               <a:t>&lt;#&gt;</a:t>
             </a:fld>
           </a:p>
@@ -4493,7 +4637,7 @@
         <p:txBody>
           <a:bodyPr/>
           <a:p>
-            <a:fld id="{5386E704-DA27-43EC-BEC2-516C7D03A761}" type="slidenum">
+            <a:fld id="{A046E37A-6700-499F-BAF8-7C434F450A8D}" type="slidenum">
               <a:t>&lt;#&gt;</a:t>
             </a:fld>
           </a:p>
@@ -4715,7 +4859,7 @@
         <p:txBody>
           <a:bodyPr/>
           <a:p>
-            <a:fld id="{9FFC7342-2427-4961-8778-5482BDE95F1C}" type="slidenum">
+            <a:fld id="{F2C5E58A-A5EC-4DE1-BEC7-B660EAB42B4E}" type="slidenum">
               <a:t>&lt;#&gt;</a:t>
             </a:fld>
           </a:p>
@@ -4937,7 +5081,7 @@
         <p:txBody>
           <a:bodyPr/>
           <a:p>
-            <a:fld id="{D3798AF9-9701-49B5-A27A-072E30E7E294}" type="slidenum">
+            <a:fld id="{B68E9ED8-5455-40C2-B254-45644D30EAAA}" type="slidenum">
               <a:t>&lt;#&gt;</a:t>
             </a:fld>
           </a:p>
@@ -5006,7 +5150,7 @@
         <p:spPr>
           <a:xfrm>
             <a:off x="3124080" y="6356520"/>
-            <a:ext cx="2858040" cy="327600"/>
+            <a:ext cx="2857680" cy="327240"/>
           </a:xfrm>
           <a:prstGeom prst="rect">
             <a:avLst/>
@@ -5050,7 +5194,7 @@
                 <a:latin typeface="Times New Roman"/>
                 <a:ea typeface="DejaVu Sans"/>
               </a:rPr>
-              <a:t>&lt;footer&gt;</a:t>
+              <a:t> </a:t>
             </a:r>
             <a:endParaRPr b="0" lang="en-US" sz="1400" spc="-1" strike="noStrike">
               <a:latin typeface="Times New Roman"/>
@@ -5071,7 +5215,7 @@
         <p:spPr>
           <a:xfrm>
             <a:off x="6553080" y="6356520"/>
-            <a:ext cx="2096280" cy="327600"/>
+            <a:ext cx="2095920" cy="327240"/>
           </a:xfrm>
           <a:prstGeom prst="rect">
             <a:avLst/>
@@ -5107,7 +5251,7 @@
               </a:lnSpc>
               <a:buNone/>
             </a:pPr>
-            <a:fld id="{FA37E9D5-795E-440B-BB67-B086AA93E233}" type="slidenum">
+            <a:fld id="{46F7384A-81B6-4C1B-B39C-8AD70774BDD8}" type="slidenum">
               <a:rPr b="0" lang="en-US" sz="1200" spc="-1" strike="noStrike">
                 <a:solidFill>
                   <a:srgbClr val="8b8b8b"/>
@@ -5115,7 +5259,7 @@
                 <a:latin typeface="Calibri"/>
                 <a:ea typeface="DejaVu Sans"/>
               </a:rPr>
-              <a:t>&lt;number&gt;</a:t>
+              <a:t>2</a:t>
             </a:fld>
             <a:endParaRPr b="0" lang="en-US" sz="1200" spc="-1" strike="noStrike">
               <a:latin typeface="Times New Roman"/>
@@ -5136,7 +5280,7 @@
         <p:spPr>
           <a:xfrm>
             <a:off x="457200" y="6356520"/>
-            <a:ext cx="2096280" cy="327600"/>
+            <a:ext cx="2095920" cy="327240"/>
           </a:xfrm>
           <a:prstGeom prst="rect">
             <a:avLst/>
@@ -5162,7 +5306,7 @@
               <a:rPr b="0" lang="en-US" sz="1400" spc="-1" strike="noStrike">
                 <a:latin typeface="Times New Roman"/>
               </a:rPr>
-              <a:t>&lt;date/time&gt;</a:t>
+              <a:t>07/04/2026</a:t>
             </a:r>
             <a:endParaRPr b="0" lang="en-US" sz="1400" spc="-1" strike="noStrike">
               <a:latin typeface="Times New Roman"/>
@@ -5453,7 +5597,7 @@
         <p:spPr>
           <a:xfrm>
             <a:off x="3124080" y="6356520"/>
-            <a:ext cx="2858040" cy="327600"/>
+            <a:ext cx="2857680" cy="327240"/>
           </a:xfrm>
           <a:prstGeom prst="rect">
             <a:avLst/>
@@ -5518,7 +5662,7 @@
         <p:spPr>
           <a:xfrm>
             <a:off x="6553080" y="6356520"/>
-            <a:ext cx="2096280" cy="327600"/>
+            <a:ext cx="2095920" cy="327240"/>
           </a:xfrm>
           <a:prstGeom prst="rect">
             <a:avLst/>
@@ -5554,7 +5698,7 @@
               </a:lnSpc>
               <a:buNone/>
             </a:pPr>
-            <a:fld id="{2A314F12-58AE-4DA6-B634-AF35D98D663C}" type="slidenum">
+            <a:fld id="{5CBF1C53-2726-43DA-91A5-F22D9D360999}" type="slidenum">
               <a:rPr b="0" lang="en-US" sz="1200" spc="-1" strike="noStrike">
                 <a:solidFill>
                   <a:srgbClr val="8b8b8b"/>
@@ -5583,7 +5727,7 @@
         <p:spPr>
           <a:xfrm>
             <a:off x="457200" y="6356520"/>
-            <a:ext cx="2096280" cy="327600"/>
+            <a:ext cx="2095920" cy="327240"/>
           </a:xfrm>
           <a:prstGeom prst="rect">
             <a:avLst/>
@@ -5652,7 +5796,199 @@
               <a:rPr b="0" lang="en-US" sz="4400" spc="-1" strike="noStrike">
                 <a:latin typeface="Arial"/>
               </a:rPr>
-              <a:t>Click to edit the title text format</a:t>
+              <a:t>C</a:t>
+            </a:r>
+            <a:r>
+              <a:rPr b="0" lang="en-US" sz="4400" spc="-1" strike="noStrike">
+                <a:latin typeface="Arial"/>
+              </a:rPr>
+              <a:t>l</a:t>
+            </a:r>
+            <a:r>
+              <a:rPr b="0" lang="en-US" sz="4400" spc="-1" strike="noStrike">
+                <a:latin typeface="Arial"/>
+              </a:rPr>
+              <a:t>i</a:t>
+            </a:r>
+            <a:r>
+              <a:rPr b="0" lang="en-US" sz="4400" spc="-1" strike="noStrike">
+                <a:latin typeface="Arial"/>
+              </a:rPr>
+              <a:t>c</a:t>
+            </a:r>
+            <a:r>
+              <a:rPr b="0" lang="en-US" sz="4400" spc="-1" strike="noStrike">
+                <a:latin typeface="Arial"/>
+              </a:rPr>
+              <a:t>k</a:t>
+            </a:r>
+            <a:r>
+              <a:rPr b="0" lang="en-US" sz="4400" spc="-1" strike="noStrike">
+                <a:latin typeface="Arial"/>
+              </a:rPr>
+              <a:t> </a:t>
+            </a:r>
+            <a:r>
+              <a:rPr b="0" lang="en-US" sz="4400" spc="-1" strike="noStrike">
+                <a:latin typeface="Arial"/>
+              </a:rPr>
+              <a:t>t</a:t>
+            </a:r>
+            <a:r>
+              <a:rPr b="0" lang="en-US" sz="4400" spc="-1" strike="noStrike">
+                <a:latin typeface="Arial"/>
+              </a:rPr>
+              <a:t>o</a:t>
+            </a:r>
+            <a:r>
+              <a:rPr b="0" lang="en-US" sz="4400" spc="-1" strike="noStrike">
+                <a:latin typeface="Arial"/>
+              </a:rPr>
+              <a:t> </a:t>
+            </a:r>
+            <a:r>
+              <a:rPr b="0" lang="en-US" sz="4400" spc="-1" strike="noStrike">
+                <a:latin typeface="Arial"/>
+              </a:rPr>
+              <a:t>e</a:t>
+            </a:r>
+            <a:r>
+              <a:rPr b="0" lang="en-US" sz="4400" spc="-1" strike="noStrike">
+                <a:latin typeface="Arial"/>
+              </a:rPr>
+              <a:t>d</a:t>
+            </a:r>
+            <a:r>
+              <a:rPr b="0" lang="en-US" sz="4400" spc="-1" strike="noStrike">
+                <a:latin typeface="Arial"/>
+              </a:rPr>
+              <a:t>i</a:t>
+            </a:r>
+            <a:r>
+              <a:rPr b="0" lang="en-US" sz="4400" spc="-1" strike="noStrike">
+                <a:latin typeface="Arial"/>
+              </a:rPr>
+              <a:t>t </a:t>
+            </a:r>
+            <a:r>
+              <a:rPr b="0" lang="en-US" sz="4400" spc="-1" strike="noStrike">
+                <a:latin typeface="Arial"/>
+              </a:rPr>
+              <a:t>t</a:t>
+            </a:r>
+            <a:r>
+              <a:rPr b="0" lang="en-US" sz="4400" spc="-1" strike="noStrike">
+                <a:latin typeface="Arial"/>
+              </a:rPr>
+              <a:t>h</a:t>
+            </a:r>
+            <a:r>
+              <a:rPr b="0" lang="en-US" sz="4400" spc="-1" strike="noStrike">
+                <a:latin typeface="Arial"/>
+              </a:rPr>
+              <a:t>e</a:t>
+            </a:r>
+            <a:r>
+              <a:rPr b="0" lang="en-US" sz="4400" spc="-1" strike="noStrike">
+                <a:latin typeface="Arial"/>
+              </a:rPr>
+              <a:t> </a:t>
+            </a:r>
+            <a:r>
+              <a:rPr b="0" lang="en-US" sz="4400" spc="-1" strike="noStrike">
+                <a:latin typeface="Arial"/>
+              </a:rPr>
+              <a:t>t</a:t>
+            </a:r>
+            <a:r>
+              <a:rPr b="0" lang="en-US" sz="4400" spc="-1" strike="noStrike">
+                <a:latin typeface="Arial"/>
+              </a:rPr>
+              <a:t>i</a:t>
+            </a:r>
+            <a:r>
+              <a:rPr b="0" lang="en-US" sz="4400" spc="-1" strike="noStrike">
+                <a:latin typeface="Arial"/>
+              </a:rPr>
+              <a:t>t</a:t>
+            </a:r>
+            <a:r>
+              <a:rPr b="0" lang="en-US" sz="4400" spc="-1" strike="noStrike">
+                <a:latin typeface="Arial"/>
+              </a:rPr>
+              <a:t>l</a:t>
+            </a:r>
+            <a:r>
+              <a:rPr b="0" lang="en-US" sz="4400" spc="-1" strike="noStrike">
+                <a:latin typeface="Arial"/>
+              </a:rPr>
+              <a:t>e</a:t>
+            </a:r>
+            <a:r>
+              <a:rPr b="0" lang="en-US" sz="4400" spc="-1" strike="noStrike">
+                <a:latin typeface="Arial"/>
+              </a:rPr>
+              <a:t> </a:t>
+            </a:r>
+            <a:r>
+              <a:rPr b="0" lang="en-US" sz="4400" spc="-1" strike="noStrike">
+                <a:latin typeface="Arial"/>
+              </a:rPr>
+              <a:t>t</a:t>
+            </a:r>
+            <a:r>
+              <a:rPr b="0" lang="en-US" sz="4400" spc="-1" strike="noStrike">
+                <a:latin typeface="Arial"/>
+              </a:rPr>
+              <a:t>e</a:t>
+            </a:r>
+            <a:r>
+              <a:rPr b="0" lang="en-US" sz="4400" spc="-1" strike="noStrike">
+                <a:latin typeface="Arial"/>
+              </a:rPr>
+              <a:t>x</a:t>
+            </a:r>
+            <a:r>
+              <a:rPr b="0" lang="en-US" sz="4400" spc="-1" strike="noStrike">
+                <a:latin typeface="Arial"/>
+              </a:rPr>
+              <a:t>t </a:t>
+            </a:r>
+            <a:r>
+              <a:rPr b="0" lang="en-US" sz="4400" spc="-1" strike="noStrike">
+                <a:latin typeface="Arial"/>
+              </a:rPr>
+              <a:t>f</a:t>
+            </a:r>
+            <a:r>
+              <a:rPr b="0" lang="en-US" sz="4400" spc="-1" strike="noStrike">
+                <a:latin typeface="Arial"/>
+              </a:rPr>
+              <a:t>o</a:t>
+            </a:r>
+            <a:r>
+              <a:rPr b="0" lang="en-US" sz="4400" spc="-1" strike="noStrike">
+                <a:latin typeface="Arial"/>
+              </a:rPr>
+              <a:t>r</a:t>
+            </a:r>
+            <a:r>
+              <a:rPr b="0" lang="en-US" sz="4400" spc="-1" strike="noStrike">
+                <a:latin typeface="Arial"/>
+              </a:rPr>
+              <a:t>m</a:t>
+            </a:r>
+            <a:r>
+              <a:rPr b="0" lang="en-US" sz="4400" spc="-1" strike="noStrike">
+                <a:latin typeface="Arial"/>
+              </a:rPr>
+              <a:t>a</a:t>
+            </a:r>
+            <a:r>
+              <a:rPr b="0" lang="en-US" sz="4400" spc="-1" strike="noStrike">
+                <a:latin typeface="Arial"/>
+              </a:rPr>
+              <a:t>t</a:t>
             </a:r>
             <a:endParaRPr b="0" lang="en-US" sz="4400" spc="-1" strike="noStrike">
               <a:latin typeface="Arial"/>
@@ -5893,7 +6229,7 @@
         <p:spPr>
           <a:xfrm>
             <a:off x="0" y="2130480"/>
-            <a:ext cx="9126360" cy="1432440"/>
+            <a:ext cx="9126000" cy="1432080"/>
           </a:xfrm>
           <a:prstGeom prst="rect">
             <a:avLst/>
@@ -5924,7 +6260,247 @@
                 <a:latin typeface="Calibri"/>
                 <a:ea typeface="DejaVu Sans"/>
               </a:rPr>
-              <a:t>001 Palo Alto 2581 - 2587</a:t>
+              <a:t>0</a:t>
+            </a:r>
+            <a:r>
+              <a:rPr b="1" lang="en-US" sz="4200" spc="-1" strike="noStrike">
+                <a:solidFill>
+                  <a:srgbClr val="ffff00"/>
+                </a:solidFill>
+                <a:latin typeface="Calibri"/>
+                <a:ea typeface="DejaVu Sans"/>
+              </a:rPr>
+              <a:t>0</a:t>
+            </a:r>
+            <a:r>
+              <a:rPr b="1" lang="en-US" sz="4200" spc="-1" strike="noStrike">
+                <a:solidFill>
+                  <a:srgbClr val="ffff00"/>
+                </a:solidFill>
+                <a:latin typeface="Calibri"/>
+                <a:ea typeface="DejaVu Sans"/>
+              </a:rPr>
+              <a:t>1</a:t>
+            </a:r>
+            <a:r>
+              <a:rPr b="1" lang="en-US" sz="4200" spc="-1" strike="noStrike">
+                <a:solidFill>
+                  <a:srgbClr val="ffff00"/>
+                </a:solidFill>
+                <a:latin typeface="Calibri"/>
+                <a:ea typeface="DejaVu Sans"/>
+              </a:rPr>
+              <a:t> </a:t>
+            </a:r>
+            <a:r>
+              <a:rPr b="1" lang="en-US" sz="4200" spc="-1" strike="noStrike">
+                <a:solidFill>
+                  <a:srgbClr val="ffff00"/>
+                </a:solidFill>
+                <a:latin typeface="Calibri"/>
+                <a:ea typeface="DejaVu Sans"/>
+              </a:rPr>
+              <a:t>P</a:t>
+            </a:r>
+            <a:r>
+              <a:rPr b="1" lang="en-US" sz="4200" spc="-1" strike="noStrike">
+                <a:solidFill>
+                  <a:srgbClr val="ffff00"/>
+                </a:solidFill>
+                <a:latin typeface="Calibri"/>
+                <a:ea typeface="DejaVu Sans"/>
+              </a:rPr>
+              <a:t>a</a:t>
+            </a:r>
+            <a:r>
+              <a:rPr b="1" lang="en-US" sz="4200" spc="-1" strike="noStrike">
+                <a:solidFill>
+                  <a:srgbClr val="ffff00"/>
+                </a:solidFill>
+                <a:latin typeface="Calibri"/>
+                <a:ea typeface="DejaVu Sans"/>
+              </a:rPr>
+              <a:t>l</a:t>
+            </a:r>
+            <a:r>
+              <a:rPr b="1" lang="en-US" sz="4200" spc="-1" strike="noStrike">
+                <a:solidFill>
+                  <a:srgbClr val="ffff00"/>
+                </a:solidFill>
+                <a:latin typeface="Calibri"/>
+                <a:ea typeface="DejaVu Sans"/>
+              </a:rPr>
+              <a:t>o</a:t>
+            </a:r>
+            <a:r>
+              <a:rPr b="1" lang="en-US" sz="4200" spc="-1" strike="noStrike">
+                <a:solidFill>
+                  <a:srgbClr val="ffff00"/>
+                </a:solidFill>
+                <a:latin typeface="Calibri"/>
+                <a:ea typeface="DejaVu Sans"/>
+              </a:rPr>
+              <a:t> </a:t>
+            </a:r>
+            <a:r>
+              <a:rPr b="1" lang="en-US" sz="4200" spc="-1" strike="noStrike">
+                <a:solidFill>
+                  <a:srgbClr val="ffff00"/>
+                </a:solidFill>
+                <a:latin typeface="Calibri"/>
+                <a:ea typeface="DejaVu Sans"/>
+              </a:rPr>
+              <a:t>A</a:t>
+            </a:r>
+            <a:r>
+              <a:rPr b="1" lang="en-US" sz="4200" spc="-1" strike="noStrike">
+                <a:solidFill>
+                  <a:srgbClr val="ffff00"/>
+                </a:solidFill>
+                <a:latin typeface="Calibri"/>
+                <a:ea typeface="DejaVu Sans"/>
+              </a:rPr>
+              <a:t>l</a:t>
+            </a:r>
+            <a:r>
+              <a:rPr b="1" lang="en-US" sz="4200" spc="-1" strike="noStrike">
+                <a:solidFill>
+                  <a:srgbClr val="ffff00"/>
+                </a:solidFill>
+                <a:latin typeface="Calibri"/>
+                <a:ea typeface="DejaVu Sans"/>
+              </a:rPr>
+              <a:t>t</a:t>
+            </a:r>
+            <a:r>
+              <a:rPr b="1" lang="en-US" sz="4200" spc="-1" strike="noStrike">
+                <a:solidFill>
+                  <a:srgbClr val="ffff00"/>
+                </a:solidFill>
+                <a:latin typeface="Calibri"/>
+                <a:ea typeface="DejaVu Sans"/>
+              </a:rPr>
+              <a:t>o</a:t>
+            </a:r>
+            <a:r>
+              <a:rPr b="1" lang="en-US" sz="4200" spc="-1" strike="noStrike">
+                <a:solidFill>
+                  <a:srgbClr val="ffff00"/>
+                </a:solidFill>
+                <a:latin typeface="Calibri"/>
+                <a:ea typeface="DejaVu Sans"/>
+              </a:rPr>
+              <a:t> </a:t>
+            </a:r>
+            <a:r>
+              <a:rPr b="1" lang="en-US" sz="4200" spc="-1" strike="noStrike">
+                <a:solidFill>
+                  <a:srgbClr val="ffff00"/>
+                </a:solidFill>
+                <a:latin typeface="Calibri"/>
+                <a:ea typeface="DejaVu Sans"/>
+              </a:rPr>
+              <a:t>2</a:t>
+            </a:r>
+            <a:r>
+              <a:rPr b="1" lang="en-US" sz="4200" spc="-1" strike="noStrike">
+                <a:solidFill>
+                  <a:srgbClr val="ffff00"/>
+                </a:solidFill>
+                <a:latin typeface="Calibri"/>
+                <a:ea typeface="DejaVu Sans"/>
+              </a:rPr>
+              <a:t>5</a:t>
+            </a:r>
+            <a:r>
+              <a:rPr b="1" lang="en-US" sz="4200" spc="-1" strike="noStrike">
+                <a:solidFill>
+                  <a:srgbClr val="ffff00"/>
+                </a:solidFill>
+                <a:latin typeface="Calibri"/>
+                <a:ea typeface="DejaVu Sans"/>
+              </a:rPr>
+              <a:t>8</a:t>
+            </a:r>
+            <a:r>
+              <a:rPr b="1" lang="en-US" sz="4200" spc="-1" strike="noStrike">
+                <a:solidFill>
+                  <a:srgbClr val="ffff00"/>
+                </a:solidFill>
+                <a:latin typeface="Calibri"/>
+                <a:ea typeface="DejaVu Sans"/>
+              </a:rPr>
+              <a:t>1</a:t>
+            </a:r>
+            <a:r>
+              <a:rPr b="1" lang="en-US" sz="4200" spc="-1" strike="noStrike">
+                <a:solidFill>
+                  <a:srgbClr val="ffff00"/>
+                </a:solidFill>
+                <a:latin typeface="Calibri"/>
+                <a:ea typeface="DejaVu Sans"/>
+              </a:rPr>
+              <a:t> </a:t>
+            </a:r>
+            <a:r>
+              <a:rPr b="1" lang="en-US" sz="4200" spc="-1" strike="noStrike">
+                <a:solidFill>
+                  <a:srgbClr val="ffff00"/>
+                </a:solidFill>
+                <a:latin typeface="Calibri"/>
+                <a:ea typeface="DejaVu Sans"/>
+              </a:rPr>
+              <a:t>-</a:t>
+            </a:r>
+            <a:r>
+              <a:rPr b="1" lang="en-US" sz="4200" spc="-1" strike="noStrike">
+                <a:solidFill>
+                  <a:srgbClr val="ffff00"/>
+                </a:solidFill>
+                <a:latin typeface="Calibri"/>
+                <a:ea typeface="DejaVu Sans"/>
+              </a:rPr>
+              <a:t> </a:t>
+            </a:r>
+            <a:r>
+              <a:rPr b="1" lang="en-US" sz="4200" spc="-1" strike="noStrike">
+                <a:solidFill>
+                  <a:srgbClr val="ffff00"/>
+                </a:solidFill>
+                <a:latin typeface="Calibri"/>
+                <a:ea typeface="DejaVu Sans"/>
+              </a:rPr>
+              <a:t>2</a:t>
+            </a:r>
+            <a:r>
+              <a:rPr b="1" lang="en-US" sz="4200" spc="-1" strike="noStrike">
+                <a:solidFill>
+                  <a:srgbClr val="ffff00"/>
+                </a:solidFill>
+                <a:latin typeface="Calibri"/>
+                <a:ea typeface="DejaVu Sans"/>
+              </a:rPr>
+              <a:t>5</a:t>
+            </a:r>
+            <a:r>
+              <a:rPr b="1" lang="en-US" sz="4200" spc="-1" strike="noStrike">
+                <a:solidFill>
+                  <a:srgbClr val="ffff00"/>
+                </a:solidFill>
+                <a:latin typeface="Calibri"/>
+                <a:ea typeface="DejaVu Sans"/>
+              </a:rPr>
+              <a:t>8</a:t>
+            </a:r>
+            <a:r>
+              <a:rPr b="1" lang="en-US" sz="4200" spc="-1" strike="noStrike">
+                <a:solidFill>
+                  <a:srgbClr val="ffff00"/>
+                </a:solidFill>
+                <a:latin typeface="Calibri"/>
+                <a:ea typeface="DejaVu Sans"/>
+              </a:rPr>
+              <a:t>7</a:t>
             </a:r>
             <a:endParaRPr b="0" lang="en-US" sz="4200" spc="-1" strike="noStrike">
               <a:latin typeface="Arial"/>
@@ -5945,7 +6521,7 @@
         <p:spPr>
           <a:xfrm>
             <a:off x="1371600" y="4563360"/>
-            <a:ext cx="6363360" cy="657360"/>
+            <a:ext cx="6363000" cy="657000"/>
           </a:xfrm>
           <a:prstGeom prst="rect">
             <a:avLst/>
@@ -5980,7 +6556,7 @@
                 <a:latin typeface="Calibri"/>
                 <a:ea typeface="DejaVu Sans"/>
               </a:rPr>
-              <a:t>Pe</a:t>
+              <a:t>P</a:t>
             </a:r>
             <a:r>
               <a:rPr b="0" lang="en-US" sz="3200" spc="-1" strike="noStrike">
@@ -5990,7 +6566,7 @@
                 <a:latin typeface="Calibri"/>
                 <a:ea typeface="DejaVu Sans"/>
               </a:rPr>
-              <a:t>t</a:t>
+              <a:t>e</a:t>
             </a:r>
             <a:r>
               <a:rPr b="0" lang="en-US" sz="3200" spc="-1" strike="noStrike">
@@ -6000,7 +6576,7 @@
                 <a:latin typeface="Calibri"/>
                 <a:ea typeface="DejaVu Sans"/>
               </a:rPr>
-              <a:t>e</a:t>
+              <a:t>t</a:t>
             </a:r>
             <a:r>
               <a:rPr b="0" lang="en-US" sz="3200" spc="-1" strike="noStrike">
@@ -6010,7 +6586,7 @@
                 <a:latin typeface="Calibri"/>
                 <a:ea typeface="DejaVu Sans"/>
               </a:rPr>
-              <a:t>r </a:t>
+              <a:t>e</a:t>
             </a:r>
             <a:r>
               <a:rPr b="0" lang="en-US" sz="3200" spc="-1" strike="noStrike">
@@ -6020,7 +6596,7 @@
                 <a:latin typeface="Calibri"/>
                 <a:ea typeface="DejaVu Sans"/>
               </a:rPr>
-              <a:t>H</a:t>
+              <a:t>r</a:t>
             </a:r>
             <a:r>
               <a:rPr b="0" lang="en-US" sz="3200" spc="-1" strike="noStrike">
@@ -6030,7 +6606,37 @@
                 <a:latin typeface="Calibri"/>
                 <a:ea typeface="DejaVu Sans"/>
               </a:rPr>
-              <a:t>. </a:t>
+              <a:t> </a:t>
+            </a:r>
+            <a:r>
+              <a:rPr b="0" lang="en-US" sz="3200" spc="-1" strike="noStrike">
+                <a:solidFill>
+                  <a:srgbClr val="8b8b8b"/>
+                </a:solidFill>
+                <a:latin typeface="Calibri"/>
+                <a:ea typeface="DejaVu Sans"/>
+              </a:rPr>
+              <a:t>H</a:t>
+            </a:r>
+            <a:r>
+              <a:rPr b="0" lang="en-US" sz="3200" spc="-1" strike="noStrike">
+                <a:solidFill>
+                  <a:srgbClr val="8b8b8b"/>
+                </a:solidFill>
+                <a:latin typeface="Calibri"/>
+                <a:ea typeface="DejaVu Sans"/>
+              </a:rPr>
+              <a:t>.</a:t>
+            </a:r>
+            <a:r>
+              <a:rPr b="0" lang="en-US" sz="3200" spc="-1" strike="noStrike">
+                <a:solidFill>
+                  <a:srgbClr val="8b8b8b"/>
+                </a:solidFill>
+                <a:latin typeface="Calibri"/>
+                <a:ea typeface="DejaVu Sans"/>
+              </a:rPr>
+              <a:t> </a:t>
             </a:r>
             <a:r>
               <a:rPr b="0" lang="en-US" sz="3200" spc="-1" strike="noStrike">
@@ -6091,7 +6697,7 @@
         <p:spPr>
           <a:xfrm>
             <a:off x="4212000" y="3645000"/>
-            <a:ext cx="904320" cy="875520"/>
+            <a:ext cx="903960" cy="875160"/>
           </a:xfrm>
           <a:prstGeom prst="rect">
             <a:avLst/>
@@ -6115,7 +6721,7 @@
         <p:txBody>
           <a:bodyPr/>
           <a:p>
-            <a:fld id="{7C0B4696-38D8-4992-B5C7-6887AA0C091B}" type="slidenum">
+            <a:fld id="{4D15A607-ABAF-431D-9DDF-A08BA9D14BAD}" type="slidenum">
               <a:t>1</a:t>
             </a:fld>
           </a:p>
@@ -6135,7 +6741,7 @@
         <p:txBody>
           <a:bodyPr/>
           <a:p>
-            <a:fld id="{0524DCBA-8827-4AF2-A708-752428B9F52D}" type="datetime1">
+            <a:fld id="{575A6AB1-DFAB-40FE-952B-7A51364B7F44}" type="datetime1">
               <a:rPr lang="en-US"/>
               <a:t>07/04/2026</a:t>
             </a:fld>
@@ -6185,7 +6791,7 @@
         <p:spPr>
           <a:xfrm>
             <a:off x="10080" y="0"/>
-            <a:ext cx="9125640" cy="727200"/>
+            <a:ext cx="9125280" cy="726840"/>
           </a:xfrm>
           <a:prstGeom prst="rect">
             <a:avLst/>
@@ -6224,57 +6830,7 @@
                 <a:latin typeface="Calibri"/>
                 <a:ea typeface="DejaVu Sans"/>
               </a:rPr>
-              <a:t>001 </a:t>
-            </a:r>
-            <a:r>
-              <a:rPr b="1" lang="en-US" sz="4200" spc="-1" strike="noStrike">
-                <a:solidFill>
-                  <a:srgbClr val="ffff00"/>
-                </a:solidFill>
-                <a:latin typeface="Calibri"/>
-                <a:ea typeface="DejaVu Sans"/>
-              </a:rPr>
-              <a:t>Palo </a:t>
-            </a:r>
-            <a:r>
-              <a:rPr b="1" lang="en-US" sz="4200" spc="-1" strike="noStrike">
-                <a:solidFill>
-                  <a:srgbClr val="ffff00"/>
-                </a:solidFill>
-                <a:latin typeface="Calibri"/>
-                <a:ea typeface="DejaVu Sans"/>
-              </a:rPr>
-              <a:t>Alto </a:t>
-            </a:r>
-            <a:r>
-              <a:rPr b="1" lang="en-US" sz="4200" spc="-1" strike="noStrike">
-                <a:solidFill>
-                  <a:srgbClr val="ffff00"/>
-                </a:solidFill>
-                <a:latin typeface="Calibri"/>
-                <a:ea typeface="DejaVu Sans"/>
-              </a:rPr>
-              <a:t>2581 </a:t>
-            </a:r>
-            <a:r>
-              <a:rPr b="1" lang="en-US" sz="4200" spc="-1" strike="noStrike">
-                <a:solidFill>
-                  <a:srgbClr val="ffff00"/>
-                </a:solidFill>
-                <a:latin typeface="Calibri"/>
-                <a:ea typeface="DejaVu Sans"/>
-              </a:rPr>
-              <a:t>- </a:t>
-            </a:r>
-            <a:r>
-              <a:rPr b="1" lang="en-US" sz="4200" spc="-1" strike="noStrike">
-                <a:solidFill>
-                  <a:srgbClr val="ffff00"/>
-                </a:solidFill>
-                <a:latin typeface="Calibri"/>
-                <a:ea typeface="DejaVu Sans"/>
-              </a:rPr>
-              <a:t>2581</a:t>
+              <a:t>001 Palo Alto 2585</a:t>
             </a:r>
             <a:endParaRPr b="0" lang="en-US" sz="4200" spc="-1" strike="noStrike">
               <a:latin typeface="Arial"/>
@@ -6295,7 +6851,7 @@
         <p:spPr>
           <a:xfrm>
             <a:off x="232200" y="1302120"/>
-            <a:ext cx="2271600" cy="1896480"/>
+            <a:ext cx="2271240" cy="755280"/>
           </a:xfrm>
           <a:prstGeom prst="rect">
             <a:avLst/>
@@ -6333,1391 +6889,7 @@
                 <a:latin typeface="Calibri"/>
                 <a:ea typeface="DejaVu Sans"/>
               </a:rPr>
-              <a:t>P</a:t>
-            </a:r>
-            <a:r>
-              <a:rPr b="1" lang="en-US" sz="1300" spc="-1" strike="noStrike">
-                <a:solidFill>
-                  <a:srgbClr val="000000"/>
-                </a:solidFill>
-                <a:latin typeface="Calibri"/>
-                <a:ea typeface="DejaVu Sans"/>
-              </a:rPr>
-              <a:t>a</a:t>
-            </a:r>
-            <a:r>
-              <a:rPr b="1" lang="en-US" sz="1300" spc="-1" strike="noStrike">
-                <a:solidFill>
-                  <a:srgbClr val="000000"/>
-                </a:solidFill>
-                <a:latin typeface="Calibri"/>
-                <a:ea typeface="DejaVu Sans"/>
-              </a:rPr>
-              <a:t>l</a:t>
-            </a:r>
-            <a:r>
-              <a:rPr b="1" lang="en-US" sz="1300" spc="-1" strike="noStrike">
-                <a:solidFill>
-                  <a:srgbClr val="000000"/>
-                </a:solidFill>
-                <a:latin typeface="Calibri"/>
-                <a:ea typeface="DejaVu Sans"/>
-              </a:rPr>
-              <a:t>o</a:t>
-            </a:r>
-            <a:r>
-              <a:rPr b="1" lang="en-US" sz="1300" spc="-1" strike="noStrike">
-                <a:solidFill>
-                  <a:srgbClr val="000000"/>
-                </a:solidFill>
-                <a:latin typeface="Calibri"/>
-                <a:ea typeface="DejaVu Sans"/>
-              </a:rPr>
-              <a:t> </a:t>
-            </a:r>
-            <a:r>
-              <a:rPr b="1" lang="en-US" sz="1300" spc="-1" strike="noStrike">
-                <a:solidFill>
-                  <a:srgbClr val="000000"/>
-                </a:solidFill>
-                <a:latin typeface="Calibri"/>
-                <a:ea typeface="DejaVu Sans"/>
-              </a:rPr>
-              <a:t>A</a:t>
-            </a:r>
-            <a:r>
-              <a:rPr b="1" lang="en-US" sz="1300" spc="-1" strike="noStrike">
-                <a:solidFill>
-                  <a:srgbClr val="000000"/>
-                </a:solidFill>
-                <a:latin typeface="Calibri"/>
-                <a:ea typeface="DejaVu Sans"/>
-              </a:rPr>
-              <a:t>l</a:t>
-            </a:r>
-            <a:r>
-              <a:rPr b="1" lang="en-US" sz="1300" spc="-1" strike="noStrike">
-                <a:solidFill>
-                  <a:srgbClr val="000000"/>
-                </a:solidFill>
-                <a:latin typeface="Calibri"/>
-                <a:ea typeface="DejaVu Sans"/>
-              </a:rPr>
-              <a:t>t</a:t>
-            </a:r>
-            <a:r>
-              <a:rPr b="1" lang="en-US" sz="1300" spc="-1" strike="noStrike">
-                <a:solidFill>
-                  <a:srgbClr val="000000"/>
-                </a:solidFill>
-                <a:latin typeface="Calibri"/>
-                <a:ea typeface="DejaVu Sans"/>
-              </a:rPr>
-              <a:t>o</a:t>
-            </a:r>
-            <a:r>
-              <a:rPr b="1" lang="en-US" sz="1300" spc="-1" strike="noStrike">
-                <a:solidFill>
-                  <a:srgbClr val="000000"/>
-                </a:solidFill>
-                <a:latin typeface="Calibri"/>
-                <a:ea typeface="DejaVu Sans"/>
-              </a:rPr>
-              <a:t> </a:t>
-            </a:r>
-            <a:r>
-              <a:rPr b="1" lang="en-US" sz="1300" spc="-1" strike="noStrike">
-                <a:solidFill>
-                  <a:srgbClr val="000000"/>
-                </a:solidFill>
-                <a:latin typeface="Calibri"/>
-                <a:ea typeface="DejaVu Sans"/>
-              </a:rPr>
-              <a:t>2</a:t>
-            </a:r>
-            <a:r>
-              <a:rPr b="1" lang="en-US" sz="1300" spc="-1" strike="noStrike">
-                <a:solidFill>
-                  <a:srgbClr val="000000"/>
-                </a:solidFill>
-                <a:latin typeface="Calibri"/>
-                <a:ea typeface="DejaVu Sans"/>
-              </a:rPr>
-              <a:t>5</a:t>
-            </a:r>
-            <a:r>
-              <a:rPr b="1" lang="en-US" sz="1300" spc="-1" strike="noStrike">
-                <a:solidFill>
-                  <a:srgbClr val="000000"/>
-                </a:solidFill>
-                <a:latin typeface="Calibri"/>
-                <a:ea typeface="DejaVu Sans"/>
-              </a:rPr>
-              <a:t>8</a:t>
-            </a:r>
-            <a:r>
-              <a:rPr b="1" lang="en-US" sz="1300" spc="-1" strike="noStrike">
-                <a:solidFill>
-                  <a:srgbClr val="000000"/>
-                </a:solidFill>
-                <a:latin typeface="Calibri"/>
-                <a:ea typeface="DejaVu Sans"/>
-              </a:rPr>
-              <a:t>1</a:t>
-            </a:r>
-            <a:r>
-              <a:rPr b="1" lang="en-US" sz="1300" spc="-1" strike="noStrike">
-                <a:solidFill>
-                  <a:srgbClr val="000000"/>
-                </a:solidFill>
-                <a:latin typeface="Calibri"/>
-                <a:ea typeface="DejaVu Sans"/>
-              </a:rPr>
-              <a:t> </a:t>
-            </a:r>
-            <a:r>
-              <a:rPr b="1" lang="en-US" sz="1300" spc="-1" strike="noStrike">
-                <a:solidFill>
-                  <a:srgbClr val="000000"/>
-                </a:solidFill>
-                <a:latin typeface="Calibri"/>
-                <a:ea typeface="DejaVu Sans"/>
-              </a:rPr>
-              <a:t>t</a:t>
-            </a:r>
-            <a:r>
-              <a:rPr b="1" lang="en-US" sz="1300" spc="-1" strike="noStrike">
-                <a:solidFill>
-                  <a:srgbClr val="000000"/>
-                </a:solidFill>
-                <a:latin typeface="Calibri"/>
-                <a:ea typeface="DejaVu Sans"/>
-              </a:rPr>
-              <a:t>o</a:t>
-            </a:r>
-            <a:r>
-              <a:rPr b="1" lang="en-US" sz="1300" spc="-1" strike="noStrike">
-                <a:solidFill>
-                  <a:srgbClr val="000000"/>
-                </a:solidFill>
-                <a:latin typeface="Calibri"/>
-                <a:ea typeface="DejaVu Sans"/>
-              </a:rPr>
-              <a:t> </a:t>
-            </a:r>
-            <a:r>
-              <a:rPr b="1" lang="en-US" sz="1300" spc="-1" strike="noStrike">
-                <a:solidFill>
-                  <a:srgbClr val="000000"/>
-                </a:solidFill>
-                <a:latin typeface="Calibri"/>
-                <a:ea typeface="DejaVu Sans"/>
-              </a:rPr>
-              <a:t>2</a:t>
-            </a:r>
-            <a:r>
-              <a:rPr b="1" lang="en-US" sz="1300" spc="-1" strike="noStrike">
-                <a:solidFill>
-                  <a:srgbClr val="000000"/>
-                </a:solidFill>
-                <a:latin typeface="Calibri"/>
-                <a:ea typeface="DejaVu Sans"/>
-              </a:rPr>
-              <a:t>5</a:t>
-            </a:r>
-            <a:r>
-              <a:rPr b="1" lang="en-US" sz="1300" spc="-1" strike="noStrike">
-                <a:solidFill>
-                  <a:srgbClr val="000000"/>
-                </a:solidFill>
-                <a:latin typeface="Calibri"/>
-                <a:ea typeface="DejaVu Sans"/>
-              </a:rPr>
-              <a:t>8</a:t>
-            </a:r>
-            <a:r>
-              <a:rPr b="1" lang="en-US" sz="1300" spc="-1" strike="noStrike">
-                <a:solidFill>
-                  <a:srgbClr val="000000"/>
-                </a:solidFill>
-                <a:latin typeface="Calibri"/>
-                <a:ea typeface="DejaVu Sans"/>
-              </a:rPr>
-              <a:t>7</a:t>
-            </a:r>
-            <a:endParaRPr b="0" lang="en-US" sz="1300" spc="-1" strike="noStrike">
-              <a:latin typeface="Arial"/>
-            </a:endParaRPr>
-          </a:p>
-          <a:p>
-            <a:pPr marL="465120" indent="-465120">
-              <a:lnSpc>
-                <a:spcPct val="100000"/>
-              </a:lnSpc>
-              <a:spcBef>
-                <a:spcPts val="360"/>
-              </a:spcBef>
-              <a:buClr>
-                <a:srgbClr val="0070c0"/>
-              </a:buClr>
-              <a:buFont typeface="Wingdings" charset="2"/>
-              <a:buChar char=""/>
-            </a:pPr>
-            <a:r>
-              <a:rPr b="0" lang="en-US" sz="1300" spc="-1" strike="noStrike">
-                <a:solidFill>
-                  <a:srgbClr val="000000"/>
-                </a:solidFill>
-                <a:latin typeface="Calibri"/>
-                <a:ea typeface="DejaVu Sans"/>
-              </a:rPr>
-              <a:t>2</a:t>
-            </a:r>
-            <a:r>
-              <a:rPr b="0" lang="en-US" sz="1300" spc="-1" strike="noStrike">
-                <a:solidFill>
-                  <a:srgbClr val="000000"/>
-                </a:solidFill>
-                <a:latin typeface="Calibri"/>
-                <a:ea typeface="DejaVu Sans"/>
-              </a:rPr>
-              <a:t>5</a:t>
-            </a:r>
-            <a:r>
-              <a:rPr b="0" lang="en-US" sz="1300" spc="-1" strike="noStrike">
-                <a:solidFill>
-                  <a:srgbClr val="000000"/>
-                </a:solidFill>
-                <a:latin typeface="Calibri"/>
-                <a:ea typeface="DejaVu Sans"/>
-              </a:rPr>
-              <a:t>8</a:t>
-            </a:r>
-            <a:r>
-              <a:rPr b="0" lang="en-US" sz="1300" spc="-1" strike="noStrike">
-                <a:solidFill>
-                  <a:srgbClr val="000000"/>
-                </a:solidFill>
-                <a:latin typeface="Calibri"/>
-                <a:ea typeface="DejaVu Sans"/>
-              </a:rPr>
-              <a:t>1</a:t>
-            </a:r>
-            <a:r>
-              <a:rPr b="0" lang="en-US" sz="1300" spc="-1" strike="noStrike">
-                <a:solidFill>
-                  <a:srgbClr val="000000"/>
-                </a:solidFill>
-                <a:latin typeface="Calibri"/>
-                <a:ea typeface="DejaVu Sans"/>
-              </a:rPr>
-              <a:t>:</a:t>
-            </a:r>
-            <a:r>
-              <a:rPr b="0" lang="en-US" sz="1300" spc="-1" strike="noStrike">
-                <a:solidFill>
-                  <a:srgbClr val="000000"/>
-                </a:solidFill>
-                <a:latin typeface="Calibri"/>
-                <a:ea typeface="DejaVu Sans"/>
-              </a:rPr>
-              <a:t> </a:t>
-            </a:r>
-            <a:r>
-              <a:rPr b="0" lang="en-US" sz="1300" spc="-1" strike="noStrike">
-                <a:solidFill>
-                  <a:srgbClr val="000000"/>
-                </a:solidFill>
-                <a:latin typeface="Calibri"/>
-                <a:ea typeface="DejaVu Sans"/>
-              </a:rPr>
-              <a:t>s</a:t>
-            </a:r>
-            <a:r>
-              <a:rPr b="0" lang="en-US" sz="1300" spc="-1" strike="noStrike">
-                <a:solidFill>
-                  <a:srgbClr val="000000"/>
-                </a:solidFill>
-                <a:latin typeface="Calibri"/>
-                <a:ea typeface="DejaVu Sans"/>
-              </a:rPr>
-              <a:t>t</a:t>
-            </a:r>
-            <a:r>
-              <a:rPr b="0" lang="en-US" sz="1300" spc="-1" strike="noStrike">
-                <a:solidFill>
-                  <a:srgbClr val="000000"/>
-                </a:solidFill>
-                <a:latin typeface="Calibri"/>
-                <a:ea typeface="DejaVu Sans"/>
-              </a:rPr>
-              <a:t>o</a:t>
-            </a:r>
-            <a:r>
-              <a:rPr b="0" lang="en-US" sz="1300" spc="-1" strike="noStrike">
-                <a:solidFill>
-                  <a:srgbClr val="000000"/>
-                </a:solidFill>
-                <a:latin typeface="Calibri"/>
-                <a:ea typeface="DejaVu Sans"/>
-              </a:rPr>
-              <a:t>r</a:t>
-            </a:r>
-            <a:r>
-              <a:rPr b="0" lang="en-US" sz="1300" spc="-1" strike="noStrike">
-                <a:solidFill>
-                  <a:srgbClr val="000000"/>
-                </a:solidFill>
-                <a:latin typeface="Calibri"/>
-                <a:ea typeface="DejaVu Sans"/>
-              </a:rPr>
-              <a:t>a</a:t>
-            </a:r>
-            <a:r>
-              <a:rPr b="0" lang="en-US" sz="1300" spc="-1" strike="noStrike">
-                <a:solidFill>
-                  <a:srgbClr val="000000"/>
-                </a:solidFill>
-                <a:latin typeface="Calibri"/>
-                <a:ea typeface="DejaVu Sans"/>
-              </a:rPr>
-              <a:t>g</a:t>
-            </a:r>
-            <a:r>
-              <a:rPr b="0" lang="en-US" sz="1300" spc="-1" strike="noStrike">
-                <a:solidFill>
-                  <a:srgbClr val="000000"/>
-                </a:solidFill>
-                <a:latin typeface="Calibri"/>
-                <a:ea typeface="DejaVu Sans"/>
-              </a:rPr>
-              <a:t>e</a:t>
-            </a:r>
-            <a:r>
-              <a:rPr b="0" lang="en-US" sz="1300" spc="-1" strike="noStrike">
-                <a:solidFill>
-                  <a:srgbClr val="000000"/>
-                </a:solidFill>
-                <a:latin typeface="Calibri"/>
-                <a:ea typeface="DejaVu Sans"/>
-              </a:rPr>
-              <a:t> </a:t>
-            </a:r>
-            <a:r>
-              <a:rPr b="0" lang="en-US" sz="1300" spc="-1" strike="noStrike">
-                <a:solidFill>
-                  <a:srgbClr val="000000"/>
-                </a:solidFill>
-                <a:latin typeface="Calibri"/>
-                <a:ea typeface="DejaVu Sans"/>
-              </a:rPr>
-              <a:t>0</a:t>
-            </a:r>
-            <a:r>
-              <a:rPr b="0" lang="en-US" sz="1300" spc="-1" strike="noStrike">
-                <a:solidFill>
-                  <a:srgbClr val="000000"/>
-                </a:solidFill>
-                <a:latin typeface="Calibri"/>
-                <a:ea typeface="DejaVu Sans"/>
-              </a:rPr>
-              <a:t>-</a:t>
-            </a:r>
-            <a:r>
-              <a:rPr b="0" lang="en-US" sz="1300" spc="-1" strike="noStrike">
-                <a:solidFill>
-                  <a:srgbClr val="000000"/>
-                </a:solidFill>
-                <a:latin typeface="Calibri"/>
-                <a:ea typeface="DejaVu Sans"/>
-              </a:rPr>
-              <a:t>s</a:t>
-            </a:r>
-            <a:r>
-              <a:rPr b="0" lang="en-US" sz="1300" spc="-1" strike="noStrike">
-                <a:solidFill>
-                  <a:srgbClr val="000000"/>
-                </a:solidFill>
-                <a:latin typeface="Calibri"/>
-                <a:ea typeface="DejaVu Sans"/>
-              </a:rPr>
-              <a:t>e</a:t>
-            </a:r>
-            <a:r>
-              <a:rPr b="0" lang="en-US" sz="1300" spc="-1" strike="noStrike">
-                <a:solidFill>
-                  <a:srgbClr val="000000"/>
-                </a:solidFill>
-                <a:latin typeface="Calibri"/>
-                <a:ea typeface="DejaVu Sans"/>
-              </a:rPr>
-              <a:t>t</a:t>
-            </a:r>
-            <a:r>
-              <a:rPr b="0" lang="en-US" sz="1300" spc="-1" strike="noStrike">
-                <a:solidFill>
-                  <a:srgbClr val="000000"/>
-                </a:solidFill>
-                <a:latin typeface="Calibri"/>
-                <a:ea typeface="DejaVu Sans"/>
-              </a:rPr>
-              <a:t>b</a:t>
-            </a:r>
-            <a:r>
-              <a:rPr b="0" lang="en-US" sz="1300" spc="-1" strike="noStrike">
-                <a:solidFill>
-                  <a:srgbClr val="000000"/>
-                </a:solidFill>
-                <a:latin typeface="Calibri"/>
-                <a:ea typeface="DejaVu Sans"/>
-              </a:rPr>
-              <a:t>a</a:t>
-            </a:r>
-            <a:r>
-              <a:rPr b="0" lang="en-US" sz="1300" spc="-1" strike="noStrike">
-                <a:solidFill>
-                  <a:srgbClr val="000000"/>
-                </a:solidFill>
-                <a:latin typeface="Calibri"/>
-                <a:ea typeface="DejaVu Sans"/>
-              </a:rPr>
-              <a:t>c</a:t>
-            </a:r>
-            <a:r>
-              <a:rPr b="0" lang="en-US" sz="1300" spc="-1" strike="noStrike">
-                <a:solidFill>
-                  <a:srgbClr val="000000"/>
-                </a:solidFill>
-                <a:latin typeface="Calibri"/>
-                <a:ea typeface="DejaVu Sans"/>
-              </a:rPr>
-              <a:t>k</a:t>
-            </a:r>
-            <a:r>
-              <a:rPr b="0" lang="en-US" sz="1300" spc="-1" strike="noStrike">
-                <a:solidFill>
-                  <a:srgbClr val="000000"/>
-                </a:solidFill>
-                <a:latin typeface="Calibri"/>
-                <a:ea typeface="DejaVu Sans"/>
-              </a:rPr>
-              <a:t>:</a:t>
-            </a:r>
-            <a:r>
-              <a:rPr b="0" lang="en-US" sz="1300" spc="-1" strike="noStrike">
-                <a:solidFill>
-                  <a:srgbClr val="000000"/>
-                </a:solidFill>
-                <a:latin typeface="Calibri"/>
-                <a:ea typeface="DejaVu Sans"/>
-              </a:rPr>
-              <a:t> </a:t>
-            </a:r>
-            <a:r>
-              <a:rPr b="0" lang="en-US" sz="1300" spc="-1" strike="noStrike">
-                <a:solidFill>
-                  <a:srgbClr val="000000"/>
-                </a:solidFill>
-                <a:latin typeface="Calibri"/>
-                <a:ea typeface="DejaVu Sans"/>
-              </a:rPr>
-              <a:t>3</a:t>
-            </a:r>
-            <a:r>
-              <a:rPr b="0" lang="en-US" sz="1300" spc="-1" strike="noStrike">
-                <a:solidFill>
-                  <a:srgbClr val="000000"/>
-                </a:solidFill>
-                <a:latin typeface="Calibri"/>
-                <a:ea typeface="DejaVu Sans"/>
-              </a:rPr>
-              <a:t> </a:t>
-            </a:r>
-            <a:r>
-              <a:rPr b="0" lang="en-US" sz="1300" spc="-1" strike="noStrike">
-                <a:solidFill>
-                  <a:srgbClr val="000000"/>
-                </a:solidFill>
-                <a:latin typeface="Calibri"/>
-                <a:ea typeface="DejaVu Sans"/>
-              </a:rPr>
-              <a:t>x</a:t>
-            </a:r>
-            <a:r>
-              <a:rPr b="0" lang="en-US" sz="1300" spc="-1" strike="noStrike">
-                <a:solidFill>
-                  <a:srgbClr val="000000"/>
-                </a:solidFill>
-                <a:latin typeface="Calibri"/>
-                <a:ea typeface="DejaVu Sans"/>
-              </a:rPr>
-              <a:t> </a:t>
-            </a:r>
-            <a:r>
-              <a:rPr b="0" lang="en-US" sz="1300" spc="-1" strike="noStrike">
-                <a:solidFill>
-                  <a:srgbClr val="000000"/>
-                </a:solidFill>
-                <a:latin typeface="Calibri"/>
-                <a:ea typeface="DejaVu Sans"/>
-              </a:rPr>
-              <a:t>8</a:t>
-            </a:r>
-            <a:r>
-              <a:rPr b="0" lang="en-US" sz="1300" spc="-1" strike="noStrike">
-                <a:solidFill>
-                  <a:srgbClr val="000000"/>
-                </a:solidFill>
-                <a:latin typeface="Calibri"/>
-                <a:ea typeface="DejaVu Sans"/>
-              </a:rPr>
-              <a:t> </a:t>
-            </a:r>
-            <a:r>
-              <a:rPr b="0" lang="en-US" sz="1300" spc="-1" strike="noStrike">
-                <a:solidFill>
-                  <a:srgbClr val="000000"/>
-                </a:solidFill>
-                <a:latin typeface="Calibri"/>
-                <a:ea typeface="DejaVu Sans"/>
-              </a:rPr>
-              <a:t>x</a:t>
-            </a:r>
-            <a:r>
-              <a:rPr b="0" lang="en-US" sz="1300" spc="-1" strike="noStrike">
-                <a:solidFill>
-                  <a:srgbClr val="000000"/>
-                </a:solidFill>
-                <a:latin typeface="Calibri"/>
-                <a:ea typeface="DejaVu Sans"/>
-              </a:rPr>
-              <a:t> </a:t>
-            </a:r>
-            <a:r>
-              <a:rPr b="0" lang="en-US" sz="1300" spc="-1" strike="noStrike">
-                <a:solidFill>
-                  <a:srgbClr val="000000"/>
-                </a:solidFill>
-                <a:latin typeface="Calibri"/>
-                <a:ea typeface="DejaVu Sans"/>
-              </a:rPr>
-              <a:t>6</a:t>
-            </a:r>
-            <a:endParaRPr b="0" lang="en-US" sz="1300" spc="-1" strike="noStrike">
-              <a:latin typeface="Arial"/>
-            </a:endParaRPr>
-          </a:p>
-          <a:p>
-            <a:pPr marL="465120" indent="-465120">
-              <a:lnSpc>
-                <a:spcPct val="100000"/>
-              </a:lnSpc>
-              <a:spcBef>
-                <a:spcPts val="360"/>
-              </a:spcBef>
-              <a:buClr>
-                <a:srgbClr val="0070c0"/>
-              </a:buClr>
-              <a:buFont typeface="Wingdings" charset="2"/>
-              <a:buChar char=""/>
-            </a:pPr>
-            <a:r>
-              <a:rPr b="0" lang="en-US" sz="1300" spc="-1" strike="noStrike">
-                <a:solidFill>
-                  <a:srgbClr val="000000"/>
-                </a:solidFill>
-                <a:latin typeface="Calibri"/>
-                <a:ea typeface="DejaVu Sans"/>
-              </a:rPr>
-              <a:t>2</a:t>
-            </a:r>
-            <a:r>
-              <a:rPr b="0" lang="en-US" sz="1300" spc="-1" strike="noStrike">
-                <a:solidFill>
-                  <a:srgbClr val="000000"/>
-                </a:solidFill>
-                <a:latin typeface="Calibri"/>
-                <a:ea typeface="DejaVu Sans"/>
-              </a:rPr>
-              <a:t>5</a:t>
-            </a:r>
-            <a:r>
-              <a:rPr b="0" lang="en-US" sz="1300" spc="-1" strike="noStrike">
-                <a:solidFill>
-                  <a:srgbClr val="000000"/>
-                </a:solidFill>
-                <a:latin typeface="Calibri"/>
-                <a:ea typeface="DejaVu Sans"/>
-              </a:rPr>
-              <a:t>8</a:t>
-            </a:r>
-            <a:r>
-              <a:rPr b="0" lang="en-US" sz="1300" spc="-1" strike="noStrike">
-                <a:solidFill>
-                  <a:srgbClr val="000000"/>
-                </a:solidFill>
-                <a:latin typeface="Calibri"/>
-                <a:ea typeface="DejaVu Sans"/>
-              </a:rPr>
-              <a:t>3</a:t>
-            </a:r>
-            <a:r>
-              <a:rPr b="0" lang="en-US" sz="1300" spc="-1" strike="noStrike">
-                <a:solidFill>
-                  <a:srgbClr val="000000"/>
-                </a:solidFill>
-                <a:latin typeface="Calibri"/>
-                <a:ea typeface="DejaVu Sans"/>
-              </a:rPr>
-              <a:t>,</a:t>
-            </a:r>
-            <a:r>
-              <a:rPr b="0" lang="en-US" sz="1300" spc="-1" strike="noStrike">
-                <a:solidFill>
-                  <a:srgbClr val="000000"/>
-                </a:solidFill>
-                <a:latin typeface="Calibri"/>
-                <a:ea typeface="DejaVu Sans"/>
-              </a:rPr>
-              <a:t> </a:t>
-            </a:r>
-            <a:r>
-              <a:rPr b="0" lang="en-US" sz="1300" spc="-1" strike="noStrike">
-                <a:solidFill>
-                  <a:srgbClr val="000000"/>
-                </a:solidFill>
-                <a:latin typeface="Calibri"/>
-                <a:ea typeface="DejaVu Sans"/>
-              </a:rPr>
-              <a:t>2</a:t>
-            </a:r>
-            <a:r>
-              <a:rPr b="0" lang="en-US" sz="1300" spc="-1" strike="noStrike">
-                <a:solidFill>
-                  <a:srgbClr val="000000"/>
-                </a:solidFill>
-                <a:latin typeface="Calibri"/>
-                <a:ea typeface="DejaVu Sans"/>
-              </a:rPr>
-              <a:t>9</a:t>
-            </a:r>
-            <a:r>
-              <a:rPr b="0" lang="en-US" sz="1300" spc="-1" strike="noStrike">
-                <a:solidFill>
-                  <a:srgbClr val="000000"/>
-                </a:solidFill>
-                <a:latin typeface="Calibri"/>
-                <a:ea typeface="DejaVu Sans"/>
-              </a:rPr>
-              <a:t>8</a:t>
-            </a:r>
-            <a:r>
-              <a:rPr b="0" lang="en-US" sz="1300" spc="-1" strike="noStrike">
-                <a:solidFill>
-                  <a:srgbClr val="000000"/>
-                </a:solidFill>
-                <a:latin typeface="Calibri"/>
-                <a:ea typeface="DejaVu Sans"/>
-              </a:rPr>
-              <a:t>7</a:t>
-            </a:r>
-            <a:r>
-              <a:rPr b="0" lang="en-US" sz="1300" spc="-1" strike="noStrike">
-                <a:solidFill>
-                  <a:srgbClr val="000000"/>
-                </a:solidFill>
-                <a:latin typeface="Calibri"/>
-                <a:ea typeface="DejaVu Sans"/>
-              </a:rPr>
-              <a:t>:</a:t>
-            </a:r>
-            <a:r>
-              <a:rPr b="0" lang="en-US" sz="1300" spc="-1" strike="noStrike">
-                <a:solidFill>
-                  <a:srgbClr val="000000"/>
-                </a:solidFill>
-                <a:latin typeface="Calibri"/>
-                <a:ea typeface="DejaVu Sans"/>
-              </a:rPr>
-              <a:t> </a:t>
-            </a:r>
-            <a:r>
-              <a:rPr b="0" lang="en-US" sz="1300" spc="-1" strike="noStrike">
-                <a:solidFill>
-                  <a:srgbClr val="000000"/>
-                </a:solidFill>
-                <a:latin typeface="Calibri"/>
-                <a:ea typeface="DejaVu Sans"/>
-              </a:rPr>
-              <a:t>s</a:t>
-            </a:r>
-            <a:r>
-              <a:rPr b="0" lang="en-US" sz="1300" spc="-1" strike="noStrike">
-                <a:solidFill>
-                  <a:srgbClr val="000000"/>
-                </a:solidFill>
-                <a:latin typeface="Calibri"/>
-                <a:ea typeface="DejaVu Sans"/>
-              </a:rPr>
-              <a:t>t</a:t>
-            </a:r>
-            <a:r>
-              <a:rPr b="0" lang="en-US" sz="1300" spc="-1" strike="noStrike">
-                <a:solidFill>
-                  <a:srgbClr val="000000"/>
-                </a:solidFill>
-                <a:latin typeface="Calibri"/>
-                <a:ea typeface="DejaVu Sans"/>
-              </a:rPr>
-              <a:t>o</a:t>
-            </a:r>
-            <a:r>
-              <a:rPr b="0" lang="en-US" sz="1300" spc="-1" strike="noStrike">
-                <a:solidFill>
-                  <a:srgbClr val="000000"/>
-                </a:solidFill>
-                <a:latin typeface="Calibri"/>
-                <a:ea typeface="DejaVu Sans"/>
-              </a:rPr>
-              <a:t>r</a:t>
-            </a:r>
-            <a:r>
-              <a:rPr b="0" lang="en-US" sz="1300" spc="-1" strike="noStrike">
-                <a:solidFill>
-                  <a:srgbClr val="000000"/>
-                </a:solidFill>
-                <a:latin typeface="Calibri"/>
-                <a:ea typeface="DejaVu Sans"/>
-              </a:rPr>
-              <a:t>a</a:t>
-            </a:r>
-            <a:r>
-              <a:rPr b="0" lang="en-US" sz="1300" spc="-1" strike="noStrike">
-                <a:solidFill>
-                  <a:srgbClr val="000000"/>
-                </a:solidFill>
-                <a:latin typeface="Calibri"/>
-                <a:ea typeface="DejaVu Sans"/>
-              </a:rPr>
-              <a:t>g</a:t>
-            </a:r>
-            <a:r>
-              <a:rPr b="0" lang="en-US" sz="1300" spc="-1" strike="noStrike">
-                <a:solidFill>
-                  <a:srgbClr val="000000"/>
-                </a:solidFill>
-                <a:latin typeface="Calibri"/>
-                <a:ea typeface="DejaVu Sans"/>
-              </a:rPr>
-              <a:t>e</a:t>
-            </a:r>
-            <a:r>
-              <a:rPr b="0" lang="en-US" sz="1300" spc="-1" strike="noStrike">
-                <a:solidFill>
-                  <a:srgbClr val="000000"/>
-                </a:solidFill>
-                <a:latin typeface="Calibri"/>
-                <a:ea typeface="DejaVu Sans"/>
-              </a:rPr>
-              <a:t> </a:t>
-            </a:r>
-            <a:r>
-              <a:rPr b="0" lang="en-US" sz="1300" spc="-1" strike="noStrike">
-                <a:solidFill>
-                  <a:srgbClr val="000000"/>
-                </a:solidFill>
-                <a:latin typeface="Calibri"/>
-                <a:ea typeface="DejaVu Sans"/>
-              </a:rPr>
-              <a:t>0</a:t>
-            </a:r>
-            <a:r>
-              <a:rPr b="0" lang="en-US" sz="1300" spc="-1" strike="noStrike">
-                <a:solidFill>
-                  <a:srgbClr val="000000"/>
-                </a:solidFill>
-                <a:latin typeface="Calibri"/>
-                <a:ea typeface="DejaVu Sans"/>
-              </a:rPr>
-              <a:t>-</a:t>
-            </a:r>
-            <a:r>
-              <a:rPr b="0" lang="en-US" sz="1300" spc="-1" strike="noStrike">
-                <a:solidFill>
-                  <a:srgbClr val="000000"/>
-                </a:solidFill>
-                <a:latin typeface="Calibri"/>
-                <a:ea typeface="DejaVu Sans"/>
-              </a:rPr>
-              <a:t>s</a:t>
-            </a:r>
-            <a:r>
-              <a:rPr b="0" lang="en-US" sz="1300" spc="-1" strike="noStrike">
-                <a:solidFill>
-                  <a:srgbClr val="000000"/>
-                </a:solidFill>
-                <a:latin typeface="Calibri"/>
-                <a:ea typeface="DejaVu Sans"/>
-              </a:rPr>
-              <a:t>e</a:t>
-            </a:r>
-            <a:r>
-              <a:rPr b="0" lang="en-US" sz="1300" spc="-1" strike="noStrike">
-                <a:solidFill>
-                  <a:srgbClr val="000000"/>
-                </a:solidFill>
-                <a:latin typeface="Calibri"/>
-                <a:ea typeface="DejaVu Sans"/>
-              </a:rPr>
-              <a:t>t</a:t>
-            </a:r>
-            <a:r>
-              <a:rPr b="0" lang="en-US" sz="1300" spc="-1" strike="noStrike">
-                <a:solidFill>
-                  <a:srgbClr val="000000"/>
-                </a:solidFill>
-                <a:latin typeface="Calibri"/>
-                <a:ea typeface="DejaVu Sans"/>
-              </a:rPr>
-              <a:t>b</a:t>
-            </a:r>
-            <a:r>
-              <a:rPr b="0" lang="en-US" sz="1300" spc="-1" strike="noStrike">
-                <a:solidFill>
-                  <a:srgbClr val="000000"/>
-                </a:solidFill>
-                <a:latin typeface="Calibri"/>
-                <a:ea typeface="DejaVu Sans"/>
-              </a:rPr>
-              <a:t>a</a:t>
-            </a:r>
-            <a:r>
-              <a:rPr b="0" lang="en-US" sz="1300" spc="-1" strike="noStrike">
-                <a:solidFill>
-                  <a:srgbClr val="000000"/>
-                </a:solidFill>
-                <a:latin typeface="Calibri"/>
-                <a:ea typeface="DejaVu Sans"/>
-              </a:rPr>
-              <a:t>c</a:t>
-            </a:r>
-            <a:r>
-              <a:rPr b="0" lang="en-US" sz="1300" spc="-1" strike="noStrike">
-                <a:solidFill>
-                  <a:srgbClr val="000000"/>
-                </a:solidFill>
-                <a:latin typeface="Calibri"/>
-                <a:ea typeface="DejaVu Sans"/>
-              </a:rPr>
-              <a:t>k</a:t>
-            </a:r>
-            <a:r>
-              <a:rPr b="0" lang="en-US" sz="1300" spc="-1" strike="noStrike">
-                <a:solidFill>
-                  <a:srgbClr val="000000"/>
-                </a:solidFill>
-                <a:latin typeface="Calibri"/>
-                <a:ea typeface="DejaVu Sans"/>
-              </a:rPr>
-              <a:t> </a:t>
-            </a:r>
-            <a:r>
-              <a:rPr b="0" lang="en-US" sz="1300" spc="-1" strike="noStrike">
-                <a:solidFill>
-                  <a:srgbClr val="000000"/>
-                </a:solidFill>
-                <a:latin typeface="Calibri"/>
-                <a:ea typeface="DejaVu Sans"/>
-              </a:rPr>
-              <a:t>(</a:t>
-            </a:r>
-            <a:r>
-              <a:rPr b="0" lang="en-US" sz="1300" spc="-1" strike="noStrike">
-                <a:solidFill>
-                  <a:srgbClr val="000000"/>
-                </a:solidFill>
-                <a:latin typeface="Calibri"/>
-                <a:ea typeface="DejaVu Sans"/>
-              </a:rPr>
-              <a:t>4</a:t>
-            </a:r>
-            <a:r>
-              <a:rPr b="0" lang="en-US" sz="1300" spc="-1" strike="noStrike">
-                <a:solidFill>
-                  <a:srgbClr val="000000"/>
-                </a:solidFill>
-                <a:latin typeface="Calibri"/>
-                <a:ea typeface="DejaVu Sans"/>
-              </a:rPr>
-              <a:t> </a:t>
-            </a:r>
-            <a:r>
-              <a:rPr b="0" lang="en-US" sz="1300" spc="-1" strike="noStrike">
-                <a:solidFill>
-                  <a:srgbClr val="000000"/>
-                </a:solidFill>
-                <a:latin typeface="Calibri"/>
-                <a:ea typeface="DejaVu Sans"/>
-              </a:rPr>
-              <a:t>x</a:t>
-            </a:r>
-            <a:r>
-              <a:rPr b="0" lang="en-US" sz="1300" spc="-1" strike="noStrike">
-                <a:solidFill>
-                  <a:srgbClr val="000000"/>
-                </a:solidFill>
-                <a:latin typeface="Calibri"/>
-                <a:ea typeface="DejaVu Sans"/>
-              </a:rPr>
-              <a:t> </a:t>
-            </a:r>
-            <a:r>
-              <a:rPr b="0" lang="en-US" sz="1300" spc="-1" strike="noStrike">
-                <a:solidFill>
-                  <a:srgbClr val="000000"/>
-                </a:solidFill>
-                <a:latin typeface="Calibri"/>
-                <a:ea typeface="DejaVu Sans"/>
-              </a:rPr>
-              <a:t>8</a:t>
-            </a:r>
-            <a:r>
-              <a:rPr b="0" lang="en-US" sz="1300" spc="-1" strike="noStrike">
-                <a:solidFill>
-                  <a:srgbClr val="000000"/>
-                </a:solidFill>
-                <a:latin typeface="Calibri"/>
-                <a:ea typeface="DejaVu Sans"/>
-              </a:rPr>
-              <a:t> </a:t>
-            </a:r>
-            <a:r>
-              <a:rPr b="0" lang="en-US" sz="1300" spc="-1" strike="noStrike">
-                <a:solidFill>
-                  <a:srgbClr val="000000"/>
-                </a:solidFill>
-                <a:latin typeface="Calibri"/>
-                <a:ea typeface="DejaVu Sans"/>
-              </a:rPr>
-              <a:t>x</a:t>
-            </a:r>
-            <a:r>
-              <a:rPr b="0" lang="en-US" sz="1300" spc="-1" strike="noStrike">
-                <a:solidFill>
-                  <a:srgbClr val="000000"/>
-                </a:solidFill>
-                <a:latin typeface="Calibri"/>
-                <a:ea typeface="DejaVu Sans"/>
-              </a:rPr>
-              <a:t> </a:t>
-            </a:r>
-            <a:r>
-              <a:rPr b="0" lang="en-US" sz="1300" spc="-1" strike="noStrike">
-                <a:solidFill>
-                  <a:srgbClr val="000000"/>
-                </a:solidFill>
-                <a:latin typeface="Calibri"/>
-                <a:ea typeface="DejaVu Sans"/>
-              </a:rPr>
-              <a:t>6</a:t>
-            </a:r>
-            <a:r>
-              <a:rPr b="0" lang="en-US" sz="1300" spc="-1" strike="noStrike">
-                <a:solidFill>
-                  <a:srgbClr val="000000"/>
-                </a:solidFill>
-                <a:latin typeface="Calibri"/>
-                <a:ea typeface="DejaVu Sans"/>
-              </a:rPr>
-              <a:t>)</a:t>
-            </a:r>
-            <a:endParaRPr b="0" lang="en-US" sz="1300" spc="-1" strike="noStrike">
-              <a:latin typeface="Arial"/>
-            </a:endParaRPr>
-          </a:p>
-          <a:p>
-            <a:pPr marL="465120" indent="-465120">
-              <a:lnSpc>
-                <a:spcPct val="100000"/>
-              </a:lnSpc>
-              <a:spcBef>
-                <a:spcPts val="360"/>
-              </a:spcBef>
-              <a:buClr>
-                <a:srgbClr val="0070c0"/>
-              </a:buClr>
-              <a:buFont typeface="Wingdings" charset="2"/>
-              <a:buChar char=""/>
-            </a:pPr>
-            <a:r>
-              <a:rPr b="0" lang="en-US" sz="1300" spc="-1" strike="noStrike">
-                <a:solidFill>
-                  <a:srgbClr val="000000"/>
-                </a:solidFill>
-                <a:latin typeface="Calibri"/>
-                <a:ea typeface="DejaVu Sans"/>
-              </a:rPr>
-              <a:t>2</a:t>
-            </a:r>
-            <a:r>
-              <a:rPr b="0" lang="en-US" sz="1300" spc="-1" strike="noStrike">
-                <a:solidFill>
-                  <a:srgbClr val="000000"/>
-                </a:solidFill>
-                <a:latin typeface="Calibri"/>
-                <a:ea typeface="DejaVu Sans"/>
-              </a:rPr>
-              <a:t>5</a:t>
-            </a:r>
-            <a:r>
-              <a:rPr b="0" lang="en-US" sz="1300" spc="-1" strike="noStrike">
-                <a:solidFill>
-                  <a:srgbClr val="000000"/>
-                </a:solidFill>
-                <a:latin typeface="Calibri"/>
-                <a:ea typeface="DejaVu Sans"/>
-              </a:rPr>
-              <a:t>8</a:t>
-            </a:r>
-            <a:r>
-              <a:rPr b="0" lang="en-US" sz="1300" spc="-1" strike="noStrike">
-                <a:solidFill>
-                  <a:srgbClr val="000000"/>
-                </a:solidFill>
-                <a:latin typeface="Calibri"/>
-                <a:ea typeface="DejaVu Sans"/>
-              </a:rPr>
-              <a:t>5</a:t>
-            </a:r>
-            <a:r>
-              <a:rPr b="0" lang="en-US" sz="1300" spc="-1" strike="noStrike">
-                <a:solidFill>
-                  <a:srgbClr val="000000"/>
-                </a:solidFill>
-                <a:latin typeface="Calibri"/>
-                <a:ea typeface="DejaVu Sans"/>
-              </a:rPr>
-              <a:t>:</a:t>
-            </a:r>
-            <a:r>
-              <a:rPr b="0" lang="en-US" sz="1300" spc="-1" strike="noStrike">
-                <a:solidFill>
-                  <a:srgbClr val="000000"/>
-                </a:solidFill>
-                <a:latin typeface="Calibri"/>
-                <a:ea typeface="DejaVu Sans"/>
-              </a:rPr>
-              <a:t> </a:t>
-            </a:r>
-            <a:r>
-              <a:rPr b="0" lang="en-US" sz="1300" spc="-1" strike="noStrike">
-                <a:solidFill>
-                  <a:srgbClr val="000000"/>
-                </a:solidFill>
-                <a:latin typeface="Calibri"/>
-                <a:ea typeface="DejaVu Sans"/>
-              </a:rPr>
-              <a:t>S</a:t>
-            </a:r>
-            <a:r>
-              <a:rPr b="0" lang="en-US" sz="1300" spc="-1" strike="noStrike">
-                <a:solidFill>
-                  <a:srgbClr val="000000"/>
-                </a:solidFill>
-                <a:latin typeface="Calibri"/>
-                <a:ea typeface="DejaVu Sans"/>
-              </a:rPr>
-              <a:t>h</a:t>
-            </a:r>
-            <a:r>
-              <a:rPr b="0" lang="en-US" sz="1300" spc="-1" strike="noStrike">
-                <a:solidFill>
-                  <a:srgbClr val="000000"/>
-                </a:solidFill>
-                <a:latin typeface="Calibri"/>
-                <a:ea typeface="DejaVu Sans"/>
-              </a:rPr>
-              <a:t>e</a:t>
-            </a:r>
-            <a:r>
-              <a:rPr b="0" lang="en-US" sz="1300" spc="-1" strike="noStrike">
-                <a:solidFill>
-                  <a:srgbClr val="000000"/>
-                </a:solidFill>
-                <a:latin typeface="Calibri"/>
-                <a:ea typeface="DejaVu Sans"/>
-              </a:rPr>
-              <a:t>d</a:t>
-            </a:r>
-            <a:r>
-              <a:rPr b="0" lang="en-US" sz="1300" spc="-1" strike="noStrike">
-                <a:solidFill>
-                  <a:srgbClr val="000000"/>
-                </a:solidFill>
-                <a:latin typeface="Calibri"/>
-                <a:ea typeface="DejaVu Sans"/>
-              </a:rPr>
-              <a:t> </a:t>
-            </a:r>
-            <a:r>
-              <a:rPr b="0" lang="en-US" sz="1300" spc="-1" strike="noStrike">
-                <a:solidFill>
-                  <a:srgbClr val="000000"/>
-                </a:solidFill>
-                <a:latin typeface="Calibri"/>
-                <a:ea typeface="DejaVu Sans"/>
-              </a:rPr>
-              <a:t>3</a:t>
-            </a:r>
-            <a:r>
-              <a:rPr b="0" lang="en-US" sz="1300" spc="-1" strike="noStrike">
-                <a:solidFill>
-                  <a:srgbClr val="000000"/>
-                </a:solidFill>
-                <a:latin typeface="Calibri"/>
-                <a:ea typeface="DejaVu Sans"/>
-              </a:rPr>
-              <a:t>-</a:t>
-            </a:r>
-            <a:r>
-              <a:rPr b="0" lang="en-US" sz="1300" spc="-1" strike="noStrike">
-                <a:solidFill>
-                  <a:srgbClr val="000000"/>
-                </a:solidFill>
-                <a:latin typeface="Calibri"/>
-                <a:ea typeface="DejaVu Sans"/>
-              </a:rPr>
-              <a:t>f</a:t>
-            </a:r>
-            <a:r>
-              <a:rPr b="0" lang="en-US" sz="1300" spc="-1" strike="noStrike">
-                <a:solidFill>
-                  <a:srgbClr val="000000"/>
-                </a:solidFill>
-                <a:latin typeface="Calibri"/>
-                <a:ea typeface="DejaVu Sans"/>
-              </a:rPr>
-              <a:t>e</a:t>
-            </a:r>
-            <a:r>
-              <a:rPr b="0" lang="en-US" sz="1300" spc="-1" strike="noStrike">
-                <a:solidFill>
-                  <a:srgbClr val="000000"/>
-                </a:solidFill>
-                <a:latin typeface="Calibri"/>
-                <a:ea typeface="DejaVu Sans"/>
-              </a:rPr>
-              <a:t>e</a:t>
-            </a:r>
-            <a:r>
-              <a:rPr b="0" lang="en-US" sz="1300" spc="-1" strike="noStrike">
-                <a:solidFill>
-                  <a:srgbClr val="000000"/>
-                </a:solidFill>
-                <a:latin typeface="Calibri"/>
-                <a:ea typeface="DejaVu Sans"/>
-              </a:rPr>
-              <a:t>t</a:t>
-            </a:r>
-            <a:r>
-              <a:rPr b="0" lang="en-US" sz="1300" spc="-1" strike="noStrike">
-                <a:solidFill>
-                  <a:srgbClr val="000000"/>
-                </a:solidFill>
-                <a:latin typeface="Calibri"/>
-                <a:ea typeface="DejaVu Sans"/>
-              </a:rPr>
-              <a:t> </a:t>
-            </a:r>
-            <a:r>
-              <a:rPr b="0" lang="en-US" sz="1300" spc="-1" strike="noStrike">
-                <a:solidFill>
-                  <a:srgbClr val="000000"/>
-                </a:solidFill>
-                <a:latin typeface="Calibri"/>
-                <a:ea typeface="DejaVu Sans"/>
-              </a:rPr>
-              <a:t>s</a:t>
-            </a:r>
-            <a:r>
-              <a:rPr b="0" lang="en-US" sz="1300" spc="-1" strike="noStrike">
-                <a:solidFill>
-                  <a:srgbClr val="000000"/>
-                </a:solidFill>
-                <a:latin typeface="Calibri"/>
-                <a:ea typeface="DejaVu Sans"/>
-              </a:rPr>
-              <a:t>e</a:t>
-            </a:r>
-            <a:r>
-              <a:rPr b="0" lang="en-US" sz="1300" spc="-1" strike="noStrike">
-                <a:solidFill>
-                  <a:srgbClr val="000000"/>
-                </a:solidFill>
-                <a:latin typeface="Calibri"/>
-                <a:ea typeface="DejaVu Sans"/>
-              </a:rPr>
-              <a:t>t</a:t>
-            </a:r>
-            <a:r>
-              <a:rPr b="0" lang="en-US" sz="1300" spc="-1" strike="noStrike">
-                <a:solidFill>
-                  <a:srgbClr val="000000"/>
-                </a:solidFill>
-                <a:latin typeface="Calibri"/>
-                <a:ea typeface="DejaVu Sans"/>
-              </a:rPr>
-              <a:t>b</a:t>
-            </a:r>
-            <a:r>
-              <a:rPr b="0" lang="en-US" sz="1300" spc="-1" strike="noStrike">
-                <a:solidFill>
-                  <a:srgbClr val="000000"/>
-                </a:solidFill>
-                <a:latin typeface="Calibri"/>
-                <a:ea typeface="DejaVu Sans"/>
-              </a:rPr>
-              <a:t>a</a:t>
-            </a:r>
-            <a:r>
-              <a:rPr b="0" lang="en-US" sz="1300" spc="-1" strike="noStrike">
-                <a:solidFill>
-                  <a:srgbClr val="000000"/>
-                </a:solidFill>
-                <a:latin typeface="Calibri"/>
-                <a:ea typeface="DejaVu Sans"/>
-              </a:rPr>
-              <a:t>c</a:t>
-            </a:r>
-            <a:r>
-              <a:rPr b="0" lang="en-US" sz="1300" spc="-1" strike="noStrike">
-                <a:solidFill>
-                  <a:srgbClr val="000000"/>
-                </a:solidFill>
-                <a:latin typeface="Calibri"/>
-                <a:ea typeface="DejaVu Sans"/>
-              </a:rPr>
-              <a:t>k</a:t>
-            </a:r>
-            <a:r>
-              <a:rPr b="0" lang="en-US" sz="1300" spc="-1" strike="noStrike">
-                <a:solidFill>
-                  <a:srgbClr val="000000"/>
-                </a:solidFill>
-                <a:latin typeface="Calibri"/>
-                <a:ea typeface="DejaVu Sans"/>
-              </a:rPr>
-              <a:t> </a:t>
-            </a:r>
-            <a:r>
-              <a:rPr b="0" lang="en-US" sz="1300" spc="-1" strike="noStrike">
-                <a:solidFill>
-                  <a:srgbClr val="000000"/>
-                </a:solidFill>
-                <a:latin typeface="Calibri"/>
-                <a:ea typeface="DejaVu Sans"/>
-              </a:rPr>
-              <a:t>(</a:t>
-            </a:r>
-            <a:r>
-              <a:rPr b="0" lang="en-US" sz="1300" spc="-1" strike="noStrike">
-                <a:solidFill>
-                  <a:srgbClr val="000000"/>
-                </a:solidFill>
-                <a:latin typeface="Calibri"/>
-                <a:ea typeface="DejaVu Sans"/>
-              </a:rPr>
-              <a:t>6</a:t>
-            </a:r>
-            <a:r>
-              <a:rPr b="0" lang="en-US" sz="1300" spc="-1" strike="noStrike">
-                <a:solidFill>
-                  <a:srgbClr val="000000"/>
-                </a:solidFill>
-                <a:latin typeface="Calibri"/>
-                <a:ea typeface="DejaVu Sans"/>
-              </a:rPr>
-              <a:t> </a:t>
-            </a:r>
-            <a:r>
-              <a:rPr b="0" lang="en-US" sz="1300" spc="-1" strike="noStrike">
-                <a:solidFill>
-                  <a:srgbClr val="000000"/>
-                </a:solidFill>
-                <a:latin typeface="Calibri"/>
-                <a:ea typeface="DejaVu Sans"/>
-              </a:rPr>
-              <a:t>x</a:t>
-            </a:r>
-            <a:r>
-              <a:rPr b="0" lang="en-US" sz="1300" spc="-1" strike="noStrike">
-                <a:solidFill>
-                  <a:srgbClr val="000000"/>
-                </a:solidFill>
-                <a:latin typeface="Calibri"/>
-                <a:ea typeface="DejaVu Sans"/>
-              </a:rPr>
-              <a:t> </a:t>
-            </a:r>
-            <a:r>
-              <a:rPr b="0" lang="en-US" sz="1300" spc="-1" strike="noStrike">
-                <a:solidFill>
-                  <a:srgbClr val="000000"/>
-                </a:solidFill>
-                <a:latin typeface="Calibri"/>
-                <a:ea typeface="DejaVu Sans"/>
-              </a:rPr>
-              <a:t>8</a:t>
-            </a:r>
-            <a:r>
-              <a:rPr b="0" lang="en-US" sz="1300" spc="-1" strike="noStrike">
-                <a:solidFill>
-                  <a:srgbClr val="000000"/>
-                </a:solidFill>
-                <a:latin typeface="Calibri"/>
-                <a:ea typeface="DejaVu Sans"/>
-              </a:rPr>
-              <a:t> </a:t>
-            </a:r>
-            <a:r>
-              <a:rPr b="0" lang="en-US" sz="1300" spc="-1" strike="noStrike">
-                <a:solidFill>
-                  <a:srgbClr val="000000"/>
-                </a:solidFill>
-                <a:latin typeface="Calibri"/>
-                <a:ea typeface="DejaVu Sans"/>
-              </a:rPr>
-              <a:t>x</a:t>
-            </a:r>
-            <a:r>
-              <a:rPr b="0" lang="en-US" sz="1300" spc="-1" strike="noStrike">
-                <a:solidFill>
-                  <a:srgbClr val="000000"/>
-                </a:solidFill>
-                <a:latin typeface="Calibri"/>
-                <a:ea typeface="DejaVu Sans"/>
-              </a:rPr>
-              <a:t> </a:t>
-            </a:r>
-            <a:r>
-              <a:rPr b="0" lang="en-US" sz="1300" spc="-1" strike="noStrike">
-                <a:solidFill>
-                  <a:srgbClr val="000000"/>
-                </a:solidFill>
-                <a:latin typeface="Calibri"/>
-                <a:ea typeface="DejaVu Sans"/>
-              </a:rPr>
-              <a:t>8</a:t>
-            </a:r>
-            <a:r>
-              <a:rPr b="0" lang="en-US" sz="1300" spc="-1" strike="noStrike">
-                <a:solidFill>
-                  <a:srgbClr val="000000"/>
-                </a:solidFill>
-                <a:latin typeface="Calibri"/>
-                <a:ea typeface="DejaVu Sans"/>
-              </a:rPr>
-              <a:t>)</a:t>
+              <a:t>Palo Alto 2585</a:t>
             </a:r>
             <a:endParaRPr b="0" lang="en-US" sz="1300" spc="-1" strike="noStrike">
               <a:latin typeface="Arial"/>
@@ -7751,7 +6923,7 @@
         <p:spPr>
           <a:xfrm>
             <a:off x="0" y="723600"/>
-            <a:ext cx="9122760" cy="322560"/>
+            <a:ext cx="9122400" cy="322200"/>
           </a:xfrm>
           <a:prstGeom prst="rect">
             <a:avLst/>
@@ -7817,7 +6989,7 @@
         <p:spPr>
           <a:xfrm>
             <a:off x="6553080" y="6356520"/>
-            <a:ext cx="2096280" cy="327600"/>
+            <a:ext cx="2095920" cy="327240"/>
           </a:xfrm>
           <a:prstGeom prst="rect">
             <a:avLst/>
@@ -7853,7 +7025,7 @@
               </a:lnSpc>
               <a:buNone/>
             </a:pPr>
-            <a:fld id="{253B9DBB-7159-4AA6-A657-B6B4D5D86E91}" type="slidenum">
+            <a:fld id="{CCEDF7F2-DA7A-455B-B08E-B9E433078FBE}" type="slidenum">
               <a:rPr b="0" lang="en-US" sz="1200" spc="-1" strike="noStrike">
                 <a:solidFill>
                   <a:srgbClr val="8b8b8b"/>
@@ -7871,21 +7043,25 @@
       </p:sp>
       <p:sp>
         <p:nvSpPr>
-          <p:cNvPr id="95" name="Rectangle 21"/>
+          <p:cNvPr id="95" name="Rectangle 76"/>
           <p:cNvSpPr/>
           <p:nvPr/>
         </p:nvSpPr>
         <p:spPr>
           <a:xfrm>
-            <a:off x="8161560" y="5405040"/>
-            <a:ext cx="714600" cy="308160"/>
-          </a:xfrm>
-          <a:prstGeom prst="rect">
-            <a:avLst/>
-          </a:prstGeom>
-          <a:noFill/>
+            <a:off x="5715000" y="1896480"/>
+            <a:ext cx="2523600" cy="1916640"/>
+          </a:xfrm>
+          <a:prstGeom prst="rect">
+            <a:avLst/>
+          </a:prstGeom>
+          <a:solidFill>
+            <a:srgbClr val="4f81bd"/>
+          </a:solidFill>
           <a:ln>
-            <a:noFill/>
+            <a:solidFill>
+              <a:srgbClr val="223852"/>
+            </a:solidFill>
           </a:ln>
         </p:spPr>
         <p:style>
@@ -7902,6 +7078,112 @@
           </a:effectRef>
           <a:fontRef idx="minor"/>
         </p:style>
+      </p:sp>
+      <p:sp>
+        <p:nvSpPr>
+          <p:cNvPr id="96" name="Rectangle: Rounded Corners 86"/>
+          <p:cNvSpPr/>
+          <p:nvPr/>
+        </p:nvSpPr>
+        <p:spPr>
+          <a:xfrm>
+            <a:off x="4800600" y="4066560"/>
+            <a:ext cx="685800" cy="962640"/>
+          </a:xfrm>
+          <a:prstGeom prst="roundRect">
+            <a:avLst>
+              <a:gd name="adj" fmla="val 16667"/>
+            </a:avLst>
+          </a:prstGeom>
+          <a:solidFill>
+            <a:srgbClr val="4f81bd"/>
+          </a:solidFill>
+          <a:ln>
+            <a:solidFill>
+              <a:srgbClr val="223852"/>
+            </a:solidFill>
+          </a:ln>
+        </p:spPr>
+        <p:style>
+          <a:lnRef idx="2">
+            <a:schemeClr val="accent1">
+              <a:shade val="15000"/>
+            </a:schemeClr>
+          </a:lnRef>
+          <a:fillRef idx="1">
+            <a:schemeClr val="accent1"/>
+          </a:fillRef>
+          <a:effectRef idx="0">
+            <a:schemeClr val="accent1"/>
+          </a:effectRef>
+          <a:fontRef idx="minor"/>
+        </p:style>
+        <p:txBody>
+          <a:bodyPr lIns="90000" rIns="90000" tIns="45000" bIns="45000" anchor="ctr">
+            <a:noAutofit/>
+          </a:bodyPr>
+          <a:p>
+            <a:pPr>
+              <a:lnSpc>
+                <a:spcPct val="100000"/>
+              </a:lnSpc>
+              <a:buNone/>
+            </a:pPr>
+            <a:r>
+              <a:rPr b="0" lang="en-US" sz="1200" spc="-1" strike="noStrike">
+                <a:solidFill>
+                  <a:srgbClr val="000000"/>
+                </a:solidFill>
+                <a:latin typeface="Arial"/>
+                <a:ea typeface="DejaVu Sans"/>
+              </a:rPr>
+              <a:t>Car</a:t>
+            </a:r>
+            <a:endParaRPr b="0" lang="en-US" sz="1200" spc="-1" strike="noStrike">
+              <a:latin typeface="Arial"/>
+            </a:endParaRPr>
+          </a:p>
+        </p:txBody>
+      </p:sp>
+      <p:sp>
+        <p:nvSpPr>
+          <p:cNvPr id="97" name="Rectangle: Rounded Corners 87"/>
+          <p:cNvSpPr/>
+          <p:nvPr/>
+        </p:nvSpPr>
+        <p:spPr>
+          <a:xfrm>
+            <a:off x="5194800" y="3240000"/>
+            <a:ext cx="2340000" cy="533880"/>
+          </a:xfrm>
+          <a:prstGeom prst="roundRect">
+            <a:avLst>
+              <a:gd name="adj" fmla="val 16667"/>
+            </a:avLst>
+          </a:prstGeom>
+          <a:solidFill>
+            <a:srgbClr val="4f81bd"/>
+          </a:solidFill>
+          <a:ln>
+            <a:solidFill>
+              <a:srgbClr val="223852"/>
+            </a:solidFill>
+          </a:ln>
+        </p:spPr>
+        <p:style>
+          <a:lnRef idx="2">
+            <a:schemeClr val="accent1">
+              <a:shade val="15000"/>
+            </a:schemeClr>
+          </a:lnRef>
+          <a:fillRef idx="1">
+            <a:schemeClr val="accent1"/>
+          </a:fillRef>
+          <a:effectRef idx="0">
+            <a:schemeClr val="accent1"/>
+          </a:effectRef>
+          <a:fontRef idx="minor"/>
+        </p:style>
         <p:txBody>
           <a:bodyPr lIns="90000" rIns="90000" tIns="45000" bIns="45000" anchor="ctr">
             <a:noAutofit/>
@@ -7921,7 +7203,7 @@
                 <a:latin typeface="Arial"/>
                 <a:ea typeface="DejaVu Sans"/>
               </a:rPr>
-              <a:t>3’</a:t>
+              <a:t>2581 Car</a:t>
             </a:r>
             <a:endParaRPr b="0" lang="en-US" sz="1800" spc="-1" strike="noStrike">
               <a:latin typeface="Arial"/>
@@ -7931,14 +7213,110 @@
       </p:sp>
       <p:sp>
         <p:nvSpPr>
-          <p:cNvPr id="96" name="Straight Arrow Connector 26"/>
+          <p:cNvPr id="98" name="Rectangle 88"/>
           <p:cNvSpPr/>
           <p:nvPr/>
         </p:nvSpPr>
         <p:spPr>
-          <a:xfrm flipV="1">
-            <a:off x="8339760" y="5381280"/>
-            <a:ext cx="361800" cy="1080"/>
+          <a:xfrm>
+            <a:off x="7459920" y="2201400"/>
+            <a:ext cx="1149120" cy="313560"/>
+          </a:xfrm>
+          <a:prstGeom prst="rect">
+            <a:avLst/>
+          </a:prstGeom>
+          <a:noFill/>
+          <a:ln>
+            <a:noFill/>
+          </a:ln>
+        </p:spPr>
+        <p:style>
+          <a:lnRef idx="2">
+            <a:schemeClr val="accent1">
+              <a:shade val="15000"/>
+            </a:schemeClr>
+          </a:lnRef>
+          <a:fillRef idx="1">
+            <a:schemeClr val="accent1"/>
+          </a:fillRef>
+          <a:effectRef idx="0">
+            <a:schemeClr val="accent1"/>
+          </a:effectRef>
+          <a:fontRef idx="minor"/>
+        </p:style>
+        <p:txBody>
+          <a:bodyPr lIns="90000" rIns="90000" tIns="45000" bIns="45000" anchor="ctr">
+            <a:noAutofit/>
+          </a:bodyPr>
+          <a:p>
+            <a:pPr algn="ctr">
+              <a:lnSpc>
+                <a:spcPct val="100000"/>
+              </a:lnSpc>
+              <a:buNone/>
+            </a:pPr>
+            <a:r>
+              <a:rPr b="0" lang="en-US" sz="1800" spc="-1" strike="noStrike">
+                <a:solidFill>
+                  <a:srgbClr val="000000"/>
+                </a:solidFill>
+                <a:latin typeface="Arial"/>
+                <a:ea typeface="DejaVu Sans"/>
+              </a:rPr>
+              <a:t>Carport</a:t>
+            </a:r>
+            <a:endParaRPr b="0" lang="en-US" sz="1800" spc="-1" strike="noStrike">
+              <a:latin typeface="Arial"/>
+            </a:endParaRPr>
+          </a:p>
+        </p:txBody>
+      </p:sp>
+      <p:sp>
+        <p:nvSpPr>
+          <p:cNvPr id="99" name="Rectangle 119"/>
+          <p:cNvSpPr/>
+          <p:nvPr/>
+        </p:nvSpPr>
+        <p:spPr>
+          <a:xfrm>
+            <a:off x="4628520" y="3838320"/>
+            <a:ext cx="4072680" cy="1668240"/>
+          </a:xfrm>
+          <a:prstGeom prst="rect">
+            <a:avLst/>
+          </a:prstGeom>
+          <a:noFill/>
+          <a:ln>
+            <a:solidFill>
+              <a:srgbClr val="223852"/>
+            </a:solidFill>
+          </a:ln>
+        </p:spPr>
+        <p:style>
+          <a:lnRef idx="2">
+            <a:schemeClr val="accent1">
+              <a:shade val="15000"/>
+            </a:schemeClr>
+          </a:lnRef>
+          <a:fillRef idx="1">
+            <a:schemeClr val="accent1"/>
+          </a:fillRef>
+          <a:effectRef idx="0">
+            <a:schemeClr val="accent1"/>
+          </a:effectRef>
+          <a:fontRef idx="minor"/>
+        </p:style>
+      </p:sp>
+      <p:sp>
+        <p:nvSpPr>
+          <p:cNvPr id="100" name="Straight Arrow Connector 124"/>
+          <p:cNvSpPr/>
+          <p:nvPr/>
+        </p:nvSpPr>
+        <p:spPr>
+          <a:xfrm>
+            <a:off x="2743200" y="1876320"/>
+            <a:ext cx="942840" cy="360"/>
           </a:xfrm>
           <a:custGeom>
             <a:avLst/>
@@ -7980,25 +7358,21 @@
       </p:sp>
       <p:sp>
         <p:nvSpPr>
-          <p:cNvPr id="97" name="Rectangle 76"/>
+          <p:cNvPr id="101" name="Rectangle 125"/>
           <p:cNvSpPr/>
           <p:nvPr/>
         </p:nvSpPr>
         <p:spPr>
           <a:xfrm>
-            <a:off x="5715000" y="1896480"/>
-            <a:ext cx="2523960" cy="1917000"/>
-          </a:xfrm>
-          <a:prstGeom prst="rect">
-            <a:avLst/>
-          </a:prstGeom>
-          <a:solidFill>
-            <a:srgbClr val="4f81bd"/>
-          </a:solidFill>
+            <a:off x="2971800" y="1913400"/>
+            <a:ext cx="714240" cy="307800"/>
+          </a:xfrm>
+          <a:prstGeom prst="rect">
+            <a:avLst/>
+          </a:prstGeom>
+          <a:noFill/>
           <a:ln>
-            <a:solidFill>
-              <a:srgbClr val="223852"/>
-            </a:solidFill>
+            <a:noFill/>
           </a:ln>
         </p:spPr>
         <p:style>
@@ -8015,22 +7389,105 @@
           </a:effectRef>
           <a:fontRef idx="minor"/>
         </p:style>
-      </p:sp>
-      <p:sp>
-        <p:nvSpPr>
-          <p:cNvPr id="98" name="Rectangle: Rounded Corners 86"/>
+        <p:txBody>
+          <a:bodyPr lIns="90000" rIns="90000" tIns="45000" bIns="45000" anchor="ctr">
+            <a:noAutofit/>
+          </a:bodyPr>
+          <a:p>
+            <a:pPr algn="ctr">
+              <a:lnSpc>
+                <a:spcPct val="100000"/>
+              </a:lnSpc>
+              <a:buNone/>
+            </a:pPr>
+            <a:r>
+              <a:rPr b="0" lang="en-US" sz="1800" spc="-1" strike="noStrike">
+                <a:solidFill>
+                  <a:srgbClr val="000000"/>
+                </a:solidFill>
+                <a:latin typeface="Arial"/>
+                <a:ea typeface="DejaVu Sans"/>
+              </a:rPr>
+              <a:t>8’</a:t>
+            </a:r>
+            <a:r>
+              <a:rPr b="0" lang="en-US" sz="1800" spc="-1" strike="noStrike">
+                <a:solidFill>
+                  <a:srgbClr val="ffffff"/>
+                </a:solidFill>
+                <a:latin typeface="Arial"/>
+                <a:ea typeface="DejaVu Sans"/>
+              </a:rPr>
+              <a:t>’</a:t>
+            </a:r>
+            <a:endParaRPr b="0" lang="en-US" sz="1800" spc="-1" strike="noStrike">
+              <a:latin typeface="Arial"/>
+            </a:endParaRPr>
+          </a:p>
+        </p:txBody>
+      </p:sp>
+      <p:sp>
+        <p:nvSpPr>
+          <p:cNvPr id="102" name="Straight Arrow Connector 130"/>
           <p:cNvSpPr/>
           <p:nvPr/>
         </p:nvSpPr>
         <p:spPr>
-          <a:xfrm>
-            <a:off x="4497480" y="4066200"/>
-            <a:ext cx="508320" cy="963000"/>
-          </a:xfrm>
-          <a:prstGeom prst="roundRect">
-            <a:avLst>
-              <a:gd name="adj" fmla="val 16667"/>
-            </a:avLst>
+          <a:xfrm flipH="1" flipV="1">
+            <a:off x="3885480" y="1227600"/>
+            <a:ext cx="360" cy="457200"/>
+          </a:xfrm>
+          <a:custGeom>
+            <a:avLst/>
+            <a:gdLst/>
+            <a:ahLst/>
+            <a:rect l="l" t="t" r="r" b="b"/>
+            <a:pathLst>
+              <a:path w="21600" h="21600">
+                <a:moveTo>
+                  <a:pt x="0" y="0"/>
+                </a:moveTo>
+                <a:lnTo>
+                  <a:pt x="21600" y="21600"/>
+                </a:lnTo>
+              </a:path>
+            </a:pathLst>
+          </a:custGeom>
+          <a:noFill/>
+          <a:ln>
+            <a:solidFill>
+              <a:srgbClr val="4a7ebb"/>
+            </a:solidFill>
+            <a:headEnd len="med" type="triangle" w="med"/>
+            <a:tailEnd len="med" type="triangle" w="med"/>
+          </a:ln>
+        </p:spPr>
+        <p:style>
+          <a:lnRef idx="1">
+            <a:schemeClr val="accent1"/>
+          </a:lnRef>
+          <a:fillRef idx="0">
+            <a:schemeClr val="accent1"/>
+          </a:fillRef>
+          <a:effectRef idx="0">
+            <a:schemeClr val="accent1"/>
+          </a:effectRef>
+          <a:fontRef idx="minor"/>
+        </p:style>
+      </p:sp>
+      <p:sp>
+        <p:nvSpPr>
+          <p:cNvPr id="103" name="Rectangle 135"/>
+          <p:cNvSpPr/>
+          <p:nvPr/>
+        </p:nvSpPr>
+        <p:spPr>
+          <a:xfrm>
+            <a:off x="4628520" y="5576760"/>
+            <a:ext cx="3598560" cy="364680"/>
+          </a:xfrm>
+          <a:prstGeom prst="rect">
+            <a:avLst/>
           </a:prstGeom>
           <a:solidFill>
             <a:srgbClr val="4f81bd"/>
@@ -8060,51 +7517,45 @@
             <a:noAutofit/>
           </a:bodyPr>
           <a:p>
-            <a:pPr>
+            <a:pPr algn="ctr">
               <a:lnSpc>
                 <a:spcPct val="100000"/>
               </a:lnSpc>
               <a:buNone/>
             </a:pPr>
             <a:r>
-              <a:rPr b="0" lang="en-US" sz="1200" spc="-1" strike="noStrike">
+              <a:rPr b="0" lang="en-US" sz="1800" spc="-1" strike="noStrike">
                 <a:solidFill>
                   <a:srgbClr val="000000"/>
                 </a:solidFill>
                 <a:latin typeface="Arial"/>
                 <a:ea typeface="DejaVu Sans"/>
               </a:rPr>
-              <a:t>Car</a:t>
-            </a:r>
-            <a:endParaRPr b="0" lang="en-US" sz="1200" spc="-1" strike="noStrike">
-              <a:latin typeface="Arial"/>
-            </a:endParaRPr>
-          </a:p>
-        </p:txBody>
-      </p:sp>
-      <p:sp>
-        <p:nvSpPr>
-          <p:cNvPr id="99" name="Rectangle: Rounded Corners 87"/>
+              <a:t>Main Building (2585)</a:t>
+            </a:r>
+            <a:endParaRPr b="0" lang="en-US" sz="1800" spc="-1" strike="noStrike">
+              <a:latin typeface="Arial"/>
+            </a:endParaRPr>
+          </a:p>
+        </p:txBody>
+      </p:sp>
+      <p:sp>
+        <p:nvSpPr>
+          <p:cNvPr id="104" name="Rectangle 136"/>
           <p:cNvSpPr/>
           <p:nvPr/>
         </p:nvSpPr>
         <p:spPr>
           <a:xfrm>
-            <a:off x="5194800" y="3240000"/>
-            <a:ext cx="2340360" cy="534240"/>
-          </a:xfrm>
-          <a:prstGeom prst="roundRect">
-            <a:avLst>
-              <a:gd name="adj" fmla="val 16667"/>
-            </a:avLst>
-          </a:prstGeom>
-          <a:solidFill>
-            <a:srgbClr val="4f81bd"/>
-          </a:solidFill>
+            <a:off x="6183720" y="5997960"/>
+            <a:ext cx="900720" cy="313560"/>
+          </a:xfrm>
+          <a:prstGeom prst="rect">
+            <a:avLst/>
+          </a:prstGeom>
+          <a:noFill/>
           <a:ln>
-            <a:solidFill>
-              <a:srgbClr val="223852"/>
-            </a:solidFill>
+            <a:noFill/>
           </a:ln>
         </p:spPr>
         <p:style>
@@ -8140,7 +7591,17 @@
                 <a:latin typeface="Arial"/>
                 <a:ea typeface="DejaVu Sans"/>
               </a:rPr>
-              <a:t>2581 Car</a:t>
+              <a:t>26’</a:t>
+            </a:r>
+            <a:r>
+              <a:rPr b="0" lang="en-US" sz="1800" spc="-1" strike="noStrike">
+                <a:solidFill>
+                  <a:srgbClr val="ffffff"/>
+                </a:solidFill>
+                <a:latin typeface="Arial"/>
+                <a:ea typeface="DejaVu Sans"/>
+              </a:rPr>
+              <a:t>’</a:t>
             </a:r>
             <a:endParaRPr b="0" lang="en-US" sz="1800" spc="-1" strike="noStrike">
               <a:latin typeface="Arial"/>
@@ -8150,21 +7611,27 @@
       </p:sp>
       <p:sp>
         <p:nvSpPr>
-          <p:cNvPr id="100" name="Rectangle 88"/>
+          <p:cNvPr id="105" name="Rectangle: Rounded Corners 28"/>
           <p:cNvSpPr/>
           <p:nvPr/>
         </p:nvSpPr>
         <p:spPr>
           <a:xfrm>
-            <a:off x="7459920" y="2201400"/>
-            <a:ext cx="1149480" cy="313920"/>
-          </a:xfrm>
-          <a:prstGeom prst="rect">
-            <a:avLst/>
-          </a:prstGeom>
-          <a:noFill/>
+            <a:off x="5194800" y="2624760"/>
+            <a:ext cx="2283480" cy="533880"/>
+          </a:xfrm>
+          <a:prstGeom prst="roundRect">
+            <a:avLst>
+              <a:gd name="adj" fmla="val 16667"/>
+            </a:avLst>
+          </a:prstGeom>
+          <a:solidFill>
+            <a:srgbClr val="4f81bd"/>
+          </a:solidFill>
           <a:ln>
-            <a:noFill/>
+            <a:solidFill>
+              <a:srgbClr val="223852"/>
+            </a:solidFill>
           </a:ln>
         </p:spPr>
         <p:style>
@@ -8200,7 +7667,7 @@
                 <a:latin typeface="Arial"/>
                 <a:ea typeface="DejaVu Sans"/>
               </a:rPr>
-              <a:t>Carport</a:t>
+              <a:t>2583 Car</a:t>
             </a:r>
             <a:endParaRPr b="0" lang="en-US" sz="1800" spc="-1" strike="noStrike">
               <a:latin typeface="Arial"/>
@@ -8210,21 +7677,27 @@
       </p:sp>
       <p:sp>
         <p:nvSpPr>
-          <p:cNvPr id="101" name="Rectangle 95"/>
+          <p:cNvPr id="106" name="Rectangle: Rounded Corners 29"/>
           <p:cNvSpPr/>
           <p:nvPr/>
         </p:nvSpPr>
         <p:spPr>
           <a:xfrm>
-            <a:off x="5226840" y="5198400"/>
-            <a:ext cx="714600" cy="308160"/>
-          </a:xfrm>
-          <a:prstGeom prst="rect">
-            <a:avLst/>
-          </a:prstGeom>
-          <a:noFill/>
+            <a:off x="5194800" y="2031840"/>
+            <a:ext cx="2261160" cy="533880"/>
+          </a:xfrm>
+          <a:prstGeom prst="roundRect">
+            <a:avLst>
+              <a:gd name="adj" fmla="val 16667"/>
+            </a:avLst>
+          </a:prstGeom>
+          <a:solidFill>
+            <a:srgbClr val="4f81bd"/>
+          </a:solidFill>
           <a:ln>
-            <a:noFill/>
+            <a:solidFill>
+              <a:srgbClr val="223852"/>
+            </a:solidFill>
           </a:ln>
         </p:spPr>
         <p:style>
@@ -8260,17 +7733,7 @@
                 <a:latin typeface="Arial"/>
                 <a:ea typeface="DejaVu Sans"/>
               </a:rPr>
-              <a:t>19’</a:t>
-            </a:r>
-            <a:r>
-              <a:rPr b="0" lang="en-US" sz="1800" spc="-1" strike="noStrike">
-                <a:solidFill>
-                  <a:srgbClr val="ffffff"/>
-                </a:solidFill>
-                <a:latin typeface="Arial"/>
-                <a:ea typeface="DejaVu Sans"/>
-              </a:rPr>
-              <a:t>’</a:t>
+              <a:t>2585 Car</a:t>
             </a:r>
             <a:endParaRPr b="0" lang="en-US" sz="1800" spc="-1" strike="noStrike">
               <a:latin typeface="Arial"/>
@@ -8280,14 +7743,50 @@
       </p:sp>
       <p:sp>
         <p:nvSpPr>
-          <p:cNvPr id="102" name="Straight Arrow Connector 107"/>
+          <p:cNvPr id="107" name="Rectangle 30"/>
           <p:cNvSpPr/>
           <p:nvPr/>
         </p:nvSpPr>
         <p:spPr>
-          <a:xfrm flipH="1">
-            <a:off x="8609760" y="3804840"/>
-            <a:ext cx="360" cy="537120"/>
+          <a:xfrm>
+            <a:off x="2562840" y="1143000"/>
+            <a:ext cx="6579000" cy="5712480"/>
+          </a:xfrm>
+          <a:prstGeom prst="rect">
+            <a:avLst/>
+          </a:prstGeom>
+          <a:noFill/>
+          <a:ln>
+            <a:solidFill>
+              <a:srgbClr val="223852"/>
+            </a:solidFill>
+          </a:ln>
+        </p:spPr>
+        <p:style>
+          <a:lnRef idx="2">
+            <a:schemeClr val="accent1">
+              <a:shade val="15000"/>
+            </a:schemeClr>
+          </a:lnRef>
+          <a:fillRef idx="1">
+            <a:schemeClr val="accent1"/>
+          </a:fillRef>
+          <a:effectRef idx="0">
+            <a:schemeClr val="accent1"/>
+          </a:effectRef>
+          <a:fontRef idx="minor"/>
+        </p:style>
+      </p:sp>
+      <p:sp>
+        <p:nvSpPr>
+          <p:cNvPr id="108" name="Straight Arrow Connector 64"/>
+          <p:cNvSpPr/>
+          <p:nvPr/>
+        </p:nvSpPr>
+        <p:spPr>
+          <a:xfrm>
+            <a:off x="4572000" y="6171840"/>
+            <a:ext cx="4253400" cy="360"/>
           </a:xfrm>
           <a:custGeom>
             <a:avLst/>
@@ -8308,7 +7807,7 @@
           <a:noFill/>
           <a:ln>
             <a:solidFill>
-              <a:srgbClr val="4a7ebb"/>
+              <a:srgbClr val="000000"/>
             </a:solidFill>
             <a:headEnd len="med" type="triangle" w="med"/>
             <a:tailEnd len="med" type="triangle" w="med"/>
@@ -8329,14 +7828,14 @@
       </p:sp>
       <p:sp>
         <p:nvSpPr>
-          <p:cNvPr id="103" name="Rectangle 108"/>
+          <p:cNvPr id="109" name="Rectangle 1"/>
           <p:cNvSpPr/>
           <p:nvPr/>
         </p:nvSpPr>
         <p:spPr>
           <a:xfrm>
-            <a:off x="8134200" y="3804840"/>
-            <a:ext cx="714600" cy="308160"/>
+            <a:off x="8625600" y="4343400"/>
+            <a:ext cx="714240" cy="307800"/>
           </a:xfrm>
           <a:prstGeom prst="rect">
             <a:avLst/>
@@ -8374,12 +7873,32 @@
             <a:r>
               <a:rPr b="0" lang="en-US" sz="1800" spc="-1" strike="noStrike">
                 <a:solidFill>
+                  <a:srgbClr val="ffffff"/>
+                </a:solidFill>
+                <a:latin typeface="Arial"/>
+                <a:ea typeface="DejaVu Sans"/>
+              </a:rPr>
+              <a:t>2</a:t>
+            </a:r>
+            <a:r>
+              <a:rPr b="0" lang="en-US" sz="1800" spc="-1" strike="noStrike">
+                <a:solidFill>
                   <a:srgbClr val="000000"/>
                 </a:solidFill>
                 <a:latin typeface="Arial"/>
                 <a:ea typeface="DejaVu Sans"/>
               </a:rPr>
-              <a:t>3’</a:t>
+              <a:t>16’</a:t>
+            </a:r>
+            <a:r>
+              <a:rPr b="0" lang="en-US" sz="1800" spc="-1" strike="noStrike">
+                <a:solidFill>
+                  <a:srgbClr val="ffffff"/>
+                </a:solidFill>
+                <a:latin typeface="Arial"/>
+                <a:ea typeface="DejaVu Sans"/>
+              </a:rPr>
+              <a:t>’</a:t>
             </a:r>
             <a:endParaRPr b="0" lang="en-US" sz="1800" spc="-1" strike="noStrike">
               <a:latin typeface="Arial"/>
@@ -8389,14 +7908,14 @@
       </p:sp>
       <p:sp>
         <p:nvSpPr>
-          <p:cNvPr id="104" name="Straight Arrow Connector 110"/>
+          <p:cNvPr id="110" name="Straight Arrow Connector 1"/>
           <p:cNvSpPr/>
           <p:nvPr/>
         </p:nvSpPr>
         <p:spPr>
           <a:xfrm>
-            <a:off x="8619120" y="5012280"/>
-            <a:ext cx="360" cy="516960"/>
+            <a:off x="8853840" y="3886200"/>
+            <a:ext cx="360" cy="1501560"/>
           </a:xfrm>
           <a:custGeom>
             <a:avLst/>
@@ -8438,19 +7957,51 @@
       </p:sp>
       <p:sp>
         <p:nvSpPr>
-          <p:cNvPr id="105" name="Rectangle 119"/>
+          <p:cNvPr id="111" name=""/>
           <p:cNvSpPr/>
           <p:nvPr/>
         </p:nvSpPr>
         <p:spPr>
           <a:xfrm>
-            <a:off x="4628520" y="3838320"/>
-            <a:ext cx="4073040" cy="1668600"/>
-          </a:xfrm>
-          <a:prstGeom prst="rect">
-            <a:avLst/>
-          </a:prstGeom>
-          <a:noFill/>
+            <a:off x="-1143000" y="3299760"/>
+            <a:ext cx="4569840" cy="2870280"/>
+          </a:xfrm>
+          <a:prstGeom prst="rect">
+            <a:avLst/>
+          </a:prstGeom>
+          <a:solidFill>
+            <a:srgbClr val="ffffff"/>
+          </a:solidFill>
+          <a:ln w="0">
+            <a:solidFill>
+              <a:srgbClr val="3465a4"/>
+            </a:solidFill>
+          </a:ln>
+        </p:spPr>
+        <p:style>
+          <a:lnRef idx="0"/>
+          <a:fillRef idx="0"/>
+          <a:effectRef idx="0"/>
+          <a:fontRef idx="minor"/>
+        </p:style>
+      </p:sp>
+      <p:sp>
+        <p:nvSpPr>
+          <p:cNvPr id="112" name="Rectangle 10"/>
+          <p:cNvSpPr/>
+          <p:nvPr/>
+        </p:nvSpPr>
+        <p:spPr>
+          <a:xfrm>
+            <a:off x="-1086120" y="3528360"/>
+            <a:ext cx="3598560" cy="508320"/>
+          </a:xfrm>
+          <a:prstGeom prst="rect">
+            <a:avLst/>
+          </a:prstGeom>
+          <a:solidFill>
+            <a:srgbClr val="4f81bd"/>
+          </a:solidFill>
           <a:ln>
             <a:solidFill>
               <a:srgbClr val="223852"/>
@@ -8471,17 +8022,265 @@
           </a:effectRef>
           <a:fontRef idx="minor"/>
         </p:style>
-      </p:sp>
-      <p:sp>
-        <p:nvSpPr>
-          <p:cNvPr id="106" name="Straight Arrow Connector 124"/>
+        <p:txBody>
+          <a:bodyPr lIns="90000" rIns="90000" tIns="45000" bIns="45000" anchor="ctr">
+            <a:noAutofit/>
+          </a:bodyPr>
+          <a:p>
+            <a:pPr algn="ctr">
+              <a:lnSpc>
+                <a:spcPct val="100000"/>
+              </a:lnSpc>
+              <a:buNone/>
+            </a:pPr>
+            <a:r>
+              <a:rPr b="0" lang="en-US" sz="1800" spc="-1" strike="noStrike">
+                <a:solidFill>
+                  <a:srgbClr val="000000"/>
+                </a:solidFill>
+                <a:latin typeface="Arial"/>
+                <a:ea typeface="DejaVu Sans"/>
+              </a:rPr>
+              <a:t>Main Building (2581 Alma)</a:t>
+            </a:r>
+            <a:endParaRPr b="0" lang="en-US" sz="1800" spc="-1" strike="noStrike">
+              <a:latin typeface="Arial"/>
+            </a:endParaRPr>
+          </a:p>
+        </p:txBody>
+      </p:sp>
+      <p:sp>
+        <p:nvSpPr>
+          <p:cNvPr id="113" name="Rectangle 7"/>
           <p:cNvSpPr/>
           <p:nvPr/>
         </p:nvSpPr>
         <p:spPr>
           <a:xfrm>
-            <a:off x="8613360" y="4343400"/>
-            <a:ext cx="360" cy="723240"/>
+            <a:off x="2971800" y="4220640"/>
+            <a:ext cx="461520" cy="923040"/>
+          </a:xfrm>
+          <a:prstGeom prst="rect">
+            <a:avLst/>
+          </a:prstGeom>
+          <a:solidFill>
+            <a:srgbClr val="4f81bd"/>
+          </a:solidFill>
+          <a:ln>
+            <a:solidFill>
+              <a:srgbClr val="223852"/>
+            </a:solidFill>
+          </a:ln>
+        </p:spPr>
+        <p:style>
+          <a:lnRef idx="2">
+            <a:schemeClr val="accent1">
+              <a:shade val="15000"/>
+            </a:schemeClr>
+          </a:lnRef>
+          <a:fillRef idx="1">
+            <a:schemeClr val="accent1"/>
+          </a:fillRef>
+          <a:effectRef idx="0">
+            <a:schemeClr val="accent1"/>
+          </a:effectRef>
+          <a:fontRef idx="minor"/>
+        </p:style>
+      </p:sp>
+      <p:sp>
+        <p:nvSpPr>
+          <p:cNvPr id="114" name="Rectangle 8"/>
+          <p:cNvSpPr/>
+          <p:nvPr/>
+        </p:nvSpPr>
+        <p:spPr>
+          <a:xfrm>
+            <a:off x="2063880" y="4825080"/>
+            <a:ext cx="1171440" cy="307800"/>
+          </a:xfrm>
+          <a:prstGeom prst="rect">
+            <a:avLst/>
+          </a:prstGeom>
+          <a:noFill/>
+          <a:ln>
+            <a:noFill/>
+          </a:ln>
+        </p:spPr>
+        <p:style>
+          <a:lnRef idx="2">
+            <a:schemeClr val="accent1">
+              <a:shade val="15000"/>
+            </a:schemeClr>
+          </a:lnRef>
+          <a:fillRef idx="1">
+            <a:schemeClr val="accent1"/>
+          </a:fillRef>
+          <a:effectRef idx="0">
+            <a:schemeClr val="accent1"/>
+          </a:effectRef>
+          <a:fontRef idx="minor"/>
+        </p:style>
+        <p:txBody>
+          <a:bodyPr lIns="90000" rIns="90000" tIns="45000" bIns="45000" anchor="ctr">
+            <a:noAutofit/>
+          </a:bodyPr>
+          <a:p>
+            <a:pPr algn="ctr">
+              <a:lnSpc>
+                <a:spcPct val="100000"/>
+              </a:lnSpc>
+              <a:buNone/>
+            </a:pPr>
+            <a:r>
+              <a:rPr b="0" lang="en-US" sz="1800" spc="-1" strike="noStrike">
+                <a:solidFill>
+                  <a:srgbClr val="000000"/>
+                </a:solidFill>
+                <a:latin typeface="Arial"/>
+                <a:ea typeface="DejaVu Sans"/>
+              </a:rPr>
+              <a:t>2581</a:t>
+            </a:r>
+            <a:r>
+              <a:rPr b="0" lang="en-US" sz="1800" spc="-1" strike="noStrike">
+                <a:solidFill>
+                  <a:srgbClr val="ffffff"/>
+                </a:solidFill>
+                <a:latin typeface="Arial"/>
+                <a:ea typeface="DejaVu Sans"/>
+              </a:rPr>
+              <a:t>’</a:t>
+            </a:r>
+            <a:endParaRPr b="0" lang="en-US" sz="1800" spc="-1" strike="noStrike">
+              <a:latin typeface="Arial"/>
+            </a:endParaRPr>
+          </a:p>
+        </p:txBody>
+      </p:sp>
+      <p:sp>
+        <p:nvSpPr>
+          <p:cNvPr id="115" name=""/>
+          <p:cNvSpPr/>
+          <p:nvPr/>
+        </p:nvSpPr>
+        <p:spPr>
+          <a:xfrm flipH="1">
+            <a:off x="2521080" y="3992040"/>
+            <a:ext cx="457200" cy="228600"/>
+          </a:xfrm>
+          <a:prstGeom prst="line">
+            <a:avLst/>
+          </a:prstGeom>
+          <a:ln w="0">
+            <a:solidFill>
+              <a:srgbClr val="3465a4"/>
+            </a:solidFill>
+          </a:ln>
+        </p:spPr>
+        <p:style>
+          <a:lnRef idx="0"/>
+          <a:fillRef idx="0"/>
+          <a:effectRef idx="0"/>
+          <a:fontRef idx="minor"/>
+        </p:style>
+      </p:sp>
+      <p:sp>
+        <p:nvSpPr>
+          <p:cNvPr id="116" name=""/>
+          <p:cNvSpPr/>
+          <p:nvPr/>
+        </p:nvSpPr>
+        <p:spPr>
+          <a:xfrm flipH="1">
+            <a:off x="2929680" y="3992040"/>
+            <a:ext cx="457200" cy="360"/>
+          </a:xfrm>
+          <a:prstGeom prst="line">
+            <a:avLst/>
+          </a:prstGeom>
+          <a:ln w="0">
+            <a:solidFill>
+              <a:srgbClr val="3465a4"/>
+            </a:solidFill>
+          </a:ln>
+        </p:spPr>
+        <p:style>
+          <a:lnRef idx="0"/>
+          <a:fillRef idx="0"/>
+          <a:effectRef idx="0"/>
+          <a:fontRef idx="minor"/>
+        </p:style>
+      </p:sp>
+      <p:sp>
+        <p:nvSpPr>
+          <p:cNvPr id="117" name="Rectangle 11"/>
+          <p:cNvSpPr/>
+          <p:nvPr/>
+        </p:nvSpPr>
+        <p:spPr>
+          <a:xfrm>
+            <a:off x="3547440" y="4343400"/>
+            <a:ext cx="714240" cy="307800"/>
+          </a:xfrm>
+          <a:prstGeom prst="rect">
+            <a:avLst/>
+          </a:prstGeom>
+          <a:noFill/>
+          <a:ln>
+            <a:noFill/>
+          </a:ln>
+        </p:spPr>
+        <p:style>
+          <a:lnRef idx="2">
+            <a:schemeClr val="accent1">
+              <a:shade val="15000"/>
+            </a:schemeClr>
+          </a:lnRef>
+          <a:fillRef idx="1">
+            <a:schemeClr val="accent1"/>
+          </a:fillRef>
+          <a:effectRef idx="0">
+            <a:schemeClr val="accent1"/>
+          </a:effectRef>
+          <a:fontRef idx="minor"/>
+        </p:style>
+        <p:txBody>
+          <a:bodyPr lIns="90000" rIns="90000" tIns="45000" bIns="45000" anchor="ctr">
+            <a:noAutofit/>
+          </a:bodyPr>
+          <a:p>
+            <a:pPr algn="ctr">
+              <a:lnSpc>
+                <a:spcPct val="100000"/>
+              </a:lnSpc>
+              <a:buNone/>
+            </a:pPr>
+            <a:r>
+              <a:rPr b="0" lang="en-US" sz="1800" spc="-1" strike="noStrike">
+                <a:solidFill>
+                  <a:srgbClr val="000000"/>
+                </a:solidFill>
+                <a:latin typeface="Arial"/>
+                <a:ea typeface="DejaVu Sans"/>
+              </a:rPr>
+              <a:t>8’</a:t>
+            </a:r>
+            <a:endParaRPr b="0" lang="en-US" sz="1800" spc="-1" strike="noStrike">
+              <a:latin typeface="Arial"/>
+            </a:endParaRPr>
+          </a:p>
+        </p:txBody>
+      </p:sp>
+      <p:sp>
+        <p:nvSpPr>
+          <p:cNvPr id="118" name="Straight Arrow Connector 2"/>
+          <p:cNvSpPr/>
+          <p:nvPr/>
+        </p:nvSpPr>
+        <p:spPr>
+          <a:xfrm>
+            <a:off x="3524760" y="4240440"/>
+            <a:ext cx="20520" cy="923400"/>
           </a:xfrm>
           <a:custGeom>
             <a:avLst/>
@@ -8523,14 +8322,63 @@
       </p:sp>
       <p:sp>
         <p:nvSpPr>
-          <p:cNvPr id="107" name="Rectangle 125"/>
+          <p:cNvPr id="119" name="Straight Arrow Connector 4"/>
           <p:cNvSpPr/>
           <p:nvPr/>
         </p:nvSpPr>
         <p:spPr>
           <a:xfrm>
-            <a:off x="8199000" y="4464360"/>
-            <a:ext cx="714600" cy="308160"/>
+            <a:off x="2923560" y="5299920"/>
+            <a:ext cx="503280" cy="360"/>
+          </a:xfrm>
+          <a:custGeom>
+            <a:avLst/>
+            <a:gdLst/>
+            <a:ahLst/>
+            <a:rect l="l" t="t" r="r" b="b"/>
+            <a:pathLst>
+              <a:path w="21600" h="21600">
+                <a:moveTo>
+                  <a:pt x="0" y="0"/>
+                </a:moveTo>
+                <a:lnTo>
+                  <a:pt x="21600" y="21600"/>
+                </a:lnTo>
+              </a:path>
+            </a:pathLst>
+          </a:custGeom>
+          <a:noFill/>
+          <a:ln>
+            <a:solidFill>
+              <a:srgbClr val="4a7ebb"/>
+            </a:solidFill>
+            <a:headEnd len="med" type="triangle" w="med"/>
+            <a:tailEnd len="med" type="triangle" w="med"/>
+          </a:ln>
+        </p:spPr>
+        <p:style>
+          <a:lnRef idx="1">
+            <a:schemeClr val="accent1"/>
+          </a:lnRef>
+          <a:fillRef idx="0">
+            <a:schemeClr val="accent1"/>
+          </a:fillRef>
+          <a:effectRef idx="0">
+            <a:schemeClr val="accent1"/>
+          </a:effectRef>
+          <a:fontRef idx="minor"/>
+        </p:style>
+      </p:sp>
+      <p:sp>
+        <p:nvSpPr>
+          <p:cNvPr id="120" name="Rectangle 12"/>
+          <p:cNvSpPr/>
+          <p:nvPr/>
+        </p:nvSpPr>
+        <p:spPr>
+          <a:xfrm>
+            <a:off x="2808000" y="5290560"/>
+            <a:ext cx="714240" cy="307800"/>
           </a:xfrm>
           <a:prstGeom prst="rect">
             <a:avLst/>
@@ -8573,17 +8421,7 @@
                 <a:latin typeface="Arial"/>
                 <a:ea typeface="DejaVu Sans"/>
               </a:rPr>
-              <a:t>8’</a:t>
-            </a:r>
-            <a:r>
-              <a:rPr b="0" lang="en-US" sz="1800" spc="-1" strike="noStrike">
-                <a:solidFill>
-                  <a:srgbClr val="ffffff"/>
-                </a:solidFill>
-                <a:latin typeface="Arial"/>
-                <a:ea typeface="DejaVu Sans"/>
-              </a:rPr>
-              <a:t>’</a:t>
+              <a:t>3’</a:t>
             </a:r>
             <a:endParaRPr b="0" lang="en-US" sz="1800" spc="-1" strike="noStrike">
               <a:latin typeface="Arial"/>
@@ -8593,14 +8431,14 @@
       </p:sp>
       <p:sp>
         <p:nvSpPr>
-          <p:cNvPr id="108" name="Straight Arrow Connector 130"/>
+          <p:cNvPr id="121" name="Straight Arrow Connector 6"/>
           <p:cNvSpPr/>
           <p:nvPr/>
         </p:nvSpPr>
         <p:spPr>
-          <a:xfrm flipV="1">
-            <a:off x="7769160" y="5377680"/>
-            <a:ext cx="588960" cy="2880"/>
+          <a:xfrm>
+            <a:off x="3524760" y="5284440"/>
+            <a:ext cx="20520" cy="923400"/>
           </a:xfrm>
           <a:custGeom>
             <a:avLst/>
@@ -8642,14 +8480,14 @@
       </p:sp>
       <p:sp>
         <p:nvSpPr>
-          <p:cNvPr id="109" name="Rectangle 131"/>
+          <p:cNvPr id="122" name="Rectangle 13"/>
           <p:cNvSpPr/>
           <p:nvPr/>
         </p:nvSpPr>
         <p:spPr>
           <a:xfrm>
-            <a:off x="7841160" y="5357160"/>
-            <a:ext cx="555840" cy="308160"/>
+            <a:off x="3627000" y="5486400"/>
+            <a:ext cx="714240" cy="307800"/>
           </a:xfrm>
           <a:prstGeom prst="rect">
             <a:avLst/>
@@ -8692,1805 +8530,7 @@
                 <a:latin typeface="Arial"/>
                 <a:ea typeface="DejaVu Sans"/>
               </a:rPr>
-              <a:t>4’</a:t>
-            </a:r>
-            <a:endParaRPr b="0" lang="en-US" sz="1800" spc="-1" strike="noStrike">
-              <a:latin typeface="Arial"/>
-            </a:endParaRPr>
-          </a:p>
-        </p:txBody>
-      </p:sp>
-      <p:sp>
-        <p:nvSpPr>
-          <p:cNvPr id="110" name="Rectangle 135"/>
-          <p:cNvSpPr/>
-          <p:nvPr/>
-        </p:nvSpPr>
-        <p:spPr>
-          <a:xfrm>
-            <a:off x="4628520" y="5576760"/>
-            <a:ext cx="3598920" cy="365040"/>
-          </a:xfrm>
-          <a:prstGeom prst="rect">
-            <a:avLst/>
-          </a:prstGeom>
-          <a:solidFill>
-            <a:srgbClr val="4f81bd"/>
-          </a:solidFill>
-          <a:ln>
-            <a:solidFill>
-              <a:srgbClr val="223852"/>
-            </a:solidFill>
-          </a:ln>
-        </p:spPr>
-        <p:style>
-          <a:lnRef idx="2">
-            <a:schemeClr val="accent1">
-              <a:shade val="15000"/>
-            </a:schemeClr>
-          </a:lnRef>
-          <a:fillRef idx="1">
-            <a:schemeClr val="accent1"/>
-          </a:fillRef>
-          <a:effectRef idx="0">
-            <a:schemeClr val="accent1"/>
-          </a:effectRef>
-          <a:fontRef idx="minor"/>
-        </p:style>
-        <p:txBody>
-          <a:bodyPr lIns="90000" rIns="90000" tIns="45000" bIns="45000" anchor="ctr">
-            <a:noAutofit/>
-          </a:bodyPr>
-          <a:p>
-            <a:pPr algn="ctr">
-              <a:lnSpc>
-                <a:spcPct val="100000"/>
-              </a:lnSpc>
-              <a:buNone/>
-            </a:pPr>
-            <a:r>
-              <a:rPr b="0" lang="en-US" sz="1800" spc="-1" strike="noStrike">
-                <a:solidFill>
-                  <a:srgbClr val="000000"/>
-                </a:solidFill>
-                <a:latin typeface="Arial"/>
-                <a:ea typeface="DejaVu Sans"/>
-              </a:rPr>
-              <a:t>Main Building (2585)</a:t>
-            </a:r>
-            <a:endParaRPr b="0" lang="en-US" sz="1800" spc="-1" strike="noStrike">
-              <a:latin typeface="Arial"/>
-            </a:endParaRPr>
-          </a:p>
-        </p:txBody>
-      </p:sp>
-      <p:sp>
-        <p:nvSpPr>
-          <p:cNvPr id="111" name="Rectangle 136"/>
-          <p:cNvSpPr/>
-          <p:nvPr/>
-        </p:nvSpPr>
-        <p:spPr>
-          <a:xfrm>
-            <a:off x="6183720" y="5997960"/>
-            <a:ext cx="901080" cy="313920"/>
-          </a:xfrm>
-          <a:prstGeom prst="rect">
-            <a:avLst/>
-          </a:prstGeom>
-          <a:noFill/>
-          <a:ln>
-            <a:noFill/>
-          </a:ln>
-        </p:spPr>
-        <p:style>
-          <a:lnRef idx="2">
-            <a:schemeClr val="accent1">
-              <a:shade val="15000"/>
-            </a:schemeClr>
-          </a:lnRef>
-          <a:fillRef idx="1">
-            <a:schemeClr val="accent1"/>
-          </a:fillRef>
-          <a:effectRef idx="0">
-            <a:schemeClr val="accent1"/>
-          </a:effectRef>
-          <a:fontRef idx="minor"/>
-        </p:style>
-        <p:txBody>
-          <a:bodyPr lIns="90000" rIns="90000" tIns="45000" bIns="45000" anchor="ctr">
-            <a:noAutofit/>
-          </a:bodyPr>
-          <a:p>
-            <a:pPr algn="ctr">
-              <a:lnSpc>
-                <a:spcPct val="100000"/>
-              </a:lnSpc>
-              <a:buNone/>
-            </a:pPr>
-            <a:r>
-              <a:rPr b="0" lang="en-US" sz="1800" spc="-1" strike="noStrike">
-                <a:solidFill>
-                  <a:srgbClr val="000000"/>
-                </a:solidFill>
-                <a:latin typeface="Arial"/>
-                <a:ea typeface="DejaVu Sans"/>
-              </a:rPr>
-              <a:t>26’</a:t>
-            </a:r>
-            <a:r>
-              <a:rPr b="0" lang="en-US" sz="1800" spc="-1" strike="noStrike">
-                <a:solidFill>
-                  <a:srgbClr val="ffffff"/>
-                </a:solidFill>
-                <a:latin typeface="Arial"/>
-                <a:ea typeface="DejaVu Sans"/>
-              </a:rPr>
-              <a:t>’</a:t>
-            </a:r>
-            <a:endParaRPr b="0" lang="en-US" sz="1800" spc="-1" strike="noStrike">
-              <a:latin typeface="Arial"/>
-            </a:endParaRPr>
-          </a:p>
-        </p:txBody>
-      </p:sp>
-      <p:sp>
-        <p:nvSpPr>
-          <p:cNvPr id="112" name="Rectangle 141"/>
-          <p:cNvSpPr/>
-          <p:nvPr/>
-        </p:nvSpPr>
-        <p:spPr>
-          <a:xfrm>
-            <a:off x="7653600" y="3946320"/>
-            <a:ext cx="804600" cy="308160"/>
-          </a:xfrm>
-          <a:prstGeom prst="rect">
-            <a:avLst/>
-          </a:prstGeom>
-          <a:noFill/>
-          <a:ln>
-            <a:noFill/>
-          </a:ln>
-        </p:spPr>
-        <p:style>
-          <a:lnRef idx="2">
-            <a:schemeClr val="accent1">
-              <a:shade val="15000"/>
-            </a:schemeClr>
-          </a:lnRef>
-          <a:fillRef idx="1">
-            <a:schemeClr val="accent1"/>
-          </a:fillRef>
-          <a:effectRef idx="0">
-            <a:schemeClr val="accent1"/>
-          </a:effectRef>
-          <a:fontRef idx="minor"/>
-        </p:style>
-        <p:txBody>
-          <a:bodyPr lIns="90000" rIns="90000" tIns="45000" bIns="45000" anchor="ctr">
-            <a:noAutofit/>
-          </a:bodyPr>
-          <a:p>
-            <a:pPr algn="ctr">
-              <a:lnSpc>
-                <a:spcPct val="100000"/>
-              </a:lnSpc>
-              <a:buNone/>
-            </a:pPr>
-            <a:r>
-              <a:rPr b="0" lang="en-US" sz="1800" spc="-1" strike="noStrike">
-                <a:solidFill>
-                  <a:srgbClr val="000000"/>
-                </a:solidFill>
-                <a:latin typeface="Arial"/>
-                <a:ea typeface="DejaVu Sans"/>
-              </a:rPr>
-              <a:t>2585</a:t>
-            </a:r>
-            <a:endParaRPr b="0" lang="en-US" sz="1800" spc="-1" strike="noStrike">
-              <a:latin typeface="Arial"/>
-            </a:endParaRPr>
-          </a:p>
-        </p:txBody>
-      </p:sp>
-      <p:sp>
-        <p:nvSpPr>
-          <p:cNvPr id="113" name="Rectangle 143"/>
-          <p:cNvSpPr/>
-          <p:nvPr/>
-        </p:nvSpPr>
-        <p:spPr>
-          <a:xfrm>
-            <a:off x="2562840" y="1159560"/>
-            <a:ext cx="588960" cy="694080"/>
-          </a:xfrm>
-          <a:prstGeom prst="rect">
-            <a:avLst/>
-          </a:prstGeom>
-          <a:solidFill>
-            <a:srgbClr val="4f81bd"/>
-          </a:solidFill>
-          <a:ln>
-            <a:solidFill>
-              <a:srgbClr val="223852"/>
-            </a:solidFill>
-          </a:ln>
-        </p:spPr>
-        <p:style>
-          <a:lnRef idx="2">
-            <a:schemeClr val="accent1">
-              <a:shade val="15000"/>
-            </a:schemeClr>
-          </a:lnRef>
-          <a:fillRef idx="1">
-            <a:schemeClr val="accent1"/>
-          </a:fillRef>
-          <a:effectRef idx="0">
-            <a:schemeClr val="accent1"/>
-          </a:effectRef>
-          <a:fontRef idx="minor"/>
-        </p:style>
-      </p:sp>
-      <p:sp>
-        <p:nvSpPr>
-          <p:cNvPr id="114" name="Rectangle 144"/>
-          <p:cNvSpPr/>
-          <p:nvPr/>
-        </p:nvSpPr>
-        <p:spPr>
-          <a:xfrm>
-            <a:off x="2540520" y="1209960"/>
-            <a:ext cx="714600" cy="308160"/>
-          </a:xfrm>
-          <a:prstGeom prst="rect">
-            <a:avLst/>
-          </a:prstGeom>
-          <a:noFill/>
-          <a:ln>
-            <a:noFill/>
-          </a:ln>
-        </p:spPr>
-        <p:style>
-          <a:lnRef idx="2">
-            <a:schemeClr val="accent1">
-              <a:shade val="15000"/>
-            </a:schemeClr>
-          </a:lnRef>
-          <a:fillRef idx="1">
-            <a:schemeClr val="accent1"/>
-          </a:fillRef>
-          <a:effectRef idx="0">
-            <a:schemeClr val="accent1"/>
-          </a:effectRef>
-          <a:fontRef idx="minor"/>
-        </p:style>
-        <p:txBody>
-          <a:bodyPr lIns="90000" rIns="90000" tIns="45000" bIns="45000" anchor="ctr">
-            <a:noAutofit/>
-          </a:bodyPr>
-          <a:p>
-            <a:pPr algn="ctr">
-              <a:lnSpc>
-                <a:spcPct val="100000"/>
-              </a:lnSpc>
-              <a:buNone/>
-            </a:pPr>
-            <a:r>
-              <a:rPr b="0" lang="en-US" sz="1800" spc="-1" strike="noStrike">
-                <a:solidFill>
-                  <a:srgbClr val="000000"/>
-                </a:solidFill>
-                <a:latin typeface="Arial"/>
-                <a:ea typeface="DejaVu Sans"/>
-              </a:rPr>
-              <a:t>2583</a:t>
-            </a:r>
-            <a:endParaRPr b="0" lang="en-US" sz="1800" spc="-1" strike="noStrike">
-              <a:latin typeface="Arial"/>
-            </a:endParaRPr>
-          </a:p>
-        </p:txBody>
-      </p:sp>
-      <p:sp>
-        <p:nvSpPr>
-          <p:cNvPr id="115" name="Straight Connector 148"/>
-          <p:cNvSpPr/>
-          <p:nvPr/>
-        </p:nvSpPr>
-        <p:spPr>
-          <a:xfrm flipH="1" flipV="1">
-            <a:off x="2726640" y="1843560"/>
-            <a:ext cx="394920" cy="180720"/>
-          </a:xfrm>
-          <a:prstGeom prst="line">
-            <a:avLst/>
-          </a:prstGeom>
-          <a:ln>
-            <a:solidFill>
-              <a:srgbClr val="4a7ebb"/>
-            </a:solidFill>
-          </a:ln>
-        </p:spPr>
-        <p:style>
-          <a:lnRef idx="1">
-            <a:schemeClr val="accent1"/>
-          </a:lnRef>
-          <a:fillRef idx="0">
-            <a:schemeClr val="accent1"/>
-          </a:fillRef>
-          <a:effectRef idx="0">
-            <a:schemeClr val="accent1"/>
-          </a:effectRef>
-          <a:fontRef idx="minor"/>
-        </p:style>
-      </p:sp>
-      <p:sp>
-        <p:nvSpPr>
-          <p:cNvPr id="116" name="Straight Arrow Connector 5"/>
-          <p:cNvSpPr/>
-          <p:nvPr/>
-        </p:nvSpPr>
-        <p:spPr>
-          <a:xfrm>
-            <a:off x="3297240" y="1179000"/>
-            <a:ext cx="360" cy="684360"/>
-          </a:xfrm>
-          <a:custGeom>
-            <a:avLst/>
-            <a:gdLst/>
-            <a:ahLst/>
-            <a:rect l="l" t="t" r="r" b="b"/>
-            <a:pathLst>
-              <a:path w="21600" h="21600">
-                <a:moveTo>
-                  <a:pt x="0" y="0"/>
-                </a:moveTo>
-                <a:lnTo>
-                  <a:pt x="21600" y="21600"/>
-                </a:lnTo>
-              </a:path>
-            </a:pathLst>
-          </a:custGeom>
-          <a:noFill/>
-          <a:ln>
-            <a:solidFill>
-              <a:srgbClr val="4a7ebb"/>
-            </a:solidFill>
-            <a:headEnd len="med" type="triangle" w="med"/>
-            <a:tailEnd len="med" type="triangle" w="med"/>
-          </a:ln>
-        </p:spPr>
-        <p:style>
-          <a:lnRef idx="1">
-            <a:schemeClr val="accent1"/>
-          </a:lnRef>
-          <a:fillRef idx="0">
-            <a:schemeClr val="accent1"/>
-          </a:fillRef>
-          <a:effectRef idx="0">
-            <a:schemeClr val="accent1"/>
-          </a:effectRef>
-          <a:fontRef idx="minor"/>
-        </p:style>
-      </p:sp>
-      <p:sp>
-        <p:nvSpPr>
-          <p:cNvPr id="117" name="Rectangle 6"/>
-          <p:cNvSpPr/>
-          <p:nvPr/>
-        </p:nvSpPr>
-        <p:spPr>
-          <a:xfrm>
-            <a:off x="3058200" y="1255320"/>
-            <a:ext cx="714600" cy="308160"/>
-          </a:xfrm>
-          <a:prstGeom prst="rect">
-            <a:avLst/>
-          </a:prstGeom>
-          <a:noFill/>
-          <a:ln>
-            <a:noFill/>
-          </a:ln>
-        </p:spPr>
-        <p:style>
-          <a:lnRef idx="2">
-            <a:schemeClr val="accent1">
-              <a:shade val="15000"/>
-            </a:schemeClr>
-          </a:lnRef>
-          <a:fillRef idx="1">
-            <a:schemeClr val="accent1"/>
-          </a:fillRef>
-          <a:effectRef idx="0">
-            <a:schemeClr val="accent1"/>
-          </a:effectRef>
-          <a:fontRef idx="minor"/>
-        </p:style>
-        <p:txBody>
-          <a:bodyPr lIns="90000" rIns="90000" tIns="45000" bIns="45000" anchor="ctr">
-            <a:noAutofit/>
-          </a:bodyPr>
-          <a:p>
-            <a:pPr algn="ctr">
-              <a:lnSpc>
-                <a:spcPct val="100000"/>
-              </a:lnSpc>
-              <a:buNone/>
-            </a:pPr>
-            <a:r>
-              <a:rPr b="0" lang="en-US" sz="1800" spc="-1" strike="noStrike">
-                <a:solidFill>
-                  <a:srgbClr val="000000"/>
-                </a:solidFill>
-                <a:latin typeface="Arial"/>
-                <a:ea typeface="DejaVu Sans"/>
-              </a:rPr>
-              <a:t>5’</a:t>
-            </a:r>
-            <a:r>
-              <a:rPr b="0" lang="en-US" sz="1800" spc="-1" strike="noStrike">
-                <a:solidFill>
-                  <a:srgbClr val="ffffff"/>
-                </a:solidFill>
-                <a:latin typeface="Arial"/>
-                <a:ea typeface="DejaVu Sans"/>
-              </a:rPr>
-              <a:t>’</a:t>
-            </a:r>
-            <a:endParaRPr b="0" lang="en-US" sz="1800" spc="-1" strike="noStrike">
-              <a:latin typeface="Arial"/>
-            </a:endParaRPr>
-          </a:p>
-        </p:txBody>
-      </p:sp>
-      <p:sp>
-        <p:nvSpPr>
-          <p:cNvPr id="118" name="Straight Arrow Connector 8"/>
-          <p:cNvSpPr/>
-          <p:nvPr/>
-        </p:nvSpPr>
-        <p:spPr>
-          <a:xfrm>
-            <a:off x="2575800" y="1962360"/>
-            <a:ext cx="599760" cy="360"/>
-          </a:xfrm>
-          <a:custGeom>
-            <a:avLst/>
-            <a:gdLst/>
-            <a:ahLst/>
-            <a:rect l="l" t="t" r="r" b="b"/>
-            <a:pathLst>
-              <a:path w="21600" h="21600">
-                <a:moveTo>
-                  <a:pt x="0" y="0"/>
-                </a:moveTo>
-                <a:lnTo>
-                  <a:pt x="21600" y="21600"/>
-                </a:lnTo>
-              </a:path>
-            </a:pathLst>
-          </a:custGeom>
-          <a:noFill/>
-          <a:ln>
-            <a:solidFill>
-              <a:srgbClr val="4a7ebb"/>
-            </a:solidFill>
-            <a:headEnd len="med" type="triangle" w="med"/>
-            <a:tailEnd len="med" type="triangle" w="med"/>
-          </a:ln>
-        </p:spPr>
-        <p:style>
-          <a:lnRef idx="1">
-            <a:schemeClr val="accent1"/>
-          </a:lnRef>
-          <a:fillRef idx="0">
-            <a:schemeClr val="accent1"/>
-          </a:fillRef>
-          <a:effectRef idx="0">
-            <a:schemeClr val="accent1"/>
-          </a:effectRef>
-          <a:fontRef idx="minor"/>
-        </p:style>
-      </p:sp>
-      <p:sp>
-        <p:nvSpPr>
-          <p:cNvPr id="119" name="Rectangle 9"/>
-          <p:cNvSpPr/>
-          <p:nvPr/>
-        </p:nvSpPr>
-        <p:spPr>
-          <a:xfrm>
-            <a:off x="2568600" y="1917000"/>
-            <a:ext cx="714600" cy="308160"/>
-          </a:xfrm>
-          <a:prstGeom prst="rect">
-            <a:avLst/>
-          </a:prstGeom>
-          <a:noFill/>
-          <a:ln>
-            <a:noFill/>
-          </a:ln>
-        </p:spPr>
-        <p:style>
-          <a:lnRef idx="2">
-            <a:schemeClr val="accent1">
-              <a:shade val="15000"/>
-            </a:schemeClr>
-          </a:lnRef>
-          <a:fillRef idx="1">
-            <a:schemeClr val="accent1"/>
-          </a:fillRef>
-          <a:effectRef idx="0">
-            <a:schemeClr val="accent1"/>
-          </a:effectRef>
-          <a:fontRef idx="minor"/>
-        </p:style>
-        <p:txBody>
-          <a:bodyPr lIns="90000" rIns="90000" tIns="45000" bIns="45000" anchor="ctr">
-            <a:noAutofit/>
-          </a:bodyPr>
-          <a:p>
-            <a:pPr algn="ctr">
-              <a:lnSpc>
-                <a:spcPct val="100000"/>
-              </a:lnSpc>
-              <a:buNone/>
-            </a:pPr>
-            <a:r>
-              <a:rPr b="0" lang="en-US" sz="1800" spc="-1" strike="noStrike">
-                <a:solidFill>
-                  <a:srgbClr val="000000"/>
-                </a:solidFill>
-                <a:latin typeface="Arial"/>
-                <a:ea typeface="DejaVu Sans"/>
-              </a:rPr>
-              <a:t>4’</a:t>
-            </a:r>
-            <a:endParaRPr b="0" lang="en-US" sz="1800" spc="-1" strike="noStrike">
-              <a:latin typeface="Arial"/>
-            </a:endParaRPr>
-          </a:p>
-        </p:txBody>
-      </p:sp>
-      <p:sp>
-        <p:nvSpPr>
-          <p:cNvPr id="120" name="Rectangle: Rounded Corners 28"/>
-          <p:cNvSpPr/>
-          <p:nvPr/>
-        </p:nvSpPr>
-        <p:spPr>
-          <a:xfrm>
-            <a:off x="5194800" y="2624760"/>
-            <a:ext cx="2283840" cy="534240"/>
-          </a:xfrm>
-          <a:prstGeom prst="roundRect">
-            <a:avLst>
-              <a:gd name="adj" fmla="val 16667"/>
-            </a:avLst>
-          </a:prstGeom>
-          <a:solidFill>
-            <a:srgbClr val="4f81bd"/>
-          </a:solidFill>
-          <a:ln>
-            <a:solidFill>
-              <a:srgbClr val="223852"/>
-            </a:solidFill>
-          </a:ln>
-        </p:spPr>
-        <p:style>
-          <a:lnRef idx="2">
-            <a:schemeClr val="accent1">
-              <a:shade val="15000"/>
-            </a:schemeClr>
-          </a:lnRef>
-          <a:fillRef idx="1">
-            <a:schemeClr val="accent1"/>
-          </a:fillRef>
-          <a:effectRef idx="0">
-            <a:schemeClr val="accent1"/>
-          </a:effectRef>
-          <a:fontRef idx="minor"/>
-        </p:style>
-        <p:txBody>
-          <a:bodyPr lIns="90000" rIns="90000" tIns="45000" bIns="45000" anchor="ctr">
-            <a:noAutofit/>
-          </a:bodyPr>
-          <a:p>
-            <a:pPr algn="ctr">
-              <a:lnSpc>
-                <a:spcPct val="100000"/>
-              </a:lnSpc>
-              <a:buNone/>
-            </a:pPr>
-            <a:r>
-              <a:rPr b="0" lang="en-US" sz="1800" spc="-1" strike="noStrike">
-                <a:solidFill>
-                  <a:srgbClr val="000000"/>
-                </a:solidFill>
-                <a:latin typeface="Arial"/>
-                <a:ea typeface="DejaVu Sans"/>
-              </a:rPr>
-              <a:t>2583 Car</a:t>
-            </a:r>
-            <a:endParaRPr b="0" lang="en-US" sz="1800" spc="-1" strike="noStrike">
-              <a:latin typeface="Arial"/>
-            </a:endParaRPr>
-          </a:p>
-        </p:txBody>
-      </p:sp>
-      <p:sp>
-        <p:nvSpPr>
-          <p:cNvPr id="121" name="Rectangle: Rounded Corners 29"/>
-          <p:cNvSpPr/>
-          <p:nvPr/>
-        </p:nvSpPr>
-        <p:spPr>
-          <a:xfrm>
-            <a:off x="5194800" y="2031840"/>
-            <a:ext cx="2261520" cy="534240"/>
-          </a:xfrm>
-          <a:prstGeom prst="roundRect">
-            <a:avLst>
-              <a:gd name="adj" fmla="val 16667"/>
-            </a:avLst>
-          </a:prstGeom>
-          <a:solidFill>
-            <a:srgbClr val="4f81bd"/>
-          </a:solidFill>
-          <a:ln>
-            <a:solidFill>
-              <a:srgbClr val="223852"/>
-            </a:solidFill>
-          </a:ln>
-        </p:spPr>
-        <p:style>
-          <a:lnRef idx="2">
-            <a:schemeClr val="accent1">
-              <a:shade val="15000"/>
-            </a:schemeClr>
-          </a:lnRef>
-          <a:fillRef idx="1">
-            <a:schemeClr val="accent1"/>
-          </a:fillRef>
-          <a:effectRef idx="0">
-            <a:schemeClr val="accent1"/>
-          </a:effectRef>
-          <a:fontRef idx="minor"/>
-        </p:style>
-        <p:txBody>
-          <a:bodyPr lIns="90000" rIns="90000" tIns="45000" bIns="45000" anchor="ctr">
-            <a:noAutofit/>
-          </a:bodyPr>
-          <a:p>
-            <a:pPr algn="ctr">
-              <a:lnSpc>
-                <a:spcPct val="100000"/>
-              </a:lnSpc>
-              <a:buNone/>
-            </a:pPr>
-            <a:r>
-              <a:rPr b="0" lang="en-US" sz="1800" spc="-1" strike="noStrike">
-                <a:solidFill>
-                  <a:srgbClr val="000000"/>
-                </a:solidFill>
-                <a:latin typeface="Arial"/>
-                <a:ea typeface="DejaVu Sans"/>
-              </a:rPr>
-              <a:t>2585 Car</a:t>
-            </a:r>
-            <a:endParaRPr b="0" lang="en-US" sz="1800" spc="-1" strike="noStrike">
-              <a:latin typeface="Arial"/>
-            </a:endParaRPr>
-          </a:p>
-        </p:txBody>
-      </p:sp>
-      <p:sp>
-        <p:nvSpPr>
-          <p:cNvPr id="122" name="Rectangle 30"/>
-          <p:cNvSpPr/>
-          <p:nvPr/>
-        </p:nvSpPr>
-        <p:spPr>
-          <a:xfrm>
-            <a:off x="2562840" y="1143000"/>
-            <a:ext cx="6579360" cy="5712840"/>
-          </a:xfrm>
-          <a:prstGeom prst="rect">
-            <a:avLst/>
-          </a:prstGeom>
-          <a:noFill/>
-          <a:ln>
-            <a:solidFill>
-              <a:srgbClr val="223852"/>
-            </a:solidFill>
-          </a:ln>
-        </p:spPr>
-        <p:style>
-          <a:lnRef idx="2">
-            <a:schemeClr val="accent1">
-              <a:shade val="15000"/>
-            </a:schemeClr>
-          </a:lnRef>
-          <a:fillRef idx="1">
-            <a:schemeClr val="accent1"/>
-          </a:fillRef>
-          <a:effectRef idx="0">
-            <a:schemeClr val="accent1"/>
-          </a:effectRef>
-          <a:fontRef idx="minor"/>
-        </p:style>
-      </p:sp>
-      <p:sp>
-        <p:nvSpPr>
-          <p:cNvPr id="123" name="Straight Arrow Connector 64"/>
-          <p:cNvSpPr/>
-          <p:nvPr/>
-        </p:nvSpPr>
-        <p:spPr>
-          <a:xfrm>
-            <a:off x="4572000" y="6171840"/>
-            <a:ext cx="4253760" cy="360"/>
-          </a:xfrm>
-          <a:custGeom>
-            <a:avLst/>
-            <a:gdLst/>
-            <a:ahLst/>
-            <a:rect l="l" t="t" r="r" b="b"/>
-            <a:pathLst>
-              <a:path w="21600" h="21600">
-                <a:moveTo>
-                  <a:pt x="0" y="0"/>
-                </a:moveTo>
-                <a:lnTo>
-                  <a:pt x="21600" y="21600"/>
-                </a:lnTo>
-              </a:path>
-            </a:pathLst>
-          </a:custGeom>
-          <a:noFill/>
-          <a:ln>
-            <a:solidFill>
-              <a:srgbClr val="000000"/>
-            </a:solidFill>
-            <a:headEnd len="med" type="triangle" w="med"/>
-            <a:tailEnd len="med" type="triangle" w="med"/>
-          </a:ln>
-        </p:spPr>
-        <p:style>
-          <a:lnRef idx="1">
-            <a:schemeClr val="accent1"/>
-          </a:lnRef>
-          <a:fillRef idx="0">
-            <a:schemeClr val="accent1"/>
-          </a:fillRef>
-          <a:effectRef idx="0">
-            <a:schemeClr val="accent1"/>
-          </a:effectRef>
-          <a:fontRef idx="minor"/>
-        </p:style>
-      </p:sp>
-      <p:sp>
-        <p:nvSpPr>
-          <p:cNvPr id="124" name="Rectangle 1"/>
-          <p:cNvSpPr/>
-          <p:nvPr/>
-        </p:nvSpPr>
-        <p:spPr>
-          <a:xfrm>
-            <a:off x="8703360" y="4464360"/>
-            <a:ext cx="714600" cy="308160"/>
-          </a:xfrm>
-          <a:prstGeom prst="rect">
-            <a:avLst/>
-          </a:prstGeom>
-          <a:noFill/>
-          <a:ln>
-            <a:noFill/>
-          </a:ln>
-        </p:spPr>
-        <p:style>
-          <a:lnRef idx="2">
-            <a:schemeClr val="accent1">
-              <a:shade val="15000"/>
-            </a:schemeClr>
-          </a:lnRef>
-          <a:fillRef idx="1">
-            <a:schemeClr val="accent1"/>
-          </a:fillRef>
-          <a:effectRef idx="0">
-            <a:schemeClr val="accent1"/>
-          </a:effectRef>
-          <a:fontRef idx="minor"/>
-        </p:style>
-        <p:txBody>
-          <a:bodyPr lIns="90000" rIns="90000" tIns="45000" bIns="45000" anchor="ctr">
-            <a:noAutofit/>
-          </a:bodyPr>
-          <a:p>
-            <a:pPr algn="ctr">
-              <a:lnSpc>
-                <a:spcPct val="100000"/>
-              </a:lnSpc>
-              <a:buNone/>
-            </a:pPr>
-            <a:r>
-              <a:rPr b="0" lang="en-US" sz="1800" spc="-1" strike="noStrike">
-                <a:solidFill>
-                  <a:srgbClr val="ffffff"/>
-                </a:solidFill>
-                <a:latin typeface="Arial"/>
-                <a:ea typeface="DejaVu Sans"/>
-              </a:rPr>
-              <a:t>2</a:t>
-            </a:r>
-            <a:r>
-              <a:rPr b="0" lang="en-US" sz="1800" spc="-1" strike="noStrike">
-                <a:solidFill>
-                  <a:srgbClr val="000000"/>
-                </a:solidFill>
-                <a:latin typeface="Arial"/>
-                <a:ea typeface="DejaVu Sans"/>
-              </a:rPr>
-              <a:t>16’</a:t>
-            </a:r>
-            <a:r>
-              <a:rPr b="0" lang="en-US" sz="1800" spc="-1" strike="noStrike">
-                <a:solidFill>
-                  <a:srgbClr val="ffffff"/>
-                </a:solidFill>
-                <a:latin typeface="Arial"/>
-                <a:ea typeface="DejaVu Sans"/>
-              </a:rPr>
-              <a:t>’</a:t>
-            </a:r>
-            <a:endParaRPr b="0" lang="en-US" sz="1800" spc="-1" strike="noStrike">
-              <a:latin typeface="Arial"/>
-            </a:endParaRPr>
-          </a:p>
-        </p:txBody>
-      </p:sp>
-      <p:sp>
-        <p:nvSpPr>
-          <p:cNvPr id="125" name="Straight Arrow Connector 1"/>
-          <p:cNvSpPr/>
-          <p:nvPr/>
-        </p:nvSpPr>
-        <p:spPr>
-          <a:xfrm>
-            <a:off x="8804880" y="3886200"/>
-            <a:ext cx="360" cy="1501920"/>
-          </a:xfrm>
-          <a:custGeom>
-            <a:avLst/>
-            <a:gdLst/>
-            <a:ahLst/>
-            <a:rect l="l" t="t" r="r" b="b"/>
-            <a:pathLst>
-              <a:path w="21600" h="21600">
-                <a:moveTo>
-                  <a:pt x="0" y="0"/>
-                </a:moveTo>
-                <a:lnTo>
-                  <a:pt x="21600" y="21600"/>
-                </a:lnTo>
-              </a:path>
-            </a:pathLst>
-          </a:custGeom>
-          <a:noFill/>
-          <a:ln>
-            <a:solidFill>
-              <a:srgbClr val="4a7ebb"/>
-            </a:solidFill>
-            <a:headEnd len="med" type="triangle" w="med"/>
-            <a:tailEnd len="med" type="triangle" w="med"/>
-          </a:ln>
-        </p:spPr>
-        <p:style>
-          <a:lnRef idx="1">
-            <a:schemeClr val="accent1"/>
-          </a:lnRef>
-          <a:fillRef idx="0">
-            <a:schemeClr val="accent1"/>
-          </a:fillRef>
-          <a:effectRef idx="0">
-            <a:schemeClr val="accent1"/>
-          </a:effectRef>
-          <a:fontRef idx="minor"/>
-        </p:style>
-      </p:sp>
-      <p:sp>
-        <p:nvSpPr>
-          <p:cNvPr id="126" name="Rectangle 2"/>
-          <p:cNvSpPr/>
-          <p:nvPr/>
-        </p:nvSpPr>
-        <p:spPr>
-          <a:xfrm>
-            <a:off x="8134200" y="5029200"/>
-            <a:ext cx="714600" cy="308160"/>
-          </a:xfrm>
-          <a:prstGeom prst="rect">
-            <a:avLst/>
-          </a:prstGeom>
-          <a:noFill/>
-          <a:ln>
-            <a:noFill/>
-          </a:ln>
-        </p:spPr>
-        <p:style>
-          <a:lnRef idx="2">
-            <a:schemeClr val="accent1">
-              <a:shade val="15000"/>
-            </a:schemeClr>
-          </a:lnRef>
-          <a:fillRef idx="1">
-            <a:schemeClr val="accent1"/>
-          </a:fillRef>
-          <a:effectRef idx="0">
-            <a:schemeClr val="accent1"/>
-          </a:effectRef>
-          <a:fontRef idx="minor"/>
-        </p:style>
-        <p:txBody>
-          <a:bodyPr lIns="90000" rIns="90000" tIns="45000" bIns="45000" anchor="ctr">
-            <a:noAutofit/>
-          </a:bodyPr>
-          <a:p>
-            <a:pPr algn="ctr">
-              <a:lnSpc>
-                <a:spcPct val="100000"/>
-              </a:lnSpc>
-              <a:buNone/>
-            </a:pPr>
-            <a:r>
-              <a:rPr b="0" lang="en-US" sz="1800" spc="-1" strike="noStrike">
-                <a:solidFill>
-                  <a:srgbClr val="000000"/>
-                </a:solidFill>
-                <a:latin typeface="Arial"/>
-                <a:ea typeface="DejaVu Sans"/>
-              </a:rPr>
-              <a:t>5’</a:t>
-            </a:r>
-            <a:endParaRPr b="0" lang="en-US" sz="1800" spc="-1" strike="noStrike">
-              <a:latin typeface="Arial"/>
-            </a:endParaRPr>
-          </a:p>
-        </p:txBody>
-      </p:sp>
-      <p:sp>
-        <p:nvSpPr>
-          <p:cNvPr id="127" name=""/>
-          <p:cNvSpPr/>
-          <p:nvPr/>
-        </p:nvSpPr>
-        <p:spPr>
-          <a:xfrm>
-            <a:off x="-1143000" y="3299760"/>
-            <a:ext cx="4570200" cy="2870640"/>
-          </a:xfrm>
-          <a:prstGeom prst="rect">
-            <a:avLst/>
-          </a:prstGeom>
-          <a:solidFill>
-            <a:srgbClr val="ffffff"/>
-          </a:solidFill>
-          <a:ln w="0">
-            <a:solidFill>
-              <a:srgbClr val="3465a4"/>
-            </a:solidFill>
-          </a:ln>
-        </p:spPr>
-        <p:style>
-          <a:lnRef idx="0"/>
-          <a:fillRef idx="0"/>
-          <a:effectRef idx="0"/>
-          <a:fontRef idx="minor"/>
-        </p:style>
-      </p:sp>
-      <p:sp>
-        <p:nvSpPr>
-          <p:cNvPr id="128" name="Rectangle 10"/>
-          <p:cNvSpPr/>
-          <p:nvPr/>
-        </p:nvSpPr>
-        <p:spPr>
-          <a:xfrm>
-            <a:off x="-1086120" y="3528360"/>
-            <a:ext cx="3598920" cy="508680"/>
-          </a:xfrm>
-          <a:prstGeom prst="rect">
-            <a:avLst/>
-          </a:prstGeom>
-          <a:solidFill>
-            <a:srgbClr val="4f81bd"/>
-          </a:solidFill>
-          <a:ln>
-            <a:solidFill>
-              <a:srgbClr val="223852"/>
-            </a:solidFill>
-          </a:ln>
-        </p:spPr>
-        <p:style>
-          <a:lnRef idx="2">
-            <a:schemeClr val="accent1">
-              <a:shade val="15000"/>
-            </a:schemeClr>
-          </a:lnRef>
-          <a:fillRef idx="1">
-            <a:schemeClr val="accent1"/>
-          </a:fillRef>
-          <a:effectRef idx="0">
-            <a:schemeClr val="accent1"/>
-          </a:effectRef>
-          <a:fontRef idx="minor"/>
-        </p:style>
-        <p:txBody>
-          <a:bodyPr lIns="90000" rIns="90000" tIns="45000" bIns="45000" anchor="ctr">
-            <a:noAutofit/>
-          </a:bodyPr>
-          <a:p>
-            <a:pPr algn="ctr">
-              <a:lnSpc>
-                <a:spcPct val="100000"/>
-              </a:lnSpc>
-              <a:buNone/>
-            </a:pPr>
-            <a:r>
-              <a:rPr b="0" lang="en-US" sz="1800" spc="-1" strike="noStrike">
-                <a:solidFill>
-                  <a:srgbClr val="000000"/>
-                </a:solidFill>
-                <a:latin typeface="Arial"/>
-                <a:ea typeface="DejaVu Sans"/>
-              </a:rPr>
-              <a:t>Main Building (2581 Alma)</a:t>
-            </a:r>
-            <a:endParaRPr b="0" lang="en-US" sz="1800" spc="-1" strike="noStrike">
-              <a:latin typeface="Arial"/>
-            </a:endParaRPr>
-          </a:p>
-        </p:txBody>
-      </p:sp>
-      <p:sp>
-        <p:nvSpPr>
-          <p:cNvPr id="129" name="Rectangle 7"/>
-          <p:cNvSpPr/>
-          <p:nvPr/>
-        </p:nvSpPr>
-        <p:spPr>
-          <a:xfrm>
-            <a:off x="2971800" y="4220640"/>
-            <a:ext cx="461880" cy="923400"/>
-          </a:xfrm>
-          <a:prstGeom prst="rect">
-            <a:avLst/>
-          </a:prstGeom>
-          <a:solidFill>
-            <a:srgbClr val="4f81bd"/>
-          </a:solidFill>
-          <a:ln>
-            <a:solidFill>
-              <a:srgbClr val="223852"/>
-            </a:solidFill>
-          </a:ln>
-        </p:spPr>
-        <p:style>
-          <a:lnRef idx="2">
-            <a:schemeClr val="accent1">
-              <a:shade val="15000"/>
-            </a:schemeClr>
-          </a:lnRef>
-          <a:fillRef idx="1">
-            <a:schemeClr val="accent1"/>
-          </a:fillRef>
-          <a:effectRef idx="0">
-            <a:schemeClr val="accent1"/>
-          </a:effectRef>
-          <a:fontRef idx="minor"/>
-        </p:style>
-      </p:sp>
-      <p:sp>
-        <p:nvSpPr>
-          <p:cNvPr id="130" name="Rectangle 8"/>
-          <p:cNvSpPr/>
-          <p:nvPr/>
-        </p:nvSpPr>
-        <p:spPr>
-          <a:xfrm>
-            <a:off x="2063880" y="4825080"/>
-            <a:ext cx="1171800" cy="308160"/>
-          </a:xfrm>
-          <a:prstGeom prst="rect">
-            <a:avLst/>
-          </a:prstGeom>
-          <a:noFill/>
-          <a:ln>
-            <a:noFill/>
-          </a:ln>
-        </p:spPr>
-        <p:style>
-          <a:lnRef idx="2">
-            <a:schemeClr val="accent1">
-              <a:shade val="15000"/>
-            </a:schemeClr>
-          </a:lnRef>
-          <a:fillRef idx="1">
-            <a:schemeClr val="accent1"/>
-          </a:fillRef>
-          <a:effectRef idx="0">
-            <a:schemeClr val="accent1"/>
-          </a:effectRef>
-          <a:fontRef idx="minor"/>
-        </p:style>
-        <p:txBody>
-          <a:bodyPr lIns="90000" rIns="90000" tIns="45000" bIns="45000" anchor="ctr">
-            <a:noAutofit/>
-          </a:bodyPr>
-          <a:p>
-            <a:pPr algn="ctr">
-              <a:lnSpc>
-                <a:spcPct val="100000"/>
-              </a:lnSpc>
-              <a:buNone/>
-            </a:pPr>
-            <a:r>
-              <a:rPr b="0" lang="en-US" sz="1800" spc="-1" strike="noStrike">
-                <a:solidFill>
-                  <a:srgbClr val="000000"/>
-                </a:solidFill>
-                <a:latin typeface="Arial"/>
-                <a:ea typeface="DejaVu Sans"/>
-              </a:rPr>
-              <a:t>2581</a:t>
-            </a:r>
-            <a:r>
-              <a:rPr b="0" lang="en-US" sz="1800" spc="-1" strike="noStrike">
-                <a:solidFill>
-                  <a:srgbClr val="ffffff"/>
-                </a:solidFill>
-                <a:latin typeface="Arial"/>
-                <a:ea typeface="DejaVu Sans"/>
-              </a:rPr>
-              <a:t>’</a:t>
-            </a:r>
-            <a:endParaRPr b="0" lang="en-US" sz="1800" spc="-1" strike="noStrike">
-              <a:latin typeface="Arial"/>
-            </a:endParaRPr>
-          </a:p>
-        </p:txBody>
-      </p:sp>
-      <p:sp>
-        <p:nvSpPr>
-          <p:cNvPr id="131" name=""/>
-          <p:cNvSpPr/>
-          <p:nvPr/>
-        </p:nvSpPr>
-        <p:spPr>
-          <a:xfrm flipH="1">
-            <a:off x="2521080" y="3992040"/>
-            <a:ext cx="457200" cy="228600"/>
-          </a:xfrm>
-          <a:prstGeom prst="line">
-            <a:avLst/>
-          </a:prstGeom>
-          <a:ln w="0">
-            <a:solidFill>
-              <a:srgbClr val="3465a4"/>
-            </a:solidFill>
-          </a:ln>
-        </p:spPr>
-        <p:style>
-          <a:lnRef idx="0"/>
-          <a:fillRef idx="0"/>
-          <a:effectRef idx="0"/>
-          <a:fontRef idx="minor"/>
-        </p:style>
-      </p:sp>
-      <p:sp>
-        <p:nvSpPr>
-          <p:cNvPr id="132" name=""/>
-          <p:cNvSpPr/>
-          <p:nvPr/>
-        </p:nvSpPr>
-        <p:spPr>
-          <a:xfrm flipH="1">
-            <a:off x="2929680" y="3992040"/>
-            <a:ext cx="457200" cy="360"/>
-          </a:xfrm>
-          <a:prstGeom prst="line">
-            <a:avLst/>
-          </a:prstGeom>
-          <a:ln w="0">
-            <a:solidFill>
-              <a:srgbClr val="3465a4"/>
-            </a:solidFill>
-          </a:ln>
-        </p:spPr>
-        <p:style>
-          <a:lnRef idx="0"/>
-          <a:fillRef idx="0"/>
-          <a:effectRef idx="0"/>
-          <a:fontRef idx="minor"/>
-        </p:style>
-      </p:sp>
-      <p:sp>
-        <p:nvSpPr>
-          <p:cNvPr id="133" name="Rectangle 11"/>
-          <p:cNvSpPr/>
-          <p:nvPr/>
-        </p:nvSpPr>
-        <p:spPr>
-          <a:xfrm>
-            <a:off x="3547440" y="4343400"/>
-            <a:ext cx="714600" cy="308160"/>
-          </a:xfrm>
-          <a:prstGeom prst="rect">
-            <a:avLst/>
-          </a:prstGeom>
-          <a:noFill/>
-          <a:ln>
-            <a:noFill/>
-          </a:ln>
-        </p:spPr>
-        <p:style>
-          <a:lnRef idx="2">
-            <a:schemeClr val="accent1">
-              <a:shade val="15000"/>
-            </a:schemeClr>
-          </a:lnRef>
-          <a:fillRef idx="1">
-            <a:schemeClr val="accent1"/>
-          </a:fillRef>
-          <a:effectRef idx="0">
-            <a:schemeClr val="accent1"/>
-          </a:effectRef>
-          <a:fontRef idx="minor"/>
-        </p:style>
-        <p:txBody>
-          <a:bodyPr lIns="90000" rIns="90000" tIns="45000" bIns="45000" anchor="ctr">
-            <a:noAutofit/>
-          </a:bodyPr>
-          <a:p>
-            <a:pPr algn="ctr">
-              <a:lnSpc>
-                <a:spcPct val="100000"/>
-              </a:lnSpc>
-              <a:buNone/>
-            </a:pPr>
-            <a:r>
-              <a:rPr b="0" lang="en-US" sz="1800" spc="-1" strike="noStrike">
-                <a:solidFill>
-                  <a:srgbClr val="000000"/>
-                </a:solidFill>
-                <a:latin typeface="Arial"/>
-                <a:ea typeface="DejaVu Sans"/>
-              </a:rPr>
-              <a:t>8’</a:t>
-            </a:r>
-            <a:endParaRPr b="0" lang="en-US" sz="1800" spc="-1" strike="noStrike">
-              <a:latin typeface="Arial"/>
-            </a:endParaRPr>
-          </a:p>
-        </p:txBody>
-      </p:sp>
-      <p:sp>
-        <p:nvSpPr>
-          <p:cNvPr id="134" name="Straight Arrow Connector 2"/>
-          <p:cNvSpPr/>
-          <p:nvPr/>
-        </p:nvSpPr>
-        <p:spPr>
-          <a:xfrm>
-            <a:off x="3524760" y="4240440"/>
-            <a:ext cx="20880" cy="923760"/>
-          </a:xfrm>
-          <a:custGeom>
-            <a:avLst/>
-            <a:gdLst/>
-            <a:ahLst/>
-            <a:rect l="l" t="t" r="r" b="b"/>
-            <a:pathLst>
-              <a:path w="21600" h="21600">
-                <a:moveTo>
-                  <a:pt x="0" y="0"/>
-                </a:moveTo>
-                <a:lnTo>
-                  <a:pt x="21600" y="21600"/>
-                </a:lnTo>
-              </a:path>
-            </a:pathLst>
-          </a:custGeom>
-          <a:noFill/>
-          <a:ln>
-            <a:solidFill>
-              <a:srgbClr val="4a7ebb"/>
-            </a:solidFill>
-            <a:headEnd len="med" type="triangle" w="med"/>
-            <a:tailEnd len="med" type="triangle" w="med"/>
-          </a:ln>
-        </p:spPr>
-        <p:style>
-          <a:lnRef idx="1">
-            <a:schemeClr val="accent1"/>
-          </a:lnRef>
-          <a:fillRef idx="0">
-            <a:schemeClr val="accent1"/>
-          </a:fillRef>
-          <a:effectRef idx="0">
-            <a:schemeClr val="accent1"/>
-          </a:effectRef>
-          <a:fontRef idx="minor"/>
-        </p:style>
-      </p:sp>
-      <p:sp>
-        <p:nvSpPr>
-          <p:cNvPr id="135" name="Straight Arrow Connector 4"/>
-          <p:cNvSpPr/>
-          <p:nvPr/>
-        </p:nvSpPr>
-        <p:spPr>
-          <a:xfrm>
-            <a:off x="2923560" y="5299920"/>
-            <a:ext cx="503640" cy="360"/>
-          </a:xfrm>
-          <a:custGeom>
-            <a:avLst/>
-            <a:gdLst/>
-            <a:ahLst/>
-            <a:rect l="l" t="t" r="r" b="b"/>
-            <a:pathLst>
-              <a:path w="21600" h="21600">
-                <a:moveTo>
-                  <a:pt x="0" y="0"/>
-                </a:moveTo>
-                <a:lnTo>
-                  <a:pt x="21600" y="21600"/>
-                </a:lnTo>
-              </a:path>
-            </a:pathLst>
-          </a:custGeom>
-          <a:noFill/>
-          <a:ln>
-            <a:solidFill>
-              <a:srgbClr val="4a7ebb"/>
-            </a:solidFill>
-            <a:headEnd len="med" type="triangle" w="med"/>
-            <a:tailEnd len="med" type="triangle" w="med"/>
-          </a:ln>
-        </p:spPr>
-        <p:style>
-          <a:lnRef idx="1">
-            <a:schemeClr val="accent1"/>
-          </a:lnRef>
-          <a:fillRef idx="0">
-            <a:schemeClr val="accent1"/>
-          </a:fillRef>
-          <a:effectRef idx="0">
-            <a:schemeClr val="accent1"/>
-          </a:effectRef>
-          <a:fontRef idx="minor"/>
-        </p:style>
-      </p:sp>
-      <p:sp>
-        <p:nvSpPr>
-          <p:cNvPr id="136" name="Rectangle 12"/>
-          <p:cNvSpPr/>
-          <p:nvPr/>
-        </p:nvSpPr>
-        <p:spPr>
-          <a:xfrm>
-            <a:off x="2808000" y="5290560"/>
-            <a:ext cx="714600" cy="308160"/>
-          </a:xfrm>
-          <a:prstGeom prst="rect">
-            <a:avLst/>
-          </a:prstGeom>
-          <a:noFill/>
-          <a:ln>
-            <a:noFill/>
-          </a:ln>
-        </p:spPr>
-        <p:style>
-          <a:lnRef idx="2">
-            <a:schemeClr val="accent1">
-              <a:shade val="15000"/>
-            </a:schemeClr>
-          </a:lnRef>
-          <a:fillRef idx="1">
-            <a:schemeClr val="accent1"/>
-          </a:fillRef>
-          <a:effectRef idx="0">
-            <a:schemeClr val="accent1"/>
-          </a:effectRef>
-          <a:fontRef idx="minor"/>
-        </p:style>
-        <p:txBody>
-          <a:bodyPr lIns="90000" rIns="90000" tIns="45000" bIns="45000" anchor="ctr">
-            <a:noAutofit/>
-          </a:bodyPr>
-          <a:p>
-            <a:pPr algn="ctr">
-              <a:lnSpc>
-                <a:spcPct val="100000"/>
-              </a:lnSpc>
-              <a:buNone/>
-            </a:pPr>
-            <a:r>
-              <a:rPr b="0" lang="en-US" sz="1800" spc="-1" strike="noStrike">
-                <a:solidFill>
-                  <a:srgbClr val="000000"/>
-                </a:solidFill>
-                <a:latin typeface="Arial"/>
-                <a:ea typeface="DejaVu Sans"/>
-              </a:rPr>
-              <a:t>3’</a:t>
-            </a:r>
-            <a:endParaRPr b="0" lang="en-US" sz="1800" spc="-1" strike="noStrike">
-              <a:latin typeface="Arial"/>
-            </a:endParaRPr>
-          </a:p>
-        </p:txBody>
-      </p:sp>
-      <p:sp>
-        <p:nvSpPr>
-          <p:cNvPr id="137" name="Straight Arrow Connector 6"/>
-          <p:cNvSpPr/>
-          <p:nvPr/>
-        </p:nvSpPr>
-        <p:spPr>
-          <a:xfrm>
-            <a:off x="3524760" y="5284440"/>
-            <a:ext cx="20880" cy="923760"/>
-          </a:xfrm>
-          <a:custGeom>
-            <a:avLst/>
-            <a:gdLst/>
-            <a:ahLst/>
-            <a:rect l="l" t="t" r="r" b="b"/>
-            <a:pathLst>
-              <a:path w="21600" h="21600">
-                <a:moveTo>
-                  <a:pt x="0" y="0"/>
-                </a:moveTo>
-                <a:lnTo>
-                  <a:pt x="21600" y="21600"/>
-                </a:lnTo>
-              </a:path>
-            </a:pathLst>
-          </a:custGeom>
-          <a:noFill/>
-          <a:ln>
-            <a:solidFill>
-              <a:srgbClr val="4a7ebb"/>
-            </a:solidFill>
-            <a:headEnd len="med" type="triangle" w="med"/>
-            <a:tailEnd len="med" type="triangle" w="med"/>
-          </a:ln>
-        </p:spPr>
-        <p:style>
-          <a:lnRef idx="1">
-            <a:schemeClr val="accent1"/>
-          </a:lnRef>
-          <a:fillRef idx="0">
-            <a:schemeClr val="accent1"/>
-          </a:fillRef>
-          <a:effectRef idx="0">
-            <a:schemeClr val="accent1"/>
-          </a:effectRef>
-          <a:fontRef idx="minor"/>
-        </p:style>
-      </p:sp>
-      <p:sp>
-        <p:nvSpPr>
-          <p:cNvPr id="138" name="Rectangle 13"/>
-          <p:cNvSpPr/>
-          <p:nvPr/>
-        </p:nvSpPr>
-        <p:spPr>
-          <a:xfrm>
-            <a:off x="3627000" y="5486400"/>
-            <a:ext cx="714600" cy="308160"/>
-          </a:xfrm>
-          <a:prstGeom prst="rect">
-            <a:avLst/>
-          </a:prstGeom>
-          <a:noFill/>
-          <a:ln>
-            <a:noFill/>
-          </a:ln>
-        </p:spPr>
-        <p:style>
-          <a:lnRef idx="2">
-            <a:schemeClr val="accent1">
-              <a:shade val="15000"/>
-            </a:schemeClr>
-          </a:lnRef>
-          <a:fillRef idx="1">
-            <a:schemeClr val="accent1"/>
-          </a:fillRef>
-          <a:effectRef idx="0">
-            <a:schemeClr val="accent1"/>
-          </a:effectRef>
-          <a:fontRef idx="minor"/>
-        </p:style>
-        <p:txBody>
-          <a:bodyPr lIns="90000" rIns="90000" tIns="45000" bIns="45000" anchor="ctr">
-            <a:noAutofit/>
-          </a:bodyPr>
-          <a:p>
-            <a:pPr algn="ctr">
-              <a:lnSpc>
-                <a:spcPct val="100000"/>
-              </a:lnSpc>
-              <a:buNone/>
-            </a:pPr>
-            <a:r>
-              <a:rPr b="0" lang="en-US" sz="1800" spc="-1" strike="noStrike">
-                <a:solidFill>
-                  <a:srgbClr val="000000"/>
-                </a:solidFill>
-                <a:latin typeface="Arial"/>
-                <a:ea typeface="DejaVu Sans"/>
-              </a:rPr>
               <a:t>&gt; 16’</a:t>
-            </a:r>
-            <a:endParaRPr b="0" lang="en-US" sz="1800" spc="-1" strike="noStrike">
-              <a:latin typeface="Arial"/>
-            </a:endParaRPr>
-          </a:p>
-        </p:txBody>
-      </p:sp>
-      <p:sp>
-        <p:nvSpPr>
-          <p:cNvPr id="139" name="Straight Arrow Connector 89"/>
-          <p:cNvSpPr/>
-          <p:nvPr/>
-        </p:nvSpPr>
-        <p:spPr>
-          <a:xfrm flipV="1">
-            <a:off x="4673520" y="5377680"/>
-            <a:ext cx="3095640" cy="1440"/>
-          </a:xfrm>
-          <a:custGeom>
-            <a:avLst/>
-            <a:gdLst/>
-            <a:ahLst/>
-            <a:rect l="l" t="t" r="r" b="b"/>
-            <a:pathLst>
-              <a:path w="21600" h="21600">
-                <a:moveTo>
-                  <a:pt x="0" y="0"/>
-                </a:moveTo>
-                <a:lnTo>
-                  <a:pt x="21600" y="21600"/>
-                </a:lnTo>
-              </a:path>
-            </a:pathLst>
-          </a:custGeom>
-          <a:noFill/>
-          <a:ln>
-            <a:solidFill>
-              <a:srgbClr val="4a7ebb"/>
-            </a:solidFill>
-            <a:headEnd len="med" type="triangle" w="med"/>
-            <a:tailEnd len="med" type="triangle" w="med"/>
-          </a:ln>
-        </p:spPr>
-        <p:style>
-          <a:lnRef idx="1">
-            <a:schemeClr val="accent1"/>
-          </a:lnRef>
-          <a:fillRef idx="0">
-            <a:schemeClr val="accent1"/>
-          </a:fillRef>
-          <a:effectRef idx="0">
-            <a:schemeClr val="accent1"/>
-          </a:effectRef>
-          <a:fontRef idx="minor"/>
-        </p:style>
-      </p:sp>
-      <p:sp>
-        <p:nvSpPr>
-          <p:cNvPr id="140" name="Rectangle 3"/>
-          <p:cNvSpPr/>
-          <p:nvPr/>
-        </p:nvSpPr>
-        <p:spPr>
-          <a:xfrm>
-            <a:off x="3549600" y="1143000"/>
-            <a:ext cx="563760" cy="694080"/>
-          </a:xfrm>
-          <a:prstGeom prst="rect">
-            <a:avLst/>
-          </a:prstGeom>
-          <a:solidFill>
-            <a:srgbClr val="4f81bd"/>
-          </a:solidFill>
-          <a:ln>
-            <a:solidFill>
-              <a:srgbClr val="223852"/>
-            </a:solidFill>
-          </a:ln>
-        </p:spPr>
-        <p:style>
-          <a:lnRef idx="2">
-            <a:schemeClr val="accent1">
-              <a:shade val="15000"/>
-            </a:schemeClr>
-          </a:lnRef>
-          <a:fillRef idx="1">
-            <a:schemeClr val="accent1"/>
-          </a:fillRef>
-          <a:effectRef idx="0">
-            <a:schemeClr val="accent1"/>
-          </a:effectRef>
-          <a:fontRef idx="minor"/>
-        </p:style>
-      </p:sp>
-      <p:sp>
-        <p:nvSpPr>
-          <p:cNvPr id="141" name="Rectangle 4"/>
-          <p:cNvSpPr/>
-          <p:nvPr/>
-        </p:nvSpPr>
-        <p:spPr>
-          <a:xfrm>
-            <a:off x="3488760" y="1204920"/>
-            <a:ext cx="714600" cy="308160"/>
-          </a:xfrm>
-          <a:prstGeom prst="rect">
-            <a:avLst/>
-          </a:prstGeom>
-          <a:noFill/>
-          <a:ln>
-            <a:noFill/>
-          </a:ln>
-        </p:spPr>
-        <p:style>
-          <a:lnRef idx="2">
-            <a:schemeClr val="accent1">
-              <a:shade val="15000"/>
-            </a:schemeClr>
-          </a:lnRef>
-          <a:fillRef idx="1">
-            <a:schemeClr val="accent1"/>
-          </a:fillRef>
-          <a:effectRef idx="0">
-            <a:schemeClr val="accent1"/>
-          </a:effectRef>
-          <a:fontRef idx="minor"/>
-        </p:style>
-        <p:txBody>
-          <a:bodyPr lIns="90000" rIns="90000" tIns="45000" bIns="45000" anchor="ctr">
-            <a:noAutofit/>
-          </a:bodyPr>
-          <a:p>
-            <a:pPr algn="ctr">
-              <a:lnSpc>
-                <a:spcPct val="100000"/>
-              </a:lnSpc>
-              <a:buNone/>
-            </a:pPr>
-            <a:r>
-              <a:rPr b="0" lang="en-US" sz="1800" spc="-1" strike="noStrike">
-                <a:solidFill>
-                  <a:srgbClr val="000000"/>
-                </a:solidFill>
-                <a:latin typeface="Arial"/>
-                <a:ea typeface="DejaVu Sans"/>
-              </a:rPr>
-              <a:t>2587</a:t>
-            </a:r>
-            <a:endParaRPr b="0" lang="en-US" sz="1800" spc="-1" strike="noStrike">
-              <a:latin typeface="Arial"/>
-            </a:endParaRPr>
-          </a:p>
-        </p:txBody>
-      </p:sp>
-      <p:sp>
-        <p:nvSpPr>
-          <p:cNvPr id="142" name="Straight Arrow Connector 7"/>
-          <p:cNvSpPr/>
-          <p:nvPr/>
-        </p:nvSpPr>
-        <p:spPr>
-          <a:xfrm>
-            <a:off x="3560040" y="1957320"/>
-            <a:ext cx="599760" cy="360"/>
-          </a:xfrm>
-          <a:custGeom>
-            <a:avLst/>
-            <a:gdLst/>
-            <a:ahLst/>
-            <a:rect l="l" t="t" r="r" b="b"/>
-            <a:pathLst>
-              <a:path w="21600" h="21600">
-                <a:moveTo>
-                  <a:pt x="0" y="0"/>
-                </a:moveTo>
-                <a:lnTo>
-                  <a:pt x="21600" y="21600"/>
-                </a:lnTo>
-              </a:path>
-            </a:pathLst>
-          </a:custGeom>
-          <a:noFill/>
-          <a:ln>
-            <a:solidFill>
-              <a:srgbClr val="4a7ebb"/>
-            </a:solidFill>
-            <a:headEnd len="med" type="triangle" w="med"/>
-            <a:tailEnd len="med" type="triangle" w="med"/>
-          </a:ln>
-        </p:spPr>
-        <p:style>
-          <a:lnRef idx="1">
-            <a:schemeClr val="accent1"/>
-          </a:lnRef>
-          <a:fillRef idx="0">
-            <a:schemeClr val="accent1"/>
-          </a:fillRef>
-          <a:effectRef idx="0">
-            <a:schemeClr val="accent1"/>
-          </a:effectRef>
-          <a:fontRef idx="minor"/>
-        </p:style>
-      </p:sp>
-      <p:sp>
-        <p:nvSpPr>
-          <p:cNvPr id="143" name="Rectangle 14"/>
-          <p:cNvSpPr/>
-          <p:nvPr/>
-        </p:nvSpPr>
-        <p:spPr>
-          <a:xfrm>
-            <a:off x="3516840" y="1911960"/>
-            <a:ext cx="714600" cy="308160"/>
-          </a:xfrm>
-          <a:prstGeom prst="rect">
-            <a:avLst/>
-          </a:prstGeom>
-          <a:noFill/>
-          <a:ln>
-            <a:noFill/>
-          </a:ln>
-        </p:spPr>
-        <p:style>
-          <a:lnRef idx="2">
-            <a:schemeClr val="accent1">
-              <a:shade val="15000"/>
-            </a:schemeClr>
-          </a:lnRef>
-          <a:fillRef idx="1">
-            <a:schemeClr val="accent1"/>
-          </a:fillRef>
-          <a:effectRef idx="0">
-            <a:schemeClr val="accent1"/>
-          </a:effectRef>
-          <a:fontRef idx="minor"/>
-        </p:style>
-        <p:txBody>
-          <a:bodyPr lIns="90000" rIns="90000" tIns="45000" bIns="45000" anchor="ctr">
-            <a:noAutofit/>
-          </a:bodyPr>
-          <a:p>
-            <a:pPr algn="ctr">
-              <a:lnSpc>
-                <a:spcPct val="100000"/>
-              </a:lnSpc>
-              <a:buNone/>
-            </a:pPr>
-            <a:r>
-              <a:rPr b="0" lang="en-US" sz="1800" spc="-1" strike="noStrike">
-                <a:solidFill>
-                  <a:srgbClr val="000000"/>
-                </a:solidFill>
-                <a:latin typeface="Arial"/>
-                <a:ea typeface="DejaVu Sans"/>
-              </a:rPr>
-              <a:t>4’</a:t>
             </a:r>
             <a:endParaRPr b="0" lang="en-US" sz="1800" spc="-1" strike="noStrike">
               <a:latin typeface="Arial"/>
@@ -10500,28 +8540,28 @@
       </p:sp>
       <p:grpSp>
         <p:nvGrpSpPr>
-          <p:cNvPr id="144" name=""/>
+          <p:cNvPr id="123" name=""/>
           <p:cNvGrpSpPr/>
           <p:nvPr/>
         </p:nvGrpSpPr>
         <p:grpSpPr>
           <a:xfrm>
-            <a:off x="7795440" y="4258800"/>
-            <a:ext cx="457560" cy="877320"/>
-            <a:chOff x="7795440" y="4258800"/>
-            <a:chExt cx="457560" cy="877320"/>
+            <a:off x="2743200" y="1224360"/>
+            <a:ext cx="880560" cy="460440"/>
+            <a:chOff x="2743200" y="1224360"/>
+            <a:chExt cx="880560" cy="460440"/>
           </a:xfrm>
         </p:grpSpPr>
         <p:sp>
           <p:nvSpPr>
-            <p:cNvPr id="145" name="Rectangle 118"/>
+            <p:cNvPr id="124" name="Rectangle 118"/>
             <p:cNvSpPr/>
             <p:nvPr/>
           </p:nvSpPr>
           <p:spPr>
-            <a:xfrm>
-              <a:off x="7795440" y="4290840"/>
-              <a:ext cx="454680" cy="809280"/>
+            <a:xfrm rot="16175400">
+              <a:off x="2953800" y="1050120"/>
+              <a:ext cx="454320" cy="808920"/>
             </a:xfrm>
             <a:prstGeom prst="rect">
               <a:avLst/>
@@ -10552,14 +8592,14 @@
         </p:sp>
         <p:sp>
           <p:nvSpPr>
-            <p:cNvPr id="146" name=""/>
+            <p:cNvPr id="125" name=""/>
             <p:cNvSpPr/>
             <p:nvPr/>
           </p:nvSpPr>
           <p:spPr>
-            <a:xfrm flipH="1">
-              <a:off x="7795800" y="4523400"/>
-              <a:ext cx="442440" cy="360"/>
+            <a:xfrm>
+              <a:off x="3007800" y="1240560"/>
+              <a:ext cx="3600" cy="442440"/>
             </a:xfrm>
             <a:prstGeom prst="line">
               <a:avLst/>
@@ -10580,14 +8620,14 @@
         </p:sp>
         <p:sp>
           <p:nvSpPr>
-            <p:cNvPr id="147" name=""/>
+            <p:cNvPr id="126" name=""/>
             <p:cNvSpPr/>
             <p:nvPr/>
           </p:nvSpPr>
           <p:spPr>
-            <a:xfrm flipV="1">
-              <a:off x="8250120" y="4258800"/>
-              <a:ext cx="2880" cy="877320"/>
+            <a:xfrm flipH="1">
+              <a:off x="2743200" y="1224360"/>
+              <a:ext cx="877320" cy="3600"/>
             </a:xfrm>
             <a:prstGeom prst="line">
               <a:avLst/>
@@ -10608,14 +8648,14 @@
         </p:sp>
         <p:sp>
           <p:nvSpPr>
-            <p:cNvPr id="148" name=""/>
+            <p:cNvPr id="127" name=""/>
             <p:cNvSpPr/>
             <p:nvPr/>
           </p:nvSpPr>
           <p:spPr>
-            <a:xfrm flipH="1">
-              <a:off x="7795800" y="4680000"/>
-              <a:ext cx="457200" cy="0"/>
+            <a:xfrm>
+              <a:off x="3164040" y="1224720"/>
+              <a:ext cx="3960" cy="457200"/>
             </a:xfrm>
             <a:prstGeom prst="line">
               <a:avLst/>
@@ -10636,14 +8676,14 @@
         </p:sp>
         <p:sp>
           <p:nvSpPr>
-            <p:cNvPr id="149" name=""/>
+            <p:cNvPr id="128" name=""/>
             <p:cNvSpPr/>
             <p:nvPr/>
           </p:nvSpPr>
           <p:spPr>
-            <a:xfrm flipH="1">
-              <a:off x="7795800" y="4872600"/>
-              <a:ext cx="442440" cy="360"/>
+            <a:xfrm>
+              <a:off x="3357000" y="1238400"/>
+              <a:ext cx="3600" cy="442080"/>
             </a:xfrm>
             <a:prstGeom prst="line">
               <a:avLst/>
@@ -10664,14 +8704,14 @@
         </p:sp>
         <p:sp>
           <p:nvSpPr>
-            <p:cNvPr id="150" name=""/>
+            <p:cNvPr id="129" name=""/>
             <p:cNvSpPr/>
             <p:nvPr/>
           </p:nvSpPr>
           <p:spPr>
-            <a:xfrm>
-              <a:off x="7795440" y="5100120"/>
-              <a:ext cx="419040" cy="0"/>
+            <a:xfrm flipH="1" flipV="1">
+              <a:off x="3584880" y="1260360"/>
+              <a:ext cx="2880" cy="419040"/>
             </a:xfrm>
             <a:prstGeom prst="line">
               <a:avLst/>
@@ -10692,14 +8732,14 @@
         </p:sp>
         <p:sp>
           <p:nvSpPr>
-            <p:cNvPr id="151" name=""/>
+            <p:cNvPr id="130" name=""/>
             <p:cNvSpPr/>
             <p:nvPr/>
           </p:nvSpPr>
           <p:spPr>
-            <a:xfrm flipV="1">
-              <a:off x="7795800" y="4290840"/>
-              <a:ext cx="418680" cy="16920"/>
+            <a:xfrm flipH="1" flipV="1">
+              <a:off x="2775240" y="1266120"/>
+              <a:ext cx="20160" cy="418680"/>
             </a:xfrm>
             <a:prstGeom prst="line">
               <a:avLst/>
@@ -10720,14 +8760,14 @@
         </p:sp>
         <p:sp>
           <p:nvSpPr>
-            <p:cNvPr id="152" name=""/>
+            <p:cNvPr id="131" name=""/>
             <p:cNvSpPr/>
             <p:nvPr/>
           </p:nvSpPr>
           <p:spPr>
-            <a:xfrm flipV="1">
-              <a:off x="7795440" y="4290480"/>
-              <a:ext cx="360" cy="845640"/>
+            <a:xfrm flipH="1">
+              <a:off x="2778120" y="1679040"/>
+              <a:ext cx="845640" cy="5760"/>
             </a:xfrm>
             <a:prstGeom prst="line">
               <a:avLst/>
@@ -10749,14 +8789,14 @@
       </p:grpSp>
       <p:sp>
         <p:nvSpPr>
-          <p:cNvPr id="153" name="Rectangle: Rounded Corners 1"/>
+          <p:cNvPr id="132" name="Rectangle: Rounded Corners 1"/>
           <p:cNvSpPr/>
           <p:nvPr/>
         </p:nvSpPr>
         <p:spPr>
           <a:xfrm>
-            <a:off x="5257800" y="4631400"/>
-            <a:ext cx="2082960" cy="505800"/>
+            <a:off x="6147000" y="4572000"/>
+            <a:ext cx="2311200" cy="505440"/>
           </a:xfrm>
           <a:prstGeom prst="roundRect">
             <a:avLst>
@@ -10815,14 +8855,14 @@
       </p:sp>
       <p:sp>
         <p:nvSpPr>
-          <p:cNvPr id="154" name="Rectangle 5"/>
+          <p:cNvPr id="133" name="Rectangle 5"/>
           <p:cNvSpPr/>
           <p:nvPr/>
         </p:nvSpPr>
         <p:spPr>
           <a:xfrm>
             <a:off x="6600600" y="5057640"/>
-            <a:ext cx="714600" cy="308160"/>
+            <a:ext cx="714240" cy="307800"/>
           </a:xfrm>
           <a:prstGeom prst="rect">
             <a:avLst/>
@@ -10875,7 +8915,7 @@
                 <a:latin typeface="Arial"/>
                 <a:ea typeface="DejaVu Sans"/>
               </a:rPr>
-              <a:t>15’</a:t>
+              <a:t>16’</a:t>
             </a:r>
             <a:r>
               <a:rPr b="0" lang="en-US" sz="1200" spc="-1" strike="noStrike">
@@ -10895,14 +8935,14 @@
       </p:sp>
       <p:sp>
         <p:nvSpPr>
-          <p:cNvPr id="155" name="Rectangle 15"/>
+          <p:cNvPr id="134" name="Rectangle 15"/>
           <p:cNvSpPr/>
           <p:nvPr/>
         </p:nvSpPr>
         <p:spPr>
           <a:xfrm>
-            <a:off x="4800600" y="5029200"/>
-            <a:ext cx="426240" cy="308160"/>
+            <a:off x="4944600" y="5029200"/>
+            <a:ext cx="425880" cy="307800"/>
           </a:xfrm>
           <a:prstGeom prst="rect">
             <a:avLst/>
@@ -10951,27 +8991,21 @@
               <a:t>6’</a:t>
             </a:r>
             <a:endParaRPr b="0" lang="en-US" sz="1300" spc="-1" strike="noStrike">
-              <a:solidFill>
-                <a:srgbClr val="000000"/>
-              </a:solidFill>
-              <a:highlight>
-                <a:srgbClr val="ffffff"/>
-              </a:highlight>
-              <a:latin typeface="Arial"/>
-            </a:endParaRPr>
-          </a:p>
-        </p:txBody>
-      </p:sp>
-      <p:sp>
-        <p:nvSpPr>
-          <p:cNvPr id="156" name="Rectangle: Rounded Corners 2"/>
+              <a:latin typeface="Arial"/>
+            </a:endParaRPr>
+          </a:p>
+        </p:txBody>
+      </p:sp>
+      <p:sp>
+        <p:nvSpPr>
+          <p:cNvPr id="135" name="Rectangle: Rounded Corners 2"/>
           <p:cNvSpPr/>
           <p:nvPr/>
         </p:nvSpPr>
         <p:spPr>
           <a:xfrm>
-            <a:off x="5257800" y="3994200"/>
-            <a:ext cx="2082960" cy="505800"/>
+            <a:off x="6147000" y="3886200"/>
+            <a:ext cx="2311200" cy="505440"/>
           </a:xfrm>
           <a:prstGeom prst="roundRect">
             <a:avLst>
@@ -11030,6 +9064,192 @@
       </p:sp>
       <p:sp>
         <p:nvSpPr>
+          <p:cNvPr id="136" name="Rectangle 3"/>
+          <p:cNvSpPr/>
+          <p:nvPr/>
+        </p:nvSpPr>
+        <p:spPr>
+          <a:xfrm>
+            <a:off x="3886200" y="1227600"/>
+            <a:ext cx="714240" cy="307800"/>
+          </a:xfrm>
+          <a:prstGeom prst="rect">
+            <a:avLst/>
+          </a:prstGeom>
+          <a:noFill/>
+          <a:ln>
+            <a:noFill/>
+          </a:ln>
+        </p:spPr>
+        <p:style>
+          <a:lnRef idx="2">
+            <a:schemeClr val="accent1">
+              <a:shade val="15000"/>
+            </a:schemeClr>
+          </a:lnRef>
+          <a:fillRef idx="1">
+            <a:schemeClr val="accent1"/>
+          </a:fillRef>
+          <a:effectRef idx="0">
+            <a:schemeClr val="accent1"/>
+          </a:effectRef>
+          <a:fontRef idx="minor"/>
+        </p:style>
+        <p:txBody>
+          <a:bodyPr lIns="90000" rIns="90000" tIns="45000" bIns="45000" anchor="ctr">
+            <a:noAutofit/>
+          </a:bodyPr>
+          <a:p>
+            <a:pPr algn="ctr">
+              <a:lnSpc>
+                <a:spcPct val="100000"/>
+              </a:lnSpc>
+              <a:buNone/>
+            </a:pPr>
+            <a:r>
+              <a:rPr b="0" lang="en-US" sz="1800" spc="-1" strike="noStrike">
+                <a:solidFill>
+                  <a:srgbClr val="000000"/>
+                </a:solidFill>
+                <a:latin typeface="Arial"/>
+                <a:ea typeface="DejaVu Sans"/>
+              </a:rPr>
+              <a:t>3’</a:t>
+            </a:r>
+            <a:endParaRPr b="0" lang="en-US" sz="1800" spc="-1" strike="noStrike">
+              <a:latin typeface="Arial"/>
+            </a:endParaRPr>
+          </a:p>
+        </p:txBody>
+      </p:sp>
+      <p:sp>
+        <p:nvSpPr>
+          <p:cNvPr id="137" name="Rectangle 2"/>
+          <p:cNvSpPr/>
+          <p:nvPr/>
+        </p:nvSpPr>
+        <p:spPr>
+          <a:xfrm>
+            <a:off x="5664600" y="3985200"/>
+            <a:ext cx="425880" cy="307800"/>
+          </a:xfrm>
+          <a:prstGeom prst="rect">
+            <a:avLst/>
+          </a:prstGeom>
+          <a:noFill/>
+          <a:ln>
+            <a:noFill/>
+          </a:ln>
+        </p:spPr>
+        <p:style>
+          <a:lnRef idx="2">
+            <a:schemeClr val="accent1">
+              <a:shade val="15000"/>
+            </a:schemeClr>
+          </a:lnRef>
+          <a:fillRef idx="1">
+            <a:schemeClr val="accent1"/>
+          </a:fillRef>
+          <a:effectRef idx="0">
+            <a:schemeClr val="accent1"/>
+          </a:effectRef>
+          <a:fontRef idx="minor"/>
+        </p:style>
+        <p:txBody>
+          <a:bodyPr lIns="90000" rIns="90000" tIns="45000" bIns="45000" anchor="ctr">
+            <a:noAutofit/>
+          </a:bodyPr>
+          <a:p>
+            <a:pPr algn="ctr">
+              <a:lnSpc>
+                <a:spcPct val="100000"/>
+              </a:lnSpc>
+              <a:buNone/>
+            </a:pPr>
+            <a:r>
+              <a:rPr b="0" lang="en-US" sz="1300" spc="-1" strike="noStrike">
+                <a:solidFill>
+                  <a:srgbClr val="000000"/>
+                </a:solidFill>
+                <a:highlight>
+                  <a:srgbClr val="ffffff"/>
+                </a:highlight>
+                <a:latin typeface="Arial"/>
+                <a:ea typeface="DejaVu Sans"/>
+              </a:rPr>
+              <a:t>6’</a:t>
+            </a:r>
+            <a:endParaRPr b="0" lang="en-US" sz="1300" spc="-1" strike="noStrike">
+              <a:latin typeface="Arial"/>
+            </a:endParaRPr>
+          </a:p>
+        </p:txBody>
+      </p:sp>
+      <p:sp>
+        <p:nvSpPr>
+          <p:cNvPr id="138" name="Rectangle 4"/>
+          <p:cNvSpPr/>
+          <p:nvPr/>
+        </p:nvSpPr>
+        <p:spPr>
+          <a:xfrm>
+            <a:off x="5664600" y="4633200"/>
+            <a:ext cx="425880" cy="307800"/>
+          </a:xfrm>
+          <a:prstGeom prst="rect">
+            <a:avLst/>
+          </a:prstGeom>
+          <a:noFill/>
+          <a:ln>
+            <a:noFill/>
+          </a:ln>
+        </p:spPr>
+        <p:style>
+          <a:lnRef idx="2">
+            <a:schemeClr val="accent1">
+              <a:shade val="15000"/>
+            </a:schemeClr>
+          </a:lnRef>
+          <a:fillRef idx="1">
+            <a:schemeClr val="accent1"/>
+          </a:fillRef>
+          <a:effectRef idx="0">
+            <a:schemeClr val="accent1"/>
+          </a:effectRef>
+          <a:fontRef idx="minor"/>
+        </p:style>
+        <p:txBody>
+          <a:bodyPr lIns="90000" rIns="90000" tIns="45000" bIns="45000" anchor="ctr">
+            <a:noAutofit/>
+          </a:bodyPr>
+          <a:p>
+            <a:pPr algn="ctr">
+              <a:lnSpc>
+                <a:spcPct val="100000"/>
+              </a:lnSpc>
+              <a:buNone/>
+            </a:pPr>
+            <a:r>
+              <a:rPr b="0" lang="en-US" sz="1300" spc="-1" strike="noStrike">
+                <a:solidFill>
+                  <a:srgbClr val="000000"/>
+                </a:solidFill>
+                <a:highlight>
+                  <a:srgbClr val="ffffff"/>
+                </a:highlight>
+                <a:latin typeface="Arial"/>
+                <a:ea typeface="DejaVu Sans"/>
+              </a:rPr>
+              <a:t>6’</a:t>
+            </a:r>
+            <a:endParaRPr b="0" lang="en-US" sz="1300" spc="-1" strike="noStrike">
+              <a:latin typeface="Arial"/>
+            </a:endParaRPr>
+          </a:p>
+        </p:txBody>
+      </p:sp>
+      <p:sp>
+        <p:nvSpPr>
           <p:cNvPr id="5" name="PlaceHolder 4"/>
           <p:cNvSpPr>
             <a:spLocks noGrp="1"/>
@@ -11042,7 +9262,7 @@
         <p:txBody>
           <a:bodyPr/>
           <a:p>
-            <a:fld id="{DD79248C-CF69-49FF-8DBE-5067376580BB}" type="datetime1">
+            <a:fld id="{BA9500FD-CC9C-49D5-AE3E-B7D24D14588F}" type="datetime1">
               <a:rPr lang="en-US"/>
               <a:t>07/04/2026</a:t>
             </a:fld>
@@ -11081,7 +9301,7 @@
       </p:grpSpPr>
       <p:sp>
         <p:nvSpPr>
-          <p:cNvPr id="157" name="PlaceHolder 1"/>
+          <p:cNvPr id="139" name="PlaceHolder 1"/>
           <p:cNvSpPr>
             <a:spLocks noGrp="1"/>
           </p:cNvSpPr>
@@ -11092,7 +9312,7 @@
         <p:spPr>
           <a:xfrm>
             <a:off x="0" y="2130480"/>
-            <a:ext cx="9106560" cy="1432440"/>
+            <a:ext cx="9106200" cy="1432080"/>
           </a:xfrm>
           <a:prstGeom prst="rect">
             <a:avLst/>
@@ -11153,7 +9373,7 @@
         <p:txBody>
           <a:bodyPr/>
           <a:p>
-            <a:fld id="{741B98DF-AAEC-4C71-8325-09C408FBB20A}" type="slidenum">
+            <a:fld id="{04BE9862-33DE-49FA-A02F-EA54294AD6AF}" type="slidenum">
               <a:t>3</a:t>
             </a:fld>
           </a:p>
@@ -11173,7 +9393,7 @@
         <p:txBody>
           <a:bodyPr/>
           <a:p>
-            <a:fld id="{BD19E276-53ED-430F-AC4D-0C990E895988}" type="datetime1">
+            <a:fld id="{9497A60D-A7A5-4C11-BAF2-BB960743A513}" type="datetime1">
               <a:rPr lang="en-US"/>
               <a:t>07/04/2026</a:t>
             </a:fld>
